--- a/第七週(10-22)/第七週_第2節_簡報.pptx
+++ b/第七週(10-22)/第七週_第2節_簡報.pptx
@@ -1209,7 +1209,7 @@
                 <a:ea typeface="Arial Unicode MS"/>
                 <a:cs typeface="Arial Unicode MS"/>
               </a:rPr>
-              <a:t>下雨起霧，光達看的距離變短，雷達幾乎不受影響，先頂上；反過來，雷達量不出高度，分不出頭頂的路牌，光達的點有高有低，補得上。第一節第五張講雨霧，第一節第七張看過雷達的點全部在同一個高度。
+              <a:t>下雨起霧，光達看的距離變短，雷達幾乎不受影響，先頂上；反過來，雷達量不出高度，分不出頭頂的路牌，光達的點有高有低，補得上。第一節第六張講雨霧，第一節第八張看過雷達的點全部在同一個高度。
 </a:t>
             </a:r>
           </a:p>
@@ -7068,7 +7068,7 @@
                           <a:ea typeface="Arial" pitchFamily="34" charset="-122"/>
                           <a:cs typeface="Arial" pitchFamily="34" charset="-120"/>
                         </a:rPr>
-                        <a:t>Tiết 1, slide 5 và 7</a:t>
+                        <a:t>Tiết 1, slide 6 và 8</a:t>
                       </a:r>
                       <a:endParaRPr lang="en-US" sz="1130" dirty="0"/>
                     </a:p>
@@ -7085,7 +7085,7 @@
                           <a:ea typeface="微軟正黑體" pitchFamily="34" charset="-122"/>
                           <a:cs typeface="微軟正黑體" pitchFamily="34" charset="-120"/>
                         </a:rPr>
-                        <a:t>第一節第五、七張</a:t>
+                        <a:t>第一節第六、八張</a:t>
                       </a:r>
                       <a:endParaRPr lang="en-US" sz="1130" dirty="0"/>
                     </a:p>

--- a/第七週(10-22)/第七週_第2節_簡報.pptx
+++ b/第七週(10-22)/第七週_第2節_簡報.pptx
@@ -1670,11 +1670,11 @@
                 <a:spcPts val="0"/>
               </a:spcBef>
               <a:spcAft>
-                <a:spcPts val="183"/>
+                <a:spcPts val="167"/>
               </a:spcAft>
             </a:pPr>
             <a:r>
-              <a:rPr sz="1100" lang="zh-TW" dirty="0">
+              <a:rPr sz="1000" lang="zh-TW" dirty="0">
                 <a:solidFill>
                   <a:srgbClr val="000000"/>
                 </a:solidFill>
@@ -1685,7 +1685,7 @@
               <a:t>先想一個情況。高速公路上，</a:t>
             </a:r>
             <a:r>
-              <a:rPr sz="1100" b="1" lang="zh-TW" dirty="0">
+              <a:rPr sz="1000" b="1" lang="zh-TW" dirty="0">
                 <a:solidFill>
                   <a:srgbClr val="000000"/>
                 </a:solidFill>
@@ -1696,7 +1696,7 @@
               <a:t>雷達說：前方六十公尺有東西。相機說：前面沒有車。</a:t>
             </a:r>
             <a:r>
-              <a:rPr sz="1100" lang="zh-TW" dirty="0">
+              <a:rPr sz="1000" lang="zh-TW" dirty="0">
                 <a:solidFill>
                   <a:srgbClr val="000000"/>
                 </a:solidFill>
@@ -1714,11 +1714,11 @@
                 <a:spcPts val="0"/>
               </a:spcBef>
               <a:spcAft>
-                <a:spcPts val="183"/>
+                <a:spcPts val="167"/>
               </a:spcAft>
             </a:pPr>
             <a:r>
-              <a:rPr sz="1100" lang="zh-TW" dirty="0">
+              <a:rPr sz="1000" lang="zh-TW" dirty="0">
                 <a:solidFill>
                   <a:srgbClr val="000000"/>
                 </a:solidFill>
@@ -1736,11 +1736,11 @@
                 <a:spcPts val="0"/>
               </a:spcBef>
               <a:spcAft>
-                <a:spcPts val="183"/>
+                <a:spcPts val="167"/>
               </a:spcAft>
             </a:pPr>
             <a:r>
-              <a:rPr sz="1100" lang="zh-TW" dirty="0">
+              <a:rPr sz="1000" lang="zh-TW" dirty="0">
                 <a:solidFill>
                   <a:srgbClr val="000000"/>
                 </a:solidFill>
@@ -1751,7 +1751,7 @@
               <a:t>先看左邊這支動畫，它會循環播兩格。上面是從旁邊看：左邊是我們的車，保險桿上的橘色小方塊是雷達，電波水平往前打出去。六十公尺外有一座頭頂的路牌。下面是</a:t>
             </a:r>
             <a:r>
-              <a:rPr sz="1100" b="1" lang="zh-TW" dirty="0">
+              <a:rPr sz="1000" b="1" lang="zh-TW" dirty="0">
                 <a:solidFill>
                   <a:srgbClr val="000000"/>
                 </a:solidFill>
@@ -1762,7 +1762,7 @@
               <a:t>雷達自己的地圖</a:t>
             </a:r>
             <a:r>
-              <a:rPr sz="1100" lang="zh-TW" dirty="0">
+              <a:rPr sz="1000" lang="zh-TW" dirty="0">
                 <a:solidFill>
                   <a:srgbClr val="000000"/>
                 </a:solidFill>
@@ -1780,22 +1780,22 @@
                 <a:spcPts val="0"/>
               </a:spcBef>
               <a:spcAft>
-                <a:spcPts val="183"/>
+                <a:spcPts val="167"/>
               </a:spcAft>
             </a:pPr>
             <a:r>
-              <a:rPr sz="1100" b="1" lang="zh-TW" dirty="0">
-                <a:solidFill>
-                  <a:srgbClr val="000000"/>
-                </a:solidFill>
-                <a:latin typeface="Arial Unicode MS"/>
-                <a:ea typeface="Arial Unicode MS"/>
-                <a:cs typeface="Arial Unicode MS"/>
-              </a:rPr>
-              <a:t>第一格，只有頭頂的路牌。</a:t>
-            </a:r>
-            <a:r>
-              <a:rPr sz="1100" lang="zh-TW" dirty="0">
+              <a:rPr sz="1000" b="1" lang="zh-TW" dirty="0">
+                <a:solidFill>
+                  <a:srgbClr val="000000"/>
+                </a:solidFill>
+                <a:latin typeface="Arial Unicode MS"/>
+                <a:ea typeface="Arial Unicode MS"/>
+                <a:cs typeface="Arial Unicode MS"/>
+              </a:rPr>
+              <a:t>第一格，假設只有頭頂的路牌，下面沒有車。</a:t>
+            </a:r>
+            <a:r>
+              <a:rPr sz="1000" lang="zh-TW" dirty="0">
                 <a:solidFill>
                   <a:srgbClr val="000000"/>
                 </a:solidFill>
@@ -1813,22 +1813,22 @@
                 <a:spcPts val="0"/>
               </a:spcBef>
               <a:spcAft>
-                <a:spcPts val="183"/>
+                <a:spcPts val="167"/>
               </a:spcAft>
             </a:pPr>
             <a:r>
-              <a:rPr sz="1100" b="1" lang="zh-TW" dirty="0">
-                <a:solidFill>
-                  <a:srgbClr val="000000"/>
-                </a:solidFill>
-                <a:latin typeface="Arial Unicode MS"/>
-                <a:ea typeface="Arial Unicode MS"/>
-                <a:cs typeface="Arial Unicode MS"/>
-              </a:rPr>
-              <a:t>第二格，路牌下面真的停了一台車。</a:t>
-            </a:r>
-            <a:r>
-              <a:rPr sz="1100" lang="zh-TW" dirty="0">
+              <a:rPr sz="1000" b="1" lang="zh-TW" dirty="0">
+                <a:solidFill>
+                  <a:srgbClr val="000000"/>
+                </a:solidFill>
+                <a:latin typeface="Arial Unicode MS"/>
+                <a:ea typeface="Arial Unicode MS"/>
+                <a:cs typeface="Arial Unicode MS"/>
+              </a:rPr>
+              <a:t>第二格，換一種可能：路牌下面真的停了一台車。</a:t>
+            </a:r>
+            <a:r>
+              <a:rPr sz="1000" lang="zh-TW" dirty="0">
                 <a:solidFill>
                   <a:srgbClr val="000000"/>
                 </a:solidFill>
@@ -1839,7 +1839,7 @@
               <a:t>電波打到車，彈回來，地圖上出現的點，</a:t>
             </a:r>
             <a:r>
-              <a:rPr sz="1100" b="1" lang="zh-TW" dirty="0">
+              <a:rPr sz="1000" b="1" lang="zh-TW" dirty="0">
                 <a:solidFill>
                   <a:srgbClr val="000000"/>
                 </a:solidFill>
@@ -1850,7 +1850,7 @@
               <a:t>位置一模一樣。</a:t>
             </a:r>
             <a:r>
-              <a:rPr sz="1100" lang="zh-TW" dirty="0">
+              <a:rPr sz="1000" lang="zh-TW" dirty="0">
                 <a:solidFill>
                   <a:srgbClr val="000000"/>
                 </a:solidFill>
@@ -1868,19 +1868,19 @@
                 <a:spcPts val="0"/>
               </a:spcBef>
               <a:spcAft>
-                <a:spcPts val="183"/>
+                <a:spcPts val="167"/>
               </a:spcAft>
             </a:pPr>
             <a:r>
-              <a:rPr sz="1100" lang="zh-TW" dirty="0">
-                <a:solidFill>
-                  <a:srgbClr val="000000"/>
-                </a:solidFill>
-                <a:latin typeface="Arial Unicode MS"/>
-                <a:ea typeface="Arial Unicode MS"/>
-                <a:cs typeface="Arial Unicode MS"/>
-              </a:rPr>
-              <a:t>所以雷達單獨回答不了這個問題，要問相機。可是相機說「沒有車」，是真的沒有，還是它沒認出來？
+              <a:rPr sz="1000" lang="zh-TW" dirty="0">
+                <a:solidFill>
+                  <a:srgbClr val="000000"/>
+                </a:solidFill>
+                <a:latin typeface="Arial Unicode MS"/>
+                <a:ea typeface="Arial Unicode MS"/>
+                <a:cs typeface="Arial Unicode MS"/>
+              </a:rPr>
+              <a:t>注意，這兩格是兩種可能的真相，不是同時發生。現在相機說「沒有車」，我們不知道真相是哪一格。
 </a:t>
             </a:r>
           </a:p>
@@ -1890,63 +1890,19 @@
                 <a:spcPts val="0"/>
               </a:spcBef>
               <a:spcAft>
-                <a:spcPts val="183"/>
+                <a:spcPts val="167"/>
               </a:spcAft>
             </a:pPr>
             <a:r>
-              <a:rPr sz="1100" lang="zh-TW" dirty="0">
-                <a:solidFill>
-                  <a:srgbClr val="000000"/>
-                </a:solidFill>
-                <a:latin typeface="Arial Unicode MS"/>
-                <a:ea typeface="Arial Unicode MS"/>
-                <a:cs typeface="Arial Unicode MS"/>
-              </a:rPr>
-              <a:t>兩邊都有道理，也都有代價。</a:t>
-            </a:r>
-            <a:r>
-              <a:rPr sz="1100" b="1" lang="zh-TW" dirty="0">
-                <a:solidFill>
-                  <a:srgbClr val="000000"/>
-                </a:solidFill>
-                <a:latin typeface="Arial Unicode MS"/>
-                <a:ea typeface="Arial Unicode MS"/>
-                <a:cs typeface="Arial Unicode MS"/>
-              </a:rPr>
-              <a:t>聽雷達</a:t>
-            </a:r>
-            <a:r>
-              <a:rPr sz="1100" lang="zh-TW" dirty="0">
-                <a:solidFill>
-                  <a:srgbClr val="000000"/>
-                </a:solidFill>
-                <a:latin typeface="Arial Unicode MS"/>
-                <a:ea typeface="Arial Unicode MS"/>
-                <a:cs typeface="Arial Unicode MS"/>
-              </a:rPr>
-              <a:t>：上一節講過，雷達量不出高度，那個「東西」可能是頭頂的路牌、天橋；每次都煞，就是幽靈煞車，後面的車可能撞上來。</a:t>
-            </a:r>
-            <a:r>
-              <a:rPr sz="1100" b="1" lang="zh-TW" dirty="0">
-                <a:solidFill>
-                  <a:srgbClr val="000000"/>
-                </a:solidFill>
-                <a:latin typeface="Arial Unicode MS"/>
-                <a:ea typeface="Arial Unicode MS"/>
-                <a:cs typeface="Arial Unicode MS"/>
-              </a:rPr>
-              <a:t>聽相機</a:t>
-            </a:r>
-            <a:r>
-              <a:rPr sz="1100" lang="zh-TW" dirty="0">
-                <a:solidFill>
-                  <a:srgbClr val="000000"/>
-                </a:solidFill>
-                <a:latin typeface="Arial Unicode MS"/>
-                <a:ea typeface="Arial Unicode MS"/>
-                <a:cs typeface="Arial Unicode MS"/>
-              </a:rPr>
-              <a:t>：相機可能沒認出來，像消防車那個事故，前面真的停了一台車。
+              <a:rPr sz="1000" lang="zh-TW" dirty="0">
+                <a:solidFill>
+                  <a:srgbClr val="000000"/>
+                </a:solidFill>
+                <a:latin typeface="Arial Unicode MS"/>
+                <a:ea typeface="Arial Unicode MS"/>
+                <a:cs typeface="Arial Unicode MS"/>
+              </a:rPr>
+              <a:t>所以雷達單獨回答不了這個問題，要問相機。可是相機說「沒有車」：如果是第一格，它說對了；如果是第二格，它是漏看了一台真的車。
 </a:t>
             </a:r>
           </a:p>
@@ -1956,19 +1912,63 @@
                 <a:spcPts val="0"/>
               </a:spcBef>
               <a:spcAft>
-                <a:spcPts val="183"/>
+                <a:spcPts val="167"/>
               </a:spcAft>
             </a:pPr>
             <a:r>
-              <a:rPr sz="1100" lang="zh-TW" dirty="0">
-                <a:solidFill>
-                  <a:srgbClr val="000000"/>
-                </a:solidFill>
-                <a:latin typeface="Arial Unicode MS"/>
-                <a:ea typeface="Arial Unicode MS"/>
-                <a:cs typeface="Arial Unicode MS"/>
-              </a:rPr>
-              <a:t>就像警察問兩個目擊證人，兩個人說的不一樣。不能只聽聲音比較大的那個，要看誰在那個位置看得比較清楚、誰以前比較可靠。
+              <a:rPr sz="1000" lang="zh-TW" dirty="0">
+                <a:solidFill>
+                  <a:srgbClr val="000000"/>
+                </a:solidFill>
+                <a:latin typeface="Arial Unicode MS"/>
+                <a:ea typeface="Arial Unicode MS"/>
+                <a:cs typeface="Arial Unicode MS"/>
+              </a:rPr>
+              <a:t>兩邊都有道理，也都有代價。</a:t>
+            </a:r>
+            <a:r>
+              <a:rPr sz="1000" b="1" lang="zh-TW" dirty="0">
+                <a:solidFill>
+                  <a:srgbClr val="000000"/>
+                </a:solidFill>
+                <a:latin typeface="Arial Unicode MS"/>
+                <a:ea typeface="Arial Unicode MS"/>
+                <a:cs typeface="Arial Unicode MS"/>
+              </a:rPr>
+              <a:t>聽雷達</a:t>
+            </a:r>
+            <a:r>
+              <a:rPr sz="1000" lang="zh-TW" dirty="0">
+                <a:solidFill>
+                  <a:srgbClr val="000000"/>
+                </a:solidFill>
+                <a:latin typeface="Arial Unicode MS"/>
+                <a:ea typeface="Arial Unicode MS"/>
+                <a:cs typeface="Arial Unicode MS"/>
+              </a:rPr>
+              <a:t>：上一節講過，雷達量不出高度，那個「東西」可能是頭頂的路牌、天橋；每次都煞，就是幽靈煞車，後面的車可能撞上來。</a:t>
+            </a:r>
+            <a:r>
+              <a:rPr sz="1000" b="1" lang="zh-TW" dirty="0">
+                <a:solidFill>
+                  <a:srgbClr val="000000"/>
+                </a:solidFill>
+                <a:latin typeface="Arial Unicode MS"/>
+                <a:ea typeface="Arial Unicode MS"/>
+                <a:cs typeface="Arial Unicode MS"/>
+              </a:rPr>
+              <a:t>聽相機</a:t>
+            </a:r>
+            <a:r>
+              <a:rPr sz="1000" lang="zh-TW" dirty="0">
+                <a:solidFill>
+                  <a:srgbClr val="000000"/>
+                </a:solidFill>
+                <a:latin typeface="Arial Unicode MS"/>
+                <a:ea typeface="Arial Unicode MS"/>
+                <a:cs typeface="Arial Unicode MS"/>
+              </a:rPr>
+              <a:t>：相機可能沒認出來，像消防車那個事故，前面真的停了一台車。
 </a:t>
             </a:r>
           </a:p>
@@ -1978,11 +1978,33 @@
                 <a:spcPts val="0"/>
               </a:spcBef>
               <a:spcAft>
-                <a:spcPts val="183"/>
+                <a:spcPts val="167"/>
               </a:spcAft>
             </a:pPr>
             <a:r>
-              <a:rPr sz="1100" lang="zh-TW" dirty="0">
+              <a:rPr sz="1000" lang="zh-TW" dirty="0">
+                <a:solidFill>
+                  <a:srgbClr val="000000"/>
+                </a:solidFill>
+                <a:latin typeface="Arial Unicode MS"/>
+                <a:ea typeface="Arial Unicode MS"/>
+                <a:cs typeface="Arial Unicode MS"/>
+              </a:rPr>
+              <a:t>就像警察問兩個目擊證人，兩個人說的不一樣。不能只聽聲音比較大的那個，要看誰在那個位置看得比較清楚、誰以前比較可靠。
+</a:t>
+            </a:r>
+          </a:p>
+          <a:p>
+            <a:pPr algn="l">
+              <a:spcBef>
+                <a:spcPts val="0"/>
+              </a:spcBef>
+              <a:spcAft>
+                <a:spcPts val="167"/>
+              </a:spcAft>
+            </a:pPr>
+            <a:r>
+              <a:rPr sz="1000" lang="zh-TW" dirty="0">
                 <a:solidFill>
                   <a:srgbClr val="000000"/>
                 </a:solidFill>
@@ -1993,7 +2015,7 @@
               <a:t>所以融合沒有一個永遠對的答案。它在做的事，是在不同情況下，</a:t>
             </a:r>
             <a:r>
-              <a:rPr sz="1100" b="1" lang="zh-TW" dirty="0">
+              <a:rPr sz="1000" b="1" lang="zh-TW" dirty="0">
                 <a:solidFill>
                   <a:srgbClr val="000000"/>
                 </a:solidFill>
@@ -2004,7 +2026,7 @@
               <a:t>選一個比較承受得起的代價</a:t>
             </a:r>
             <a:r>
-              <a:rPr sz="1100" lang="zh-TW" dirty="0">
+              <a:rPr sz="1000" lang="zh-TW" dirty="0">
                 <a:solidFill>
                   <a:srgbClr val="000000"/>
                 </a:solidFill>
@@ -2352,11 +2374,11 @@
                 <a:spcPts val="0"/>
               </a:spcBef>
               <a:spcAft>
-                <a:spcPts val="200"/>
+                <a:spcPts val="142"/>
               </a:spcAft>
             </a:pPr>
             <a:r>
-              <a:rPr sz="1200" lang="zh-TW" dirty="0">
+              <a:rPr sz="850" lang="zh-TW" dirty="0">
                 <a:solidFill>
                   <a:srgbClr val="000000"/>
                 </a:solidFill>
@@ -2367,7 +2389,7 @@
               <a:t>要合起來，第一件事：</a:t>
             </a:r>
             <a:r>
-              <a:rPr sz="1200" b="1" lang="zh-TW" dirty="0">
+              <a:rPr sz="850" b="1" lang="zh-TW" dirty="0">
                 <a:solidFill>
                   <a:srgbClr val="000000"/>
                 </a:solidFill>
@@ -2378,7 +2400,7 @@
               <a:t>大家要對齊同一個空間。</a:t>
             </a:r>
             <a:r>
-              <a:rPr sz="1200" lang="zh-TW" dirty="0">
+              <a:rPr sz="850" lang="zh-TW" dirty="0">
                 <a:solidFill>
                   <a:srgbClr val="000000"/>
                 </a:solidFill>
@@ -2396,41 +2418,41 @@
                 <a:spcPts val="0"/>
               </a:spcBef>
               <a:spcAft>
-                <a:spcPts val="200"/>
+                <a:spcPts val="142"/>
               </a:spcAft>
             </a:pPr>
             <a:r>
-              <a:rPr sz="1200" lang="zh-TW" dirty="0">
-                <a:solidFill>
-                  <a:srgbClr val="000000"/>
-                </a:solidFill>
-                <a:latin typeface="Arial Unicode MS"/>
-                <a:ea typeface="Arial Unicode MS"/>
-                <a:cs typeface="Arial Unicode MS"/>
-              </a:rPr>
-              <a:t>相機在擋風玻璃後面，光達在車頂，雷達在保險桿。每一顆都只知道「東西在我的哪個方向、多遠」，是用它自己的位置講的。要合起來，得先知道每一顆裝在車上的哪裡、朝哪個方向。這叫</a:t>
-            </a:r>
-            <a:r>
-              <a:rPr sz="1200" b="1" lang="zh-TW" dirty="0">
-                <a:solidFill>
-                  <a:srgbClr val="000000"/>
-                </a:solidFill>
-                <a:latin typeface="Arial Unicode MS"/>
-                <a:ea typeface="Arial Unicode MS"/>
-                <a:cs typeface="Arial Unicode MS"/>
-              </a:rPr>
-              <a:t>外參標定</a:t>
-            </a:r>
-            <a:r>
-              <a:rPr sz="1200" lang="zh-TW" dirty="0">
-                <a:solidFill>
-                  <a:srgbClr val="000000"/>
-                </a:solidFill>
-                <a:latin typeface="Arial Unicode MS"/>
-                <a:ea typeface="Arial Unicode MS"/>
-                <a:cs typeface="Arial Unicode MS"/>
-              </a:rPr>
-              <a:t>，第五週講過。
+              <a:rPr sz="850" lang="zh-TW" dirty="0">
+                <a:solidFill>
+                  <a:srgbClr val="000000"/>
+                </a:solidFill>
+                <a:latin typeface="Arial Unicode MS"/>
+                <a:ea typeface="Arial Unicode MS"/>
+                <a:cs typeface="Arial Unicode MS"/>
+              </a:rPr>
+              <a:t>先想一個教室裡的例子。三個同學坐在不同的位置、臉朝不同的方向。老師問：「垃圾桶在哪裡？」坐前排、面向黑板的同學說：「在我右前方兩公尺。」坐後排、面向窗戶的同學說：「在我正前方五公尺。」兩個人都沒說錯，可是你沒辦法把這兩句話直接畫在同一張教室平面圖上。你得先知道：</a:t>
+            </a:r>
+            <a:r>
+              <a:rPr sz="850" b="1" lang="zh-TW" dirty="0">
+                <a:solidFill>
+                  <a:srgbClr val="000000"/>
+                </a:solidFill>
+                <a:latin typeface="Arial Unicode MS"/>
+                <a:ea typeface="Arial Unicode MS"/>
+                <a:cs typeface="Arial Unicode MS"/>
+              </a:rPr>
+              <a:t>每個人坐在哪一個座位、臉朝哪個方向。</a:t>
+            </a:r>
+            <a:r>
+              <a:rPr sz="850" lang="zh-TW" dirty="0">
+                <a:solidFill>
+                  <a:srgbClr val="000000"/>
+                </a:solidFill>
+                <a:latin typeface="Arial Unicode MS"/>
+                <a:ea typeface="Arial Unicode MS"/>
+                <a:cs typeface="Arial Unicode MS"/>
+              </a:rPr>
+              <a:t>知道了，才能把「我的右前方兩公尺」換算成「教室的第幾排、第幾列」。
 </a:t>
             </a:r>
           </a:p>
@@ -2440,19 +2462,151 @@
                 <a:spcPts val="0"/>
               </a:spcBef>
               <a:spcAft>
-                <a:spcPts val="200"/>
+                <a:spcPts val="142"/>
               </a:spcAft>
             </a:pPr>
             <a:r>
-              <a:rPr sz="1200" lang="zh-TW" dirty="0">
-                <a:solidFill>
-                  <a:srgbClr val="000000"/>
-                </a:solidFill>
-                <a:latin typeface="Arial Unicode MS"/>
-                <a:ea typeface="Arial Unicode MS"/>
-                <a:cs typeface="Arial Unicode MS"/>
-              </a:rPr>
-              <a:t>看這兩張圖，是同一個瞬間，把光達點投到相機畫面上。顏色是距離：橘色近，藍色遠。
+              <a:rPr sz="850" lang="zh-TW" dirty="0">
+                <a:solidFill>
+                  <a:srgbClr val="000000"/>
+                </a:solidFill>
+                <a:latin typeface="Arial Unicode MS"/>
+                <a:ea typeface="Arial Unicode MS"/>
+                <a:cs typeface="Arial Unicode MS"/>
+              </a:rPr>
+              <a:t>車上完全一樣。相機在擋風玻璃後面，光達在車頂，雷達在保險桿。每一顆回報的，都是「東西在</a:t>
+            </a:r>
+            <a:r>
+              <a:rPr sz="850" b="1" lang="zh-TW" dirty="0">
+                <a:solidFill>
+                  <a:srgbClr val="000000"/>
+                </a:solidFill>
+                <a:latin typeface="Arial Unicode MS"/>
+                <a:ea typeface="Arial Unicode MS"/>
+                <a:cs typeface="Arial Unicode MS"/>
+              </a:rPr>
+              <a:t>我</a:t>
+            </a:r>
+            <a:r>
+              <a:rPr sz="850" lang="zh-TW" dirty="0">
+                <a:solidFill>
+                  <a:srgbClr val="000000"/>
+                </a:solidFill>
+                <a:latin typeface="Arial Unicode MS"/>
+                <a:ea typeface="Arial Unicode MS"/>
+                <a:cs typeface="Arial Unicode MS"/>
+              </a:rPr>
+              <a:t>的哪個方向、離</a:t>
+            </a:r>
+            <a:r>
+              <a:rPr sz="850" b="1" lang="zh-TW" dirty="0">
+                <a:solidFill>
+                  <a:srgbClr val="000000"/>
+                </a:solidFill>
+                <a:latin typeface="Arial Unicode MS"/>
+                <a:ea typeface="Arial Unicode MS"/>
+                <a:cs typeface="Arial Unicode MS"/>
+              </a:rPr>
+              <a:t>我</a:t>
+            </a:r>
+            <a:r>
+              <a:rPr sz="850" lang="zh-TW" dirty="0">
+                <a:solidFill>
+                  <a:srgbClr val="000000"/>
+                </a:solidFill>
+                <a:latin typeface="Arial Unicode MS"/>
+                <a:ea typeface="Arial Unicode MS"/>
+                <a:cs typeface="Arial Unicode MS"/>
+              </a:rPr>
+              <a:t>多遠」。要合起來，得先知道每一顆</a:t>
+            </a:r>
+            <a:r>
+              <a:rPr sz="850" b="1" lang="zh-TW" dirty="0">
+                <a:solidFill>
+                  <a:srgbClr val="000000"/>
+                </a:solidFill>
+                <a:latin typeface="Arial Unicode MS"/>
+                <a:ea typeface="Arial Unicode MS"/>
+                <a:cs typeface="Arial Unicode MS"/>
+              </a:rPr>
+              <a:t>裝在車上的哪裡、朝哪個方向</a:t>
+            </a:r>
+            <a:r>
+              <a:rPr sz="850" lang="zh-TW" dirty="0">
+                <a:solidFill>
+                  <a:srgbClr val="000000"/>
+                </a:solidFill>
+                <a:latin typeface="Arial Unicode MS"/>
+                <a:ea typeface="Arial Unicode MS"/>
+                <a:cs typeface="Arial Unicode MS"/>
+              </a:rPr>
+              <a:t>。這組數字就叫</a:t>
+            </a:r>
+            <a:r>
+              <a:rPr sz="850" b="1" lang="zh-TW" dirty="0">
+                <a:solidFill>
+                  <a:srgbClr val="000000"/>
+                </a:solidFill>
+                <a:latin typeface="Arial Unicode MS"/>
+                <a:ea typeface="Arial Unicode MS"/>
+                <a:cs typeface="Arial Unicode MS"/>
+              </a:rPr>
+              <a:t>外參</a:t>
+            </a:r>
+            <a:r>
+              <a:rPr sz="850" lang="zh-TW" dirty="0">
+                <a:solidFill>
+                  <a:srgbClr val="000000"/>
+                </a:solidFill>
+                <a:latin typeface="Arial Unicode MS"/>
+                <a:ea typeface="Arial Unicode MS"/>
+                <a:cs typeface="Arial Unicode MS"/>
+              </a:rPr>
+              <a:t>，第五週講過：它是對</a:t>
+            </a:r>
+            <a:r>
+              <a:rPr sz="850" b="1" lang="zh-TW" dirty="0">
+                <a:solidFill>
+                  <a:srgbClr val="000000"/>
+                </a:solidFill>
+                <a:latin typeface="Arial Unicode MS"/>
+                <a:ea typeface="Arial Unicode MS"/>
+                <a:cs typeface="Arial Unicode MS"/>
+              </a:rPr>
+              <a:t>車身</a:t>
+            </a:r>
+            <a:r>
+              <a:rPr sz="850" lang="zh-TW" dirty="0">
+                <a:solidFill>
+                  <a:srgbClr val="000000"/>
+                </a:solidFill>
+                <a:latin typeface="Arial Unicode MS"/>
+                <a:ea typeface="Arial Unicode MS"/>
+                <a:cs typeface="Arial Unicode MS"/>
+              </a:rPr>
+              <a:t>量的，不是對另一顆感測器。量出這組數字的工作，叫</a:t>
+            </a:r>
+            <a:r>
+              <a:rPr sz="850" b="1" lang="zh-TW" dirty="0">
+                <a:solidFill>
+                  <a:srgbClr val="000000"/>
+                </a:solidFill>
+                <a:latin typeface="Arial Unicode MS"/>
+                <a:ea typeface="Arial Unicode MS"/>
+                <a:cs typeface="Arial Unicode MS"/>
+              </a:rPr>
+              <a:t>外參標定</a:t>
+            </a:r>
+            <a:r>
+              <a:rPr sz="850" lang="zh-TW" dirty="0">
+                <a:solidFill>
+                  <a:srgbClr val="000000"/>
+                </a:solidFill>
+                <a:latin typeface="Arial Unicode MS"/>
+                <a:ea typeface="Arial Unicode MS"/>
+                <a:cs typeface="Arial Unicode MS"/>
+              </a:rPr>
+              <a:t>。
 </a:t>
             </a:r>
           </a:p>
@@ -2462,30 +2616,41 @@
                 <a:spcPts val="0"/>
               </a:spcBef>
               <a:spcAft>
-                <a:spcPts val="200"/>
+                <a:spcPts val="142"/>
               </a:spcAft>
             </a:pPr>
             <a:r>
-              <a:rPr sz="1200" b="1" lang="zh-TW" dirty="0">
-                <a:solidFill>
-                  <a:srgbClr val="000000"/>
-                </a:solidFill>
-                <a:latin typeface="Arial Unicode MS"/>
-                <a:ea typeface="Arial Unicode MS"/>
-                <a:cs typeface="Arial Unicode MS"/>
-              </a:rPr>
-              <a:t>左邊，標定正確。</a:t>
-            </a:r>
-            <a:r>
-              <a:rPr sz="1200" lang="zh-TW" dirty="0">
-                <a:solidFill>
-                  <a:srgbClr val="000000"/>
-                </a:solidFill>
-                <a:latin typeface="Arial Unicode MS"/>
-                <a:ea typeface="Arial Unicode MS"/>
-                <a:cs typeface="Arial Unicode MS"/>
-              </a:rPr>
-              <a:t>前面那台白色廂型車，身上是一排一排整齊的橘色點，大約十公尺；車子右邊的路上、遠處的樹，才是藍色。
+              <a:rPr sz="850" lang="zh-TW" dirty="0">
+                <a:solidFill>
+                  <a:srgbClr val="000000"/>
+                </a:solidFill>
+                <a:latin typeface="Arial Unicode MS"/>
+                <a:ea typeface="Arial Unicode MS"/>
+                <a:cs typeface="Arial Unicode MS"/>
+              </a:rPr>
+              <a:t>外參到底是什麼？就是每一顆六個數字。位置三個：往前多少、往左多少、離地多高。方向三個：左右轉了幾度、上下仰了幾度、有沒有歪向一邊。nuScenes 每一顆感測器都附了這六個數字，舉幾個真的：前方相機裝在後輪軸往前一點七公尺、離地一點五公尺；光達在後輪軸往前零點九公尺、離地一點八公尺；前雷達在最前面，往前三點四公尺、離地零點五公尺；左前角那顆雷達，往前二點四公尺、往左零點八公尺，而且它是</a:t>
+            </a:r>
+            <a:r>
+              <a:rPr sz="850" b="1" lang="zh-TW" dirty="0">
+                <a:solidFill>
+                  <a:srgbClr val="000000"/>
+                </a:solidFill>
+                <a:latin typeface="Arial Unicode MS"/>
+                <a:ea typeface="Arial Unicode MS"/>
+                <a:cs typeface="Arial Unicode MS"/>
+              </a:rPr>
+              <a:t>朝左邊</a:t>
+            </a:r>
+            <a:r>
+              <a:rPr sz="850" lang="zh-TW" dirty="0">
+                <a:solidFill>
+                  <a:srgbClr val="000000"/>
+                </a:solidFill>
+                <a:latin typeface="Arial Unicode MS"/>
+                <a:ea typeface="Arial Unicode MS"/>
+                <a:cs typeface="Arial Unicode MS"/>
+              </a:rPr>
+              <a:t>裝的。
 </a:t>
             </a:r>
           </a:p>
@@ -2495,30 +2660,41 @@
                 <a:spcPts val="0"/>
               </a:spcBef>
               <a:spcAft>
-                <a:spcPts val="200"/>
+                <a:spcPts val="142"/>
               </a:spcAft>
             </a:pPr>
             <a:r>
-              <a:rPr sz="1200" b="1" lang="zh-TW" dirty="0">
-                <a:solidFill>
-                  <a:srgbClr val="000000"/>
-                </a:solidFill>
-                <a:latin typeface="Arial Unicode MS"/>
-                <a:ea typeface="Arial Unicode MS"/>
-                <a:cs typeface="Arial Unicode MS"/>
-              </a:rPr>
-              <a:t>右邊，同一格資料，我故意把光達多轉了四度。</a:t>
-            </a:r>
-            <a:r>
-              <a:rPr sz="1200" lang="zh-TW" dirty="0">
-                <a:solidFill>
-                  <a:srgbClr val="000000"/>
-                </a:solidFill>
-                <a:latin typeface="Arial Unicode MS"/>
-                <a:ea typeface="Arial Unicode MS"/>
-                <a:cs typeface="Arial Unicode MS"/>
-              </a:rPr>
-              <a:t>請看廂型車的右半邊：後窗上出現了藍色的點，那是遠處的東西；車子左邊的樹和柱子上，反而出現橘色的近處點。光達的點整片滑到左邊去了，它以為車子在左邊一點的位置。
+              <a:rPr sz="850" lang="zh-TW" dirty="0">
+                <a:solidFill>
+                  <a:srgbClr val="000000"/>
+                </a:solidFill>
+                <a:latin typeface="Arial Unicode MS"/>
+                <a:ea typeface="Arial Unicode MS"/>
+                <a:cs typeface="Arial Unicode MS"/>
+              </a:rPr>
+              <a:t>方向特別要緊。nuScenes 這顆光達，它自己的「正前方」，其實是朝</a:t>
+            </a:r>
+            <a:r>
+              <a:rPr sz="850" b="1" lang="zh-TW" dirty="0">
+                <a:solidFill>
+                  <a:srgbClr val="000000"/>
+                </a:solidFill>
+                <a:latin typeface="Arial Unicode MS"/>
+                <a:ea typeface="Arial Unicode MS"/>
+                <a:cs typeface="Arial Unicode MS"/>
+              </a:rPr>
+              <a:t>車子的右邊</a:t>
+            </a:r>
+            <a:r>
+              <a:rPr sz="850" lang="zh-TW" dirty="0">
+                <a:solidFill>
+                  <a:srgbClr val="000000"/>
+                </a:solidFill>
+                <a:latin typeface="Arial Unicode MS"/>
+                <a:ea typeface="Arial Unicode MS"/>
+                <a:cs typeface="Arial Unicode MS"/>
+              </a:rPr>
+              <a:t>裝的，轉了九十度。如果不知道這件事，光達說「我的正前方十公尺有一台車」，電腦會以為車在前面，其實在右邊。左前角那顆雷達也一樣，它口中的「正前方」，是車子的左邊。
 </a:t>
             </a:r>
           </a:p>
@@ -2528,41 +2704,41 @@
                 <a:spcPts val="0"/>
               </a:spcBef>
               <a:spcAft>
-                <a:spcPts val="200"/>
+                <a:spcPts val="142"/>
               </a:spcAft>
             </a:pPr>
             <a:r>
-              <a:rPr sz="1200" lang="zh-TW" dirty="0">
-                <a:solidFill>
-                  <a:srgbClr val="000000"/>
-                </a:solidFill>
-                <a:latin typeface="Arial Unicode MS"/>
-                <a:ea typeface="Arial Unicode MS"/>
-                <a:cs typeface="Arial Unicode MS"/>
-              </a:rPr>
-              <a:t>四度是我故意放大的。真的車上，標定可能只差零點幾度，可是第五週算過：</a:t>
-            </a:r>
-            <a:r>
-              <a:rPr sz="1200" b="1" lang="zh-TW" dirty="0">
-                <a:solidFill>
-                  <a:srgbClr val="000000"/>
-                </a:solidFill>
-                <a:latin typeface="Arial Unicode MS"/>
-                <a:ea typeface="Arial Unicode MS"/>
-                <a:cs typeface="Arial Unicode MS"/>
-              </a:rPr>
-              <a:t>差一度，五十公尺外就差零點八七公尺</a:t>
-            </a:r>
-            <a:r>
-              <a:rPr sz="1200" lang="zh-TW" dirty="0">
-                <a:solidFill>
-                  <a:srgbClr val="000000"/>
-                </a:solidFill>
-                <a:latin typeface="Arial Unicode MS"/>
-                <a:ea typeface="Arial Unicode MS"/>
-                <a:cs typeface="Arial Unicode MS"/>
-              </a:rPr>
-              <a:t>，快半個車道。
+              <a:rPr sz="850" lang="zh-TW" dirty="0">
+                <a:solidFill>
+                  <a:srgbClr val="000000"/>
+                </a:solidFill>
+                <a:latin typeface="Arial Unicode MS"/>
+                <a:ea typeface="Arial Unicode MS"/>
+                <a:cs typeface="Arial Unicode MS"/>
+              </a:rPr>
+              <a:t>所以外參不是把幾顆感測器調成「看到一樣的畫面」，每一顆看到的本來就不一樣。外參比較像一本</a:t>
+            </a:r>
+            <a:r>
+              <a:rPr sz="850" b="1" lang="zh-TW" dirty="0">
+                <a:solidFill>
+                  <a:srgbClr val="000000"/>
+                </a:solidFill>
+                <a:latin typeface="Arial Unicode MS"/>
+                <a:ea typeface="Arial Unicode MS"/>
+                <a:cs typeface="Arial Unicode MS"/>
+              </a:rPr>
+              <a:t>換算表</a:t>
+            </a:r>
+            <a:r>
+              <a:rPr sz="850" lang="zh-TW" dirty="0">
+                <a:solidFill>
+                  <a:srgbClr val="000000"/>
+                </a:solidFill>
+                <a:latin typeface="Arial Unicode MS"/>
+                <a:ea typeface="Arial Unicode MS"/>
+                <a:cs typeface="Arial Unicode MS"/>
+              </a:rPr>
+              <a:t>：把每一顆用自己的位置講的話，翻成同一種說法，就是「在車子的哪裡」。大家都翻好了，光達的點才能疊到相機的照片上，落在同一台車身上。
 </a:t>
             </a:r>
           </a:p>
@@ -2572,11 +2748,143 @@
                 <a:spcPts val="0"/>
               </a:spcBef>
               <a:spcAft>
-                <a:spcPts val="200"/>
+                <a:spcPts val="142"/>
               </a:spcAft>
             </a:pPr>
             <a:r>
-              <a:rPr sz="1200" lang="zh-TW" dirty="0">
+              <a:rPr sz="850" lang="zh-TW" dirty="0">
+                <a:solidFill>
+                  <a:srgbClr val="000000"/>
+                </a:solidFill>
+                <a:latin typeface="Arial Unicode MS"/>
+                <a:ea typeface="Arial Unicode MS"/>
+                <a:cs typeface="Arial Unicode MS"/>
+              </a:rPr>
+              <a:t>看這兩張圖，是同一個瞬間，把光達點投到相機畫面上。顏色是距離：橘色近，藍色遠。
+</a:t>
+            </a:r>
+          </a:p>
+          <a:p>
+            <a:pPr algn="l">
+              <a:spcBef>
+                <a:spcPts val="0"/>
+              </a:spcBef>
+              <a:spcAft>
+                <a:spcPts val="142"/>
+              </a:spcAft>
+            </a:pPr>
+            <a:r>
+              <a:rPr sz="850" b="1" lang="zh-TW" dirty="0">
+                <a:solidFill>
+                  <a:srgbClr val="000000"/>
+                </a:solidFill>
+                <a:latin typeface="Arial Unicode MS"/>
+                <a:ea typeface="Arial Unicode MS"/>
+                <a:cs typeface="Arial Unicode MS"/>
+              </a:rPr>
+              <a:t>左邊，標定正確。</a:t>
+            </a:r>
+            <a:r>
+              <a:rPr sz="850" lang="zh-TW" dirty="0">
+                <a:solidFill>
+                  <a:srgbClr val="000000"/>
+                </a:solidFill>
+                <a:latin typeface="Arial Unicode MS"/>
+                <a:ea typeface="Arial Unicode MS"/>
+                <a:cs typeface="Arial Unicode MS"/>
+              </a:rPr>
+              <a:t>前面那台白色廂型車，身上是一排一排整齊的橘色點，大約十公尺；車子右邊的路上、遠處的樹，才是藍色。
+</a:t>
+            </a:r>
+          </a:p>
+          <a:p>
+            <a:pPr algn="l">
+              <a:spcBef>
+                <a:spcPts val="0"/>
+              </a:spcBef>
+              <a:spcAft>
+                <a:spcPts val="142"/>
+              </a:spcAft>
+            </a:pPr>
+            <a:r>
+              <a:rPr sz="850" b="1" lang="zh-TW" dirty="0">
+                <a:solidFill>
+                  <a:srgbClr val="000000"/>
+                </a:solidFill>
+                <a:latin typeface="Arial Unicode MS"/>
+                <a:ea typeface="Arial Unicode MS"/>
+                <a:cs typeface="Arial Unicode MS"/>
+              </a:rPr>
+              <a:t>右邊，同一格資料，我故意把光達多轉了四度。</a:t>
+            </a:r>
+            <a:r>
+              <a:rPr sz="850" lang="zh-TW" dirty="0">
+                <a:solidFill>
+                  <a:srgbClr val="000000"/>
+                </a:solidFill>
+                <a:latin typeface="Arial Unicode MS"/>
+                <a:ea typeface="Arial Unicode MS"/>
+                <a:cs typeface="Arial Unicode MS"/>
+              </a:rPr>
+              <a:t>請看廂型車的右半邊：後窗上出現了藍色的點，那是遠處的東西；車子左邊的樹和柱子上，反而出現橘色的近處點。光達的點整片滑到左邊去了，它以為車子在左邊一點的位置。
+</a:t>
+            </a:r>
+          </a:p>
+          <a:p>
+            <a:pPr algn="l">
+              <a:spcBef>
+                <a:spcPts val="0"/>
+              </a:spcBef>
+              <a:spcAft>
+                <a:spcPts val="142"/>
+              </a:spcAft>
+            </a:pPr>
+            <a:r>
+              <a:rPr sz="850" lang="zh-TW" dirty="0">
+                <a:solidFill>
+                  <a:srgbClr val="000000"/>
+                </a:solidFill>
+                <a:latin typeface="Arial Unicode MS"/>
+                <a:ea typeface="Arial Unicode MS"/>
+                <a:cs typeface="Arial Unicode MS"/>
+              </a:rPr>
+              <a:t>四度是我故意放大的。真的車上，標定可能只差零點幾度，可是第五週算過：</a:t>
+            </a:r>
+            <a:r>
+              <a:rPr sz="850" b="1" lang="zh-TW" dirty="0">
+                <a:solidFill>
+                  <a:srgbClr val="000000"/>
+                </a:solidFill>
+                <a:latin typeface="Arial Unicode MS"/>
+                <a:ea typeface="Arial Unicode MS"/>
+                <a:cs typeface="Arial Unicode MS"/>
+              </a:rPr>
+              <a:t>差一度，五十公尺外就差零點八七公尺</a:t>
+            </a:r>
+            <a:r>
+              <a:rPr sz="850" lang="zh-TW" dirty="0">
+                <a:solidFill>
+                  <a:srgbClr val="000000"/>
+                </a:solidFill>
+                <a:latin typeface="Arial Unicode MS"/>
+                <a:ea typeface="Arial Unicode MS"/>
+                <a:cs typeface="Arial Unicode MS"/>
+              </a:rPr>
+              <a:t>，快半個車道。
+</a:t>
+            </a:r>
+          </a:p>
+          <a:p>
+            <a:pPr algn="l">
+              <a:spcBef>
+                <a:spcPts val="0"/>
+              </a:spcBef>
+              <a:spcAft>
+                <a:spcPts val="142"/>
+              </a:spcAft>
+            </a:pPr>
+            <a:r>
+              <a:rPr sz="850" lang="zh-TW" dirty="0">
                 <a:solidFill>
                   <a:srgbClr val="000000"/>
                 </a:solidFill>

--- a/第七週(10-22)/第七週_第2節_簡報.pptx
+++ b/第七週(10-22)/第七週_第2節_簡報.pptx
@@ -4431,11 +4431,11 @@
                 <a:spcPts val="0"/>
               </a:spcBef>
               <a:spcAft>
-                <a:spcPts val="175"/>
+                <a:spcPts val="158"/>
               </a:spcAft>
             </a:pPr>
             <a:r>
-              <a:rPr sz="1050" lang="zh-TW" dirty="0">
+              <a:rPr sz="950" lang="zh-TW" dirty="0">
                 <a:solidFill>
                   <a:srgbClr val="000000"/>
                 </a:solidFill>
@@ -4446,7 +4446,7 @@
               <a:t>最後一個融合的例子，是定位。這裡藏著一個很有名的方法，叫</a:t>
             </a:r>
             <a:r>
-              <a:rPr sz="1050" b="1" lang="zh-TW" dirty="0">
+              <a:rPr sz="950" b="1" lang="zh-TW" dirty="0">
                 <a:solidFill>
                   <a:srgbClr val="000000"/>
                 </a:solidFill>
@@ -4457,7 +4457,7 @@
               <a:t>卡爾曼濾波</a:t>
             </a:r>
             <a:r>
-              <a:rPr sz="1050" lang="zh-TW" dirty="0">
+              <a:rPr sz="950" lang="zh-TW" dirty="0">
                 <a:solidFill>
                   <a:srgbClr val="000000"/>
                 </a:solidFill>
@@ -4468,7 +4468,7 @@
               <a:t>。完整的數學很難，但它的核心，一句話就講得完：</a:t>
             </a:r>
             <a:r>
-              <a:rPr sz="1050" b="1" lang="zh-TW" dirty="0">
+              <a:rPr sz="950" b="1" lang="zh-TW" dirty="0">
                 <a:solidFill>
                   <a:srgbClr val="000000"/>
                 </a:solidFill>
@@ -4479,7 +4479,7 @@
               <a:t>預測一個位置，量到一個位置，比較準的那一個，多相信一點。</a:t>
             </a:r>
             <a:r>
-              <a:rPr sz="1050" lang="zh-TW" dirty="0">
+              <a:rPr sz="950" lang="zh-TW" dirty="0">
                 <a:solidFill>
                   <a:srgbClr val="000000"/>
                 </a:solidFill>
@@ -4497,19 +4497,19 @@
                 <a:spcPts val="0"/>
               </a:spcBef>
               <a:spcAft>
-                <a:spcPts val="175"/>
+                <a:spcPts val="158"/>
               </a:spcAft>
             </a:pPr>
             <a:r>
-              <a:rPr sz="1050" lang="zh-TW" dirty="0">
-                <a:solidFill>
-                  <a:srgbClr val="000000"/>
-                </a:solidFill>
-                <a:latin typeface="Arial Unicode MS"/>
-                <a:ea typeface="Arial Unicode MS"/>
-                <a:cs typeface="Arial Unicode MS"/>
-              </a:rPr>
-              <a:t>在白板上算一次。車子在一條路上，要知道自己在第幾公尺。
+              <a:rPr sz="950" lang="zh-TW" dirty="0">
+                <a:solidFill>
+                  <a:srgbClr val="000000"/>
+                </a:solidFill>
+                <a:latin typeface="Arial Unicode MS"/>
+                <a:ea typeface="Arial Unicode MS"/>
+                <a:cs typeface="Arial Unicode MS"/>
+              </a:rPr>
+              <a:t>左邊這支動圖會播兩段，跟著我講的順序走。先算一次：車子在一條路上，要知道自己在第幾公尺。
 </a:t>
             </a:r>
           </a:p>
@@ -4519,11 +4519,11 @@
                 <a:spcPts val="0"/>
               </a:spcBef>
               <a:spcAft>
-                <a:spcPts val="175"/>
+                <a:spcPts val="158"/>
               </a:spcAft>
             </a:pPr>
             <a:r>
-              <a:rPr sz="1050" b="1" lang="zh-TW" dirty="0">
+              <a:rPr sz="950" b="1" lang="zh-TW" dirty="0">
                 <a:solidFill>
                   <a:srgbClr val="000000"/>
                 </a:solidFill>
@@ -4534,7 +4534,7 @@
               <a:t>預測</a:t>
             </a:r>
             <a:r>
-              <a:rPr sz="1050" lang="zh-TW" dirty="0">
+              <a:rPr sz="950" lang="zh-TW" dirty="0">
                 <a:solidFill>
                   <a:srgbClr val="000000"/>
                 </a:solidFill>
@@ -4552,11 +4552,11 @@
                 <a:spcPts val="0"/>
               </a:spcBef>
               <a:spcAft>
-                <a:spcPts val="175"/>
+                <a:spcPts val="158"/>
               </a:spcAft>
             </a:pPr>
             <a:r>
-              <a:rPr sz="1050" b="1" lang="zh-TW" dirty="0">
+              <a:rPr sz="950" b="1" lang="zh-TW" dirty="0">
                 <a:solidFill>
                   <a:srgbClr val="000000"/>
                 </a:solidFill>
@@ -4567,7 +4567,7 @@
               <a:t>量到</a:t>
             </a:r>
             <a:r>
-              <a:rPr sz="1050" lang="zh-TW" dirty="0">
+              <a:rPr sz="950" lang="zh-TW" dirty="0">
                 <a:solidFill>
                   <a:srgbClr val="000000"/>
                 </a:solidFill>
@@ -4585,11 +4585,11 @@
                 <a:spcPts val="0"/>
               </a:spcBef>
               <a:spcAft>
-                <a:spcPts val="175"/>
+                <a:spcPts val="158"/>
               </a:spcAft>
             </a:pPr>
             <a:r>
-              <a:rPr sz="1050" lang="zh-TW" dirty="0">
+              <a:rPr sz="950" lang="zh-TW" dirty="0">
                 <a:solidFill>
                   <a:srgbClr val="000000"/>
                 </a:solidFill>
@@ -4600,7 +4600,7 @@
               <a:t>兩個差了兩公尺，要相信誰？都相信一點，但不是一半一半。誤差差三倍，信任要差</a:t>
             </a:r>
             <a:r>
-              <a:rPr sz="1050" b="1" lang="zh-TW" dirty="0">
+              <a:rPr sz="950" b="1" lang="zh-TW" dirty="0">
                 <a:solidFill>
                   <a:srgbClr val="000000"/>
                 </a:solidFill>
@@ -4611,7 +4611,7 @@
               <a:t>九倍</a:t>
             </a:r>
             <a:r>
-              <a:rPr sz="1050" lang="zh-TW" dirty="0">
+              <a:rPr sz="950" lang="zh-TW" dirty="0">
                 <a:solidFill>
                   <a:srgbClr val="000000"/>
                 </a:solidFill>
@@ -4629,11 +4629,11 @@
                 <a:spcPts val="0"/>
               </a:spcBef>
               <a:spcAft>
-                <a:spcPts val="175"/>
+                <a:spcPts val="158"/>
               </a:spcAft>
             </a:pPr>
             <a:r>
-              <a:rPr sz="1050" lang="zh-TW" dirty="0">
+              <a:rPr sz="950" lang="zh-TW" dirty="0">
                 <a:solidFill>
                   <a:srgbClr val="000000"/>
                 </a:solidFill>
@@ -4644,7 +4644,7 @@
               <a:t>九乘一百二十，加一乘一百一十八，除以十，等於</a:t>
             </a:r>
             <a:r>
-              <a:rPr sz="1050" b="1" lang="zh-TW" dirty="0">
+              <a:rPr sz="950" b="1" lang="zh-TW" dirty="0">
                 <a:solidFill>
                   <a:srgbClr val="000000"/>
                 </a:solidFill>
@@ -4655,7 +4655,7 @@
               <a:t>一百一十九點八公尺</a:t>
             </a:r>
             <a:r>
-              <a:rPr sz="1050" lang="zh-TW" dirty="0">
+              <a:rPr sz="950" lang="zh-TW" dirty="0">
                 <a:solidFill>
                   <a:srgbClr val="000000"/>
                 </a:solidFill>
@@ -4673,19 +4673,41 @@
                 <a:spcPts val="0"/>
               </a:spcBef>
               <a:spcAft>
-                <a:spcPts val="175"/>
+                <a:spcPts val="158"/>
               </a:spcAft>
             </a:pPr>
             <a:r>
-              <a:rPr sz="1050" lang="zh-TW" dirty="0">
-                <a:solidFill>
-                  <a:srgbClr val="000000"/>
-                </a:solidFill>
-                <a:latin typeface="Arial Unicode MS"/>
-                <a:ea typeface="Arial Unicode MS"/>
-                <a:cs typeface="Arial Unicode MS"/>
-              </a:rPr>
-              <a:t>就像你有兩支錶，一支很準、一支常常快慢。你會兩支都看，但比較聽準的那支。
+              <a:rPr sz="950" lang="zh-TW" dirty="0">
+                <a:solidFill>
+                  <a:srgbClr val="000000"/>
+                </a:solidFill>
+                <a:latin typeface="Arial Unicode MS"/>
+                <a:ea typeface="Arial Unicode MS"/>
+                <a:cs typeface="Arial Unicode MS"/>
+              </a:rPr>
+              <a:t>動圖上看得出來：IMU 那條曲線又窄又高，GPS 那條又寬又矮，曲線愈寬，就是愈不確定。最後出現的黃色那條，就是合起來的結果，落在一百一十九點八，而且</a:t>
+            </a:r>
+            <a:r>
+              <a:rPr sz="950" b="1" lang="zh-TW" dirty="0">
+                <a:solidFill>
+                  <a:srgbClr val="000000"/>
+                </a:solidFill>
+                <a:latin typeface="Arial Unicode MS"/>
+                <a:ea typeface="Arial Unicode MS"/>
+                <a:cs typeface="Arial Unicode MS"/>
+              </a:rPr>
+              <a:t>比兩條都窄一點</a:t>
+            </a:r>
+            <a:r>
+              <a:rPr sz="950" lang="zh-TW" dirty="0">
+                <a:solidFill>
+                  <a:srgbClr val="000000"/>
+                </a:solidFill>
+                <a:latin typeface="Arial Unicode MS"/>
+                <a:ea typeface="Arial Unicode MS"/>
+                <a:cs typeface="Arial Unicode MS"/>
+              </a:rPr>
+              <a:t>：兩個資訊合起來，比任何一個單獨的都更確定。
 </a:t>
             </a:r>
           </a:p>
@@ -4695,19 +4717,19 @@
                 <a:spcPts val="0"/>
               </a:spcBef>
               <a:spcAft>
-                <a:spcPts val="175"/>
+                <a:spcPts val="158"/>
               </a:spcAft>
             </a:pPr>
             <a:r>
-              <a:rPr sz="1050" lang="zh-TW" dirty="0">
-                <a:solidFill>
-                  <a:srgbClr val="000000"/>
-                </a:solidFill>
-                <a:latin typeface="Arial Unicode MS"/>
-                <a:ea typeface="Arial Unicode MS"/>
-                <a:cs typeface="Arial Unicode MS"/>
-              </a:rPr>
-              <a:t>然後每一秒重複一次：先預測，再用量到的修正。
+              <a:rPr sz="950" lang="zh-TW" dirty="0">
+                <a:solidFill>
+                  <a:srgbClr val="000000"/>
+                </a:solidFill>
+                <a:latin typeface="Arial Unicode MS"/>
+                <a:ea typeface="Arial Unicode MS"/>
+                <a:cs typeface="Arial Unicode MS"/>
+              </a:rPr>
+              <a:t>就像你有兩支錶，一支很準、一支常常快慢。你會兩支都看，但比較聽準的那支。
 </a:t>
             </a:r>
           </a:p>
@@ -4717,52 +4739,19 @@
                 <a:spcPts val="0"/>
               </a:spcBef>
               <a:spcAft>
-                <a:spcPts val="175"/>
+                <a:spcPts val="158"/>
               </a:spcAft>
             </a:pPr>
             <a:r>
-              <a:rPr sz="1050" b="1" lang="zh-TW" dirty="0">
-                <a:solidFill>
-                  <a:srgbClr val="000000"/>
-                </a:solidFill>
-                <a:latin typeface="Arial Unicode MS"/>
-                <a:ea typeface="Arial Unicode MS"/>
-                <a:cs typeface="Arial Unicode MS"/>
-              </a:rPr>
-              <a:t>進隧道會怎樣？</a:t>
-            </a:r>
-            <a:r>
-              <a:rPr sz="1050" lang="zh-TW" dirty="0">
-                <a:solidFill>
-                  <a:srgbClr val="000000"/>
-                </a:solidFill>
-                <a:latin typeface="Arial Unicode MS"/>
-                <a:ea typeface="Arial Unicode MS"/>
-                <a:cs typeface="Arial Unicode MS"/>
-              </a:rPr>
-              <a:t>GPS 沒了，只剩預測。每一秒都在推算，誤差一秒一秒累積，誤差圈愈來愈大，這就是上一節的 IMU 漂移。</a:t>
-            </a:r>
-            <a:r>
-              <a:rPr sz="1050" b="1" lang="zh-TW" dirty="0">
-                <a:solidFill>
-                  <a:srgbClr val="000000"/>
-                </a:solidFill>
-                <a:latin typeface="Arial Unicode MS"/>
-                <a:ea typeface="Arial Unicode MS"/>
-                <a:cs typeface="Arial Unicode MS"/>
-              </a:rPr>
-              <a:t>出了隧道</a:t>
-            </a:r>
-            <a:r>
-              <a:rPr sz="1050" lang="zh-TW" dirty="0">
-                <a:solidFill>
-                  <a:srgbClr val="000000"/>
-                </a:solidFill>
-                <a:latin typeface="Arial Unicode MS"/>
-                <a:ea typeface="Arial Unicode MS"/>
-                <a:cs typeface="Arial Unicode MS"/>
-              </a:rPr>
-              <a:t>，GPS 一回來，誤差圈一下就被拉回來。慢慢壞的配突然壞的，上一節說它們個性相反、補得起來，就是這個意思。
+              <a:rPr sz="950" lang="zh-TW" dirty="0">
+                <a:solidFill>
+                  <a:srgbClr val="000000"/>
+                </a:solidFill>
+                <a:latin typeface="Arial Unicode MS"/>
+                <a:ea typeface="Arial Unicode MS"/>
+                <a:cs typeface="Arial Unicode MS"/>
+              </a:rPr>
+              <a:t>然後每一秒重複一次：先預測，再用量到的修正。
 </a:t>
             </a:r>
           </a:p>
@@ -4772,11 +4761,66 @@
                 <a:spcPts val="0"/>
               </a:spcBef>
               <a:spcAft>
-                <a:spcPts val="175"/>
+                <a:spcPts val="158"/>
               </a:spcAft>
             </a:pPr>
             <a:r>
-              <a:rPr sz="1050" lang="zh-TW" dirty="0">
+              <a:rPr sz="950" b="1" lang="zh-TW" dirty="0">
+                <a:solidFill>
+                  <a:srgbClr val="000000"/>
+                </a:solidFill>
+                <a:latin typeface="Arial Unicode MS"/>
+                <a:ea typeface="Arial Unicode MS"/>
+                <a:cs typeface="Arial Unicode MS"/>
+              </a:rPr>
+              <a:t>進隧道會怎樣？</a:t>
+            </a:r>
+            <a:r>
+              <a:rPr sz="950" lang="zh-TW" dirty="0">
+                <a:solidFill>
+                  <a:srgbClr val="000000"/>
+                </a:solidFill>
+                <a:latin typeface="Arial Unicode MS"/>
+                <a:ea typeface="Arial Unicode MS"/>
+                <a:cs typeface="Arial Unicode MS"/>
+              </a:rPr>
+              <a:t>動圖的第二段：GPS 沒了，只剩預測。每一秒都在推算，誤差一秒一秒累積，誤差圈愈來愈大，這就是上一節的 IMU 漂移。</a:t>
+            </a:r>
+            <a:r>
+              <a:rPr sz="950" b="1" lang="zh-TW" dirty="0">
+                <a:solidFill>
+                  <a:srgbClr val="000000"/>
+                </a:solidFill>
+                <a:latin typeface="Arial Unicode MS"/>
+                <a:ea typeface="Arial Unicode MS"/>
+                <a:cs typeface="Arial Unicode MS"/>
+              </a:rPr>
+              <a:t>出了隧道</a:t>
+            </a:r>
+            <a:r>
+              <a:rPr sz="950" lang="zh-TW" dirty="0">
+                <a:solidFill>
+                  <a:srgbClr val="000000"/>
+                </a:solidFill>
+                <a:latin typeface="Arial Unicode MS"/>
+                <a:ea typeface="Arial Unicode MS"/>
+                <a:cs typeface="Arial Unicode MS"/>
+              </a:rPr>
+              <a:t>，GPS 一回來，誤差圈一下就被拉回來。慢慢壞的配突然壞的，上一節說它們個性相反、補得起來，就是這個意思。
+</a:t>
+            </a:r>
+          </a:p>
+          <a:p>
+            <a:pPr algn="l">
+              <a:spcBef>
+                <a:spcPts val="0"/>
+              </a:spcBef>
+              <a:spcAft>
+                <a:spcPts val="158"/>
+              </a:spcAft>
+            </a:pPr>
+            <a:r>
+              <a:rPr sz="950" lang="zh-TW" dirty="0">
                 <a:solidFill>
                   <a:srgbClr val="000000"/>
                 </a:solidFill>
@@ -14907,15 +14951,15 @@
         <p:spPr>
           <a:xfrm>
             <a:off x="502920" y="1101852"/>
-            <a:ext cx="2468880" cy="2514600"/>
+            <a:ext cx="3305556" cy="2514600"/>
           </a:xfrm>
           <a:prstGeom prst="roundRect">
             <a:avLst>
-              <a:gd name="adj" fmla="val 4444"/>
+              <a:gd name="adj" fmla="val 4364"/>
             </a:avLst>
           </a:prstGeom>
           <a:solidFill>
-            <a:srgbClr val="F4F7FA"/>
+            <a:srgbClr val="FFFFFF"/>
           </a:solidFill>
           <a:ln w="12700">
             <a:solidFill>
@@ -14925,148 +14969,79 @@
           </a:ln>
         </p:spPr>
       </p:sp>
-      <p:sp>
-        <p:nvSpPr>
-          <p:cNvPr id="4" name="Shape 2"/>
-          <p:cNvSpPr/>
+      <p:pic>
+        <p:nvPicPr>
+          <p:cNvPr id="4" name="Image 0" descr="/Users/tsengchenghsun/Class/carClass/Claude outputs/第七週(10-22)/src/img/w7_kalman.gif">    </p:cNvPr>
+          <p:cNvPicPr>
+            <a:picLocks noChangeAspect="1"/>
+          </p:cNvPicPr>
           <p:nvPr/>
-        </p:nvSpPr>
-        <p:spPr>
-          <a:xfrm>
-            <a:off x="1567282" y="1792224"/>
-            <a:ext cx="340157" cy="311810"/>
-          </a:xfrm>
-          <a:prstGeom prst="roundRect">
-            <a:avLst>
-              <a:gd name="adj" fmla="val 58651"/>
-            </a:avLst>
-          </a:prstGeom>
-          <a:solidFill>
-            <a:srgbClr val="1F4E79"/>
-          </a:solidFill>
-          <a:ln/>
-        </p:spPr>
-      </p:sp>
-      <p:sp>
-        <p:nvSpPr>
-          <p:cNvPr id="5" name="Shape 3"/>
-          <p:cNvSpPr/>
-          <p:nvPr/>
-        </p:nvSpPr>
-        <p:spPr>
-          <a:xfrm>
-            <a:off x="1198778" y="1834744"/>
-            <a:ext cx="311810" cy="226771"/>
+        </p:nvPicPr>
+        <p:blipFill>
+          <a:blip r:embed="rId1"/>
+          <a:stretch>
+            <a:fillRect/>
+          </a:stretch>
+        </p:blipFill>
+        <p:spPr>
+          <a:xfrm>
+            <a:off x="576072" y="1214628"/>
+            <a:ext cx="3159252" cy="2106168"/>
           </a:xfrm>
           <a:prstGeom prst="rect">
             <a:avLst/>
           </a:prstGeom>
-          <a:solidFill>
-            <a:srgbClr val="1F4E79">
-              <a:alpha val="60000"/>
-            </a:srgbClr>
-          </a:solidFill>
-          <a:ln/>
-        </p:spPr>
-      </p:sp>
-      <p:sp>
-        <p:nvSpPr>
-          <p:cNvPr id="6" name="Shape 4"/>
-          <p:cNvSpPr/>
+        </p:spPr>
+      </p:pic>
+      <p:sp>
+        <p:nvSpPr>
+          <p:cNvPr id="5" name="Text 2"/>
+          <p:cNvSpPr txBox="1"/>
           <p:nvPr/>
         </p:nvSpPr>
         <p:spPr>
           <a:xfrm>
-            <a:off x="1964131" y="1834744"/>
-            <a:ext cx="311810" cy="226771"/>
+            <a:off x="576072" y="3396996"/>
+            <a:ext cx="3159252" cy="182880"/>
           </a:xfrm>
           <a:prstGeom prst="rect">
             <a:avLst/>
           </a:prstGeom>
-          <a:solidFill>
-            <a:srgbClr val="1F4E79">
-              <a:alpha val="60000"/>
-            </a:srgbClr>
-          </a:solidFill>
+          <a:noFill/>
           <a:ln/>
         </p:spPr>
-      </p:sp>
-      <p:sp>
-        <p:nvSpPr>
-          <p:cNvPr id="7" name="Shape 5"/>
-          <p:cNvSpPr/>
-          <p:nvPr/>
-        </p:nvSpPr>
-        <p:spPr>
-          <a:xfrm rot="5400000">
-            <a:off x="1538935" y="2217420"/>
-            <a:ext cx="396850" cy="226771"/>
-          </a:xfrm>
-          <a:prstGeom prst="chevron">
-            <a:avLst/>
-          </a:prstGeom>
-          <a:ln w="31750">
-            <a:solidFill>
-              <a:srgbClr val="1F4E79"/>
-            </a:solidFill>
-            <a:prstDash val="solid"/>
-          </a:ln>
-        </p:spPr>
-      </p:sp>
-      <p:sp>
-        <p:nvSpPr>
-          <p:cNvPr id="8" name="Shape 6"/>
-          <p:cNvSpPr/>
-          <p:nvPr/>
-        </p:nvSpPr>
-        <p:spPr>
-          <a:xfrm rot="5400000">
-            <a:off x="1453896" y="2444191"/>
-            <a:ext cx="566928" cy="255118"/>
-          </a:xfrm>
-          <a:prstGeom prst="chevron">
-            <a:avLst/>
-          </a:prstGeom>
-          <a:ln w="31750">
-            <a:solidFill>
-              <a:srgbClr val="1F4E79">
-                <a:alpha val="55000"/>
-              </a:srgbClr>
-            </a:solidFill>
-            <a:prstDash val="solid"/>
-          </a:ln>
-        </p:spPr>
-      </p:sp>
-      <p:sp>
-        <p:nvSpPr>
-          <p:cNvPr id="9" name="Shape 7"/>
-          <p:cNvSpPr/>
-          <p:nvPr/>
-        </p:nvSpPr>
-        <p:spPr>
-          <a:xfrm>
-            <a:off x="1638148" y="2812694"/>
-            <a:ext cx="198425" cy="198425"/>
-          </a:xfrm>
-          <a:prstGeom prst="ellipse">
-            <a:avLst/>
-          </a:prstGeom>
-          <a:solidFill>
-            <a:srgbClr val="1F4E79"/>
-          </a:solidFill>
-          <a:ln/>
-        </p:spPr>
-      </p:sp>
-      <p:sp>
-        <p:nvSpPr>
-          <p:cNvPr id="10" name="Text 8"/>
+        <p:txBody>
+          <a:bodyPr wrap="square" lIns="0" tIns="0" rIns="0" bIns="0" rtlCol="0" anchor="ctr"/>
+          <a:lstStyle/>
+          <a:p>
+            <a:pPr algn="ctr" indent="0" marL="0">
+              <a:buNone/>
+            </a:pPr>
+            <a:r>
+              <a:rPr lang="en-US" sz="700" dirty="0">
+                <a:solidFill>
+                  <a:srgbClr val="5F7183"/>
+                </a:solidFill>
+                <a:latin typeface="Arial" pitchFamily="34" charset="0"/>
+                <a:ea typeface="Arial" pitchFamily="34" charset="-122"/>
+                <a:cs typeface="Arial" pitchFamily="34" charset="-120"/>
+              </a:rPr>
+              <a:t>動圖：課程自製（曲線寬度照誤差畫；隧道那段是示意）</a:t>
+            </a:r>
+            <a:endParaRPr lang="en-US" sz="700" dirty="0"/>
+          </a:p>
+        </p:txBody>
+      </p:sp>
+      <p:sp>
+        <p:nvSpPr>
+          <p:cNvPr id="6" name="Text 3"/>
           <p:cNvSpPr txBox="1"/>
           <p:nvPr/>
         </p:nvSpPr>
         <p:spPr>
           <a:xfrm>
-            <a:off x="3429000" y="914400"/>
-            <a:ext cx="5212080" cy="2889504"/>
+            <a:off x="4119372" y="914400"/>
+            <a:ext cx="4521708" cy="2889504"/>
           </a:xfrm>
           <a:prstGeom prst="rect">
             <a:avLst/>
@@ -15164,7 +15139,7 @@
       </p:sp>
       <p:sp>
         <p:nvSpPr>
-          <p:cNvPr id="11" name="Shape 9"/>
+          <p:cNvPr id="7" name="Shape 4"/>
           <p:cNvSpPr/>
           <p:nvPr/>
         </p:nvSpPr>
@@ -15191,7 +15166,7 @@
       </p:sp>
       <p:sp>
         <p:nvSpPr>
-          <p:cNvPr id="12" name="Text 10"/>
+          <p:cNvPr id="8" name="Text 5"/>
           <p:cNvSpPr txBox="1"/>
           <p:nvPr/>
         </p:nvSpPr>
@@ -15253,7 +15228,7 @@
       </p:sp>
       <p:sp>
         <p:nvSpPr>
-          <p:cNvPr id="13" name="Shape 11"/>
+          <p:cNvPr id="9" name="Shape 6"/>
           <p:cNvSpPr/>
           <p:nvPr/>
         </p:nvSpPr>
@@ -15280,7 +15255,7 @@
       </p:sp>
       <p:sp>
         <p:nvSpPr>
-          <p:cNvPr id="14" name="Text 12"/>
+          <p:cNvPr id="10" name="Text 7"/>
           <p:cNvSpPr txBox="1"/>
           <p:nvPr/>
         </p:nvSpPr>
@@ -15376,14 +15351,14 @@
       </p:sp>
       <p:pic>
         <p:nvPicPr>
-          <p:cNvPr id="16" name="Image 0" descr="/Users/tsengchenghsun/Class/carClass/Claude outputs/第七週(10-22)/src/logo.png">    </p:cNvPr>
+          <p:cNvPr id="12" name="Image 1" descr="/Users/tsengchenghsun/Class/carClass/Claude outputs/第七週(10-22)/src/logo.png">    </p:cNvPr>
           <p:cNvPicPr>
             <a:picLocks noChangeAspect="1"/>
           </p:cNvPicPr>
           <p:nvPr/>
         </p:nvPicPr>
         <p:blipFill>
-          <a:blip r:embed="rId1"/>
+          <a:blip r:embed="rId2"/>
           <a:stretch>
             <a:fillRect/>
           </a:stretch>
@@ -15400,7 +15375,7 @@
       </p:pic>
       <p:sp>
         <p:nvSpPr>
-          <p:cNvPr id="17" name="Text 13"/>
+          <p:cNvPr id="13" name="Text 8"/>
           <p:cNvSpPr txBox="1"/>
           <p:nvPr/>
         </p:nvSpPr>
@@ -15439,7 +15414,7 @@
       </p:sp>
       <p:sp>
         <p:nvSpPr>
-          <p:cNvPr id="18" name="Text 14"/>
+          <p:cNvPr id="14" name="Text 9"/>
           <p:cNvSpPr txBox="1"/>
           <p:nvPr/>
         </p:nvSpPr>

--- a/第七週(10-22)/第七週_第2節_簡報.pptx
+++ b/第七週(10-22)/第七週_第2節_簡報.pptx
@@ -813,6 +813,50 @@
                 <a:ea typeface="Arial Unicode MS"/>
                 <a:cs typeface="Arial Unicode MS"/>
               </a:rPr>
+              <a:t>看左邊的動圖，它會播三段。</a:t>
+            </a:r>
+            <a:r>
+              <a:rPr sz="1200" b="1" lang="zh-TW" dirty="0">
+                <a:solidFill>
+                  <a:srgbClr val="000000"/>
+                </a:solidFill>
+                <a:latin typeface="Arial Unicode MS"/>
+                <a:ea typeface="Arial Unicode MS"/>
+                <a:cs typeface="Arial Unicode MS"/>
+              </a:rPr>
+              <a:t>第一段，雨愈下愈大。</a:t>
+            </a:r>
+            <a:r>
+              <a:rPr sz="1200" lang="zh-TW" dirty="0">
+                <a:solidFill>
+                  <a:srgbClr val="000000"/>
+                </a:solidFill>
+                <a:latin typeface="Arial Unicode MS"/>
+                <a:ea typeface="Arial Unicode MS"/>
+                <a:cs typeface="Arial Unicode MS"/>
+              </a:rPr>
+              <a:t>左上角是三顆感測器的狀態，跟第一節那張失效對照表「大雨、濃霧」那一列一樣：相機從打勾變三角形，再變叉叉；光達變三角形；雷達一直打勾。這時候車子已經走出它的 ODD 了。
+</a:t>
+            </a:r>
+          </a:p>
+          <a:p>
+            <a:pPr algn="l">
+              <a:spcBef>
+                <a:spcPts val="0"/>
+              </a:spcBef>
+              <a:spcAft>
+                <a:spcPts val="200"/>
+              </a:spcAft>
+            </a:pPr>
+            <a:r>
+              <a:rPr sz="1200" lang="zh-TW" dirty="0">
+                <a:solidFill>
+                  <a:srgbClr val="000000"/>
+                </a:solidFill>
+                <a:latin typeface="Arial Unicode MS"/>
+                <a:ea typeface="Arial Unicode MS"/>
+                <a:cs typeface="Arial Unicode MS"/>
+              </a:rPr>
               <a:t>怎麼退，跟第一週的 SAE 等級有關。</a:t>
             </a:r>
             <a:r>
@@ -835,7 +879,7 @@
                 <a:ea typeface="Arial Unicode MS"/>
                 <a:cs typeface="Arial Unicode MS"/>
               </a:rPr>
-              <a:t>，駕駛隨時要準備接手，所以車子會跳警告、發出聲音，請駕駛把方向盤拿回去。</a:t>
+              <a:t>，就是動圖的第二段：駕駛隨時要準備接手，所以車子會跳警告、發出聲音，請駕駛把方向盤拿回去。</a:t>
             </a:r>
             <a:r>
               <a:rPr sz="1200" b="1" lang="zh-TW" dirty="0">
@@ -857,7 +901,7 @@
                 <a:ea typeface="Arial Unicode MS"/>
                 <a:cs typeface="Arial Unicode MS"/>
               </a:rPr>
-              <a:t>，車上可能沒有駕駛，它要自己把車子帶到一個</a:t>
+              <a:t>，就是第三段：車上可能沒有駕駛，它要自己把車子帶到一個</a:t>
             </a:r>
             <a:r>
               <a:rPr sz="1200" b="1" lang="zh-TW" dirty="0">
@@ -879,7 +923,7 @@
                 <a:ea typeface="Arial Unicode MS"/>
                 <a:cs typeface="Arial Unicode MS"/>
               </a:rPr>
-              <a:t>，最常見的就是減速、打方向燈、靠邊停下來。就像計程車司機遇到看不清楚的暴雨，會先靠邊停一下，等雨小一點再走。
+              <a:t>，最常見的就是減速、打雙黃燈、切到右邊的路肩停下來。台灣、越南都是靠右行駛，所以是靠右邊停。就像計程車司機遇到看不清楚的暴雨，會先靠邊停一下，等雨小一點再走。
 </a:t>
             </a:r>
           </a:p>
@@ -5602,15 +5646,15 @@
         <p:spPr>
           <a:xfrm>
             <a:off x="502920" y="1101852"/>
-            <a:ext cx="2468880" cy="2514600"/>
+            <a:ext cx="3305556" cy="2514600"/>
           </a:xfrm>
           <a:prstGeom prst="roundRect">
             <a:avLst>
-              <a:gd name="adj" fmla="val 4444"/>
+              <a:gd name="adj" fmla="val 4364"/>
             </a:avLst>
           </a:prstGeom>
           <a:solidFill>
-            <a:srgbClr val="F4F7FA"/>
+            <a:srgbClr val="FFFFFF"/>
           </a:solidFill>
           <a:ln w="12700">
             <a:solidFill>
@@ -5620,76 +5664,79 @@
           </a:ln>
         </p:spPr>
       </p:sp>
-      <p:sp>
-        <p:nvSpPr>
-          <p:cNvPr id="4" name="Shape 2"/>
-          <p:cNvSpPr/>
+      <p:pic>
+        <p:nvPicPr>
+          <p:cNvPr id="4" name="Image 0" descr="/Users/tsengchenghsun/Class/carClass/Claude outputs/第七週(10-22)/src/img/w7_degrade.gif">    </p:cNvPr>
+          <p:cNvPicPr>
+            <a:picLocks noChangeAspect="1"/>
+          </p:cNvPicPr>
           <p:nvPr/>
-        </p:nvSpPr>
-        <p:spPr>
-          <a:xfrm>
-            <a:off x="1085393" y="1792224"/>
-            <a:ext cx="1303934" cy="1133856"/>
-          </a:xfrm>
-          <a:prstGeom prst="triangle">
-            <a:avLst/>
-          </a:prstGeom>
-          <a:solidFill>
-            <a:srgbClr val="8A5A00"/>
-          </a:solidFill>
-          <a:ln/>
-        </p:spPr>
-      </p:sp>
-      <p:sp>
-        <p:nvSpPr>
-          <p:cNvPr id="5" name="Shape 3"/>
-          <p:cNvSpPr/>
-          <p:nvPr/>
-        </p:nvSpPr>
-        <p:spPr>
-          <a:xfrm>
-            <a:off x="1680667" y="2189074"/>
-            <a:ext cx="113386" cy="368503"/>
+        </p:nvPicPr>
+        <p:blipFill>
+          <a:blip r:embed="rId1"/>
+          <a:stretch>
+            <a:fillRect/>
+          </a:stretch>
+        </p:blipFill>
+        <p:spPr>
+          <a:xfrm>
+            <a:off x="576072" y="1214628"/>
+            <a:ext cx="3159252" cy="2106168"/>
           </a:xfrm>
           <a:prstGeom prst="rect">
             <a:avLst/>
           </a:prstGeom>
-          <a:solidFill>
-            <a:srgbClr val="FFFFFF"/>
-          </a:solidFill>
-          <a:ln/>
-        </p:spPr>
-      </p:sp>
-      <p:sp>
-        <p:nvSpPr>
-          <p:cNvPr id="6" name="Shape 4"/>
-          <p:cNvSpPr/>
+        </p:spPr>
+      </p:pic>
+      <p:sp>
+        <p:nvSpPr>
+          <p:cNvPr id="5" name="Text 2"/>
+          <p:cNvSpPr txBox="1"/>
           <p:nvPr/>
         </p:nvSpPr>
         <p:spPr>
           <a:xfrm>
-            <a:off x="1666494" y="2642616"/>
-            <a:ext cx="141732" cy="141732"/>
-          </a:xfrm>
-          <a:prstGeom prst="ellipse">
+            <a:off x="576072" y="3396996"/>
+            <a:ext cx="3159252" cy="182880"/>
+          </a:xfrm>
+          <a:prstGeom prst="rect">
             <a:avLst/>
           </a:prstGeom>
-          <a:solidFill>
-            <a:srgbClr val="FFFFFF"/>
-          </a:solidFill>
+          <a:noFill/>
           <a:ln/>
         </p:spPr>
-      </p:sp>
-      <p:sp>
-        <p:nvSpPr>
-          <p:cNvPr id="7" name="Text 5"/>
+        <p:txBody>
+          <a:bodyPr wrap="square" lIns="0" tIns="0" rIns="0" bIns="0" rtlCol="0" anchor="ctr"/>
+          <a:lstStyle/>
+          <a:p>
+            <a:pPr algn="ctr" indent="0" marL="0">
+              <a:buNone/>
+            </a:pPr>
+            <a:r>
+              <a:rPr lang="en-US" sz="700" dirty="0">
+                <a:solidFill>
+                  <a:srgbClr val="5F7183"/>
+                </a:solidFill>
+                <a:latin typeface="Arial" pitchFamily="34" charset="0"/>
+                <a:ea typeface="Arial" pitchFamily="34" charset="-122"/>
+                <a:cs typeface="Arial" pitchFamily="34" charset="-120"/>
+              </a:rPr>
+              <a:t>動圖：課程自製（示意）</a:t>
+            </a:r>
+            <a:endParaRPr lang="en-US" sz="700" dirty="0"/>
+          </a:p>
+        </p:txBody>
+      </p:sp>
+      <p:sp>
+        <p:nvSpPr>
+          <p:cNvPr id="6" name="Text 3"/>
           <p:cNvSpPr txBox="1"/>
           <p:nvPr/>
         </p:nvSpPr>
         <p:spPr>
           <a:xfrm>
-            <a:off x="3429000" y="914400"/>
-            <a:ext cx="5212080" cy="2889504"/>
+            <a:off x="4119372" y="914400"/>
+            <a:ext cx="4521708" cy="2889504"/>
           </a:xfrm>
           <a:prstGeom prst="rect">
             <a:avLst/>
@@ -5759,7 +5806,7 @@
                 <a:ea typeface="Arial" pitchFamily="34" charset="-122"/>
                 <a:cs typeface="Arial" pitchFamily="34" charset="-120"/>
               </a:rPr>
-              <a:t>L2: báo tài xế cầm lái lại. L4: không có tài xế, tự đưa xe về «trạng thái rủi ro tối thiểu», ví dụ tấp vào lề. Ra khỏi ODD (mưa quá to, vào vùng không có bản đồ) là lúc phải hạ cấp.</a:t>
+              <a:t>L2: báo tài xế cầm lái. L4: tự vào «trạng thái rủi ro tối thiểu», ví dụ tấp vào lề. Ra khỏi ODD là phải hạ cấp.</a:t>
             </a:r>
             <a:endParaRPr lang="en-US" sz="2000" dirty="0"/>
           </a:p>
@@ -5779,7 +5826,7 @@
                 <a:ea typeface="微軟正黑體" pitchFamily="34" charset="-122"/>
                 <a:cs typeface="微軟正黑體" pitchFamily="34" charset="-120"/>
               </a:rPr>
-              <a:t>L2：通知駕駛接手。L4：沒有駕駛，自己進入「最小風險狀態」，例如靠邊停。走出 ODD（雨太大、開進沒有地圖的地方），就是該降級的時候。</a:t>
+              <a:t>L2：通知駕駛接手。L4：自己進入「最小風險狀態」，例如靠邊停。走出 ODD 就該降級。</a:t>
             </a:r>
             <a:endParaRPr lang="en-US" sz="2000" dirty="0"/>
           </a:p>
@@ -5787,7 +5834,7 @@
       </p:sp>
       <p:sp>
         <p:nvSpPr>
-          <p:cNvPr id="8" name="Shape 6"/>
+          <p:cNvPr id="7" name="Shape 4"/>
           <p:cNvSpPr/>
           <p:nvPr/>
         </p:nvSpPr>
@@ -5814,7 +5861,7 @@
       </p:sp>
       <p:sp>
         <p:nvSpPr>
-          <p:cNvPr id="9" name="Text 7"/>
+          <p:cNvPr id="8" name="Text 5"/>
           <p:cNvSpPr txBox="1"/>
           <p:nvPr/>
         </p:nvSpPr>
@@ -5876,7 +5923,7 @@
       </p:sp>
       <p:sp>
         <p:nvSpPr>
-          <p:cNvPr id="10" name="Shape 8"/>
+          <p:cNvPr id="9" name="Shape 6"/>
           <p:cNvSpPr/>
           <p:nvPr/>
         </p:nvSpPr>
@@ -5903,7 +5950,7 @@
       </p:sp>
       <p:sp>
         <p:nvSpPr>
-          <p:cNvPr id="11" name="Text 9"/>
+          <p:cNvPr id="10" name="Text 7"/>
           <p:cNvSpPr txBox="1"/>
           <p:nvPr/>
         </p:nvSpPr>
@@ -5999,14 +6046,14 @@
       </p:sp>
       <p:pic>
         <p:nvPicPr>
-          <p:cNvPr id="13" name="Image 0" descr="/Users/tsengchenghsun/Class/carClass/Claude outputs/第七週(10-22)/src/logo.png">    </p:cNvPr>
+          <p:cNvPr id="12" name="Image 1" descr="/Users/tsengchenghsun/Class/carClass/Claude outputs/第七週(10-22)/src/logo.png">    </p:cNvPr>
           <p:cNvPicPr>
             <a:picLocks noChangeAspect="1"/>
           </p:cNvPicPr>
           <p:nvPr/>
         </p:nvPicPr>
         <p:blipFill>
-          <a:blip r:embed="rId1"/>
+          <a:blip r:embed="rId2"/>
           <a:stretch>
             <a:fillRect/>
           </a:stretch>
@@ -6023,7 +6070,7 @@
       </p:pic>
       <p:sp>
         <p:nvSpPr>
-          <p:cNvPr id="14" name="Text 10"/>
+          <p:cNvPr id="13" name="Text 8"/>
           <p:cNvSpPr txBox="1"/>
           <p:nvPr/>
         </p:nvSpPr>
@@ -6062,7 +6109,7 @@
       </p:sp>
       <p:sp>
         <p:nvSpPr>
-          <p:cNvPr id="15" name="Text 11"/>
+          <p:cNvPr id="14" name="Text 9"/>
           <p:cNvSpPr txBox="1"/>
           <p:nvPr/>
         </p:nvSpPr>

--- a/第七週(10-22)/第七週_第2節_簡報.pptx
+++ b/第七週(10-22)/第七週_第2節_簡報.pptx
@@ -1472,19 +1472,19 @@
                 <a:spcPts val="0"/>
               </a:spcBef>
               <a:spcAft>
-                <a:spcPts val="200"/>
+                <a:spcPts val="133"/>
               </a:spcAft>
             </a:pPr>
             <a:r>
-              <a:rPr sz="1200" lang="zh-TW" dirty="0">
-                <a:solidFill>
-                  <a:srgbClr val="000000"/>
-                </a:solidFill>
-                <a:latin typeface="Arial Unicode MS"/>
-                <a:ea typeface="Arial Unicode MS"/>
-                <a:cs typeface="Arial Unicode MS"/>
-              </a:rPr>
-              <a:t>三句話。
+              <a:rPr sz="800" lang="zh-TW" dirty="0">
+                <a:solidFill>
+                  <a:srgbClr val="000000"/>
+                </a:solidFill>
+                <a:latin typeface="Arial Unicode MS"/>
+                <a:ea typeface="Arial Unicode MS"/>
+                <a:cs typeface="Arial Unicode MS"/>
+              </a:rPr>
+              <a:t>這一節講了很多，收成三句話帶走。
 </a:t>
             </a:r>
           </a:p>
@@ -1494,30 +1494,30 @@
                 <a:spcPts val="0"/>
               </a:spcBef>
               <a:spcAft>
-                <a:spcPts val="200"/>
+                <a:spcPts val="133"/>
               </a:spcAft>
             </a:pPr>
             <a:r>
-              <a:rPr sz="1200" b="1" lang="zh-TW" dirty="0">
-                <a:solidFill>
-                  <a:srgbClr val="000000"/>
-                </a:solidFill>
-                <a:latin typeface="Arial Unicode MS"/>
-                <a:ea typeface="Arial Unicode MS"/>
-                <a:cs typeface="Arial Unicode MS"/>
-              </a:rPr>
-              <a:t>第一句，合之前要先對齊。</a:t>
-            </a:r>
-            <a:r>
-              <a:rPr sz="1200" lang="zh-TW" dirty="0">
-                <a:solidFill>
-                  <a:srgbClr val="000000"/>
-                </a:solidFill>
-                <a:latin typeface="Arial Unicode MS"/>
-                <a:ea typeface="Arial Unicode MS"/>
-                <a:cs typeface="Arial Unicode MS"/>
-              </a:rPr>
-              <a:t>空間對齊叫標定，時間對齊叫同步。今天那張圖，差四度，光達點就從車上滑掉了。
+              <a:rPr sz="800" b="1" lang="zh-TW" dirty="0">
+                <a:solidFill>
+                  <a:srgbClr val="000000"/>
+                </a:solidFill>
+                <a:latin typeface="Arial Unicode MS"/>
+                <a:ea typeface="Arial Unicode MS"/>
+                <a:cs typeface="Arial Unicode MS"/>
+              </a:rPr>
+              <a:t>第一句：合起來之前，要先對齊。</a:t>
+            </a:r>
+            <a:r>
+              <a:rPr sz="800" lang="zh-TW" dirty="0">
+                <a:solidFill>
+                  <a:srgbClr val="000000"/>
+                </a:solidFill>
+                <a:latin typeface="Arial Unicode MS"/>
+                <a:ea typeface="Arial Unicode MS"/>
+                <a:cs typeface="Arial Unicode MS"/>
+              </a:rPr>
+              <a:t>對齊有兩種。
 </a:t>
             </a:r>
           </a:p>
@@ -1527,30 +1527,63 @@
                 <a:spcPts val="0"/>
               </a:spcBef>
               <a:spcAft>
-                <a:spcPts val="200"/>
+                <a:spcPts val="133"/>
               </a:spcAft>
             </a:pPr>
             <a:r>
-              <a:rPr sz="1200" b="1" lang="zh-TW" dirty="0">
-                <a:solidFill>
-                  <a:srgbClr val="000000"/>
-                </a:solidFill>
-                <a:latin typeface="Arial Unicode MS"/>
-                <a:ea typeface="Arial Unicode MS"/>
-                <a:cs typeface="Arial Unicode MS"/>
-              </a:rPr>
-              <a:t>第二句，說法不一樣的時候。</a:t>
-            </a:r>
-            <a:r>
-              <a:rPr sz="1200" lang="zh-TW" dirty="0">
-                <a:solidFill>
-                  <a:srgbClr val="000000"/>
-                </a:solidFill>
-                <a:latin typeface="Arial Unicode MS"/>
-                <a:ea typeface="Arial Unicode MS"/>
-                <a:cs typeface="Arial Unicode MS"/>
-              </a:rPr>
-              <a:t>看條件決定信誰、多數決、保守原則，三種都有代價；感測器自己說「我不可靠」，它的權重就降下來。
+              <a:rPr sz="800" lang="zh-TW" dirty="0">
+                <a:solidFill>
+                  <a:srgbClr val="000000"/>
+                </a:solidFill>
+                <a:latin typeface="Arial Unicode MS"/>
+                <a:ea typeface="Arial Unicode MS"/>
+                <a:cs typeface="Arial Unicode MS"/>
+              </a:rPr>
+              <a:t>第一種是</a:t>
+            </a:r>
+            <a:r>
+              <a:rPr sz="800" b="1" lang="zh-TW" dirty="0">
+                <a:solidFill>
+                  <a:srgbClr val="000000"/>
+                </a:solidFill>
+                <a:latin typeface="Arial Unicode MS"/>
+                <a:ea typeface="Arial Unicode MS"/>
+                <a:cs typeface="Arial Unicode MS"/>
+              </a:rPr>
+              <a:t>空間</a:t>
+            </a:r>
+            <a:r>
+              <a:rPr sz="800" lang="zh-TW" dirty="0">
+                <a:solidFill>
+                  <a:srgbClr val="000000"/>
+                </a:solidFill>
+                <a:latin typeface="Arial Unicode MS"/>
+                <a:ea typeface="Arial Unicode MS"/>
+                <a:cs typeface="Arial Unicode MS"/>
+              </a:rPr>
+              <a:t>。就像教室裡三個同學坐在不同位置，各自說「垃圾桶在我右前方兩公尺」，你要先知道每個人坐哪、臉朝哪，才能把三句話畫在同一張教室平面圖上。車上的相機、光達、雷達也一樣，每一顆都用自己的位置在說話，要先量出它裝在車身的哪裡、朝哪個方向，這叫</a:t>
+            </a:r>
+            <a:r>
+              <a:rPr sz="800" b="1" lang="zh-TW" dirty="0">
+                <a:solidFill>
+                  <a:srgbClr val="000000"/>
+                </a:solidFill>
+                <a:latin typeface="Arial Unicode MS"/>
+                <a:ea typeface="Arial Unicode MS"/>
+                <a:cs typeface="Arial Unicode MS"/>
+              </a:rPr>
+              <a:t>標定</a:t>
+            </a:r>
+            <a:r>
+              <a:rPr sz="800" lang="zh-TW" dirty="0">
+                <a:solidFill>
+                  <a:srgbClr val="000000"/>
+                </a:solidFill>
+                <a:latin typeface="Arial Unicode MS"/>
+                <a:ea typeface="Arial Unicode MS"/>
+                <a:cs typeface="Arial Unicode MS"/>
+              </a:rPr>
+              <a:t>，量出來的六個數字叫外參。第四張那兩張圖看過：光達只要多轉四度，點就從那台廂型車上整片滑到旁邊的樹上。真的車不會差到四度，可是差一度，五十公尺外就差將近一公尺，快半個車道。
 </a:t>
             </a:r>
           </a:p>
@@ -1560,30 +1593,63 @@
                 <a:spcPts val="0"/>
               </a:spcBef>
               <a:spcAft>
-                <a:spcPts val="200"/>
+                <a:spcPts val="133"/>
               </a:spcAft>
             </a:pPr>
             <a:r>
-              <a:rPr sz="1200" b="1" lang="zh-TW" dirty="0">
-                <a:solidFill>
-                  <a:srgbClr val="000000"/>
-                </a:solidFill>
-                <a:latin typeface="Arial Unicode MS"/>
-                <a:ea typeface="Arial Unicode MS"/>
-                <a:cs typeface="Arial Unicode MS"/>
-              </a:rPr>
-              <a:t>第三句，比較準的多相信一點。</a:t>
-            </a:r>
-            <a:r>
-              <a:rPr sz="1200" lang="zh-TW" dirty="0">
-                <a:solidFill>
-                  <a:srgbClr val="000000"/>
-                </a:solidFill>
-                <a:latin typeface="Arial Unicode MS"/>
-                <a:ea typeface="Arial Unicode MS"/>
-                <a:cs typeface="Arial Unicode MS"/>
-              </a:rPr>
-              <a:t>誤差差三倍，信任差九倍。隧道裡只剩預測，出隧道一下拉回來。真的合起來也不夠，就降級。
+              <a:rPr sz="800" lang="zh-TW" dirty="0">
+                <a:solidFill>
+                  <a:srgbClr val="000000"/>
+                </a:solidFill>
+                <a:latin typeface="Arial Unicode MS"/>
+                <a:ea typeface="Arial Unicode MS"/>
+                <a:cs typeface="Arial Unicode MS"/>
+              </a:rPr>
+              <a:t>第二種是</a:t>
+            </a:r>
+            <a:r>
+              <a:rPr sz="800" b="1" lang="zh-TW" dirty="0">
+                <a:solidFill>
+                  <a:srgbClr val="000000"/>
+                </a:solidFill>
+                <a:latin typeface="Arial Unicode MS"/>
+                <a:ea typeface="Arial Unicode MS"/>
+                <a:cs typeface="Arial Unicode MS"/>
+              </a:rPr>
+              <a:t>時間</a:t>
+            </a:r>
+            <a:r>
+              <a:rPr sz="800" lang="zh-TW" dirty="0">
+                <a:solidFill>
+                  <a:srgbClr val="000000"/>
+                </a:solidFill>
+                <a:latin typeface="Arial Unicode MS"/>
+                <a:ea typeface="Arial Unicode MS"/>
+                <a:cs typeface="Arial Unicode MS"/>
+              </a:rPr>
+              <a:t>。就像兩個人拍同一台開過去的車，一個人晚半秒按快門，兩張照片疊起來，車子就變成兩台。三種感測器拍的時刻都不一樣：光達每秒二十次、雷達十三次、相機十二次。第五張看過：光達早零點二秒，車身上的點就留在車子剛剛的位置，車頭反而沒有點。所以要</a:t>
+            </a:r>
+            <a:r>
+              <a:rPr sz="800" b="1" lang="zh-TW" dirty="0">
+                <a:solidFill>
+                  <a:srgbClr val="000000"/>
+                </a:solidFill>
+                <a:latin typeface="Arial Unicode MS"/>
+                <a:ea typeface="Arial Unicode MS"/>
+                <a:cs typeface="Arial Unicode MS"/>
+              </a:rPr>
+              <a:t>同步</a:t>
+            </a:r>
+            <a:r>
+              <a:rPr sz="800" lang="zh-TW" dirty="0">
+                <a:solidFill>
+                  <a:srgbClr val="000000"/>
+                </a:solidFill>
+                <a:latin typeface="Arial Unicode MS"/>
+                <a:ea typeface="Arial Unicode MS"/>
+                <a:cs typeface="Arial Unicode MS"/>
+              </a:rPr>
+              <a:t>。空間沒對齊會錯，時間沒對齊也會錯。
 </a:t>
             </a:r>
           </a:p>
@@ -1593,19 +1659,382 @@
                 <a:spcPts val="0"/>
               </a:spcBef>
               <a:spcAft>
-                <a:spcPts val="200"/>
+                <a:spcPts val="133"/>
               </a:spcAft>
             </a:pPr>
             <a:r>
-              <a:rPr sz="1200" lang="zh-TW" dirty="0">
-                <a:solidFill>
-                  <a:srgbClr val="000000"/>
-                </a:solidFill>
-                <a:latin typeface="Arial Unicode MS"/>
-                <a:ea typeface="Arial Unicode MS"/>
-                <a:cs typeface="Arial Unicode MS"/>
-              </a:rPr>
-              <a:t>下一節，各位自己打開 nuScenes：同一個瞬間，相機、光達、雷達各看到什麼，自己拼一次第一組搭檔，再把第三週那張「誰補誰」的表真的填完。</a:t>
+              <a:rPr sz="800" b="1" lang="zh-TW" dirty="0">
+                <a:solidFill>
+                  <a:srgbClr val="000000"/>
+                </a:solidFill>
+                <a:latin typeface="Arial Unicode MS"/>
+                <a:ea typeface="Arial Unicode MS"/>
+                <a:cs typeface="Arial Unicode MS"/>
+              </a:rPr>
+              <a:t>第二句：兩顆說的不一樣，要聽誰的？</a:t>
+            </a:r>
+            <a:r>
+              <a:rPr sz="800" lang="zh-TW" dirty="0">
+                <a:solidFill>
+                  <a:srgbClr val="000000"/>
+                </a:solidFill>
+                <a:latin typeface="Arial Unicode MS"/>
+                <a:ea typeface="Arial Unicode MS"/>
+                <a:cs typeface="Arial Unicode MS"/>
+              </a:rPr>
+              <a:t>開場那一題：雷達說前方六十公尺有東西，相機說沒有車。第八張講了三種做法。
+</a:t>
+            </a:r>
+          </a:p>
+          <a:p>
+            <a:pPr algn="l">
+              <a:spcBef>
+                <a:spcPts val="0"/>
+              </a:spcBef>
+              <a:spcAft>
+                <a:spcPts val="133"/>
+              </a:spcAft>
+            </a:pPr>
+            <a:r>
+              <a:rPr sz="800" lang="zh-TW" dirty="0">
+                <a:solidFill>
+                  <a:srgbClr val="000000"/>
+                </a:solidFill>
+                <a:latin typeface="Arial Unicode MS"/>
+                <a:ea typeface="Arial Unicode MS"/>
+                <a:cs typeface="Arial Unicode MS"/>
+              </a:rPr>
+              <a:t>第一種，</a:t>
+            </a:r>
+            <a:r>
+              <a:rPr sz="800" b="1" lang="zh-TW" dirty="0">
+                <a:solidFill>
+                  <a:srgbClr val="000000"/>
+                </a:solidFill>
+                <a:latin typeface="Arial Unicode MS"/>
+                <a:ea typeface="Arial Unicode MS"/>
+                <a:cs typeface="Arial Unicode MS"/>
+              </a:rPr>
+              <a:t>看條件決定信誰</a:t>
+            </a:r>
+            <a:r>
+              <a:rPr sz="800" lang="zh-TW" dirty="0">
+                <a:solidFill>
+                  <a:srgbClr val="000000"/>
+                </a:solidFill>
+                <a:latin typeface="Arial Unicode MS"/>
+                <a:ea typeface="Arial Unicode MS"/>
+                <a:cs typeface="Arial Unicode MS"/>
+              </a:rPr>
+              <a:t>。每一顆有一個「權重」，就是你有多相信它。下雨天少相信相機、多相信雷達；遠處的行人，少相信雷達。好處是聰明，代價是你要事先知道它什麼時候會變差，所以第一節那張失效對照表很重要。
+</a:t>
+            </a:r>
+          </a:p>
+          <a:p>
+            <a:pPr algn="l">
+              <a:spcBef>
+                <a:spcPts val="0"/>
+              </a:spcBef>
+              <a:spcAft>
+                <a:spcPts val="133"/>
+              </a:spcAft>
+            </a:pPr>
+            <a:r>
+              <a:rPr sz="800" lang="zh-TW" dirty="0">
+                <a:solidFill>
+                  <a:srgbClr val="000000"/>
+                </a:solidFill>
+                <a:latin typeface="Arial Unicode MS"/>
+                <a:ea typeface="Arial Unicode MS"/>
+                <a:cs typeface="Arial Unicode MS"/>
+              </a:rPr>
+              <a:t>第二種，</a:t>
+            </a:r>
+            <a:r>
+              <a:rPr sz="800" b="1" lang="zh-TW" dirty="0">
+                <a:solidFill>
+                  <a:srgbClr val="000000"/>
+                </a:solidFill>
+                <a:latin typeface="Arial Unicode MS"/>
+                <a:ea typeface="Arial Unicode MS"/>
+                <a:cs typeface="Arial Unicode MS"/>
+              </a:rPr>
+              <a:t>多數決</a:t>
+            </a:r>
+            <a:r>
+              <a:rPr sz="800" lang="zh-TW" dirty="0">
+                <a:solidFill>
+                  <a:srgbClr val="000000"/>
+                </a:solidFill>
+                <a:latin typeface="Arial Unicode MS"/>
+                <a:ea typeface="Arial Unicode MS"/>
+                <a:cs typeface="Arial Unicode MS"/>
+              </a:rPr>
+              <a:t>。三顆裡兩顆說有，就算有。代價是要有三顆量同一件事；而且如果兩顆被同一個原因騙，例如大雨裡相機和光達一起變差，投票也會投錯。
+</a:t>
+            </a:r>
+          </a:p>
+          <a:p>
+            <a:pPr algn="l">
+              <a:spcBef>
+                <a:spcPts val="0"/>
+              </a:spcBef>
+              <a:spcAft>
+                <a:spcPts val="133"/>
+              </a:spcAft>
+            </a:pPr>
+            <a:r>
+              <a:rPr sz="800" lang="zh-TW" dirty="0">
+                <a:solidFill>
+                  <a:srgbClr val="000000"/>
+                </a:solidFill>
+                <a:latin typeface="Arial Unicode MS"/>
+                <a:ea typeface="Arial Unicode MS"/>
+                <a:cs typeface="Arial Unicode MS"/>
+              </a:rPr>
+              <a:t>第三種，</a:t>
+            </a:r>
+            <a:r>
+              <a:rPr sz="800" b="1" lang="zh-TW" dirty="0">
+                <a:solidFill>
+                  <a:srgbClr val="000000"/>
+                </a:solidFill>
+                <a:latin typeface="Arial Unicode MS"/>
+                <a:ea typeface="Arial Unicode MS"/>
+                <a:cs typeface="Arial Unicode MS"/>
+              </a:rPr>
+              <a:t>保守原則</a:t>
+            </a:r>
+            <a:r>
+              <a:rPr sz="800" lang="zh-TW" dirty="0">
+                <a:solidFill>
+                  <a:srgbClr val="000000"/>
+                </a:solidFill>
+                <a:latin typeface="Arial Unicode MS"/>
+                <a:ea typeface="Arial Unicode MS"/>
+                <a:cs typeface="Arial Unicode MS"/>
+              </a:rPr>
+              <a:t>。只要有一顆說有，就先減速。最安全，代價是常常莫名其妙地煞車，乘客不舒服，後面的車也可能追撞。
+</a:t>
+            </a:r>
+          </a:p>
+          <a:p>
+            <a:pPr algn="l">
+              <a:spcBef>
+                <a:spcPts val="0"/>
+              </a:spcBef>
+              <a:spcAft>
+                <a:spcPts val="133"/>
+              </a:spcAft>
+            </a:pPr>
+            <a:r>
+              <a:rPr sz="800" lang="zh-TW" dirty="0">
+                <a:solidFill>
+                  <a:srgbClr val="000000"/>
+                </a:solidFill>
+                <a:latin typeface="Arial Unicode MS"/>
+                <a:ea typeface="Arial Unicode MS"/>
+                <a:cs typeface="Arial Unicode MS"/>
+              </a:rPr>
+              <a:t>真的車三種混著用。最重要的是：感測器要會說「</a:t>
+            </a:r>
+            <a:r>
+              <a:rPr sz="800" b="1" lang="zh-TW" dirty="0">
+                <a:solidFill>
+                  <a:srgbClr val="000000"/>
+                </a:solidFill>
+                <a:latin typeface="Arial Unicode MS"/>
+                <a:ea typeface="Arial Unicode MS"/>
+                <a:cs typeface="Arial Unicode MS"/>
+              </a:rPr>
+              <a:t>我現在不可靠</a:t>
+            </a:r>
+            <a:r>
+              <a:rPr sz="800" lang="zh-TW" dirty="0">
+                <a:solidFill>
+                  <a:srgbClr val="000000"/>
+                </a:solidFill>
+                <a:latin typeface="Arial Unicode MS"/>
+                <a:ea typeface="Arial Unicode MS"/>
+                <a:cs typeface="Arial Unicode MS"/>
+              </a:rPr>
+              <a:t>」。它一說，它的權重就降下來，別人多扛一點。第一節講「最危險的是看不到卻說沒事」，原因就在這裡。
+</a:t>
+            </a:r>
+          </a:p>
+          <a:p>
+            <a:pPr algn="l">
+              <a:spcBef>
+                <a:spcPts val="0"/>
+              </a:spcBef>
+              <a:spcAft>
+                <a:spcPts val="133"/>
+              </a:spcAft>
+            </a:pPr>
+            <a:r>
+              <a:rPr sz="800" b="1" lang="zh-TW" dirty="0">
+                <a:solidFill>
+                  <a:srgbClr val="000000"/>
+                </a:solidFill>
+                <a:latin typeface="Arial Unicode MS"/>
+                <a:ea typeface="Arial Unicode MS"/>
+                <a:cs typeface="Arial Unicode MS"/>
+              </a:rPr>
+              <a:t>第三句：比較準的，多相信一點。</a:t>
+            </a:r>
+            <a:r>
+              <a:rPr sz="800" lang="zh-TW" dirty="0">
+                <a:solidFill>
+                  <a:srgbClr val="000000"/>
+                </a:solidFill>
+                <a:latin typeface="Arial Unicode MS"/>
+                <a:ea typeface="Arial Unicode MS"/>
+                <a:cs typeface="Arial Unicode MS"/>
+              </a:rPr>
+              <a:t>就像你有兩支錶，一支很準、一支常常快慢，你兩支都看，但比較聽準的那支。第九張那支動圖算過：IMU 推算一百二十公尺，誤差正負一；GPS 說一百一十八公尺，誤差正負三。誤差差三倍，信任要差九倍，三乘三，所以 IMU 拿九份、GPS 拿一份，合起來是一百一十九點八公尺。為什麼是平方，不是三倍？數學上可以證明，這樣分配，合起來的誤差會最小；證明要用到統計，這門課先記口訣就好：</a:t>
+            </a:r>
+            <a:r>
+              <a:rPr sz="800" b="1" lang="zh-TW" dirty="0">
+                <a:solidFill>
+                  <a:srgbClr val="000000"/>
+                </a:solidFill>
+                <a:latin typeface="Arial Unicode MS"/>
+                <a:ea typeface="Arial Unicode MS"/>
+                <a:cs typeface="Arial Unicode MS"/>
+              </a:rPr>
+              <a:t>誤差差幾倍，信任就差那個數字的平方倍。</a:t>
+            </a:r>
+            <a:r>
+              <a:rPr sz="800" lang="zh-TW" dirty="0">
+                <a:solidFill>
+                  <a:srgbClr val="000000"/>
+                </a:solidFill>
+                <a:latin typeface="Arial Unicode MS"/>
+                <a:ea typeface="Arial Unicode MS"/>
+                <a:cs typeface="Arial Unicode MS"/>
+              </a:rPr>
+              <a:t>而且合起來的結果，比兩個單獨的都更確定。
+</a:t>
+            </a:r>
+          </a:p>
+          <a:p>
+            <a:pPr algn="l">
+              <a:spcBef>
+                <a:spcPts val="0"/>
+              </a:spcBef>
+              <a:spcAft>
+                <a:spcPts val="133"/>
+              </a:spcAft>
+            </a:pPr>
+            <a:r>
+              <a:rPr sz="800" lang="zh-TW" dirty="0">
+                <a:solidFill>
+                  <a:srgbClr val="000000"/>
+                </a:solidFill>
+                <a:latin typeface="Arial Unicode MS"/>
+                <a:ea typeface="Arial Unicode MS"/>
+                <a:cs typeface="Arial Unicode MS"/>
+              </a:rPr>
+              <a:t>進了隧道，GPS 沒了，只剩預測，誤差圈一秒一秒變大；出了隧道，GPS 一回來，一下就拉回來。
+</a:t>
+            </a:r>
+          </a:p>
+          <a:p>
+            <a:pPr algn="l">
+              <a:spcBef>
+                <a:spcPts val="0"/>
+              </a:spcBef>
+              <a:spcAft>
+                <a:spcPts val="133"/>
+              </a:spcAft>
+            </a:pPr>
+            <a:r>
+              <a:rPr sz="800" lang="zh-TW" dirty="0">
+                <a:solidFill>
+                  <a:srgbClr val="000000"/>
+                </a:solidFill>
+                <a:latin typeface="Arial Unicode MS"/>
+                <a:ea typeface="Arial Unicode MS"/>
+                <a:cs typeface="Arial Unicode MS"/>
+              </a:rPr>
+              <a:t>如果壞到合起來也不夠呢？第十張：</a:t>
+            </a:r>
+            <a:r>
+              <a:rPr sz="800" b="1" lang="zh-TW" dirty="0">
+                <a:solidFill>
+                  <a:srgbClr val="000000"/>
+                </a:solidFill>
+                <a:latin typeface="Arial Unicode MS"/>
+                <a:ea typeface="Arial Unicode MS"/>
+                <a:cs typeface="Arial Unicode MS"/>
+              </a:rPr>
+              <a:t>降級</a:t>
+            </a:r>
+            <a:r>
+              <a:rPr sz="800" lang="zh-TW" dirty="0">
+                <a:solidFill>
+                  <a:srgbClr val="000000"/>
+                </a:solidFill>
+                <a:latin typeface="Arial Unicode MS"/>
+                <a:ea typeface="Arial Unicode MS"/>
+                <a:cs typeface="Arial Unicode MS"/>
+              </a:rPr>
+              <a:t>。雨大到相機看不見、光達也變短，就是走出 ODD 了。L2 的車會叫駕駛接手；L4 的車沒有駕駛，自己減速、打雙黃燈、靠右邊停下來。
+</a:t>
+            </a:r>
+          </a:p>
+          <a:p>
+            <a:pPr algn="l">
+              <a:spcBef>
+                <a:spcPts val="0"/>
+              </a:spcBef>
+              <a:spcAft>
+                <a:spcPts val="133"/>
+              </a:spcAft>
+            </a:pPr>
+            <a:r>
+              <a:rPr sz="800" lang="zh-TW" dirty="0">
+                <a:solidFill>
+                  <a:srgbClr val="000000"/>
+                </a:solidFill>
+                <a:latin typeface="Arial Unicode MS"/>
+                <a:ea typeface="Arial Unicode MS"/>
+                <a:cs typeface="Arial Unicode MS"/>
+              </a:rPr>
+              <a:t>最後，第十一張那五組搭檔，其實只有兩種模式：一個管「是什麼」，一個管「多遠、多快」；或是一個壞了，另一個先頂上。
+</a:t>
+            </a:r>
+          </a:p>
+          <a:p>
+            <a:pPr algn="l">
+              <a:spcBef>
+                <a:spcPts val="0"/>
+              </a:spcBef>
+              <a:spcAft>
+                <a:spcPts val="133"/>
+              </a:spcAft>
+            </a:pPr>
+            <a:r>
+              <a:rPr sz="800" b="1" lang="zh-TW" dirty="0">
+                <a:solidFill>
+                  <a:srgbClr val="000000"/>
+                </a:solidFill>
+                <a:latin typeface="Arial Unicode MS"/>
+                <a:ea typeface="Arial Unicode MS"/>
+                <a:cs typeface="Arial Unicode MS"/>
+              </a:rPr>
+              <a:t>下一節</a:t>
+            </a:r>
+            <a:r>
+              <a:rPr sz="800" lang="zh-TW" dirty="0">
+                <a:solidFill>
+                  <a:srgbClr val="000000"/>
+                </a:solidFill>
+                <a:latin typeface="Arial Unicode MS"/>
+                <a:ea typeface="Arial Unicode MS"/>
+                <a:cs typeface="Arial Unicode MS"/>
+              </a:rPr>
+              <a:t>，各位要自己動手。打開 nuScenes 觀察台，看同一個瞬間，相機、光達、雷達各看到什麼；任務五用「合起來」那個開關，自己拼一次第一組搭檔：相機說是什麼、光達說多遠、雷達說多快；最後把第三週那張「誰補誰」的表，真的填完。</a:t>
             </a:r>
           </a:p>
         </p:txBody>

--- a/第七週(10-22)/第七週_第2節_簡報.pptx
+++ b/第七週(10-22)/第七週_第2節_簡報.pptx
@@ -2847,11 +2847,11 @@
                 <a:spcPts val="0"/>
               </a:spcBef>
               <a:spcAft>
-                <a:spcPts val="142"/>
+                <a:spcPts val="133"/>
               </a:spcAft>
             </a:pPr>
             <a:r>
-              <a:rPr sz="850" lang="zh-TW" dirty="0">
+              <a:rPr sz="800" lang="zh-TW" dirty="0">
                 <a:solidFill>
                   <a:srgbClr val="000000"/>
                 </a:solidFill>
@@ -2862,7 +2862,7 @@
               <a:t>要合起來，第一件事：</a:t>
             </a:r>
             <a:r>
-              <a:rPr sz="850" b="1" lang="zh-TW" dirty="0">
+              <a:rPr sz="800" b="1" lang="zh-TW" dirty="0">
                 <a:solidFill>
                   <a:srgbClr val="000000"/>
                 </a:solidFill>
@@ -2873,7 +2873,7 @@
               <a:t>大家要對齊同一個空間。</a:t>
             </a:r>
             <a:r>
-              <a:rPr sz="850" lang="zh-TW" dirty="0">
+              <a:rPr sz="800" lang="zh-TW" dirty="0">
                 <a:solidFill>
                   <a:srgbClr val="000000"/>
                 </a:solidFill>
@@ -2891,11 +2891,11 @@
                 <a:spcPts val="0"/>
               </a:spcBef>
               <a:spcAft>
-                <a:spcPts val="142"/>
+                <a:spcPts val="133"/>
               </a:spcAft>
             </a:pPr>
             <a:r>
-              <a:rPr sz="850" lang="zh-TW" dirty="0">
+              <a:rPr sz="800" lang="zh-TW" dirty="0">
                 <a:solidFill>
                   <a:srgbClr val="000000"/>
                 </a:solidFill>
@@ -2906,7 +2906,7 @@
               <a:t>先想一個教室裡的例子。三個同學坐在不同的位置、臉朝不同的方向。老師問：「垃圾桶在哪裡？」坐前排、面向黑板的同學說：「在我右前方兩公尺。」坐後排、面向窗戶的同學說：「在我正前方五公尺。」兩個人都沒說錯，可是你沒辦法把這兩句話直接畫在同一張教室平面圖上。你得先知道：</a:t>
             </a:r>
             <a:r>
-              <a:rPr sz="850" b="1" lang="zh-TW" dirty="0">
+              <a:rPr sz="800" b="1" lang="zh-TW" dirty="0">
                 <a:solidFill>
                   <a:srgbClr val="000000"/>
                 </a:solidFill>
@@ -2917,7 +2917,7 @@
               <a:t>每個人坐在哪一個座位、臉朝哪個方向。</a:t>
             </a:r>
             <a:r>
-              <a:rPr sz="850" lang="zh-TW" dirty="0">
+              <a:rPr sz="800" lang="zh-TW" dirty="0">
                 <a:solidFill>
                   <a:srgbClr val="000000"/>
                 </a:solidFill>
@@ -2935,11 +2935,11 @@
                 <a:spcPts val="0"/>
               </a:spcBef>
               <a:spcAft>
-                <a:spcPts val="142"/>
+                <a:spcPts val="133"/>
               </a:spcAft>
             </a:pPr>
             <a:r>
-              <a:rPr sz="850" lang="zh-TW" dirty="0">
+              <a:rPr sz="800" lang="zh-TW" dirty="0">
                 <a:solidFill>
                   <a:srgbClr val="000000"/>
                 </a:solidFill>
@@ -2950,7 +2950,7 @@
               <a:t>車上完全一樣。相機在擋風玻璃後面，光達在車頂，雷達在保險桿。每一顆回報的，都是「東西在</a:t>
             </a:r>
             <a:r>
-              <a:rPr sz="850" b="1" lang="zh-TW" dirty="0">
+              <a:rPr sz="800" b="1" lang="zh-TW" dirty="0">
                 <a:solidFill>
                   <a:srgbClr val="000000"/>
                 </a:solidFill>
@@ -2961,7 +2961,7 @@
               <a:t>我</a:t>
             </a:r>
             <a:r>
-              <a:rPr sz="850" lang="zh-TW" dirty="0">
+              <a:rPr sz="800" lang="zh-TW" dirty="0">
                 <a:solidFill>
                   <a:srgbClr val="000000"/>
                 </a:solidFill>
@@ -2972,7 +2972,7 @@
               <a:t>的哪個方向、離</a:t>
             </a:r>
             <a:r>
-              <a:rPr sz="850" b="1" lang="zh-TW" dirty="0">
+              <a:rPr sz="800" b="1" lang="zh-TW" dirty="0">
                 <a:solidFill>
                   <a:srgbClr val="000000"/>
                 </a:solidFill>
@@ -2983,7 +2983,7 @@
               <a:t>我</a:t>
             </a:r>
             <a:r>
-              <a:rPr sz="850" lang="zh-TW" dirty="0">
+              <a:rPr sz="800" lang="zh-TW" dirty="0">
                 <a:solidFill>
                   <a:srgbClr val="000000"/>
                 </a:solidFill>
@@ -2994,7 +2994,7 @@
               <a:t>多遠」。要合起來，得先知道每一顆</a:t>
             </a:r>
             <a:r>
-              <a:rPr sz="850" b="1" lang="zh-TW" dirty="0">
+              <a:rPr sz="800" b="1" lang="zh-TW" dirty="0">
                 <a:solidFill>
                   <a:srgbClr val="000000"/>
                 </a:solidFill>
@@ -3005,7 +3005,7 @@
               <a:t>裝在車上的哪裡、朝哪個方向</a:t>
             </a:r>
             <a:r>
-              <a:rPr sz="850" lang="zh-TW" dirty="0">
+              <a:rPr sz="800" lang="zh-TW" dirty="0">
                 <a:solidFill>
                   <a:srgbClr val="000000"/>
                 </a:solidFill>
@@ -3016,7 +3016,7 @@
               <a:t>。這組數字就叫</a:t>
             </a:r>
             <a:r>
-              <a:rPr sz="850" b="1" lang="zh-TW" dirty="0">
+              <a:rPr sz="800" b="1" lang="zh-TW" dirty="0">
                 <a:solidFill>
                   <a:srgbClr val="000000"/>
                 </a:solidFill>
@@ -3027,7 +3027,7 @@
               <a:t>外參</a:t>
             </a:r>
             <a:r>
-              <a:rPr sz="850" lang="zh-TW" dirty="0">
+              <a:rPr sz="800" lang="zh-TW" dirty="0">
                 <a:solidFill>
                   <a:srgbClr val="000000"/>
                 </a:solidFill>
@@ -3038,7 +3038,7 @@
               <a:t>，第五週講過：它是對</a:t>
             </a:r>
             <a:r>
-              <a:rPr sz="850" b="1" lang="zh-TW" dirty="0">
+              <a:rPr sz="800" b="1" lang="zh-TW" dirty="0">
                 <a:solidFill>
                   <a:srgbClr val="000000"/>
                 </a:solidFill>
@@ -3049,7 +3049,7 @@
               <a:t>車身</a:t>
             </a:r>
             <a:r>
-              <a:rPr sz="850" lang="zh-TW" dirty="0">
+              <a:rPr sz="800" lang="zh-TW" dirty="0">
                 <a:solidFill>
                   <a:srgbClr val="000000"/>
                 </a:solidFill>
@@ -3060,7 +3060,7 @@
               <a:t>量的，不是對另一顆感測器。量出這組數字的工作，叫</a:t>
             </a:r>
             <a:r>
-              <a:rPr sz="850" b="1" lang="zh-TW" dirty="0">
+              <a:rPr sz="800" b="1" lang="zh-TW" dirty="0">
                 <a:solidFill>
                   <a:srgbClr val="000000"/>
                 </a:solidFill>
@@ -3071,7 +3071,7 @@
               <a:t>外參標定</a:t>
             </a:r>
             <a:r>
-              <a:rPr sz="850" lang="zh-TW" dirty="0">
+              <a:rPr sz="800" lang="zh-TW" dirty="0">
                 <a:solidFill>
                   <a:srgbClr val="000000"/>
                 </a:solidFill>
@@ -3089,11 +3089,11 @@
                 <a:spcPts val="0"/>
               </a:spcBef>
               <a:spcAft>
-                <a:spcPts val="142"/>
+                <a:spcPts val="133"/>
               </a:spcAft>
             </a:pPr>
             <a:r>
-              <a:rPr sz="850" lang="zh-TW" dirty="0">
+              <a:rPr sz="800" lang="zh-TW" dirty="0">
                 <a:solidFill>
                   <a:srgbClr val="000000"/>
                 </a:solidFill>
@@ -3104,7 +3104,7 @@
               <a:t>外參到底是什麼？就是每一顆六個數字。位置三個：往前多少、往左多少、離地多高。方向三個：左右轉了幾度、上下仰了幾度、有沒有歪向一邊。nuScenes 每一顆感測器都附了這六個數字，舉幾個真的：前方相機裝在後輪軸往前一點七公尺、離地一點五公尺；光達在後輪軸往前零點九公尺、離地一點八公尺；前雷達在最前面，往前三點四公尺、離地零點五公尺；左前角那顆雷達，往前二點四公尺、往左零點八公尺，而且它是</a:t>
             </a:r>
             <a:r>
-              <a:rPr sz="850" b="1" lang="zh-TW" dirty="0">
+              <a:rPr sz="800" b="1" lang="zh-TW" dirty="0">
                 <a:solidFill>
                   <a:srgbClr val="000000"/>
                 </a:solidFill>
@@ -3115,7 +3115,7 @@
               <a:t>朝左邊</a:t>
             </a:r>
             <a:r>
-              <a:rPr sz="850" lang="zh-TW" dirty="0">
+              <a:rPr sz="800" lang="zh-TW" dirty="0">
                 <a:solidFill>
                   <a:srgbClr val="000000"/>
                 </a:solidFill>
@@ -3133,11 +3133,11 @@
                 <a:spcPts val="0"/>
               </a:spcBef>
               <a:spcAft>
-                <a:spcPts val="142"/>
+                <a:spcPts val="133"/>
               </a:spcAft>
             </a:pPr>
             <a:r>
-              <a:rPr sz="850" lang="zh-TW" dirty="0">
+              <a:rPr sz="800" lang="zh-TW" dirty="0">
                 <a:solidFill>
                   <a:srgbClr val="000000"/>
                 </a:solidFill>
@@ -3148,7 +3148,7 @@
               <a:t>方向特別要緊。nuScenes 這顆光達，它自己的「正前方」，其實是朝</a:t>
             </a:r>
             <a:r>
-              <a:rPr sz="850" b="1" lang="zh-TW" dirty="0">
+              <a:rPr sz="800" b="1" lang="zh-TW" dirty="0">
                 <a:solidFill>
                   <a:srgbClr val="000000"/>
                 </a:solidFill>
@@ -3159,7 +3159,7 @@
               <a:t>車子的右邊</a:t>
             </a:r>
             <a:r>
-              <a:rPr sz="850" lang="zh-TW" dirty="0">
+              <a:rPr sz="800" lang="zh-TW" dirty="0">
                 <a:solidFill>
                   <a:srgbClr val="000000"/>
                 </a:solidFill>
@@ -3177,11 +3177,11 @@
                 <a:spcPts val="0"/>
               </a:spcBef>
               <a:spcAft>
-                <a:spcPts val="142"/>
+                <a:spcPts val="133"/>
               </a:spcAft>
             </a:pPr>
             <a:r>
-              <a:rPr sz="850" lang="zh-TW" dirty="0">
+              <a:rPr sz="800" lang="zh-TW" dirty="0">
                 <a:solidFill>
                   <a:srgbClr val="000000"/>
                 </a:solidFill>
@@ -3192,7 +3192,7 @@
               <a:t>所以外參不是把幾顆感測器調成「看到一樣的畫面」，每一顆看到的本來就不一樣。外參比較像一本</a:t>
             </a:r>
             <a:r>
-              <a:rPr sz="850" b="1" lang="zh-TW" dirty="0">
+              <a:rPr sz="800" b="1" lang="zh-TW" dirty="0">
                 <a:solidFill>
                   <a:srgbClr val="000000"/>
                 </a:solidFill>
@@ -3203,7 +3203,7 @@
               <a:t>換算表</a:t>
             </a:r>
             <a:r>
-              <a:rPr sz="850" lang="zh-TW" dirty="0">
+              <a:rPr sz="800" lang="zh-TW" dirty="0">
                 <a:solidFill>
                   <a:srgbClr val="000000"/>
                 </a:solidFill>
@@ -3221,11 +3221,11 @@
                 <a:spcPts val="0"/>
               </a:spcBef>
               <a:spcAft>
-                <a:spcPts val="142"/>
+                <a:spcPts val="133"/>
               </a:spcAft>
             </a:pPr>
             <a:r>
-              <a:rPr sz="850" lang="zh-TW" dirty="0">
+              <a:rPr sz="800" lang="zh-TW" dirty="0">
                 <a:solidFill>
                   <a:srgbClr val="000000"/>
                 </a:solidFill>
@@ -3243,11 +3243,11 @@
                 <a:spcPts val="0"/>
               </a:spcBef>
               <a:spcAft>
-                <a:spcPts val="142"/>
+                <a:spcPts val="133"/>
               </a:spcAft>
             </a:pPr>
             <a:r>
-              <a:rPr sz="850" b="1" lang="zh-TW" dirty="0">
+              <a:rPr sz="800" b="1" lang="zh-TW" dirty="0">
                 <a:solidFill>
                   <a:srgbClr val="000000"/>
                 </a:solidFill>
@@ -3258,7 +3258,7 @@
               <a:t>左邊，標定正確。</a:t>
             </a:r>
             <a:r>
-              <a:rPr sz="850" lang="zh-TW" dirty="0">
+              <a:rPr sz="800" lang="zh-TW" dirty="0">
                 <a:solidFill>
                   <a:srgbClr val="000000"/>
                 </a:solidFill>
@@ -3276,11 +3276,11 @@
                 <a:spcPts val="0"/>
               </a:spcBef>
               <a:spcAft>
-                <a:spcPts val="142"/>
+                <a:spcPts val="133"/>
               </a:spcAft>
             </a:pPr>
             <a:r>
-              <a:rPr sz="850" b="1" lang="zh-TW" dirty="0">
+              <a:rPr sz="800" b="1" lang="zh-TW" dirty="0">
                 <a:solidFill>
                   <a:srgbClr val="000000"/>
                 </a:solidFill>
@@ -3291,7 +3291,7 @@
               <a:t>右邊，同一格資料，我故意把光達多轉了四度。</a:t>
             </a:r>
             <a:r>
-              <a:rPr sz="850" lang="zh-TW" dirty="0">
+              <a:rPr sz="800" lang="zh-TW" dirty="0">
                 <a:solidFill>
                   <a:srgbClr val="000000"/>
                 </a:solidFill>
@@ -3309,11 +3309,11 @@
                 <a:spcPts val="0"/>
               </a:spcBef>
               <a:spcAft>
-                <a:spcPts val="142"/>
+                <a:spcPts val="133"/>
               </a:spcAft>
             </a:pPr>
             <a:r>
-              <a:rPr sz="850" lang="zh-TW" dirty="0">
+              <a:rPr sz="800" lang="zh-TW" dirty="0">
                 <a:solidFill>
                   <a:srgbClr val="000000"/>
                 </a:solidFill>
@@ -3324,7 +3324,7 @@
               <a:t>四度是我故意放大的。真的車上，標定可能只差零點幾度，可是第五週算過：</a:t>
             </a:r>
             <a:r>
-              <a:rPr sz="850" b="1" lang="zh-TW" dirty="0">
+              <a:rPr sz="800" b="1" lang="zh-TW" dirty="0">
                 <a:solidFill>
                   <a:srgbClr val="000000"/>
                 </a:solidFill>
@@ -3335,7 +3335,7 @@
               <a:t>差一度，五十公尺外就差零點八七公尺</a:t>
             </a:r>
             <a:r>
-              <a:rPr sz="850" lang="zh-TW" dirty="0">
+              <a:rPr sz="800" lang="zh-TW" dirty="0">
                 <a:solidFill>
                   <a:srgbClr val="000000"/>
                 </a:solidFill>
@@ -3353,19 +3353,151 @@
                 <a:spcPts val="0"/>
               </a:spcBef>
               <a:spcAft>
-                <a:spcPts val="142"/>
+                <a:spcPts val="133"/>
               </a:spcAft>
             </a:pPr>
             <a:r>
-              <a:rPr sz="850" lang="zh-TW" dirty="0">
-                <a:solidFill>
-                  <a:srgbClr val="000000"/>
-                </a:solidFill>
-                <a:latin typeface="Arial Unicode MS"/>
-                <a:ea typeface="Arial Unicode MS"/>
-                <a:cs typeface="Arial Unicode MS"/>
-              </a:rPr>
-              <a:t>nuScenes 是怎麼標定的？官網寫：相機和光達，用一個三面都有圖案的立方體校正靶，兩顆同時看它，算出彼此的相對位置。雷達則是開車上路，用路邊靜止的東西，反推它裝歪了幾度。</a:t>
+              <a:rPr sz="800" lang="zh-TW" dirty="0">
+                <a:solidFill>
+                  <a:srgbClr val="000000"/>
+                </a:solidFill>
+                <a:latin typeface="Arial Unicode MS"/>
+                <a:ea typeface="Arial Unicode MS"/>
+                <a:cs typeface="Arial Unicode MS"/>
+              </a:rPr>
+              <a:t>nuScenes 是怎麼標定的？它的論文寫了四步。</a:t>
+            </a:r>
+            <a:r>
+              <a:rPr sz="800" b="1" lang="zh-TW" dirty="0">
+                <a:solidFill>
+                  <a:srgbClr val="000000"/>
+                </a:solidFill>
+                <a:latin typeface="Arial Unicode MS"/>
+                <a:ea typeface="Arial Unicode MS"/>
+                <a:cs typeface="Arial Unicode MS"/>
+              </a:rPr>
+              <a:t>光達</a:t>
+            </a:r>
+            <a:r>
+              <a:rPr sz="800" lang="zh-TW" dirty="0">
+                <a:solidFill>
+                  <a:srgbClr val="000000"/>
+                </a:solidFill>
+                <a:latin typeface="Arial Unicode MS"/>
+                <a:ea typeface="Arial Unicode MS"/>
+                <a:cs typeface="Arial Unicode MS"/>
+              </a:rPr>
+              <a:t>：用雷射水平儀，直接量它離車子的原點，也就是後輪軸的正中間，有多遠。</a:t>
+            </a:r>
+            <a:r>
+              <a:rPr sz="800" b="1" lang="zh-TW" dirty="0">
+                <a:solidFill>
+                  <a:srgbClr val="000000"/>
+                </a:solidFill>
+                <a:latin typeface="Arial Unicode MS"/>
+                <a:ea typeface="Arial Unicode MS"/>
+                <a:cs typeface="Arial Unicode MS"/>
+              </a:rPr>
+              <a:t>相機</a:t>
+            </a:r>
+            <a:r>
+              <a:rPr sz="800" lang="zh-TW" dirty="0">
+                <a:solidFill>
+                  <a:srgbClr val="000000"/>
+                </a:solidFill>
+                <a:latin typeface="Arial Unicode MS"/>
+                <a:ea typeface="Arial Unicode MS"/>
+                <a:cs typeface="Arial Unicode MS"/>
+              </a:rPr>
+              <a:t>：在車前擺一個三面都有圖案的立方體校正靶，相機和光達同時看它，算出相機跟光達的相對位置，再接回車身。</a:t>
+            </a:r>
+            <a:r>
+              <a:rPr sz="800" b="1" lang="zh-TW" dirty="0">
+                <a:solidFill>
+                  <a:srgbClr val="000000"/>
+                </a:solidFill>
+                <a:latin typeface="Arial Unicode MS"/>
+                <a:ea typeface="Arial Unicode MS"/>
+                <a:cs typeface="Arial Unicode MS"/>
+              </a:rPr>
+              <a:t>雷達</a:t>
+            </a:r>
+            <a:r>
+              <a:rPr sz="800" lang="zh-TW" dirty="0">
+                <a:solidFill>
+                  <a:srgbClr val="000000"/>
+                </a:solidFill>
+                <a:latin typeface="Arial Unicode MS"/>
+                <a:ea typeface="Arial Unicode MS"/>
+                <a:cs typeface="Arial Unicode MS"/>
+              </a:rPr>
+              <a:t>：先水平裝好，再開車上路，用路邊靜止的東西，反推它左右裝歪了幾度。</a:t>
+            </a:r>
+            <a:r>
+              <a:rPr sz="800" b="1" lang="zh-TW" dirty="0">
+                <a:solidFill>
+                  <a:srgbClr val="000000"/>
+                </a:solidFill>
+                <a:latin typeface="Arial Unicode MS"/>
+                <a:ea typeface="Arial Unicode MS"/>
+                <a:cs typeface="Arial Unicode MS"/>
+              </a:rPr>
+              <a:t>相機的內參</a:t>
+            </a:r>
+            <a:r>
+              <a:rPr sz="800" lang="zh-TW" dirty="0">
+                <a:solidFill>
+                  <a:srgbClr val="000000"/>
+                </a:solidFill>
+                <a:latin typeface="Arial Unicode MS"/>
+                <a:ea typeface="Arial Unicode MS"/>
+                <a:cs typeface="Arial Unicode MS"/>
+              </a:rPr>
+              <a:t>：用一塊印了固定圖案的校正板，算出鏡頭的變形。而且收資料的半年裡，這些數字大約</a:t>
+            </a:r>
+            <a:r>
+              <a:rPr sz="800" b="1" lang="zh-TW" dirty="0">
+                <a:solidFill>
+                  <a:srgbClr val="000000"/>
+                </a:solidFill>
+                <a:latin typeface="Arial Unicode MS"/>
+                <a:ea typeface="Arial Unicode MS"/>
+                <a:cs typeface="Arial Unicode MS"/>
+              </a:rPr>
+              <a:t>每個星期更新兩次</a:t>
+            </a:r>
+            <a:r>
+              <a:rPr sz="800" lang="zh-TW" dirty="0">
+                <a:solidFill>
+                  <a:srgbClr val="000000"/>
+                </a:solidFill>
+                <a:latin typeface="Arial Unicode MS"/>
+                <a:ea typeface="Arial Unicode MS"/>
+                <a:cs typeface="Arial Unicode MS"/>
+              </a:rPr>
+              <a:t>：車子每天在路上震動，標定是會跑掉的。
+</a:t>
+            </a:r>
+          </a:p>
+          <a:p>
+            <a:pPr algn="l">
+              <a:spcBef>
+                <a:spcPts val="0"/>
+              </a:spcBef>
+              <a:spcAft>
+                <a:spcPts val="133"/>
+              </a:spcAft>
+            </a:pPr>
+            <a:r>
+              <a:rPr sz="800" lang="zh-TW" dirty="0">
+                <a:solidFill>
+                  <a:srgbClr val="000000"/>
+                </a:solidFill>
+                <a:latin typeface="Arial Unicode MS"/>
+                <a:ea typeface="Arial Unicode MS"/>
+                <a:cs typeface="Arial Unicode MS"/>
+              </a:rPr>
+              <a:t>第三節的觀察台，用的就是這一套官方標定好的數字，所以點才會準準落在車上。</a:t>
             </a:r>
           </a:p>
         </p:txBody>

--- a/第七週(10-22)/第七週_第2節_簡報.pptx
+++ b/第七週(10-22)/第七週_第2節_簡報.pptx
@@ -442,6 +442,39 @@
               </a:spcAft>
             </a:pPr>
             <a:r>
+              <a:rPr sz="1200" b="1" lang="zh-TW" dirty="0">
+                <a:solidFill>
+                  <a:srgbClr val="000000"/>
+                </a:solidFill>
+                <a:latin typeface="Arial Unicode MS"/>
+                <a:ea typeface="Arial Unicode MS"/>
+                <a:cs typeface="Arial Unicode MS"/>
+              </a:rPr>
+              <a:t>這一節的目的：</a:t>
+            </a:r>
+            <a:r>
+              <a:rPr sz="1200" lang="zh-TW" dirty="0">
+                <a:solidFill>
+                  <a:srgbClr val="000000"/>
+                </a:solidFill>
+                <a:latin typeface="Arial Unicode MS"/>
+                <a:ea typeface="Arial Unicode MS"/>
+                <a:cs typeface="Arial Unicode MS"/>
+              </a:rPr>
+              <a:t>讓大家知道，既然每一顆都會壞，要怎麼把它們合起來，讓整台車比任何一顆都可靠。
+</a:t>
+            </a:r>
+          </a:p>
+          <a:p>
+            <a:pPr algn="l">
+              <a:spcBef>
+                <a:spcPts val="0"/>
+              </a:spcBef>
+              <a:spcAft>
+                <a:spcPts val="200"/>
+              </a:spcAft>
+            </a:pPr>
+            <a:r>
               <a:rPr sz="1200" lang="zh-TW" dirty="0">
                 <a:solidFill>
                   <a:srgbClr val="000000"/>
@@ -735,19 +768,30 @@
                 <a:spcPts val="0"/>
               </a:spcBef>
               <a:spcAft>
-                <a:spcPts val="200"/>
+                <a:spcPts val="192"/>
               </a:spcAft>
             </a:pPr>
             <a:r>
-              <a:rPr sz="1200" lang="zh-TW" dirty="0">
-                <a:solidFill>
-                  <a:srgbClr val="000000"/>
-                </a:solidFill>
-                <a:latin typeface="Arial Unicode MS"/>
-                <a:ea typeface="Arial Unicode MS"/>
-                <a:cs typeface="Arial Unicode MS"/>
-              </a:rPr>
-              <a:t>最後，萬一壞到合起來也不夠呢？例如暴雨，相機糊了，光達也變短了，只剩雷達。
+              <a:rPr sz="1150" b="1" lang="zh-TW" dirty="0">
+                <a:solidFill>
+                  <a:srgbClr val="000000"/>
+                </a:solidFill>
+                <a:latin typeface="Arial Unicode MS"/>
+                <a:ea typeface="Arial Unicode MS"/>
+                <a:cs typeface="Arial Unicode MS"/>
+              </a:rPr>
+              <a:t>這一張的目的：</a:t>
+            </a:r>
+            <a:r>
+              <a:rPr sz="1150" lang="zh-TW" dirty="0">
+                <a:solidFill>
+                  <a:srgbClr val="000000"/>
+                </a:solidFill>
+                <a:latin typeface="Arial Unicode MS"/>
+                <a:ea typeface="Arial Unicode MS"/>
+                <a:cs typeface="Arial Unicode MS"/>
+              </a:rPr>
+              <a:t>讓大家知道，壞到合起來也不夠時，車子要主動降級；L2 交還給人，L4 自己靠邊停。
 </a:t>
             </a:r>
           </a:p>
@@ -757,41 +801,19 @@
                 <a:spcPts val="0"/>
               </a:spcBef>
               <a:spcAft>
-                <a:spcPts val="200"/>
+                <a:spcPts val="192"/>
               </a:spcAft>
             </a:pPr>
             <a:r>
-              <a:rPr sz="1200" lang="zh-TW" dirty="0">
-                <a:solidFill>
-                  <a:srgbClr val="000000"/>
-                </a:solidFill>
-                <a:latin typeface="Arial Unicode MS"/>
-                <a:ea typeface="Arial Unicode MS"/>
-                <a:cs typeface="Arial Unicode MS"/>
-              </a:rPr>
-              <a:t>答案是</a:t>
-            </a:r>
-            <a:r>
-              <a:rPr sz="1200" b="1" lang="zh-TW" dirty="0">
-                <a:solidFill>
-                  <a:srgbClr val="000000"/>
-                </a:solidFill>
-                <a:latin typeface="Arial Unicode MS"/>
-                <a:ea typeface="Arial Unicode MS"/>
-                <a:cs typeface="Arial Unicode MS"/>
-              </a:rPr>
-              <a:t>降級</a:t>
-            </a:r>
-            <a:r>
-              <a:rPr sz="1200" lang="zh-TW" dirty="0">
-                <a:solidFill>
-                  <a:srgbClr val="000000"/>
-                </a:solidFill>
-                <a:latin typeface="Arial Unicode MS"/>
-                <a:ea typeface="Arial Unicode MS"/>
-                <a:cs typeface="Arial Unicode MS"/>
-              </a:rPr>
-              <a:t>。車子不硬撐，而是主動退一步。
+              <a:rPr sz="1150" lang="zh-TW" dirty="0">
+                <a:solidFill>
+                  <a:srgbClr val="000000"/>
+                </a:solidFill>
+                <a:latin typeface="Arial Unicode MS"/>
+                <a:ea typeface="Arial Unicode MS"/>
+                <a:cs typeface="Arial Unicode MS"/>
+              </a:rPr>
+              <a:t>最後，萬一壞到合起來也不夠呢？例如暴雨，相機糊了，光達也變短了，只剩雷達。
 </a:t>
             </a:r>
           </a:p>
@@ -801,41 +823,41 @@
                 <a:spcPts val="0"/>
               </a:spcBef>
               <a:spcAft>
-                <a:spcPts val="200"/>
+                <a:spcPts val="192"/>
               </a:spcAft>
             </a:pPr>
             <a:r>
-              <a:rPr sz="1200" lang="zh-TW" dirty="0">
-                <a:solidFill>
-                  <a:srgbClr val="000000"/>
-                </a:solidFill>
-                <a:latin typeface="Arial Unicode MS"/>
-                <a:ea typeface="Arial Unicode MS"/>
-                <a:cs typeface="Arial Unicode MS"/>
-              </a:rPr>
-              <a:t>看左邊的動圖，它會播三段。</a:t>
-            </a:r>
-            <a:r>
-              <a:rPr sz="1200" b="1" lang="zh-TW" dirty="0">
-                <a:solidFill>
-                  <a:srgbClr val="000000"/>
-                </a:solidFill>
-                <a:latin typeface="Arial Unicode MS"/>
-                <a:ea typeface="Arial Unicode MS"/>
-                <a:cs typeface="Arial Unicode MS"/>
-              </a:rPr>
-              <a:t>第一段，雨愈下愈大。</a:t>
-            </a:r>
-            <a:r>
-              <a:rPr sz="1200" lang="zh-TW" dirty="0">
-                <a:solidFill>
-                  <a:srgbClr val="000000"/>
-                </a:solidFill>
-                <a:latin typeface="Arial Unicode MS"/>
-                <a:ea typeface="Arial Unicode MS"/>
-                <a:cs typeface="Arial Unicode MS"/>
-              </a:rPr>
-              <a:t>左上角是三顆感測器的狀態，跟第一節那張失效對照表「大雨、濃霧」那一列一樣：相機從打勾變三角形，再變叉叉；光達變三角形；雷達一直打勾。這時候車子已經走出它的 ODD 了。
+              <a:rPr sz="1150" lang="zh-TW" dirty="0">
+                <a:solidFill>
+                  <a:srgbClr val="000000"/>
+                </a:solidFill>
+                <a:latin typeface="Arial Unicode MS"/>
+                <a:ea typeface="Arial Unicode MS"/>
+                <a:cs typeface="Arial Unicode MS"/>
+              </a:rPr>
+              <a:t>答案是</a:t>
+            </a:r>
+            <a:r>
+              <a:rPr sz="1150" b="1" lang="zh-TW" dirty="0">
+                <a:solidFill>
+                  <a:srgbClr val="000000"/>
+                </a:solidFill>
+                <a:latin typeface="Arial Unicode MS"/>
+                <a:ea typeface="Arial Unicode MS"/>
+                <a:cs typeface="Arial Unicode MS"/>
+              </a:rPr>
+              <a:t>降級</a:t>
+            </a:r>
+            <a:r>
+              <a:rPr sz="1150" lang="zh-TW" dirty="0">
+                <a:solidFill>
+                  <a:srgbClr val="000000"/>
+                </a:solidFill>
+                <a:latin typeface="Arial Unicode MS"/>
+                <a:ea typeface="Arial Unicode MS"/>
+                <a:cs typeface="Arial Unicode MS"/>
+              </a:rPr>
+              <a:t>。車子不硬撐，而是主動退一步。
 </a:t>
             </a:r>
           </a:p>
@@ -845,85 +867,41 @@
                 <a:spcPts val="0"/>
               </a:spcBef>
               <a:spcAft>
-                <a:spcPts val="200"/>
+                <a:spcPts val="192"/>
               </a:spcAft>
             </a:pPr>
             <a:r>
-              <a:rPr sz="1200" lang="zh-TW" dirty="0">
-                <a:solidFill>
-                  <a:srgbClr val="000000"/>
-                </a:solidFill>
-                <a:latin typeface="Arial Unicode MS"/>
-                <a:ea typeface="Arial Unicode MS"/>
-                <a:cs typeface="Arial Unicode MS"/>
-              </a:rPr>
-              <a:t>怎麼退，跟第一週的 SAE 等級有關。</a:t>
-            </a:r>
-            <a:r>
-              <a:rPr sz="1200" b="1" lang="zh-TW" dirty="0">
-                <a:solidFill>
-                  <a:srgbClr val="000000"/>
-                </a:solidFill>
-                <a:latin typeface="Arial Unicode MS"/>
-                <a:ea typeface="Arial Unicode MS"/>
-                <a:cs typeface="Arial Unicode MS"/>
-              </a:rPr>
-              <a:t>L2</a:t>
-            </a:r>
-            <a:r>
-              <a:rPr sz="1200" lang="zh-TW" dirty="0">
-                <a:solidFill>
-                  <a:srgbClr val="000000"/>
-                </a:solidFill>
-                <a:latin typeface="Arial Unicode MS"/>
-                <a:ea typeface="Arial Unicode MS"/>
-                <a:cs typeface="Arial Unicode MS"/>
-              </a:rPr>
-              <a:t>，就是動圖的第二段：駕駛隨時要準備接手，所以車子會跳警告、發出聲音，請駕駛把方向盤拿回去。</a:t>
-            </a:r>
-            <a:r>
-              <a:rPr sz="1200" b="1" lang="zh-TW" dirty="0">
-                <a:solidFill>
-                  <a:srgbClr val="000000"/>
-                </a:solidFill>
-                <a:latin typeface="Arial Unicode MS"/>
-                <a:ea typeface="Arial Unicode MS"/>
-                <a:cs typeface="Arial Unicode MS"/>
-              </a:rPr>
-              <a:t>L4</a:t>
-            </a:r>
-            <a:r>
-              <a:rPr sz="1200" lang="zh-TW" dirty="0">
-                <a:solidFill>
-                  <a:srgbClr val="000000"/>
-                </a:solidFill>
-                <a:latin typeface="Arial Unicode MS"/>
-                <a:ea typeface="Arial Unicode MS"/>
-                <a:cs typeface="Arial Unicode MS"/>
-              </a:rPr>
-              <a:t>，就是第三段：車上可能沒有駕駛，它要自己把車子帶到一個</a:t>
-            </a:r>
-            <a:r>
-              <a:rPr sz="1200" b="1" lang="zh-TW" dirty="0">
-                <a:solidFill>
-                  <a:srgbClr val="000000"/>
-                </a:solidFill>
-                <a:latin typeface="Arial Unicode MS"/>
-                <a:ea typeface="Arial Unicode MS"/>
-                <a:cs typeface="Arial Unicode MS"/>
-              </a:rPr>
-              <a:t>最小風險狀態</a:t>
-            </a:r>
-            <a:r>
-              <a:rPr sz="1200" lang="zh-TW" dirty="0">
-                <a:solidFill>
-                  <a:srgbClr val="000000"/>
-                </a:solidFill>
-                <a:latin typeface="Arial Unicode MS"/>
-                <a:ea typeface="Arial Unicode MS"/>
-                <a:cs typeface="Arial Unicode MS"/>
-              </a:rPr>
-              <a:t>，最常見的就是減速、打雙黃燈、切到右邊的路肩停下來。台灣、越南都是靠右行駛，所以是靠右邊停。就像計程車司機遇到看不清楚的暴雨，會先靠邊停一下，等雨小一點再走。
+              <a:rPr sz="1150" lang="zh-TW" dirty="0">
+                <a:solidFill>
+                  <a:srgbClr val="000000"/>
+                </a:solidFill>
+                <a:latin typeface="Arial Unicode MS"/>
+                <a:ea typeface="Arial Unicode MS"/>
+                <a:cs typeface="Arial Unicode MS"/>
+              </a:rPr>
+              <a:t>看左邊的動圖，它會播三段。</a:t>
+            </a:r>
+            <a:r>
+              <a:rPr sz="1150" b="1" lang="zh-TW" dirty="0">
+                <a:solidFill>
+                  <a:srgbClr val="000000"/>
+                </a:solidFill>
+                <a:latin typeface="Arial Unicode MS"/>
+                <a:ea typeface="Arial Unicode MS"/>
+                <a:cs typeface="Arial Unicode MS"/>
+              </a:rPr>
+              <a:t>第一段，雨愈下愈大。</a:t>
+            </a:r>
+            <a:r>
+              <a:rPr sz="1150" lang="zh-TW" dirty="0">
+                <a:solidFill>
+                  <a:srgbClr val="000000"/>
+                </a:solidFill>
+                <a:latin typeface="Arial Unicode MS"/>
+                <a:ea typeface="Arial Unicode MS"/>
+                <a:cs typeface="Arial Unicode MS"/>
+              </a:rPr>
+              <a:t>左上角是三顆感測器的狀態，跟第一節那張失效對照表「大雨、濃霧」那一列一樣：相機從打勾變三角形，再變叉叉；光達變三角形；雷達一直打勾。這時候車子已經走出它的 ODD 了。
 </a:t>
             </a:r>
           </a:p>
@@ -933,85 +911,85 @@
                 <a:spcPts val="0"/>
               </a:spcBef>
               <a:spcAft>
-                <a:spcPts val="200"/>
+                <a:spcPts val="192"/>
               </a:spcAft>
             </a:pPr>
             <a:r>
-              <a:rPr sz="1200" lang="zh-TW" dirty="0">
-                <a:solidFill>
-                  <a:srgbClr val="000000"/>
-                </a:solidFill>
-                <a:latin typeface="Arial Unicode MS"/>
-                <a:ea typeface="Arial Unicode MS"/>
-                <a:cs typeface="Arial Unicode MS"/>
-              </a:rPr>
-              <a:t>什麼時候該降級？回到第一週的 </a:t>
-            </a:r>
-            <a:r>
-              <a:rPr sz="1200" b="1" lang="zh-TW" dirty="0">
-                <a:solidFill>
-                  <a:srgbClr val="000000"/>
-                </a:solidFill>
-                <a:latin typeface="Arial Unicode MS"/>
-                <a:ea typeface="Arial Unicode MS"/>
-                <a:cs typeface="Arial Unicode MS"/>
-              </a:rPr>
-              <a:t>ODD</a:t>
-            </a:r>
-            <a:r>
-              <a:rPr sz="1200" lang="zh-TW" dirty="0">
-                <a:solidFill>
-                  <a:srgbClr val="000000"/>
-                </a:solidFill>
-                <a:latin typeface="Arial Unicode MS"/>
-                <a:ea typeface="Arial Unicode MS"/>
-                <a:cs typeface="Arial Unicode MS"/>
-              </a:rPr>
-              <a:t>，運行設計範圍，那六格：道路類型、速度域、交通狀況、天候與光照、地理範圍、人的角色。其中「</a:t>
-            </a:r>
-            <a:r>
-              <a:rPr sz="1200" b="1" lang="zh-TW" dirty="0">
-                <a:solidFill>
-                  <a:srgbClr val="000000"/>
-                </a:solidFill>
-                <a:latin typeface="Arial Unicode MS"/>
-                <a:ea typeface="Arial Unicode MS"/>
-                <a:cs typeface="Arial Unicode MS"/>
-              </a:rPr>
-              <a:t>天候與光照</a:t>
-            </a:r>
-            <a:r>
-              <a:rPr sz="1200" lang="zh-TW" dirty="0">
-                <a:solidFill>
-                  <a:srgbClr val="000000"/>
-                </a:solidFill>
-                <a:latin typeface="Arial Unicode MS"/>
-                <a:ea typeface="Arial Unicode MS"/>
-                <a:cs typeface="Arial Unicode MS"/>
-              </a:rPr>
-              <a:t>」那一格，其實就是上一節那張失效對照表：雨大到相機打叉、光達三角形，就是走出了 ODD。「</a:t>
-            </a:r>
-            <a:r>
-              <a:rPr sz="1200" b="1" lang="zh-TW" dirty="0">
-                <a:solidFill>
-                  <a:srgbClr val="000000"/>
-                </a:solidFill>
-                <a:latin typeface="Arial Unicode MS"/>
-                <a:ea typeface="Arial Unicode MS"/>
-                <a:cs typeface="Arial Unicode MS"/>
-              </a:rPr>
-              <a:t>地理範圍</a:t>
-            </a:r>
-            <a:r>
-              <a:rPr sz="1200" lang="zh-TW" dirty="0">
-                <a:solidFill>
-                  <a:srgbClr val="000000"/>
-                </a:solidFill>
-                <a:latin typeface="Arial Unicode MS"/>
-                <a:ea typeface="Arial Unicode MS"/>
-                <a:cs typeface="Arial Unicode MS"/>
-              </a:rPr>
-              <a:t>」那一格也一樣：開進一條地圖上沒有的路、開進收不到衛星的地方。
+              <a:rPr sz="1150" lang="zh-TW" dirty="0">
+                <a:solidFill>
+                  <a:srgbClr val="000000"/>
+                </a:solidFill>
+                <a:latin typeface="Arial Unicode MS"/>
+                <a:ea typeface="Arial Unicode MS"/>
+                <a:cs typeface="Arial Unicode MS"/>
+              </a:rPr>
+              <a:t>怎麼退，跟第一週的 SAE 等級有關。</a:t>
+            </a:r>
+            <a:r>
+              <a:rPr sz="1150" b="1" lang="zh-TW" dirty="0">
+                <a:solidFill>
+                  <a:srgbClr val="000000"/>
+                </a:solidFill>
+                <a:latin typeface="Arial Unicode MS"/>
+                <a:ea typeface="Arial Unicode MS"/>
+                <a:cs typeface="Arial Unicode MS"/>
+              </a:rPr>
+              <a:t>L2</a:t>
+            </a:r>
+            <a:r>
+              <a:rPr sz="1150" lang="zh-TW" dirty="0">
+                <a:solidFill>
+                  <a:srgbClr val="000000"/>
+                </a:solidFill>
+                <a:latin typeface="Arial Unicode MS"/>
+                <a:ea typeface="Arial Unicode MS"/>
+                <a:cs typeface="Arial Unicode MS"/>
+              </a:rPr>
+              <a:t>，就是動圖的第二段：駕駛隨時要準備接手，所以車子會跳警告、發出聲音，請駕駛把方向盤拿回去。</a:t>
+            </a:r>
+            <a:r>
+              <a:rPr sz="1150" b="1" lang="zh-TW" dirty="0">
+                <a:solidFill>
+                  <a:srgbClr val="000000"/>
+                </a:solidFill>
+                <a:latin typeface="Arial Unicode MS"/>
+                <a:ea typeface="Arial Unicode MS"/>
+                <a:cs typeface="Arial Unicode MS"/>
+              </a:rPr>
+              <a:t>L4</a:t>
+            </a:r>
+            <a:r>
+              <a:rPr sz="1150" lang="zh-TW" dirty="0">
+                <a:solidFill>
+                  <a:srgbClr val="000000"/>
+                </a:solidFill>
+                <a:latin typeface="Arial Unicode MS"/>
+                <a:ea typeface="Arial Unicode MS"/>
+                <a:cs typeface="Arial Unicode MS"/>
+              </a:rPr>
+              <a:t>，就是第三段：車上可能沒有駕駛，它要自己把車子帶到一個</a:t>
+            </a:r>
+            <a:r>
+              <a:rPr sz="1150" b="1" lang="zh-TW" dirty="0">
+                <a:solidFill>
+                  <a:srgbClr val="000000"/>
+                </a:solidFill>
+                <a:latin typeface="Arial Unicode MS"/>
+                <a:ea typeface="Arial Unicode MS"/>
+                <a:cs typeface="Arial Unicode MS"/>
+              </a:rPr>
+              <a:t>最小風險狀態</a:t>
+            </a:r>
+            <a:r>
+              <a:rPr sz="1150" lang="zh-TW" dirty="0">
+                <a:solidFill>
+                  <a:srgbClr val="000000"/>
+                </a:solidFill>
+                <a:latin typeface="Arial Unicode MS"/>
+                <a:ea typeface="Arial Unicode MS"/>
+                <a:cs typeface="Arial Unicode MS"/>
+              </a:rPr>
+              <a:t>，最常見的就是減速、打雙黃燈、切到右邊的路肩停下來。台灣、越南都是靠右行駛，所以是靠右邊停。就像計程車司機遇到看不清楚的暴雨，會先靠邊停一下，等雨小一點再走。
 </a:t>
             </a:r>
           </a:p>
@@ -1021,11 +999,99 @@
                 <a:spcPts val="0"/>
               </a:spcBef>
               <a:spcAft>
-                <a:spcPts val="200"/>
+                <a:spcPts val="192"/>
               </a:spcAft>
             </a:pPr>
             <a:r>
-              <a:rPr sz="1200" lang="zh-TW" dirty="0">
+              <a:rPr sz="1150" lang="zh-TW" dirty="0">
+                <a:solidFill>
+                  <a:srgbClr val="000000"/>
+                </a:solidFill>
+                <a:latin typeface="Arial Unicode MS"/>
+                <a:ea typeface="Arial Unicode MS"/>
+                <a:cs typeface="Arial Unicode MS"/>
+              </a:rPr>
+              <a:t>什麼時候該降級？回到第一週的 </a:t>
+            </a:r>
+            <a:r>
+              <a:rPr sz="1150" b="1" lang="zh-TW" dirty="0">
+                <a:solidFill>
+                  <a:srgbClr val="000000"/>
+                </a:solidFill>
+                <a:latin typeface="Arial Unicode MS"/>
+                <a:ea typeface="Arial Unicode MS"/>
+                <a:cs typeface="Arial Unicode MS"/>
+              </a:rPr>
+              <a:t>ODD</a:t>
+            </a:r>
+            <a:r>
+              <a:rPr sz="1150" lang="zh-TW" dirty="0">
+                <a:solidFill>
+                  <a:srgbClr val="000000"/>
+                </a:solidFill>
+                <a:latin typeface="Arial Unicode MS"/>
+                <a:ea typeface="Arial Unicode MS"/>
+                <a:cs typeface="Arial Unicode MS"/>
+              </a:rPr>
+              <a:t>，運行設計範圍，那六格：道路類型、速度域、交通狀況、天候與光照、地理範圍、人的角色。其中「</a:t>
+            </a:r>
+            <a:r>
+              <a:rPr sz="1150" b="1" lang="zh-TW" dirty="0">
+                <a:solidFill>
+                  <a:srgbClr val="000000"/>
+                </a:solidFill>
+                <a:latin typeface="Arial Unicode MS"/>
+                <a:ea typeface="Arial Unicode MS"/>
+                <a:cs typeface="Arial Unicode MS"/>
+              </a:rPr>
+              <a:t>天候與光照</a:t>
+            </a:r>
+            <a:r>
+              <a:rPr sz="1150" lang="zh-TW" dirty="0">
+                <a:solidFill>
+                  <a:srgbClr val="000000"/>
+                </a:solidFill>
+                <a:latin typeface="Arial Unicode MS"/>
+                <a:ea typeface="Arial Unicode MS"/>
+                <a:cs typeface="Arial Unicode MS"/>
+              </a:rPr>
+              <a:t>」那一格，其實就是上一節那張失效對照表：雨大到相機打叉、光達三角形，就是走出了 ODD。「</a:t>
+            </a:r>
+            <a:r>
+              <a:rPr sz="1150" b="1" lang="zh-TW" dirty="0">
+                <a:solidFill>
+                  <a:srgbClr val="000000"/>
+                </a:solidFill>
+                <a:latin typeface="Arial Unicode MS"/>
+                <a:ea typeface="Arial Unicode MS"/>
+                <a:cs typeface="Arial Unicode MS"/>
+              </a:rPr>
+              <a:t>地理範圍</a:t>
+            </a:r>
+            <a:r>
+              <a:rPr sz="1150" lang="zh-TW" dirty="0">
+                <a:solidFill>
+                  <a:srgbClr val="000000"/>
+                </a:solidFill>
+                <a:latin typeface="Arial Unicode MS"/>
+                <a:ea typeface="Arial Unicode MS"/>
+                <a:cs typeface="Arial Unicode MS"/>
+              </a:rPr>
+              <a:t>」那一格也一樣：開進一條地圖上沒有的路、開進收不到衛星的地方。
+</a:t>
+            </a:r>
+          </a:p>
+          <a:p>
+            <a:pPr algn="l">
+              <a:spcBef>
+                <a:spcPts val="0"/>
+              </a:spcBef>
+              <a:spcAft>
+                <a:spcPts val="192"/>
+              </a:spcAft>
+            </a:pPr>
+            <a:r>
+              <a:rPr sz="1150" lang="zh-TW" dirty="0">
                 <a:solidFill>
                   <a:srgbClr val="000000"/>
                 </a:solidFill>
@@ -1142,19 +1208,30 @@
                 <a:spcPts val="0"/>
               </a:spcBef>
               <a:spcAft>
-                <a:spcPts val="200"/>
+                <a:spcPts val="183"/>
               </a:spcAft>
             </a:pPr>
             <a:r>
-              <a:rPr sz="1200" lang="zh-TW" dirty="0">
-                <a:solidFill>
-                  <a:srgbClr val="000000"/>
-                </a:solidFill>
-                <a:latin typeface="Arial Unicode MS"/>
-                <a:ea typeface="Arial Unicode MS"/>
-                <a:cs typeface="Arial Unicode MS"/>
-              </a:rPr>
-              <a:t>最後把今天講的收成五組最常見的搭檔。每一組都問三件事：誰負責哪一塊、什麼時候最需要、我們在哪裡看過。
+              <a:rPr sz="1100" b="1" lang="zh-TW" dirty="0">
+                <a:solidFill>
+                  <a:srgbClr val="000000"/>
+                </a:solidFill>
+                <a:latin typeface="Arial Unicode MS"/>
+                <a:ea typeface="Arial Unicode MS"/>
+                <a:cs typeface="Arial Unicode MS"/>
+              </a:rPr>
+              <a:t>這一張的目的：</a:t>
+            </a:r>
+            <a:r>
+              <a:rPr sz="1100" lang="zh-TW" dirty="0">
+                <a:solidFill>
+                  <a:srgbClr val="000000"/>
+                </a:solidFill>
+                <a:latin typeface="Arial Unicode MS"/>
+                <a:ea typeface="Arial Unicode MS"/>
+                <a:cs typeface="Arial Unicode MS"/>
+              </a:rPr>
+              <a:t>把整節收成五組常見的搭檔，讓大家知道每一組誰負責哪一塊。
 </a:t>
             </a:r>
           </a:p>
@@ -1164,30 +1241,19 @@
                 <a:spcPts val="0"/>
               </a:spcBef>
               <a:spcAft>
-                <a:spcPts val="200"/>
+                <a:spcPts val="183"/>
               </a:spcAft>
             </a:pPr>
             <a:r>
-              <a:rPr sz="1200" b="1" lang="zh-TW" dirty="0">
-                <a:solidFill>
-                  <a:srgbClr val="000000"/>
-                </a:solidFill>
-                <a:latin typeface="Arial Unicode MS"/>
-                <a:ea typeface="Arial Unicode MS"/>
-                <a:cs typeface="Arial Unicode MS"/>
-              </a:rPr>
-              <a:t>第一組，相機加雷達。</a:t>
-            </a:r>
-            <a:r>
-              <a:rPr sz="1200" lang="zh-TW" dirty="0">
-                <a:solidFill>
-                  <a:srgbClr val="000000"/>
-                </a:solidFill>
-                <a:latin typeface="Arial Unicode MS"/>
-                <a:ea typeface="Arial Unicode MS"/>
-                <a:cs typeface="Arial Unicode MS"/>
-              </a:rPr>
-              <a:t>就像一個人眼睛好、一個人耳朵好：相機看得出那是一台機車，雷達量得出它三十公尺、正以時速二十靠近。自動緊急煞車、跟車，最常用這一組。本節第七張的對應講的就是它；下一節的任務五，各位要自己拼一次。
+              <a:rPr sz="1100" lang="zh-TW" dirty="0">
+                <a:solidFill>
+                  <a:srgbClr val="000000"/>
+                </a:solidFill>
+                <a:latin typeface="Arial Unicode MS"/>
+                <a:ea typeface="Arial Unicode MS"/>
+                <a:cs typeface="Arial Unicode MS"/>
+              </a:rPr>
+              <a:t>最後把今天講的收成五組最常見的搭檔。每一組都問三件事：誰負責哪一塊、什麼時候最需要、我們在哪裡看過。
 </a:t>
             </a:r>
           </a:p>
@@ -1197,30 +1263,30 @@
                 <a:spcPts val="0"/>
               </a:spcBef>
               <a:spcAft>
-                <a:spcPts val="200"/>
+                <a:spcPts val="183"/>
               </a:spcAft>
             </a:pPr>
             <a:r>
-              <a:rPr sz="1200" b="1" lang="zh-TW" dirty="0">
-                <a:solidFill>
-                  <a:srgbClr val="000000"/>
-                </a:solidFill>
-                <a:latin typeface="Arial Unicode MS"/>
-                <a:ea typeface="Arial Unicode MS"/>
-                <a:cs typeface="Arial Unicode MS"/>
-              </a:rPr>
-              <a:t>第二組，相機加光達。</a:t>
-            </a:r>
-            <a:r>
-              <a:rPr sz="1200" lang="zh-TW" dirty="0">
-                <a:solidFill>
-                  <a:srgbClr val="000000"/>
-                </a:solidFill>
-                <a:latin typeface="Arial Unicode MS"/>
-                <a:ea typeface="Arial Unicode MS"/>
-                <a:cs typeface="Arial Unicode MS"/>
-              </a:rPr>
-              <a:t>把光達的點投到照片上，照片上每一個點都知道自己多遠。相機認得出，光達量得準。本節第四張標定那兩張圖，做的就是這件事。
+              <a:rPr sz="1100" b="1" lang="zh-TW" dirty="0">
+                <a:solidFill>
+                  <a:srgbClr val="000000"/>
+                </a:solidFill>
+                <a:latin typeface="Arial Unicode MS"/>
+                <a:ea typeface="Arial Unicode MS"/>
+                <a:cs typeface="Arial Unicode MS"/>
+              </a:rPr>
+              <a:t>第一組，相機加雷達。</a:t>
+            </a:r>
+            <a:r>
+              <a:rPr sz="1100" lang="zh-TW" dirty="0">
+                <a:solidFill>
+                  <a:srgbClr val="000000"/>
+                </a:solidFill>
+                <a:latin typeface="Arial Unicode MS"/>
+                <a:ea typeface="Arial Unicode MS"/>
+                <a:cs typeface="Arial Unicode MS"/>
+              </a:rPr>
+              <a:t>就像一個人眼睛好、一個人耳朵好：相機看得出那是一台機車，雷達量得出它三十公尺、正以時速二十靠近。自動緊急煞車、跟車，最常用這一組。本節第七張的對應講的就是它；下一節的任務五，各位要自己拼一次。
 </a:t>
             </a:r>
           </a:p>
@@ -1230,30 +1296,30 @@
                 <a:spcPts val="0"/>
               </a:spcBef>
               <a:spcAft>
-                <a:spcPts val="200"/>
+                <a:spcPts val="183"/>
               </a:spcAft>
             </a:pPr>
             <a:r>
-              <a:rPr sz="1200" b="1" lang="zh-TW" dirty="0">
-                <a:solidFill>
-                  <a:srgbClr val="000000"/>
-                </a:solidFill>
-                <a:latin typeface="Arial Unicode MS"/>
-                <a:ea typeface="Arial Unicode MS"/>
-                <a:cs typeface="Arial Unicode MS"/>
-              </a:rPr>
-              <a:t>第三組，光達加雷達。</a:t>
-            </a:r>
-            <a:r>
-              <a:rPr sz="1200" lang="zh-TW" dirty="0">
-                <a:solidFill>
-                  <a:srgbClr val="000000"/>
-                </a:solidFill>
-                <a:latin typeface="Arial Unicode MS"/>
-                <a:ea typeface="Arial Unicode MS"/>
-                <a:cs typeface="Arial Unicode MS"/>
-              </a:rPr>
-              <a:t>下雨起霧，光達看的距離變短，雷達幾乎不受影響，先頂上；反過來，雷達量不出高度，分不出頭頂的路牌，光達的點有高有低，補得上。第一節第六張講雨霧，第一節第八張看過雷達的點全部在同一個高度。
+              <a:rPr sz="1100" b="1" lang="zh-TW" dirty="0">
+                <a:solidFill>
+                  <a:srgbClr val="000000"/>
+                </a:solidFill>
+                <a:latin typeface="Arial Unicode MS"/>
+                <a:ea typeface="Arial Unicode MS"/>
+                <a:cs typeface="Arial Unicode MS"/>
+              </a:rPr>
+              <a:t>第二組，相機加光達。</a:t>
+            </a:r>
+            <a:r>
+              <a:rPr sz="1100" lang="zh-TW" dirty="0">
+                <a:solidFill>
+                  <a:srgbClr val="000000"/>
+                </a:solidFill>
+                <a:latin typeface="Arial Unicode MS"/>
+                <a:ea typeface="Arial Unicode MS"/>
+                <a:cs typeface="Arial Unicode MS"/>
+              </a:rPr>
+              <a:t>把光達的點投到照片上，照片上每一個點都知道自己多遠。相機認得出，光達量得準。本節第四張標定那兩張圖，做的就是這件事。
 </a:t>
             </a:r>
           </a:p>
@@ -1263,30 +1329,30 @@
                 <a:spcPts val="0"/>
               </a:spcBef>
               <a:spcAft>
-                <a:spcPts val="200"/>
+                <a:spcPts val="183"/>
               </a:spcAft>
             </a:pPr>
             <a:r>
-              <a:rPr sz="1200" b="1" lang="zh-TW" dirty="0">
-                <a:solidFill>
-                  <a:srgbClr val="000000"/>
-                </a:solidFill>
-                <a:latin typeface="Arial Unicode MS"/>
-                <a:ea typeface="Arial Unicode MS"/>
-                <a:cs typeface="Arial Unicode MS"/>
-              </a:rPr>
-              <a:t>第四組，衛星定位加 IMU 加地圖。</a:t>
-            </a:r>
-            <a:r>
-              <a:rPr sz="1200" lang="zh-TW" dirty="0">
-                <a:solidFill>
-                  <a:srgbClr val="000000"/>
-                </a:solidFill>
-                <a:latin typeface="Arial Unicode MS"/>
-                <a:ea typeface="Arial Unicode MS"/>
-                <a:cs typeface="Arial Unicode MS"/>
-              </a:rPr>
-              <a:t>就像閉著眼睛走路，每走一段睜眼看一下：衛星是睜眼，IMU 是閉眼數步。進隧道，衛星斷了，IMU 先撐；出隧道，衛星一回來，馬上拉回正確的位置。本節第九張的九比一，就是在算這件事。
+              <a:rPr sz="1100" b="1" lang="zh-TW" dirty="0">
+                <a:solidFill>
+                  <a:srgbClr val="000000"/>
+                </a:solidFill>
+                <a:latin typeface="Arial Unicode MS"/>
+                <a:ea typeface="Arial Unicode MS"/>
+                <a:cs typeface="Arial Unicode MS"/>
+              </a:rPr>
+              <a:t>第三組，光達加雷達。</a:t>
+            </a:r>
+            <a:r>
+              <a:rPr sz="1100" lang="zh-TW" dirty="0">
+                <a:solidFill>
+                  <a:srgbClr val="000000"/>
+                </a:solidFill>
+                <a:latin typeface="Arial Unicode MS"/>
+                <a:ea typeface="Arial Unicode MS"/>
+                <a:cs typeface="Arial Unicode MS"/>
+              </a:rPr>
+              <a:t>下雨起霧，光達看的距離變短，雷達幾乎不受影響，先頂上；反過來，雷達量不出高度，分不出頭頂的路牌，光達的點有高有低，補得上。第一節第六張講雨霧，第一節第八張看過雷達的點全部在同一個高度。
 </a:t>
             </a:r>
           </a:p>
@@ -1296,30 +1362,30 @@
                 <a:spcPts val="0"/>
               </a:spcBef>
               <a:spcAft>
-                <a:spcPts val="200"/>
+                <a:spcPts val="183"/>
               </a:spcAft>
             </a:pPr>
             <a:r>
-              <a:rPr sz="1200" b="1" lang="zh-TW" dirty="0">
-                <a:solidFill>
-                  <a:srgbClr val="000000"/>
-                </a:solidFill>
-                <a:latin typeface="Arial Unicode MS"/>
-                <a:ea typeface="Arial Unicode MS"/>
-                <a:cs typeface="Arial Unicode MS"/>
-              </a:rPr>
-              <a:t>第五組，超音波加環景相機。</a:t>
-            </a:r>
-            <a:r>
-              <a:rPr sz="1200" lang="zh-TW" dirty="0">
-                <a:solidFill>
-                  <a:srgbClr val="000000"/>
-                </a:solidFill>
-                <a:latin typeface="Arial Unicode MS"/>
-                <a:ea typeface="Arial Unicode MS"/>
-                <a:cs typeface="Arial Unicode MS"/>
-              </a:rPr>
-              <a:t>停車的時候，超音波量保險桿前面幾十公分的距離，嗶嗶叫；環景相機讓你看清楚那是一根柱子還是一個小孩。第六週講超音波的時候看過。
+              <a:rPr sz="1100" b="1" lang="zh-TW" dirty="0">
+                <a:solidFill>
+                  <a:srgbClr val="000000"/>
+                </a:solidFill>
+                <a:latin typeface="Arial Unicode MS"/>
+                <a:ea typeface="Arial Unicode MS"/>
+                <a:cs typeface="Arial Unicode MS"/>
+              </a:rPr>
+              <a:t>第四組，衛星定位加 IMU 加地圖。</a:t>
+            </a:r>
+            <a:r>
+              <a:rPr sz="1100" lang="zh-TW" dirty="0">
+                <a:solidFill>
+                  <a:srgbClr val="000000"/>
+                </a:solidFill>
+                <a:latin typeface="Arial Unicode MS"/>
+                <a:ea typeface="Arial Unicode MS"/>
+                <a:cs typeface="Arial Unicode MS"/>
+              </a:rPr>
+              <a:t>就像閉著眼睛走路，每走一段睜眼看一下：衛星是睜眼，IMU 是閉眼數步。進隧道，衛星斷了，IMU 先撐；出隧道，衛星一回來，馬上拉回正確的位置。本節第九張的九比一，就是在算這件事。
 </a:t>
             </a:r>
           </a:p>
@@ -1329,11 +1395,44 @@
                 <a:spcPts val="0"/>
               </a:spcBef>
               <a:spcAft>
-                <a:spcPts val="200"/>
+                <a:spcPts val="183"/>
               </a:spcAft>
             </a:pPr>
             <a:r>
-              <a:rPr sz="1200" lang="zh-TW" dirty="0">
+              <a:rPr sz="1100" b="1" lang="zh-TW" dirty="0">
+                <a:solidFill>
+                  <a:srgbClr val="000000"/>
+                </a:solidFill>
+                <a:latin typeface="Arial Unicode MS"/>
+                <a:ea typeface="Arial Unicode MS"/>
+                <a:cs typeface="Arial Unicode MS"/>
+              </a:rPr>
+              <a:t>第五組，超音波加環景相機。</a:t>
+            </a:r>
+            <a:r>
+              <a:rPr sz="1100" lang="zh-TW" dirty="0">
+                <a:solidFill>
+                  <a:srgbClr val="000000"/>
+                </a:solidFill>
+                <a:latin typeface="Arial Unicode MS"/>
+                <a:ea typeface="Arial Unicode MS"/>
+                <a:cs typeface="Arial Unicode MS"/>
+              </a:rPr>
+              <a:t>停車的時候，超音波量保險桿前面幾十公分的距離，嗶嗶叫；環景相機讓你看清楚那是一根柱子還是一個小孩。第六週講超音波的時候看過。
+</a:t>
+            </a:r>
+          </a:p>
+          <a:p>
+            <a:pPr algn="l">
+              <a:spcBef>
+                <a:spcPts val="0"/>
+              </a:spcBef>
+              <a:spcAft>
+                <a:spcPts val="183"/>
+              </a:spcAft>
+            </a:pPr>
+            <a:r>
+              <a:rPr sz="1100" lang="zh-TW" dirty="0">
                 <a:solidFill>
                   <a:srgbClr val="000000"/>
                 </a:solidFill>
@@ -1344,7 +1443,7 @@
               <a:t>五組看下來，模式只有兩種：</a:t>
             </a:r>
             <a:r>
-              <a:rPr sz="1200" b="1" lang="zh-TW" dirty="0">
+              <a:rPr sz="1100" b="1" lang="zh-TW" dirty="0">
                 <a:solidFill>
                   <a:srgbClr val="000000"/>
                 </a:solidFill>
@@ -1355,7 +1454,7 @@
               <a:t>一個管「是什麼」，一個管「多遠、多快」；或是一個壞了，另一個先頂上。</a:t>
             </a:r>
             <a:r>
-              <a:rPr sz="1200" lang="zh-TW" dirty="0">
+              <a:rPr sz="1100" lang="zh-TW" dirty="0">
                 <a:solidFill>
                   <a:srgbClr val="000000"/>
                 </a:solidFill>
@@ -1476,6 +1575,39 @@
               </a:spcAft>
             </a:pPr>
             <a:r>
+              <a:rPr sz="800" b="1" lang="zh-TW" dirty="0">
+                <a:solidFill>
+                  <a:srgbClr val="000000"/>
+                </a:solidFill>
+                <a:latin typeface="Arial Unicode MS"/>
+                <a:ea typeface="Arial Unicode MS"/>
+                <a:cs typeface="Arial Unicode MS"/>
+              </a:rPr>
+              <a:t>這一張的目的：</a:t>
+            </a:r>
+            <a:r>
+              <a:rPr sz="800" lang="zh-TW" dirty="0">
+                <a:solidFill>
+                  <a:srgbClr val="000000"/>
+                </a:solidFill>
+                <a:latin typeface="Arial Unicode MS"/>
+                <a:ea typeface="Arial Unicode MS"/>
+                <a:cs typeface="Arial Unicode MS"/>
+              </a:rPr>
+              <a:t>把這一節收成三句話，並預告下一節要自己動手。
+</a:t>
+            </a:r>
+          </a:p>
+          <a:p>
+            <a:pPr algn="l">
+              <a:spcBef>
+                <a:spcPts val="0"/>
+              </a:spcBef>
+              <a:spcAft>
+                <a:spcPts val="133"/>
+              </a:spcAft>
+            </a:pPr>
+            <a:r>
               <a:rPr sz="800" lang="zh-TW" dirty="0">
                 <a:solidFill>
                   <a:srgbClr val="000000"/>
@@ -2143,41 +2275,30 @@
                 <a:spcPts val="0"/>
               </a:spcBef>
               <a:spcAft>
-                <a:spcPts val="167"/>
+                <a:spcPts val="158"/>
               </a:spcAft>
             </a:pPr>
             <a:r>
-              <a:rPr sz="1000" lang="zh-TW" dirty="0">
-                <a:solidFill>
-                  <a:srgbClr val="000000"/>
-                </a:solidFill>
-                <a:latin typeface="Arial Unicode MS"/>
-                <a:ea typeface="Arial Unicode MS"/>
-                <a:cs typeface="Arial Unicode MS"/>
-              </a:rPr>
-              <a:t>先想一個情況。高速公路上，</a:t>
-            </a:r>
-            <a:r>
-              <a:rPr sz="1000" b="1" lang="zh-TW" dirty="0">
-                <a:solidFill>
-                  <a:srgbClr val="000000"/>
-                </a:solidFill>
-                <a:latin typeface="Arial Unicode MS"/>
-                <a:ea typeface="Arial Unicode MS"/>
-                <a:cs typeface="Arial Unicode MS"/>
-              </a:rPr>
-              <a:t>雷達說：前方六十公尺有東西。相機說：前面沒有車。</a:t>
-            </a:r>
-            <a:r>
-              <a:rPr sz="1000" lang="zh-TW" dirty="0">
-                <a:solidFill>
-                  <a:srgbClr val="000000"/>
-                </a:solidFill>
-                <a:latin typeface="Arial Unicode MS"/>
-                <a:ea typeface="Arial Unicode MS"/>
-                <a:cs typeface="Arial Unicode MS"/>
-              </a:rPr>
-              <a:t>要聽誰的？
+              <a:rPr sz="950" b="1" lang="zh-TW" dirty="0">
+                <a:solidFill>
+                  <a:srgbClr val="000000"/>
+                </a:solidFill>
+                <a:latin typeface="Arial Unicode MS"/>
+                <a:ea typeface="Arial Unicode MS"/>
+                <a:cs typeface="Arial Unicode MS"/>
+              </a:rPr>
+              <a:t>這一張的目的：</a:t>
+            </a:r>
+            <a:r>
+              <a:rPr sz="950" lang="zh-TW" dirty="0">
+                <a:solidFill>
+                  <a:srgbClr val="000000"/>
+                </a:solidFill>
+                <a:latin typeface="Arial Unicode MS"/>
+                <a:ea typeface="Arial Unicode MS"/>
+                <a:cs typeface="Arial Unicode MS"/>
+              </a:rPr>
+              <a:t>讓大家感受到，兩顆感測器說的不一樣時，聽誰的都有代價；融合就是在選代價。
 </a:t>
             </a:r>
           </a:p>
@@ -2187,19 +2308,41 @@
                 <a:spcPts val="0"/>
               </a:spcBef>
               <a:spcAft>
-                <a:spcPts val="167"/>
+                <a:spcPts val="158"/>
               </a:spcAft>
             </a:pPr>
             <a:r>
-              <a:rPr sz="1000" lang="zh-TW" dirty="0">
-                <a:solidFill>
-                  <a:srgbClr val="000000"/>
-                </a:solidFill>
-                <a:latin typeface="Arial Unicode MS"/>
-                <a:ea typeface="Arial Unicode MS"/>
-                <a:cs typeface="Arial Unicode MS"/>
-              </a:rPr>
-              <a:t>先舉手：聽雷達的舉一隻手，聽相機的舉兩隻手。
+              <a:rPr sz="950" lang="zh-TW" dirty="0">
+                <a:solidFill>
+                  <a:srgbClr val="000000"/>
+                </a:solidFill>
+                <a:latin typeface="Arial Unicode MS"/>
+                <a:ea typeface="Arial Unicode MS"/>
+                <a:cs typeface="Arial Unicode MS"/>
+              </a:rPr>
+              <a:t>先想一個情況。高速公路上，</a:t>
+            </a:r>
+            <a:r>
+              <a:rPr sz="950" b="1" lang="zh-TW" dirty="0">
+                <a:solidFill>
+                  <a:srgbClr val="000000"/>
+                </a:solidFill>
+                <a:latin typeface="Arial Unicode MS"/>
+                <a:ea typeface="Arial Unicode MS"/>
+                <a:cs typeface="Arial Unicode MS"/>
+              </a:rPr>
+              <a:t>雷達說：前方六十公尺有東西。相機說：前面沒有車。</a:t>
+            </a:r>
+            <a:r>
+              <a:rPr sz="950" lang="zh-TW" dirty="0">
+                <a:solidFill>
+                  <a:srgbClr val="000000"/>
+                </a:solidFill>
+                <a:latin typeface="Arial Unicode MS"/>
+                <a:ea typeface="Arial Unicode MS"/>
+                <a:cs typeface="Arial Unicode MS"/>
+              </a:rPr>
+              <a:t>要聽誰的？
 </a:t>
             </a:r>
           </a:p>
@@ -2209,41 +2352,19 @@
                 <a:spcPts val="0"/>
               </a:spcBef>
               <a:spcAft>
-                <a:spcPts val="167"/>
+                <a:spcPts val="158"/>
               </a:spcAft>
             </a:pPr>
             <a:r>
-              <a:rPr sz="1000" lang="zh-TW" dirty="0">
-                <a:solidFill>
-                  <a:srgbClr val="000000"/>
-                </a:solidFill>
-                <a:latin typeface="Arial Unicode MS"/>
-                <a:ea typeface="Arial Unicode MS"/>
-                <a:cs typeface="Arial Unicode MS"/>
-              </a:rPr>
-              <a:t>先看左邊這支動畫，它會循環播兩格。上面是從旁邊看：左邊是我們的車，保險桿上的橘色小方塊是雷達，電波水平往前打出去。六十公尺外有一座頭頂的路牌。下面是</a:t>
-            </a:r>
-            <a:r>
-              <a:rPr sz="1000" b="1" lang="zh-TW" dirty="0">
-                <a:solidFill>
-                  <a:srgbClr val="000000"/>
-                </a:solidFill>
-                <a:latin typeface="Arial Unicode MS"/>
-                <a:ea typeface="Arial Unicode MS"/>
-                <a:cs typeface="Arial Unicode MS"/>
-              </a:rPr>
-              <a:t>雷達自己的地圖</a:t>
-            </a:r>
-            <a:r>
-              <a:rPr sz="1000" lang="zh-TW" dirty="0">
-                <a:solidFill>
-                  <a:srgbClr val="000000"/>
-                </a:solidFill>
-                <a:latin typeface="Arial Unicode MS"/>
-                <a:ea typeface="Arial Unicode MS"/>
-                <a:cs typeface="Arial Unicode MS"/>
-              </a:rPr>
-              <a:t>：上週講過，ARS 408 量不出高度，所以地圖上只有距離。
+              <a:rPr sz="950" lang="zh-TW" dirty="0">
+                <a:solidFill>
+                  <a:srgbClr val="000000"/>
+                </a:solidFill>
+                <a:latin typeface="Arial Unicode MS"/>
+                <a:ea typeface="Arial Unicode MS"/>
+                <a:cs typeface="Arial Unicode MS"/>
+              </a:rPr>
+              <a:t>先舉手：聽雷達的舉一隻手，聽相機的舉兩隻手。
 </a:t>
             </a:r>
           </a:p>
@@ -2253,30 +2374,41 @@
                 <a:spcPts val="0"/>
               </a:spcBef>
               <a:spcAft>
-                <a:spcPts val="167"/>
+                <a:spcPts val="158"/>
               </a:spcAft>
             </a:pPr>
             <a:r>
-              <a:rPr sz="1000" b="1" lang="zh-TW" dirty="0">
-                <a:solidFill>
-                  <a:srgbClr val="000000"/>
-                </a:solidFill>
-                <a:latin typeface="Arial Unicode MS"/>
-                <a:ea typeface="Arial Unicode MS"/>
-                <a:cs typeface="Arial Unicode MS"/>
-              </a:rPr>
-              <a:t>第一格，假設只有頭頂的路牌，下面沒有車。</a:t>
-            </a:r>
-            <a:r>
-              <a:rPr sz="1000" lang="zh-TW" dirty="0">
-                <a:solidFill>
-                  <a:srgbClr val="000000"/>
-                </a:solidFill>
-                <a:latin typeface="Arial Unicode MS"/>
-                <a:ea typeface="Arial Unicode MS"/>
-                <a:cs typeface="Arial Unicode MS"/>
-              </a:rPr>
-              <a:t>電波打到路牌，彈回來，雷達的地圖上出現一個點：前方六十公尺有東西。
+              <a:rPr sz="950" lang="zh-TW" dirty="0">
+                <a:solidFill>
+                  <a:srgbClr val="000000"/>
+                </a:solidFill>
+                <a:latin typeface="Arial Unicode MS"/>
+                <a:ea typeface="Arial Unicode MS"/>
+                <a:cs typeface="Arial Unicode MS"/>
+              </a:rPr>
+              <a:t>先看左邊這支動畫，它會循環播兩格。上面是從旁邊看：左邊是我們的車，保險桿上的橘色小方塊是雷達，電波水平往前打出去。六十公尺外有一座頭頂的路牌。下面是</a:t>
+            </a:r>
+            <a:r>
+              <a:rPr sz="950" b="1" lang="zh-TW" dirty="0">
+                <a:solidFill>
+                  <a:srgbClr val="000000"/>
+                </a:solidFill>
+                <a:latin typeface="Arial Unicode MS"/>
+                <a:ea typeface="Arial Unicode MS"/>
+                <a:cs typeface="Arial Unicode MS"/>
+              </a:rPr>
+              <a:t>雷達自己的地圖</a:t>
+            </a:r>
+            <a:r>
+              <a:rPr sz="950" lang="zh-TW" dirty="0">
+                <a:solidFill>
+                  <a:srgbClr val="000000"/>
+                </a:solidFill>
+                <a:latin typeface="Arial Unicode MS"/>
+                <a:ea typeface="Arial Unicode MS"/>
+                <a:cs typeface="Arial Unicode MS"/>
+              </a:rPr>
+              <a:t>：上週講過，ARS 408 量不出高度，所以地圖上只有距離。
 </a:t>
             </a:r>
           </a:p>
@@ -2286,52 +2418,30 @@
                 <a:spcPts val="0"/>
               </a:spcBef>
               <a:spcAft>
-                <a:spcPts val="167"/>
+                <a:spcPts val="158"/>
               </a:spcAft>
             </a:pPr>
             <a:r>
-              <a:rPr sz="1000" b="1" lang="zh-TW" dirty="0">
-                <a:solidFill>
-                  <a:srgbClr val="000000"/>
-                </a:solidFill>
-                <a:latin typeface="Arial Unicode MS"/>
-                <a:ea typeface="Arial Unicode MS"/>
-                <a:cs typeface="Arial Unicode MS"/>
-              </a:rPr>
-              <a:t>第二格，換一種可能：路牌下面真的停了一台車。</a:t>
-            </a:r>
-            <a:r>
-              <a:rPr sz="1000" lang="zh-TW" dirty="0">
-                <a:solidFill>
-                  <a:srgbClr val="000000"/>
-                </a:solidFill>
-                <a:latin typeface="Arial Unicode MS"/>
-                <a:ea typeface="Arial Unicode MS"/>
-                <a:cs typeface="Arial Unicode MS"/>
-              </a:rPr>
-              <a:t>電波打到車，彈回來，地圖上出現的點，</a:t>
-            </a:r>
-            <a:r>
-              <a:rPr sz="1000" b="1" lang="zh-TW" dirty="0">
-                <a:solidFill>
-                  <a:srgbClr val="000000"/>
-                </a:solidFill>
-                <a:latin typeface="Arial Unicode MS"/>
-                <a:ea typeface="Arial Unicode MS"/>
-                <a:cs typeface="Arial Unicode MS"/>
-              </a:rPr>
-              <a:t>位置一模一樣。</a:t>
-            </a:r>
-            <a:r>
-              <a:rPr sz="1000" lang="zh-TW" dirty="0">
-                <a:solidFill>
-                  <a:srgbClr val="000000"/>
-                </a:solidFill>
-                <a:latin typeface="Arial Unicode MS"/>
-                <a:ea typeface="Arial Unicode MS"/>
-                <a:cs typeface="Arial Unicode MS"/>
-              </a:rPr>
-              <a:t>雷達分不出這兩種情況。（為了看得清楚，動畫裡的高度是放大畫的。）
+              <a:rPr sz="950" b="1" lang="zh-TW" dirty="0">
+                <a:solidFill>
+                  <a:srgbClr val="000000"/>
+                </a:solidFill>
+                <a:latin typeface="Arial Unicode MS"/>
+                <a:ea typeface="Arial Unicode MS"/>
+                <a:cs typeface="Arial Unicode MS"/>
+              </a:rPr>
+              <a:t>第一格，假設只有頭頂的路牌，下面沒有車。</a:t>
+            </a:r>
+            <a:r>
+              <a:rPr sz="950" lang="zh-TW" dirty="0">
+                <a:solidFill>
+                  <a:srgbClr val="000000"/>
+                </a:solidFill>
+                <a:latin typeface="Arial Unicode MS"/>
+                <a:ea typeface="Arial Unicode MS"/>
+                <a:cs typeface="Arial Unicode MS"/>
+              </a:rPr>
+              <a:t>電波打到路牌，彈回來，雷達的地圖上出現一個點：前方六十公尺有東西。
 </a:t>
             </a:r>
           </a:p>
@@ -2341,19 +2451,52 @@
                 <a:spcPts val="0"/>
               </a:spcBef>
               <a:spcAft>
-                <a:spcPts val="167"/>
+                <a:spcPts val="158"/>
               </a:spcAft>
             </a:pPr>
             <a:r>
-              <a:rPr sz="1000" lang="zh-TW" dirty="0">
-                <a:solidFill>
-                  <a:srgbClr val="000000"/>
-                </a:solidFill>
-                <a:latin typeface="Arial Unicode MS"/>
-                <a:ea typeface="Arial Unicode MS"/>
-                <a:cs typeface="Arial Unicode MS"/>
-              </a:rPr>
-              <a:t>注意，這兩格是兩種可能的真相，不是同時發生。現在相機說「沒有車」，我們不知道真相是哪一格。
+              <a:rPr sz="950" b="1" lang="zh-TW" dirty="0">
+                <a:solidFill>
+                  <a:srgbClr val="000000"/>
+                </a:solidFill>
+                <a:latin typeface="Arial Unicode MS"/>
+                <a:ea typeface="Arial Unicode MS"/>
+                <a:cs typeface="Arial Unicode MS"/>
+              </a:rPr>
+              <a:t>第二格，換一種可能：路牌下面真的停了一台車。</a:t>
+            </a:r>
+            <a:r>
+              <a:rPr sz="950" lang="zh-TW" dirty="0">
+                <a:solidFill>
+                  <a:srgbClr val="000000"/>
+                </a:solidFill>
+                <a:latin typeface="Arial Unicode MS"/>
+                <a:ea typeface="Arial Unicode MS"/>
+                <a:cs typeface="Arial Unicode MS"/>
+              </a:rPr>
+              <a:t>電波打到車，彈回來，地圖上出現的點，</a:t>
+            </a:r>
+            <a:r>
+              <a:rPr sz="950" b="1" lang="zh-TW" dirty="0">
+                <a:solidFill>
+                  <a:srgbClr val="000000"/>
+                </a:solidFill>
+                <a:latin typeface="Arial Unicode MS"/>
+                <a:ea typeface="Arial Unicode MS"/>
+                <a:cs typeface="Arial Unicode MS"/>
+              </a:rPr>
+              <a:t>位置一模一樣。</a:t>
+            </a:r>
+            <a:r>
+              <a:rPr sz="950" lang="zh-TW" dirty="0">
+                <a:solidFill>
+                  <a:srgbClr val="000000"/>
+                </a:solidFill>
+                <a:latin typeface="Arial Unicode MS"/>
+                <a:ea typeface="Arial Unicode MS"/>
+                <a:cs typeface="Arial Unicode MS"/>
+              </a:rPr>
+              <a:t>雷達分不出這兩種情況。（為了看得清楚，動畫裡的高度是放大畫的。）
 </a:t>
             </a:r>
           </a:p>
@@ -2363,19 +2506,19 @@
                 <a:spcPts val="0"/>
               </a:spcBef>
               <a:spcAft>
-                <a:spcPts val="167"/>
+                <a:spcPts val="158"/>
               </a:spcAft>
             </a:pPr>
             <a:r>
-              <a:rPr sz="1000" lang="zh-TW" dirty="0">
-                <a:solidFill>
-                  <a:srgbClr val="000000"/>
-                </a:solidFill>
-                <a:latin typeface="Arial Unicode MS"/>
-                <a:ea typeface="Arial Unicode MS"/>
-                <a:cs typeface="Arial Unicode MS"/>
-              </a:rPr>
-              <a:t>所以雷達單獨回答不了這個問題，要問相機。可是相機說「沒有車」：如果是第一格，它說對了；如果是第二格，它是漏看了一台真的車。
+              <a:rPr sz="950" lang="zh-TW" dirty="0">
+                <a:solidFill>
+                  <a:srgbClr val="000000"/>
+                </a:solidFill>
+                <a:latin typeface="Arial Unicode MS"/>
+                <a:ea typeface="Arial Unicode MS"/>
+                <a:cs typeface="Arial Unicode MS"/>
+              </a:rPr>
+              <a:t>注意，這兩格是兩種可能的真相，不是同時發生。現在相機說「沒有車」，我們不知道真相是哪一格。
 </a:t>
             </a:r>
           </a:p>
@@ -2385,63 +2528,19 @@
                 <a:spcPts val="0"/>
               </a:spcBef>
               <a:spcAft>
-                <a:spcPts val="167"/>
+                <a:spcPts val="158"/>
               </a:spcAft>
             </a:pPr>
             <a:r>
-              <a:rPr sz="1000" lang="zh-TW" dirty="0">
-                <a:solidFill>
-                  <a:srgbClr val="000000"/>
-                </a:solidFill>
-                <a:latin typeface="Arial Unicode MS"/>
-                <a:ea typeface="Arial Unicode MS"/>
-                <a:cs typeface="Arial Unicode MS"/>
-              </a:rPr>
-              <a:t>兩邊都有道理，也都有代價。</a:t>
-            </a:r>
-            <a:r>
-              <a:rPr sz="1000" b="1" lang="zh-TW" dirty="0">
-                <a:solidFill>
-                  <a:srgbClr val="000000"/>
-                </a:solidFill>
-                <a:latin typeface="Arial Unicode MS"/>
-                <a:ea typeface="Arial Unicode MS"/>
-                <a:cs typeface="Arial Unicode MS"/>
-              </a:rPr>
-              <a:t>聽雷達</a:t>
-            </a:r>
-            <a:r>
-              <a:rPr sz="1000" lang="zh-TW" dirty="0">
-                <a:solidFill>
-                  <a:srgbClr val="000000"/>
-                </a:solidFill>
-                <a:latin typeface="Arial Unicode MS"/>
-                <a:ea typeface="Arial Unicode MS"/>
-                <a:cs typeface="Arial Unicode MS"/>
-              </a:rPr>
-              <a:t>：上一節講過，雷達量不出高度，那個「東西」可能是頭頂的路牌、天橋；每次都煞，就是幽靈煞車，後面的車可能撞上來。</a:t>
-            </a:r>
-            <a:r>
-              <a:rPr sz="1000" b="1" lang="zh-TW" dirty="0">
-                <a:solidFill>
-                  <a:srgbClr val="000000"/>
-                </a:solidFill>
-                <a:latin typeface="Arial Unicode MS"/>
-                <a:ea typeface="Arial Unicode MS"/>
-                <a:cs typeface="Arial Unicode MS"/>
-              </a:rPr>
-              <a:t>聽相機</a:t>
-            </a:r>
-            <a:r>
-              <a:rPr sz="1000" lang="zh-TW" dirty="0">
-                <a:solidFill>
-                  <a:srgbClr val="000000"/>
-                </a:solidFill>
-                <a:latin typeface="Arial Unicode MS"/>
-                <a:ea typeface="Arial Unicode MS"/>
-                <a:cs typeface="Arial Unicode MS"/>
-              </a:rPr>
-              <a:t>：相機可能沒認出來，像消防車那個事故，前面真的停了一台車。
+              <a:rPr sz="950" lang="zh-TW" dirty="0">
+                <a:solidFill>
+                  <a:srgbClr val="000000"/>
+                </a:solidFill>
+                <a:latin typeface="Arial Unicode MS"/>
+                <a:ea typeface="Arial Unicode MS"/>
+                <a:cs typeface="Arial Unicode MS"/>
+              </a:rPr>
+              <a:t>所以雷達單獨回答不了這個問題，要問相機。可是相機說「沒有車」：如果是第一格，它說對了；如果是第二格，它是漏看了一台真的車。
 </a:t>
             </a:r>
           </a:p>
@@ -2451,19 +2550,63 @@
                 <a:spcPts val="0"/>
               </a:spcBef>
               <a:spcAft>
-                <a:spcPts val="167"/>
+                <a:spcPts val="158"/>
               </a:spcAft>
             </a:pPr>
             <a:r>
-              <a:rPr sz="1000" lang="zh-TW" dirty="0">
-                <a:solidFill>
-                  <a:srgbClr val="000000"/>
-                </a:solidFill>
-                <a:latin typeface="Arial Unicode MS"/>
-                <a:ea typeface="Arial Unicode MS"/>
-                <a:cs typeface="Arial Unicode MS"/>
-              </a:rPr>
-              <a:t>就像警察問兩個目擊證人，兩個人說的不一樣。不能只聽聲音比較大的那個，要看誰在那個位置看得比較清楚、誰以前比較可靠。
+              <a:rPr sz="950" lang="zh-TW" dirty="0">
+                <a:solidFill>
+                  <a:srgbClr val="000000"/>
+                </a:solidFill>
+                <a:latin typeface="Arial Unicode MS"/>
+                <a:ea typeface="Arial Unicode MS"/>
+                <a:cs typeface="Arial Unicode MS"/>
+              </a:rPr>
+              <a:t>兩邊都有道理，也都有代價。</a:t>
+            </a:r>
+            <a:r>
+              <a:rPr sz="950" b="1" lang="zh-TW" dirty="0">
+                <a:solidFill>
+                  <a:srgbClr val="000000"/>
+                </a:solidFill>
+                <a:latin typeface="Arial Unicode MS"/>
+                <a:ea typeface="Arial Unicode MS"/>
+                <a:cs typeface="Arial Unicode MS"/>
+              </a:rPr>
+              <a:t>聽雷達</a:t>
+            </a:r>
+            <a:r>
+              <a:rPr sz="950" lang="zh-TW" dirty="0">
+                <a:solidFill>
+                  <a:srgbClr val="000000"/>
+                </a:solidFill>
+                <a:latin typeface="Arial Unicode MS"/>
+                <a:ea typeface="Arial Unicode MS"/>
+                <a:cs typeface="Arial Unicode MS"/>
+              </a:rPr>
+              <a:t>：上一節講過，雷達量不出高度，那個「東西」可能是頭頂的路牌、天橋；每次都煞，就是幽靈煞車，後面的車可能撞上來。</a:t>
+            </a:r>
+            <a:r>
+              <a:rPr sz="950" b="1" lang="zh-TW" dirty="0">
+                <a:solidFill>
+                  <a:srgbClr val="000000"/>
+                </a:solidFill>
+                <a:latin typeface="Arial Unicode MS"/>
+                <a:ea typeface="Arial Unicode MS"/>
+                <a:cs typeface="Arial Unicode MS"/>
+              </a:rPr>
+              <a:t>聽相機</a:t>
+            </a:r>
+            <a:r>
+              <a:rPr sz="950" lang="zh-TW" dirty="0">
+                <a:solidFill>
+                  <a:srgbClr val="000000"/>
+                </a:solidFill>
+                <a:latin typeface="Arial Unicode MS"/>
+                <a:ea typeface="Arial Unicode MS"/>
+                <a:cs typeface="Arial Unicode MS"/>
+              </a:rPr>
+              <a:t>：相機可能沒認出來，像消防車那個事故，前面真的停了一台車。
 </a:t>
             </a:r>
           </a:p>
@@ -2473,11 +2616,33 @@
                 <a:spcPts val="0"/>
               </a:spcBef>
               <a:spcAft>
-                <a:spcPts val="167"/>
+                <a:spcPts val="158"/>
               </a:spcAft>
             </a:pPr>
             <a:r>
-              <a:rPr sz="1000" lang="zh-TW" dirty="0">
+              <a:rPr sz="950" lang="zh-TW" dirty="0">
+                <a:solidFill>
+                  <a:srgbClr val="000000"/>
+                </a:solidFill>
+                <a:latin typeface="Arial Unicode MS"/>
+                <a:ea typeface="Arial Unicode MS"/>
+                <a:cs typeface="Arial Unicode MS"/>
+              </a:rPr>
+              <a:t>就像警察問兩個目擊證人，兩個人說的不一樣。不能只聽聲音比較大的那個，要看誰在那個位置看得比較清楚、誰以前比較可靠。
+</a:t>
+            </a:r>
+          </a:p>
+          <a:p>
+            <a:pPr algn="l">
+              <a:spcBef>
+                <a:spcPts val="0"/>
+              </a:spcBef>
+              <a:spcAft>
+                <a:spcPts val="158"/>
+              </a:spcAft>
+            </a:pPr>
+            <a:r>
+              <a:rPr sz="950" lang="zh-TW" dirty="0">
                 <a:solidFill>
                   <a:srgbClr val="000000"/>
                 </a:solidFill>
@@ -2488,7 +2653,7 @@
               <a:t>所以融合沒有一個永遠對的答案。它在做的事，是在不同情況下，</a:t>
             </a:r>
             <a:r>
-              <a:rPr sz="1000" b="1" lang="zh-TW" dirty="0">
+              <a:rPr sz="950" b="1" lang="zh-TW" dirty="0">
                 <a:solidFill>
                   <a:srgbClr val="000000"/>
                 </a:solidFill>
@@ -2499,7 +2664,7 @@
               <a:t>選一個比較承受得起的代價</a:t>
             </a:r>
             <a:r>
-              <a:rPr sz="1000" lang="zh-TW" dirty="0">
+              <a:rPr sz="950" lang="zh-TW" dirty="0">
                 <a:solidFill>
                   <a:srgbClr val="000000"/>
                 </a:solidFill>
@@ -2620,6 +2785,39 @@
               </a:spcAft>
             </a:pPr>
             <a:r>
+              <a:rPr sz="1200" b="1" lang="zh-TW" dirty="0">
+                <a:solidFill>
+                  <a:srgbClr val="000000"/>
+                </a:solidFill>
+                <a:latin typeface="Arial Unicode MS"/>
+                <a:ea typeface="Arial Unicode MS"/>
+                <a:cs typeface="Arial Unicode MS"/>
+              </a:rPr>
+              <a:t>這一張的目的：</a:t>
+            </a:r>
+            <a:r>
+              <a:rPr sz="1200" lang="zh-TW" dirty="0">
+                <a:solidFill>
+                  <a:srgbClr val="000000"/>
+                </a:solidFill>
+                <a:latin typeface="Arial Unicode MS"/>
+                <a:ea typeface="Arial Unicode MS"/>
+                <a:cs typeface="Arial Unicode MS"/>
+              </a:rPr>
+              <a:t>讓大家分清楚合起來的兩種好處：互補是為了看得完整，備援是為了壞一顆還開得下去。
+</a:t>
+            </a:r>
+          </a:p>
+          <a:p>
+            <a:pPr algn="l">
+              <a:spcBef>
+                <a:spcPts val="0"/>
+              </a:spcBef>
+              <a:spcAft>
+                <a:spcPts val="200"/>
+              </a:spcAft>
+            </a:pPr>
+            <a:r>
               <a:rPr sz="1200" lang="zh-TW" dirty="0">
                 <a:solidFill>
                   <a:srgbClr val="000000"/>
@@ -2851,6 +3049,39 @@
               </a:spcAft>
             </a:pPr>
             <a:r>
+              <a:rPr sz="800" b="1" lang="zh-TW" dirty="0">
+                <a:solidFill>
+                  <a:srgbClr val="000000"/>
+                </a:solidFill>
+                <a:latin typeface="Arial Unicode MS"/>
+                <a:ea typeface="Arial Unicode MS"/>
+                <a:cs typeface="Arial Unicode MS"/>
+              </a:rPr>
+              <a:t>這一張的目的：</a:t>
+            </a:r>
+            <a:r>
+              <a:rPr sz="800" lang="zh-TW" dirty="0">
+                <a:solidFill>
+                  <a:srgbClr val="000000"/>
+                </a:solidFill>
+                <a:latin typeface="Arial Unicode MS"/>
+                <a:ea typeface="Arial Unicode MS"/>
+                <a:cs typeface="Arial Unicode MS"/>
+              </a:rPr>
+              <a:t>讓大家知道，合起來之前要先對齊空間，也就是標定；角度差一點點，點就整片滑開。
+</a:t>
+            </a:r>
+          </a:p>
+          <a:p>
+            <a:pPr algn="l">
+              <a:spcBef>
+                <a:spcPts val="0"/>
+              </a:spcBef>
+              <a:spcAft>
+                <a:spcPts val="133"/>
+              </a:spcAft>
+            </a:pPr>
+            <a:r>
               <a:rPr sz="800" lang="zh-TW" dirty="0">
                 <a:solidFill>
                   <a:srgbClr val="000000"/>
@@ -3606,41 +3837,30 @@
                 <a:spcPts val="0"/>
               </a:spcBef>
               <a:spcAft>
-                <a:spcPts val="192"/>
+                <a:spcPts val="183"/>
               </a:spcAft>
             </a:pPr>
             <a:r>
-              <a:rPr sz="1150" lang="zh-TW" dirty="0">
-                <a:solidFill>
-                  <a:srgbClr val="000000"/>
-                </a:solidFill>
-                <a:latin typeface="Arial Unicode MS"/>
-                <a:ea typeface="Arial Unicode MS"/>
-                <a:cs typeface="Arial Unicode MS"/>
-              </a:rPr>
-              <a:t>第二件事：</a:t>
-            </a:r>
-            <a:r>
-              <a:rPr sz="1150" b="1" lang="zh-TW" dirty="0">
-                <a:solidFill>
-                  <a:srgbClr val="000000"/>
-                </a:solidFill>
-                <a:latin typeface="Arial Unicode MS"/>
-                <a:ea typeface="Arial Unicode MS"/>
-                <a:cs typeface="Arial Unicode MS"/>
-              </a:rPr>
-              <a:t>對齊同一個時間。</a:t>
-            </a:r>
-            <a:r>
-              <a:rPr sz="1150" lang="zh-TW" dirty="0">
-                <a:solidFill>
-                  <a:srgbClr val="000000"/>
-                </a:solidFill>
-                <a:latin typeface="Arial Unicode MS"/>
-                <a:ea typeface="Arial Unicode MS"/>
-                <a:cs typeface="Arial Unicode MS"/>
-              </a:rPr>
-              <a:t>
+              <a:rPr sz="1100" b="1" lang="zh-TW" dirty="0">
+                <a:solidFill>
+                  <a:srgbClr val="000000"/>
+                </a:solidFill>
+                <a:latin typeface="Arial Unicode MS"/>
+                <a:ea typeface="Arial Unicode MS"/>
+                <a:cs typeface="Arial Unicode MS"/>
+              </a:rPr>
+              <a:t>這一張的目的：</a:t>
+            </a:r>
+            <a:r>
+              <a:rPr sz="1100" lang="zh-TW" dirty="0">
+                <a:solidFill>
+                  <a:srgbClr val="000000"/>
+                </a:solidFill>
+                <a:latin typeface="Arial Unicode MS"/>
+                <a:ea typeface="Arial Unicode MS"/>
+                <a:cs typeface="Arial Unicode MS"/>
+              </a:rPr>
+              <a:t>讓大家知道，除了空間，還要對齊時間；會動的東西，時間一差，位置就錯。
 </a:t>
             </a:r>
           </a:p>
@@ -3650,19 +3870,41 @@
                 <a:spcPts val="0"/>
               </a:spcBef>
               <a:spcAft>
-                <a:spcPts val="192"/>
+                <a:spcPts val="183"/>
               </a:spcAft>
             </a:pPr>
             <a:r>
-              <a:rPr sz="1150" lang="zh-TW" dirty="0">
-                <a:solidFill>
-                  <a:srgbClr val="000000"/>
-                </a:solidFill>
-                <a:latin typeface="Arial Unicode MS"/>
-                <a:ea typeface="Arial Unicode MS"/>
-                <a:cs typeface="Arial Unicode MS"/>
-              </a:rPr>
-              <a:t>nuScenes 官網寫了三種感測器的更新率：光達每秒二十次，雷達每秒十三次，相機每秒十二次。三種都不一樣，所以「同一個瞬間」其實不存在，每一顆拍的時刻都差一點。我查了其中一格關鍵畫面的時間：前方那顆雷達，比相機晚了六十七毫秒。
+              <a:rPr sz="1100" lang="zh-TW" dirty="0">
+                <a:solidFill>
+                  <a:srgbClr val="000000"/>
+                </a:solidFill>
+                <a:latin typeface="Arial Unicode MS"/>
+                <a:ea typeface="Arial Unicode MS"/>
+                <a:cs typeface="Arial Unicode MS"/>
+              </a:rPr>
+              <a:t>第二件事：</a:t>
+            </a:r>
+            <a:r>
+              <a:rPr sz="1100" b="1" lang="zh-TW" dirty="0">
+                <a:solidFill>
+                  <a:srgbClr val="000000"/>
+                </a:solidFill>
+                <a:latin typeface="Arial Unicode MS"/>
+                <a:ea typeface="Arial Unicode MS"/>
+                <a:cs typeface="Arial Unicode MS"/>
+              </a:rPr>
+              <a:t>對齊同一個時間。</a:t>
+            </a:r>
+            <a:r>
+              <a:rPr sz="1100" lang="zh-TW" dirty="0">
+                <a:solidFill>
+                  <a:srgbClr val="000000"/>
+                </a:solidFill>
+                <a:latin typeface="Arial Unicode MS"/>
+                <a:ea typeface="Arial Unicode MS"/>
+                <a:cs typeface="Arial Unicode MS"/>
+              </a:rPr>
+              <a:t>
 </a:t>
             </a:r>
           </a:p>
@@ -3672,19 +3914,19 @@
                 <a:spcPts val="0"/>
               </a:spcBef>
               <a:spcAft>
-                <a:spcPts val="192"/>
+                <a:spcPts val="183"/>
               </a:spcAft>
             </a:pPr>
             <a:r>
-              <a:rPr sz="1150" lang="zh-TW" dirty="0">
-                <a:solidFill>
-                  <a:srgbClr val="000000"/>
-                </a:solidFill>
-                <a:latin typeface="Arial Unicode MS"/>
-                <a:ea typeface="Arial Unicode MS"/>
-                <a:cs typeface="Arial Unicode MS"/>
-              </a:rPr>
-              <a:t>差一點有多嚴重？看真的資料。新加坡晚上的一個路口，一台黑色轎車正從左往右開過去，大約時速三十七公里。為了看清楚，兩張圖都只畫離地零點四到兩公尺、二十五公尺內的光達點。
+              <a:rPr sz="1100" lang="zh-TW" dirty="0">
+                <a:solidFill>
+                  <a:srgbClr val="000000"/>
+                </a:solidFill>
+                <a:latin typeface="Arial Unicode MS"/>
+                <a:ea typeface="Arial Unicode MS"/>
+                <a:cs typeface="Arial Unicode MS"/>
+              </a:rPr>
+              <a:t>nuScenes 官網寫了三種感測器的更新率：光達每秒二十次，雷達每秒十三次，相機每秒十二次。三種都不一樣，所以「同一個瞬間」其實不存在，每一顆拍的時刻都差一點。我查了其中一格關鍵畫面的時間：前方那顆雷達，比相機晚了六十七毫秒。
 </a:t>
             </a:r>
           </a:p>
@@ -3694,30 +3936,19 @@
                 <a:spcPts val="0"/>
               </a:spcBef>
               <a:spcAft>
-                <a:spcPts val="192"/>
+                <a:spcPts val="183"/>
               </a:spcAft>
             </a:pPr>
             <a:r>
-              <a:rPr sz="1150" b="1" lang="zh-TW" dirty="0">
-                <a:solidFill>
-                  <a:srgbClr val="000000"/>
-                </a:solidFill>
-                <a:latin typeface="Arial Unicode MS"/>
-                <a:ea typeface="Arial Unicode MS"/>
-                <a:cs typeface="Arial Unicode MS"/>
-              </a:rPr>
-              <a:t>左邊，同步的。</a:t>
-            </a:r>
-            <a:r>
-              <a:rPr sz="1150" lang="zh-TW" dirty="0">
-                <a:solidFill>
-                  <a:srgbClr val="000000"/>
-                </a:solidFill>
-                <a:latin typeface="Arial Unicode MS"/>
-                <a:ea typeface="Arial Unicode MS"/>
-                <a:cs typeface="Arial Unicode MS"/>
-              </a:rPr>
-              <a:t>光達點蓋滿整台車，連車頭都有；左邊那塊藍色的路牌，點也剛好落在牌子上。
+              <a:rPr sz="1100" lang="zh-TW" dirty="0">
+                <a:solidFill>
+                  <a:srgbClr val="000000"/>
+                </a:solidFill>
+                <a:latin typeface="Arial Unicode MS"/>
+                <a:ea typeface="Arial Unicode MS"/>
+                <a:cs typeface="Arial Unicode MS"/>
+              </a:rPr>
+              <a:t>差一點有多嚴重？看真的資料。新加坡晚上的一個路口，一台黑色轎車正從左往右開過去，大約時速三十七公里。為了看清楚，兩張圖都只畫離地零點四到兩公尺、二十五公尺內的光達點。
 </a:t>
             </a:r>
           </a:p>
@@ -3727,52 +3958,30 @@
                 <a:spcPts val="0"/>
               </a:spcBef>
               <a:spcAft>
-                <a:spcPts val="192"/>
+                <a:spcPts val="183"/>
               </a:spcAft>
             </a:pPr>
             <a:r>
-              <a:rPr sz="1150" b="1" lang="zh-TW" dirty="0">
-                <a:solidFill>
-                  <a:srgbClr val="000000"/>
-                </a:solidFill>
-                <a:latin typeface="Arial Unicode MS"/>
-                <a:ea typeface="Arial Unicode MS"/>
-                <a:cs typeface="Arial Unicode MS"/>
-              </a:rPr>
-              <a:t>右邊，同一張照片，可是光達改用早四圈的那一圈，也就是早零點二秒。</a:t>
-            </a:r>
-            <a:r>
-              <a:rPr sz="1150" lang="zh-TW" dirty="0">
-                <a:solidFill>
-                  <a:srgbClr val="000000"/>
-                </a:solidFill>
-                <a:latin typeface="Arial Unicode MS"/>
-                <a:ea typeface="Arial Unicode MS"/>
-                <a:cs typeface="Arial Unicode MS"/>
-              </a:rPr>
-              <a:t>請看車頭：沒有點了。車尾後面，本來是背景的地方，反而有一排點。那是車子零點二秒前的位置。時速三十七，零點二秒走了兩公尺。再看左邊的路牌：照樣對得準。</a:t>
-            </a:r>
-            <a:r>
-              <a:rPr sz="1150" b="1" lang="zh-TW" dirty="0">
-                <a:solidFill>
-                  <a:srgbClr val="000000"/>
-                </a:solidFill>
-                <a:latin typeface="Arial Unicode MS"/>
-                <a:ea typeface="Arial Unicode MS"/>
-                <a:cs typeface="Arial Unicode MS"/>
-              </a:rPr>
-              <a:t>路牌沒動，所以時間差多少都沒關係；會動的東西，時間一差，位置就跟著錯。</a:t>
-            </a:r>
-            <a:r>
-              <a:rPr sz="1150" lang="zh-TW" dirty="0">
-                <a:solidFill>
-                  <a:srgbClr val="000000"/>
-                </a:solidFill>
-                <a:latin typeface="Arial Unicode MS"/>
-                <a:ea typeface="Arial Unicode MS"/>
-                <a:cs typeface="Arial Unicode MS"/>
-              </a:rPr>
-              <a:t>
+              <a:rPr sz="1100" b="1" lang="zh-TW" dirty="0">
+                <a:solidFill>
+                  <a:srgbClr val="000000"/>
+                </a:solidFill>
+                <a:latin typeface="Arial Unicode MS"/>
+                <a:ea typeface="Arial Unicode MS"/>
+                <a:cs typeface="Arial Unicode MS"/>
+              </a:rPr>
+              <a:t>左邊，同步的。</a:t>
+            </a:r>
+            <a:r>
+              <a:rPr sz="1100" lang="zh-TW" dirty="0">
+                <a:solidFill>
+                  <a:srgbClr val="000000"/>
+                </a:solidFill>
+                <a:latin typeface="Arial Unicode MS"/>
+                <a:ea typeface="Arial Unicode MS"/>
+                <a:cs typeface="Arial Unicode MS"/>
+              </a:rPr>
+              <a:t>光達點蓋滿整台車，連車頭都有；左邊那塊藍色的路牌，點也剛好落在牌子上。
 </a:t>
             </a:r>
           </a:p>
@@ -3782,19 +3991,52 @@
                 <a:spcPts val="0"/>
               </a:spcBef>
               <a:spcAft>
-                <a:spcPts val="192"/>
+                <a:spcPts val="183"/>
               </a:spcAft>
             </a:pPr>
             <a:r>
-              <a:rPr sz="1150" lang="zh-TW" dirty="0">
-                <a:solidFill>
-                  <a:srgbClr val="000000"/>
-                </a:solidFill>
-                <a:latin typeface="Arial Unicode MS"/>
-                <a:ea typeface="Arial Unicode MS"/>
-                <a:cs typeface="Arial Unicode MS"/>
-              </a:rPr>
-              <a:t>就像兩個人站在路邊，拍同一台開過去的車，一個人晚半秒按快門，兩張照片疊在一起，車子就變成兩台。
+              <a:rPr sz="1100" b="1" lang="zh-TW" dirty="0">
+                <a:solidFill>
+                  <a:srgbClr val="000000"/>
+                </a:solidFill>
+                <a:latin typeface="Arial Unicode MS"/>
+                <a:ea typeface="Arial Unicode MS"/>
+                <a:cs typeface="Arial Unicode MS"/>
+              </a:rPr>
+              <a:t>右邊，同一張照片，可是光達改用早四圈的那一圈，也就是早零點二秒。</a:t>
+            </a:r>
+            <a:r>
+              <a:rPr sz="1100" lang="zh-TW" dirty="0">
+                <a:solidFill>
+                  <a:srgbClr val="000000"/>
+                </a:solidFill>
+                <a:latin typeface="Arial Unicode MS"/>
+                <a:ea typeface="Arial Unicode MS"/>
+                <a:cs typeface="Arial Unicode MS"/>
+              </a:rPr>
+              <a:t>請看車頭：沒有點了。車尾後面，本來是背景的地方，反而有一排點。那是車子零點二秒前的位置。時速三十七，零點二秒走了兩公尺。再看左邊的路牌：照樣對得準。</a:t>
+            </a:r>
+            <a:r>
+              <a:rPr sz="1100" b="1" lang="zh-TW" dirty="0">
+                <a:solidFill>
+                  <a:srgbClr val="000000"/>
+                </a:solidFill>
+                <a:latin typeface="Arial Unicode MS"/>
+                <a:ea typeface="Arial Unicode MS"/>
+                <a:cs typeface="Arial Unicode MS"/>
+              </a:rPr>
+              <a:t>路牌沒動，所以時間差多少都沒關係；會動的東西，時間一差，位置就跟著錯。</a:t>
+            </a:r>
+            <a:r>
+              <a:rPr sz="1100" lang="zh-TW" dirty="0">
+                <a:solidFill>
+                  <a:srgbClr val="000000"/>
+                </a:solidFill>
+                <a:latin typeface="Arial Unicode MS"/>
+                <a:ea typeface="Arial Unicode MS"/>
+                <a:cs typeface="Arial Unicode MS"/>
+              </a:rPr>
+              <a:t>
 </a:t>
             </a:r>
           </a:p>
@@ -3804,41 +4046,19 @@
                 <a:spcPts val="0"/>
               </a:spcBef>
               <a:spcAft>
-                <a:spcPts val="192"/>
+                <a:spcPts val="183"/>
               </a:spcAft>
             </a:pPr>
             <a:r>
-              <a:rPr sz="1150" lang="zh-TW" dirty="0">
-                <a:solidFill>
-                  <a:srgbClr val="000000"/>
-                </a:solidFill>
-                <a:latin typeface="Arial Unicode MS"/>
-                <a:ea typeface="Arial Unicode MS"/>
-                <a:cs typeface="Arial Unicode MS"/>
-              </a:rPr>
-              <a:t>nuScenes 怎麼處理？它的光達在車頂一直轉，</a:t>
-            </a:r>
-            <a:r>
-              <a:rPr sz="1150" b="1" lang="zh-TW" dirty="0">
-                <a:solidFill>
-                  <a:srgbClr val="000000"/>
-                </a:solidFill>
-                <a:latin typeface="Arial Unicode MS"/>
-                <a:ea typeface="Arial Unicode MS"/>
-                <a:cs typeface="Arial Unicode MS"/>
-              </a:rPr>
-              <a:t>轉到某一台相機視野正中間的那一刻，才觸發那台相機拍照</a:t>
-            </a:r>
-            <a:r>
-              <a:rPr sz="1150" lang="zh-TW" dirty="0">
-                <a:solidFill>
-                  <a:srgbClr val="000000"/>
-                </a:solidFill>
-                <a:latin typeface="Arial Unicode MS"/>
-                <a:ea typeface="Arial Unicode MS"/>
-                <a:cs typeface="Arial Unicode MS"/>
-              </a:rPr>
-              <a:t>。所以相機和光達，在畫面正中間是對齊的。左邊那張之所以疊得那麼準，就是因為這樣。
+              <a:rPr sz="1100" lang="zh-TW" dirty="0">
+                <a:solidFill>
+                  <a:srgbClr val="000000"/>
+                </a:solidFill>
+                <a:latin typeface="Arial Unicode MS"/>
+                <a:ea typeface="Arial Unicode MS"/>
+                <a:cs typeface="Arial Unicode MS"/>
+              </a:rPr>
+              <a:t>就像兩個人站在路邊，拍同一台開過去的車，一個人晚半秒按快門，兩張照片疊在一起，車子就變成兩台。
 </a:t>
             </a:r>
           </a:p>
@@ -3848,11 +4068,55 @@
                 <a:spcPts val="0"/>
               </a:spcBef>
               <a:spcAft>
-                <a:spcPts val="192"/>
+                <a:spcPts val="183"/>
               </a:spcAft>
             </a:pPr>
             <a:r>
-              <a:rPr sz="1150" lang="zh-TW" dirty="0">
+              <a:rPr sz="1100" lang="zh-TW" dirty="0">
+                <a:solidFill>
+                  <a:srgbClr val="000000"/>
+                </a:solidFill>
+                <a:latin typeface="Arial Unicode MS"/>
+                <a:ea typeface="Arial Unicode MS"/>
+                <a:cs typeface="Arial Unicode MS"/>
+              </a:rPr>
+              <a:t>nuScenes 怎麼處理？它的光達在車頂一直轉，</a:t>
+            </a:r>
+            <a:r>
+              <a:rPr sz="1100" b="1" lang="zh-TW" dirty="0">
+                <a:solidFill>
+                  <a:srgbClr val="000000"/>
+                </a:solidFill>
+                <a:latin typeface="Arial Unicode MS"/>
+                <a:ea typeface="Arial Unicode MS"/>
+                <a:cs typeface="Arial Unicode MS"/>
+              </a:rPr>
+              <a:t>轉到某一台相機視野正中間的那一刻，才觸發那台相機拍照</a:t>
+            </a:r>
+            <a:r>
+              <a:rPr sz="1100" lang="zh-TW" dirty="0">
+                <a:solidFill>
+                  <a:srgbClr val="000000"/>
+                </a:solidFill>
+                <a:latin typeface="Arial Unicode MS"/>
+                <a:ea typeface="Arial Unicode MS"/>
+                <a:cs typeface="Arial Unicode MS"/>
+              </a:rPr>
+              <a:t>。所以相機和光達，在畫面正中間是對齊的。左邊那張之所以疊得那麼準，就是因為這樣。
+</a:t>
+            </a:r>
+          </a:p>
+          <a:p>
+            <a:pPr algn="l">
+              <a:spcBef>
+                <a:spcPts val="0"/>
+              </a:spcBef>
+              <a:spcAft>
+                <a:spcPts val="183"/>
+              </a:spcAft>
+            </a:pPr>
+            <a:r>
+              <a:rPr sz="1100" lang="zh-TW" dirty="0">
                 <a:solidFill>
                   <a:srgbClr val="000000"/>
                 </a:solidFill>
@@ -3973,6 +4237,39 @@
               </a:spcAft>
             </a:pPr>
             <a:r>
+              <a:rPr sz="1200" b="1" lang="zh-TW" dirty="0">
+                <a:solidFill>
+                  <a:srgbClr val="000000"/>
+                </a:solidFill>
+                <a:latin typeface="Arial Unicode MS"/>
+                <a:ea typeface="Arial Unicode MS"/>
+                <a:cs typeface="Arial Unicode MS"/>
+              </a:rPr>
+              <a:t>這一張的目的：</a:t>
+            </a:r>
+            <a:r>
+              <a:rPr sz="1200" lang="zh-TW" dirty="0">
+                <a:solidFill>
+                  <a:srgbClr val="000000"/>
+                </a:solidFill>
+                <a:latin typeface="Arial Unicode MS"/>
+                <a:ea typeface="Arial Unicode MS"/>
+                <a:cs typeface="Arial Unicode MS"/>
+              </a:rPr>
+              <a:t>讓大家知道，合的時間點有早、中、晚三種，各有好壞。
+</a:t>
+            </a:r>
+          </a:p>
+          <a:p>
+            <a:pPr algn="l">
+              <a:spcBef>
+                <a:spcPts val="0"/>
+              </a:spcBef>
+              <a:spcAft>
+                <a:spcPts val="200"/>
+              </a:spcAft>
+            </a:pPr>
+            <a:r>
               <a:rPr sz="1200" lang="zh-TW" dirty="0">
                 <a:solidFill>
                   <a:srgbClr val="000000"/>
@@ -4255,41 +4552,30 @@
                 <a:spcPts val="0"/>
               </a:spcBef>
               <a:spcAft>
-                <a:spcPts val="200"/>
+                <a:spcPts val="192"/>
               </a:spcAft>
             </a:pPr>
             <a:r>
-              <a:rPr sz="1200" lang="zh-TW" dirty="0">
-                <a:solidFill>
-                  <a:srgbClr val="000000"/>
-                </a:solidFill>
-                <a:latin typeface="Arial Unicode MS"/>
-                <a:ea typeface="Arial Unicode MS"/>
-                <a:cs typeface="Arial Unicode MS"/>
-              </a:rPr>
-              <a:t>後期融合最關鍵的一步，叫</a:t>
-            </a:r>
-            <a:r>
-              <a:rPr sz="1200" b="1" lang="zh-TW" dirty="0">
-                <a:solidFill>
-                  <a:srgbClr val="000000"/>
-                </a:solidFill>
-                <a:latin typeface="Arial Unicode MS"/>
-                <a:ea typeface="Arial Unicode MS"/>
-                <a:cs typeface="Arial Unicode MS"/>
-              </a:rPr>
-              <a:t>對應</a:t>
-            </a:r>
-            <a:r>
-              <a:rPr sz="1200" lang="zh-TW" dirty="0">
-                <a:solidFill>
-                  <a:srgbClr val="000000"/>
-                </a:solidFill>
-                <a:latin typeface="Arial Unicode MS"/>
-                <a:ea typeface="Arial Unicode MS"/>
-                <a:cs typeface="Arial Unicode MS"/>
-              </a:rPr>
-              <a:t>：雷達的這個點，跟相機的哪一個框，是同一個東西？
+              <a:rPr sz="1150" b="1" lang="zh-TW" dirty="0">
+                <a:solidFill>
+                  <a:srgbClr val="000000"/>
+                </a:solidFill>
+                <a:latin typeface="Arial Unicode MS"/>
+                <a:ea typeface="Arial Unicode MS"/>
+                <a:cs typeface="Arial Unicode MS"/>
+              </a:rPr>
+              <a:t>這一張的目的：</a:t>
+            </a:r>
+            <a:r>
+              <a:rPr sz="1150" lang="zh-TW" dirty="0">
+                <a:solidFill>
+                  <a:srgbClr val="000000"/>
+                </a:solidFill>
+                <a:latin typeface="Arial Unicode MS"/>
+                <a:ea typeface="Arial Unicode MS"/>
+                <a:cs typeface="Arial Unicode MS"/>
+              </a:rPr>
+              <a:t>讓大家知道，後期融合最關鍵的一步是「對應」，把雷達的點對到相機的框上。
 </a:t>
             </a:r>
           </a:p>
@@ -4299,19 +4585,41 @@
                 <a:spcPts val="0"/>
               </a:spcBef>
               <a:spcAft>
-                <a:spcPts val="200"/>
+                <a:spcPts val="192"/>
               </a:spcAft>
             </a:pPr>
             <a:r>
-              <a:rPr sz="1200" lang="zh-TW" dirty="0">
-                <a:solidFill>
-                  <a:srgbClr val="000000"/>
-                </a:solidFill>
-                <a:latin typeface="Arial Unicode MS"/>
-                <a:ea typeface="Arial Unicode MS"/>
-                <a:cs typeface="Arial Unicode MS"/>
-              </a:rPr>
-              <a:t>就像拿到一張班級照片和一份名單，要把名字對到臉上。對錯了，「時速三十」就被安到另一台車身上。
+              <a:rPr sz="1150" lang="zh-TW" dirty="0">
+                <a:solidFill>
+                  <a:srgbClr val="000000"/>
+                </a:solidFill>
+                <a:latin typeface="Arial Unicode MS"/>
+                <a:ea typeface="Arial Unicode MS"/>
+                <a:cs typeface="Arial Unicode MS"/>
+              </a:rPr>
+              <a:t>後期融合最關鍵的一步，叫</a:t>
+            </a:r>
+            <a:r>
+              <a:rPr sz="1150" b="1" lang="zh-TW" dirty="0">
+                <a:solidFill>
+                  <a:srgbClr val="000000"/>
+                </a:solidFill>
+                <a:latin typeface="Arial Unicode MS"/>
+                <a:ea typeface="Arial Unicode MS"/>
+                <a:cs typeface="Arial Unicode MS"/>
+              </a:rPr>
+              <a:t>對應</a:t>
+            </a:r>
+            <a:r>
+              <a:rPr sz="1150" lang="zh-TW" dirty="0">
+                <a:solidFill>
+                  <a:srgbClr val="000000"/>
+                </a:solidFill>
+                <a:latin typeface="Arial Unicode MS"/>
+                <a:ea typeface="Arial Unicode MS"/>
+                <a:cs typeface="Arial Unicode MS"/>
+              </a:rPr>
+              <a:t>：雷達的這個點，跟相機的哪一個框，是同一個東西？
 </a:t>
             </a:r>
           </a:p>
@@ -4321,63 +4629,19 @@
                 <a:spcPts val="0"/>
               </a:spcBef>
               <a:spcAft>
-                <a:spcPts val="200"/>
+                <a:spcPts val="192"/>
               </a:spcAft>
             </a:pPr>
             <a:r>
-              <a:rPr sz="1200" lang="zh-TW" dirty="0">
-                <a:solidFill>
-                  <a:srgbClr val="000000"/>
-                </a:solidFill>
-                <a:latin typeface="Arial Unicode MS"/>
-                <a:ea typeface="Arial Unicode MS"/>
-                <a:cs typeface="Arial Unicode MS"/>
-              </a:rPr>
-              <a:t>看左圖，波士頓的一條街。框是官方標註的物體，紅圈是雷達點。</a:t>
-            </a:r>
-            <a:r>
-              <a:rPr sz="1200" b="1" lang="zh-TW" dirty="0">
-                <a:solidFill>
-                  <a:srgbClr val="000000"/>
-                </a:solidFill>
-                <a:latin typeface="Arial Unicode MS"/>
-                <a:ea typeface="Arial Unicode MS"/>
-                <a:cs typeface="Arial Unicode MS"/>
-              </a:rPr>
-              <a:t>綠框</a:t>
-            </a:r>
-            <a:r>
-              <a:rPr sz="1200" lang="zh-TW" dirty="0">
-                <a:solidFill>
-                  <a:srgbClr val="000000"/>
-                </a:solidFill>
-                <a:latin typeface="Arial Unicode MS"/>
-                <a:ea typeface="Arial Unicode MS"/>
-                <a:cs typeface="Arial Unicode MS"/>
-              </a:rPr>
-              <a:t>，是框裡至少有一個雷達點的：路邊停的那幾台車，框裡都有紅圈。</a:t>
-            </a:r>
-            <a:r>
-              <a:rPr sz="1200" b="1" lang="zh-TW" dirty="0">
-                <a:solidFill>
-                  <a:srgbClr val="000000"/>
-                </a:solidFill>
-                <a:latin typeface="Arial Unicode MS"/>
-                <a:ea typeface="Arial Unicode MS"/>
-                <a:cs typeface="Arial Unicode MS"/>
-              </a:rPr>
-              <a:t>黃框</a:t>
-            </a:r>
-            <a:r>
-              <a:rPr sz="1200" lang="zh-TW" dirty="0">
-                <a:solidFill>
-                  <a:srgbClr val="000000"/>
-                </a:solidFill>
-                <a:latin typeface="Arial Unicode MS"/>
-                <a:ea typeface="Arial Unicode MS"/>
-                <a:cs typeface="Arial Unicode MS"/>
-              </a:rPr>
-              <a:t>，是一個雷達點都沒有的：四個行人，和好幾台遠處的車，大多在四十五公尺以外。這跟上一節那張統計表一樣：雷達抓得到近處的車，抓不太到人，車子一遠也開始漏。
+              <a:rPr sz="1150" lang="zh-TW" dirty="0">
+                <a:solidFill>
+                  <a:srgbClr val="000000"/>
+                </a:solidFill>
+                <a:latin typeface="Arial Unicode MS"/>
+                <a:ea typeface="Arial Unicode MS"/>
+                <a:cs typeface="Arial Unicode MS"/>
+              </a:rPr>
+              <a:t>就像拿到一張班級照片和一份名單，要把名字對到臉上。對錯了，「時速三十」就被安到另一台車身上。
 </a:t>
             </a:r>
           </a:p>
@@ -4387,41 +4651,63 @@
                 <a:spcPts val="0"/>
               </a:spcBef>
               <a:spcAft>
-                <a:spcPts val="200"/>
+                <a:spcPts val="192"/>
               </a:spcAft>
             </a:pPr>
             <a:r>
-              <a:rPr sz="1200" lang="zh-TW" dirty="0">
-                <a:solidFill>
-                  <a:srgbClr val="000000"/>
-                </a:solidFill>
-                <a:latin typeface="Arial Unicode MS"/>
-                <a:ea typeface="Arial Unicode MS"/>
-                <a:cs typeface="Arial Unicode MS"/>
-              </a:rPr>
-              <a:t>再看路的右邊，有一長排紅圈，排在人行道旁邊，沒有任何框。那多半是路邊的東西，可能是欄杆、樹、號誌桿。這些點不屬於任何一台標註的物體，對應的時候要</a:t>
-            </a:r>
-            <a:r>
-              <a:rPr sz="1200" b="1" lang="zh-TW" dirty="0">
-                <a:solidFill>
-                  <a:srgbClr val="000000"/>
-                </a:solidFill>
-                <a:latin typeface="Arial Unicode MS"/>
-                <a:ea typeface="Arial Unicode MS"/>
-                <a:cs typeface="Arial Unicode MS"/>
-              </a:rPr>
-              <a:t>正確地丟掉</a:t>
-            </a:r>
-            <a:r>
-              <a:rPr sz="1200" lang="zh-TW" dirty="0">
-                <a:solidFill>
-                  <a:srgbClr val="000000"/>
-                </a:solidFill>
-                <a:latin typeface="Arial Unicode MS"/>
-                <a:ea typeface="Arial Unicode MS"/>
-                <a:cs typeface="Arial Unicode MS"/>
-              </a:rPr>
-              <a:t>，不然就變成上一節講的幽靈煞車。
+              <a:rPr sz="1150" lang="zh-TW" dirty="0">
+                <a:solidFill>
+                  <a:srgbClr val="000000"/>
+                </a:solidFill>
+                <a:latin typeface="Arial Unicode MS"/>
+                <a:ea typeface="Arial Unicode MS"/>
+                <a:cs typeface="Arial Unicode MS"/>
+              </a:rPr>
+              <a:t>看左圖，波士頓的一條街。框是官方標註的物體，紅圈是雷達點。</a:t>
+            </a:r>
+            <a:r>
+              <a:rPr sz="1150" b="1" lang="zh-TW" dirty="0">
+                <a:solidFill>
+                  <a:srgbClr val="000000"/>
+                </a:solidFill>
+                <a:latin typeface="Arial Unicode MS"/>
+                <a:ea typeface="Arial Unicode MS"/>
+                <a:cs typeface="Arial Unicode MS"/>
+              </a:rPr>
+              <a:t>綠框</a:t>
+            </a:r>
+            <a:r>
+              <a:rPr sz="1150" lang="zh-TW" dirty="0">
+                <a:solidFill>
+                  <a:srgbClr val="000000"/>
+                </a:solidFill>
+                <a:latin typeface="Arial Unicode MS"/>
+                <a:ea typeface="Arial Unicode MS"/>
+                <a:cs typeface="Arial Unicode MS"/>
+              </a:rPr>
+              <a:t>，是框裡至少有一個雷達點的：路邊停的那幾台車，框裡都有紅圈。</a:t>
+            </a:r>
+            <a:r>
+              <a:rPr sz="1150" b="1" lang="zh-TW" dirty="0">
+                <a:solidFill>
+                  <a:srgbClr val="000000"/>
+                </a:solidFill>
+                <a:latin typeface="Arial Unicode MS"/>
+                <a:ea typeface="Arial Unicode MS"/>
+                <a:cs typeface="Arial Unicode MS"/>
+              </a:rPr>
+              <a:t>黃框</a:t>
+            </a:r>
+            <a:r>
+              <a:rPr sz="1150" lang="zh-TW" dirty="0">
+                <a:solidFill>
+                  <a:srgbClr val="000000"/>
+                </a:solidFill>
+                <a:latin typeface="Arial Unicode MS"/>
+                <a:ea typeface="Arial Unicode MS"/>
+                <a:cs typeface="Arial Unicode MS"/>
+              </a:rPr>
+              <a:t>，是一個雷達點都沒有的：四個行人，和好幾台遠處的車，大多在四十五公尺以外。這跟上一節那張統計表一樣：雷達抓得到近處的車，抓不太到人，車子一遠也開始漏。
 </a:t>
             </a:r>
           </a:p>
@@ -4431,63 +4717,41 @@
                 <a:spcPts val="0"/>
               </a:spcBef>
               <a:spcAft>
-                <a:spcPts val="200"/>
+                <a:spcPts val="192"/>
               </a:spcAft>
             </a:pPr>
             <a:r>
-              <a:rPr sz="1200" lang="zh-TW" dirty="0">
-                <a:solidFill>
-                  <a:srgbClr val="000000"/>
-                </a:solidFill>
-                <a:latin typeface="Arial Unicode MS"/>
-                <a:ea typeface="Arial Unicode MS"/>
-                <a:cs typeface="Arial Unicode MS"/>
-              </a:rPr>
-              <a:t>怎麼對？最簡單的就是看</a:t>
-            </a:r>
-            <a:r>
-              <a:rPr sz="1200" b="1" lang="zh-TW" dirty="0">
-                <a:solidFill>
-                  <a:srgbClr val="000000"/>
-                </a:solidFill>
-                <a:latin typeface="Arial Unicode MS"/>
-                <a:ea typeface="Arial Unicode MS"/>
-                <a:cs typeface="Arial Unicode MS"/>
-              </a:rPr>
-              <a:t>位置</a:t>
-            </a:r>
-            <a:r>
-              <a:rPr sz="1200" lang="zh-TW" dirty="0">
-                <a:solidFill>
-                  <a:srgbClr val="000000"/>
-                </a:solidFill>
-                <a:latin typeface="Arial Unicode MS"/>
-                <a:ea typeface="Arial Unicode MS"/>
-                <a:cs typeface="Arial Unicode MS"/>
-              </a:rPr>
-              <a:t>：雷達點落在哪個框附近，就算它的。再加上</a:t>
-            </a:r>
-            <a:r>
-              <a:rPr sz="1200" b="1" lang="zh-TW" dirty="0">
-                <a:solidFill>
-                  <a:srgbClr val="000000"/>
-                </a:solidFill>
-                <a:latin typeface="Arial Unicode MS"/>
-                <a:ea typeface="Arial Unicode MS"/>
-                <a:cs typeface="Arial Unicode MS"/>
-              </a:rPr>
-              <a:t>速度</a:t>
-            </a:r>
-            <a:r>
-              <a:rPr sz="1200" lang="zh-TW" dirty="0">
-                <a:solidFill>
-                  <a:srgbClr val="000000"/>
-                </a:solidFill>
-                <a:latin typeface="Arial Unicode MS"/>
-                <a:ea typeface="Arial Unicode MS"/>
-                <a:cs typeface="Arial Unicode MS"/>
-              </a:rPr>
-              <a:t>：雷達量得到速度，一個靜止的點，不會是一台正在開的車。
+              <a:rPr sz="1150" lang="zh-TW" dirty="0">
+                <a:solidFill>
+                  <a:srgbClr val="000000"/>
+                </a:solidFill>
+                <a:latin typeface="Arial Unicode MS"/>
+                <a:ea typeface="Arial Unicode MS"/>
+                <a:cs typeface="Arial Unicode MS"/>
+              </a:rPr>
+              <a:t>再看路的右邊，有一長排紅圈，排在人行道旁邊，沒有任何框。那多半是路邊的東西，可能是欄杆、樹、號誌桿。這些點不屬於任何一台標註的物體，對應的時候要</a:t>
+            </a:r>
+            <a:r>
+              <a:rPr sz="1150" b="1" lang="zh-TW" dirty="0">
+                <a:solidFill>
+                  <a:srgbClr val="000000"/>
+                </a:solidFill>
+                <a:latin typeface="Arial Unicode MS"/>
+                <a:ea typeface="Arial Unicode MS"/>
+                <a:cs typeface="Arial Unicode MS"/>
+              </a:rPr>
+              <a:t>正確地丟掉</a:t>
+            </a:r>
+            <a:r>
+              <a:rPr sz="1150" lang="zh-TW" dirty="0">
+                <a:solidFill>
+                  <a:srgbClr val="000000"/>
+                </a:solidFill>
+                <a:latin typeface="Arial Unicode MS"/>
+                <a:ea typeface="Arial Unicode MS"/>
+                <a:cs typeface="Arial Unicode MS"/>
+              </a:rPr>
+              <a:t>，不然就變成上一節講的幽靈煞車。
 </a:t>
             </a:r>
           </a:p>
@@ -4497,11 +4761,77 @@
                 <a:spcPts val="0"/>
               </a:spcBef>
               <a:spcAft>
-                <a:spcPts val="200"/>
+                <a:spcPts val="192"/>
               </a:spcAft>
             </a:pPr>
             <a:r>
-              <a:rPr sz="1200" lang="zh-TW" dirty="0">
+              <a:rPr sz="1150" lang="zh-TW" dirty="0">
+                <a:solidFill>
+                  <a:srgbClr val="000000"/>
+                </a:solidFill>
+                <a:latin typeface="Arial Unicode MS"/>
+                <a:ea typeface="Arial Unicode MS"/>
+                <a:cs typeface="Arial Unicode MS"/>
+              </a:rPr>
+              <a:t>怎麼對？最簡單的就是看</a:t>
+            </a:r>
+            <a:r>
+              <a:rPr sz="1150" b="1" lang="zh-TW" dirty="0">
+                <a:solidFill>
+                  <a:srgbClr val="000000"/>
+                </a:solidFill>
+                <a:latin typeface="Arial Unicode MS"/>
+                <a:ea typeface="Arial Unicode MS"/>
+                <a:cs typeface="Arial Unicode MS"/>
+              </a:rPr>
+              <a:t>位置</a:t>
+            </a:r>
+            <a:r>
+              <a:rPr sz="1150" lang="zh-TW" dirty="0">
+                <a:solidFill>
+                  <a:srgbClr val="000000"/>
+                </a:solidFill>
+                <a:latin typeface="Arial Unicode MS"/>
+                <a:ea typeface="Arial Unicode MS"/>
+                <a:cs typeface="Arial Unicode MS"/>
+              </a:rPr>
+              <a:t>：雷達點落在哪個框附近，就算它的。再加上</a:t>
+            </a:r>
+            <a:r>
+              <a:rPr sz="1150" b="1" lang="zh-TW" dirty="0">
+                <a:solidFill>
+                  <a:srgbClr val="000000"/>
+                </a:solidFill>
+                <a:latin typeface="Arial Unicode MS"/>
+                <a:ea typeface="Arial Unicode MS"/>
+                <a:cs typeface="Arial Unicode MS"/>
+              </a:rPr>
+              <a:t>速度</a:t>
+            </a:r>
+            <a:r>
+              <a:rPr sz="1150" lang="zh-TW" dirty="0">
+                <a:solidFill>
+                  <a:srgbClr val="000000"/>
+                </a:solidFill>
+                <a:latin typeface="Arial Unicode MS"/>
+                <a:ea typeface="Arial Unicode MS"/>
+                <a:cs typeface="Arial Unicode MS"/>
+              </a:rPr>
+              <a:t>：雷達量得到速度，一個靜止的點，不會是一台正在開的車。
+</a:t>
+            </a:r>
+          </a:p>
+          <a:p>
+            <a:pPr algn="l">
+              <a:spcBef>
+                <a:spcPts val="0"/>
+              </a:spcBef>
+              <a:spcAft>
+                <a:spcPts val="192"/>
+              </a:spcAft>
+            </a:pPr>
+            <a:r>
+              <a:rPr sz="1150" lang="zh-TW" dirty="0">
                 <a:solidFill>
                   <a:srgbClr val="000000"/>
                 </a:solidFill>
@@ -4512,7 +4842,7 @@
               <a:t>看一支影片，NVIDIA 做自駕晶片的團隊。</a:t>
             </a:r>
             <a:r>
-              <a:rPr sz="1200" b="1" lang="zh-TW" dirty="0">
+              <a:rPr sz="1150" b="1" lang="zh-TW" dirty="0">
                 <a:solidFill>
                   <a:srgbClr val="000000"/>
                 </a:solidFill>
@@ -4523,7 +4853,7 @@
               <a:t>從 0:42 播到 1:30。</a:t>
             </a:r>
             <a:r>
-              <a:rPr sz="1200" lang="zh-TW" dirty="0">
+              <a:rPr sz="1150" lang="zh-TW" dirty="0">
                 <a:solidFill>
                   <a:srgbClr val="000000"/>
                 </a:solidFill>
@@ -4534,7 +4864,7 @@
               <a:t>英文，我邊播邊講。畫面是車子周圍幾台相機拼起來的；</a:t>
             </a:r>
             <a:r>
-              <a:rPr sz="1200" b="1" lang="zh-TW" dirty="0">
+              <a:rPr sz="1150" b="1" lang="zh-TW" dirty="0">
                 <a:solidFill>
                   <a:srgbClr val="000000"/>
                 </a:solidFill>
@@ -4545,7 +4875,7 @@
               <a:t>0:47 小白方塊是雷達追蹤到的目標，橘色的線是它走過的路</a:t>
             </a:r>
             <a:r>
-              <a:rPr sz="1200" lang="zh-TW" dirty="0">
+              <a:rPr sz="1150" lang="zh-TW" dirty="0">
                 <a:solidFill>
                   <a:srgbClr val="000000"/>
                 </a:solidFill>
@@ -4556,7 +4886,7 @@
               <a:t>。</a:t>
             </a:r>
             <a:r>
-              <a:rPr sz="1200" b="1" lang="zh-TW" dirty="0">
+              <a:rPr sz="1150" b="1" lang="zh-TW" dirty="0">
                 <a:solidFill>
                   <a:srgbClr val="000000"/>
                 </a:solidFill>
@@ -4567,7 +4897,7 @@
               <a:t>0:52</a:t>
             </a:r>
             <a:r>
-              <a:rPr sz="1200" lang="zh-TW" dirty="0">
+              <a:rPr sz="1150" lang="zh-TW" dirty="0">
                 <a:solidFill>
                   <a:srgbClr val="000000"/>
                 </a:solidFill>
@@ -4578,7 +4908,7 @@
               <a:t> 旁白說：相機框出來的物體，和雷達的目標對上之後，小方塊會變成綠色。</a:t>
             </a:r>
             <a:r>
-              <a:rPr sz="1200" b="1" lang="zh-TW" dirty="0">
+              <a:rPr sz="1150" b="1" lang="zh-TW" dirty="0">
                 <a:solidFill>
                   <a:srgbClr val="000000"/>
                 </a:solidFill>
@@ -4589,7 +4919,7 @@
               <a:t>0:58</a:t>
             </a:r>
             <a:r>
-              <a:rPr sz="1200" lang="zh-TW" dirty="0">
+              <a:rPr sz="1150" lang="zh-TW" dirty="0">
                 <a:solidFill>
                   <a:srgbClr val="000000"/>
                 </a:solidFill>
@@ -4600,7 +4930,7 @@
               <a:t> 旁白講了融合的好處：位置、速度、加速度，都變得更準、更可靠。</a:t>
             </a:r>
             <a:r>
-              <a:rPr sz="1200" b="1" lang="zh-TW" dirty="0">
+              <a:rPr sz="1150" b="1" lang="zh-TW" dirty="0">
                 <a:solidFill>
                   <a:srgbClr val="000000"/>
                 </a:solidFill>
@@ -4611,7 +4941,7 @@
               <a:t>1:10</a:t>
             </a:r>
             <a:r>
-              <a:rPr sz="1200" lang="zh-TW" dirty="0">
+              <a:rPr sz="1150" lang="zh-TW" dirty="0">
                 <a:solidFill>
                   <a:srgbClr val="000000"/>
                 </a:solidFill>
@@ -4732,6 +5062,39 @@
               </a:spcAft>
             </a:pPr>
             <a:r>
+              <a:rPr sz="1200" b="1" lang="zh-TW" dirty="0">
+                <a:solidFill>
+                  <a:srgbClr val="000000"/>
+                </a:solidFill>
+                <a:latin typeface="Arial Unicode MS"/>
+                <a:ea typeface="Arial Unicode MS"/>
+                <a:cs typeface="Arial Unicode MS"/>
+              </a:rPr>
+              <a:t>這一張的目的：</a:t>
+            </a:r>
+            <a:r>
+              <a:rPr sz="1200" lang="zh-TW" dirty="0">
+                <a:solidFill>
+                  <a:srgbClr val="000000"/>
+                </a:solidFill>
+                <a:latin typeface="Arial Unicode MS"/>
+                <a:ea typeface="Arial Unicode MS"/>
+                <a:cs typeface="Arial Unicode MS"/>
+              </a:rPr>
+              <a:t>讓大家知道，說法不一樣時有三種決定方式，每一種都有代價，真的系統混著用。
+</a:t>
+            </a:r>
+          </a:p>
+          <a:p>
+            <a:pPr algn="l">
+              <a:spcBef>
+                <a:spcPts val="0"/>
+              </a:spcBef>
+              <a:spcAft>
+                <a:spcPts val="200"/>
+              </a:spcAft>
+            </a:pPr>
+            <a:r>
               <a:rPr sz="1200" lang="zh-TW" dirty="0">
                 <a:solidFill>
                   <a:srgbClr val="000000"/>
@@ -5030,6 +5393,39 @@
         <p:txBody>
           <a:bodyPr vert="horz" wrap="square" anchor="t" lIns="91440" rIns="91440" tIns="45720" bIns="45720"/>
           <a:lstStyle/>
+          <a:p>
+            <a:pPr algn="l">
+              <a:spcBef>
+                <a:spcPts val="0"/>
+              </a:spcBef>
+              <a:spcAft>
+                <a:spcPts val="158"/>
+              </a:spcAft>
+            </a:pPr>
+            <a:r>
+              <a:rPr sz="950" b="1" lang="zh-TW" dirty="0">
+                <a:solidFill>
+                  <a:srgbClr val="000000"/>
+                </a:solidFill>
+                <a:latin typeface="Arial Unicode MS"/>
+                <a:ea typeface="Arial Unicode MS"/>
+                <a:cs typeface="Arial Unicode MS"/>
+              </a:rPr>
+              <a:t>這一張的目的：</a:t>
+            </a:r>
+            <a:r>
+              <a:rPr sz="950" lang="zh-TW" dirty="0">
+                <a:solidFill>
+                  <a:srgbClr val="000000"/>
+                </a:solidFill>
+                <a:latin typeface="Arial Unicode MS"/>
+                <a:ea typeface="Arial Unicode MS"/>
+                <a:cs typeface="Arial Unicode MS"/>
+              </a:rPr>
+              <a:t>讓大家記住一句話，比較準的多相信一點；並且會算一次加權平均。
+</a:t>
+            </a:r>
+          </a:p>
           <a:p>
             <a:pPr algn="l">
               <a:spcBef>

--- a/第七週(10-22)/第七週_第2節_簡報.pptx
+++ b/第七週(10-22)/第七週_第2節_簡報.pptx
@@ -152,8 +152,8 @@
         </p:nvSpPr>
         <p:spPr>
           <a:xfrm>
-            <a:off x="540000" y="540000"/>
-            <a:ext cx="6480000" cy="3645000"/>
+            <a:off x="1620000" y="380000"/>
+            <a:ext cx="4320000" cy="2430000"/>
           </a:xfrm>
           <a:prstGeom prst="rect">
             <a:avLst/>
@@ -203,8 +203,8 @@
         </p:nvSpPr>
         <p:spPr>
           <a:xfrm>
-            <a:off x="540000" y="4440000"/>
-            <a:ext cx="6480000" cy="5500000"/>
+            <a:off x="540000" y="2990000"/>
+            <a:ext cx="6480000" cy="7060000"/>
           </a:xfrm>
           <a:prstGeom prst="rect">
             <a:avLst/>
@@ -408,8 +408,8 @@
         </p:nvSpPr>
         <p:spPr>
           <a:xfrm>
-            <a:off x="540000" y="540000"/>
-            <a:ext cx="6480000" cy="3645000"/>
+            <a:off x="1620000" y="380000"/>
+            <a:ext cx="4320000" cy="2430000"/>
           </a:xfrm>
         </p:spPr>
       </p:sp>
@@ -425,8 +425,8 @@
         </p:nvSpPr>
         <p:spPr>
           <a:xfrm>
-            <a:off x="540000" y="4440000"/>
-            <a:ext cx="6480000" cy="5500000"/>
+            <a:off x="540000" y="2990000"/>
+            <a:ext cx="6480000" cy="7060000"/>
           </a:xfrm>
         </p:spPr>
         <p:txBody>
@@ -438,11 +438,11 @@
                 <a:spcPts val="0"/>
               </a:spcBef>
               <a:spcAft>
-                <a:spcPts val="200"/>
+                <a:spcPts val="267"/>
               </a:spcAft>
             </a:pPr>
             <a:r>
-              <a:rPr sz="1200" b="1" lang="zh-TW" dirty="0">
+              <a:rPr sz="1600" b="1" lang="zh-TW" dirty="0">
                 <a:solidFill>
                   <a:srgbClr val="000000"/>
                 </a:solidFill>
@@ -453,7 +453,7 @@
               <a:t>這一節的目的：</a:t>
             </a:r>
             <a:r>
-              <a:rPr sz="1200" lang="zh-TW" dirty="0">
+              <a:rPr sz="1600" lang="zh-TW" dirty="0">
                 <a:solidFill>
                   <a:srgbClr val="000000"/>
                 </a:solidFill>
@@ -471,11 +471,11 @@
                 <a:spcPts val="0"/>
               </a:spcBef>
               <a:spcAft>
-                <a:spcPts val="200"/>
+                <a:spcPts val="267"/>
               </a:spcAft>
             </a:pPr>
             <a:r>
-              <a:rPr sz="1200" lang="zh-TW" dirty="0">
+              <a:rPr sz="1600" lang="zh-TW" dirty="0">
                 <a:solidFill>
                   <a:srgbClr val="000000"/>
                 </a:solidFill>
@@ -493,11 +493,11 @@
                 <a:spcPts val="0"/>
               </a:spcBef>
               <a:spcAft>
-                <a:spcPts val="200"/>
+                <a:spcPts val="267"/>
               </a:spcAft>
             </a:pPr>
             <a:r>
-              <a:rPr sz="1200" lang="zh-TW" dirty="0">
+              <a:rPr sz="1600" lang="zh-TW" dirty="0">
                 <a:solidFill>
                   <a:srgbClr val="000000"/>
                 </a:solidFill>
@@ -515,11 +515,11 @@
                 <a:spcPts val="0"/>
               </a:spcBef>
               <a:spcAft>
-                <a:spcPts val="200"/>
+                <a:spcPts val="267"/>
               </a:spcAft>
             </a:pPr>
             <a:r>
-              <a:rPr sz="1200" lang="zh-TW" dirty="0">
+              <a:rPr sz="1600" lang="zh-TW" dirty="0">
                 <a:solidFill>
                   <a:srgbClr val="000000"/>
                 </a:solidFill>
@@ -530,7 +530,7 @@
               <a:t>這一節要回答：既然每一顆都會壞，</a:t>
             </a:r>
             <a:r>
-              <a:rPr sz="1200" b="1" lang="zh-TW" dirty="0">
+              <a:rPr sz="1600" b="1" lang="zh-TW" dirty="0">
                 <a:solidFill>
                   <a:srgbClr val="000000"/>
                 </a:solidFill>
@@ -541,7 +541,7 @@
               <a:t>要怎麼把它們合起來</a:t>
             </a:r>
             <a:r>
-              <a:rPr sz="1200" lang="zh-TW" dirty="0">
+              <a:rPr sz="1600" lang="zh-TW" dirty="0">
                 <a:solidFill>
                   <a:srgbClr val="000000"/>
                 </a:solidFill>
@@ -552,7 +552,7 @@
               <a:t>，合起來以後，比任何一顆單獨看都可靠。這件事叫</a:t>
             </a:r>
             <a:r>
-              <a:rPr sz="1200" b="1" lang="zh-TW" dirty="0">
+              <a:rPr sz="1600" b="1" lang="zh-TW" dirty="0">
                 <a:solidFill>
                   <a:srgbClr val="000000"/>
                 </a:solidFill>
@@ -563,7 +563,7 @@
               <a:t>感測器融合</a:t>
             </a:r>
             <a:r>
-              <a:rPr sz="1200" lang="zh-TW" dirty="0">
+              <a:rPr sz="1600" lang="zh-TW" dirty="0">
                 <a:solidFill>
                   <a:srgbClr val="000000"/>
                 </a:solidFill>
@@ -581,11 +581,11 @@
                 <a:spcPts val="0"/>
               </a:spcBef>
               <a:spcAft>
-                <a:spcPts val="200"/>
+                <a:spcPts val="267"/>
               </a:spcAft>
             </a:pPr>
             <a:r>
-              <a:rPr sz="1200" lang="zh-TW" dirty="0">
+              <a:rPr sz="1600" lang="zh-TW" dirty="0">
                 <a:solidFill>
                   <a:srgbClr val="000000"/>
                 </a:solidFill>
@@ -596,7 +596,7 @@
               <a:t>三個問題：第一，</a:t>
             </a:r>
             <a:r>
-              <a:rPr sz="1200" b="1" lang="zh-TW" dirty="0">
+              <a:rPr sz="1600" b="1" lang="zh-TW" dirty="0">
                 <a:solidFill>
                   <a:srgbClr val="000000"/>
                 </a:solidFill>
@@ -607,7 +607,7 @@
               <a:t>合之前要先做什麼</a:t>
             </a:r>
             <a:r>
-              <a:rPr sz="1200" lang="zh-TW" dirty="0">
+              <a:rPr sz="1600" lang="zh-TW" dirty="0">
                 <a:solidFill>
                   <a:srgbClr val="000000"/>
                 </a:solidFill>
@@ -618,7 +618,7 @@
               <a:t>；第二，</a:t>
             </a:r>
             <a:r>
-              <a:rPr sz="1200" b="1" lang="zh-TW" dirty="0">
+              <a:rPr sz="1600" b="1" lang="zh-TW" dirty="0">
                 <a:solidFill>
                   <a:srgbClr val="000000"/>
                 </a:solidFill>
@@ -629,7 +629,7 @@
               <a:t>什麼時候合</a:t>
             </a:r>
             <a:r>
-              <a:rPr sz="1200" lang="zh-TW" dirty="0">
+              <a:rPr sz="1600" lang="zh-TW" dirty="0">
                 <a:solidFill>
                   <a:srgbClr val="000000"/>
                 </a:solidFill>
@@ -640,7 +640,7 @@
               <a:t>；第三，</a:t>
             </a:r>
             <a:r>
-              <a:rPr sz="1200" b="1" lang="zh-TW" dirty="0">
+              <a:rPr sz="1600" b="1" lang="zh-TW" dirty="0">
                 <a:solidFill>
                   <a:srgbClr val="000000"/>
                 </a:solidFill>
@@ -651,7 +651,7 @@
               <a:t>兩顆說的不一樣，要聽誰的</a:t>
             </a:r>
             <a:r>
-              <a:rPr sz="1200" lang="zh-TW" dirty="0">
+              <a:rPr sz="1600" lang="zh-TW" dirty="0">
                 <a:solidFill>
                   <a:srgbClr val="000000"/>
                 </a:solidFill>
@@ -738,8 +738,8 @@
         </p:nvSpPr>
         <p:spPr>
           <a:xfrm>
-            <a:off x="540000" y="540000"/>
-            <a:ext cx="6480000" cy="3645000"/>
+            <a:off x="1620000" y="380000"/>
+            <a:ext cx="4320000" cy="2430000"/>
           </a:xfrm>
         </p:spPr>
       </p:sp>
@@ -755,8 +755,8 @@
         </p:nvSpPr>
         <p:spPr>
           <a:xfrm>
-            <a:off x="540000" y="4440000"/>
-            <a:ext cx="6480000" cy="5500000"/>
+            <a:off x="540000" y="2990000"/>
+            <a:ext cx="6480000" cy="7060000"/>
           </a:xfrm>
         </p:spPr>
         <p:txBody>
@@ -768,11 +768,11 @@
                 <a:spcPts val="0"/>
               </a:spcBef>
               <a:spcAft>
-                <a:spcPts val="192"/>
+                <a:spcPts val="233"/>
               </a:spcAft>
             </a:pPr>
             <a:r>
-              <a:rPr sz="1150" b="1" lang="zh-TW" dirty="0">
+              <a:rPr sz="1400" b="1" lang="zh-TW" dirty="0">
                 <a:solidFill>
                   <a:srgbClr val="000000"/>
                 </a:solidFill>
@@ -783,7 +783,7 @@
               <a:t>這一張的目的：</a:t>
             </a:r>
             <a:r>
-              <a:rPr sz="1150" lang="zh-TW" dirty="0">
+              <a:rPr sz="1400" lang="zh-TW" dirty="0">
                 <a:solidFill>
                   <a:srgbClr val="000000"/>
                 </a:solidFill>
@@ -801,11 +801,11 @@
                 <a:spcPts val="0"/>
               </a:spcBef>
               <a:spcAft>
-                <a:spcPts val="192"/>
+                <a:spcPts val="233"/>
               </a:spcAft>
             </a:pPr>
             <a:r>
-              <a:rPr sz="1150" lang="zh-TW" dirty="0">
+              <a:rPr sz="1400" lang="zh-TW" dirty="0">
                 <a:solidFill>
                   <a:srgbClr val="000000"/>
                 </a:solidFill>
@@ -823,11 +823,11 @@
                 <a:spcPts val="0"/>
               </a:spcBef>
               <a:spcAft>
-                <a:spcPts val="192"/>
+                <a:spcPts val="233"/>
               </a:spcAft>
             </a:pPr>
             <a:r>
-              <a:rPr sz="1150" lang="zh-TW" dirty="0">
+              <a:rPr sz="1400" lang="zh-TW" dirty="0">
                 <a:solidFill>
                   <a:srgbClr val="000000"/>
                 </a:solidFill>
@@ -838,7 +838,7 @@
               <a:t>答案是</a:t>
             </a:r>
             <a:r>
-              <a:rPr sz="1150" b="1" lang="zh-TW" dirty="0">
+              <a:rPr sz="1400" b="1" lang="zh-TW" dirty="0">
                 <a:solidFill>
                   <a:srgbClr val="000000"/>
                 </a:solidFill>
@@ -849,7 +849,7 @@
               <a:t>降級</a:t>
             </a:r>
             <a:r>
-              <a:rPr sz="1150" lang="zh-TW" dirty="0">
+              <a:rPr sz="1400" lang="zh-TW" dirty="0">
                 <a:solidFill>
                   <a:srgbClr val="000000"/>
                 </a:solidFill>
@@ -867,11 +867,11 @@
                 <a:spcPts val="0"/>
               </a:spcBef>
               <a:spcAft>
-                <a:spcPts val="192"/>
+                <a:spcPts val="233"/>
               </a:spcAft>
             </a:pPr>
             <a:r>
-              <a:rPr sz="1150" lang="zh-TW" dirty="0">
+              <a:rPr sz="1400" lang="zh-TW" dirty="0">
                 <a:solidFill>
                   <a:srgbClr val="000000"/>
                 </a:solidFill>
@@ -882,7 +882,7 @@
               <a:t>看左邊的動圖，它會播三段。</a:t>
             </a:r>
             <a:r>
-              <a:rPr sz="1150" b="1" lang="zh-TW" dirty="0">
+              <a:rPr sz="1400" b="1" lang="zh-TW" dirty="0">
                 <a:solidFill>
                   <a:srgbClr val="000000"/>
                 </a:solidFill>
@@ -893,7 +893,7 @@
               <a:t>第一段，雨愈下愈大。</a:t>
             </a:r>
             <a:r>
-              <a:rPr sz="1150" lang="zh-TW" dirty="0">
+              <a:rPr sz="1400" lang="zh-TW" dirty="0">
                 <a:solidFill>
                   <a:srgbClr val="000000"/>
                 </a:solidFill>
@@ -911,11 +911,11 @@
                 <a:spcPts val="0"/>
               </a:spcBef>
               <a:spcAft>
-                <a:spcPts val="192"/>
+                <a:spcPts val="233"/>
               </a:spcAft>
             </a:pPr>
             <a:r>
-              <a:rPr sz="1150" lang="zh-TW" dirty="0">
+              <a:rPr sz="1400" lang="zh-TW" dirty="0">
                 <a:solidFill>
                   <a:srgbClr val="000000"/>
                 </a:solidFill>
@@ -926,7 +926,7 @@
               <a:t>怎麼退，跟第一週的 SAE 等級有關。</a:t>
             </a:r>
             <a:r>
-              <a:rPr sz="1150" b="1" lang="zh-TW" dirty="0">
+              <a:rPr sz="1400" b="1" lang="zh-TW" dirty="0">
                 <a:solidFill>
                   <a:srgbClr val="000000"/>
                 </a:solidFill>
@@ -937,7 +937,7 @@
               <a:t>L2</a:t>
             </a:r>
             <a:r>
-              <a:rPr sz="1150" lang="zh-TW" dirty="0">
+              <a:rPr sz="1400" lang="zh-TW" dirty="0">
                 <a:solidFill>
                   <a:srgbClr val="000000"/>
                 </a:solidFill>
@@ -948,7 +948,7 @@
               <a:t>，就是動圖的第二段：駕駛隨時要準備接手，所以車子會跳警告、發出聲音，請駕駛把方向盤拿回去。</a:t>
             </a:r>
             <a:r>
-              <a:rPr sz="1150" b="1" lang="zh-TW" dirty="0">
+              <a:rPr sz="1400" b="1" lang="zh-TW" dirty="0">
                 <a:solidFill>
                   <a:srgbClr val="000000"/>
                 </a:solidFill>
@@ -959,7 +959,7 @@
               <a:t>L4</a:t>
             </a:r>
             <a:r>
-              <a:rPr sz="1150" lang="zh-TW" dirty="0">
+              <a:rPr sz="1400" lang="zh-TW" dirty="0">
                 <a:solidFill>
                   <a:srgbClr val="000000"/>
                 </a:solidFill>
@@ -970,7 +970,7 @@
               <a:t>，就是第三段：車上可能沒有駕駛，它要自己把車子帶到一個</a:t>
             </a:r>
             <a:r>
-              <a:rPr sz="1150" b="1" lang="zh-TW" dirty="0">
+              <a:rPr sz="1400" b="1" lang="zh-TW" dirty="0">
                 <a:solidFill>
                   <a:srgbClr val="000000"/>
                 </a:solidFill>
@@ -981,7 +981,7 @@
               <a:t>最小風險狀態</a:t>
             </a:r>
             <a:r>
-              <a:rPr sz="1150" lang="zh-TW" dirty="0">
+              <a:rPr sz="1400" lang="zh-TW" dirty="0">
                 <a:solidFill>
                   <a:srgbClr val="000000"/>
                 </a:solidFill>
@@ -999,11 +999,11 @@
                 <a:spcPts val="0"/>
               </a:spcBef>
               <a:spcAft>
-                <a:spcPts val="192"/>
+                <a:spcPts val="233"/>
               </a:spcAft>
             </a:pPr>
             <a:r>
-              <a:rPr sz="1150" lang="zh-TW" dirty="0">
+              <a:rPr sz="1400" lang="zh-TW" dirty="0">
                 <a:solidFill>
                   <a:srgbClr val="000000"/>
                 </a:solidFill>
@@ -1014,7 +1014,7 @@
               <a:t>什麼時候該降級？回到第一週的 </a:t>
             </a:r>
             <a:r>
-              <a:rPr sz="1150" b="1" lang="zh-TW" dirty="0">
+              <a:rPr sz="1400" b="1" lang="zh-TW" dirty="0">
                 <a:solidFill>
                   <a:srgbClr val="000000"/>
                 </a:solidFill>
@@ -1025,7 +1025,7 @@
               <a:t>ODD</a:t>
             </a:r>
             <a:r>
-              <a:rPr sz="1150" lang="zh-TW" dirty="0">
+              <a:rPr sz="1400" lang="zh-TW" dirty="0">
                 <a:solidFill>
                   <a:srgbClr val="000000"/>
                 </a:solidFill>
@@ -1036,7 +1036,7 @@
               <a:t>，運行設計範圍，那六格：道路類型、速度域、交通狀況、天候與光照、地理範圍、人的角色。其中「</a:t>
             </a:r>
             <a:r>
-              <a:rPr sz="1150" b="1" lang="zh-TW" dirty="0">
+              <a:rPr sz="1400" b="1" lang="zh-TW" dirty="0">
                 <a:solidFill>
                   <a:srgbClr val="000000"/>
                 </a:solidFill>
@@ -1047,7 +1047,7 @@
               <a:t>天候與光照</a:t>
             </a:r>
             <a:r>
-              <a:rPr sz="1150" lang="zh-TW" dirty="0">
+              <a:rPr sz="1400" lang="zh-TW" dirty="0">
                 <a:solidFill>
                   <a:srgbClr val="000000"/>
                 </a:solidFill>
@@ -1058,7 +1058,7 @@
               <a:t>」那一格，其實就是上一節那張失效對照表：雨大到相機打叉、光達三角形，就是走出了 ODD。「</a:t>
             </a:r>
             <a:r>
-              <a:rPr sz="1150" b="1" lang="zh-TW" dirty="0">
+              <a:rPr sz="1400" b="1" lang="zh-TW" dirty="0">
                 <a:solidFill>
                   <a:srgbClr val="000000"/>
                 </a:solidFill>
@@ -1069,7 +1069,7 @@
               <a:t>地理範圍</a:t>
             </a:r>
             <a:r>
-              <a:rPr sz="1150" lang="zh-TW" dirty="0">
+              <a:rPr sz="1400" lang="zh-TW" dirty="0">
                 <a:solidFill>
                   <a:srgbClr val="000000"/>
                 </a:solidFill>
@@ -1087,11 +1087,11 @@
                 <a:spcPts val="0"/>
               </a:spcBef>
               <a:spcAft>
-                <a:spcPts val="192"/>
+                <a:spcPts val="233"/>
               </a:spcAft>
             </a:pPr>
             <a:r>
-              <a:rPr sz="1150" lang="zh-TW" dirty="0">
+              <a:rPr sz="1400" lang="zh-TW" dirty="0">
                 <a:solidFill>
                   <a:srgbClr val="000000"/>
                 </a:solidFill>
@@ -1178,8 +1178,8 @@
         </p:nvSpPr>
         <p:spPr>
           <a:xfrm>
-            <a:off x="540000" y="540000"/>
-            <a:ext cx="6480000" cy="3645000"/>
+            <a:off x="1620000" y="380000"/>
+            <a:ext cx="4320000" cy="2430000"/>
           </a:xfrm>
         </p:spPr>
       </p:sp>
@@ -1195,8 +1195,8 @@
         </p:nvSpPr>
         <p:spPr>
           <a:xfrm>
-            <a:off x="540000" y="4440000"/>
-            <a:ext cx="6480000" cy="5500000"/>
+            <a:off x="540000" y="2990000"/>
+            <a:ext cx="6480000" cy="7060000"/>
           </a:xfrm>
         </p:spPr>
         <p:txBody>
@@ -1208,11 +1208,11 @@
                 <a:spcPts val="0"/>
               </a:spcBef>
               <a:spcAft>
-                <a:spcPts val="183"/>
+                <a:spcPts val="233"/>
               </a:spcAft>
             </a:pPr>
             <a:r>
-              <a:rPr sz="1100" b="1" lang="zh-TW" dirty="0">
+              <a:rPr sz="1400" b="1" lang="zh-TW" dirty="0">
                 <a:solidFill>
                   <a:srgbClr val="000000"/>
                 </a:solidFill>
@@ -1223,7 +1223,7 @@
               <a:t>這一張的目的：</a:t>
             </a:r>
             <a:r>
-              <a:rPr sz="1100" lang="zh-TW" dirty="0">
+              <a:rPr sz="1400" lang="zh-TW" dirty="0">
                 <a:solidFill>
                   <a:srgbClr val="000000"/>
                 </a:solidFill>
@@ -1241,11 +1241,11 @@
                 <a:spcPts val="0"/>
               </a:spcBef>
               <a:spcAft>
-                <a:spcPts val="183"/>
+                <a:spcPts val="233"/>
               </a:spcAft>
             </a:pPr>
             <a:r>
-              <a:rPr sz="1100" lang="zh-TW" dirty="0">
+              <a:rPr sz="1400" lang="zh-TW" dirty="0">
                 <a:solidFill>
                   <a:srgbClr val="000000"/>
                 </a:solidFill>
@@ -1263,11 +1263,11 @@
                 <a:spcPts val="0"/>
               </a:spcBef>
               <a:spcAft>
-                <a:spcPts val="183"/>
+                <a:spcPts val="233"/>
               </a:spcAft>
             </a:pPr>
             <a:r>
-              <a:rPr sz="1100" b="1" lang="zh-TW" dirty="0">
+              <a:rPr sz="1400" b="1" lang="zh-TW" dirty="0">
                 <a:solidFill>
                   <a:srgbClr val="000000"/>
                 </a:solidFill>
@@ -1278,7 +1278,7 @@
               <a:t>第一組，相機加雷達。</a:t>
             </a:r>
             <a:r>
-              <a:rPr sz="1100" lang="zh-TW" dirty="0">
+              <a:rPr sz="1400" lang="zh-TW" dirty="0">
                 <a:solidFill>
                   <a:srgbClr val="000000"/>
                 </a:solidFill>
@@ -1296,11 +1296,11 @@
                 <a:spcPts val="0"/>
               </a:spcBef>
               <a:spcAft>
-                <a:spcPts val="183"/>
+                <a:spcPts val="233"/>
               </a:spcAft>
             </a:pPr>
             <a:r>
-              <a:rPr sz="1100" b="1" lang="zh-TW" dirty="0">
+              <a:rPr sz="1400" b="1" lang="zh-TW" dirty="0">
                 <a:solidFill>
                   <a:srgbClr val="000000"/>
                 </a:solidFill>
@@ -1311,7 +1311,7 @@
               <a:t>第二組，相機加光達。</a:t>
             </a:r>
             <a:r>
-              <a:rPr sz="1100" lang="zh-TW" dirty="0">
+              <a:rPr sz="1400" lang="zh-TW" dirty="0">
                 <a:solidFill>
                   <a:srgbClr val="000000"/>
                 </a:solidFill>
@@ -1329,11 +1329,11 @@
                 <a:spcPts val="0"/>
               </a:spcBef>
               <a:spcAft>
-                <a:spcPts val="183"/>
+                <a:spcPts val="233"/>
               </a:spcAft>
             </a:pPr>
             <a:r>
-              <a:rPr sz="1100" b="1" lang="zh-TW" dirty="0">
+              <a:rPr sz="1400" b="1" lang="zh-TW" dirty="0">
                 <a:solidFill>
                   <a:srgbClr val="000000"/>
                 </a:solidFill>
@@ -1344,7 +1344,7 @@
               <a:t>第三組，光達加雷達。</a:t>
             </a:r>
             <a:r>
-              <a:rPr sz="1100" lang="zh-TW" dirty="0">
+              <a:rPr sz="1400" lang="zh-TW" dirty="0">
                 <a:solidFill>
                   <a:srgbClr val="000000"/>
                 </a:solidFill>
@@ -1362,11 +1362,11 @@
                 <a:spcPts val="0"/>
               </a:spcBef>
               <a:spcAft>
-                <a:spcPts val="183"/>
+                <a:spcPts val="233"/>
               </a:spcAft>
             </a:pPr>
             <a:r>
-              <a:rPr sz="1100" b="1" lang="zh-TW" dirty="0">
+              <a:rPr sz="1400" b="1" lang="zh-TW" dirty="0">
                 <a:solidFill>
                   <a:srgbClr val="000000"/>
                 </a:solidFill>
@@ -1377,7 +1377,7 @@
               <a:t>第四組，衛星定位加 IMU 加地圖。</a:t>
             </a:r>
             <a:r>
-              <a:rPr sz="1100" lang="zh-TW" dirty="0">
+              <a:rPr sz="1400" lang="zh-TW" dirty="0">
                 <a:solidFill>
                   <a:srgbClr val="000000"/>
                 </a:solidFill>
@@ -1395,11 +1395,11 @@
                 <a:spcPts val="0"/>
               </a:spcBef>
               <a:spcAft>
-                <a:spcPts val="183"/>
+                <a:spcPts val="233"/>
               </a:spcAft>
             </a:pPr>
             <a:r>
-              <a:rPr sz="1100" b="1" lang="zh-TW" dirty="0">
+              <a:rPr sz="1400" b="1" lang="zh-TW" dirty="0">
                 <a:solidFill>
                   <a:srgbClr val="000000"/>
                 </a:solidFill>
@@ -1410,7 +1410,7 @@
               <a:t>第五組，超音波加環景相機。</a:t>
             </a:r>
             <a:r>
-              <a:rPr sz="1100" lang="zh-TW" dirty="0">
+              <a:rPr sz="1400" lang="zh-TW" dirty="0">
                 <a:solidFill>
                   <a:srgbClr val="000000"/>
                 </a:solidFill>
@@ -1428,11 +1428,11 @@
                 <a:spcPts val="0"/>
               </a:spcBef>
               <a:spcAft>
-                <a:spcPts val="183"/>
+                <a:spcPts val="233"/>
               </a:spcAft>
             </a:pPr>
             <a:r>
-              <a:rPr sz="1100" lang="zh-TW" dirty="0">
+              <a:rPr sz="1400" lang="zh-TW" dirty="0">
                 <a:solidFill>
                   <a:srgbClr val="000000"/>
                 </a:solidFill>
@@ -1443,7 +1443,7 @@
               <a:t>五組看下來，模式只有兩種：</a:t>
             </a:r>
             <a:r>
-              <a:rPr sz="1100" b="1" lang="zh-TW" dirty="0">
+              <a:rPr sz="1400" b="1" lang="zh-TW" dirty="0">
                 <a:solidFill>
                   <a:srgbClr val="000000"/>
                 </a:solidFill>
@@ -1454,7 +1454,7 @@
               <a:t>一個管「是什麼」，一個管「多遠、多快」；或是一個壞了，另一個先頂上。</a:t>
             </a:r>
             <a:r>
-              <a:rPr sz="1100" lang="zh-TW" dirty="0">
+              <a:rPr sz="1400" lang="zh-TW" dirty="0">
                 <a:solidFill>
                   <a:srgbClr val="000000"/>
                 </a:solidFill>
@@ -1541,8 +1541,8 @@
         </p:nvSpPr>
         <p:spPr>
           <a:xfrm>
-            <a:off x="540000" y="540000"/>
-            <a:ext cx="6480000" cy="3645000"/>
+            <a:off x="1620000" y="380000"/>
+            <a:ext cx="4320000" cy="2430000"/>
           </a:xfrm>
         </p:spPr>
       </p:sp>
@@ -1558,8 +1558,8 @@
         </p:nvSpPr>
         <p:spPr>
           <a:xfrm>
-            <a:off x="540000" y="4440000"/>
-            <a:ext cx="6480000" cy="5500000"/>
+            <a:off x="540000" y="2990000"/>
+            <a:ext cx="6480000" cy="7060000"/>
           </a:xfrm>
         </p:spPr>
         <p:txBody>
@@ -1571,11 +1571,11 @@
                 <a:spcPts val="0"/>
               </a:spcBef>
               <a:spcAft>
-                <a:spcPts val="133"/>
+                <a:spcPts val="142"/>
               </a:spcAft>
             </a:pPr>
             <a:r>
-              <a:rPr sz="800" b="1" lang="zh-TW" dirty="0">
+              <a:rPr sz="850" b="1" lang="zh-TW" dirty="0">
                 <a:solidFill>
                   <a:srgbClr val="000000"/>
                 </a:solidFill>
@@ -1586,7 +1586,7 @@
               <a:t>這一張的目的：</a:t>
             </a:r>
             <a:r>
-              <a:rPr sz="800" lang="zh-TW" dirty="0">
+              <a:rPr sz="850" lang="zh-TW" dirty="0">
                 <a:solidFill>
                   <a:srgbClr val="000000"/>
                 </a:solidFill>
@@ -1604,11 +1604,11 @@
                 <a:spcPts val="0"/>
               </a:spcBef>
               <a:spcAft>
-                <a:spcPts val="133"/>
+                <a:spcPts val="142"/>
               </a:spcAft>
             </a:pPr>
             <a:r>
-              <a:rPr sz="800" lang="zh-TW" dirty="0">
+              <a:rPr sz="850" lang="zh-TW" dirty="0">
                 <a:solidFill>
                   <a:srgbClr val="000000"/>
                 </a:solidFill>
@@ -1626,11 +1626,11 @@
                 <a:spcPts val="0"/>
               </a:spcBef>
               <a:spcAft>
-                <a:spcPts val="133"/>
+                <a:spcPts val="142"/>
               </a:spcAft>
             </a:pPr>
             <a:r>
-              <a:rPr sz="800" b="1" lang="zh-TW" dirty="0">
+              <a:rPr sz="850" b="1" lang="zh-TW" dirty="0">
                 <a:solidFill>
                   <a:srgbClr val="000000"/>
                 </a:solidFill>
@@ -1641,7 +1641,7 @@
               <a:t>第一句：合起來之前，要先對齊。</a:t>
             </a:r>
             <a:r>
-              <a:rPr sz="800" lang="zh-TW" dirty="0">
+              <a:rPr sz="850" lang="zh-TW" dirty="0">
                 <a:solidFill>
                   <a:srgbClr val="000000"/>
                 </a:solidFill>
@@ -1659,11 +1659,11 @@
                 <a:spcPts val="0"/>
               </a:spcBef>
               <a:spcAft>
-                <a:spcPts val="133"/>
+                <a:spcPts val="142"/>
               </a:spcAft>
             </a:pPr>
             <a:r>
-              <a:rPr sz="800" lang="zh-TW" dirty="0">
+              <a:rPr sz="850" lang="zh-TW" dirty="0">
                 <a:solidFill>
                   <a:srgbClr val="000000"/>
                 </a:solidFill>
@@ -1674,7 +1674,7 @@
               <a:t>第一種是</a:t>
             </a:r>
             <a:r>
-              <a:rPr sz="800" b="1" lang="zh-TW" dirty="0">
+              <a:rPr sz="850" b="1" lang="zh-TW" dirty="0">
                 <a:solidFill>
                   <a:srgbClr val="000000"/>
                 </a:solidFill>
@@ -1685,7 +1685,7 @@
               <a:t>空間</a:t>
             </a:r>
             <a:r>
-              <a:rPr sz="800" lang="zh-TW" dirty="0">
+              <a:rPr sz="850" lang="zh-TW" dirty="0">
                 <a:solidFill>
                   <a:srgbClr val="000000"/>
                 </a:solidFill>
@@ -1696,7 +1696,7 @@
               <a:t>。就像教室裡三個同學坐在不同位置，各自說「垃圾桶在我右前方兩公尺」，你要先知道每個人坐哪、臉朝哪，才能把三句話畫在同一張教室平面圖上。車上的相機、光達、雷達也一樣，每一顆都用自己的位置在說話，要先量出它裝在車身的哪裡、朝哪個方向，這叫</a:t>
             </a:r>
             <a:r>
-              <a:rPr sz="800" b="1" lang="zh-TW" dirty="0">
+              <a:rPr sz="850" b="1" lang="zh-TW" dirty="0">
                 <a:solidFill>
                   <a:srgbClr val="000000"/>
                 </a:solidFill>
@@ -1707,7 +1707,7 @@
               <a:t>標定</a:t>
             </a:r>
             <a:r>
-              <a:rPr sz="800" lang="zh-TW" dirty="0">
+              <a:rPr sz="850" lang="zh-TW" dirty="0">
                 <a:solidFill>
                   <a:srgbClr val="000000"/>
                 </a:solidFill>
@@ -1725,11 +1725,11 @@
                 <a:spcPts val="0"/>
               </a:spcBef>
               <a:spcAft>
-                <a:spcPts val="133"/>
+                <a:spcPts val="142"/>
               </a:spcAft>
             </a:pPr>
             <a:r>
-              <a:rPr sz="800" lang="zh-TW" dirty="0">
+              <a:rPr sz="850" lang="zh-TW" dirty="0">
                 <a:solidFill>
                   <a:srgbClr val="000000"/>
                 </a:solidFill>
@@ -1740,7 +1740,7 @@
               <a:t>第二種是</a:t>
             </a:r>
             <a:r>
-              <a:rPr sz="800" b="1" lang="zh-TW" dirty="0">
+              <a:rPr sz="850" b="1" lang="zh-TW" dirty="0">
                 <a:solidFill>
                   <a:srgbClr val="000000"/>
                 </a:solidFill>
@@ -1751,7 +1751,7 @@
               <a:t>時間</a:t>
             </a:r>
             <a:r>
-              <a:rPr sz="800" lang="zh-TW" dirty="0">
+              <a:rPr sz="850" lang="zh-TW" dirty="0">
                 <a:solidFill>
                   <a:srgbClr val="000000"/>
                 </a:solidFill>
@@ -1762,7 +1762,7 @@
               <a:t>。就像兩個人拍同一台開過去的車，一個人晚半秒按快門，兩張照片疊起來，車子就變成兩台。三種感測器拍的時刻都不一樣：光達每秒二十次、雷達十三次、相機十二次。第五張看過：光達早零點二秒，車身上的點就留在車子剛剛的位置，車頭反而沒有點。所以要</a:t>
             </a:r>
             <a:r>
-              <a:rPr sz="800" b="1" lang="zh-TW" dirty="0">
+              <a:rPr sz="850" b="1" lang="zh-TW" dirty="0">
                 <a:solidFill>
                   <a:srgbClr val="000000"/>
                 </a:solidFill>
@@ -1773,7 +1773,7 @@
               <a:t>同步</a:t>
             </a:r>
             <a:r>
-              <a:rPr sz="800" lang="zh-TW" dirty="0">
+              <a:rPr sz="850" lang="zh-TW" dirty="0">
                 <a:solidFill>
                   <a:srgbClr val="000000"/>
                 </a:solidFill>
@@ -1791,11 +1791,11 @@
                 <a:spcPts val="0"/>
               </a:spcBef>
               <a:spcAft>
-                <a:spcPts val="133"/>
+                <a:spcPts val="142"/>
               </a:spcAft>
             </a:pPr>
             <a:r>
-              <a:rPr sz="800" b="1" lang="zh-TW" dirty="0">
+              <a:rPr sz="850" b="1" lang="zh-TW" dirty="0">
                 <a:solidFill>
                   <a:srgbClr val="000000"/>
                 </a:solidFill>
@@ -1806,7 +1806,7 @@
               <a:t>第二句：兩顆說的不一樣，要聽誰的？</a:t>
             </a:r>
             <a:r>
-              <a:rPr sz="800" lang="zh-TW" dirty="0">
+              <a:rPr sz="850" lang="zh-TW" dirty="0">
                 <a:solidFill>
                   <a:srgbClr val="000000"/>
                 </a:solidFill>
@@ -1824,11 +1824,11 @@
                 <a:spcPts val="0"/>
               </a:spcBef>
               <a:spcAft>
-                <a:spcPts val="133"/>
+                <a:spcPts val="142"/>
               </a:spcAft>
             </a:pPr>
             <a:r>
-              <a:rPr sz="800" lang="zh-TW" dirty="0">
+              <a:rPr sz="850" lang="zh-TW" dirty="0">
                 <a:solidFill>
                   <a:srgbClr val="000000"/>
                 </a:solidFill>
@@ -1839,7 +1839,7 @@
               <a:t>第一種，</a:t>
             </a:r>
             <a:r>
-              <a:rPr sz="800" b="1" lang="zh-TW" dirty="0">
+              <a:rPr sz="850" b="1" lang="zh-TW" dirty="0">
                 <a:solidFill>
                   <a:srgbClr val="000000"/>
                 </a:solidFill>
@@ -1850,7 +1850,7 @@
               <a:t>看條件決定信誰</a:t>
             </a:r>
             <a:r>
-              <a:rPr sz="800" lang="zh-TW" dirty="0">
+              <a:rPr sz="850" lang="zh-TW" dirty="0">
                 <a:solidFill>
                   <a:srgbClr val="000000"/>
                 </a:solidFill>
@@ -1868,11 +1868,11 @@
                 <a:spcPts val="0"/>
               </a:spcBef>
               <a:spcAft>
-                <a:spcPts val="133"/>
+                <a:spcPts val="142"/>
               </a:spcAft>
             </a:pPr>
             <a:r>
-              <a:rPr sz="800" lang="zh-TW" dirty="0">
+              <a:rPr sz="850" lang="zh-TW" dirty="0">
                 <a:solidFill>
                   <a:srgbClr val="000000"/>
                 </a:solidFill>
@@ -1883,7 +1883,7 @@
               <a:t>第二種，</a:t>
             </a:r>
             <a:r>
-              <a:rPr sz="800" b="1" lang="zh-TW" dirty="0">
+              <a:rPr sz="850" b="1" lang="zh-TW" dirty="0">
                 <a:solidFill>
                   <a:srgbClr val="000000"/>
                 </a:solidFill>
@@ -1894,7 +1894,7 @@
               <a:t>多數決</a:t>
             </a:r>
             <a:r>
-              <a:rPr sz="800" lang="zh-TW" dirty="0">
+              <a:rPr sz="850" lang="zh-TW" dirty="0">
                 <a:solidFill>
                   <a:srgbClr val="000000"/>
                 </a:solidFill>
@@ -1912,11 +1912,11 @@
                 <a:spcPts val="0"/>
               </a:spcBef>
               <a:spcAft>
-                <a:spcPts val="133"/>
+                <a:spcPts val="142"/>
               </a:spcAft>
             </a:pPr>
             <a:r>
-              <a:rPr sz="800" lang="zh-TW" dirty="0">
+              <a:rPr sz="850" lang="zh-TW" dirty="0">
                 <a:solidFill>
                   <a:srgbClr val="000000"/>
                 </a:solidFill>
@@ -1927,7 +1927,7 @@
               <a:t>第三種，</a:t>
             </a:r>
             <a:r>
-              <a:rPr sz="800" b="1" lang="zh-TW" dirty="0">
+              <a:rPr sz="850" b="1" lang="zh-TW" dirty="0">
                 <a:solidFill>
                   <a:srgbClr val="000000"/>
                 </a:solidFill>
@@ -1938,7 +1938,7 @@
               <a:t>保守原則</a:t>
             </a:r>
             <a:r>
-              <a:rPr sz="800" lang="zh-TW" dirty="0">
+              <a:rPr sz="850" lang="zh-TW" dirty="0">
                 <a:solidFill>
                   <a:srgbClr val="000000"/>
                 </a:solidFill>
@@ -1956,11 +1956,11 @@
                 <a:spcPts val="0"/>
               </a:spcBef>
               <a:spcAft>
-                <a:spcPts val="133"/>
+                <a:spcPts val="142"/>
               </a:spcAft>
             </a:pPr>
             <a:r>
-              <a:rPr sz="800" lang="zh-TW" dirty="0">
+              <a:rPr sz="850" lang="zh-TW" dirty="0">
                 <a:solidFill>
                   <a:srgbClr val="000000"/>
                 </a:solidFill>
@@ -1971,7 +1971,7 @@
               <a:t>真的車三種混著用。最重要的是：感測器要會說「</a:t>
             </a:r>
             <a:r>
-              <a:rPr sz="800" b="1" lang="zh-TW" dirty="0">
+              <a:rPr sz="850" b="1" lang="zh-TW" dirty="0">
                 <a:solidFill>
                   <a:srgbClr val="000000"/>
                 </a:solidFill>
@@ -1982,7 +1982,7 @@
               <a:t>我現在不可靠</a:t>
             </a:r>
             <a:r>
-              <a:rPr sz="800" lang="zh-TW" dirty="0">
+              <a:rPr sz="850" lang="zh-TW" dirty="0">
                 <a:solidFill>
                   <a:srgbClr val="000000"/>
                 </a:solidFill>
@@ -2000,11 +2000,11 @@
                 <a:spcPts val="0"/>
               </a:spcBef>
               <a:spcAft>
-                <a:spcPts val="133"/>
+                <a:spcPts val="142"/>
               </a:spcAft>
             </a:pPr>
             <a:r>
-              <a:rPr sz="800" b="1" lang="zh-TW" dirty="0">
+              <a:rPr sz="850" b="1" lang="zh-TW" dirty="0">
                 <a:solidFill>
                   <a:srgbClr val="000000"/>
                 </a:solidFill>
@@ -2015,7 +2015,7 @@
               <a:t>第三句：比較準的，多相信一點。</a:t>
             </a:r>
             <a:r>
-              <a:rPr sz="800" lang="zh-TW" dirty="0">
+              <a:rPr sz="850" lang="zh-TW" dirty="0">
                 <a:solidFill>
                   <a:srgbClr val="000000"/>
                 </a:solidFill>
@@ -2026,7 +2026,7 @@
               <a:t>就像你有兩支錶，一支很準、一支常常快慢，你兩支都看，但比較聽準的那支。第九張那支動圖算過：IMU 推算一百二十公尺，誤差正負一；GPS 說一百一十八公尺，誤差正負三。誤差差三倍，信任要差九倍，三乘三，所以 IMU 拿九份、GPS 拿一份，合起來是一百一十九點八公尺。為什麼是平方，不是三倍？數學上可以證明，這樣分配，合起來的誤差會最小；證明要用到統計，這門課先記口訣就好：</a:t>
             </a:r>
             <a:r>
-              <a:rPr sz="800" b="1" lang="zh-TW" dirty="0">
+              <a:rPr sz="850" b="1" lang="zh-TW" dirty="0">
                 <a:solidFill>
                   <a:srgbClr val="000000"/>
                 </a:solidFill>
@@ -2037,7 +2037,7 @@
               <a:t>誤差差幾倍，信任就差那個數字的平方倍。</a:t>
             </a:r>
             <a:r>
-              <a:rPr sz="800" lang="zh-TW" dirty="0">
+              <a:rPr sz="850" lang="zh-TW" dirty="0">
                 <a:solidFill>
                   <a:srgbClr val="000000"/>
                 </a:solidFill>
@@ -2055,11 +2055,11 @@
                 <a:spcPts val="0"/>
               </a:spcBef>
               <a:spcAft>
-                <a:spcPts val="133"/>
+                <a:spcPts val="142"/>
               </a:spcAft>
             </a:pPr>
             <a:r>
-              <a:rPr sz="800" lang="zh-TW" dirty="0">
+              <a:rPr sz="850" lang="zh-TW" dirty="0">
                 <a:solidFill>
                   <a:srgbClr val="000000"/>
                 </a:solidFill>
@@ -2077,11 +2077,11 @@
                 <a:spcPts val="0"/>
               </a:spcBef>
               <a:spcAft>
-                <a:spcPts val="133"/>
+                <a:spcPts val="142"/>
               </a:spcAft>
             </a:pPr>
             <a:r>
-              <a:rPr sz="800" lang="zh-TW" dirty="0">
+              <a:rPr sz="850" lang="zh-TW" dirty="0">
                 <a:solidFill>
                   <a:srgbClr val="000000"/>
                 </a:solidFill>
@@ -2092,7 +2092,7 @@
               <a:t>如果壞到合起來也不夠呢？第十張：</a:t>
             </a:r>
             <a:r>
-              <a:rPr sz="800" b="1" lang="zh-TW" dirty="0">
+              <a:rPr sz="850" b="1" lang="zh-TW" dirty="0">
                 <a:solidFill>
                   <a:srgbClr val="000000"/>
                 </a:solidFill>
@@ -2103,7 +2103,7 @@
               <a:t>降級</a:t>
             </a:r>
             <a:r>
-              <a:rPr sz="800" lang="zh-TW" dirty="0">
+              <a:rPr sz="850" lang="zh-TW" dirty="0">
                 <a:solidFill>
                   <a:srgbClr val="000000"/>
                 </a:solidFill>
@@ -2121,11 +2121,11 @@
                 <a:spcPts val="0"/>
               </a:spcBef>
               <a:spcAft>
-                <a:spcPts val="133"/>
+                <a:spcPts val="142"/>
               </a:spcAft>
             </a:pPr>
             <a:r>
-              <a:rPr sz="800" lang="zh-TW" dirty="0">
+              <a:rPr sz="850" lang="zh-TW" dirty="0">
                 <a:solidFill>
                   <a:srgbClr val="000000"/>
                 </a:solidFill>
@@ -2143,11 +2143,11 @@
                 <a:spcPts val="0"/>
               </a:spcBef>
               <a:spcAft>
-                <a:spcPts val="133"/>
+                <a:spcPts val="142"/>
               </a:spcAft>
             </a:pPr>
             <a:r>
-              <a:rPr sz="800" b="1" lang="zh-TW" dirty="0">
+              <a:rPr sz="850" b="1" lang="zh-TW" dirty="0">
                 <a:solidFill>
                   <a:srgbClr val="000000"/>
                 </a:solidFill>
@@ -2158,7 +2158,7 @@
               <a:t>下一節</a:t>
             </a:r>
             <a:r>
-              <a:rPr sz="800" lang="zh-TW" dirty="0">
+              <a:rPr sz="850" lang="zh-TW" dirty="0">
                 <a:solidFill>
                   <a:srgbClr val="000000"/>
                 </a:solidFill>
@@ -2245,8 +2245,8 @@
         </p:nvSpPr>
         <p:spPr>
           <a:xfrm>
-            <a:off x="540000" y="540000"/>
-            <a:ext cx="6480000" cy="3645000"/>
+            <a:off x="1620000" y="380000"/>
+            <a:ext cx="4320000" cy="2430000"/>
           </a:xfrm>
         </p:spPr>
       </p:sp>
@@ -2262,8 +2262,8 @@
         </p:nvSpPr>
         <p:spPr>
           <a:xfrm>
-            <a:off x="540000" y="4440000"/>
-            <a:ext cx="6480000" cy="5500000"/>
+            <a:off x="540000" y="2990000"/>
+            <a:ext cx="6480000" cy="7060000"/>
           </a:xfrm>
         </p:spPr>
         <p:txBody>
@@ -2275,11 +2275,11 @@
                 <a:spcPts val="0"/>
               </a:spcBef>
               <a:spcAft>
-                <a:spcPts val="158"/>
+                <a:spcPts val="192"/>
               </a:spcAft>
             </a:pPr>
             <a:r>
-              <a:rPr sz="950" b="1" lang="zh-TW" dirty="0">
+              <a:rPr sz="1150" b="1" lang="zh-TW" dirty="0">
                 <a:solidFill>
                   <a:srgbClr val="000000"/>
                 </a:solidFill>
@@ -2290,7 +2290,7 @@
               <a:t>這一張的目的：</a:t>
             </a:r>
             <a:r>
-              <a:rPr sz="950" lang="zh-TW" dirty="0">
+              <a:rPr sz="1150" lang="zh-TW" dirty="0">
                 <a:solidFill>
                   <a:srgbClr val="000000"/>
                 </a:solidFill>
@@ -2308,11 +2308,11 @@
                 <a:spcPts val="0"/>
               </a:spcBef>
               <a:spcAft>
-                <a:spcPts val="158"/>
+                <a:spcPts val="192"/>
               </a:spcAft>
             </a:pPr>
             <a:r>
-              <a:rPr sz="950" lang="zh-TW" dirty="0">
+              <a:rPr sz="1150" lang="zh-TW" dirty="0">
                 <a:solidFill>
                   <a:srgbClr val="000000"/>
                 </a:solidFill>
@@ -2323,7 +2323,7 @@
               <a:t>先想一個情況。高速公路上，</a:t>
             </a:r>
             <a:r>
-              <a:rPr sz="950" b="1" lang="zh-TW" dirty="0">
+              <a:rPr sz="1150" b="1" lang="zh-TW" dirty="0">
                 <a:solidFill>
                   <a:srgbClr val="000000"/>
                 </a:solidFill>
@@ -2334,7 +2334,7 @@
               <a:t>雷達說：前方六十公尺有東西。相機說：前面沒有車。</a:t>
             </a:r>
             <a:r>
-              <a:rPr sz="950" lang="zh-TW" dirty="0">
+              <a:rPr sz="1150" lang="zh-TW" dirty="0">
                 <a:solidFill>
                   <a:srgbClr val="000000"/>
                 </a:solidFill>
@@ -2352,11 +2352,11 @@
                 <a:spcPts val="0"/>
               </a:spcBef>
               <a:spcAft>
-                <a:spcPts val="158"/>
+                <a:spcPts val="192"/>
               </a:spcAft>
             </a:pPr>
             <a:r>
-              <a:rPr sz="950" lang="zh-TW" dirty="0">
+              <a:rPr sz="1150" lang="zh-TW" dirty="0">
                 <a:solidFill>
                   <a:srgbClr val="000000"/>
                 </a:solidFill>
@@ -2374,11 +2374,11 @@
                 <a:spcPts val="0"/>
               </a:spcBef>
               <a:spcAft>
-                <a:spcPts val="158"/>
+                <a:spcPts val="192"/>
               </a:spcAft>
             </a:pPr>
             <a:r>
-              <a:rPr sz="950" lang="zh-TW" dirty="0">
+              <a:rPr sz="1150" lang="zh-TW" dirty="0">
                 <a:solidFill>
                   <a:srgbClr val="000000"/>
                 </a:solidFill>
@@ -2389,7 +2389,7 @@
               <a:t>先看左邊這支動畫，它會循環播兩格。上面是從旁邊看：左邊是我們的車，保險桿上的橘色小方塊是雷達，電波水平往前打出去。六十公尺外有一座頭頂的路牌。下面是</a:t>
             </a:r>
             <a:r>
-              <a:rPr sz="950" b="1" lang="zh-TW" dirty="0">
+              <a:rPr sz="1150" b="1" lang="zh-TW" dirty="0">
                 <a:solidFill>
                   <a:srgbClr val="000000"/>
                 </a:solidFill>
@@ -2400,7 +2400,7 @@
               <a:t>雷達自己的地圖</a:t>
             </a:r>
             <a:r>
-              <a:rPr sz="950" lang="zh-TW" dirty="0">
+              <a:rPr sz="1150" lang="zh-TW" dirty="0">
                 <a:solidFill>
                   <a:srgbClr val="000000"/>
                 </a:solidFill>
@@ -2418,11 +2418,11 @@
                 <a:spcPts val="0"/>
               </a:spcBef>
               <a:spcAft>
-                <a:spcPts val="158"/>
+                <a:spcPts val="192"/>
               </a:spcAft>
             </a:pPr>
             <a:r>
-              <a:rPr sz="950" b="1" lang="zh-TW" dirty="0">
+              <a:rPr sz="1150" b="1" lang="zh-TW" dirty="0">
                 <a:solidFill>
                   <a:srgbClr val="000000"/>
                 </a:solidFill>
@@ -2433,7 +2433,7 @@
               <a:t>第一格，假設只有頭頂的路牌，下面沒有車。</a:t>
             </a:r>
             <a:r>
-              <a:rPr sz="950" lang="zh-TW" dirty="0">
+              <a:rPr sz="1150" lang="zh-TW" dirty="0">
                 <a:solidFill>
                   <a:srgbClr val="000000"/>
                 </a:solidFill>
@@ -2451,11 +2451,11 @@
                 <a:spcPts val="0"/>
               </a:spcBef>
               <a:spcAft>
-                <a:spcPts val="158"/>
+                <a:spcPts val="192"/>
               </a:spcAft>
             </a:pPr>
             <a:r>
-              <a:rPr sz="950" b="1" lang="zh-TW" dirty="0">
+              <a:rPr sz="1150" b="1" lang="zh-TW" dirty="0">
                 <a:solidFill>
                   <a:srgbClr val="000000"/>
                 </a:solidFill>
@@ -2466,7 +2466,7 @@
               <a:t>第二格，換一種可能：路牌下面真的停了一台車。</a:t>
             </a:r>
             <a:r>
-              <a:rPr sz="950" lang="zh-TW" dirty="0">
+              <a:rPr sz="1150" lang="zh-TW" dirty="0">
                 <a:solidFill>
                   <a:srgbClr val="000000"/>
                 </a:solidFill>
@@ -2477,7 +2477,7 @@
               <a:t>電波打到車，彈回來，地圖上出現的點，</a:t>
             </a:r>
             <a:r>
-              <a:rPr sz="950" b="1" lang="zh-TW" dirty="0">
+              <a:rPr sz="1150" b="1" lang="zh-TW" dirty="0">
                 <a:solidFill>
                   <a:srgbClr val="000000"/>
                 </a:solidFill>
@@ -2488,7 +2488,7 @@
               <a:t>位置一模一樣。</a:t>
             </a:r>
             <a:r>
-              <a:rPr sz="950" lang="zh-TW" dirty="0">
+              <a:rPr sz="1150" lang="zh-TW" dirty="0">
                 <a:solidFill>
                   <a:srgbClr val="000000"/>
                 </a:solidFill>
@@ -2506,11 +2506,11 @@
                 <a:spcPts val="0"/>
               </a:spcBef>
               <a:spcAft>
-                <a:spcPts val="158"/>
+                <a:spcPts val="192"/>
               </a:spcAft>
             </a:pPr>
             <a:r>
-              <a:rPr sz="950" lang="zh-TW" dirty="0">
+              <a:rPr sz="1150" lang="zh-TW" dirty="0">
                 <a:solidFill>
                   <a:srgbClr val="000000"/>
                 </a:solidFill>
@@ -2528,11 +2528,11 @@
                 <a:spcPts val="0"/>
               </a:spcBef>
               <a:spcAft>
-                <a:spcPts val="158"/>
+                <a:spcPts val="192"/>
               </a:spcAft>
             </a:pPr>
             <a:r>
-              <a:rPr sz="950" lang="zh-TW" dirty="0">
+              <a:rPr sz="1150" lang="zh-TW" dirty="0">
                 <a:solidFill>
                   <a:srgbClr val="000000"/>
                 </a:solidFill>
@@ -2550,11 +2550,11 @@
                 <a:spcPts val="0"/>
               </a:spcBef>
               <a:spcAft>
-                <a:spcPts val="158"/>
+                <a:spcPts val="192"/>
               </a:spcAft>
             </a:pPr>
             <a:r>
-              <a:rPr sz="950" lang="zh-TW" dirty="0">
+              <a:rPr sz="1150" lang="zh-TW" dirty="0">
                 <a:solidFill>
                   <a:srgbClr val="000000"/>
                 </a:solidFill>
@@ -2565,7 +2565,7 @@
               <a:t>兩邊都有道理，也都有代價。</a:t>
             </a:r>
             <a:r>
-              <a:rPr sz="950" b="1" lang="zh-TW" dirty="0">
+              <a:rPr sz="1150" b="1" lang="zh-TW" dirty="0">
                 <a:solidFill>
                   <a:srgbClr val="000000"/>
                 </a:solidFill>
@@ -2576,7 +2576,7 @@
               <a:t>聽雷達</a:t>
             </a:r>
             <a:r>
-              <a:rPr sz="950" lang="zh-TW" dirty="0">
+              <a:rPr sz="1150" lang="zh-TW" dirty="0">
                 <a:solidFill>
                   <a:srgbClr val="000000"/>
                 </a:solidFill>
@@ -2587,7 +2587,7 @@
               <a:t>：上一節講過，雷達量不出高度，那個「東西」可能是頭頂的路牌、天橋；每次都煞，就是幽靈煞車，後面的車可能撞上來。</a:t>
             </a:r>
             <a:r>
-              <a:rPr sz="950" b="1" lang="zh-TW" dirty="0">
+              <a:rPr sz="1150" b="1" lang="zh-TW" dirty="0">
                 <a:solidFill>
                   <a:srgbClr val="000000"/>
                 </a:solidFill>
@@ -2598,7 +2598,7 @@
               <a:t>聽相機</a:t>
             </a:r>
             <a:r>
-              <a:rPr sz="950" lang="zh-TW" dirty="0">
+              <a:rPr sz="1150" lang="zh-TW" dirty="0">
                 <a:solidFill>
                   <a:srgbClr val="000000"/>
                 </a:solidFill>
@@ -2616,11 +2616,11 @@
                 <a:spcPts val="0"/>
               </a:spcBef>
               <a:spcAft>
-                <a:spcPts val="158"/>
+                <a:spcPts val="192"/>
               </a:spcAft>
             </a:pPr>
             <a:r>
-              <a:rPr sz="950" lang="zh-TW" dirty="0">
+              <a:rPr sz="1150" lang="zh-TW" dirty="0">
                 <a:solidFill>
                   <a:srgbClr val="000000"/>
                 </a:solidFill>
@@ -2638,11 +2638,11 @@
                 <a:spcPts val="0"/>
               </a:spcBef>
               <a:spcAft>
-                <a:spcPts val="158"/>
+                <a:spcPts val="192"/>
               </a:spcAft>
             </a:pPr>
             <a:r>
-              <a:rPr sz="950" lang="zh-TW" dirty="0">
+              <a:rPr sz="1150" lang="zh-TW" dirty="0">
                 <a:solidFill>
                   <a:srgbClr val="000000"/>
                 </a:solidFill>
@@ -2653,7 +2653,7 @@
               <a:t>所以融合沒有一個永遠對的答案。它在做的事，是在不同情況下，</a:t>
             </a:r>
             <a:r>
-              <a:rPr sz="950" b="1" lang="zh-TW" dirty="0">
+              <a:rPr sz="1150" b="1" lang="zh-TW" dirty="0">
                 <a:solidFill>
                   <a:srgbClr val="000000"/>
                 </a:solidFill>
@@ -2664,7 +2664,7 @@
               <a:t>選一個比較承受得起的代價</a:t>
             </a:r>
             <a:r>
-              <a:rPr sz="950" lang="zh-TW" dirty="0">
+              <a:rPr sz="1150" lang="zh-TW" dirty="0">
                 <a:solidFill>
                   <a:srgbClr val="000000"/>
                 </a:solidFill>
@@ -2751,8 +2751,8 @@
         </p:nvSpPr>
         <p:spPr>
           <a:xfrm>
-            <a:off x="540000" y="540000"/>
-            <a:ext cx="6480000" cy="3645000"/>
+            <a:off x="1620000" y="380000"/>
+            <a:ext cx="4320000" cy="2430000"/>
           </a:xfrm>
         </p:spPr>
       </p:sp>
@@ -2768,8 +2768,8 @@
         </p:nvSpPr>
         <p:spPr>
           <a:xfrm>
-            <a:off x="540000" y="4440000"/>
-            <a:ext cx="6480000" cy="5500000"/>
+            <a:off x="540000" y="2990000"/>
+            <a:ext cx="6480000" cy="7060000"/>
           </a:xfrm>
         </p:spPr>
         <p:txBody>
@@ -2781,11 +2781,11 @@
                 <a:spcPts val="0"/>
               </a:spcBef>
               <a:spcAft>
-                <a:spcPts val="200"/>
+                <a:spcPts val="267"/>
               </a:spcAft>
             </a:pPr>
             <a:r>
-              <a:rPr sz="1200" b="1" lang="zh-TW" dirty="0">
+              <a:rPr sz="1600" b="1" lang="zh-TW" dirty="0">
                 <a:solidFill>
                   <a:srgbClr val="000000"/>
                 </a:solidFill>
@@ -2796,7 +2796,7 @@
               <a:t>這一張的目的：</a:t>
             </a:r>
             <a:r>
-              <a:rPr sz="1200" lang="zh-TW" dirty="0">
+              <a:rPr sz="1600" lang="zh-TW" dirty="0">
                 <a:solidFill>
                   <a:srgbClr val="000000"/>
                 </a:solidFill>
@@ -2814,11 +2814,11 @@
                 <a:spcPts val="0"/>
               </a:spcBef>
               <a:spcAft>
-                <a:spcPts val="200"/>
+                <a:spcPts val="267"/>
               </a:spcAft>
             </a:pPr>
             <a:r>
-              <a:rPr sz="1200" lang="zh-TW" dirty="0">
+              <a:rPr sz="1600" lang="zh-TW" dirty="0">
                 <a:solidFill>
                   <a:srgbClr val="000000"/>
                 </a:solidFill>
@@ -2836,11 +2836,11 @@
                 <a:spcPts val="0"/>
               </a:spcBef>
               <a:spcAft>
-                <a:spcPts val="200"/>
+                <a:spcPts val="267"/>
               </a:spcAft>
             </a:pPr>
             <a:r>
-              <a:rPr sz="1200" b="1" lang="zh-TW" dirty="0">
+              <a:rPr sz="1600" b="1" lang="zh-TW" dirty="0">
                 <a:solidFill>
                   <a:srgbClr val="000000"/>
                 </a:solidFill>
@@ -2851,7 +2851,7 @@
               <a:t>左邊，互補。</a:t>
             </a:r>
             <a:r>
-              <a:rPr sz="1200" lang="zh-TW" dirty="0">
+              <a:rPr sz="1600" lang="zh-TW" dirty="0">
                 <a:solidFill>
                   <a:srgbClr val="000000"/>
                 </a:solidFill>
@@ -2869,11 +2869,11 @@
                 <a:spcPts val="0"/>
               </a:spcBef>
               <a:spcAft>
-                <a:spcPts val="200"/>
+                <a:spcPts val="267"/>
               </a:spcAft>
             </a:pPr>
             <a:r>
-              <a:rPr sz="1200" b="1" lang="zh-TW" dirty="0">
+              <a:rPr sz="1600" b="1" lang="zh-TW" dirty="0">
                 <a:solidFill>
                   <a:srgbClr val="000000"/>
                 </a:solidFill>
@@ -2884,7 +2884,7 @@
               <a:t>右邊，備援。</a:t>
             </a:r>
             <a:r>
-              <a:rPr sz="1200" lang="zh-TW" dirty="0">
+              <a:rPr sz="1600" lang="zh-TW" dirty="0">
                 <a:solidFill>
                   <a:srgbClr val="000000"/>
                 </a:solidFill>
@@ -2895,7 +2895,7 @@
               <a:t>同一件事，用兩種方法量。「前面有沒有東西」這件事，相機、光達、雷達都量得到。下大雨，相機糊了，雷達照樣量。而且兩顆一比，還多一個好處：兩顆說的一樣，就更可信；說的不一樣，至少</a:t>
             </a:r>
             <a:r>
-              <a:rPr sz="1200" b="1" lang="zh-TW" dirty="0">
+              <a:rPr sz="1600" b="1" lang="zh-TW" dirty="0">
                 <a:solidFill>
                   <a:srgbClr val="000000"/>
                 </a:solidFill>
@@ -2906,7 +2906,7 @@
               <a:t>知道有一顆在出錯</a:t>
             </a:r>
             <a:r>
-              <a:rPr sz="1200" lang="zh-TW" dirty="0">
+              <a:rPr sz="1600" lang="zh-TW" dirty="0">
                 <a:solidFill>
                   <a:srgbClr val="000000"/>
                 </a:solidFill>
@@ -2924,11 +2924,11 @@
                 <a:spcPts val="0"/>
               </a:spcBef>
               <a:spcAft>
-                <a:spcPts val="200"/>
+                <a:spcPts val="267"/>
               </a:spcAft>
             </a:pPr>
             <a:r>
-              <a:rPr sz="1200" lang="zh-TW" dirty="0">
+              <a:rPr sz="1600" lang="zh-TW" dirty="0">
                 <a:solidFill>
                   <a:srgbClr val="000000"/>
                 </a:solidFill>
@@ -3015,8 +3015,8 @@
         </p:nvSpPr>
         <p:spPr>
           <a:xfrm>
-            <a:off x="540000" y="540000"/>
-            <a:ext cx="6480000" cy="3645000"/>
+            <a:off x="1620000" y="380000"/>
+            <a:ext cx="4320000" cy="2430000"/>
           </a:xfrm>
         </p:spPr>
       </p:sp>
@@ -3032,8 +3032,8 @@
         </p:nvSpPr>
         <p:spPr>
           <a:xfrm>
-            <a:off x="540000" y="4440000"/>
-            <a:ext cx="6480000" cy="5500000"/>
+            <a:off x="540000" y="2990000"/>
+            <a:ext cx="6480000" cy="7060000"/>
           </a:xfrm>
         </p:spPr>
         <p:txBody>
@@ -3045,11 +3045,11 @@
                 <a:spcPts val="0"/>
               </a:spcBef>
               <a:spcAft>
-                <a:spcPts val="133"/>
+                <a:spcPts val="150"/>
               </a:spcAft>
             </a:pPr>
             <a:r>
-              <a:rPr sz="800" b="1" lang="zh-TW" dirty="0">
+              <a:rPr sz="900" b="1" lang="zh-TW" dirty="0">
                 <a:solidFill>
                   <a:srgbClr val="000000"/>
                 </a:solidFill>
@@ -3060,7 +3060,7 @@
               <a:t>這一張的目的：</a:t>
             </a:r>
             <a:r>
-              <a:rPr sz="800" lang="zh-TW" dirty="0">
+              <a:rPr sz="900" lang="zh-TW" dirty="0">
                 <a:solidFill>
                   <a:srgbClr val="000000"/>
                 </a:solidFill>
@@ -3078,11 +3078,11 @@
                 <a:spcPts val="0"/>
               </a:spcBef>
               <a:spcAft>
-                <a:spcPts val="133"/>
+                <a:spcPts val="150"/>
               </a:spcAft>
             </a:pPr>
             <a:r>
-              <a:rPr sz="800" lang="zh-TW" dirty="0">
+              <a:rPr sz="900" lang="zh-TW" dirty="0">
                 <a:solidFill>
                   <a:srgbClr val="000000"/>
                 </a:solidFill>
@@ -3093,7 +3093,7 @@
               <a:t>要合起來，第一件事：</a:t>
             </a:r>
             <a:r>
-              <a:rPr sz="800" b="1" lang="zh-TW" dirty="0">
+              <a:rPr sz="900" b="1" lang="zh-TW" dirty="0">
                 <a:solidFill>
                   <a:srgbClr val="000000"/>
                 </a:solidFill>
@@ -3104,7 +3104,7 @@
               <a:t>大家要對齊同一個空間。</a:t>
             </a:r>
             <a:r>
-              <a:rPr sz="800" lang="zh-TW" dirty="0">
+              <a:rPr sz="900" lang="zh-TW" dirty="0">
                 <a:solidFill>
                   <a:srgbClr val="000000"/>
                 </a:solidFill>
@@ -3122,11 +3122,11 @@
                 <a:spcPts val="0"/>
               </a:spcBef>
               <a:spcAft>
-                <a:spcPts val="133"/>
+                <a:spcPts val="150"/>
               </a:spcAft>
             </a:pPr>
             <a:r>
-              <a:rPr sz="800" lang="zh-TW" dirty="0">
+              <a:rPr sz="900" lang="zh-TW" dirty="0">
                 <a:solidFill>
                   <a:srgbClr val="000000"/>
                 </a:solidFill>
@@ -3137,7 +3137,7 @@
               <a:t>先想一個教室裡的例子。三個同學坐在不同的位置、臉朝不同的方向。老師問：「垃圾桶在哪裡？」坐前排、面向黑板的同學說：「在我右前方兩公尺。」坐後排、面向窗戶的同學說：「在我正前方五公尺。」兩個人都沒說錯，可是你沒辦法把這兩句話直接畫在同一張教室平面圖上。你得先知道：</a:t>
             </a:r>
             <a:r>
-              <a:rPr sz="800" b="1" lang="zh-TW" dirty="0">
+              <a:rPr sz="900" b="1" lang="zh-TW" dirty="0">
                 <a:solidFill>
                   <a:srgbClr val="000000"/>
                 </a:solidFill>
@@ -3148,7 +3148,7 @@
               <a:t>每個人坐在哪一個座位、臉朝哪個方向。</a:t>
             </a:r>
             <a:r>
-              <a:rPr sz="800" lang="zh-TW" dirty="0">
+              <a:rPr sz="900" lang="zh-TW" dirty="0">
                 <a:solidFill>
                   <a:srgbClr val="000000"/>
                 </a:solidFill>
@@ -3166,11 +3166,11 @@
                 <a:spcPts val="0"/>
               </a:spcBef>
               <a:spcAft>
-                <a:spcPts val="133"/>
+                <a:spcPts val="150"/>
               </a:spcAft>
             </a:pPr>
             <a:r>
-              <a:rPr sz="800" lang="zh-TW" dirty="0">
+              <a:rPr sz="900" lang="zh-TW" dirty="0">
                 <a:solidFill>
                   <a:srgbClr val="000000"/>
                 </a:solidFill>
@@ -3181,7 +3181,7 @@
               <a:t>車上完全一樣。相機在擋風玻璃後面，光達在車頂，雷達在保險桿。每一顆回報的，都是「東西在</a:t>
             </a:r>
             <a:r>
-              <a:rPr sz="800" b="1" lang="zh-TW" dirty="0">
+              <a:rPr sz="900" b="1" lang="zh-TW" dirty="0">
                 <a:solidFill>
                   <a:srgbClr val="000000"/>
                 </a:solidFill>
@@ -3192,7 +3192,7 @@
               <a:t>我</a:t>
             </a:r>
             <a:r>
-              <a:rPr sz="800" lang="zh-TW" dirty="0">
+              <a:rPr sz="900" lang="zh-TW" dirty="0">
                 <a:solidFill>
                   <a:srgbClr val="000000"/>
                 </a:solidFill>
@@ -3203,7 +3203,7 @@
               <a:t>的哪個方向、離</a:t>
             </a:r>
             <a:r>
-              <a:rPr sz="800" b="1" lang="zh-TW" dirty="0">
+              <a:rPr sz="900" b="1" lang="zh-TW" dirty="0">
                 <a:solidFill>
                   <a:srgbClr val="000000"/>
                 </a:solidFill>
@@ -3214,7 +3214,7 @@
               <a:t>我</a:t>
             </a:r>
             <a:r>
-              <a:rPr sz="800" lang="zh-TW" dirty="0">
+              <a:rPr sz="900" lang="zh-TW" dirty="0">
                 <a:solidFill>
                   <a:srgbClr val="000000"/>
                 </a:solidFill>
@@ -3225,7 +3225,7 @@
               <a:t>多遠」。要合起來，得先知道每一顆</a:t>
             </a:r>
             <a:r>
-              <a:rPr sz="800" b="1" lang="zh-TW" dirty="0">
+              <a:rPr sz="900" b="1" lang="zh-TW" dirty="0">
                 <a:solidFill>
                   <a:srgbClr val="000000"/>
                 </a:solidFill>
@@ -3236,7 +3236,7 @@
               <a:t>裝在車上的哪裡、朝哪個方向</a:t>
             </a:r>
             <a:r>
-              <a:rPr sz="800" lang="zh-TW" dirty="0">
+              <a:rPr sz="900" lang="zh-TW" dirty="0">
                 <a:solidFill>
                   <a:srgbClr val="000000"/>
                 </a:solidFill>
@@ -3247,7 +3247,7 @@
               <a:t>。這組數字就叫</a:t>
             </a:r>
             <a:r>
-              <a:rPr sz="800" b="1" lang="zh-TW" dirty="0">
+              <a:rPr sz="900" b="1" lang="zh-TW" dirty="0">
                 <a:solidFill>
                   <a:srgbClr val="000000"/>
                 </a:solidFill>
@@ -3258,7 +3258,7 @@
               <a:t>外參</a:t>
             </a:r>
             <a:r>
-              <a:rPr sz="800" lang="zh-TW" dirty="0">
+              <a:rPr sz="900" lang="zh-TW" dirty="0">
                 <a:solidFill>
                   <a:srgbClr val="000000"/>
                 </a:solidFill>
@@ -3269,7 +3269,7 @@
               <a:t>，第五週講過：它是對</a:t>
             </a:r>
             <a:r>
-              <a:rPr sz="800" b="1" lang="zh-TW" dirty="0">
+              <a:rPr sz="900" b="1" lang="zh-TW" dirty="0">
                 <a:solidFill>
                   <a:srgbClr val="000000"/>
                 </a:solidFill>
@@ -3280,7 +3280,7 @@
               <a:t>車身</a:t>
             </a:r>
             <a:r>
-              <a:rPr sz="800" lang="zh-TW" dirty="0">
+              <a:rPr sz="900" lang="zh-TW" dirty="0">
                 <a:solidFill>
                   <a:srgbClr val="000000"/>
                 </a:solidFill>
@@ -3291,7 +3291,7 @@
               <a:t>量的，不是對另一顆感測器。量出這組數字的工作，叫</a:t>
             </a:r>
             <a:r>
-              <a:rPr sz="800" b="1" lang="zh-TW" dirty="0">
+              <a:rPr sz="900" b="1" lang="zh-TW" dirty="0">
                 <a:solidFill>
                   <a:srgbClr val="000000"/>
                 </a:solidFill>
@@ -3302,7 +3302,7 @@
               <a:t>外參標定</a:t>
             </a:r>
             <a:r>
-              <a:rPr sz="800" lang="zh-TW" dirty="0">
+              <a:rPr sz="900" lang="zh-TW" dirty="0">
                 <a:solidFill>
                   <a:srgbClr val="000000"/>
                 </a:solidFill>
@@ -3320,11 +3320,11 @@
                 <a:spcPts val="0"/>
               </a:spcBef>
               <a:spcAft>
-                <a:spcPts val="133"/>
+                <a:spcPts val="150"/>
               </a:spcAft>
             </a:pPr>
             <a:r>
-              <a:rPr sz="800" lang="zh-TW" dirty="0">
+              <a:rPr sz="900" lang="zh-TW" dirty="0">
                 <a:solidFill>
                   <a:srgbClr val="000000"/>
                 </a:solidFill>
@@ -3335,7 +3335,7 @@
               <a:t>外參到底是什麼？就是每一顆六個數字。位置三個：往前多少、往左多少、離地多高。方向三個：左右轉了幾度、上下仰了幾度、有沒有歪向一邊。nuScenes 每一顆感測器都附了這六個數字，舉幾個真的：前方相機裝在後輪軸往前一點七公尺、離地一點五公尺；光達在後輪軸往前零點九公尺、離地一點八公尺；前雷達在最前面，往前三點四公尺、離地零點五公尺；左前角那顆雷達，往前二點四公尺、往左零點八公尺，而且它是</a:t>
             </a:r>
             <a:r>
-              <a:rPr sz="800" b="1" lang="zh-TW" dirty="0">
+              <a:rPr sz="900" b="1" lang="zh-TW" dirty="0">
                 <a:solidFill>
                   <a:srgbClr val="000000"/>
                 </a:solidFill>
@@ -3346,7 +3346,7 @@
               <a:t>朝左邊</a:t>
             </a:r>
             <a:r>
-              <a:rPr sz="800" lang="zh-TW" dirty="0">
+              <a:rPr sz="900" lang="zh-TW" dirty="0">
                 <a:solidFill>
                   <a:srgbClr val="000000"/>
                 </a:solidFill>
@@ -3364,11 +3364,11 @@
                 <a:spcPts val="0"/>
               </a:spcBef>
               <a:spcAft>
-                <a:spcPts val="133"/>
+                <a:spcPts val="150"/>
               </a:spcAft>
             </a:pPr>
             <a:r>
-              <a:rPr sz="800" lang="zh-TW" dirty="0">
+              <a:rPr sz="900" lang="zh-TW" dirty="0">
                 <a:solidFill>
                   <a:srgbClr val="000000"/>
                 </a:solidFill>
@@ -3379,7 +3379,7 @@
               <a:t>方向特別要緊。nuScenes 這顆光達，它自己的「正前方」，其實是朝</a:t>
             </a:r>
             <a:r>
-              <a:rPr sz="800" b="1" lang="zh-TW" dirty="0">
+              <a:rPr sz="900" b="1" lang="zh-TW" dirty="0">
                 <a:solidFill>
                   <a:srgbClr val="000000"/>
                 </a:solidFill>
@@ -3390,7 +3390,7 @@
               <a:t>車子的右邊</a:t>
             </a:r>
             <a:r>
-              <a:rPr sz="800" lang="zh-TW" dirty="0">
+              <a:rPr sz="900" lang="zh-TW" dirty="0">
                 <a:solidFill>
                   <a:srgbClr val="000000"/>
                 </a:solidFill>
@@ -3408,11 +3408,11 @@
                 <a:spcPts val="0"/>
               </a:spcBef>
               <a:spcAft>
-                <a:spcPts val="133"/>
+                <a:spcPts val="150"/>
               </a:spcAft>
             </a:pPr>
             <a:r>
-              <a:rPr sz="800" lang="zh-TW" dirty="0">
+              <a:rPr sz="900" lang="zh-TW" dirty="0">
                 <a:solidFill>
                   <a:srgbClr val="000000"/>
                 </a:solidFill>
@@ -3423,7 +3423,7 @@
               <a:t>所以外參不是把幾顆感測器調成「看到一樣的畫面」，每一顆看到的本來就不一樣。外參比較像一本</a:t>
             </a:r>
             <a:r>
-              <a:rPr sz="800" b="1" lang="zh-TW" dirty="0">
+              <a:rPr sz="900" b="1" lang="zh-TW" dirty="0">
                 <a:solidFill>
                   <a:srgbClr val="000000"/>
                 </a:solidFill>
@@ -3434,7 +3434,7 @@
               <a:t>換算表</a:t>
             </a:r>
             <a:r>
-              <a:rPr sz="800" lang="zh-TW" dirty="0">
+              <a:rPr sz="900" lang="zh-TW" dirty="0">
                 <a:solidFill>
                   <a:srgbClr val="000000"/>
                 </a:solidFill>
@@ -3452,11 +3452,11 @@
                 <a:spcPts val="0"/>
               </a:spcBef>
               <a:spcAft>
-                <a:spcPts val="133"/>
+                <a:spcPts val="150"/>
               </a:spcAft>
             </a:pPr>
             <a:r>
-              <a:rPr sz="800" lang="zh-TW" dirty="0">
+              <a:rPr sz="900" lang="zh-TW" dirty="0">
                 <a:solidFill>
                   <a:srgbClr val="000000"/>
                 </a:solidFill>
@@ -3474,11 +3474,11 @@
                 <a:spcPts val="0"/>
               </a:spcBef>
               <a:spcAft>
-                <a:spcPts val="133"/>
+                <a:spcPts val="150"/>
               </a:spcAft>
             </a:pPr>
             <a:r>
-              <a:rPr sz="800" b="1" lang="zh-TW" dirty="0">
+              <a:rPr sz="900" b="1" lang="zh-TW" dirty="0">
                 <a:solidFill>
                   <a:srgbClr val="000000"/>
                 </a:solidFill>
@@ -3489,7 +3489,7 @@
               <a:t>左邊，標定正確。</a:t>
             </a:r>
             <a:r>
-              <a:rPr sz="800" lang="zh-TW" dirty="0">
+              <a:rPr sz="900" lang="zh-TW" dirty="0">
                 <a:solidFill>
                   <a:srgbClr val="000000"/>
                 </a:solidFill>
@@ -3507,11 +3507,11 @@
                 <a:spcPts val="0"/>
               </a:spcBef>
               <a:spcAft>
-                <a:spcPts val="133"/>
+                <a:spcPts val="150"/>
               </a:spcAft>
             </a:pPr>
             <a:r>
-              <a:rPr sz="800" b="1" lang="zh-TW" dirty="0">
+              <a:rPr sz="900" b="1" lang="zh-TW" dirty="0">
                 <a:solidFill>
                   <a:srgbClr val="000000"/>
                 </a:solidFill>
@@ -3522,7 +3522,7 @@
               <a:t>右邊，同一格資料，我故意把光達多轉了四度。</a:t>
             </a:r>
             <a:r>
-              <a:rPr sz="800" lang="zh-TW" dirty="0">
+              <a:rPr sz="900" lang="zh-TW" dirty="0">
                 <a:solidFill>
                   <a:srgbClr val="000000"/>
                 </a:solidFill>
@@ -3540,11 +3540,11 @@
                 <a:spcPts val="0"/>
               </a:spcBef>
               <a:spcAft>
-                <a:spcPts val="133"/>
+                <a:spcPts val="150"/>
               </a:spcAft>
             </a:pPr>
             <a:r>
-              <a:rPr sz="800" lang="zh-TW" dirty="0">
+              <a:rPr sz="900" lang="zh-TW" dirty="0">
                 <a:solidFill>
                   <a:srgbClr val="000000"/>
                 </a:solidFill>
@@ -3555,7 +3555,7 @@
               <a:t>四度是我故意放大的。真的車上，標定可能只差零點幾度，可是第五週算過：</a:t>
             </a:r>
             <a:r>
-              <a:rPr sz="800" b="1" lang="zh-TW" dirty="0">
+              <a:rPr sz="900" b="1" lang="zh-TW" dirty="0">
                 <a:solidFill>
                   <a:srgbClr val="000000"/>
                 </a:solidFill>
@@ -3566,7 +3566,7 @@
               <a:t>差一度，五十公尺外就差零點八七公尺</a:t>
             </a:r>
             <a:r>
-              <a:rPr sz="800" lang="zh-TW" dirty="0">
+              <a:rPr sz="900" lang="zh-TW" dirty="0">
                 <a:solidFill>
                   <a:srgbClr val="000000"/>
                 </a:solidFill>
@@ -3584,11 +3584,11 @@
                 <a:spcPts val="0"/>
               </a:spcBef>
               <a:spcAft>
-                <a:spcPts val="133"/>
+                <a:spcPts val="150"/>
               </a:spcAft>
             </a:pPr>
             <a:r>
-              <a:rPr sz="800" lang="zh-TW" dirty="0">
+              <a:rPr sz="900" lang="zh-TW" dirty="0">
                 <a:solidFill>
                   <a:srgbClr val="000000"/>
                 </a:solidFill>
@@ -3599,7 +3599,7 @@
               <a:t>nuScenes 是怎麼標定的？它的論文寫了四步。</a:t>
             </a:r>
             <a:r>
-              <a:rPr sz="800" b="1" lang="zh-TW" dirty="0">
+              <a:rPr sz="900" b="1" lang="zh-TW" dirty="0">
                 <a:solidFill>
                   <a:srgbClr val="000000"/>
                 </a:solidFill>
@@ -3610,7 +3610,7 @@
               <a:t>光達</a:t>
             </a:r>
             <a:r>
-              <a:rPr sz="800" lang="zh-TW" dirty="0">
+              <a:rPr sz="900" lang="zh-TW" dirty="0">
                 <a:solidFill>
                   <a:srgbClr val="000000"/>
                 </a:solidFill>
@@ -3621,7 +3621,7 @@
               <a:t>：用雷射水平儀，直接量它離車子的原點，也就是後輪軸的正中間，有多遠。</a:t>
             </a:r>
             <a:r>
-              <a:rPr sz="800" b="1" lang="zh-TW" dirty="0">
+              <a:rPr sz="900" b="1" lang="zh-TW" dirty="0">
                 <a:solidFill>
                   <a:srgbClr val="000000"/>
                 </a:solidFill>
@@ -3632,7 +3632,7 @@
               <a:t>相機</a:t>
             </a:r>
             <a:r>
-              <a:rPr sz="800" lang="zh-TW" dirty="0">
+              <a:rPr sz="900" lang="zh-TW" dirty="0">
                 <a:solidFill>
                   <a:srgbClr val="000000"/>
                 </a:solidFill>
@@ -3643,7 +3643,7 @@
               <a:t>：在車前擺一個三面都有圖案的立方體校正靶，相機和光達同時看它，算出相機跟光達的相對位置，再接回車身。</a:t>
             </a:r>
             <a:r>
-              <a:rPr sz="800" b="1" lang="zh-TW" dirty="0">
+              <a:rPr sz="900" b="1" lang="zh-TW" dirty="0">
                 <a:solidFill>
                   <a:srgbClr val="000000"/>
                 </a:solidFill>
@@ -3654,7 +3654,7 @@
               <a:t>雷達</a:t>
             </a:r>
             <a:r>
-              <a:rPr sz="800" lang="zh-TW" dirty="0">
+              <a:rPr sz="900" lang="zh-TW" dirty="0">
                 <a:solidFill>
                   <a:srgbClr val="000000"/>
                 </a:solidFill>
@@ -3665,7 +3665,7 @@
               <a:t>：先水平裝好，再開車上路，用路邊靜止的東西，反推它左右裝歪了幾度。</a:t>
             </a:r>
             <a:r>
-              <a:rPr sz="800" b="1" lang="zh-TW" dirty="0">
+              <a:rPr sz="900" b="1" lang="zh-TW" dirty="0">
                 <a:solidFill>
                   <a:srgbClr val="000000"/>
                 </a:solidFill>
@@ -3676,7 +3676,7 @@
               <a:t>相機的內參</a:t>
             </a:r>
             <a:r>
-              <a:rPr sz="800" lang="zh-TW" dirty="0">
+              <a:rPr sz="900" lang="zh-TW" dirty="0">
                 <a:solidFill>
                   <a:srgbClr val="000000"/>
                 </a:solidFill>
@@ -3687,7 +3687,7 @@
               <a:t>：用一塊印了固定圖案的校正板，算出鏡頭的變形。而且收資料的半年裡，這些數字大約</a:t>
             </a:r>
             <a:r>
-              <a:rPr sz="800" b="1" lang="zh-TW" dirty="0">
+              <a:rPr sz="900" b="1" lang="zh-TW" dirty="0">
                 <a:solidFill>
                   <a:srgbClr val="000000"/>
                 </a:solidFill>
@@ -3698,7 +3698,7 @@
               <a:t>每個星期更新兩次</a:t>
             </a:r>
             <a:r>
-              <a:rPr sz="800" lang="zh-TW" dirty="0">
+              <a:rPr sz="900" lang="zh-TW" dirty="0">
                 <a:solidFill>
                   <a:srgbClr val="000000"/>
                 </a:solidFill>
@@ -3716,11 +3716,11 @@
                 <a:spcPts val="0"/>
               </a:spcBef>
               <a:spcAft>
-                <a:spcPts val="133"/>
+                <a:spcPts val="150"/>
               </a:spcAft>
             </a:pPr>
             <a:r>
-              <a:rPr sz="800" lang="zh-TW" dirty="0">
+              <a:rPr sz="900" lang="zh-TW" dirty="0">
                 <a:solidFill>
                   <a:srgbClr val="000000"/>
                 </a:solidFill>
@@ -3807,8 +3807,8 @@
         </p:nvSpPr>
         <p:spPr>
           <a:xfrm>
-            <a:off x="540000" y="540000"/>
-            <a:ext cx="6480000" cy="3645000"/>
+            <a:off x="1620000" y="380000"/>
+            <a:ext cx="4320000" cy="2430000"/>
           </a:xfrm>
         </p:spPr>
       </p:sp>
@@ -3824,8 +3824,8 @@
         </p:nvSpPr>
         <p:spPr>
           <a:xfrm>
-            <a:off x="540000" y="4440000"/>
-            <a:ext cx="6480000" cy="5500000"/>
+            <a:off x="540000" y="2990000"/>
+            <a:ext cx="6480000" cy="7060000"/>
           </a:xfrm>
         </p:spPr>
         <p:txBody>
@@ -3837,11 +3837,11 @@
                 <a:spcPts val="0"/>
               </a:spcBef>
               <a:spcAft>
-                <a:spcPts val="183"/>
+                <a:spcPts val="200"/>
               </a:spcAft>
             </a:pPr>
             <a:r>
-              <a:rPr sz="1100" b="1" lang="zh-TW" dirty="0">
+              <a:rPr sz="1200" b="1" lang="zh-TW" dirty="0">
                 <a:solidFill>
                   <a:srgbClr val="000000"/>
                 </a:solidFill>
@@ -3852,7 +3852,7 @@
               <a:t>這一張的目的：</a:t>
             </a:r>
             <a:r>
-              <a:rPr sz="1100" lang="zh-TW" dirty="0">
+              <a:rPr sz="1200" lang="zh-TW" dirty="0">
                 <a:solidFill>
                   <a:srgbClr val="000000"/>
                 </a:solidFill>
@@ -3870,11 +3870,11 @@
                 <a:spcPts val="0"/>
               </a:spcBef>
               <a:spcAft>
-                <a:spcPts val="183"/>
+                <a:spcPts val="200"/>
               </a:spcAft>
             </a:pPr>
             <a:r>
-              <a:rPr sz="1100" lang="zh-TW" dirty="0">
+              <a:rPr sz="1200" lang="zh-TW" dirty="0">
                 <a:solidFill>
                   <a:srgbClr val="000000"/>
                 </a:solidFill>
@@ -3885,7 +3885,7 @@
               <a:t>第二件事：</a:t>
             </a:r>
             <a:r>
-              <a:rPr sz="1100" b="1" lang="zh-TW" dirty="0">
+              <a:rPr sz="1200" b="1" lang="zh-TW" dirty="0">
                 <a:solidFill>
                   <a:srgbClr val="000000"/>
                 </a:solidFill>
@@ -3896,7 +3896,7 @@
               <a:t>對齊同一個時間。</a:t>
             </a:r>
             <a:r>
-              <a:rPr sz="1100" lang="zh-TW" dirty="0">
+              <a:rPr sz="1200" lang="zh-TW" dirty="0">
                 <a:solidFill>
                   <a:srgbClr val="000000"/>
                 </a:solidFill>
@@ -3914,11 +3914,11 @@
                 <a:spcPts val="0"/>
               </a:spcBef>
               <a:spcAft>
-                <a:spcPts val="183"/>
+                <a:spcPts val="200"/>
               </a:spcAft>
             </a:pPr>
             <a:r>
-              <a:rPr sz="1100" lang="zh-TW" dirty="0">
+              <a:rPr sz="1200" lang="zh-TW" dirty="0">
                 <a:solidFill>
                   <a:srgbClr val="000000"/>
                 </a:solidFill>
@@ -3936,11 +3936,11 @@
                 <a:spcPts val="0"/>
               </a:spcBef>
               <a:spcAft>
-                <a:spcPts val="183"/>
+                <a:spcPts val="200"/>
               </a:spcAft>
             </a:pPr>
             <a:r>
-              <a:rPr sz="1100" lang="zh-TW" dirty="0">
+              <a:rPr sz="1200" lang="zh-TW" dirty="0">
                 <a:solidFill>
                   <a:srgbClr val="000000"/>
                 </a:solidFill>
@@ -3958,11 +3958,11 @@
                 <a:spcPts val="0"/>
               </a:spcBef>
               <a:spcAft>
-                <a:spcPts val="183"/>
+                <a:spcPts val="200"/>
               </a:spcAft>
             </a:pPr>
             <a:r>
-              <a:rPr sz="1100" b="1" lang="zh-TW" dirty="0">
+              <a:rPr sz="1200" b="1" lang="zh-TW" dirty="0">
                 <a:solidFill>
                   <a:srgbClr val="000000"/>
                 </a:solidFill>
@@ -3973,7 +3973,7 @@
               <a:t>左邊，同步的。</a:t>
             </a:r>
             <a:r>
-              <a:rPr sz="1100" lang="zh-TW" dirty="0">
+              <a:rPr sz="1200" lang="zh-TW" dirty="0">
                 <a:solidFill>
                   <a:srgbClr val="000000"/>
                 </a:solidFill>
@@ -3991,11 +3991,11 @@
                 <a:spcPts val="0"/>
               </a:spcBef>
               <a:spcAft>
-                <a:spcPts val="183"/>
+                <a:spcPts val="200"/>
               </a:spcAft>
             </a:pPr>
             <a:r>
-              <a:rPr sz="1100" b="1" lang="zh-TW" dirty="0">
+              <a:rPr sz="1200" b="1" lang="zh-TW" dirty="0">
                 <a:solidFill>
                   <a:srgbClr val="000000"/>
                 </a:solidFill>
@@ -4006,7 +4006,7 @@
               <a:t>右邊，同一張照片，可是光達改用早四圈的那一圈，也就是早零點二秒。</a:t>
             </a:r>
             <a:r>
-              <a:rPr sz="1100" lang="zh-TW" dirty="0">
+              <a:rPr sz="1200" lang="zh-TW" dirty="0">
                 <a:solidFill>
                   <a:srgbClr val="000000"/>
                 </a:solidFill>
@@ -4017,7 +4017,7 @@
               <a:t>請看車頭：沒有點了。車尾後面，本來是背景的地方，反而有一排點。那是車子零點二秒前的位置。時速三十七，零點二秒走了兩公尺。再看左邊的路牌：照樣對得準。</a:t>
             </a:r>
             <a:r>
-              <a:rPr sz="1100" b="1" lang="zh-TW" dirty="0">
+              <a:rPr sz="1200" b="1" lang="zh-TW" dirty="0">
                 <a:solidFill>
                   <a:srgbClr val="000000"/>
                 </a:solidFill>
@@ -4028,7 +4028,7 @@
               <a:t>路牌沒動，所以時間差多少都沒關係；會動的東西，時間一差，位置就跟著錯。</a:t>
             </a:r>
             <a:r>
-              <a:rPr sz="1100" lang="zh-TW" dirty="0">
+              <a:rPr sz="1200" lang="zh-TW" dirty="0">
                 <a:solidFill>
                   <a:srgbClr val="000000"/>
                 </a:solidFill>
@@ -4046,11 +4046,11 @@
                 <a:spcPts val="0"/>
               </a:spcBef>
               <a:spcAft>
-                <a:spcPts val="183"/>
+                <a:spcPts val="200"/>
               </a:spcAft>
             </a:pPr>
             <a:r>
-              <a:rPr sz="1100" lang="zh-TW" dirty="0">
+              <a:rPr sz="1200" lang="zh-TW" dirty="0">
                 <a:solidFill>
                   <a:srgbClr val="000000"/>
                 </a:solidFill>
@@ -4068,11 +4068,11 @@
                 <a:spcPts val="0"/>
               </a:spcBef>
               <a:spcAft>
-                <a:spcPts val="183"/>
+                <a:spcPts val="200"/>
               </a:spcAft>
             </a:pPr>
             <a:r>
-              <a:rPr sz="1100" lang="zh-TW" dirty="0">
+              <a:rPr sz="1200" lang="zh-TW" dirty="0">
                 <a:solidFill>
                   <a:srgbClr val="000000"/>
                 </a:solidFill>
@@ -4083,7 +4083,7 @@
               <a:t>nuScenes 怎麼處理？它的光達在車頂一直轉，</a:t>
             </a:r>
             <a:r>
-              <a:rPr sz="1100" b="1" lang="zh-TW" dirty="0">
+              <a:rPr sz="1200" b="1" lang="zh-TW" dirty="0">
                 <a:solidFill>
                   <a:srgbClr val="000000"/>
                 </a:solidFill>
@@ -4094,7 +4094,7 @@
               <a:t>轉到某一台相機視野正中間的那一刻，才觸發那台相機拍照</a:t>
             </a:r>
             <a:r>
-              <a:rPr sz="1100" lang="zh-TW" dirty="0">
+              <a:rPr sz="1200" lang="zh-TW" dirty="0">
                 <a:solidFill>
                   <a:srgbClr val="000000"/>
                 </a:solidFill>
@@ -4112,11 +4112,11 @@
                 <a:spcPts val="0"/>
               </a:spcBef>
               <a:spcAft>
-                <a:spcPts val="183"/>
+                <a:spcPts val="200"/>
               </a:spcAft>
             </a:pPr>
             <a:r>
-              <a:rPr sz="1100" lang="zh-TW" dirty="0">
+              <a:rPr sz="1200" lang="zh-TW" dirty="0">
                 <a:solidFill>
                   <a:srgbClr val="000000"/>
                 </a:solidFill>
@@ -4203,8 +4203,8 @@
         </p:nvSpPr>
         <p:spPr>
           <a:xfrm>
-            <a:off x="540000" y="540000"/>
-            <a:ext cx="6480000" cy="3645000"/>
+            <a:off x="1620000" y="380000"/>
+            <a:ext cx="4320000" cy="2430000"/>
           </a:xfrm>
         </p:spPr>
       </p:sp>
@@ -4220,8 +4220,8 @@
         </p:nvSpPr>
         <p:spPr>
           <a:xfrm>
-            <a:off x="540000" y="4440000"/>
-            <a:ext cx="6480000" cy="5500000"/>
+            <a:off x="540000" y="2990000"/>
+            <a:ext cx="6480000" cy="7060000"/>
           </a:xfrm>
         </p:spPr>
         <p:txBody>
@@ -4233,11 +4233,11 @@
                 <a:spcPts val="0"/>
               </a:spcBef>
               <a:spcAft>
-                <a:spcPts val="200"/>
+                <a:spcPts val="250"/>
               </a:spcAft>
             </a:pPr>
             <a:r>
-              <a:rPr sz="1200" b="1" lang="zh-TW" dirty="0">
+              <a:rPr sz="1500" b="1" lang="zh-TW" dirty="0">
                 <a:solidFill>
                   <a:srgbClr val="000000"/>
                 </a:solidFill>
@@ -4248,7 +4248,7 @@
               <a:t>這一張的目的：</a:t>
             </a:r>
             <a:r>
-              <a:rPr sz="1200" lang="zh-TW" dirty="0">
+              <a:rPr sz="1500" lang="zh-TW" dirty="0">
                 <a:solidFill>
                   <a:srgbClr val="000000"/>
                 </a:solidFill>
@@ -4266,11 +4266,11 @@
                 <a:spcPts val="0"/>
               </a:spcBef>
               <a:spcAft>
-                <a:spcPts val="200"/>
+                <a:spcPts val="250"/>
               </a:spcAft>
             </a:pPr>
             <a:r>
-              <a:rPr sz="1200" lang="zh-TW" dirty="0">
+              <a:rPr sz="1500" lang="zh-TW" dirty="0">
                 <a:solidFill>
                   <a:srgbClr val="000000"/>
                 </a:solidFill>
@@ -4288,11 +4288,11 @@
                 <a:spcPts val="0"/>
               </a:spcBef>
               <a:spcAft>
-                <a:spcPts val="200"/>
+                <a:spcPts val="250"/>
               </a:spcAft>
             </a:pPr>
             <a:r>
-              <a:rPr sz="1200" b="1" lang="zh-TW" dirty="0">
+              <a:rPr sz="1500" b="1" lang="zh-TW" dirty="0">
                 <a:solidFill>
                   <a:srgbClr val="000000"/>
                 </a:solidFill>
@@ -4303,7 +4303,7 @@
               <a:t>第一種，前期融合。</a:t>
             </a:r>
             <a:r>
-              <a:rPr sz="1200" lang="zh-TW" dirty="0">
+              <a:rPr sz="1500" lang="zh-TW" dirty="0">
                 <a:solidFill>
                   <a:srgbClr val="000000"/>
                 </a:solidFill>
@@ -4321,11 +4321,11 @@
                 <a:spcPts val="0"/>
               </a:spcBef>
               <a:spcAft>
-                <a:spcPts val="200"/>
+                <a:spcPts val="250"/>
               </a:spcAft>
             </a:pPr>
             <a:r>
-              <a:rPr sz="1200" b="1" lang="zh-TW" dirty="0">
+              <a:rPr sz="1500" b="1" lang="zh-TW" dirty="0">
                 <a:solidFill>
                   <a:srgbClr val="000000"/>
                 </a:solidFill>
@@ -4336,7 +4336,7 @@
               <a:t>第二種，中期融合。</a:t>
             </a:r>
             <a:r>
-              <a:rPr sz="1200" lang="zh-TW" dirty="0">
+              <a:rPr sz="1500" lang="zh-TW" dirty="0">
                 <a:solidFill>
                   <a:srgbClr val="000000"/>
                 </a:solidFill>
@@ -4347,7 +4347,7 @@
               <a:t>每一顆先各自整理一下，抽出它覺得重要的東西，再合。現在很流行的做法，是大家先各自畫成同一張</a:t>
             </a:r>
             <a:r>
-              <a:rPr sz="1200" b="1" lang="zh-TW" dirty="0">
+              <a:rPr sz="1500" b="1" lang="zh-TW" dirty="0">
                 <a:solidFill>
                   <a:srgbClr val="000000"/>
                 </a:solidFill>
@@ -4358,7 +4358,7 @@
               <a:t>從上往下看的鳥瞰圖</a:t>
             </a:r>
             <a:r>
-              <a:rPr sz="1200" lang="zh-TW" dirty="0">
+              <a:rPr sz="1500" lang="zh-TW" dirty="0">
                 <a:solidFill>
                   <a:srgbClr val="000000"/>
                 </a:solidFill>
@@ -4376,11 +4376,11 @@
                 <a:spcPts val="0"/>
               </a:spcBef>
               <a:spcAft>
-                <a:spcPts val="200"/>
+                <a:spcPts val="250"/>
               </a:spcAft>
             </a:pPr>
             <a:r>
-              <a:rPr sz="1200" b="1" lang="zh-TW" dirty="0">
+              <a:rPr sz="1500" b="1" lang="zh-TW" dirty="0">
                 <a:solidFill>
                   <a:srgbClr val="000000"/>
                 </a:solidFill>
@@ -4391,7 +4391,7 @@
               <a:t>第三種，後期融合。</a:t>
             </a:r>
             <a:r>
-              <a:rPr sz="1200" lang="zh-TW" dirty="0">
+              <a:rPr sz="1500" lang="zh-TW" dirty="0">
                 <a:solidFill>
                   <a:srgbClr val="000000"/>
                 </a:solidFill>
@@ -4409,11 +4409,11 @@
                 <a:spcPts val="0"/>
               </a:spcBef>
               <a:spcAft>
-                <a:spcPts val="200"/>
+                <a:spcPts val="250"/>
               </a:spcAft>
             </a:pPr>
             <a:r>
-              <a:rPr sz="1200" lang="zh-TW" dirty="0">
+              <a:rPr sz="1500" lang="zh-TW" dirty="0">
                 <a:solidFill>
                   <a:srgbClr val="000000"/>
                 </a:solidFill>
@@ -4431,11 +4431,11 @@
                 <a:spcPts val="0"/>
               </a:spcBef>
               <a:spcAft>
-                <a:spcPts val="200"/>
+                <a:spcPts val="250"/>
               </a:spcAft>
             </a:pPr>
             <a:r>
-              <a:rPr sz="1200" lang="zh-TW" dirty="0">
+              <a:rPr sz="1500" lang="zh-TW" dirty="0">
                 <a:solidFill>
                   <a:srgbClr val="000000"/>
                 </a:solidFill>
@@ -4522,8 +4522,8 @@
         </p:nvSpPr>
         <p:spPr>
           <a:xfrm>
-            <a:off x="540000" y="540000"/>
-            <a:ext cx="6480000" cy="3645000"/>
+            <a:off x="1620000" y="380000"/>
+            <a:ext cx="4320000" cy="2430000"/>
           </a:xfrm>
         </p:spPr>
       </p:sp>
@@ -4539,8 +4539,8 @@
         </p:nvSpPr>
         <p:spPr>
           <a:xfrm>
-            <a:off x="540000" y="4440000"/>
-            <a:ext cx="6480000" cy="5500000"/>
+            <a:off x="540000" y="2990000"/>
+            <a:ext cx="6480000" cy="7060000"/>
           </a:xfrm>
         </p:spPr>
         <p:txBody>
@@ -4552,11 +4552,11 @@
                 <a:spcPts val="0"/>
               </a:spcBef>
               <a:spcAft>
-                <a:spcPts val="192"/>
+                <a:spcPts val="225"/>
               </a:spcAft>
             </a:pPr>
             <a:r>
-              <a:rPr sz="1150" b="1" lang="zh-TW" dirty="0">
+              <a:rPr sz="1350" b="1" lang="zh-TW" dirty="0">
                 <a:solidFill>
                   <a:srgbClr val="000000"/>
                 </a:solidFill>
@@ -4567,7 +4567,7 @@
               <a:t>這一張的目的：</a:t>
             </a:r>
             <a:r>
-              <a:rPr sz="1150" lang="zh-TW" dirty="0">
+              <a:rPr sz="1350" lang="zh-TW" dirty="0">
                 <a:solidFill>
                   <a:srgbClr val="000000"/>
                 </a:solidFill>
@@ -4585,11 +4585,11 @@
                 <a:spcPts val="0"/>
               </a:spcBef>
               <a:spcAft>
-                <a:spcPts val="192"/>
+                <a:spcPts val="225"/>
               </a:spcAft>
             </a:pPr>
             <a:r>
-              <a:rPr sz="1150" lang="zh-TW" dirty="0">
+              <a:rPr sz="1350" lang="zh-TW" dirty="0">
                 <a:solidFill>
                   <a:srgbClr val="000000"/>
                 </a:solidFill>
@@ -4600,7 +4600,7 @@
               <a:t>後期融合最關鍵的一步，叫</a:t>
             </a:r>
             <a:r>
-              <a:rPr sz="1150" b="1" lang="zh-TW" dirty="0">
+              <a:rPr sz="1350" b="1" lang="zh-TW" dirty="0">
                 <a:solidFill>
                   <a:srgbClr val="000000"/>
                 </a:solidFill>
@@ -4611,7 +4611,7 @@
               <a:t>對應</a:t>
             </a:r>
             <a:r>
-              <a:rPr sz="1150" lang="zh-TW" dirty="0">
+              <a:rPr sz="1350" lang="zh-TW" dirty="0">
                 <a:solidFill>
                   <a:srgbClr val="000000"/>
                 </a:solidFill>
@@ -4629,11 +4629,11 @@
                 <a:spcPts val="0"/>
               </a:spcBef>
               <a:spcAft>
-                <a:spcPts val="192"/>
+                <a:spcPts val="225"/>
               </a:spcAft>
             </a:pPr>
             <a:r>
-              <a:rPr sz="1150" lang="zh-TW" dirty="0">
+              <a:rPr sz="1350" lang="zh-TW" dirty="0">
                 <a:solidFill>
                   <a:srgbClr val="000000"/>
                 </a:solidFill>
@@ -4651,11 +4651,11 @@
                 <a:spcPts val="0"/>
               </a:spcBef>
               <a:spcAft>
-                <a:spcPts val="192"/>
+                <a:spcPts val="225"/>
               </a:spcAft>
             </a:pPr>
             <a:r>
-              <a:rPr sz="1150" lang="zh-TW" dirty="0">
+              <a:rPr sz="1350" lang="zh-TW" dirty="0">
                 <a:solidFill>
                   <a:srgbClr val="000000"/>
                 </a:solidFill>
@@ -4666,7 +4666,7 @@
               <a:t>看左圖，波士頓的一條街。框是官方標註的物體，紅圈是雷達點。</a:t>
             </a:r>
             <a:r>
-              <a:rPr sz="1150" b="1" lang="zh-TW" dirty="0">
+              <a:rPr sz="1350" b="1" lang="zh-TW" dirty="0">
                 <a:solidFill>
                   <a:srgbClr val="000000"/>
                 </a:solidFill>
@@ -4677,7 +4677,7 @@
               <a:t>綠框</a:t>
             </a:r>
             <a:r>
-              <a:rPr sz="1150" lang="zh-TW" dirty="0">
+              <a:rPr sz="1350" lang="zh-TW" dirty="0">
                 <a:solidFill>
                   <a:srgbClr val="000000"/>
                 </a:solidFill>
@@ -4688,7 +4688,7 @@
               <a:t>，是框裡至少有一個雷達點的：路邊停的那幾台車，框裡都有紅圈。</a:t>
             </a:r>
             <a:r>
-              <a:rPr sz="1150" b="1" lang="zh-TW" dirty="0">
+              <a:rPr sz="1350" b="1" lang="zh-TW" dirty="0">
                 <a:solidFill>
                   <a:srgbClr val="000000"/>
                 </a:solidFill>
@@ -4699,7 +4699,7 @@
               <a:t>黃框</a:t>
             </a:r>
             <a:r>
-              <a:rPr sz="1150" lang="zh-TW" dirty="0">
+              <a:rPr sz="1350" lang="zh-TW" dirty="0">
                 <a:solidFill>
                   <a:srgbClr val="000000"/>
                 </a:solidFill>
@@ -4717,11 +4717,11 @@
                 <a:spcPts val="0"/>
               </a:spcBef>
               <a:spcAft>
-                <a:spcPts val="192"/>
+                <a:spcPts val="225"/>
               </a:spcAft>
             </a:pPr>
             <a:r>
-              <a:rPr sz="1150" lang="zh-TW" dirty="0">
+              <a:rPr sz="1350" lang="zh-TW" dirty="0">
                 <a:solidFill>
                   <a:srgbClr val="000000"/>
                 </a:solidFill>
@@ -4732,7 +4732,7 @@
               <a:t>再看路的右邊，有一長排紅圈，排在人行道旁邊，沒有任何框。那多半是路邊的東西，可能是欄杆、樹、號誌桿。這些點不屬於任何一台標註的物體，對應的時候要</a:t>
             </a:r>
             <a:r>
-              <a:rPr sz="1150" b="1" lang="zh-TW" dirty="0">
+              <a:rPr sz="1350" b="1" lang="zh-TW" dirty="0">
                 <a:solidFill>
                   <a:srgbClr val="000000"/>
                 </a:solidFill>
@@ -4743,7 +4743,7 @@
               <a:t>正確地丟掉</a:t>
             </a:r>
             <a:r>
-              <a:rPr sz="1150" lang="zh-TW" dirty="0">
+              <a:rPr sz="1350" lang="zh-TW" dirty="0">
                 <a:solidFill>
                   <a:srgbClr val="000000"/>
                 </a:solidFill>
@@ -4761,11 +4761,11 @@
                 <a:spcPts val="0"/>
               </a:spcBef>
               <a:spcAft>
-                <a:spcPts val="192"/>
+                <a:spcPts val="225"/>
               </a:spcAft>
             </a:pPr>
             <a:r>
-              <a:rPr sz="1150" lang="zh-TW" dirty="0">
+              <a:rPr sz="1350" lang="zh-TW" dirty="0">
                 <a:solidFill>
                   <a:srgbClr val="000000"/>
                 </a:solidFill>
@@ -4776,7 +4776,7 @@
               <a:t>怎麼對？最簡單的就是看</a:t>
             </a:r>
             <a:r>
-              <a:rPr sz="1150" b="1" lang="zh-TW" dirty="0">
+              <a:rPr sz="1350" b="1" lang="zh-TW" dirty="0">
                 <a:solidFill>
                   <a:srgbClr val="000000"/>
                 </a:solidFill>
@@ -4787,7 +4787,7 @@
               <a:t>位置</a:t>
             </a:r>
             <a:r>
-              <a:rPr sz="1150" lang="zh-TW" dirty="0">
+              <a:rPr sz="1350" lang="zh-TW" dirty="0">
                 <a:solidFill>
                   <a:srgbClr val="000000"/>
                 </a:solidFill>
@@ -4798,7 +4798,7 @@
               <a:t>：雷達點落在哪個框附近，就算它的。再加上</a:t>
             </a:r>
             <a:r>
-              <a:rPr sz="1150" b="1" lang="zh-TW" dirty="0">
+              <a:rPr sz="1350" b="1" lang="zh-TW" dirty="0">
                 <a:solidFill>
                   <a:srgbClr val="000000"/>
                 </a:solidFill>
@@ -4809,7 +4809,7 @@
               <a:t>速度</a:t>
             </a:r>
             <a:r>
-              <a:rPr sz="1150" lang="zh-TW" dirty="0">
+              <a:rPr sz="1350" lang="zh-TW" dirty="0">
                 <a:solidFill>
                   <a:srgbClr val="000000"/>
                 </a:solidFill>
@@ -4827,11 +4827,11 @@
                 <a:spcPts val="0"/>
               </a:spcBef>
               <a:spcAft>
-                <a:spcPts val="192"/>
+                <a:spcPts val="225"/>
               </a:spcAft>
             </a:pPr>
             <a:r>
-              <a:rPr sz="1150" lang="zh-TW" dirty="0">
+              <a:rPr sz="1350" lang="zh-TW" dirty="0">
                 <a:solidFill>
                   <a:srgbClr val="000000"/>
                 </a:solidFill>
@@ -4842,7 +4842,7 @@
               <a:t>看一支影片，NVIDIA 做自駕晶片的團隊。</a:t>
             </a:r>
             <a:r>
-              <a:rPr sz="1150" b="1" lang="zh-TW" dirty="0">
+              <a:rPr sz="1350" b="1" lang="zh-TW" dirty="0">
                 <a:solidFill>
                   <a:srgbClr val="000000"/>
                 </a:solidFill>
@@ -4853,7 +4853,7 @@
               <a:t>從 0:42 播到 1:30。</a:t>
             </a:r>
             <a:r>
-              <a:rPr sz="1150" lang="zh-TW" dirty="0">
+              <a:rPr sz="1350" lang="zh-TW" dirty="0">
                 <a:solidFill>
                   <a:srgbClr val="000000"/>
                 </a:solidFill>
@@ -4864,7 +4864,7 @@
               <a:t>英文，我邊播邊講。畫面是車子周圍幾台相機拼起來的；</a:t>
             </a:r>
             <a:r>
-              <a:rPr sz="1150" b="1" lang="zh-TW" dirty="0">
+              <a:rPr sz="1350" b="1" lang="zh-TW" dirty="0">
                 <a:solidFill>
                   <a:srgbClr val="000000"/>
                 </a:solidFill>
@@ -4875,7 +4875,7 @@
               <a:t>0:47 小白方塊是雷達追蹤到的目標，橘色的線是它走過的路</a:t>
             </a:r>
             <a:r>
-              <a:rPr sz="1150" lang="zh-TW" dirty="0">
+              <a:rPr sz="1350" lang="zh-TW" dirty="0">
                 <a:solidFill>
                   <a:srgbClr val="000000"/>
                 </a:solidFill>
@@ -4886,7 +4886,7 @@
               <a:t>。</a:t>
             </a:r>
             <a:r>
-              <a:rPr sz="1150" b="1" lang="zh-TW" dirty="0">
+              <a:rPr sz="1350" b="1" lang="zh-TW" dirty="0">
                 <a:solidFill>
                   <a:srgbClr val="000000"/>
                 </a:solidFill>
@@ -4897,7 +4897,7 @@
               <a:t>0:52</a:t>
             </a:r>
             <a:r>
-              <a:rPr sz="1150" lang="zh-TW" dirty="0">
+              <a:rPr sz="1350" lang="zh-TW" dirty="0">
                 <a:solidFill>
                   <a:srgbClr val="000000"/>
                 </a:solidFill>
@@ -4908,7 +4908,7 @@
               <a:t> 旁白說：相機框出來的物體，和雷達的目標對上之後，小方塊會變成綠色。</a:t>
             </a:r>
             <a:r>
-              <a:rPr sz="1150" b="1" lang="zh-TW" dirty="0">
+              <a:rPr sz="1350" b="1" lang="zh-TW" dirty="0">
                 <a:solidFill>
                   <a:srgbClr val="000000"/>
                 </a:solidFill>
@@ -4919,7 +4919,7 @@
               <a:t>0:58</a:t>
             </a:r>
             <a:r>
-              <a:rPr sz="1150" lang="zh-TW" dirty="0">
+              <a:rPr sz="1350" lang="zh-TW" dirty="0">
                 <a:solidFill>
                   <a:srgbClr val="000000"/>
                 </a:solidFill>
@@ -4930,7 +4930,7 @@
               <a:t> 旁白講了融合的好處：位置、速度、加速度，都變得更準、更可靠。</a:t>
             </a:r>
             <a:r>
-              <a:rPr sz="1150" b="1" lang="zh-TW" dirty="0">
+              <a:rPr sz="1350" b="1" lang="zh-TW" dirty="0">
                 <a:solidFill>
                   <a:srgbClr val="000000"/>
                 </a:solidFill>
@@ -4941,7 +4941,7 @@
               <a:t>1:10</a:t>
             </a:r>
             <a:r>
-              <a:rPr sz="1150" lang="zh-TW" dirty="0">
+              <a:rPr sz="1350" lang="zh-TW" dirty="0">
                 <a:solidFill>
                   <a:srgbClr val="000000"/>
                 </a:solidFill>
@@ -5028,8 +5028,8 @@
         </p:nvSpPr>
         <p:spPr>
           <a:xfrm>
-            <a:off x="540000" y="540000"/>
-            <a:ext cx="6480000" cy="3645000"/>
+            <a:off x="1620000" y="380000"/>
+            <a:ext cx="4320000" cy="2430000"/>
           </a:xfrm>
         </p:spPr>
       </p:sp>
@@ -5045,8 +5045,8 @@
         </p:nvSpPr>
         <p:spPr>
           <a:xfrm>
-            <a:off x="540000" y="4440000"/>
-            <a:ext cx="6480000" cy="5500000"/>
+            <a:off x="540000" y="2990000"/>
+            <a:ext cx="6480000" cy="7060000"/>
           </a:xfrm>
         </p:spPr>
         <p:txBody>
@@ -5058,11 +5058,11 @@
                 <a:spcPts val="0"/>
               </a:spcBef>
               <a:spcAft>
-                <a:spcPts val="200"/>
+                <a:spcPts val="267"/>
               </a:spcAft>
             </a:pPr>
             <a:r>
-              <a:rPr sz="1200" b="1" lang="zh-TW" dirty="0">
+              <a:rPr sz="1600" b="1" lang="zh-TW" dirty="0">
                 <a:solidFill>
                   <a:srgbClr val="000000"/>
                 </a:solidFill>
@@ -5073,7 +5073,7 @@
               <a:t>這一張的目的：</a:t>
             </a:r>
             <a:r>
-              <a:rPr sz="1200" lang="zh-TW" dirty="0">
+              <a:rPr sz="1600" lang="zh-TW" dirty="0">
                 <a:solidFill>
                   <a:srgbClr val="000000"/>
                 </a:solidFill>
@@ -5091,11 +5091,11 @@
                 <a:spcPts val="0"/>
               </a:spcBef>
               <a:spcAft>
-                <a:spcPts val="200"/>
+                <a:spcPts val="267"/>
               </a:spcAft>
             </a:pPr>
             <a:r>
-              <a:rPr sz="1200" lang="zh-TW" dirty="0">
+              <a:rPr sz="1600" lang="zh-TW" dirty="0">
                 <a:solidFill>
                   <a:srgbClr val="000000"/>
                 </a:solidFill>
@@ -5113,11 +5113,11 @@
                 <a:spcPts val="0"/>
               </a:spcBef>
               <a:spcAft>
-                <a:spcPts val="200"/>
+                <a:spcPts val="267"/>
               </a:spcAft>
             </a:pPr>
             <a:r>
-              <a:rPr sz="1200" b="1" lang="zh-TW" dirty="0">
+              <a:rPr sz="1600" b="1" lang="zh-TW" dirty="0">
                 <a:solidFill>
                   <a:srgbClr val="000000"/>
                 </a:solidFill>
@@ -5128,7 +5128,7 @@
               <a:t>第一種，看條件決定信誰。</a:t>
             </a:r>
             <a:r>
-              <a:rPr sz="1200" lang="zh-TW" dirty="0">
+              <a:rPr sz="1600" lang="zh-TW" dirty="0">
                 <a:solidFill>
                   <a:srgbClr val="000000"/>
                 </a:solidFill>
@@ -5139,7 +5139,7 @@
               <a:t>每一顆感測器有一個「權重」，就是你有多相信它，而且權重會跟著條件變。上一節那張失效對照表就是權重表：下雨，相機打叉，就少相信相機、多相信雷達；遠處的行人，雷達打叉，就少相信雷達。代價是：你要</a:t>
             </a:r>
             <a:r>
-              <a:rPr sz="1200" b="1" lang="zh-TW" dirty="0">
+              <a:rPr sz="1600" b="1" lang="zh-TW" dirty="0">
                 <a:solidFill>
                   <a:srgbClr val="000000"/>
                 </a:solidFill>
@@ -5150,7 +5150,7 @@
               <a:t>事先知道</a:t>
             </a:r>
             <a:r>
-              <a:rPr sz="1200" lang="zh-TW" dirty="0">
+              <a:rPr sz="1600" lang="zh-TW" dirty="0">
                 <a:solidFill>
                   <a:srgbClr val="000000"/>
                 </a:solidFill>
@@ -5168,11 +5168,11 @@
                 <a:spcPts val="0"/>
               </a:spcBef>
               <a:spcAft>
-                <a:spcPts val="200"/>
+                <a:spcPts val="267"/>
               </a:spcAft>
             </a:pPr>
             <a:r>
-              <a:rPr sz="1200" b="1" lang="zh-TW" dirty="0">
+              <a:rPr sz="1600" b="1" lang="zh-TW" dirty="0">
                 <a:solidFill>
                   <a:srgbClr val="000000"/>
                 </a:solidFill>
@@ -5183,7 +5183,7 @@
               <a:t>第二種，多數決。</a:t>
             </a:r>
             <a:r>
-              <a:rPr sz="1200" lang="zh-TW" dirty="0">
+              <a:rPr sz="1600" lang="zh-TW" dirty="0">
                 <a:solidFill>
                   <a:srgbClr val="000000"/>
                 </a:solidFill>
@@ -5194,7 +5194,7 @@
               <a:t>三顆裡有兩顆說有，就算有。很直覺，但代價是：至少要有三顆在量</a:t>
             </a:r>
             <a:r>
-              <a:rPr sz="1200" b="1" lang="zh-TW" dirty="0">
+              <a:rPr sz="1600" b="1" lang="zh-TW" dirty="0">
                 <a:solidFill>
                   <a:srgbClr val="000000"/>
                 </a:solidFill>
@@ -5205,7 +5205,7 @@
               <a:t>同一件事</a:t>
             </a:r>
             <a:r>
-              <a:rPr sz="1200" lang="zh-TW" dirty="0">
+              <a:rPr sz="1600" lang="zh-TW" dirty="0">
                 <a:solidFill>
                   <a:srgbClr val="000000"/>
                 </a:solidFill>
@@ -5223,11 +5223,11 @@
                 <a:spcPts val="0"/>
               </a:spcBef>
               <a:spcAft>
-                <a:spcPts val="200"/>
+                <a:spcPts val="267"/>
               </a:spcAft>
             </a:pPr>
             <a:r>
-              <a:rPr sz="1200" b="1" lang="zh-TW" dirty="0">
+              <a:rPr sz="1600" b="1" lang="zh-TW" dirty="0">
                 <a:solidFill>
                   <a:srgbClr val="000000"/>
                 </a:solidFill>
@@ -5238,7 +5238,7 @@
               <a:t>第三種，保守原則。</a:t>
             </a:r>
             <a:r>
-              <a:rPr sz="1200" lang="zh-TW" dirty="0">
+              <a:rPr sz="1600" lang="zh-TW" dirty="0">
                 <a:solidFill>
                   <a:srgbClr val="000000"/>
                 </a:solidFill>
@@ -5256,11 +5256,11 @@
                 <a:spcPts val="0"/>
               </a:spcBef>
               <a:spcAft>
-                <a:spcPts val="200"/>
+                <a:spcPts val="267"/>
               </a:spcAft>
             </a:pPr>
             <a:r>
-              <a:rPr sz="1200" lang="zh-TW" dirty="0">
+              <a:rPr sz="1600" lang="zh-TW" dirty="0">
                 <a:solidFill>
                   <a:srgbClr val="000000"/>
                 </a:solidFill>
@@ -5271,7 +5271,7 @@
               <a:t>真的系統，三種混著用。而且最重要的一點：上一節說每一顆都要能說「我現在不可靠」。</a:t>
             </a:r>
             <a:r>
-              <a:rPr sz="1200" b="1" lang="zh-TW" dirty="0">
+              <a:rPr sz="1600" b="1" lang="zh-TW" dirty="0">
                 <a:solidFill>
                   <a:srgbClr val="000000"/>
                 </a:solidFill>
@@ -5282,7 +5282,7 @@
               <a:t>它一說，它的權重就降下來</a:t>
             </a:r>
             <a:r>
-              <a:rPr sz="1200" lang="zh-TW" dirty="0">
+              <a:rPr sz="1600" lang="zh-TW" dirty="0">
                 <a:solidFill>
                   <a:srgbClr val="000000"/>
                 </a:solidFill>
@@ -5369,8 +5369,8 @@
         </p:nvSpPr>
         <p:spPr>
           <a:xfrm>
-            <a:off x="540000" y="540000"/>
-            <a:ext cx="6480000" cy="3645000"/>
+            <a:off x="1620000" y="380000"/>
+            <a:ext cx="4320000" cy="2430000"/>
           </a:xfrm>
         </p:spPr>
       </p:sp>
@@ -5386,8 +5386,8 @@
         </p:nvSpPr>
         <p:spPr>
           <a:xfrm>
-            <a:off x="540000" y="4440000"/>
-            <a:ext cx="6480000" cy="5500000"/>
+            <a:off x="540000" y="2990000"/>
+            <a:ext cx="6480000" cy="7060000"/>
           </a:xfrm>
         </p:spPr>
         <p:txBody>
@@ -5399,11 +5399,11 @@
                 <a:spcPts val="0"/>
               </a:spcBef>
               <a:spcAft>
-                <a:spcPts val="158"/>
+                <a:spcPts val="183"/>
               </a:spcAft>
             </a:pPr>
             <a:r>
-              <a:rPr sz="950" b="1" lang="zh-TW" dirty="0">
+              <a:rPr sz="1100" b="1" lang="zh-TW" dirty="0">
                 <a:solidFill>
                   <a:srgbClr val="000000"/>
                 </a:solidFill>
@@ -5414,7 +5414,7 @@
               <a:t>這一張的目的：</a:t>
             </a:r>
             <a:r>
-              <a:rPr sz="950" lang="zh-TW" dirty="0">
+              <a:rPr sz="1100" lang="zh-TW" dirty="0">
                 <a:solidFill>
                   <a:srgbClr val="000000"/>
                 </a:solidFill>
@@ -5432,11 +5432,11 @@
                 <a:spcPts val="0"/>
               </a:spcBef>
               <a:spcAft>
-                <a:spcPts val="158"/>
+                <a:spcPts val="183"/>
               </a:spcAft>
             </a:pPr>
             <a:r>
-              <a:rPr sz="950" lang="zh-TW" dirty="0">
+              <a:rPr sz="1100" lang="zh-TW" dirty="0">
                 <a:solidFill>
                   <a:srgbClr val="000000"/>
                 </a:solidFill>
@@ -5447,7 +5447,7 @@
               <a:t>最後一個融合的例子，是定位。這裡藏著一個很有名的方法，叫</a:t>
             </a:r>
             <a:r>
-              <a:rPr sz="950" b="1" lang="zh-TW" dirty="0">
+              <a:rPr sz="1100" b="1" lang="zh-TW" dirty="0">
                 <a:solidFill>
                   <a:srgbClr val="000000"/>
                 </a:solidFill>
@@ -5458,7 +5458,7 @@
               <a:t>卡爾曼濾波</a:t>
             </a:r>
             <a:r>
-              <a:rPr sz="950" lang="zh-TW" dirty="0">
+              <a:rPr sz="1100" lang="zh-TW" dirty="0">
                 <a:solidFill>
                   <a:srgbClr val="000000"/>
                 </a:solidFill>
@@ -5469,7 +5469,7 @@
               <a:t>。完整的數學很難，但它的核心，一句話就講得完：</a:t>
             </a:r>
             <a:r>
-              <a:rPr sz="950" b="1" lang="zh-TW" dirty="0">
+              <a:rPr sz="1100" b="1" lang="zh-TW" dirty="0">
                 <a:solidFill>
                   <a:srgbClr val="000000"/>
                 </a:solidFill>
@@ -5480,7 +5480,7 @@
               <a:t>預測一個位置，量到一個位置，比較準的那一個，多相信一點。</a:t>
             </a:r>
             <a:r>
-              <a:rPr sz="950" lang="zh-TW" dirty="0">
+              <a:rPr sz="1100" lang="zh-TW" dirty="0">
                 <a:solidFill>
                   <a:srgbClr val="000000"/>
                 </a:solidFill>
@@ -5498,11 +5498,11 @@
                 <a:spcPts val="0"/>
               </a:spcBef>
               <a:spcAft>
-                <a:spcPts val="158"/>
+                <a:spcPts val="183"/>
               </a:spcAft>
             </a:pPr>
             <a:r>
-              <a:rPr sz="950" lang="zh-TW" dirty="0">
+              <a:rPr sz="1100" lang="zh-TW" dirty="0">
                 <a:solidFill>
                   <a:srgbClr val="000000"/>
                 </a:solidFill>
@@ -5520,11 +5520,11 @@
                 <a:spcPts val="0"/>
               </a:spcBef>
               <a:spcAft>
-                <a:spcPts val="158"/>
+                <a:spcPts val="183"/>
               </a:spcAft>
             </a:pPr>
             <a:r>
-              <a:rPr sz="950" b="1" lang="zh-TW" dirty="0">
+              <a:rPr sz="1100" b="1" lang="zh-TW" dirty="0">
                 <a:solidFill>
                   <a:srgbClr val="000000"/>
                 </a:solidFill>
@@ -5535,7 +5535,7 @@
               <a:t>預測</a:t>
             </a:r>
             <a:r>
-              <a:rPr sz="950" lang="zh-TW" dirty="0">
+              <a:rPr sz="1100" lang="zh-TW" dirty="0">
                 <a:solidFill>
                   <a:srgbClr val="000000"/>
                 </a:solidFill>
@@ -5553,11 +5553,11 @@
                 <a:spcPts val="0"/>
               </a:spcBef>
               <a:spcAft>
-                <a:spcPts val="158"/>
+                <a:spcPts val="183"/>
               </a:spcAft>
             </a:pPr>
             <a:r>
-              <a:rPr sz="950" b="1" lang="zh-TW" dirty="0">
+              <a:rPr sz="1100" b="1" lang="zh-TW" dirty="0">
                 <a:solidFill>
                   <a:srgbClr val="000000"/>
                 </a:solidFill>
@@ -5568,7 +5568,7 @@
               <a:t>量到</a:t>
             </a:r>
             <a:r>
-              <a:rPr sz="950" lang="zh-TW" dirty="0">
+              <a:rPr sz="1100" lang="zh-TW" dirty="0">
                 <a:solidFill>
                   <a:srgbClr val="000000"/>
                 </a:solidFill>
@@ -5586,11 +5586,11 @@
                 <a:spcPts val="0"/>
               </a:spcBef>
               <a:spcAft>
-                <a:spcPts val="158"/>
+                <a:spcPts val="183"/>
               </a:spcAft>
             </a:pPr>
             <a:r>
-              <a:rPr sz="950" lang="zh-TW" dirty="0">
+              <a:rPr sz="1100" lang="zh-TW" dirty="0">
                 <a:solidFill>
                   <a:srgbClr val="000000"/>
                 </a:solidFill>
@@ -5601,7 +5601,7 @@
               <a:t>兩個差了兩公尺，要相信誰？都相信一點，但不是一半一半。誤差差三倍，信任要差</a:t>
             </a:r>
             <a:r>
-              <a:rPr sz="950" b="1" lang="zh-TW" dirty="0">
+              <a:rPr sz="1100" b="1" lang="zh-TW" dirty="0">
                 <a:solidFill>
                   <a:srgbClr val="000000"/>
                 </a:solidFill>
@@ -5612,7 +5612,7 @@
               <a:t>九倍</a:t>
             </a:r>
             <a:r>
-              <a:rPr sz="950" lang="zh-TW" dirty="0">
+              <a:rPr sz="1100" lang="zh-TW" dirty="0">
                 <a:solidFill>
                   <a:srgbClr val="000000"/>
                 </a:solidFill>
@@ -5630,11 +5630,11 @@
                 <a:spcPts val="0"/>
               </a:spcBef>
               <a:spcAft>
-                <a:spcPts val="158"/>
+                <a:spcPts val="183"/>
               </a:spcAft>
             </a:pPr>
             <a:r>
-              <a:rPr sz="950" lang="zh-TW" dirty="0">
+              <a:rPr sz="1100" lang="zh-TW" dirty="0">
                 <a:solidFill>
                   <a:srgbClr val="000000"/>
                 </a:solidFill>
@@ -5645,7 +5645,7 @@
               <a:t>九乘一百二十，加一乘一百一十八，除以十，等於</a:t>
             </a:r>
             <a:r>
-              <a:rPr sz="950" b="1" lang="zh-TW" dirty="0">
+              <a:rPr sz="1100" b="1" lang="zh-TW" dirty="0">
                 <a:solidFill>
                   <a:srgbClr val="000000"/>
                 </a:solidFill>
@@ -5656,7 +5656,7 @@
               <a:t>一百一十九點八公尺</a:t>
             </a:r>
             <a:r>
-              <a:rPr sz="950" lang="zh-TW" dirty="0">
+              <a:rPr sz="1100" lang="zh-TW" dirty="0">
                 <a:solidFill>
                   <a:srgbClr val="000000"/>
                 </a:solidFill>
@@ -5674,11 +5674,11 @@
                 <a:spcPts val="0"/>
               </a:spcBef>
               <a:spcAft>
-                <a:spcPts val="158"/>
+                <a:spcPts val="183"/>
               </a:spcAft>
             </a:pPr>
             <a:r>
-              <a:rPr sz="950" lang="zh-TW" dirty="0">
+              <a:rPr sz="1100" lang="zh-TW" dirty="0">
                 <a:solidFill>
                   <a:srgbClr val="000000"/>
                 </a:solidFill>
@@ -5689,7 +5689,7 @@
               <a:t>動圖上看得出來：IMU 那條曲線又窄又高，GPS 那條又寬又矮，曲線愈寬，就是愈不確定。最後出現的黃色那條，就是合起來的結果，落在一百一十九點八，而且</a:t>
             </a:r>
             <a:r>
-              <a:rPr sz="950" b="1" lang="zh-TW" dirty="0">
+              <a:rPr sz="1100" b="1" lang="zh-TW" dirty="0">
                 <a:solidFill>
                   <a:srgbClr val="000000"/>
                 </a:solidFill>
@@ -5700,7 +5700,7 @@
               <a:t>比兩條都窄一點</a:t>
             </a:r>
             <a:r>
-              <a:rPr sz="950" lang="zh-TW" dirty="0">
+              <a:rPr sz="1100" lang="zh-TW" dirty="0">
                 <a:solidFill>
                   <a:srgbClr val="000000"/>
                 </a:solidFill>
@@ -5718,11 +5718,11 @@
                 <a:spcPts val="0"/>
               </a:spcBef>
               <a:spcAft>
-                <a:spcPts val="158"/>
+                <a:spcPts val="183"/>
               </a:spcAft>
             </a:pPr>
             <a:r>
-              <a:rPr sz="950" lang="zh-TW" dirty="0">
+              <a:rPr sz="1100" lang="zh-TW" dirty="0">
                 <a:solidFill>
                   <a:srgbClr val="000000"/>
                 </a:solidFill>
@@ -5740,11 +5740,11 @@
                 <a:spcPts val="0"/>
               </a:spcBef>
               <a:spcAft>
-                <a:spcPts val="158"/>
+                <a:spcPts val="183"/>
               </a:spcAft>
             </a:pPr>
             <a:r>
-              <a:rPr sz="950" lang="zh-TW" dirty="0">
+              <a:rPr sz="1100" lang="zh-TW" dirty="0">
                 <a:solidFill>
                   <a:srgbClr val="000000"/>
                 </a:solidFill>
@@ -5762,11 +5762,11 @@
                 <a:spcPts val="0"/>
               </a:spcBef>
               <a:spcAft>
-                <a:spcPts val="158"/>
+                <a:spcPts val="183"/>
               </a:spcAft>
             </a:pPr>
             <a:r>
-              <a:rPr sz="950" b="1" lang="zh-TW" dirty="0">
+              <a:rPr sz="1100" b="1" lang="zh-TW" dirty="0">
                 <a:solidFill>
                   <a:srgbClr val="000000"/>
                 </a:solidFill>
@@ -5777,7 +5777,7 @@
               <a:t>進隧道會怎樣？</a:t>
             </a:r>
             <a:r>
-              <a:rPr sz="950" lang="zh-TW" dirty="0">
+              <a:rPr sz="1100" lang="zh-TW" dirty="0">
                 <a:solidFill>
                   <a:srgbClr val="000000"/>
                 </a:solidFill>
@@ -5788,7 +5788,7 @@
               <a:t>動圖的第二段：GPS 沒了，只剩預測。每一秒都在推算，誤差一秒一秒累積，誤差圈愈來愈大，這就是上一節的 IMU 漂移。</a:t>
             </a:r>
             <a:r>
-              <a:rPr sz="950" b="1" lang="zh-TW" dirty="0">
+              <a:rPr sz="1100" b="1" lang="zh-TW" dirty="0">
                 <a:solidFill>
                   <a:srgbClr val="000000"/>
                 </a:solidFill>
@@ -5799,7 +5799,7 @@
               <a:t>出了隧道</a:t>
             </a:r>
             <a:r>
-              <a:rPr sz="950" lang="zh-TW" dirty="0">
+              <a:rPr sz="1100" lang="zh-TW" dirty="0">
                 <a:solidFill>
                   <a:srgbClr val="000000"/>
                 </a:solidFill>
@@ -5817,11 +5817,11 @@
                 <a:spcPts val="0"/>
               </a:spcBef>
               <a:spcAft>
-                <a:spcPts val="158"/>
+                <a:spcPts val="183"/>
               </a:spcAft>
             </a:pPr>
             <a:r>
-              <a:rPr sz="950" lang="zh-TW" dirty="0">
+              <a:rPr sz="1100" lang="zh-TW" dirty="0">
                 <a:solidFill>
                   <a:srgbClr val="000000"/>
                 </a:solidFill>

--- a/第七週(10-22)/第七週_第2節_簡報.pptx
+++ b/第七週(10-22)/第七週_第2節_簡報.pptx
@@ -2275,11 +2275,11 @@
                 <a:spcPts val="0"/>
               </a:spcBef>
               <a:spcAft>
-                <a:spcPts val="192"/>
+                <a:spcPts val="175"/>
               </a:spcAft>
             </a:pPr>
             <a:r>
-              <a:rPr sz="1150" b="1" lang="zh-TW" dirty="0">
+              <a:rPr sz="1050" b="1" lang="zh-TW" dirty="0">
                 <a:solidFill>
                   <a:srgbClr val="000000"/>
                 </a:solidFill>
@@ -2290,7 +2290,7 @@
               <a:t>這一張的目的：</a:t>
             </a:r>
             <a:r>
-              <a:rPr sz="1150" lang="zh-TW" dirty="0">
+              <a:rPr sz="1050" lang="zh-TW" dirty="0">
                 <a:solidFill>
                   <a:srgbClr val="000000"/>
                 </a:solidFill>
@@ -2308,11 +2308,11 @@
                 <a:spcPts val="0"/>
               </a:spcBef>
               <a:spcAft>
-                <a:spcPts val="192"/>
+                <a:spcPts val="175"/>
               </a:spcAft>
             </a:pPr>
             <a:r>
-              <a:rPr sz="1150" lang="zh-TW" dirty="0">
+              <a:rPr sz="1050" lang="zh-TW" dirty="0">
                 <a:solidFill>
                   <a:srgbClr val="000000"/>
                 </a:solidFill>
@@ -2323,7 +2323,7 @@
               <a:t>先想一個情況。高速公路上，</a:t>
             </a:r>
             <a:r>
-              <a:rPr sz="1150" b="1" lang="zh-TW" dirty="0">
+              <a:rPr sz="1050" b="1" lang="zh-TW" dirty="0">
                 <a:solidFill>
                   <a:srgbClr val="000000"/>
                 </a:solidFill>
@@ -2334,7 +2334,7 @@
               <a:t>雷達說：前方六十公尺有東西。相機說：前面沒有車。</a:t>
             </a:r>
             <a:r>
-              <a:rPr sz="1150" lang="zh-TW" dirty="0">
+              <a:rPr sz="1050" lang="zh-TW" dirty="0">
                 <a:solidFill>
                   <a:srgbClr val="000000"/>
                 </a:solidFill>
@@ -2352,11 +2352,11 @@
                 <a:spcPts val="0"/>
               </a:spcBef>
               <a:spcAft>
-                <a:spcPts val="192"/>
+                <a:spcPts val="175"/>
               </a:spcAft>
             </a:pPr>
             <a:r>
-              <a:rPr sz="1150" lang="zh-TW" dirty="0">
+              <a:rPr sz="1050" lang="zh-TW" dirty="0">
                 <a:solidFill>
                   <a:srgbClr val="000000"/>
                 </a:solidFill>
@@ -2374,11 +2374,11 @@
                 <a:spcPts val="0"/>
               </a:spcBef>
               <a:spcAft>
-                <a:spcPts val="192"/>
+                <a:spcPts val="175"/>
               </a:spcAft>
             </a:pPr>
             <a:r>
-              <a:rPr sz="1150" lang="zh-TW" dirty="0">
+              <a:rPr sz="1050" lang="zh-TW" dirty="0">
                 <a:solidFill>
                   <a:srgbClr val="000000"/>
                 </a:solidFill>
@@ -2389,7 +2389,7 @@
               <a:t>先看左邊這支動畫，它會循環播兩格。上面是從旁邊看：左邊是我們的車，保險桿上的橘色小方塊是雷達，電波水平往前打出去。六十公尺外有一座頭頂的路牌。下面是</a:t>
             </a:r>
             <a:r>
-              <a:rPr sz="1150" b="1" lang="zh-TW" dirty="0">
+              <a:rPr sz="1050" b="1" lang="zh-TW" dirty="0">
                 <a:solidFill>
                   <a:srgbClr val="000000"/>
                 </a:solidFill>
@@ -2400,7 +2400,7 @@
               <a:t>雷達自己的地圖</a:t>
             </a:r>
             <a:r>
-              <a:rPr sz="1150" lang="zh-TW" dirty="0">
+              <a:rPr sz="1050" lang="zh-TW" dirty="0">
                 <a:solidFill>
                   <a:srgbClr val="000000"/>
                 </a:solidFill>
@@ -2418,11 +2418,11 @@
                 <a:spcPts val="0"/>
               </a:spcBef>
               <a:spcAft>
-                <a:spcPts val="192"/>
+                <a:spcPts val="175"/>
               </a:spcAft>
             </a:pPr>
             <a:r>
-              <a:rPr sz="1150" b="1" lang="zh-TW" dirty="0">
+              <a:rPr sz="1050" b="1" lang="zh-TW" dirty="0">
                 <a:solidFill>
                   <a:srgbClr val="000000"/>
                 </a:solidFill>
@@ -2433,7 +2433,7 @@
               <a:t>第一格，假設只有頭頂的路牌，下面沒有車。</a:t>
             </a:r>
             <a:r>
-              <a:rPr sz="1150" lang="zh-TW" dirty="0">
+              <a:rPr sz="1050" lang="zh-TW" dirty="0">
                 <a:solidFill>
                   <a:srgbClr val="000000"/>
                 </a:solidFill>
@@ -2451,11 +2451,11 @@
                 <a:spcPts val="0"/>
               </a:spcBef>
               <a:spcAft>
-                <a:spcPts val="192"/>
+                <a:spcPts val="175"/>
               </a:spcAft>
             </a:pPr>
             <a:r>
-              <a:rPr sz="1150" b="1" lang="zh-TW" dirty="0">
+              <a:rPr sz="1050" b="1" lang="zh-TW" dirty="0">
                 <a:solidFill>
                   <a:srgbClr val="000000"/>
                 </a:solidFill>
@@ -2466,7 +2466,7 @@
               <a:t>第二格，換一種可能：路牌下面真的停了一台車。</a:t>
             </a:r>
             <a:r>
-              <a:rPr sz="1150" lang="zh-TW" dirty="0">
+              <a:rPr sz="1050" lang="zh-TW" dirty="0">
                 <a:solidFill>
                   <a:srgbClr val="000000"/>
                 </a:solidFill>
@@ -2477,7 +2477,7 @@
               <a:t>電波打到車，彈回來，地圖上出現的點，</a:t>
             </a:r>
             <a:r>
-              <a:rPr sz="1150" b="1" lang="zh-TW" dirty="0">
+              <a:rPr sz="1050" b="1" lang="zh-TW" dirty="0">
                 <a:solidFill>
                   <a:srgbClr val="000000"/>
                 </a:solidFill>
@@ -2488,7 +2488,7 @@
               <a:t>位置一模一樣。</a:t>
             </a:r>
             <a:r>
-              <a:rPr sz="1150" lang="zh-TW" dirty="0">
+              <a:rPr sz="1050" lang="zh-TW" dirty="0">
                 <a:solidFill>
                   <a:srgbClr val="000000"/>
                 </a:solidFill>
@@ -2506,11 +2506,11 @@
                 <a:spcPts val="0"/>
               </a:spcBef>
               <a:spcAft>
-                <a:spcPts val="192"/>
+                <a:spcPts val="175"/>
               </a:spcAft>
             </a:pPr>
             <a:r>
-              <a:rPr sz="1150" lang="zh-TW" dirty="0">
+              <a:rPr sz="1050" lang="zh-TW" dirty="0">
                 <a:solidFill>
                   <a:srgbClr val="000000"/>
                 </a:solidFill>
@@ -2528,19 +2528,85 @@
                 <a:spcPts val="0"/>
               </a:spcBef>
               <a:spcAft>
-                <a:spcPts val="192"/>
+                <a:spcPts val="175"/>
               </a:spcAft>
             </a:pPr>
             <a:r>
-              <a:rPr sz="1150" lang="zh-TW" dirty="0">
-                <a:solidFill>
-                  <a:srgbClr val="000000"/>
-                </a:solidFill>
-                <a:latin typeface="Arial Unicode MS"/>
-                <a:ea typeface="Arial Unicode MS"/>
-                <a:cs typeface="Arial Unicode MS"/>
-              </a:rPr>
-              <a:t>所以雷達單獨回答不了這個問題，要問相機。可是相機說「沒有車」：如果是第一格，它說對了；如果是第二格，它是漏看了一台真的車。
+              <a:rPr sz="1050" lang="zh-TW" dirty="0">
+                <a:solidFill>
+                  <a:srgbClr val="000000"/>
+                </a:solidFill>
+                <a:latin typeface="Arial Unicode MS"/>
+                <a:ea typeface="Arial Unicode MS"/>
+                <a:cs typeface="Arial Unicode MS"/>
+              </a:rPr>
+              <a:t>為什麼分不出來？雷達打一次，扇形裡所有東西的回聲會混在一起回來，雷達再用三把刀把它切開：</a:t>
+            </a:r>
+            <a:r>
+              <a:rPr sz="1050" b="1" lang="zh-TW" dirty="0">
+                <a:solidFill>
+                  <a:srgbClr val="000000"/>
+                </a:solidFill>
+                <a:latin typeface="Arial Unicode MS"/>
+                <a:ea typeface="Arial Unicode MS"/>
+                <a:cs typeface="Arial Unicode MS"/>
+              </a:rPr>
+              <a:t>距離</a:t>
+            </a:r>
+            <a:r>
+              <a:rPr sz="1050" lang="zh-TW" dirty="0">
+                <a:solidFill>
+                  <a:srgbClr val="000000"/>
+                </a:solidFill>
+                <a:latin typeface="Arial Unicode MS"/>
+                <a:ea typeface="Arial Unicode MS"/>
+                <a:cs typeface="Arial Unicode MS"/>
+              </a:rPr>
+              <a:t>、</a:t>
+            </a:r>
+            <a:r>
+              <a:rPr sz="1050" b="1" lang="zh-TW" dirty="0">
+                <a:solidFill>
+                  <a:srgbClr val="000000"/>
+                </a:solidFill>
+                <a:latin typeface="Arial Unicode MS"/>
+                <a:ea typeface="Arial Unicode MS"/>
+                <a:cs typeface="Arial Unicode MS"/>
+              </a:rPr>
+              <a:t>速度</a:t>
+            </a:r>
+            <a:r>
+              <a:rPr sz="1050" lang="zh-TW" dirty="0">
+                <a:solidFill>
+                  <a:srgbClr val="000000"/>
+                </a:solidFill>
+                <a:latin typeface="Arial Unicode MS"/>
+                <a:ea typeface="Arial Unicode MS"/>
+                <a:cs typeface="Arial Unicode MS"/>
+              </a:rPr>
+              <a:t>、</a:t>
+            </a:r>
+            <a:r>
+              <a:rPr sz="1050" b="1" lang="zh-TW" dirty="0">
+                <a:solidFill>
+                  <a:srgbClr val="000000"/>
+                </a:solidFill>
+                <a:latin typeface="Arial Unicode MS"/>
+                <a:ea typeface="Arial Unicode MS"/>
+                <a:cs typeface="Arial Unicode MS"/>
+              </a:rPr>
+              <a:t>方向</a:t>
+            </a:r>
+            <a:r>
+              <a:rPr sz="1050" lang="zh-TW" dirty="0">
+                <a:solidFill>
+                  <a:srgbClr val="000000"/>
+                </a:solidFill>
+                <a:latin typeface="Arial Unicode MS"/>
+                <a:ea typeface="Arial Unicode MS"/>
+                <a:cs typeface="Arial Unicode MS"/>
+              </a:rPr>
+              <a:t>。切完之後，同一格裡如果有兩個東西，速度不一樣，還分得開；速度一樣，就只剩一個點。頭頂的路牌和橋下停著的車，距離差不多、方向差不多、速度都是零，三把刀都切不開。而且遠處的格子很大：上週算過，ARS 408 的角度格子，在一百五十公尺外就有四公尺多寬，比一個車道還寬。
 </a:t>
             </a:r>
           </a:p>
@@ -2550,63 +2616,19 @@
                 <a:spcPts val="0"/>
               </a:spcBef>
               <a:spcAft>
-                <a:spcPts val="192"/>
+                <a:spcPts val="175"/>
               </a:spcAft>
             </a:pPr>
             <a:r>
-              <a:rPr sz="1150" lang="zh-TW" dirty="0">
-                <a:solidFill>
-                  <a:srgbClr val="000000"/>
-                </a:solidFill>
-                <a:latin typeface="Arial Unicode MS"/>
-                <a:ea typeface="Arial Unicode MS"/>
-                <a:cs typeface="Arial Unicode MS"/>
-              </a:rPr>
-              <a:t>兩邊都有道理，也都有代價。</a:t>
-            </a:r>
-            <a:r>
-              <a:rPr sz="1150" b="1" lang="zh-TW" dirty="0">
-                <a:solidFill>
-                  <a:srgbClr val="000000"/>
-                </a:solidFill>
-                <a:latin typeface="Arial Unicode MS"/>
-                <a:ea typeface="Arial Unicode MS"/>
-                <a:cs typeface="Arial Unicode MS"/>
-              </a:rPr>
-              <a:t>聽雷達</a:t>
-            </a:r>
-            <a:r>
-              <a:rPr sz="1150" lang="zh-TW" dirty="0">
-                <a:solidFill>
-                  <a:srgbClr val="000000"/>
-                </a:solidFill>
-                <a:latin typeface="Arial Unicode MS"/>
-                <a:ea typeface="Arial Unicode MS"/>
-                <a:cs typeface="Arial Unicode MS"/>
-              </a:rPr>
-              <a:t>：上一節講過，雷達量不出高度，那個「東西」可能是頭頂的路牌、天橋；每次都煞，就是幽靈煞車，後面的車可能撞上來。</a:t>
-            </a:r>
-            <a:r>
-              <a:rPr sz="1150" b="1" lang="zh-TW" dirty="0">
-                <a:solidFill>
-                  <a:srgbClr val="000000"/>
-                </a:solidFill>
-                <a:latin typeface="Arial Unicode MS"/>
-                <a:ea typeface="Arial Unicode MS"/>
-                <a:cs typeface="Arial Unicode MS"/>
-              </a:rPr>
-              <a:t>聽相機</a:t>
-            </a:r>
-            <a:r>
-              <a:rPr sz="1150" lang="zh-TW" dirty="0">
-                <a:solidFill>
-                  <a:srgbClr val="000000"/>
-                </a:solidFill>
-                <a:latin typeface="Arial Unicode MS"/>
-                <a:ea typeface="Arial Unicode MS"/>
-                <a:cs typeface="Arial Unicode MS"/>
-              </a:rPr>
-              <a:t>：相機可能沒認出來，像消防車那個事故，前面真的停了一台車。
+              <a:rPr sz="1050" lang="zh-TW" dirty="0">
+                <a:solidFill>
+                  <a:srgbClr val="000000"/>
+                </a:solidFill>
+                <a:latin typeface="Arial Unicode MS"/>
+                <a:ea typeface="Arial Unicode MS"/>
+                <a:cs typeface="Arial Unicode MS"/>
+              </a:rPr>
+              <a:t>所以雷達單獨回答不了這個問題，要問相機。可是相機說「沒有車」：如果是第一格，它說對了；如果是第二格，它是漏看了一台真的車。
 </a:t>
             </a:r>
           </a:p>
@@ -2616,19 +2638,63 @@
                 <a:spcPts val="0"/>
               </a:spcBef>
               <a:spcAft>
-                <a:spcPts val="192"/>
+                <a:spcPts val="175"/>
               </a:spcAft>
             </a:pPr>
             <a:r>
-              <a:rPr sz="1150" lang="zh-TW" dirty="0">
-                <a:solidFill>
-                  <a:srgbClr val="000000"/>
-                </a:solidFill>
-                <a:latin typeface="Arial Unicode MS"/>
-                <a:ea typeface="Arial Unicode MS"/>
-                <a:cs typeface="Arial Unicode MS"/>
-              </a:rPr>
-              <a:t>就像警察問兩個目擊證人，兩個人說的不一樣。不能只聽聲音比較大的那個，要看誰在那個位置看得比較清楚、誰以前比較可靠。
+              <a:rPr sz="1050" lang="zh-TW" dirty="0">
+                <a:solidFill>
+                  <a:srgbClr val="000000"/>
+                </a:solidFill>
+                <a:latin typeface="Arial Unicode MS"/>
+                <a:ea typeface="Arial Unicode MS"/>
+                <a:cs typeface="Arial Unicode MS"/>
+              </a:rPr>
+              <a:t>兩邊都有道理，也都有代價。</a:t>
+            </a:r>
+            <a:r>
+              <a:rPr sz="1050" b="1" lang="zh-TW" dirty="0">
+                <a:solidFill>
+                  <a:srgbClr val="000000"/>
+                </a:solidFill>
+                <a:latin typeface="Arial Unicode MS"/>
+                <a:ea typeface="Arial Unicode MS"/>
+                <a:cs typeface="Arial Unicode MS"/>
+              </a:rPr>
+              <a:t>聽雷達</a:t>
+            </a:r>
+            <a:r>
+              <a:rPr sz="1050" lang="zh-TW" dirty="0">
+                <a:solidFill>
+                  <a:srgbClr val="000000"/>
+                </a:solidFill>
+                <a:latin typeface="Arial Unicode MS"/>
+                <a:ea typeface="Arial Unicode MS"/>
+                <a:cs typeface="Arial Unicode MS"/>
+              </a:rPr>
+              <a:t>：上一節講過，雷達量不出高度，那個「東西」可能是頭頂的路牌、天橋；每次都煞，就是幽靈煞車，後面的車可能撞上來。</a:t>
+            </a:r>
+            <a:r>
+              <a:rPr sz="1050" b="1" lang="zh-TW" dirty="0">
+                <a:solidFill>
+                  <a:srgbClr val="000000"/>
+                </a:solidFill>
+                <a:latin typeface="Arial Unicode MS"/>
+                <a:ea typeface="Arial Unicode MS"/>
+                <a:cs typeface="Arial Unicode MS"/>
+              </a:rPr>
+              <a:t>聽相機</a:t>
+            </a:r>
+            <a:r>
+              <a:rPr sz="1050" lang="zh-TW" dirty="0">
+                <a:solidFill>
+                  <a:srgbClr val="000000"/>
+                </a:solidFill>
+                <a:latin typeface="Arial Unicode MS"/>
+                <a:ea typeface="Arial Unicode MS"/>
+                <a:cs typeface="Arial Unicode MS"/>
+              </a:rPr>
+              <a:t>：相機可能沒認出來，像消防車那個事故，前面真的停了一台車。
 </a:t>
             </a:r>
           </a:p>
@@ -2638,11 +2704,33 @@
                 <a:spcPts val="0"/>
               </a:spcBef>
               <a:spcAft>
-                <a:spcPts val="192"/>
+                <a:spcPts val="175"/>
               </a:spcAft>
             </a:pPr>
             <a:r>
-              <a:rPr sz="1150" lang="zh-TW" dirty="0">
+              <a:rPr sz="1050" lang="zh-TW" dirty="0">
+                <a:solidFill>
+                  <a:srgbClr val="000000"/>
+                </a:solidFill>
+                <a:latin typeface="Arial Unicode MS"/>
+                <a:ea typeface="Arial Unicode MS"/>
+                <a:cs typeface="Arial Unicode MS"/>
+              </a:rPr>
+              <a:t>就像警察問兩個目擊證人，兩個人說的不一樣。不能只聽聲音比較大的那個，要看誰在那個位置看得比較清楚、誰以前比較可靠。
+</a:t>
+            </a:r>
+          </a:p>
+          <a:p>
+            <a:pPr algn="l">
+              <a:spcBef>
+                <a:spcPts val="0"/>
+              </a:spcBef>
+              <a:spcAft>
+                <a:spcPts val="175"/>
+              </a:spcAft>
+            </a:pPr>
+            <a:r>
+              <a:rPr sz="1050" lang="zh-TW" dirty="0">
                 <a:solidFill>
                   <a:srgbClr val="000000"/>
                 </a:solidFill>
@@ -2653,7 +2741,7 @@
               <a:t>所以融合沒有一個永遠對的答案。它在做的事，是在不同情況下，</a:t>
             </a:r>
             <a:r>
-              <a:rPr sz="1150" b="1" lang="zh-TW" dirty="0">
+              <a:rPr sz="1050" b="1" lang="zh-TW" dirty="0">
                 <a:solidFill>
                   <a:srgbClr val="000000"/>
                 </a:solidFill>
@@ -2664,7 +2752,7 @@
               <a:t>選一個比較承受得起的代價</a:t>
             </a:r>
             <a:r>
-              <a:rPr sz="1150" lang="zh-TW" dirty="0">
+              <a:rPr sz="1050" lang="zh-TW" dirty="0">
                 <a:solidFill>
                   <a:srgbClr val="000000"/>
                 </a:solidFill>

--- a/第七週(10-22)/第七週_第2節_簡報.pptx
+++ b/第七週(10-22)/第七週_第2節_簡報.pptx
@@ -5,7 +5,7 @@
     <p:sldMasterId id="2147483648" r:id="rId1"/>
   </p:sldMasterIdLst>
   <p:notesMasterIdLst>
-    <p:notesMasterId r:id="rId14"/>
+    <p:notesMasterId r:id="rId15"/>
   </p:notesMasterIdLst>
   <p:sldIdLst>
     <p:sldId id="256" r:id="rId2"/>
@@ -20,6 +20,7 @@
     <p:sldId id="265" r:id="rId11"/>
     <p:sldId id="266" r:id="rId12"/>
     <p:sldId id="267" r:id="rId13"/>
+    <p:sldId id="268" r:id="rId14"/>
   </p:sldIdLst>
   <p:sldSz cx="9144000" cy="5143500"/>
   <p:notesSz cx="7560000" cy="10692000"/>
@@ -768,11 +769,11 @@
                 <a:spcPts val="0"/>
               </a:spcBef>
               <a:spcAft>
-                <a:spcPts val="233"/>
+                <a:spcPts val="183"/>
               </a:spcAft>
             </a:pPr>
             <a:r>
-              <a:rPr sz="1400" b="1" lang="zh-TW" dirty="0">
+              <a:rPr sz="1100" b="1" lang="zh-TW" dirty="0">
                 <a:solidFill>
                   <a:srgbClr val="000000"/>
                 </a:solidFill>
@@ -783,15 +784,15 @@
               <a:t>這一張的目的：</a:t>
             </a:r>
             <a:r>
-              <a:rPr sz="1400" lang="zh-TW" dirty="0">
-                <a:solidFill>
-                  <a:srgbClr val="000000"/>
-                </a:solidFill>
-                <a:latin typeface="Arial Unicode MS"/>
-                <a:ea typeface="Arial Unicode MS"/>
-                <a:cs typeface="Arial Unicode MS"/>
-              </a:rPr>
-              <a:t>讓大家知道，壞到合起來也不夠時，車子要主動降級；L2 交還給人，L4 自己靠邊停。
+              <a:rPr sz="1100" lang="zh-TW" dirty="0">
+                <a:solidFill>
+                  <a:srgbClr val="000000"/>
+                </a:solidFill>
+                <a:latin typeface="Arial Unicode MS"/>
+                <a:ea typeface="Arial Unicode MS"/>
+                <a:cs typeface="Arial Unicode MS"/>
+              </a:rPr>
+              <a:t>讓大家記住一句話，比較準的多相信一點；並且會算一次加權平均。
 </a:t>
             </a:r>
           </a:p>
@@ -801,19 +802,63 @@
                 <a:spcPts val="0"/>
               </a:spcBef>
               <a:spcAft>
-                <a:spcPts val="233"/>
+                <a:spcPts val="183"/>
               </a:spcAft>
             </a:pPr>
             <a:r>
-              <a:rPr sz="1400" lang="zh-TW" dirty="0">
-                <a:solidFill>
-                  <a:srgbClr val="000000"/>
-                </a:solidFill>
-                <a:latin typeface="Arial Unicode MS"/>
-                <a:ea typeface="Arial Unicode MS"/>
-                <a:cs typeface="Arial Unicode MS"/>
-              </a:rPr>
-              <a:t>最後，萬一壞到合起來也不夠呢？例如暴雨，相機糊了，光達也變短了，只剩雷達。
+              <a:rPr sz="1100" lang="zh-TW" dirty="0">
+                <a:solidFill>
+                  <a:srgbClr val="000000"/>
+                </a:solidFill>
+                <a:latin typeface="Arial Unicode MS"/>
+                <a:ea typeface="Arial Unicode MS"/>
+                <a:cs typeface="Arial Unicode MS"/>
+              </a:rPr>
+              <a:t>最後一個融合的例子，是定位。這裡藏著一個很有名的方法，叫</a:t>
+            </a:r>
+            <a:r>
+              <a:rPr sz="1100" b="1" lang="zh-TW" dirty="0">
+                <a:solidFill>
+                  <a:srgbClr val="000000"/>
+                </a:solidFill>
+                <a:latin typeface="Arial Unicode MS"/>
+                <a:ea typeface="Arial Unicode MS"/>
+                <a:cs typeface="Arial Unicode MS"/>
+              </a:rPr>
+              <a:t>卡爾曼濾波</a:t>
+            </a:r>
+            <a:r>
+              <a:rPr sz="1100" lang="zh-TW" dirty="0">
+                <a:solidFill>
+                  <a:srgbClr val="000000"/>
+                </a:solidFill>
+                <a:latin typeface="Arial Unicode MS"/>
+                <a:ea typeface="Arial Unicode MS"/>
+                <a:cs typeface="Arial Unicode MS"/>
+              </a:rPr>
+              <a:t>。完整的數學很難，但它的核心，一句話就講得完：</a:t>
+            </a:r>
+            <a:r>
+              <a:rPr sz="1100" b="1" lang="zh-TW" dirty="0">
+                <a:solidFill>
+                  <a:srgbClr val="000000"/>
+                </a:solidFill>
+                <a:latin typeface="Arial Unicode MS"/>
+                <a:ea typeface="Arial Unicode MS"/>
+                <a:cs typeface="Arial Unicode MS"/>
+              </a:rPr>
+              <a:t>預測一個位置，量到一個位置，比較準的那一個，多相信一點。</a:t>
+            </a:r>
+            <a:r>
+              <a:rPr sz="1100" lang="zh-TW" dirty="0">
+                <a:solidFill>
+                  <a:srgbClr val="000000"/>
+                </a:solidFill>
+                <a:latin typeface="Arial Unicode MS"/>
+                <a:ea typeface="Arial Unicode MS"/>
+                <a:cs typeface="Arial Unicode MS"/>
+              </a:rPr>
+              <a:t>
 </a:t>
             </a:r>
           </a:p>
@@ -823,41 +868,19 @@
                 <a:spcPts val="0"/>
               </a:spcBef>
               <a:spcAft>
-                <a:spcPts val="233"/>
+                <a:spcPts val="183"/>
               </a:spcAft>
             </a:pPr>
             <a:r>
-              <a:rPr sz="1400" lang="zh-TW" dirty="0">
-                <a:solidFill>
-                  <a:srgbClr val="000000"/>
-                </a:solidFill>
-                <a:latin typeface="Arial Unicode MS"/>
-                <a:ea typeface="Arial Unicode MS"/>
-                <a:cs typeface="Arial Unicode MS"/>
-              </a:rPr>
-              <a:t>答案是</a:t>
-            </a:r>
-            <a:r>
-              <a:rPr sz="1400" b="1" lang="zh-TW" dirty="0">
-                <a:solidFill>
-                  <a:srgbClr val="000000"/>
-                </a:solidFill>
-                <a:latin typeface="Arial Unicode MS"/>
-                <a:ea typeface="Arial Unicode MS"/>
-                <a:cs typeface="Arial Unicode MS"/>
-              </a:rPr>
-              <a:t>降級</a:t>
-            </a:r>
-            <a:r>
-              <a:rPr sz="1400" lang="zh-TW" dirty="0">
-                <a:solidFill>
-                  <a:srgbClr val="000000"/>
-                </a:solidFill>
-                <a:latin typeface="Arial Unicode MS"/>
-                <a:ea typeface="Arial Unicode MS"/>
-                <a:cs typeface="Arial Unicode MS"/>
-              </a:rPr>
-              <a:t>。車子不硬撐，而是主動退一步。
+              <a:rPr sz="1100" lang="zh-TW" dirty="0">
+                <a:solidFill>
+                  <a:srgbClr val="000000"/>
+                </a:solidFill>
+                <a:latin typeface="Arial Unicode MS"/>
+                <a:ea typeface="Arial Unicode MS"/>
+                <a:cs typeface="Arial Unicode MS"/>
+              </a:rPr>
+              <a:t>左邊這支動圖會播兩段，跟著我講的順序走。先算一次：車子在一條路上，要知道自己在第幾公尺。
 </a:t>
             </a:r>
           </a:p>
@@ -867,41 +890,30 @@
                 <a:spcPts val="0"/>
               </a:spcBef>
               <a:spcAft>
-                <a:spcPts val="233"/>
+                <a:spcPts val="183"/>
               </a:spcAft>
             </a:pPr>
             <a:r>
-              <a:rPr sz="1400" lang="zh-TW" dirty="0">
-                <a:solidFill>
-                  <a:srgbClr val="000000"/>
-                </a:solidFill>
-                <a:latin typeface="Arial Unicode MS"/>
-                <a:ea typeface="Arial Unicode MS"/>
-                <a:cs typeface="Arial Unicode MS"/>
-              </a:rPr>
-              <a:t>看左邊的動圖，它會播三段。</a:t>
-            </a:r>
-            <a:r>
-              <a:rPr sz="1400" b="1" lang="zh-TW" dirty="0">
-                <a:solidFill>
-                  <a:srgbClr val="000000"/>
-                </a:solidFill>
-                <a:latin typeface="Arial Unicode MS"/>
-                <a:ea typeface="Arial Unicode MS"/>
-                <a:cs typeface="Arial Unicode MS"/>
-              </a:rPr>
-              <a:t>第一段，雨愈下愈大。</a:t>
-            </a:r>
-            <a:r>
-              <a:rPr sz="1400" lang="zh-TW" dirty="0">
-                <a:solidFill>
-                  <a:srgbClr val="000000"/>
-                </a:solidFill>
-                <a:latin typeface="Arial Unicode MS"/>
-                <a:ea typeface="Arial Unicode MS"/>
-                <a:cs typeface="Arial Unicode MS"/>
-              </a:rPr>
-              <a:t>左上角是三顆感測器的狀態，跟第一節那張失效對照表「大雨、濃霧」那一列一樣：相機從打勾變三角形，再變叉叉；光達變三角形；雷達一直打勾。這時候車子已經走出它的 ODD 了。
+              <a:rPr sz="1100" b="1" lang="zh-TW" dirty="0">
+                <a:solidFill>
+                  <a:srgbClr val="000000"/>
+                </a:solidFill>
+                <a:latin typeface="Arial Unicode MS"/>
+                <a:ea typeface="Arial Unicode MS"/>
+                <a:cs typeface="Arial Unicode MS"/>
+              </a:rPr>
+              <a:t>預測</a:t>
+            </a:r>
+            <a:r>
+              <a:rPr sz="1100" lang="zh-TW" dirty="0">
+                <a:solidFill>
+                  <a:srgbClr val="000000"/>
+                </a:solidFill>
+                <a:latin typeface="Arial Unicode MS"/>
+                <a:ea typeface="Arial Unicode MS"/>
+                <a:cs typeface="Arial Unicode MS"/>
+              </a:rPr>
+              <a:t>：IMU 加上輪速，從上一秒的位置往前推，推出來是一百二十點零公尺，這種推算很穩，誤差大約正負一公尺。
 </a:t>
             </a:r>
           </a:p>
@@ -911,85 +923,30 @@
                 <a:spcPts val="0"/>
               </a:spcBef>
               <a:spcAft>
-                <a:spcPts val="233"/>
+                <a:spcPts val="183"/>
               </a:spcAft>
             </a:pPr>
             <a:r>
-              <a:rPr sz="1400" lang="zh-TW" dirty="0">
-                <a:solidFill>
-                  <a:srgbClr val="000000"/>
-                </a:solidFill>
-                <a:latin typeface="Arial Unicode MS"/>
-                <a:ea typeface="Arial Unicode MS"/>
-                <a:cs typeface="Arial Unicode MS"/>
-              </a:rPr>
-              <a:t>怎麼退，跟第一週的 SAE 等級有關。</a:t>
-            </a:r>
-            <a:r>
-              <a:rPr sz="1400" b="1" lang="zh-TW" dirty="0">
-                <a:solidFill>
-                  <a:srgbClr val="000000"/>
-                </a:solidFill>
-                <a:latin typeface="Arial Unicode MS"/>
-                <a:ea typeface="Arial Unicode MS"/>
-                <a:cs typeface="Arial Unicode MS"/>
-              </a:rPr>
-              <a:t>L2</a:t>
-            </a:r>
-            <a:r>
-              <a:rPr sz="1400" lang="zh-TW" dirty="0">
-                <a:solidFill>
-                  <a:srgbClr val="000000"/>
-                </a:solidFill>
-                <a:latin typeface="Arial Unicode MS"/>
-                <a:ea typeface="Arial Unicode MS"/>
-                <a:cs typeface="Arial Unicode MS"/>
-              </a:rPr>
-              <a:t>，就是動圖的第二段：駕駛隨時要準備接手，所以車子會跳警告、發出聲音，請駕駛把方向盤拿回去。</a:t>
-            </a:r>
-            <a:r>
-              <a:rPr sz="1400" b="1" lang="zh-TW" dirty="0">
-                <a:solidFill>
-                  <a:srgbClr val="000000"/>
-                </a:solidFill>
-                <a:latin typeface="Arial Unicode MS"/>
-                <a:ea typeface="Arial Unicode MS"/>
-                <a:cs typeface="Arial Unicode MS"/>
-              </a:rPr>
-              <a:t>L4</a:t>
-            </a:r>
-            <a:r>
-              <a:rPr sz="1400" lang="zh-TW" dirty="0">
-                <a:solidFill>
-                  <a:srgbClr val="000000"/>
-                </a:solidFill>
-                <a:latin typeface="Arial Unicode MS"/>
-                <a:ea typeface="Arial Unicode MS"/>
-                <a:cs typeface="Arial Unicode MS"/>
-              </a:rPr>
-              <a:t>，就是第三段：車上可能沒有駕駛，它要自己把車子帶到一個</a:t>
-            </a:r>
-            <a:r>
-              <a:rPr sz="1400" b="1" lang="zh-TW" dirty="0">
-                <a:solidFill>
-                  <a:srgbClr val="000000"/>
-                </a:solidFill>
-                <a:latin typeface="Arial Unicode MS"/>
-                <a:ea typeface="Arial Unicode MS"/>
-                <a:cs typeface="Arial Unicode MS"/>
-              </a:rPr>
-              <a:t>最小風險狀態</a:t>
-            </a:r>
-            <a:r>
-              <a:rPr sz="1400" lang="zh-TW" dirty="0">
-                <a:solidFill>
-                  <a:srgbClr val="000000"/>
-                </a:solidFill>
-                <a:latin typeface="Arial Unicode MS"/>
-                <a:ea typeface="Arial Unicode MS"/>
-                <a:cs typeface="Arial Unicode MS"/>
-              </a:rPr>
-              <a:t>，最常見的就是減速、打雙黃燈、切到右邊的路肩停下來。台灣、越南都是靠右行駛，所以是靠右邊停。就像計程車司機遇到看不清楚的暴雨，會先靠邊停一下，等雨小一點再走。
+              <a:rPr sz="1100" b="1" lang="zh-TW" dirty="0">
+                <a:solidFill>
+                  <a:srgbClr val="000000"/>
+                </a:solidFill>
+                <a:latin typeface="Arial Unicode MS"/>
+                <a:ea typeface="Arial Unicode MS"/>
+                <a:cs typeface="Arial Unicode MS"/>
+              </a:rPr>
+              <a:t>量到</a:t>
+            </a:r>
+            <a:r>
+              <a:rPr sz="1100" lang="zh-TW" dirty="0">
+                <a:solidFill>
+                  <a:srgbClr val="000000"/>
+                </a:solidFill>
+                <a:latin typeface="Arial Unicode MS"/>
+                <a:ea typeface="Arial Unicode MS"/>
+                <a:cs typeface="Arial Unicode MS"/>
+              </a:rPr>
+              <a:t>：GPS 說，你在一百一十八點零公尺。可是 GPS 的誤差比較大，正負三公尺。
 </a:t>
             </a:r>
           </a:p>
@@ -999,85 +956,41 @@
                 <a:spcPts val="0"/>
               </a:spcBef>
               <a:spcAft>
-                <a:spcPts val="233"/>
+                <a:spcPts val="183"/>
               </a:spcAft>
             </a:pPr>
             <a:r>
-              <a:rPr sz="1400" lang="zh-TW" dirty="0">
-                <a:solidFill>
-                  <a:srgbClr val="000000"/>
-                </a:solidFill>
-                <a:latin typeface="Arial Unicode MS"/>
-                <a:ea typeface="Arial Unicode MS"/>
-                <a:cs typeface="Arial Unicode MS"/>
-              </a:rPr>
-              <a:t>什麼時候該降級？回到第一週的 </a:t>
-            </a:r>
-            <a:r>
-              <a:rPr sz="1400" b="1" lang="zh-TW" dirty="0">
-                <a:solidFill>
-                  <a:srgbClr val="000000"/>
-                </a:solidFill>
-                <a:latin typeface="Arial Unicode MS"/>
-                <a:ea typeface="Arial Unicode MS"/>
-                <a:cs typeface="Arial Unicode MS"/>
-              </a:rPr>
-              <a:t>ODD</a:t>
-            </a:r>
-            <a:r>
-              <a:rPr sz="1400" lang="zh-TW" dirty="0">
-                <a:solidFill>
-                  <a:srgbClr val="000000"/>
-                </a:solidFill>
-                <a:latin typeface="Arial Unicode MS"/>
-                <a:ea typeface="Arial Unicode MS"/>
-                <a:cs typeface="Arial Unicode MS"/>
-              </a:rPr>
-              <a:t>，運行設計範圍，那六格：道路類型、速度域、交通狀況、天候與光照、地理範圍、人的角色。其中「</a:t>
-            </a:r>
-            <a:r>
-              <a:rPr sz="1400" b="1" lang="zh-TW" dirty="0">
-                <a:solidFill>
-                  <a:srgbClr val="000000"/>
-                </a:solidFill>
-                <a:latin typeface="Arial Unicode MS"/>
-                <a:ea typeface="Arial Unicode MS"/>
-                <a:cs typeface="Arial Unicode MS"/>
-              </a:rPr>
-              <a:t>天候與光照</a:t>
-            </a:r>
-            <a:r>
-              <a:rPr sz="1400" lang="zh-TW" dirty="0">
-                <a:solidFill>
-                  <a:srgbClr val="000000"/>
-                </a:solidFill>
-                <a:latin typeface="Arial Unicode MS"/>
-                <a:ea typeface="Arial Unicode MS"/>
-                <a:cs typeface="Arial Unicode MS"/>
-              </a:rPr>
-              <a:t>」那一格，其實就是上一節那張失效對照表：雨大到相機打叉、光達三角形，就是走出了 ODD。「</a:t>
-            </a:r>
-            <a:r>
-              <a:rPr sz="1400" b="1" lang="zh-TW" dirty="0">
-                <a:solidFill>
-                  <a:srgbClr val="000000"/>
-                </a:solidFill>
-                <a:latin typeface="Arial Unicode MS"/>
-                <a:ea typeface="Arial Unicode MS"/>
-                <a:cs typeface="Arial Unicode MS"/>
-              </a:rPr>
-              <a:t>地理範圍</a:t>
-            </a:r>
-            <a:r>
-              <a:rPr sz="1400" lang="zh-TW" dirty="0">
-                <a:solidFill>
-                  <a:srgbClr val="000000"/>
-                </a:solidFill>
-                <a:latin typeface="Arial Unicode MS"/>
-                <a:ea typeface="Arial Unicode MS"/>
-                <a:cs typeface="Arial Unicode MS"/>
-              </a:rPr>
-              <a:t>」那一格也一樣：開進一條地圖上沒有的路、開進收不到衛星的地方。
+              <a:rPr sz="1100" lang="zh-TW" dirty="0">
+                <a:solidFill>
+                  <a:srgbClr val="000000"/>
+                </a:solidFill>
+                <a:latin typeface="Arial Unicode MS"/>
+                <a:ea typeface="Arial Unicode MS"/>
+                <a:cs typeface="Arial Unicode MS"/>
+              </a:rPr>
+              <a:t>兩個差了兩公尺，要相信誰？都相信一點，但不是一半一半。誤差差三倍，信任要差</a:t>
+            </a:r>
+            <a:r>
+              <a:rPr sz="1100" b="1" lang="zh-TW" dirty="0">
+                <a:solidFill>
+                  <a:srgbClr val="000000"/>
+                </a:solidFill>
+                <a:latin typeface="Arial Unicode MS"/>
+                <a:ea typeface="Arial Unicode MS"/>
+                <a:cs typeface="Arial Unicode MS"/>
+              </a:rPr>
+              <a:t>九倍</a:t>
+            </a:r>
+            <a:r>
+              <a:rPr sz="1100" lang="zh-TW" dirty="0">
+                <a:solidFill>
+                  <a:srgbClr val="000000"/>
+                </a:solidFill>
+                <a:latin typeface="Arial Unicode MS"/>
+                <a:ea typeface="Arial Unicode MS"/>
+                <a:cs typeface="Arial Unicode MS"/>
+              </a:rPr>
+              <a:t>，也就是三乘三。所以 IMU 拿九份，GPS 拿一份：
 </a:t>
             </a:r>
           </a:p>
@@ -1087,19 +1000,206 @@
                 <a:spcPts val="0"/>
               </a:spcBef>
               <a:spcAft>
-                <a:spcPts val="233"/>
+                <a:spcPts val="183"/>
               </a:spcAft>
             </a:pPr>
             <a:r>
-              <a:rPr sz="1400" lang="zh-TW" dirty="0">
-                <a:solidFill>
-                  <a:srgbClr val="000000"/>
-                </a:solidFill>
-                <a:latin typeface="Arial Unicode MS"/>
-                <a:ea typeface="Arial Unicode MS"/>
-                <a:cs typeface="Arial Unicode MS"/>
-              </a:rPr>
-              <a:t>所以，失效條件、融合、ODD，是同一件事的三面：知道它什麼時候壞，就知道 ODD 的邊界畫在哪裡；邊界一到，就降級。</a:t>
+              <a:rPr sz="1100" lang="zh-TW" dirty="0">
+                <a:solidFill>
+                  <a:srgbClr val="000000"/>
+                </a:solidFill>
+                <a:latin typeface="Arial Unicode MS"/>
+                <a:ea typeface="Arial Unicode MS"/>
+                <a:cs typeface="Arial Unicode MS"/>
+              </a:rPr>
+              <a:t>九乘一百二十，加一乘一百一十八，除以十，等於</a:t>
+            </a:r>
+            <a:r>
+              <a:rPr sz="1100" b="1" lang="zh-TW" dirty="0">
+                <a:solidFill>
+                  <a:srgbClr val="000000"/>
+                </a:solidFill>
+                <a:latin typeface="Arial Unicode MS"/>
+                <a:ea typeface="Arial Unicode MS"/>
+                <a:cs typeface="Arial Unicode MS"/>
+              </a:rPr>
+              <a:t>一百一十九點八公尺</a:t>
+            </a:r>
+            <a:r>
+              <a:rPr sz="1100" lang="zh-TW" dirty="0">
+                <a:solidFill>
+                  <a:srgbClr val="000000"/>
+                </a:solidFill>
+                <a:latin typeface="Arial Unicode MS"/>
+                <a:ea typeface="Arial Unicode MS"/>
+                <a:cs typeface="Arial Unicode MS"/>
+              </a:rPr>
+              <a:t>。結果很靠近 IMU，只被 GPS 拉了一點點。
+</a:t>
+            </a:r>
+          </a:p>
+          <a:p>
+            <a:pPr algn="l">
+              <a:spcBef>
+                <a:spcPts val="0"/>
+              </a:spcBef>
+              <a:spcAft>
+                <a:spcPts val="183"/>
+              </a:spcAft>
+            </a:pPr>
+            <a:r>
+              <a:rPr sz="1100" lang="zh-TW" dirty="0">
+                <a:solidFill>
+                  <a:srgbClr val="000000"/>
+                </a:solidFill>
+                <a:latin typeface="Arial Unicode MS"/>
+                <a:ea typeface="Arial Unicode MS"/>
+                <a:cs typeface="Arial Unicode MS"/>
+              </a:rPr>
+              <a:t>動圖上看得出來：IMU 那條曲線又窄又高，GPS 那條又寬又矮，曲線愈寬，就是愈不確定。最後出現的黃色那條，就是合起來的結果，落在一百一十九點八，而且</a:t>
+            </a:r>
+            <a:r>
+              <a:rPr sz="1100" b="1" lang="zh-TW" dirty="0">
+                <a:solidFill>
+                  <a:srgbClr val="000000"/>
+                </a:solidFill>
+                <a:latin typeface="Arial Unicode MS"/>
+                <a:ea typeface="Arial Unicode MS"/>
+                <a:cs typeface="Arial Unicode MS"/>
+              </a:rPr>
+              <a:t>比兩條都窄一點</a:t>
+            </a:r>
+            <a:r>
+              <a:rPr sz="1100" lang="zh-TW" dirty="0">
+                <a:solidFill>
+                  <a:srgbClr val="000000"/>
+                </a:solidFill>
+                <a:latin typeface="Arial Unicode MS"/>
+                <a:ea typeface="Arial Unicode MS"/>
+                <a:cs typeface="Arial Unicode MS"/>
+              </a:rPr>
+              <a:t>：兩個資訊合起來，比任何一個單獨的都更確定。
+</a:t>
+            </a:r>
+          </a:p>
+          <a:p>
+            <a:pPr algn="l">
+              <a:spcBef>
+                <a:spcPts val="0"/>
+              </a:spcBef>
+              <a:spcAft>
+                <a:spcPts val="183"/>
+              </a:spcAft>
+            </a:pPr>
+            <a:r>
+              <a:rPr sz="1100" lang="zh-TW" dirty="0">
+                <a:solidFill>
+                  <a:srgbClr val="000000"/>
+                </a:solidFill>
+                <a:latin typeface="Arial Unicode MS"/>
+                <a:ea typeface="Arial Unicode MS"/>
+                <a:cs typeface="Arial Unicode MS"/>
+              </a:rPr>
+              <a:t>就像你有兩支錶，一支很準、一支常常快慢。你會兩支都看，但比較聽準的那支。
+</a:t>
+            </a:r>
+          </a:p>
+          <a:p>
+            <a:pPr algn="l">
+              <a:spcBef>
+                <a:spcPts val="0"/>
+              </a:spcBef>
+              <a:spcAft>
+                <a:spcPts val="183"/>
+              </a:spcAft>
+            </a:pPr>
+            <a:r>
+              <a:rPr sz="1100" lang="zh-TW" dirty="0">
+                <a:solidFill>
+                  <a:srgbClr val="000000"/>
+                </a:solidFill>
+                <a:latin typeface="Arial Unicode MS"/>
+                <a:ea typeface="Arial Unicode MS"/>
+                <a:cs typeface="Arial Unicode MS"/>
+              </a:rPr>
+              <a:t>然後每一秒重複一次：先預測，再用量到的修正。
+</a:t>
+            </a:r>
+          </a:p>
+          <a:p>
+            <a:pPr algn="l">
+              <a:spcBef>
+                <a:spcPts val="0"/>
+              </a:spcBef>
+              <a:spcAft>
+                <a:spcPts val="183"/>
+              </a:spcAft>
+            </a:pPr>
+            <a:r>
+              <a:rPr sz="1100" b="1" lang="zh-TW" dirty="0">
+                <a:solidFill>
+                  <a:srgbClr val="000000"/>
+                </a:solidFill>
+                <a:latin typeface="Arial Unicode MS"/>
+                <a:ea typeface="Arial Unicode MS"/>
+                <a:cs typeface="Arial Unicode MS"/>
+              </a:rPr>
+              <a:t>進隧道會怎樣？</a:t>
+            </a:r>
+            <a:r>
+              <a:rPr sz="1100" lang="zh-TW" dirty="0">
+                <a:solidFill>
+                  <a:srgbClr val="000000"/>
+                </a:solidFill>
+                <a:latin typeface="Arial Unicode MS"/>
+                <a:ea typeface="Arial Unicode MS"/>
+                <a:cs typeface="Arial Unicode MS"/>
+              </a:rPr>
+              <a:t>動圖的第二段：GPS 沒了，只剩預測。每一秒都在推算，誤差一秒一秒累積，誤差圈愈來愈大，這就是上一節的 IMU 漂移。</a:t>
+            </a:r>
+            <a:r>
+              <a:rPr sz="1100" b="1" lang="zh-TW" dirty="0">
+                <a:solidFill>
+                  <a:srgbClr val="000000"/>
+                </a:solidFill>
+                <a:latin typeface="Arial Unicode MS"/>
+                <a:ea typeface="Arial Unicode MS"/>
+                <a:cs typeface="Arial Unicode MS"/>
+              </a:rPr>
+              <a:t>出了隧道</a:t>
+            </a:r>
+            <a:r>
+              <a:rPr sz="1100" lang="zh-TW" dirty="0">
+                <a:solidFill>
+                  <a:srgbClr val="000000"/>
+                </a:solidFill>
+                <a:latin typeface="Arial Unicode MS"/>
+                <a:ea typeface="Arial Unicode MS"/>
+                <a:cs typeface="Arial Unicode MS"/>
+              </a:rPr>
+              <a:t>，GPS 一回來，誤差圈一下就被拉回來。慢慢壞的配突然壞的，上一節說它們個性相反、補得起來，就是這個意思。
+</a:t>
+            </a:r>
+          </a:p>
+          <a:p>
+            <a:pPr algn="l">
+              <a:spcBef>
+                <a:spcPts val="0"/>
+              </a:spcBef>
+              <a:spcAft>
+                <a:spcPts val="183"/>
+              </a:spcAft>
+            </a:pPr>
+            <a:r>
+              <a:rPr sz="1100" lang="zh-TW" dirty="0">
+                <a:solidFill>
+                  <a:srgbClr val="000000"/>
+                </a:solidFill>
+                <a:latin typeface="Arial Unicode MS"/>
+                <a:ea typeface="Arial Unicode MS"/>
+                <a:cs typeface="Arial Unicode MS"/>
+              </a:rPr>
+              <a:t>nuScenes 的車也是這樣定位的：官網寫，它的定位用 IMU、GPS，再加上高精地圖一起算；車上那顆 IMU＋GPS 模組，規格寫的位置精度是 20 公釐。</a:t>
             </a:r>
           </a:p>
         </p:txBody>
@@ -1231,7 +1331,7 @@
                 <a:ea typeface="Arial Unicode MS"/>
                 <a:cs typeface="Arial Unicode MS"/>
               </a:rPr>
-              <a:t>把整節收成五組常見的搭檔，讓大家知道每一組誰負責哪一塊。
+              <a:t>讓大家知道，壞到合起來也不夠時，車子要主動降級；L2 交還給人，L4 自己靠邊停。
 </a:t>
             </a:r>
           </a:p>
@@ -1253,7 +1353,7 @@
                 <a:ea typeface="Arial Unicode MS"/>
                 <a:cs typeface="Arial Unicode MS"/>
               </a:rPr>
-              <a:t>最後把今天講的收成五組最常見的搭檔。每一組都問三件事：誰負責哪一塊、什麼時候最需要、我們在哪裡看過。
+              <a:t>最後，萬一壞到合起來也不夠呢？例如暴雨，相機糊了，光達也變短了，只剩雷達。
 </a:t>
             </a:r>
           </a:p>
@@ -1267,6 +1367,17 @@
               </a:spcAft>
             </a:pPr>
             <a:r>
+              <a:rPr sz="1400" lang="zh-TW" dirty="0">
+                <a:solidFill>
+                  <a:srgbClr val="000000"/>
+                </a:solidFill>
+                <a:latin typeface="Arial Unicode MS"/>
+                <a:ea typeface="Arial Unicode MS"/>
+                <a:cs typeface="Arial Unicode MS"/>
+              </a:rPr>
+              <a:t>答案是</a:t>
+            </a:r>
+            <a:r>
               <a:rPr sz="1400" b="1" lang="zh-TW" dirty="0">
                 <a:solidFill>
                   <a:srgbClr val="000000"/>
@@ -1275,7 +1386,7 @@
                 <a:ea typeface="Arial Unicode MS"/>
                 <a:cs typeface="Arial Unicode MS"/>
               </a:rPr>
-              <a:t>第一組，相機加雷達。</a:t>
+              <a:t>降級</a:t>
             </a:r>
             <a:r>
               <a:rPr sz="1400" lang="zh-TW" dirty="0">
@@ -1286,7 +1397,7 @@
                 <a:ea typeface="Arial Unicode MS"/>
                 <a:cs typeface="Arial Unicode MS"/>
               </a:rPr>
-              <a:t>就像一個人眼睛好、一個人耳朵好：相機看得出那是一台機車，雷達量得出它三十公尺、正以時速二十靠近。自動緊急煞車、跟車，最常用這一組。本節第七張的對應講的就是它；下一節的任務五，各位要自己拼一次。
+              <a:t>。車子不硬撐，而是主動退一步。
 </a:t>
             </a:r>
           </a:p>
@@ -1300,6 +1411,17 @@
               </a:spcAft>
             </a:pPr>
             <a:r>
+              <a:rPr sz="1400" lang="zh-TW" dirty="0">
+                <a:solidFill>
+                  <a:srgbClr val="000000"/>
+                </a:solidFill>
+                <a:latin typeface="Arial Unicode MS"/>
+                <a:ea typeface="Arial Unicode MS"/>
+                <a:cs typeface="Arial Unicode MS"/>
+              </a:rPr>
+              <a:t>看左邊的動圖，它會播三段。</a:t>
+            </a:r>
+            <a:r>
               <a:rPr sz="1400" b="1" lang="zh-TW" dirty="0">
                 <a:solidFill>
                   <a:srgbClr val="000000"/>
@@ -1308,7 +1430,7 @@
                 <a:ea typeface="Arial Unicode MS"/>
                 <a:cs typeface="Arial Unicode MS"/>
               </a:rPr>
-              <a:t>第二組，相機加光達。</a:t>
+              <a:t>第一段，雨愈下愈大。</a:t>
             </a:r>
             <a:r>
               <a:rPr sz="1400" lang="zh-TW" dirty="0">
@@ -1319,7 +1441,7 @@
                 <a:ea typeface="Arial Unicode MS"/>
                 <a:cs typeface="Arial Unicode MS"/>
               </a:rPr>
-              <a:t>把光達的點投到照片上，照片上每一個點都知道自己多遠。相機認得出，光達量得準。本節第四張標定那兩張圖，做的就是這件事。
+              <a:t>左上角是三顆感測器的狀態，跟第一節那張失效對照表「大雨、濃霧」那一列一樣：相機從打勾變三角形，再變叉叉；光達變三角形；雷達一直打勾。這時候車子已經走出它的 ODD 了。
 </a:t>
             </a:r>
           </a:p>
@@ -1333,6 +1455,17 @@
               </a:spcAft>
             </a:pPr>
             <a:r>
+              <a:rPr sz="1400" lang="zh-TW" dirty="0">
+                <a:solidFill>
+                  <a:srgbClr val="000000"/>
+                </a:solidFill>
+                <a:latin typeface="Arial Unicode MS"/>
+                <a:ea typeface="Arial Unicode MS"/>
+                <a:cs typeface="Arial Unicode MS"/>
+              </a:rPr>
+              <a:t>怎麼退，跟第一週的 SAE 等級有關。</a:t>
+            </a:r>
+            <a:r>
               <a:rPr sz="1400" b="1" lang="zh-TW" dirty="0">
                 <a:solidFill>
                   <a:srgbClr val="000000"/>
@@ -1341,7 +1474,7 @@
                 <a:ea typeface="Arial Unicode MS"/>
                 <a:cs typeface="Arial Unicode MS"/>
               </a:rPr>
-              <a:t>第三組，光達加雷達。</a:t>
+              <a:t>L2</a:t>
             </a:r>
             <a:r>
               <a:rPr sz="1400" lang="zh-TW" dirty="0">
@@ -1352,7 +1485,51 @@
                 <a:ea typeface="Arial Unicode MS"/>
                 <a:cs typeface="Arial Unicode MS"/>
               </a:rPr>
-              <a:t>下雨起霧，光達看的距離變短，雷達幾乎不受影響，先頂上；反過來，雷達量不出高度，分不出頭頂的路牌，光達的點有高有低，補得上。第一節第六張講雨霧，第一節第八張看過雷達的點全部在同一個高度。
+              <a:t>，就是動圖的第二段：駕駛隨時要準備接手，所以車子會跳警告、發出聲音，請駕駛把方向盤拿回去。</a:t>
+            </a:r>
+            <a:r>
+              <a:rPr sz="1400" b="1" lang="zh-TW" dirty="0">
+                <a:solidFill>
+                  <a:srgbClr val="000000"/>
+                </a:solidFill>
+                <a:latin typeface="Arial Unicode MS"/>
+                <a:ea typeface="Arial Unicode MS"/>
+                <a:cs typeface="Arial Unicode MS"/>
+              </a:rPr>
+              <a:t>L4</a:t>
+            </a:r>
+            <a:r>
+              <a:rPr sz="1400" lang="zh-TW" dirty="0">
+                <a:solidFill>
+                  <a:srgbClr val="000000"/>
+                </a:solidFill>
+                <a:latin typeface="Arial Unicode MS"/>
+                <a:ea typeface="Arial Unicode MS"/>
+                <a:cs typeface="Arial Unicode MS"/>
+              </a:rPr>
+              <a:t>，就是第三段：車上可能沒有駕駛，它要自己把車子帶到一個</a:t>
+            </a:r>
+            <a:r>
+              <a:rPr sz="1400" b="1" lang="zh-TW" dirty="0">
+                <a:solidFill>
+                  <a:srgbClr val="000000"/>
+                </a:solidFill>
+                <a:latin typeface="Arial Unicode MS"/>
+                <a:ea typeface="Arial Unicode MS"/>
+                <a:cs typeface="Arial Unicode MS"/>
+              </a:rPr>
+              <a:t>最小風險狀態</a:t>
+            </a:r>
+            <a:r>
+              <a:rPr sz="1400" lang="zh-TW" dirty="0">
+                <a:solidFill>
+                  <a:srgbClr val="000000"/>
+                </a:solidFill>
+                <a:latin typeface="Arial Unicode MS"/>
+                <a:ea typeface="Arial Unicode MS"/>
+                <a:cs typeface="Arial Unicode MS"/>
+              </a:rPr>
+              <a:t>，最常見的就是減速、打雙黃燈、切到右邊的路肩停下來。台灣、越南都是靠右行駛，所以是靠右邊停。就像計程車司機遇到看不清楚的暴雨，會先靠邊停一下，等雨小一點再走。
 </a:t>
             </a:r>
           </a:p>
@@ -1366,6 +1543,17 @@
               </a:spcAft>
             </a:pPr>
             <a:r>
+              <a:rPr sz="1400" lang="zh-TW" dirty="0">
+                <a:solidFill>
+                  <a:srgbClr val="000000"/>
+                </a:solidFill>
+                <a:latin typeface="Arial Unicode MS"/>
+                <a:ea typeface="Arial Unicode MS"/>
+                <a:cs typeface="Arial Unicode MS"/>
+              </a:rPr>
+              <a:t>什麼時候該降級？回到第一週的 </a:t>
+            </a:r>
+            <a:r>
               <a:rPr sz="1400" b="1" lang="zh-TW" dirty="0">
                 <a:solidFill>
                   <a:srgbClr val="000000"/>
@@ -1374,7 +1562,7 @@
                 <a:ea typeface="Arial Unicode MS"/>
                 <a:cs typeface="Arial Unicode MS"/>
               </a:rPr>
-              <a:t>第四組，衛星定位加 IMU 加地圖。</a:t>
+              <a:t>ODD</a:t>
             </a:r>
             <a:r>
               <a:rPr sz="1400" lang="zh-TW" dirty="0">
@@ -1385,7 +1573,51 @@
                 <a:ea typeface="Arial Unicode MS"/>
                 <a:cs typeface="Arial Unicode MS"/>
               </a:rPr>
-              <a:t>就像閉著眼睛走路，每走一段睜眼看一下：衛星是睜眼，IMU 是閉眼數步。進隧道，衛星斷了，IMU 先撐；出隧道，衛星一回來，馬上拉回正確的位置。本節第九張的九比一，就是在算這件事。
+              <a:t>，運行設計範圍，那六格：道路類型、速度域、交通狀況、天候與光照、地理範圍、人的角色。其中「</a:t>
+            </a:r>
+            <a:r>
+              <a:rPr sz="1400" b="1" lang="zh-TW" dirty="0">
+                <a:solidFill>
+                  <a:srgbClr val="000000"/>
+                </a:solidFill>
+                <a:latin typeface="Arial Unicode MS"/>
+                <a:ea typeface="Arial Unicode MS"/>
+                <a:cs typeface="Arial Unicode MS"/>
+              </a:rPr>
+              <a:t>天候與光照</a:t>
+            </a:r>
+            <a:r>
+              <a:rPr sz="1400" lang="zh-TW" dirty="0">
+                <a:solidFill>
+                  <a:srgbClr val="000000"/>
+                </a:solidFill>
+                <a:latin typeface="Arial Unicode MS"/>
+                <a:ea typeface="Arial Unicode MS"/>
+                <a:cs typeface="Arial Unicode MS"/>
+              </a:rPr>
+              <a:t>」那一格，其實就是上一節那張失效對照表：雨大到相機打叉、光達三角形，就是走出了 ODD。「</a:t>
+            </a:r>
+            <a:r>
+              <a:rPr sz="1400" b="1" lang="zh-TW" dirty="0">
+                <a:solidFill>
+                  <a:srgbClr val="000000"/>
+                </a:solidFill>
+                <a:latin typeface="Arial Unicode MS"/>
+                <a:ea typeface="Arial Unicode MS"/>
+                <a:cs typeface="Arial Unicode MS"/>
+              </a:rPr>
+              <a:t>地理範圍</a:t>
+            </a:r>
+            <a:r>
+              <a:rPr sz="1400" lang="zh-TW" dirty="0">
+                <a:solidFill>
+                  <a:srgbClr val="000000"/>
+                </a:solidFill>
+                <a:latin typeface="Arial Unicode MS"/>
+                <a:ea typeface="Arial Unicode MS"/>
+                <a:cs typeface="Arial Unicode MS"/>
+              </a:rPr>
+              <a:t>」那一格也一樣：開進一條地圖上沒有的路、開進收不到衛星的地方。
 </a:t>
             </a:r>
           </a:p>
@@ -1399,17 +1631,6 @@
               </a:spcAft>
             </a:pPr>
             <a:r>
-              <a:rPr sz="1400" b="1" lang="zh-TW" dirty="0">
-                <a:solidFill>
-                  <a:srgbClr val="000000"/>
-                </a:solidFill>
-                <a:latin typeface="Arial Unicode MS"/>
-                <a:ea typeface="Arial Unicode MS"/>
-                <a:cs typeface="Arial Unicode MS"/>
-              </a:rPr>
-              <a:t>第五組，超音波加環景相機。</a:t>
-            </a:r>
-            <a:r>
               <a:rPr sz="1400" lang="zh-TW" dirty="0">
                 <a:solidFill>
                   <a:srgbClr val="000000"/>
@@ -1418,51 +1639,7 @@
                 <a:ea typeface="Arial Unicode MS"/>
                 <a:cs typeface="Arial Unicode MS"/>
               </a:rPr>
-              <a:t>停車的時候，超音波量保險桿前面幾十公分的距離，嗶嗶叫；環景相機讓你看清楚那是一根柱子還是一個小孩。第六週講超音波的時候看過。
-</a:t>
-            </a:r>
-          </a:p>
-          <a:p>
-            <a:pPr algn="l">
-              <a:spcBef>
-                <a:spcPts val="0"/>
-              </a:spcBef>
-              <a:spcAft>
-                <a:spcPts val="233"/>
-              </a:spcAft>
-            </a:pPr>
-            <a:r>
-              <a:rPr sz="1400" lang="zh-TW" dirty="0">
-                <a:solidFill>
-                  <a:srgbClr val="000000"/>
-                </a:solidFill>
-                <a:latin typeface="Arial Unicode MS"/>
-                <a:ea typeface="Arial Unicode MS"/>
-                <a:cs typeface="Arial Unicode MS"/>
-              </a:rPr>
-              <a:t>五組看下來，模式只有兩種：</a:t>
-            </a:r>
-            <a:r>
-              <a:rPr sz="1400" b="1" lang="zh-TW" dirty="0">
-                <a:solidFill>
-                  <a:srgbClr val="000000"/>
-                </a:solidFill>
-                <a:latin typeface="Arial Unicode MS"/>
-                <a:ea typeface="Arial Unicode MS"/>
-                <a:cs typeface="Arial Unicode MS"/>
-              </a:rPr>
-              <a:t>一個管「是什麼」，一個管「多遠、多快」；或是一個壞了，另一個先頂上。</a:t>
-            </a:r>
-            <a:r>
-              <a:rPr sz="1400" lang="zh-TW" dirty="0">
-                <a:solidFill>
-                  <a:srgbClr val="000000"/>
-                </a:solidFill>
-                <a:latin typeface="Arial Unicode MS"/>
-                <a:ea typeface="Arial Unicode MS"/>
-                <a:cs typeface="Arial Unicode MS"/>
-              </a:rPr>
-              <a:t>這就是本節第三張講的互補和備援。</a:t>
+              <a:t>所以，失效條件、融合、ODD，是同一件事的三面：知道它什麼時候壞，就知道 ODD 的邊界畫在哪裡；邊界一到，就降級。</a:t>
             </a:r>
           </a:p>
         </p:txBody>
@@ -1571,11 +1748,11 @@
                 <a:spcPts val="0"/>
               </a:spcBef>
               <a:spcAft>
-                <a:spcPts val="142"/>
+                <a:spcPts val="233"/>
               </a:spcAft>
             </a:pPr>
             <a:r>
-              <a:rPr sz="850" b="1" lang="zh-TW" dirty="0">
+              <a:rPr sz="1400" b="1" lang="zh-TW" dirty="0">
                 <a:solidFill>
                   <a:srgbClr val="000000"/>
                 </a:solidFill>
@@ -1586,15 +1763,15 @@
               <a:t>這一張的目的：</a:t>
             </a:r>
             <a:r>
-              <a:rPr sz="850" lang="zh-TW" dirty="0">
-                <a:solidFill>
-                  <a:srgbClr val="000000"/>
-                </a:solidFill>
-                <a:latin typeface="Arial Unicode MS"/>
-                <a:ea typeface="Arial Unicode MS"/>
-                <a:cs typeface="Arial Unicode MS"/>
-              </a:rPr>
-              <a:t>把這一節收成三句話，並預告下一節要自己動手。
+              <a:rPr sz="1400" lang="zh-TW" dirty="0">
+                <a:solidFill>
+                  <a:srgbClr val="000000"/>
+                </a:solidFill>
+                <a:latin typeface="Arial Unicode MS"/>
+                <a:ea typeface="Arial Unicode MS"/>
+                <a:cs typeface="Arial Unicode MS"/>
+              </a:rPr>
+              <a:t>把整節收成五組常見的搭檔，讓大家知道每一組誰負責哪一塊。
 </a:t>
             </a:r>
           </a:p>
@@ -1604,19 +1781,19 @@
                 <a:spcPts val="0"/>
               </a:spcBef>
               <a:spcAft>
-                <a:spcPts val="142"/>
+                <a:spcPts val="233"/>
               </a:spcAft>
             </a:pPr>
             <a:r>
-              <a:rPr sz="850" lang="zh-TW" dirty="0">
-                <a:solidFill>
-                  <a:srgbClr val="000000"/>
-                </a:solidFill>
-                <a:latin typeface="Arial Unicode MS"/>
-                <a:ea typeface="Arial Unicode MS"/>
-                <a:cs typeface="Arial Unicode MS"/>
-              </a:rPr>
-              <a:t>這一節講了很多，收成三句話帶走。
+              <a:rPr sz="1400" lang="zh-TW" dirty="0">
+                <a:solidFill>
+                  <a:srgbClr val="000000"/>
+                </a:solidFill>
+                <a:latin typeface="Arial Unicode MS"/>
+                <a:ea typeface="Arial Unicode MS"/>
+                <a:cs typeface="Arial Unicode MS"/>
+              </a:rPr>
+              <a:t>最後把今天講的收成五組最常見的搭檔。每一組都問三件事：誰負責哪一塊、什麼時候最需要、我們在哪裡看過。
 </a:t>
             </a:r>
           </a:p>
@@ -1626,30 +1803,30 @@
                 <a:spcPts val="0"/>
               </a:spcBef>
               <a:spcAft>
-                <a:spcPts val="142"/>
+                <a:spcPts val="233"/>
               </a:spcAft>
             </a:pPr>
             <a:r>
-              <a:rPr sz="850" b="1" lang="zh-TW" dirty="0">
-                <a:solidFill>
-                  <a:srgbClr val="000000"/>
-                </a:solidFill>
-                <a:latin typeface="Arial Unicode MS"/>
-                <a:ea typeface="Arial Unicode MS"/>
-                <a:cs typeface="Arial Unicode MS"/>
-              </a:rPr>
-              <a:t>第一句：合起來之前，要先對齊。</a:t>
-            </a:r>
-            <a:r>
-              <a:rPr sz="850" lang="zh-TW" dirty="0">
-                <a:solidFill>
-                  <a:srgbClr val="000000"/>
-                </a:solidFill>
-                <a:latin typeface="Arial Unicode MS"/>
-                <a:ea typeface="Arial Unicode MS"/>
-                <a:cs typeface="Arial Unicode MS"/>
-              </a:rPr>
-              <a:t>對齊有兩種。
+              <a:rPr sz="1400" b="1" lang="zh-TW" dirty="0">
+                <a:solidFill>
+                  <a:srgbClr val="000000"/>
+                </a:solidFill>
+                <a:latin typeface="Arial Unicode MS"/>
+                <a:ea typeface="Arial Unicode MS"/>
+                <a:cs typeface="Arial Unicode MS"/>
+              </a:rPr>
+              <a:t>第一組，相機加雷達。</a:t>
+            </a:r>
+            <a:r>
+              <a:rPr sz="1400" lang="zh-TW" dirty="0">
+                <a:solidFill>
+                  <a:srgbClr val="000000"/>
+                </a:solidFill>
+                <a:latin typeface="Arial Unicode MS"/>
+                <a:ea typeface="Arial Unicode MS"/>
+                <a:cs typeface="Arial Unicode MS"/>
+              </a:rPr>
+              <a:t>就像一個人眼睛好、一個人耳朵好：相機看得出那是一台機車，雷達量得出它三十公尺、正以時速二十靠近。自動緊急煞車、跟車，最常用這一組。本節第八張的對應講的就是它；下一節的任務五，各位要自己拼一次。
 </a:t>
             </a:r>
           </a:p>
@@ -1659,63 +1836,30 @@
                 <a:spcPts val="0"/>
               </a:spcBef>
               <a:spcAft>
-                <a:spcPts val="142"/>
+                <a:spcPts val="233"/>
               </a:spcAft>
             </a:pPr>
             <a:r>
-              <a:rPr sz="850" lang="zh-TW" dirty="0">
-                <a:solidFill>
-                  <a:srgbClr val="000000"/>
-                </a:solidFill>
-                <a:latin typeface="Arial Unicode MS"/>
-                <a:ea typeface="Arial Unicode MS"/>
-                <a:cs typeface="Arial Unicode MS"/>
-              </a:rPr>
-              <a:t>第一種是</a:t>
-            </a:r>
-            <a:r>
-              <a:rPr sz="850" b="1" lang="zh-TW" dirty="0">
-                <a:solidFill>
-                  <a:srgbClr val="000000"/>
-                </a:solidFill>
-                <a:latin typeface="Arial Unicode MS"/>
-                <a:ea typeface="Arial Unicode MS"/>
-                <a:cs typeface="Arial Unicode MS"/>
-              </a:rPr>
-              <a:t>空間</a:t>
-            </a:r>
-            <a:r>
-              <a:rPr sz="850" lang="zh-TW" dirty="0">
-                <a:solidFill>
-                  <a:srgbClr val="000000"/>
-                </a:solidFill>
-                <a:latin typeface="Arial Unicode MS"/>
-                <a:ea typeface="Arial Unicode MS"/>
-                <a:cs typeface="Arial Unicode MS"/>
-              </a:rPr>
-              <a:t>。就像教室裡三個同學坐在不同位置，各自說「垃圾桶在我右前方兩公尺」，你要先知道每個人坐哪、臉朝哪，才能把三句話畫在同一張教室平面圖上。車上的相機、光達、雷達也一樣，每一顆都用自己的位置在說話，要先量出它裝在車身的哪裡、朝哪個方向，這叫</a:t>
-            </a:r>
-            <a:r>
-              <a:rPr sz="850" b="1" lang="zh-TW" dirty="0">
-                <a:solidFill>
-                  <a:srgbClr val="000000"/>
-                </a:solidFill>
-                <a:latin typeface="Arial Unicode MS"/>
-                <a:ea typeface="Arial Unicode MS"/>
-                <a:cs typeface="Arial Unicode MS"/>
-              </a:rPr>
-              <a:t>標定</a:t>
-            </a:r>
-            <a:r>
-              <a:rPr sz="850" lang="zh-TW" dirty="0">
-                <a:solidFill>
-                  <a:srgbClr val="000000"/>
-                </a:solidFill>
-                <a:latin typeface="Arial Unicode MS"/>
-                <a:ea typeface="Arial Unicode MS"/>
-                <a:cs typeface="Arial Unicode MS"/>
-              </a:rPr>
-              <a:t>，量出來的六個數字叫外參。第四張那兩張圖看過：光達只要多轉四度，點就從那台廂型車上整片滑到旁邊的樹上。真的車不會差到四度，可是差一度，五十公尺外就差將近一公尺，快半個車道。
+              <a:rPr sz="1400" b="1" lang="zh-TW" dirty="0">
+                <a:solidFill>
+                  <a:srgbClr val="000000"/>
+                </a:solidFill>
+                <a:latin typeface="Arial Unicode MS"/>
+                <a:ea typeface="Arial Unicode MS"/>
+                <a:cs typeface="Arial Unicode MS"/>
+              </a:rPr>
+              <a:t>第二組，相機加光達。</a:t>
+            </a:r>
+            <a:r>
+              <a:rPr sz="1400" lang="zh-TW" dirty="0">
+                <a:solidFill>
+                  <a:srgbClr val="000000"/>
+                </a:solidFill>
+                <a:latin typeface="Arial Unicode MS"/>
+                <a:ea typeface="Arial Unicode MS"/>
+                <a:cs typeface="Arial Unicode MS"/>
+              </a:rPr>
+              <a:t>把光達的點投到照片上，照片上每一個點都知道自己多遠。相機認得出，光達量得準。本節第四張標定那兩張圖，做的就是這件事。
 </a:t>
             </a:r>
           </a:p>
@@ -1725,63 +1869,30 @@
                 <a:spcPts val="0"/>
               </a:spcBef>
               <a:spcAft>
-                <a:spcPts val="142"/>
+                <a:spcPts val="233"/>
               </a:spcAft>
             </a:pPr>
             <a:r>
-              <a:rPr sz="850" lang="zh-TW" dirty="0">
-                <a:solidFill>
-                  <a:srgbClr val="000000"/>
-                </a:solidFill>
-                <a:latin typeface="Arial Unicode MS"/>
-                <a:ea typeface="Arial Unicode MS"/>
-                <a:cs typeface="Arial Unicode MS"/>
-              </a:rPr>
-              <a:t>第二種是</a:t>
-            </a:r>
-            <a:r>
-              <a:rPr sz="850" b="1" lang="zh-TW" dirty="0">
-                <a:solidFill>
-                  <a:srgbClr val="000000"/>
-                </a:solidFill>
-                <a:latin typeface="Arial Unicode MS"/>
-                <a:ea typeface="Arial Unicode MS"/>
-                <a:cs typeface="Arial Unicode MS"/>
-              </a:rPr>
-              <a:t>時間</a:t>
-            </a:r>
-            <a:r>
-              <a:rPr sz="850" lang="zh-TW" dirty="0">
-                <a:solidFill>
-                  <a:srgbClr val="000000"/>
-                </a:solidFill>
-                <a:latin typeface="Arial Unicode MS"/>
-                <a:ea typeface="Arial Unicode MS"/>
-                <a:cs typeface="Arial Unicode MS"/>
-              </a:rPr>
-              <a:t>。就像兩個人拍同一台開過去的車，一個人晚半秒按快門，兩張照片疊起來，車子就變成兩台。三種感測器拍的時刻都不一樣：光達每秒二十次、雷達十三次、相機十二次。第五張看過：光達早零點二秒，車身上的點就留在車子剛剛的位置，車頭反而沒有點。所以要</a:t>
-            </a:r>
-            <a:r>
-              <a:rPr sz="850" b="1" lang="zh-TW" dirty="0">
-                <a:solidFill>
-                  <a:srgbClr val="000000"/>
-                </a:solidFill>
-                <a:latin typeface="Arial Unicode MS"/>
-                <a:ea typeface="Arial Unicode MS"/>
-                <a:cs typeface="Arial Unicode MS"/>
-              </a:rPr>
-              <a:t>同步</a:t>
-            </a:r>
-            <a:r>
-              <a:rPr sz="850" lang="zh-TW" dirty="0">
-                <a:solidFill>
-                  <a:srgbClr val="000000"/>
-                </a:solidFill>
-                <a:latin typeface="Arial Unicode MS"/>
-                <a:ea typeface="Arial Unicode MS"/>
-                <a:cs typeface="Arial Unicode MS"/>
-              </a:rPr>
-              <a:t>。空間沒對齊會錯，時間沒對齊也會錯。
+              <a:rPr sz="1400" b="1" lang="zh-TW" dirty="0">
+                <a:solidFill>
+                  <a:srgbClr val="000000"/>
+                </a:solidFill>
+                <a:latin typeface="Arial Unicode MS"/>
+                <a:ea typeface="Arial Unicode MS"/>
+                <a:cs typeface="Arial Unicode MS"/>
+              </a:rPr>
+              <a:t>第三組，光達加雷達。</a:t>
+            </a:r>
+            <a:r>
+              <a:rPr sz="1400" lang="zh-TW" dirty="0">
+                <a:solidFill>
+                  <a:srgbClr val="000000"/>
+                </a:solidFill>
+                <a:latin typeface="Arial Unicode MS"/>
+                <a:ea typeface="Arial Unicode MS"/>
+                <a:cs typeface="Arial Unicode MS"/>
+              </a:rPr>
+              <a:t>下雨起霧，光達看的距離變短，雷達幾乎不受影響，先頂上；反過來，雷達量不出高度，分不出頭頂的路牌，光達的點有高有低，補得上。第一節第六張講雨霧，第一節第九張看過雷達的點全部在同一個高度。
 </a:t>
             </a:r>
           </a:p>
@@ -1791,30 +1902,30 @@
                 <a:spcPts val="0"/>
               </a:spcBef>
               <a:spcAft>
-                <a:spcPts val="142"/>
+                <a:spcPts val="233"/>
               </a:spcAft>
             </a:pPr>
             <a:r>
-              <a:rPr sz="850" b="1" lang="zh-TW" dirty="0">
-                <a:solidFill>
-                  <a:srgbClr val="000000"/>
-                </a:solidFill>
-                <a:latin typeface="Arial Unicode MS"/>
-                <a:ea typeface="Arial Unicode MS"/>
-                <a:cs typeface="Arial Unicode MS"/>
-              </a:rPr>
-              <a:t>第二句：兩顆說的不一樣，要聽誰的？</a:t>
-            </a:r>
-            <a:r>
-              <a:rPr sz="850" lang="zh-TW" dirty="0">
-                <a:solidFill>
-                  <a:srgbClr val="000000"/>
-                </a:solidFill>
-                <a:latin typeface="Arial Unicode MS"/>
-                <a:ea typeface="Arial Unicode MS"/>
-                <a:cs typeface="Arial Unicode MS"/>
-              </a:rPr>
-              <a:t>開場那一題：雷達說前方六十公尺有東西，相機說沒有車。第八張講了三種做法。
+              <a:rPr sz="1400" b="1" lang="zh-TW" dirty="0">
+                <a:solidFill>
+                  <a:srgbClr val="000000"/>
+                </a:solidFill>
+                <a:latin typeface="Arial Unicode MS"/>
+                <a:ea typeface="Arial Unicode MS"/>
+                <a:cs typeface="Arial Unicode MS"/>
+              </a:rPr>
+              <a:t>第四組，衛星定位加 IMU 加地圖。</a:t>
+            </a:r>
+            <a:r>
+              <a:rPr sz="1400" lang="zh-TW" dirty="0">
+                <a:solidFill>
+                  <a:srgbClr val="000000"/>
+                </a:solidFill>
+                <a:latin typeface="Arial Unicode MS"/>
+                <a:ea typeface="Arial Unicode MS"/>
+                <a:cs typeface="Arial Unicode MS"/>
+              </a:rPr>
+              <a:t>就像閉著眼睛走路，每走一段睜眼看一下：衛星是睜眼，IMU 是閉眼數步。進隧道，衛星斷了，IMU 先撐；出隧道，衛星一回來，馬上拉回正確的位置。本節第十張的九比一，就是在算這件事。
 </a:t>
             </a:r>
           </a:p>
@@ -1824,41 +1935,30 @@
                 <a:spcPts val="0"/>
               </a:spcBef>
               <a:spcAft>
-                <a:spcPts val="142"/>
+                <a:spcPts val="233"/>
               </a:spcAft>
             </a:pPr>
             <a:r>
-              <a:rPr sz="850" lang="zh-TW" dirty="0">
-                <a:solidFill>
-                  <a:srgbClr val="000000"/>
-                </a:solidFill>
-                <a:latin typeface="Arial Unicode MS"/>
-                <a:ea typeface="Arial Unicode MS"/>
-                <a:cs typeface="Arial Unicode MS"/>
-              </a:rPr>
-              <a:t>第一種，</a:t>
-            </a:r>
-            <a:r>
-              <a:rPr sz="850" b="1" lang="zh-TW" dirty="0">
-                <a:solidFill>
-                  <a:srgbClr val="000000"/>
-                </a:solidFill>
-                <a:latin typeface="Arial Unicode MS"/>
-                <a:ea typeface="Arial Unicode MS"/>
-                <a:cs typeface="Arial Unicode MS"/>
-              </a:rPr>
-              <a:t>看條件決定信誰</a:t>
-            </a:r>
-            <a:r>
-              <a:rPr sz="850" lang="zh-TW" dirty="0">
-                <a:solidFill>
-                  <a:srgbClr val="000000"/>
-                </a:solidFill>
-                <a:latin typeface="Arial Unicode MS"/>
-                <a:ea typeface="Arial Unicode MS"/>
-                <a:cs typeface="Arial Unicode MS"/>
-              </a:rPr>
-              <a:t>。每一顆有一個「權重」，就是你有多相信它。下雨天少相信相機、多相信雷達；遠處的行人，少相信雷達。好處是聰明，代價是你要事先知道它什麼時候會變差，所以第一節那張失效對照表很重要。
+              <a:rPr sz="1400" b="1" lang="zh-TW" dirty="0">
+                <a:solidFill>
+                  <a:srgbClr val="000000"/>
+                </a:solidFill>
+                <a:latin typeface="Arial Unicode MS"/>
+                <a:ea typeface="Arial Unicode MS"/>
+                <a:cs typeface="Arial Unicode MS"/>
+              </a:rPr>
+              <a:t>第五組，超音波加環景相機。</a:t>
+            </a:r>
+            <a:r>
+              <a:rPr sz="1400" lang="zh-TW" dirty="0">
+                <a:solidFill>
+                  <a:srgbClr val="000000"/>
+                </a:solidFill>
+                <a:latin typeface="Arial Unicode MS"/>
+                <a:ea typeface="Arial Unicode MS"/>
+                <a:cs typeface="Arial Unicode MS"/>
+              </a:rPr>
+              <a:t>停車的時候，超音波量保險桿前面幾十公分的距離，嗶嗶叫；環景相機讓你看清楚那是一根柱子還是一個小孩。第六週講超音波的時候看過。
 </a:t>
             </a:r>
           </a:p>
@@ -1868,305 +1968,41 @@
                 <a:spcPts val="0"/>
               </a:spcBef>
               <a:spcAft>
-                <a:spcPts val="142"/>
+                <a:spcPts val="233"/>
               </a:spcAft>
             </a:pPr>
             <a:r>
-              <a:rPr sz="850" lang="zh-TW" dirty="0">
-                <a:solidFill>
-                  <a:srgbClr val="000000"/>
-                </a:solidFill>
-                <a:latin typeface="Arial Unicode MS"/>
-                <a:ea typeface="Arial Unicode MS"/>
-                <a:cs typeface="Arial Unicode MS"/>
-              </a:rPr>
-              <a:t>第二種，</a:t>
-            </a:r>
-            <a:r>
-              <a:rPr sz="850" b="1" lang="zh-TW" dirty="0">
-                <a:solidFill>
-                  <a:srgbClr val="000000"/>
-                </a:solidFill>
-                <a:latin typeface="Arial Unicode MS"/>
-                <a:ea typeface="Arial Unicode MS"/>
-                <a:cs typeface="Arial Unicode MS"/>
-              </a:rPr>
-              <a:t>多數決</a:t>
-            </a:r>
-            <a:r>
-              <a:rPr sz="850" lang="zh-TW" dirty="0">
-                <a:solidFill>
-                  <a:srgbClr val="000000"/>
-                </a:solidFill>
-                <a:latin typeface="Arial Unicode MS"/>
-                <a:ea typeface="Arial Unicode MS"/>
-                <a:cs typeface="Arial Unicode MS"/>
-              </a:rPr>
-              <a:t>。三顆裡兩顆說有，就算有。代價是要有三顆量同一件事；而且如果兩顆被同一個原因騙，例如大雨裡相機和光達一起變差，投票也會投錯。
-</a:t>
-            </a:r>
-          </a:p>
-          <a:p>
-            <a:pPr algn="l">
-              <a:spcBef>
-                <a:spcPts val="0"/>
-              </a:spcBef>
-              <a:spcAft>
-                <a:spcPts val="142"/>
-              </a:spcAft>
-            </a:pPr>
-            <a:r>
-              <a:rPr sz="850" lang="zh-TW" dirty="0">
-                <a:solidFill>
-                  <a:srgbClr val="000000"/>
-                </a:solidFill>
-                <a:latin typeface="Arial Unicode MS"/>
-                <a:ea typeface="Arial Unicode MS"/>
-                <a:cs typeface="Arial Unicode MS"/>
-              </a:rPr>
-              <a:t>第三種，</a:t>
-            </a:r>
-            <a:r>
-              <a:rPr sz="850" b="1" lang="zh-TW" dirty="0">
-                <a:solidFill>
-                  <a:srgbClr val="000000"/>
-                </a:solidFill>
-                <a:latin typeface="Arial Unicode MS"/>
-                <a:ea typeface="Arial Unicode MS"/>
-                <a:cs typeface="Arial Unicode MS"/>
-              </a:rPr>
-              <a:t>保守原則</a:t>
-            </a:r>
-            <a:r>
-              <a:rPr sz="850" lang="zh-TW" dirty="0">
-                <a:solidFill>
-                  <a:srgbClr val="000000"/>
-                </a:solidFill>
-                <a:latin typeface="Arial Unicode MS"/>
-                <a:ea typeface="Arial Unicode MS"/>
-                <a:cs typeface="Arial Unicode MS"/>
-              </a:rPr>
-              <a:t>。只要有一顆說有，就先減速。最安全，代價是常常莫名其妙地煞車，乘客不舒服，後面的車也可能追撞。
-</a:t>
-            </a:r>
-          </a:p>
-          <a:p>
-            <a:pPr algn="l">
-              <a:spcBef>
-                <a:spcPts val="0"/>
-              </a:spcBef>
-              <a:spcAft>
-                <a:spcPts val="142"/>
-              </a:spcAft>
-            </a:pPr>
-            <a:r>
-              <a:rPr sz="850" lang="zh-TW" dirty="0">
-                <a:solidFill>
-                  <a:srgbClr val="000000"/>
-                </a:solidFill>
-                <a:latin typeface="Arial Unicode MS"/>
-                <a:ea typeface="Arial Unicode MS"/>
-                <a:cs typeface="Arial Unicode MS"/>
-              </a:rPr>
-              <a:t>真的車三種混著用。最重要的是：感測器要會說「</a:t>
-            </a:r>
-            <a:r>
-              <a:rPr sz="850" b="1" lang="zh-TW" dirty="0">
-                <a:solidFill>
-                  <a:srgbClr val="000000"/>
-                </a:solidFill>
-                <a:latin typeface="Arial Unicode MS"/>
-                <a:ea typeface="Arial Unicode MS"/>
-                <a:cs typeface="Arial Unicode MS"/>
-              </a:rPr>
-              <a:t>我現在不可靠</a:t>
-            </a:r>
-            <a:r>
-              <a:rPr sz="850" lang="zh-TW" dirty="0">
-                <a:solidFill>
-                  <a:srgbClr val="000000"/>
-                </a:solidFill>
-                <a:latin typeface="Arial Unicode MS"/>
-                <a:ea typeface="Arial Unicode MS"/>
-                <a:cs typeface="Arial Unicode MS"/>
-              </a:rPr>
-              <a:t>」。它一說，它的權重就降下來，別人多扛一點。第一節講「最危險的是看不到卻說沒事」，原因就在這裡。
-</a:t>
-            </a:r>
-          </a:p>
-          <a:p>
-            <a:pPr algn="l">
-              <a:spcBef>
-                <a:spcPts val="0"/>
-              </a:spcBef>
-              <a:spcAft>
-                <a:spcPts val="142"/>
-              </a:spcAft>
-            </a:pPr>
-            <a:r>
-              <a:rPr sz="850" b="1" lang="zh-TW" dirty="0">
-                <a:solidFill>
-                  <a:srgbClr val="000000"/>
-                </a:solidFill>
-                <a:latin typeface="Arial Unicode MS"/>
-                <a:ea typeface="Arial Unicode MS"/>
-                <a:cs typeface="Arial Unicode MS"/>
-              </a:rPr>
-              <a:t>第三句：比較準的，多相信一點。</a:t>
-            </a:r>
-            <a:r>
-              <a:rPr sz="850" lang="zh-TW" dirty="0">
-                <a:solidFill>
-                  <a:srgbClr val="000000"/>
-                </a:solidFill>
-                <a:latin typeface="Arial Unicode MS"/>
-                <a:ea typeface="Arial Unicode MS"/>
-                <a:cs typeface="Arial Unicode MS"/>
-              </a:rPr>
-              <a:t>就像你有兩支錶，一支很準、一支常常快慢，你兩支都看，但比較聽準的那支。第九張那支動圖算過：IMU 推算一百二十公尺，誤差正負一；GPS 說一百一十八公尺，誤差正負三。誤差差三倍，信任要差九倍，三乘三，所以 IMU 拿九份、GPS 拿一份，合起來是一百一十九點八公尺。為什麼是平方，不是三倍？數學上可以證明，這樣分配，合起來的誤差會最小；證明要用到統計，這門課先記口訣就好：</a:t>
-            </a:r>
-            <a:r>
-              <a:rPr sz="850" b="1" lang="zh-TW" dirty="0">
-                <a:solidFill>
-                  <a:srgbClr val="000000"/>
-                </a:solidFill>
-                <a:latin typeface="Arial Unicode MS"/>
-                <a:ea typeface="Arial Unicode MS"/>
-                <a:cs typeface="Arial Unicode MS"/>
-              </a:rPr>
-              <a:t>誤差差幾倍，信任就差那個數字的平方倍。</a:t>
-            </a:r>
-            <a:r>
-              <a:rPr sz="850" lang="zh-TW" dirty="0">
-                <a:solidFill>
-                  <a:srgbClr val="000000"/>
-                </a:solidFill>
-                <a:latin typeface="Arial Unicode MS"/>
-                <a:ea typeface="Arial Unicode MS"/>
-                <a:cs typeface="Arial Unicode MS"/>
-              </a:rPr>
-              <a:t>而且合起來的結果，比兩個單獨的都更確定。
-</a:t>
-            </a:r>
-          </a:p>
-          <a:p>
-            <a:pPr algn="l">
-              <a:spcBef>
-                <a:spcPts val="0"/>
-              </a:spcBef>
-              <a:spcAft>
-                <a:spcPts val="142"/>
-              </a:spcAft>
-            </a:pPr>
-            <a:r>
-              <a:rPr sz="850" lang="zh-TW" dirty="0">
-                <a:solidFill>
-                  <a:srgbClr val="000000"/>
-                </a:solidFill>
-                <a:latin typeface="Arial Unicode MS"/>
-                <a:ea typeface="Arial Unicode MS"/>
-                <a:cs typeface="Arial Unicode MS"/>
-              </a:rPr>
-              <a:t>進了隧道，GPS 沒了，只剩預測，誤差圈一秒一秒變大；出了隧道，GPS 一回來，一下就拉回來。
-</a:t>
-            </a:r>
-          </a:p>
-          <a:p>
-            <a:pPr algn="l">
-              <a:spcBef>
-                <a:spcPts val="0"/>
-              </a:spcBef>
-              <a:spcAft>
-                <a:spcPts val="142"/>
-              </a:spcAft>
-            </a:pPr>
-            <a:r>
-              <a:rPr sz="850" lang="zh-TW" dirty="0">
-                <a:solidFill>
-                  <a:srgbClr val="000000"/>
-                </a:solidFill>
-                <a:latin typeface="Arial Unicode MS"/>
-                <a:ea typeface="Arial Unicode MS"/>
-                <a:cs typeface="Arial Unicode MS"/>
-              </a:rPr>
-              <a:t>如果壞到合起來也不夠呢？第十張：</a:t>
-            </a:r>
-            <a:r>
-              <a:rPr sz="850" b="1" lang="zh-TW" dirty="0">
-                <a:solidFill>
-                  <a:srgbClr val="000000"/>
-                </a:solidFill>
-                <a:latin typeface="Arial Unicode MS"/>
-                <a:ea typeface="Arial Unicode MS"/>
-                <a:cs typeface="Arial Unicode MS"/>
-              </a:rPr>
-              <a:t>降級</a:t>
-            </a:r>
-            <a:r>
-              <a:rPr sz="850" lang="zh-TW" dirty="0">
-                <a:solidFill>
-                  <a:srgbClr val="000000"/>
-                </a:solidFill>
-                <a:latin typeface="Arial Unicode MS"/>
-                <a:ea typeface="Arial Unicode MS"/>
-                <a:cs typeface="Arial Unicode MS"/>
-              </a:rPr>
-              <a:t>。雨大到相機看不見、光達也變短，就是走出 ODD 了。L2 的車會叫駕駛接手；L4 的車沒有駕駛，自己減速、打雙黃燈、靠右邊停下來。
-</a:t>
-            </a:r>
-          </a:p>
-          <a:p>
-            <a:pPr algn="l">
-              <a:spcBef>
-                <a:spcPts val="0"/>
-              </a:spcBef>
-              <a:spcAft>
-                <a:spcPts val="142"/>
-              </a:spcAft>
-            </a:pPr>
-            <a:r>
-              <a:rPr sz="850" lang="zh-TW" dirty="0">
-                <a:solidFill>
-                  <a:srgbClr val="000000"/>
-                </a:solidFill>
-                <a:latin typeface="Arial Unicode MS"/>
-                <a:ea typeface="Arial Unicode MS"/>
-                <a:cs typeface="Arial Unicode MS"/>
-              </a:rPr>
-              <a:t>最後，第十一張那五組搭檔，其實只有兩種模式：一個管「是什麼」，一個管「多遠、多快」；或是一個壞了，另一個先頂上。
-</a:t>
-            </a:r>
-          </a:p>
-          <a:p>
-            <a:pPr algn="l">
-              <a:spcBef>
-                <a:spcPts val="0"/>
-              </a:spcBef>
-              <a:spcAft>
-                <a:spcPts val="142"/>
-              </a:spcAft>
-            </a:pPr>
-            <a:r>
-              <a:rPr sz="850" b="1" lang="zh-TW" dirty="0">
-                <a:solidFill>
-                  <a:srgbClr val="000000"/>
-                </a:solidFill>
-                <a:latin typeface="Arial Unicode MS"/>
-                <a:ea typeface="Arial Unicode MS"/>
-                <a:cs typeface="Arial Unicode MS"/>
-              </a:rPr>
-              <a:t>下一節</a:t>
-            </a:r>
-            <a:r>
-              <a:rPr sz="850" lang="zh-TW" dirty="0">
-                <a:solidFill>
-                  <a:srgbClr val="000000"/>
-                </a:solidFill>
-                <a:latin typeface="Arial Unicode MS"/>
-                <a:ea typeface="Arial Unicode MS"/>
-                <a:cs typeface="Arial Unicode MS"/>
-              </a:rPr>
-              <a:t>，各位要自己動手。打開 nuScenes 觀察台，看同一個瞬間，相機、光達、雷達各看到什麼；任務五用「合起來」那個開關，自己拼一次第一組搭檔：相機說是什麼、光達說多遠、雷達說多快；最後把第三週那張「誰補誰」的表，真的填完。</a:t>
+              <a:rPr sz="1400" lang="zh-TW" dirty="0">
+                <a:solidFill>
+                  <a:srgbClr val="000000"/>
+                </a:solidFill>
+                <a:latin typeface="Arial Unicode MS"/>
+                <a:ea typeface="Arial Unicode MS"/>
+                <a:cs typeface="Arial Unicode MS"/>
+              </a:rPr>
+              <a:t>五組看下來，模式只有兩種：</a:t>
+            </a:r>
+            <a:r>
+              <a:rPr sz="1400" b="1" lang="zh-TW" dirty="0">
+                <a:solidFill>
+                  <a:srgbClr val="000000"/>
+                </a:solidFill>
+                <a:latin typeface="Arial Unicode MS"/>
+                <a:ea typeface="Arial Unicode MS"/>
+                <a:cs typeface="Arial Unicode MS"/>
+              </a:rPr>
+              <a:t>一個管「是什麼」，一個管「多遠、多快」；或是一個壞了，另一個先頂上。</a:t>
+            </a:r>
+            <a:r>
+              <a:rPr sz="1400" lang="zh-TW" dirty="0">
+                <a:solidFill>
+                  <a:srgbClr val="000000"/>
+                </a:solidFill>
+                <a:latin typeface="Arial Unicode MS"/>
+                <a:ea typeface="Arial Unicode MS"/>
+                <a:cs typeface="Arial Unicode MS"/>
+              </a:rPr>
+              <a:t>這就是本節第三張講的互補和備援。</a:t>
             </a:r>
           </a:p>
         </p:txBody>
@@ -2209,6 +2045,710 @@
                 <a:cs typeface="Arial Unicode MS"/>
               </a:rPr>
               <a:t>12</a:t>
+            </a:r>
+          </a:p>
+        </p:txBody>
+      </p:sp>
+    </p:spTree>
+  </p:cSld>
+  <p:clrMapOvr>
+    <a:masterClrMapping/>
+  </p:clrMapOvr>
+</p:notes>
+</file>
+
+<file path=ppt/notesSlides/notesSlide13.xml><?xml version="1.0" encoding="utf-8"?>
+<p:notes xmlns:a="http://schemas.openxmlformats.org/drawingml/2006/main" xmlns:p="http://schemas.openxmlformats.org/presentationml/2006/main">
+  <p:cSld>
+    <p:spTree>
+      <p:nvGrpSpPr>
+        <p:cNvPr id="1" name=""/>
+        <p:cNvGrpSpPr/>
+        <p:nvPr/>
+      </p:nvGrpSpPr>
+      <p:grpSpPr>
+        <a:xfrm/>
+      </p:grpSpPr>
+      <p:sp>
+        <p:nvSpPr>
+          <p:cNvPr id="2" name="Slide Image Placeholder 1"/>
+          <p:cNvSpPr>
+            <a:spLocks noGrp="1"/>
+          </p:cNvSpPr>
+          <p:nvPr>
+            <p:ph type="sldImg" idx="2"/>
+          </p:nvPr>
+        </p:nvSpPr>
+        <p:spPr>
+          <a:xfrm>
+            <a:off x="1620000" y="380000"/>
+            <a:ext cx="4320000" cy="2430000"/>
+          </a:xfrm>
+        </p:spPr>
+      </p:sp>
+      <p:sp>
+        <p:nvSpPr>
+          <p:cNvPr id="3" name="Notes Placeholder 2"/>
+          <p:cNvSpPr>
+            <a:spLocks noGrp="1"/>
+          </p:cNvSpPr>
+          <p:nvPr>
+            <p:ph type="body" idx="3"/>
+          </p:nvPr>
+        </p:nvSpPr>
+        <p:spPr>
+          <a:xfrm>
+            <a:off x="540000" y="2990000"/>
+            <a:ext cx="6480000" cy="7060000"/>
+          </a:xfrm>
+        </p:spPr>
+        <p:txBody>
+          <a:bodyPr vert="horz" wrap="square" anchor="t" lIns="91440" rIns="91440" tIns="45720" bIns="45720"/>
+          <a:lstStyle/>
+          <a:p>
+            <a:pPr algn="l">
+              <a:spcBef>
+                <a:spcPts val="0"/>
+              </a:spcBef>
+              <a:spcAft>
+                <a:spcPts val="142"/>
+              </a:spcAft>
+            </a:pPr>
+            <a:r>
+              <a:rPr sz="850" b="1" lang="zh-TW" dirty="0">
+                <a:solidFill>
+                  <a:srgbClr val="000000"/>
+                </a:solidFill>
+                <a:latin typeface="Arial Unicode MS"/>
+                <a:ea typeface="Arial Unicode MS"/>
+                <a:cs typeface="Arial Unicode MS"/>
+              </a:rPr>
+              <a:t>這一張的目的：</a:t>
+            </a:r>
+            <a:r>
+              <a:rPr sz="850" lang="zh-TW" dirty="0">
+                <a:solidFill>
+                  <a:srgbClr val="000000"/>
+                </a:solidFill>
+                <a:latin typeface="Arial Unicode MS"/>
+                <a:ea typeface="Arial Unicode MS"/>
+                <a:cs typeface="Arial Unicode MS"/>
+              </a:rPr>
+              <a:t>把這一節收成三句話，並預告下一節要自己動手。
+</a:t>
+            </a:r>
+          </a:p>
+          <a:p>
+            <a:pPr algn="l">
+              <a:spcBef>
+                <a:spcPts val="0"/>
+              </a:spcBef>
+              <a:spcAft>
+                <a:spcPts val="142"/>
+              </a:spcAft>
+            </a:pPr>
+            <a:r>
+              <a:rPr sz="850" lang="zh-TW" dirty="0">
+                <a:solidFill>
+                  <a:srgbClr val="000000"/>
+                </a:solidFill>
+                <a:latin typeface="Arial Unicode MS"/>
+                <a:ea typeface="Arial Unicode MS"/>
+                <a:cs typeface="Arial Unicode MS"/>
+              </a:rPr>
+              <a:t>這一節講了很多，收成三句話帶走。
+</a:t>
+            </a:r>
+          </a:p>
+          <a:p>
+            <a:pPr algn="l">
+              <a:spcBef>
+                <a:spcPts val="0"/>
+              </a:spcBef>
+              <a:spcAft>
+                <a:spcPts val="142"/>
+              </a:spcAft>
+            </a:pPr>
+            <a:r>
+              <a:rPr sz="850" b="1" lang="zh-TW" dirty="0">
+                <a:solidFill>
+                  <a:srgbClr val="000000"/>
+                </a:solidFill>
+                <a:latin typeface="Arial Unicode MS"/>
+                <a:ea typeface="Arial Unicode MS"/>
+                <a:cs typeface="Arial Unicode MS"/>
+              </a:rPr>
+              <a:t>第一句：合起來之前，要先對齊。</a:t>
+            </a:r>
+            <a:r>
+              <a:rPr sz="850" lang="zh-TW" dirty="0">
+                <a:solidFill>
+                  <a:srgbClr val="000000"/>
+                </a:solidFill>
+                <a:latin typeface="Arial Unicode MS"/>
+                <a:ea typeface="Arial Unicode MS"/>
+                <a:cs typeface="Arial Unicode MS"/>
+              </a:rPr>
+              <a:t>對齊有兩種。
+</a:t>
+            </a:r>
+          </a:p>
+          <a:p>
+            <a:pPr algn="l">
+              <a:spcBef>
+                <a:spcPts val="0"/>
+              </a:spcBef>
+              <a:spcAft>
+                <a:spcPts val="142"/>
+              </a:spcAft>
+            </a:pPr>
+            <a:r>
+              <a:rPr sz="850" lang="zh-TW" dirty="0">
+                <a:solidFill>
+                  <a:srgbClr val="000000"/>
+                </a:solidFill>
+                <a:latin typeface="Arial Unicode MS"/>
+                <a:ea typeface="Arial Unicode MS"/>
+                <a:cs typeface="Arial Unicode MS"/>
+              </a:rPr>
+              <a:t>第一種是</a:t>
+            </a:r>
+            <a:r>
+              <a:rPr sz="850" b="1" lang="zh-TW" dirty="0">
+                <a:solidFill>
+                  <a:srgbClr val="000000"/>
+                </a:solidFill>
+                <a:latin typeface="Arial Unicode MS"/>
+                <a:ea typeface="Arial Unicode MS"/>
+                <a:cs typeface="Arial Unicode MS"/>
+              </a:rPr>
+              <a:t>空間</a:t>
+            </a:r>
+            <a:r>
+              <a:rPr sz="850" lang="zh-TW" dirty="0">
+                <a:solidFill>
+                  <a:srgbClr val="000000"/>
+                </a:solidFill>
+                <a:latin typeface="Arial Unicode MS"/>
+                <a:ea typeface="Arial Unicode MS"/>
+                <a:cs typeface="Arial Unicode MS"/>
+              </a:rPr>
+              <a:t>。就像教室裡三個同學坐在不同位置，各自說「垃圾桶在我右前方兩公尺」，你要先知道每個人坐哪、臉朝哪，才能把三句話畫在同一張教室平面圖上。車上的相機、光達、雷達也一樣，每一顆都用自己的位置在說話，要先量出它裝在車身的哪裡、朝哪個方向，這叫</a:t>
+            </a:r>
+            <a:r>
+              <a:rPr sz="850" b="1" lang="zh-TW" dirty="0">
+                <a:solidFill>
+                  <a:srgbClr val="000000"/>
+                </a:solidFill>
+                <a:latin typeface="Arial Unicode MS"/>
+                <a:ea typeface="Arial Unicode MS"/>
+                <a:cs typeface="Arial Unicode MS"/>
+              </a:rPr>
+              <a:t>標定</a:t>
+            </a:r>
+            <a:r>
+              <a:rPr sz="850" lang="zh-TW" dirty="0">
+                <a:solidFill>
+                  <a:srgbClr val="000000"/>
+                </a:solidFill>
+                <a:latin typeface="Arial Unicode MS"/>
+                <a:ea typeface="Arial Unicode MS"/>
+                <a:cs typeface="Arial Unicode MS"/>
+              </a:rPr>
+              <a:t>，量出來的六個數字叫外參。第四張那兩張圖看過：光達只要多轉四度，點就從那台廂型車上整片滑到旁邊的樹上。真的車不會差到四度，可是差一度，五十公尺外就差將近一公尺，快半個車道。
+</a:t>
+            </a:r>
+          </a:p>
+          <a:p>
+            <a:pPr algn="l">
+              <a:spcBef>
+                <a:spcPts val="0"/>
+              </a:spcBef>
+              <a:spcAft>
+                <a:spcPts val="142"/>
+              </a:spcAft>
+            </a:pPr>
+            <a:r>
+              <a:rPr sz="850" lang="zh-TW" dirty="0">
+                <a:solidFill>
+                  <a:srgbClr val="000000"/>
+                </a:solidFill>
+                <a:latin typeface="Arial Unicode MS"/>
+                <a:ea typeface="Arial Unicode MS"/>
+                <a:cs typeface="Arial Unicode MS"/>
+              </a:rPr>
+              <a:t>第二種是</a:t>
+            </a:r>
+            <a:r>
+              <a:rPr sz="850" b="1" lang="zh-TW" dirty="0">
+                <a:solidFill>
+                  <a:srgbClr val="000000"/>
+                </a:solidFill>
+                <a:latin typeface="Arial Unicode MS"/>
+                <a:ea typeface="Arial Unicode MS"/>
+                <a:cs typeface="Arial Unicode MS"/>
+              </a:rPr>
+              <a:t>時間</a:t>
+            </a:r>
+            <a:r>
+              <a:rPr sz="850" lang="zh-TW" dirty="0">
+                <a:solidFill>
+                  <a:srgbClr val="000000"/>
+                </a:solidFill>
+                <a:latin typeface="Arial Unicode MS"/>
+                <a:ea typeface="Arial Unicode MS"/>
+                <a:cs typeface="Arial Unicode MS"/>
+              </a:rPr>
+              <a:t>。就像兩個人拍同一台開過去的車，一個人晚半秒按快門，兩張照片疊起來，車子就變成兩台。三種感測器拍的時刻都不一樣：光達每秒二十次、雷達十三次、相機十二次。第五張看過：光達早零點二秒，車身上的點就留在車子剛剛的位置，車頭反而沒有點。所以要</a:t>
+            </a:r>
+            <a:r>
+              <a:rPr sz="850" b="1" lang="zh-TW" dirty="0">
+                <a:solidFill>
+                  <a:srgbClr val="000000"/>
+                </a:solidFill>
+                <a:latin typeface="Arial Unicode MS"/>
+                <a:ea typeface="Arial Unicode MS"/>
+                <a:cs typeface="Arial Unicode MS"/>
+              </a:rPr>
+              <a:t>同步</a:t>
+            </a:r>
+            <a:r>
+              <a:rPr sz="850" lang="zh-TW" dirty="0">
+                <a:solidFill>
+                  <a:srgbClr val="000000"/>
+                </a:solidFill>
+                <a:latin typeface="Arial Unicode MS"/>
+                <a:ea typeface="Arial Unicode MS"/>
+                <a:cs typeface="Arial Unicode MS"/>
+              </a:rPr>
+              <a:t>。空間沒對齊會錯，時間沒對齊也會錯。
+</a:t>
+            </a:r>
+          </a:p>
+          <a:p>
+            <a:pPr algn="l">
+              <a:spcBef>
+                <a:spcPts val="0"/>
+              </a:spcBef>
+              <a:spcAft>
+                <a:spcPts val="142"/>
+              </a:spcAft>
+            </a:pPr>
+            <a:r>
+              <a:rPr sz="850" b="1" lang="zh-TW" dirty="0">
+                <a:solidFill>
+                  <a:srgbClr val="000000"/>
+                </a:solidFill>
+                <a:latin typeface="Arial Unicode MS"/>
+                <a:ea typeface="Arial Unicode MS"/>
+                <a:cs typeface="Arial Unicode MS"/>
+              </a:rPr>
+              <a:t>第二句：兩顆說的不一樣，要聽誰的？</a:t>
+            </a:r>
+            <a:r>
+              <a:rPr sz="850" lang="zh-TW" dirty="0">
+                <a:solidFill>
+                  <a:srgbClr val="000000"/>
+                </a:solidFill>
+                <a:latin typeface="Arial Unicode MS"/>
+                <a:ea typeface="Arial Unicode MS"/>
+                <a:cs typeface="Arial Unicode MS"/>
+              </a:rPr>
+              <a:t>開場那一題：雷達說前方六十公尺有東西，相機說沒有車。第九張講了三種做法。
+</a:t>
+            </a:r>
+          </a:p>
+          <a:p>
+            <a:pPr algn="l">
+              <a:spcBef>
+                <a:spcPts val="0"/>
+              </a:spcBef>
+              <a:spcAft>
+                <a:spcPts val="142"/>
+              </a:spcAft>
+            </a:pPr>
+            <a:r>
+              <a:rPr sz="850" lang="zh-TW" dirty="0">
+                <a:solidFill>
+                  <a:srgbClr val="000000"/>
+                </a:solidFill>
+                <a:latin typeface="Arial Unicode MS"/>
+                <a:ea typeface="Arial Unicode MS"/>
+                <a:cs typeface="Arial Unicode MS"/>
+              </a:rPr>
+              <a:t>第一種，</a:t>
+            </a:r>
+            <a:r>
+              <a:rPr sz="850" b="1" lang="zh-TW" dirty="0">
+                <a:solidFill>
+                  <a:srgbClr val="000000"/>
+                </a:solidFill>
+                <a:latin typeface="Arial Unicode MS"/>
+                <a:ea typeface="Arial Unicode MS"/>
+                <a:cs typeface="Arial Unicode MS"/>
+              </a:rPr>
+              <a:t>看條件決定信誰</a:t>
+            </a:r>
+            <a:r>
+              <a:rPr sz="850" lang="zh-TW" dirty="0">
+                <a:solidFill>
+                  <a:srgbClr val="000000"/>
+                </a:solidFill>
+                <a:latin typeface="Arial Unicode MS"/>
+                <a:ea typeface="Arial Unicode MS"/>
+                <a:cs typeface="Arial Unicode MS"/>
+              </a:rPr>
+              <a:t>。每一顆有一個「權重」，就是你有多相信它。下雨天少相信相機、多相信雷達；遠處的行人，少相信雷達。好處是聰明，代價是你要事先知道它什麼時候會變差，所以第一節那張失效對照表很重要。
+</a:t>
+            </a:r>
+          </a:p>
+          <a:p>
+            <a:pPr algn="l">
+              <a:spcBef>
+                <a:spcPts val="0"/>
+              </a:spcBef>
+              <a:spcAft>
+                <a:spcPts val="142"/>
+              </a:spcAft>
+            </a:pPr>
+            <a:r>
+              <a:rPr sz="850" lang="zh-TW" dirty="0">
+                <a:solidFill>
+                  <a:srgbClr val="000000"/>
+                </a:solidFill>
+                <a:latin typeface="Arial Unicode MS"/>
+                <a:ea typeface="Arial Unicode MS"/>
+                <a:cs typeface="Arial Unicode MS"/>
+              </a:rPr>
+              <a:t>第二種，</a:t>
+            </a:r>
+            <a:r>
+              <a:rPr sz="850" b="1" lang="zh-TW" dirty="0">
+                <a:solidFill>
+                  <a:srgbClr val="000000"/>
+                </a:solidFill>
+                <a:latin typeface="Arial Unicode MS"/>
+                <a:ea typeface="Arial Unicode MS"/>
+                <a:cs typeface="Arial Unicode MS"/>
+              </a:rPr>
+              <a:t>多數決</a:t>
+            </a:r>
+            <a:r>
+              <a:rPr sz="850" lang="zh-TW" dirty="0">
+                <a:solidFill>
+                  <a:srgbClr val="000000"/>
+                </a:solidFill>
+                <a:latin typeface="Arial Unicode MS"/>
+                <a:ea typeface="Arial Unicode MS"/>
+                <a:cs typeface="Arial Unicode MS"/>
+              </a:rPr>
+              <a:t>。三顆裡兩顆說有，就算有。代價是要有三顆量同一件事；而且如果兩顆被同一個原因騙，例如大雨裡相機和光達一起變差，投票也會投錯。
+</a:t>
+            </a:r>
+          </a:p>
+          <a:p>
+            <a:pPr algn="l">
+              <a:spcBef>
+                <a:spcPts val="0"/>
+              </a:spcBef>
+              <a:spcAft>
+                <a:spcPts val="142"/>
+              </a:spcAft>
+            </a:pPr>
+            <a:r>
+              <a:rPr sz="850" lang="zh-TW" dirty="0">
+                <a:solidFill>
+                  <a:srgbClr val="000000"/>
+                </a:solidFill>
+                <a:latin typeface="Arial Unicode MS"/>
+                <a:ea typeface="Arial Unicode MS"/>
+                <a:cs typeface="Arial Unicode MS"/>
+              </a:rPr>
+              <a:t>第三種，</a:t>
+            </a:r>
+            <a:r>
+              <a:rPr sz="850" b="1" lang="zh-TW" dirty="0">
+                <a:solidFill>
+                  <a:srgbClr val="000000"/>
+                </a:solidFill>
+                <a:latin typeface="Arial Unicode MS"/>
+                <a:ea typeface="Arial Unicode MS"/>
+                <a:cs typeface="Arial Unicode MS"/>
+              </a:rPr>
+              <a:t>保守原則</a:t>
+            </a:r>
+            <a:r>
+              <a:rPr sz="850" lang="zh-TW" dirty="0">
+                <a:solidFill>
+                  <a:srgbClr val="000000"/>
+                </a:solidFill>
+                <a:latin typeface="Arial Unicode MS"/>
+                <a:ea typeface="Arial Unicode MS"/>
+                <a:cs typeface="Arial Unicode MS"/>
+              </a:rPr>
+              <a:t>。只要有一顆說有，就先減速。最安全，代價是常常莫名其妙地煞車，乘客不舒服，後面的車也可能追撞。
+</a:t>
+            </a:r>
+          </a:p>
+          <a:p>
+            <a:pPr algn="l">
+              <a:spcBef>
+                <a:spcPts val="0"/>
+              </a:spcBef>
+              <a:spcAft>
+                <a:spcPts val="142"/>
+              </a:spcAft>
+            </a:pPr>
+            <a:r>
+              <a:rPr sz="850" lang="zh-TW" dirty="0">
+                <a:solidFill>
+                  <a:srgbClr val="000000"/>
+                </a:solidFill>
+                <a:latin typeface="Arial Unicode MS"/>
+                <a:ea typeface="Arial Unicode MS"/>
+                <a:cs typeface="Arial Unicode MS"/>
+              </a:rPr>
+              <a:t>真的車三種混著用。最重要的是：感測器要會說「</a:t>
+            </a:r>
+            <a:r>
+              <a:rPr sz="850" b="1" lang="zh-TW" dirty="0">
+                <a:solidFill>
+                  <a:srgbClr val="000000"/>
+                </a:solidFill>
+                <a:latin typeface="Arial Unicode MS"/>
+                <a:ea typeface="Arial Unicode MS"/>
+                <a:cs typeface="Arial Unicode MS"/>
+              </a:rPr>
+              <a:t>我現在不可靠</a:t>
+            </a:r>
+            <a:r>
+              <a:rPr sz="850" lang="zh-TW" dirty="0">
+                <a:solidFill>
+                  <a:srgbClr val="000000"/>
+                </a:solidFill>
+                <a:latin typeface="Arial Unicode MS"/>
+                <a:ea typeface="Arial Unicode MS"/>
+                <a:cs typeface="Arial Unicode MS"/>
+              </a:rPr>
+              <a:t>」。它一說，它的權重就降下來，別人多扛一點。第一節講「最危險的是看不到卻說沒事」，原因就在這裡。
+</a:t>
+            </a:r>
+          </a:p>
+          <a:p>
+            <a:pPr algn="l">
+              <a:spcBef>
+                <a:spcPts val="0"/>
+              </a:spcBef>
+              <a:spcAft>
+                <a:spcPts val="142"/>
+              </a:spcAft>
+            </a:pPr>
+            <a:r>
+              <a:rPr sz="850" b="1" lang="zh-TW" dirty="0">
+                <a:solidFill>
+                  <a:srgbClr val="000000"/>
+                </a:solidFill>
+                <a:latin typeface="Arial Unicode MS"/>
+                <a:ea typeface="Arial Unicode MS"/>
+                <a:cs typeface="Arial Unicode MS"/>
+              </a:rPr>
+              <a:t>第三句：比較準的，多相信一點。</a:t>
+            </a:r>
+            <a:r>
+              <a:rPr sz="850" lang="zh-TW" dirty="0">
+                <a:solidFill>
+                  <a:srgbClr val="000000"/>
+                </a:solidFill>
+                <a:latin typeface="Arial Unicode MS"/>
+                <a:ea typeface="Arial Unicode MS"/>
+                <a:cs typeface="Arial Unicode MS"/>
+              </a:rPr>
+              <a:t>就像你有兩支錶，一支很準、一支常常快慢，你兩支都看，但比較聽準的那支。第十張那支動圖算過：IMU 推算一百二十公尺，誤差正負一；GPS 說一百一十八公尺，誤差正負三。誤差差三倍，信任要差九倍，三乘三，所以 IMU 拿九份、GPS 拿一份，合起來是一百一十九點八公尺。為什麼是平方，不是三倍？數學上可以證明，這樣分配，合起來的誤差會最小；證明要用到統計，這門課先記口訣就好：</a:t>
+            </a:r>
+            <a:r>
+              <a:rPr sz="850" b="1" lang="zh-TW" dirty="0">
+                <a:solidFill>
+                  <a:srgbClr val="000000"/>
+                </a:solidFill>
+                <a:latin typeface="Arial Unicode MS"/>
+                <a:ea typeface="Arial Unicode MS"/>
+                <a:cs typeface="Arial Unicode MS"/>
+              </a:rPr>
+              <a:t>誤差差幾倍，信任就差那個數字的平方倍。</a:t>
+            </a:r>
+            <a:r>
+              <a:rPr sz="850" lang="zh-TW" dirty="0">
+                <a:solidFill>
+                  <a:srgbClr val="000000"/>
+                </a:solidFill>
+                <a:latin typeface="Arial Unicode MS"/>
+                <a:ea typeface="Arial Unicode MS"/>
+                <a:cs typeface="Arial Unicode MS"/>
+              </a:rPr>
+              <a:t>而且合起來的結果，比兩個單獨的都更確定。
+</a:t>
+            </a:r>
+          </a:p>
+          <a:p>
+            <a:pPr algn="l">
+              <a:spcBef>
+                <a:spcPts val="0"/>
+              </a:spcBef>
+              <a:spcAft>
+                <a:spcPts val="142"/>
+              </a:spcAft>
+            </a:pPr>
+            <a:r>
+              <a:rPr sz="850" lang="zh-TW" dirty="0">
+                <a:solidFill>
+                  <a:srgbClr val="000000"/>
+                </a:solidFill>
+                <a:latin typeface="Arial Unicode MS"/>
+                <a:ea typeface="Arial Unicode MS"/>
+                <a:cs typeface="Arial Unicode MS"/>
+              </a:rPr>
+              <a:t>進了隧道，GPS 沒了，只剩預測，誤差圈一秒一秒變大；出了隧道，GPS 一回來，一下就拉回來。
+</a:t>
+            </a:r>
+          </a:p>
+          <a:p>
+            <a:pPr algn="l">
+              <a:spcBef>
+                <a:spcPts val="0"/>
+              </a:spcBef>
+              <a:spcAft>
+                <a:spcPts val="142"/>
+              </a:spcAft>
+            </a:pPr>
+            <a:r>
+              <a:rPr sz="850" lang="zh-TW" dirty="0">
+                <a:solidFill>
+                  <a:srgbClr val="000000"/>
+                </a:solidFill>
+                <a:latin typeface="Arial Unicode MS"/>
+                <a:ea typeface="Arial Unicode MS"/>
+                <a:cs typeface="Arial Unicode MS"/>
+              </a:rPr>
+              <a:t>如果壞到合起來也不夠呢？第十一張：</a:t>
+            </a:r>
+            <a:r>
+              <a:rPr sz="850" b="1" lang="zh-TW" dirty="0">
+                <a:solidFill>
+                  <a:srgbClr val="000000"/>
+                </a:solidFill>
+                <a:latin typeface="Arial Unicode MS"/>
+                <a:ea typeface="Arial Unicode MS"/>
+                <a:cs typeface="Arial Unicode MS"/>
+              </a:rPr>
+              <a:t>降級</a:t>
+            </a:r>
+            <a:r>
+              <a:rPr sz="850" lang="zh-TW" dirty="0">
+                <a:solidFill>
+                  <a:srgbClr val="000000"/>
+                </a:solidFill>
+                <a:latin typeface="Arial Unicode MS"/>
+                <a:ea typeface="Arial Unicode MS"/>
+                <a:cs typeface="Arial Unicode MS"/>
+              </a:rPr>
+              <a:t>。雨大到相機看不見、光達也變短，就是走出 ODD 了。L2 的車會叫駕駛接手；L4 的車沒有駕駛，自己減速、打雙黃燈、靠右邊停下來。
+</a:t>
+            </a:r>
+          </a:p>
+          <a:p>
+            <a:pPr algn="l">
+              <a:spcBef>
+                <a:spcPts val="0"/>
+              </a:spcBef>
+              <a:spcAft>
+                <a:spcPts val="142"/>
+              </a:spcAft>
+            </a:pPr>
+            <a:r>
+              <a:rPr sz="850" lang="zh-TW" dirty="0">
+                <a:solidFill>
+                  <a:srgbClr val="000000"/>
+                </a:solidFill>
+                <a:latin typeface="Arial Unicode MS"/>
+                <a:ea typeface="Arial Unicode MS"/>
+                <a:cs typeface="Arial Unicode MS"/>
+              </a:rPr>
+              <a:t>最後，第十二張那五組搭檔，其實只有兩種模式：一個管「是什麼」，一個管「多遠、多快」；或是一個壞了，另一個先頂上。
+</a:t>
+            </a:r>
+          </a:p>
+          <a:p>
+            <a:pPr algn="l">
+              <a:spcBef>
+                <a:spcPts val="0"/>
+              </a:spcBef>
+              <a:spcAft>
+                <a:spcPts val="142"/>
+              </a:spcAft>
+            </a:pPr>
+            <a:r>
+              <a:rPr sz="850" b="1" lang="zh-TW" dirty="0">
+                <a:solidFill>
+                  <a:srgbClr val="000000"/>
+                </a:solidFill>
+                <a:latin typeface="Arial Unicode MS"/>
+                <a:ea typeface="Arial Unicode MS"/>
+                <a:cs typeface="Arial Unicode MS"/>
+              </a:rPr>
+              <a:t>下一節</a:t>
+            </a:r>
+            <a:r>
+              <a:rPr sz="850" lang="zh-TW" dirty="0">
+                <a:solidFill>
+                  <a:srgbClr val="000000"/>
+                </a:solidFill>
+                <a:latin typeface="Arial Unicode MS"/>
+                <a:ea typeface="Arial Unicode MS"/>
+                <a:cs typeface="Arial Unicode MS"/>
+              </a:rPr>
+              <a:t>，各位要自己動手。打開 nuScenes 觀察台，看同一個瞬間，相機、光達、雷達各看到什麼；任務五用「合起來」那個開關，自己拼一次第一組搭檔：相機說是什麼、光達說多遠、雷達說多快；最後把第三週那張「誰補誰」的表，真的填完。</a:t>
+            </a:r>
+          </a:p>
+        </p:txBody>
+      </p:sp>
+      <p:sp>
+        <p:nvSpPr>
+          <p:cNvPr id="4" name="Slide Number Placeholder 3"/>
+          <p:cNvSpPr>
+            <a:spLocks noGrp="1"/>
+          </p:cNvSpPr>
+          <p:nvPr>
+            <p:ph type="sldNum" idx="5"/>
+          </p:nvPr>
+        </p:nvSpPr>
+        <p:spPr>
+          <a:xfrm>
+            <a:off x="6500000" y="10200000"/>
+            <a:ext cx="500000" cy="300000"/>
+          </a:xfrm>
+        </p:spPr>
+        <p:txBody>
+          <a:bodyPr vert="horz" wrap="square" anchor="t" lIns="91440" rIns="91440" tIns="45720" bIns="45720"/>
+          <a:lstStyle/>
+          <a:p>
+            <a:pPr algn="l">
+              <a:spcBef>
+                <a:spcPts val="0"/>
+              </a:spcBef>
+              <a:spcAft>
+                <a:spcPts val="167"/>
+              </a:spcAft>
+            </a:pPr>
+            <a:r>
+              <a:rPr sz="1000" lang="zh-TW" dirty="0">
+                <a:solidFill>
+                  <a:srgbClr val="000000"/>
+                </a:solidFill>
+                <a:latin typeface="Arial Unicode MS"/>
+                <a:ea typeface="Arial Unicode MS"/>
+                <a:cs typeface="Arial Unicode MS"/>
+              </a:rPr>
+              <a:t>13</a:t>
             </a:r>
           </a:p>
         </p:txBody>
@@ -4640,11 +5180,11 @@
                 <a:spcPts val="0"/>
               </a:spcBef>
               <a:spcAft>
-                <a:spcPts val="225"/>
+                <a:spcPts val="233"/>
               </a:spcAft>
             </a:pPr>
             <a:r>
-              <a:rPr sz="1350" b="1" lang="zh-TW" dirty="0">
+              <a:rPr sz="1400" b="1" lang="zh-TW" dirty="0">
                 <a:solidFill>
                   <a:srgbClr val="000000"/>
                 </a:solidFill>
@@ -4655,15 +5195,15 @@
               <a:t>這一張的目的：</a:t>
             </a:r>
             <a:r>
-              <a:rPr sz="1350" lang="zh-TW" dirty="0">
-                <a:solidFill>
-                  <a:srgbClr val="000000"/>
-                </a:solidFill>
-                <a:latin typeface="Arial Unicode MS"/>
-                <a:ea typeface="Arial Unicode MS"/>
-                <a:cs typeface="Arial Unicode MS"/>
-              </a:rPr>
-              <a:t>讓大家知道，後期融合最關鍵的一步是「對應」，把雷達的點對到相機的框上。
+              <a:rPr sz="1400" lang="zh-TW" dirty="0">
+                <a:solidFill>
+                  <a:srgbClr val="000000"/>
+                </a:solidFill>
+                <a:latin typeface="Arial Unicode MS"/>
+                <a:ea typeface="Arial Unicode MS"/>
+                <a:cs typeface="Arial Unicode MS"/>
+              </a:rPr>
+              <a:t>讓大家把三種融合放在一起比，看出它們各有好壞，沒有一種在每一列都贏。
 </a:t>
             </a:r>
           </a:p>
@@ -4673,41 +5213,19 @@
                 <a:spcPts val="0"/>
               </a:spcBef>
               <a:spcAft>
-                <a:spcPts val="225"/>
+                <a:spcPts val="233"/>
               </a:spcAft>
             </a:pPr>
             <a:r>
-              <a:rPr sz="1350" lang="zh-TW" dirty="0">
-                <a:solidFill>
-                  <a:srgbClr val="000000"/>
-                </a:solidFill>
-                <a:latin typeface="Arial Unicode MS"/>
-                <a:ea typeface="Arial Unicode MS"/>
-                <a:cs typeface="Arial Unicode MS"/>
-              </a:rPr>
-              <a:t>後期融合最關鍵的一步，叫</a:t>
-            </a:r>
-            <a:r>
-              <a:rPr sz="1350" b="1" lang="zh-TW" dirty="0">
-                <a:solidFill>
-                  <a:srgbClr val="000000"/>
-                </a:solidFill>
-                <a:latin typeface="Arial Unicode MS"/>
-                <a:ea typeface="Arial Unicode MS"/>
-                <a:cs typeface="Arial Unicode MS"/>
-              </a:rPr>
-              <a:t>對應</a:t>
-            </a:r>
-            <a:r>
-              <a:rPr sz="1350" lang="zh-TW" dirty="0">
-                <a:solidFill>
-                  <a:srgbClr val="000000"/>
-                </a:solidFill>
-                <a:latin typeface="Arial Unicode MS"/>
-                <a:ea typeface="Arial Unicode MS"/>
-                <a:cs typeface="Arial Unicode MS"/>
-              </a:rPr>
-              <a:t>：雷達的這個點，跟相機的哪一個框，是同一個東西？
+              <a:rPr sz="1400" lang="zh-TW" dirty="0">
+                <a:solidFill>
+                  <a:srgbClr val="000000"/>
+                </a:solidFill>
+                <a:latin typeface="Arial Unicode MS"/>
+                <a:ea typeface="Arial Unicode MS"/>
+                <a:cs typeface="Arial Unicode MS"/>
+              </a:rPr>
+              <a:t>上一張講了三種融合的時間點，這一張把它們排成一張表比一比。先直著讀，一欄一種。
 </a:t>
             </a:r>
           </a:p>
@@ -4717,19 +5235,30 @@
                 <a:spcPts val="0"/>
               </a:spcBef>
               <a:spcAft>
-                <a:spcPts val="225"/>
+                <a:spcPts val="233"/>
               </a:spcAft>
             </a:pPr>
             <a:r>
-              <a:rPr sz="1350" lang="zh-TW" dirty="0">
-                <a:solidFill>
-                  <a:srgbClr val="000000"/>
-                </a:solidFill>
-                <a:latin typeface="Arial Unicode MS"/>
-                <a:ea typeface="Arial Unicode MS"/>
-                <a:cs typeface="Arial Unicode MS"/>
-              </a:rPr>
-              <a:t>就像拿到一張班級照片和一份名單，要把名字對到臉上。對錯了，「時速三十」就被安到另一台車身上。
+              <a:rPr sz="1400" b="1" lang="zh-TW" dirty="0">
+                <a:solidFill>
+                  <a:srgbClr val="000000"/>
+                </a:solidFill>
+                <a:latin typeface="Arial Unicode MS"/>
+                <a:ea typeface="Arial Unicode MS"/>
+                <a:cs typeface="Arial Unicode MS"/>
+              </a:rPr>
+              <a:t>前期融合</a:t>
+            </a:r>
+            <a:r>
+              <a:rPr sz="1400" lang="zh-TW" dirty="0">
+                <a:solidFill>
+                  <a:srgbClr val="000000"/>
+                </a:solidFill>
+                <a:latin typeface="Arial Unicode MS"/>
+                <a:ea typeface="Arial Unicode MS"/>
+                <a:cs typeface="Arial Unicode MS"/>
+              </a:rPr>
+              <a:t>，原始資料一拿到就合，像第四張把光達的點直接投到照片上。好處是留下的資訊最多，照片上每一個點都知道自己多遠。代價是對齊要最準：第四張看過，差四度，點就整片滑掉；而且要處理的資料量最大；壞了一顆，合出來的整份資料都受影響。
 </a:t>
             </a:r>
           </a:p>
@@ -4739,63 +5268,30 @@
                 <a:spcPts val="0"/>
               </a:spcBef>
               <a:spcAft>
-                <a:spcPts val="225"/>
+                <a:spcPts val="233"/>
               </a:spcAft>
             </a:pPr>
             <a:r>
-              <a:rPr sz="1350" lang="zh-TW" dirty="0">
-                <a:solidFill>
-                  <a:srgbClr val="000000"/>
-                </a:solidFill>
-                <a:latin typeface="Arial Unicode MS"/>
-                <a:ea typeface="Arial Unicode MS"/>
-                <a:cs typeface="Arial Unicode MS"/>
-              </a:rPr>
-              <a:t>看左圖，波士頓的一條街。框是官方標註的物體，紅圈是雷達點。</a:t>
-            </a:r>
-            <a:r>
-              <a:rPr sz="1350" b="1" lang="zh-TW" dirty="0">
-                <a:solidFill>
-                  <a:srgbClr val="000000"/>
-                </a:solidFill>
-                <a:latin typeface="Arial Unicode MS"/>
-                <a:ea typeface="Arial Unicode MS"/>
-                <a:cs typeface="Arial Unicode MS"/>
-              </a:rPr>
-              <a:t>綠框</a:t>
-            </a:r>
-            <a:r>
-              <a:rPr sz="1350" lang="zh-TW" dirty="0">
-                <a:solidFill>
-                  <a:srgbClr val="000000"/>
-                </a:solidFill>
-                <a:latin typeface="Arial Unicode MS"/>
-                <a:ea typeface="Arial Unicode MS"/>
-                <a:cs typeface="Arial Unicode MS"/>
-              </a:rPr>
-              <a:t>，是框裡至少有一個雷達點的：路邊停的那幾台車，框裡都有紅圈。</a:t>
-            </a:r>
-            <a:r>
-              <a:rPr sz="1350" b="1" lang="zh-TW" dirty="0">
-                <a:solidFill>
-                  <a:srgbClr val="000000"/>
-                </a:solidFill>
-                <a:latin typeface="Arial Unicode MS"/>
-                <a:ea typeface="Arial Unicode MS"/>
-                <a:cs typeface="Arial Unicode MS"/>
-              </a:rPr>
-              <a:t>黃框</a:t>
-            </a:r>
-            <a:r>
-              <a:rPr sz="1350" lang="zh-TW" dirty="0">
-                <a:solidFill>
-                  <a:srgbClr val="000000"/>
-                </a:solidFill>
-                <a:latin typeface="Arial Unicode MS"/>
-                <a:ea typeface="Arial Unicode MS"/>
-                <a:cs typeface="Arial Unicode MS"/>
-              </a:rPr>
-              <a:t>，是一個雷達點都沒有的：四個行人，和好幾台遠處的車，大多在四十五公尺以外。這跟上一節那張統計表一樣：雷達抓得到近處的車，抓不太到人，車子一遠也開始漏。
+              <a:rPr sz="1400" b="1" lang="zh-TW" dirty="0">
+                <a:solidFill>
+                  <a:srgbClr val="000000"/>
+                </a:solidFill>
+                <a:latin typeface="Arial Unicode MS"/>
+                <a:ea typeface="Arial Unicode MS"/>
+                <a:cs typeface="Arial Unicode MS"/>
+              </a:rPr>
+              <a:t>中期融合</a:t>
+            </a:r>
+            <a:r>
+              <a:rPr sz="1400" lang="zh-TW" dirty="0">
+                <a:solidFill>
+                  <a:srgbClr val="000000"/>
+                </a:solidFill>
+                <a:latin typeface="Arial Unicode MS"/>
+                <a:ea typeface="Arial Unicode MS"/>
+                <a:cs typeface="Arial Unicode MS"/>
+              </a:rPr>
+              <a:t>，每一顆先各自整理出重點，再合。現在很流行的做法，是大家先各自畫成同一張從上往下看的鳥瞰圖，再疊起來。各方面都在中間。
 </a:t>
             </a:r>
           </a:p>
@@ -4805,41 +5301,30 @@
                 <a:spcPts val="0"/>
               </a:spcBef>
               <a:spcAft>
-                <a:spcPts val="225"/>
+                <a:spcPts val="233"/>
               </a:spcAft>
             </a:pPr>
             <a:r>
-              <a:rPr sz="1350" lang="zh-TW" dirty="0">
-                <a:solidFill>
-                  <a:srgbClr val="000000"/>
-                </a:solidFill>
-                <a:latin typeface="Arial Unicode MS"/>
-                <a:ea typeface="Arial Unicode MS"/>
-                <a:cs typeface="Arial Unicode MS"/>
-              </a:rPr>
-              <a:t>再看路的右邊，有一長排紅圈，排在人行道旁邊，沒有任何框。那多半是路邊的東西，可能是欄杆、樹、號誌桿。這些點不屬於任何一台標註的物體，對應的時候要</a:t>
-            </a:r>
-            <a:r>
-              <a:rPr sz="1350" b="1" lang="zh-TW" dirty="0">
-                <a:solidFill>
-                  <a:srgbClr val="000000"/>
-                </a:solidFill>
-                <a:latin typeface="Arial Unicode MS"/>
-                <a:ea typeface="Arial Unicode MS"/>
-                <a:cs typeface="Arial Unicode MS"/>
-              </a:rPr>
-              <a:t>正確地丟掉</a:t>
-            </a:r>
-            <a:r>
-              <a:rPr sz="1350" lang="zh-TW" dirty="0">
-                <a:solidFill>
-                  <a:srgbClr val="000000"/>
-                </a:solidFill>
-                <a:latin typeface="Arial Unicode MS"/>
-                <a:ea typeface="Arial Unicode MS"/>
-                <a:cs typeface="Arial Unicode MS"/>
-              </a:rPr>
-              <a:t>，不然就變成上一節講的幽靈煞車。
+              <a:rPr sz="1400" b="1" lang="zh-TW" dirty="0">
+                <a:solidFill>
+                  <a:srgbClr val="000000"/>
+                </a:solidFill>
+                <a:latin typeface="Arial Unicode MS"/>
+                <a:ea typeface="Arial Unicode MS"/>
+                <a:cs typeface="Arial Unicode MS"/>
+              </a:rPr>
+              <a:t>後期融合</a:t>
+            </a:r>
+            <a:r>
+              <a:rPr sz="1400" lang="zh-TW" dirty="0">
+                <a:solidFill>
+                  <a:srgbClr val="000000"/>
+                </a:solidFill>
+                <a:latin typeface="Arial Unicode MS"/>
+                <a:ea typeface="Arial Unicode MS"/>
+                <a:cs typeface="Arial Unicode MS"/>
+              </a:rPr>
+              <a:t>，每一顆先自己把物體找出來，變成一張清單，最後才把清單對起來，像第八張相機的框配雷達的目標。最簡單、資料量最小，壞了一顆，另一顆的清單還在，比較好處理；對齊也比較寬鬆，只要對到同一個物體就好。代價是每一顆自己丟掉的資訊，就再也拿不回來了：雷達覺得太弱、沒列進清單的行人，合的時候就不存在。
 </a:t>
             </a:r>
           </a:p>
@@ -4849,63 +5334,41 @@
                 <a:spcPts val="0"/>
               </a:spcBef>
               <a:spcAft>
-                <a:spcPts val="225"/>
+                <a:spcPts val="233"/>
               </a:spcAft>
             </a:pPr>
             <a:r>
-              <a:rPr sz="1350" lang="zh-TW" dirty="0">
-                <a:solidFill>
-                  <a:srgbClr val="000000"/>
-                </a:solidFill>
-                <a:latin typeface="Arial Unicode MS"/>
-                <a:ea typeface="Arial Unicode MS"/>
-                <a:cs typeface="Arial Unicode MS"/>
-              </a:rPr>
-              <a:t>怎麼對？最簡單的就是看</a:t>
-            </a:r>
-            <a:r>
-              <a:rPr sz="1350" b="1" lang="zh-TW" dirty="0">
-                <a:solidFill>
-                  <a:srgbClr val="000000"/>
-                </a:solidFill>
-                <a:latin typeface="Arial Unicode MS"/>
-                <a:ea typeface="Arial Unicode MS"/>
-                <a:cs typeface="Arial Unicode MS"/>
-              </a:rPr>
-              <a:t>位置</a:t>
-            </a:r>
-            <a:r>
-              <a:rPr sz="1350" lang="zh-TW" dirty="0">
-                <a:solidFill>
-                  <a:srgbClr val="000000"/>
-                </a:solidFill>
-                <a:latin typeface="Arial Unicode MS"/>
-                <a:ea typeface="Arial Unicode MS"/>
-                <a:cs typeface="Arial Unicode MS"/>
-              </a:rPr>
-              <a:t>：雷達點落在哪個框附近，就算它的。再加上</a:t>
-            </a:r>
-            <a:r>
-              <a:rPr sz="1350" b="1" lang="zh-TW" dirty="0">
-                <a:solidFill>
-                  <a:srgbClr val="000000"/>
-                </a:solidFill>
-                <a:latin typeface="Arial Unicode MS"/>
-                <a:ea typeface="Arial Unicode MS"/>
-                <a:cs typeface="Arial Unicode MS"/>
-              </a:rPr>
-              <a:t>速度</a:t>
-            </a:r>
-            <a:r>
-              <a:rPr sz="1350" lang="zh-TW" dirty="0">
-                <a:solidFill>
-                  <a:srgbClr val="000000"/>
-                </a:solidFill>
-                <a:latin typeface="Arial Unicode MS"/>
-                <a:ea typeface="Arial Unicode MS"/>
-                <a:cs typeface="Arial Unicode MS"/>
-              </a:rPr>
-              <a:t>：雷達量得到速度，一個靜止的點，不會是一台正在開的車。
+              <a:rPr sz="1400" lang="zh-TW" dirty="0">
+                <a:solidFill>
+                  <a:srgbClr val="000000"/>
+                </a:solidFill>
+                <a:latin typeface="Arial Unicode MS"/>
+                <a:ea typeface="Arial Unicode MS"/>
+                <a:cs typeface="Arial Unicode MS"/>
+              </a:rPr>
+              <a:t>再橫著讀兩列：「留下的資訊」和「對齊要多準」，剛好相反。</a:t>
+            </a:r>
+            <a:r>
+              <a:rPr sz="1400" b="1" lang="zh-TW" dirty="0">
+                <a:solidFill>
+                  <a:srgbClr val="000000"/>
+                </a:solidFill>
+                <a:latin typeface="Arial Unicode MS"/>
+                <a:ea typeface="Arial Unicode MS"/>
+                <a:cs typeface="Arial Unicode MS"/>
+              </a:rPr>
+              <a:t>留下的資訊愈多，對齊就要愈準。</a:t>
+            </a:r>
+            <a:r>
+              <a:rPr sz="1400" lang="zh-TW" dirty="0">
+                <a:solidFill>
+                  <a:srgbClr val="000000"/>
+                </a:solidFill>
+                <a:latin typeface="Arial Unicode MS"/>
+                <a:ea typeface="Arial Unicode MS"/>
+                <a:cs typeface="Arial Unicode MS"/>
+              </a:rPr>
+              <a:t>就像一個團隊做報告：前期是把每個人的原始資料丟進同一個資料夾一起看，最完整，可是格式要先統一；後期是每個人先寫好自己的結論再合成一份，最省事，可是每個人沒寫進結論的細節就看不到了。
 </a:t>
             </a:r>
           </a:p>
@@ -4915,129 +5378,19 @@
                 <a:spcPts val="0"/>
               </a:spcBef>
               <a:spcAft>
-                <a:spcPts val="225"/>
+                <a:spcPts val="233"/>
               </a:spcAft>
             </a:pPr>
             <a:r>
-              <a:rPr sz="1350" lang="zh-TW" dirty="0">
-                <a:solidFill>
-                  <a:srgbClr val="000000"/>
-                </a:solidFill>
-                <a:latin typeface="Arial Unicode MS"/>
-                <a:ea typeface="Arial Unicode MS"/>
-                <a:cs typeface="Arial Unicode MS"/>
-              </a:rPr>
-              <a:t>看一支影片，NVIDIA 做自駕晶片的團隊。</a:t>
-            </a:r>
-            <a:r>
-              <a:rPr sz="1350" b="1" lang="zh-TW" dirty="0">
-                <a:solidFill>
-                  <a:srgbClr val="000000"/>
-                </a:solidFill>
-                <a:latin typeface="Arial Unicode MS"/>
-                <a:ea typeface="Arial Unicode MS"/>
-                <a:cs typeface="Arial Unicode MS"/>
-              </a:rPr>
-              <a:t>從 0:42 播到 1:30。</a:t>
-            </a:r>
-            <a:r>
-              <a:rPr sz="1350" lang="zh-TW" dirty="0">
-                <a:solidFill>
-                  <a:srgbClr val="000000"/>
-                </a:solidFill>
-                <a:latin typeface="Arial Unicode MS"/>
-                <a:ea typeface="Arial Unicode MS"/>
-                <a:cs typeface="Arial Unicode MS"/>
-              </a:rPr>
-              <a:t>英文，我邊播邊講。畫面是車子周圍幾台相機拼起來的；</a:t>
-            </a:r>
-            <a:r>
-              <a:rPr sz="1350" b="1" lang="zh-TW" dirty="0">
-                <a:solidFill>
-                  <a:srgbClr val="000000"/>
-                </a:solidFill>
-                <a:latin typeface="Arial Unicode MS"/>
-                <a:ea typeface="Arial Unicode MS"/>
-                <a:cs typeface="Arial Unicode MS"/>
-              </a:rPr>
-              <a:t>0:47 小白方塊是雷達追蹤到的目標，橘色的線是它走過的路</a:t>
-            </a:r>
-            <a:r>
-              <a:rPr sz="1350" lang="zh-TW" dirty="0">
-                <a:solidFill>
-                  <a:srgbClr val="000000"/>
-                </a:solidFill>
-                <a:latin typeface="Arial Unicode MS"/>
-                <a:ea typeface="Arial Unicode MS"/>
-                <a:cs typeface="Arial Unicode MS"/>
-              </a:rPr>
-              <a:t>。</a:t>
-            </a:r>
-            <a:r>
-              <a:rPr sz="1350" b="1" lang="zh-TW" dirty="0">
-                <a:solidFill>
-                  <a:srgbClr val="000000"/>
-                </a:solidFill>
-                <a:latin typeface="Arial Unicode MS"/>
-                <a:ea typeface="Arial Unicode MS"/>
-                <a:cs typeface="Arial Unicode MS"/>
-              </a:rPr>
-              <a:t>0:52</a:t>
-            </a:r>
-            <a:r>
-              <a:rPr sz="1350" lang="zh-TW" dirty="0">
-                <a:solidFill>
-                  <a:srgbClr val="000000"/>
-                </a:solidFill>
-                <a:latin typeface="Arial Unicode MS"/>
-                <a:ea typeface="Arial Unicode MS"/>
-                <a:cs typeface="Arial Unicode MS"/>
-              </a:rPr>
-              <a:t> 旁白說：相機框出來的物體，和雷達的目標對上之後，小方塊會變成綠色。</a:t>
-            </a:r>
-            <a:r>
-              <a:rPr sz="1350" b="1" lang="zh-TW" dirty="0">
-                <a:solidFill>
-                  <a:srgbClr val="000000"/>
-                </a:solidFill>
-                <a:latin typeface="Arial Unicode MS"/>
-                <a:ea typeface="Arial Unicode MS"/>
-                <a:cs typeface="Arial Unicode MS"/>
-              </a:rPr>
-              <a:t>0:58</a:t>
-            </a:r>
-            <a:r>
-              <a:rPr sz="1350" lang="zh-TW" dirty="0">
-                <a:solidFill>
-                  <a:srgbClr val="000000"/>
-                </a:solidFill>
-                <a:latin typeface="Arial Unicode MS"/>
-                <a:ea typeface="Arial Unicode MS"/>
-                <a:cs typeface="Arial Unicode MS"/>
-              </a:rPr>
-              <a:t> 旁白講了融合的好處：位置、速度、加速度，都變得更準、更可靠。</a:t>
-            </a:r>
-            <a:r>
-              <a:rPr sz="1350" b="1" lang="zh-TW" dirty="0">
-                <a:solidFill>
-                  <a:srgbClr val="000000"/>
-                </a:solidFill>
-                <a:latin typeface="Arial Unicode MS"/>
-                <a:ea typeface="Arial Unicode MS"/>
-                <a:cs typeface="Arial Unicode MS"/>
-              </a:rPr>
-              <a:t>1:10</a:t>
-            </a:r>
-            <a:r>
-              <a:rPr sz="1350" lang="zh-TW" dirty="0">
-                <a:solidFill>
-                  <a:srgbClr val="000000"/>
-                </a:solidFill>
-                <a:latin typeface="Arial Unicode MS"/>
-                <a:ea typeface="Arial Unicode MS"/>
-                <a:cs typeface="Arial Unicode MS"/>
-              </a:rPr>
-              <a:t> 左右並排：左邊是雷達的鳥瞰圖，黃色方塊是相機找到的物體、綠色菱形是雷達的目標，兩個連在一起就是對上了；右邊是相機的畫面，綠框配綠色小方塊。</a:t>
+              <a:rPr sz="1400" lang="zh-TW" dirty="0">
+                <a:solidFill>
+                  <a:srgbClr val="000000"/>
+                </a:solidFill>
+                <a:latin typeface="Arial Unicode MS"/>
+                <a:ea typeface="Arial Unicode MS"/>
+                <a:cs typeface="Arial Unicode MS"/>
+              </a:rPr>
+              <a:t>所以沒有一種在每一列都贏。真的車上常常混著用。</a:t>
             </a:r>
           </a:p>
         </p:txBody>
@@ -5146,11 +5499,11 @@
                 <a:spcPts val="0"/>
               </a:spcBef>
               <a:spcAft>
-                <a:spcPts val="267"/>
+                <a:spcPts val="225"/>
               </a:spcAft>
             </a:pPr>
             <a:r>
-              <a:rPr sz="1600" b="1" lang="zh-TW" dirty="0">
+              <a:rPr sz="1350" b="1" lang="zh-TW" dirty="0">
                 <a:solidFill>
                   <a:srgbClr val="000000"/>
                 </a:solidFill>
@@ -5161,15 +5514,15 @@
               <a:t>這一張的目的：</a:t>
             </a:r>
             <a:r>
-              <a:rPr sz="1600" lang="zh-TW" dirty="0">
-                <a:solidFill>
-                  <a:srgbClr val="000000"/>
-                </a:solidFill>
-                <a:latin typeface="Arial Unicode MS"/>
-                <a:ea typeface="Arial Unicode MS"/>
-                <a:cs typeface="Arial Unicode MS"/>
-              </a:rPr>
-              <a:t>讓大家知道，說法不一樣時有三種決定方式，每一種都有代價，真的系統混著用。
+              <a:rPr sz="1350" lang="zh-TW" dirty="0">
+                <a:solidFill>
+                  <a:srgbClr val="000000"/>
+                </a:solidFill>
+                <a:latin typeface="Arial Unicode MS"/>
+                <a:ea typeface="Arial Unicode MS"/>
+                <a:cs typeface="Arial Unicode MS"/>
+              </a:rPr>
+              <a:t>讓大家知道，後期融合最關鍵的一步是「對應」，把雷達的點對到相機的框上。
 </a:t>
             </a:r>
           </a:p>
@@ -5179,19 +5532,41 @@
                 <a:spcPts val="0"/>
               </a:spcBef>
               <a:spcAft>
-                <a:spcPts val="267"/>
+                <a:spcPts val="225"/>
               </a:spcAft>
             </a:pPr>
             <a:r>
-              <a:rPr sz="1600" lang="zh-TW" dirty="0">
-                <a:solidFill>
-                  <a:srgbClr val="000000"/>
-                </a:solidFill>
-                <a:latin typeface="Arial Unicode MS"/>
-                <a:ea typeface="Arial Unicode MS"/>
-                <a:cs typeface="Arial Unicode MS"/>
-              </a:rPr>
-              <a:t>回到開場那一題：雷達說有，相機說沒有。常見的做法有三種。
+              <a:rPr sz="1350" lang="zh-TW" dirty="0">
+                <a:solidFill>
+                  <a:srgbClr val="000000"/>
+                </a:solidFill>
+                <a:latin typeface="Arial Unicode MS"/>
+                <a:ea typeface="Arial Unicode MS"/>
+                <a:cs typeface="Arial Unicode MS"/>
+              </a:rPr>
+              <a:t>後期融合最關鍵的一步，叫</a:t>
+            </a:r>
+            <a:r>
+              <a:rPr sz="1350" b="1" lang="zh-TW" dirty="0">
+                <a:solidFill>
+                  <a:srgbClr val="000000"/>
+                </a:solidFill>
+                <a:latin typeface="Arial Unicode MS"/>
+                <a:ea typeface="Arial Unicode MS"/>
+                <a:cs typeface="Arial Unicode MS"/>
+              </a:rPr>
+              <a:t>對應</a:t>
+            </a:r>
+            <a:r>
+              <a:rPr sz="1350" lang="zh-TW" dirty="0">
+                <a:solidFill>
+                  <a:srgbClr val="000000"/>
+                </a:solidFill>
+                <a:latin typeface="Arial Unicode MS"/>
+                <a:ea typeface="Arial Unicode MS"/>
+                <a:cs typeface="Arial Unicode MS"/>
+              </a:rPr>
+              <a:t>：雷達的這個點，跟相機的哪一個框，是同一個東西？
 </a:t>
             </a:r>
           </a:p>
@@ -5201,52 +5576,19 @@
                 <a:spcPts val="0"/>
               </a:spcBef>
               <a:spcAft>
-                <a:spcPts val="267"/>
+                <a:spcPts val="225"/>
               </a:spcAft>
             </a:pPr>
             <a:r>
-              <a:rPr sz="1600" b="1" lang="zh-TW" dirty="0">
-                <a:solidFill>
-                  <a:srgbClr val="000000"/>
-                </a:solidFill>
-                <a:latin typeface="Arial Unicode MS"/>
-                <a:ea typeface="Arial Unicode MS"/>
-                <a:cs typeface="Arial Unicode MS"/>
-              </a:rPr>
-              <a:t>第一種，看條件決定信誰。</a:t>
-            </a:r>
-            <a:r>
-              <a:rPr sz="1600" lang="zh-TW" dirty="0">
-                <a:solidFill>
-                  <a:srgbClr val="000000"/>
-                </a:solidFill>
-                <a:latin typeface="Arial Unicode MS"/>
-                <a:ea typeface="Arial Unicode MS"/>
-                <a:cs typeface="Arial Unicode MS"/>
-              </a:rPr>
-              <a:t>每一顆感測器有一個「權重」，就是你有多相信它，而且權重會跟著條件變。上一節那張失效對照表就是權重表：下雨，相機打叉，就少相信相機、多相信雷達；遠處的行人，雷達打叉，就少相信雷達。代價是：你要</a:t>
-            </a:r>
-            <a:r>
-              <a:rPr sz="1600" b="1" lang="zh-TW" dirty="0">
-                <a:solidFill>
-                  <a:srgbClr val="000000"/>
-                </a:solidFill>
-                <a:latin typeface="Arial Unicode MS"/>
-                <a:ea typeface="Arial Unicode MS"/>
-                <a:cs typeface="Arial Unicode MS"/>
-              </a:rPr>
-              <a:t>事先知道</a:t>
-            </a:r>
-            <a:r>
-              <a:rPr sz="1600" lang="zh-TW" dirty="0">
-                <a:solidFill>
-                  <a:srgbClr val="000000"/>
-                </a:solidFill>
-                <a:latin typeface="Arial Unicode MS"/>
-                <a:ea typeface="Arial Unicode MS"/>
-                <a:cs typeface="Arial Unicode MS"/>
-              </a:rPr>
-              <a:t>它什麼時候變差，所以上一節那張表很重要。
+              <a:rPr sz="1350" lang="zh-TW" dirty="0">
+                <a:solidFill>
+                  <a:srgbClr val="000000"/>
+                </a:solidFill>
+                <a:latin typeface="Arial Unicode MS"/>
+                <a:ea typeface="Arial Unicode MS"/>
+                <a:cs typeface="Arial Unicode MS"/>
+              </a:rPr>
+              <a:t>就像拿到一張班級照片和一份名單，要把名字對到臉上。對錯了，「時速三十」就被安到另一台車身上。
 </a:t>
             </a:r>
           </a:p>
@@ -5256,52 +5598,63 @@
                 <a:spcPts val="0"/>
               </a:spcBef>
               <a:spcAft>
-                <a:spcPts val="267"/>
+                <a:spcPts val="225"/>
               </a:spcAft>
             </a:pPr>
             <a:r>
-              <a:rPr sz="1600" b="1" lang="zh-TW" dirty="0">
-                <a:solidFill>
-                  <a:srgbClr val="000000"/>
-                </a:solidFill>
-                <a:latin typeface="Arial Unicode MS"/>
-                <a:ea typeface="Arial Unicode MS"/>
-                <a:cs typeface="Arial Unicode MS"/>
-              </a:rPr>
-              <a:t>第二種，多數決。</a:t>
-            </a:r>
-            <a:r>
-              <a:rPr sz="1600" lang="zh-TW" dirty="0">
-                <a:solidFill>
-                  <a:srgbClr val="000000"/>
-                </a:solidFill>
-                <a:latin typeface="Arial Unicode MS"/>
-                <a:ea typeface="Arial Unicode MS"/>
-                <a:cs typeface="Arial Unicode MS"/>
-              </a:rPr>
-              <a:t>三顆裡有兩顆說有，就算有。很直覺，但代價是：至少要有三顆在量</a:t>
-            </a:r>
-            <a:r>
-              <a:rPr sz="1600" b="1" lang="zh-TW" dirty="0">
-                <a:solidFill>
-                  <a:srgbClr val="000000"/>
-                </a:solidFill>
-                <a:latin typeface="Arial Unicode MS"/>
-                <a:ea typeface="Arial Unicode MS"/>
-                <a:cs typeface="Arial Unicode MS"/>
-              </a:rPr>
-              <a:t>同一件事</a:t>
-            </a:r>
-            <a:r>
-              <a:rPr sz="1600" lang="zh-TW" dirty="0">
-                <a:solidFill>
-                  <a:srgbClr val="000000"/>
-                </a:solidFill>
-                <a:latin typeface="Arial Unicode MS"/>
-                <a:ea typeface="Arial Unicode MS"/>
-                <a:cs typeface="Arial Unicode MS"/>
-              </a:rPr>
-              <a:t>，不然沒得投票。而且如果兩顆同時被同一個原因騙，例如大雨裡相機和光達一起變差，多數決就會跟著錯。
+              <a:rPr sz="1350" lang="zh-TW" dirty="0">
+                <a:solidFill>
+                  <a:srgbClr val="000000"/>
+                </a:solidFill>
+                <a:latin typeface="Arial Unicode MS"/>
+                <a:ea typeface="Arial Unicode MS"/>
+                <a:cs typeface="Arial Unicode MS"/>
+              </a:rPr>
+              <a:t>看左圖，波士頓的一條街。框是官方標註的物體，紅圈是雷達點。</a:t>
+            </a:r>
+            <a:r>
+              <a:rPr sz="1350" b="1" lang="zh-TW" dirty="0">
+                <a:solidFill>
+                  <a:srgbClr val="000000"/>
+                </a:solidFill>
+                <a:latin typeface="Arial Unicode MS"/>
+                <a:ea typeface="Arial Unicode MS"/>
+                <a:cs typeface="Arial Unicode MS"/>
+              </a:rPr>
+              <a:t>綠框</a:t>
+            </a:r>
+            <a:r>
+              <a:rPr sz="1350" lang="zh-TW" dirty="0">
+                <a:solidFill>
+                  <a:srgbClr val="000000"/>
+                </a:solidFill>
+                <a:latin typeface="Arial Unicode MS"/>
+                <a:ea typeface="Arial Unicode MS"/>
+                <a:cs typeface="Arial Unicode MS"/>
+              </a:rPr>
+              <a:t>，是框裡至少有一個雷達點的：路邊停的那幾台車，框裡都有紅圈。</a:t>
+            </a:r>
+            <a:r>
+              <a:rPr sz="1350" b="1" lang="zh-TW" dirty="0">
+                <a:solidFill>
+                  <a:srgbClr val="000000"/>
+                </a:solidFill>
+                <a:latin typeface="Arial Unicode MS"/>
+                <a:ea typeface="Arial Unicode MS"/>
+                <a:cs typeface="Arial Unicode MS"/>
+              </a:rPr>
+              <a:t>黃框</a:t>
+            </a:r>
+            <a:r>
+              <a:rPr sz="1350" lang="zh-TW" dirty="0">
+                <a:solidFill>
+                  <a:srgbClr val="000000"/>
+                </a:solidFill>
+                <a:latin typeface="Arial Unicode MS"/>
+                <a:ea typeface="Arial Unicode MS"/>
+                <a:cs typeface="Arial Unicode MS"/>
+              </a:rPr>
+              <a:t>，是一個雷達點都沒有的：四個行人，和好幾台遠處的車，大多在四十五公尺以外。這跟上一節那張統計表一樣：雷達抓得到近處的車，抓不太到人，車子一遠也開始漏。
 </a:t>
             </a:r>
           </a:p>
@@ -5311,30 +5664,41 @@
                 <a:spcPts val="0"/>
               </a:spcBef>
               <a:spcAft>
-                <a:spcPts val="267"/>
+                <a:spcPts val="225"/>
               </a:spcAft>
             </a:pPr>
             <a:r>
-              <a:rPr sz="1600" b="1" lang="zh-TW" dirty="0">
-                <a:solidFill>
-                  <a:srgbClr val="000000"/>
-                </a:solidFill>
-                <a:latin typeface="Arial Unicode MS"/>
-                <a:ea typeface="Arial Unicode MS"/>
-                <a:cs typeface="Arial Unicode MS"/>
-              </a:rPr>
-              <a:t>第三種，保守原則。</a:t>
-            </a:r>
-            <a:r>
-              <a:rPr sz="1600" lang="zh-TW" dirty="0">
-                <a:solidFill>
-                  <a:srgbClr val="000000"/>
-                </a:solidFill>
-                <a:latin typeface="Arial Unicode MS"/>
-                <a:ea typeface="Arial Unicode MS"/>
-                <a:cs typeface="Arial Unicode MS"/>
-              </a:rPr>
-              <a:t>只要有一顆說前面有東西，就先減速。最安全，但代價是幽靈煞車會變多，乘客會不舒服，後面的車也可能撞上來。
+              <a:rPr sz="1350" lang="zh-TW" dirty="0">
+                <a:solidFill>
+                  <a:srgbClr val="000000"/>
+                </a:solidFill>
+                <a:latin typeface="Arial Unicode MS"/>
+                <a:ea typeface="Arial Unicode MS"/>
+                <a:cs typeface="Arial Unicode MS"/>
+              </a:rPr>
+              <a:t>再看路的右邊，有一長排紅圈，排在人行道旁邊，沒有任何框。那多半是路邊的東西，可能是欄杆、樹、號誌桿。這些點不屬於任何一台標註的物體，對應的時候要</a:t>
+            </a:r>
+            <a:r>
+              <a:rPr sz="1350" b="1" lang="zh-TW" dirty="0">
+                <a:solidFill>
+                  <a:srgbClr val="000000"/>
+                </a:solidFill>
+                <a:latin typeface="Arial Unicode MS"/>
+                <a:ea typeface="Arial Unicode MS"/>
+                <a:cs typeface="Arial Unicode MS"/>
+              </a:rPr>
+              <a:t>正確地丟掉</a:t>
+            </a:r>
+            <a:r>
+              <a:rPr sz="1350" lang="zh-TW" dirty="0">
+                <a:solidFill>
+                  <a:srgbClr val="000000"/>
+                </a:solidFill>
+                <a:latin typeface="Arial Unicode MS"/>
+                <a:ea typeface="Arial Unicode MS"/>
+                <a:cs typeface="Arial Unicode MS"/>
+              </a:rPr>
+              <a:t>，不然就變成上一節講的幽靈煞車。
 </a:t>
             </a:r>
           </a:p>
@@ -5344,41 +5708,195 @@
                 <a:spcPts val="0"/>
               </a:spcBef>
               <a:spcAft>
-                <a:spcPts val="267"/>
+                <a:spcPts val="225"/>
               </a:spcAft>
             </a:pPr>
             <a:r>
-              <a:rPr sz="1600" lang="zh-TW" dirty="0">
-                <a:solidFill>
-                  <a:srgbClr val="000000"/>
-                </a:solidFill>
-                <a:latin typeface="Arial Unicode MS"/>
-                <a:ea typeface="Arial Unicode MS"/>
-                <a:cs typeface="Arial Unicode MS"/>
-              </a:rPr>
-              <a:t>真的系統，三種混著用。而且最重要的一點：上一節說每一顆都要能說「我現在不可靠」。</a:t>
-            </a:r>
-            <a:r>
-              <a:rPr sz="1600" b="1" lang="zh-TW" dirty="0">
-                <a:solidFill>
-                  <a:srgbClr val="000000"/>
-                </a:solidFill>
-                <a:latin typeface="Arial Unicode MS"/>
-                <a:ea typeface="Arial Unicode MS"/>
-                <a:cs typeface="Arial Unicode MS"/>
-              </a:rPr>
-              <a:t>它一說，它的權重就降下來</a:t>
-            </a:r>
-            <a:r>
-              <a:rPr sz="1600" lang="zh-TW" dirty="0">
-                <a:solidFill>
-                  <a:srgbClr val="000000"/>
-                </a:solidFill>
-                <a:latin typeface="Arial Unicode MS"/>
-                <a:ea typeface="Arial Unicode MS"/>
-                <a:cs typeface="Arial Unicode MS"/>
-              </a:rPr>
-              <a:t>，別人就多扛一點。這就是為什麼「壞了會不會說」那麼重要。</a:t>
+              <a:rPr sz="1350" lang="zh-TW" dirty="0">
+                <a:solidFill>
+                  <a:srgbClr val="000000"/>
+                </a:solidFill>
+                <a:latin typeface="Arial Unicode MS"/>
+                <a:ea typeface="Arial Unicode MS"/>
+                <a:cs typeface="Arial Unicode MS"/>
+              </a:rPr>
+              <a:t>怎麼對？最簡單的就是看</a:t>
+            </a:r>
+            <a:r>
+              <a:rPr sz="1350" b="1" lang="zh-TW" dirty="0">
+                <a:solidFill>
+                  <a:srgbClr val="000000"/>
+                </a:solidFill>
+                <a:latin typeface="Arial Unicode MS"/>
+                <a:ea typeface="Arial Unicode MS"/>
+                <a:cs typeface="Arial Unicode MS"/>
+              </a:rPr>
+              <a:t>位置</a:t>
+            </a:r>
+            <a:r>
+              <a:rPr sz="1350" lang="zh-TW" dirty="0">
+                <a:solidFill>
+                  <a:srgbClr val="000000"/>
+                </a:solidFill>
+                <a:latin typeface="Arial Unicode MS"/>
+                <a:ea typeface="Arial Unicode MS"/>
+                <a:cs typeface="Arial Unicode MS"/>
+              </a:rPr>
+              <a:t>：雷達點落在哪個框附近，就算它的。再加上</a:t>
+            </a:r>
+            <a:r>
+              <a:rPr sz="1350" b="1" lang="zh-TW" dirty="0">
+                <a:solidFill>
+                  <a:srgbClr val="000000"/>
+                </a:solidFill>
+                <a:latin typeface="Arial Unicode MS"/>
+                <a:ea typeface="Arial Unicode MS"/>
+                <a:cs typeface="Arial Unicode MS"/>
+              </a:rPr>
+              <a:t>速度</a:t>
+            </a:r>
+            <a:r>
+              <a:rPr sz="1350" lang="zh-TW" dirty="0">
+                <a:solidFill>
+                  <a:srgbClr val="000000"/>
+                </a:solidFill>
+                <a:latin typeface="Arial Unicode MS"/>
+                <a:ea typeface="Arial Unicode MS"/>
+                <a:cs typeface="Arial Unicode MS"/>
+              </a:rPr>
+              <a:t>：雷達量得到速度，一個靜止的點，不會是一台正在開的車。
+</a:t>
+            </a:r>
+          </a:p>
+          <a:p>
+            <a:pPr algn="l">
+              <a:spcBef>
+                <a:spcPts val="0"/>
+              </a:spcBef>
+              <a:spcAft>
+                <a:spcPts val="225"/>
+              </a:spcAft>
+            </a:pPr>
+            <a:r>
+              <a:rPr sz="1350" lang="zh-TW" dirty="0">
+                <a:solidFill>
+                  <a:srgbClr val="000000"/>
+                </a:solidFill>
+                <a:latin typeface="Arial Unicode MS"/>
+                <a:ea typeface="Arial Unicode MS"/>
+                <a:cs typeface="Arial Unicode MS"/>
+              </a:rPr>
+              <a:t>看一支影片，NVIDIA 做自駕晶片的團隊。</a:t>
+            </a:r>
+            <a:r>
+              <a:rPr sz="1350" b="1" lang="zh-TW" dirty="0">
+                <a:solidFill>
+                  <a:srgbClr val="000000"/>
+                </a:solidFill>
+                <a:latin typeface="Arial Unicode MS"/>
+                <a:ea typeface="Arial Unicode MS"/>
+                <a:cs typeface="Arial Unicode MS"/>
+              </a:rPr>
+              <a:t>從 0:42 播到 1:30。</a:t>
+            </a:r>
+            <a:r>
+              <a:rPr sz="1350" lang="zh-TW" dirty="0">
+                <a:solidFill>
+                  <a:srgbClr val="000000"/>
+                </a:solidFill>
+                <a:latin typeface="Arial Unicode MS"/>
+                <a:ea typeface="Arial Unicode MS"/>
+                <a:cs typeface="Arial Unicode MS"/>
+              </a:rPr>
+              <a:t>英文，我邊播邊講。畫面是車子周圍幾台相機拼起來的；</a:t>
+            </a:r>
+            <a:r>
+              <a:rPr sz="1350" b="1" lang="zh-TW" dirty="0">
+                <a:solidFill>
+                  <a:srgbClr val="000000"/>
+                </a:solidFill>
+                <a:latin typeface="Arial Unicode MS"/>
+                <a:ea typeface="Arial Unicode MS"/>
+                <a:cs typeface="Arial Unicode MS"/>
+              </a:rPr>
+              <a:t>0:47 小白方塊是雷達追蹤到的目標，橘色的線是它走過的路</a:t>
+            </a:r>
+            <a:r>
+              <a:rPr sz="1350" lang="zh-TW" dirty="0">
+                <a:solidFill>
+                  <a:srgbClr val="000000"/>
+                </a:solidFill>
+                <a:latin typeface="Arial Unicode MS"/>
+                <a:ea typeface="Arial Unicode MS"/>
+                <a:cs typeface="Arial Unicode MS"/>
+              </a:rPr>
+              <a:t>。</a:t>
+            </a:r>
+            <a:r>
+              <a:rPr sz="1350" b="1" lang="zh-TW" dirty="0">
+                <a:solidFill>
+                  <a:srgbClr val="000000"/>
+                </a:solidFill>
+                <a:latin typeface="Arial Unicode MS"/>
+                <a:ea typeface="Arial Unicode MS"/>
+                <a:cs typeface="Arial Unicode MS"/>
+              </a:rPr>
+              <a:t>0:52</a:t>
+            </a:r>
+            <a:r>
+              <a:rPr sz="1350" lang="zh-TW" dirty="0">
+                <a:solidFill>
+                  <a:srgbClr val="000000"/>
+                </a:solidFill>
+                <a:latin typeface="Arial Unicode MS"/>
+                <a:ea typeface="Arial Unicode MS"/>
+                <a:cs typeface="Arial Unicode MS"/>
+              </a:rPr>
+              <a:t> 旁白說：相機框出來的物體，和雷達的目標對上之後，小方塊會變成綠色。</a:t>
+            </a:r>
+            <a:r>
+              <a:rPr sz="1350" b="1" lang="zh-TW" dirty="0">
+                <a:solidFill>
+                  <a:srgbClr val="000000"/>
+                </a:solidFill>
+                <a:latin typeface="Arial Unicode MS"/>
+                <a:ea typeface="Arial Unicode MS"/>
+                <a:cs typeface="Arial Unicode MS"/>
+              </a:rPr>
+              <a:t>0:58</a:t>
+            </a:r>
+            <a:r>
+              <a:rPr sz="1350" lang="zh-TW" dirty="0">
+                <a:solidFill>
+                  <a:srgbClr val="000000"/>
+                </a:solidFill>
+                <a:latin typeface="Arial Unicode MS"/>
+                <a:ea typeface="Arial Unicode MS"/>
+                <a:cs typeface="Arial Unicode MS"/>
+              </a:rPr>
+              <a:t> 旁白講了融合的好處：位置、速度、加速度，都變得更準、更可靠。</a:t>
+            </a:r>
+            <a:r>
+              <a:rPr sz="1350" b="1" lang="zh-TW" dirty="0">
+                <a:solidFill>
+                  <a:srgbClr val="000000"/>
+                </a:solidFill>
+                <a:latin typeface="Arial Unicode MS"/>
+                <a:ea typeface="Arial Unicode MS"/>
+                <a:cs typeface="Arial Unicode MS"/>
+              </a:rPr>
+              <a:t>1:10</a:t>
+            </a:r>
+            <a:r>
+              <a:rPr sz="1350" lang="zh-TW" dirty="0">
+                <a:solidFill>
+                  <a:srgbClr val="000000"/>
+                </a:solidFill>
+                <a:latin typeface="Arial Unicode MS"/>
+                <a:ea typeface="Arial Unicode MS"/>
+                <a:cs typeface="Arial Unicode MS"/>
+              </a:rPr>
+              <a:t> 左右並排：左邊是雷達的鳥瞰圖，黃色方塊是相機找到的物體、綠色菱形是雷達的目標，兩個連在一起就是對上了；右邊是相機的畫面，綠框配綠色小方塊。</a:t>
             </a:r>
           </a:p>
         </p:txBody>
@@ -5487,11 +6005,11 @@
                 <a:spcPts val="0"/>
               </a:spcBef>
               <a:spcAft>
-                <a:spcPts val="183"/>
+                <a:spcPts val="267"/>
               </a:spcAft>
             </a:pPr>
             <a:r>
-              <a:rPr sz="1100" b="1" lang="zh-TW" dirty="0">
+              <a:rPr sz="1600" b="1" lang="zh-TW" dirty="0">
                 <a:solidFill>
                   <a:srgbClr val="000000"/>
                 </a:solidFill>
@@ -5502,15 +6020,15 @@
               <a:t>這一張的目的：</a:t>
             </a:r>
             <a:r>
-              <a:rPr sz="1100" lang="zh-TW" dirty="0">
-                <a:solidFill>
-                  <a:srgbClr val="000000"/>
-                </a:solidFill>
-                <a:latin typeface="Arial Unicode MS"/>
-                <a:ea typeface="Arial Unicode MS"/>
-                <a:cs typeface="Arial Unicode MS"/>
-              </a:rPr>
-              <a:t>讓大家記住一句話，比較準的多相信一點；並且會算一次加權平均。
+              <a:rPr sz="1600" lang="zh-TW" dirty="0">
+                <a:solidFill>
+                  <a:srgbClr val="000000"/>
+                </a:solidFill>
+                <a:latin typeface="Arial Unicode MS"/>
+                <a:ea typeface="Arial Unicode MS"/>
+                <a:cs typeface="Arial Unicode MS"/>
+              </a:rPr>
+              <a:t>讓大家知道，說法不一樣時有三種決定方式，每一種都有代價，真的系統混著用。
 </a:t>
             </a:r>
           </a:p>
@@ -5520,63 +6038,19 @@
                 <a:spcPts val="0"/>
               </a:spcBef>
               <a:spcAft>
-                <a:spcPts val="183"/>
+                <a:spcPts val="267"/>
               </a:spcAft>
             </a:pPr>
             <a:r>
-              <a:rPr sz="1100" lang="zh-TW" dirty="0">
-                <a:solidFill>
-                  <a:srgbClr val="000000"/>
-                </a:solidFill>
-                <a:latin typeface="Arial Unicode MS"/>
-                <a:ea typeface="Arial Unicode MS"/>
-                <a:cs typeface="Arial Unicode MS"/>
-              </a:rPr>
-              <a:t>最後一個融合的例子，是定位。這裡藏著一個很有名的方法，叫</a:t>
-            </a:r>
-            <a:r>
-              <a:rPr sz="1100" b="1" lang="zh-TW" dirty="0">
-                <a:solidFill>
-                  <a:srgbClr val="000000"/>
-                </a:solidFill>
-                <a:latin typeface="Arial Unicode MS"/>
-                <a:ea typeface="Arial Unicode MS"/>
-                <a:cs typeface="Arial Unicode MS"/>
-              </a:rPr>
-              <a:t>卡爾曼濾波</a:t>
-            </a:r>
-            <a:r>
-              <a:rPr sz="1100" lang="zh-TW" dirty="0">
-                <a:solidFill>
-                  <a:srgbClr val="000000"/>
-                </a:solidFill>
-                <a:latin typeface="Arial Unicode MS"/>
-                <a:ea typeface="Arial Unicode MS"/>
-                <a:cs typeface="Arial Unicode MS"/>
-              </a:rPr>
-              <a:t>。完整的數學很難，但它的核心，一句話就講得完：</a:t>
-            </a:r>
-            <a:r>
-              <a:rPr sz="1100" b="1" lang="zh-TW" dirty="0">
-                <a:solidFill>
-                  <a:srgbClr val="000000"/>
-                </a:solidFill>
-                <a:latin typeface="Arial Unicode MS"/>
-                <a:ea typeface="Arial Unicode MS"/>
-                <a:cs typeface="Arial Unicode MS"/>
-              </a:rPr>
-              <a:t>預測一個位置，量到一個位置，比較準的那一個，多相信一點。</a:t>
-            </a:r>
-            <a:r>
-              <a:rPr sz="1100" lang="zh-TW" dirty="0">
-                <a:solidFill>
-                  <a:srgbClr val="000000"/>
-                </a:solidFill>
-                <a:latin typeface="Arial Unicode MS"/>
-                <a:ea typeface="Arial Unicode MS"/>
-                <a:cs typeface="Arial Unicode MS"/>
-              </a:rPr>
-              <a:t>
+              <a:rPr sz="1600" lang="zh-TW" dirty="0">
+                <a:solidFill>
+                  <a:srgbClr val="000000"/>
+                </a:solidFill>
+                <a:latin typeface="Arial Unicode MS"/>
+                <a:ea typeface="Arial Unicode MS"/>
+                <a:cs typeface="Arial Unicode MS"/>
+              </a:rPr>
+              <a:t>回到開場那一題：雷達說有，相機說沒有。常見的做法有三種。
 </a:t>
             </a:r>
           </a:p>
@@ -5586,19 +6060,52 @@
                 <a:spcPts val="0"/>
               </a:spcBef>
               <a:spcAft>
-                <a:spcPts val="183"/>
+                <a:spcPts val="267"/>
               </a:spcAft>
             </a:pPr>
             <a:r>
-              <a:rPr sz="1100" lang="zh-TW" dirty="0">
-                <a:solidFill>
-                  <a:srgbClr val="000000"/>
-                </a:solidFill>
-                <a:latin typeface="Arial Unicode MS"/>
-                <a:ea typeface="Arial Unicode MS"/>
-                <a:cs typeface="Arial Unicode MS"/>
-              </a:rPr>
-              <a:t>左邊這支動圖會播兩段，跟著我講的順序走。先算一次：車子在一條路上，要知道自己在第幾公尺。
+              <a:rPr sz="1600" b="1" lang="zh-TW" dirty="0">
+                <a:solidFill>
+                  <a:srgbClr val="000000"/>
+                </a:solidFill>
+                <a:latin typeface="Arial Unicode MS"/>
+                <a:ea typeface="Arial Unicode MS"/>
+                <a:cs typeface="Arial Unicode MS"/>
+              </a:rPr>
+              <a:t>第一種，看條件決定信誰。</a:t>
+            </a:r>
+            <a:r>
+              <a:rPr sz="1600" lang="zh-TW" dirty="0">
+                <a:solidFill>
+                  <a:srgbClr val="000000"/>
+                </a:solidFill>
+                <a:latin typeface="Arial Unicode MS"/>
+                <a:ea typeface="Arial Unicode MS"/>
+                <a:cs typeface="Arial Unicode MS"/>
+              </a:rPr>
+              <a:t>每一顆感測器有一個「權重」，就是你有多相信它，而且權重會跟著條件變。上一節那張失效對照表就是權重表：下雨，相機打叉，就少相信相機、多相信雷達；遠處的行人，雷達打叉，就少相信雷達。代價是：你要</a:t>
+            </a:r>
+            <a:r>
+              <a:rPr sz="1600" b="1" lang="zh-TW" dirty="0">
+                <a:solidFill>
+                  <a:srgbClr val="000000"/>
+                </a:solidFill>
+                <a:latin typeface="Arial Unicode MS"/>
+                <a:ea typeface="Arial Unicode MS"/>
+                <a:cs typeface="Arial Unicode MS"/>
+              </a:rPr>
+              <a:t>事先知道</a:t>
+            </a:r>
+            <a:r>
+              <a:rPr sz="1600" lang="zh-TW" dirty="0">
+                <a:solidFill>
+                  <a:srgbClr val="000000"/>
+                </a:solidFill>
+                <a:latin typeface="Arial Unicode MS"/>
+                <a:ea typeface="Arial Unicode MS"/>
+                <a:cs typeface="Arial Unicode MS"/>
+              </a:rPr>
+              <a:t>它什麼時候變差，所以上一節那張表很重要。
 </a:t>
             </a:r>
           </a:p>
@@ -5608,30 +6115,52 @@
                 <a:spcPts val="0"/>
               </a:spcBef>
               <a:spcAft>
-                <a:spcPts val="183"/>
+                <a:spcPts val="267"/>
               </a:spcAft>
             </a:pPr>
             <a:r>
-              <a:rPr sz="1100" b="1" lang="zh-TW" dirty="0">
-                <a:solidFill>
-                  <a:srgbClr val="000000"/>
-                </a:solidFill>
-                <a:latin typeface="Arial Unicode MS"/>
-                <a:ea typeface="Arial Unicode MS"/>
-                <a:cs typeface="Arial Unicode MS"/>
-              </a:rPr>
-              <a:t>預測</a:t>
-            </a:r>
-            <a:r>
-              <a:rPr sz="1100" lang="zh-TW" dirty="0">
-                <a:solidFill>
-                  <a:srgbClr val="000000"/>
-                </a:solidFill>
-                <a:latin typeface="Arial Unicode MS"/>
-                <a:ea typeface="Arial Unicode MS"/>
-                <a:cs typeface="Arial Unicode MS"/>
-              </a:rPr>
-              <a:t>：IMU 加上輪速，從上一秒的位置往前推，推出來是一百二十點零公尺，這種推算很穩，誤差大約正負一公尺。
+              <a:rPr sz="1600" b="1" lang="zh-TW" dirty="0">
+                <a:solidFill>
+                  <a:srgbClr val="000000"/>
+                </a:solidFill>
+                <a:latin typeface="Arial Unicode MS"/>
+                <a:ea typeface="Arial Unicode MS"/>
+                <a:cs typeface="Arial Unicode MS"/>
+              </a:rPr>
+              <a:t>第二種，多數決。</a:t>
+            </a:r>
+            <a:r>
+              <a:rPr sz="1600" lang="zh-TW" dirty="0">
+                <a:solidFill>
+                  <a:srgbClr val="000000"/>
+                </a:solidFill>
+                <a:latin typeface="Arial Unicode MS"/>
+                <a:ea typeface="Arial Unicode MS"/>
+                <a:cs typeface="Arial Unicode MS"/>
+              </a:rPr>
+              <a:t>三顆裡有兩顆說有，就算有。很直覺，但代價是：至少要有三顆在量</a:t>
+            </a:r>
+            <a:r>
+              <a:rPr sz="1600" b="1" lang="zh-TW" dirty="0">
+                <a:solidFill>
+                  <a:srgbClr val="000000"/>
+                </a:solidFill>
+                <a:latin typeface="Arial Unicode MS"/>
+                <a:ea typeface="Arial Unicode MS"/>
+                <a:cs typeface="Arial Unicode MS"/>
+              </a:rPr>
+              <a:t>同一件事</a:t>
+            </a:r>
+            <a:r>
+              <a:rPr sz="1600" lang="zh-TW" dirty="0">
+                <a:solidFill>
+                  <a:srgbClr val="000000"/>
+                </a:solidFill>
+                <a:latin typeface="Arial Unicode MS"/>
+                <a:ea typeface="Arial Unicode MS"/>
+                <a:cs typeface="Arial Unicode MS"/>
+              </a:rPr>
+              <a:t>，不然沒得投票。而且如果兩顆同時被同一個原因騙，例如大雨裡相機和光達一起變差，多數決就會跟著錯。
 </a:t>
             </a:r>
           </a:p>
@@ -5641,30 +6170,30 @@
                 <a:spcPts val="0"/>
               </a:spcBef>
               <a:spcAft>
-                <a:spcPts val="183"/>
+                <a:spcPts val="267"/>
               </a:spcAft>
             </a:pPr>
             <a:r>
-              <a:rPr sz="1100" b="1" lang="zh-TW" dirty="0">
-                <a:solidFill>
-                  <a:srgbClr val="000000"/>
-                </a:solidFill>
-                <a:latin typeface="Arial Unicode MS"/>
-                <a:ea typeface="Arial Unicode MS"/>
-                <a:cs typeface="Arial Unicode MS"/>
-              </a:rPr>
-              <a:t>量到</a:t>
-            </a:r>
-            <a:r>
-              <a:rPr sz="1100" lang="zh-TW" dirty="0">
-                <a:solidFill>
-                  <a:srgbClr val="000000"/>
-                </a:solidFill>
-                <a:latin typeface="Arial Unicode MS"/>
-                <a:ea typeface="Arial Unicode MS"/>
-                <a:cs typeface="Arial Unicode MS"/>
-              </a:rPr>
-              <a:t>：GPS 說，你在一百一十八點零公尺。可是 GPS 的誤差比較大，正負三公尺。
+              <a:rPr sz="1600" b="1" lang="zh-TW" dirty="0">
+                <a:solidFill>
+                  <a:srgbClr val="000000"/>
+                </a:solidFill>
+                <a:latin typeface="Arial Unicode MS"/>
+                <a:ea typeface="Arial Unicode MS"/>
+                <a:cs typeface="Arial Unicode MS"/>
+              </a:rPr>
+              <a:t>第三種，保守原則。</a:t>
+            </a:r>
+            <a:r>
+              <a:rPr sz="1600" lang="zh-TW" dirty="0">
+                <a:solidFill>
+                  <a:srgbClr val="000000"/>
+                </a:solidFill>
+                <a:latin typeface="Arial Unicode MS"/>
+                <a:ea typeface="Arial Unicode MS"/>
+                <a:cs typeface="Arial Unicode MS"/>
+              </a:rPr>
+              <a:t>只要有一顆說前面有東西，就先減速。最安全，但代價是幽靈煞車會變多，乘客會不舒服，後面的車也可能撞上來。
 </a:t>
             </a:r>
           </a:p>
@@ -5674,250 +6203,41 @@
                 <a:spcPts val="0"/>
               </a:spcBef>
               <a:spcAft>
-                <a:spcPts val="183"/>
+                <a:spcPts val="267"/>
               </a:spcAft>
             </a:pPr>
             <a:r>
-              <a:rPr sz="1100" lang="zh-TW" dirty="0">
-                <a:solidFill>
-                  <a:srgbClr val="000000"/>
-                </a:solidFill>
-                <a:latin typeface="Arial Unicode MS"/>
-                <a:ea typeface="Arial Unicode MS"/>
-                <a:cs typeface="Arial Unicode MS"/>
-              </a:rPr>
-              <a:t>兩個差了兩公尺，要相信誰？都相信一點，但不是一半一半。誤差差三倍，信任要差</a:t>
-            </a:r>
-            <a:r>
-              <a:rPr sz="1100" b="1" lang="zh-TW" dirty="0">
-                <a:solidFill>
-                  <a:srgbClr val="000000"/>
-                </a:solidFill>
-                <a:latin typeface="Arial Unicode MS"/>
-                <a:ea typeface="Arial Unicode MS"/>
-                <a:cs typeface="Arial Unicode MS"/>
-              </a:rPr>
-              <a:t>九倍</a:t>
-            </a:r>
-            <a:r>
-              <a:rPr sz="1100" lang="zh-TW" dirty="0">
-                <a:solidFill>
-                  <a:srgbClr val="000000"/>
-                </a:solidFill>
-                <a:latin typeface="Arial Unicode MS"/>
-                <a:ea typeface="Arial Unicode MS"/>
-                <a:cs typeface="Arial Unicode MS"/>
-              </a:rPr>
-              <a:t>，也就是三乘三。所以 IMU 拿九份，GPS 拿一份：
-</a:t>
-            </a:r>
-          </a:p>
-          <a:p>
-            <a:pPr algn="l">
-              <a:spcBef>
-                <a:spcPts val="0"/>
-              </a:spcBef>
-              <a:spcAft>
-                <a:spcPts val="183"/>
-              </a:spcAft>
-            </a:pPr>
-            <a:r>
-              <a:rPr sz="1100" lang="zh-TW" dirty="0">
-                <a:solidFill>
-                  <a:srgbClr val="000000"/>
-                </a:solidFill>
-                <a:latin typeface="Arial Unicode MS"/>
-                <a:ea typeface="Arial Unicode MS"/>
-                <a:cs typeface="Arial Unicode MS"/>
-              </a:rPr>
-              <a:t>九乘一百二十，加一乘一百一十八，除以十，等於</a:t>
-            </a:r>
-            <a:r>
-              <a:rPr sz="1100" b="1" lang="zh-TW" dirty="0">
-                <a:solidFill>
-                  <a:srgbClr val="000000"/>
-                </a:solidFill>
-                <a:latin typeface="Arial Unicode MS"/>
-                <a:ea typeface="Arial Unicode MS"/>
-                <a:cs typeface="Arial Unicode MS"/>
-              </a:rPr>
-              <a:t>一百一十九點八公尺</a:t>
-            </a:r>
-            <a:r>
-              <a:rPr sz="1100" lang="zh-TW" dirty="0">
-                <a:solidFill>
-                  <a:srgbClr val="000000"/>
-                </a:solidFill>
-                <a:latin typeface="Arial Unicode MS"/>
-                <a:ea typeface="Arial Unicode MS"/>
-                <a:cs typeface="Arial Unicode MS"/>
-              </a:rPr>
-              <a:t>。結果很靠近 IMU，只被 GPS 拉了一點點。
-</a:t>
-            </a:r>
-          </a:p>
-          <a:p>
-            <a:pPr algn="l">
-              <a:spcBef>
-                <a:spcPts val="0"/>
-              </a:spcBef>
-              <a:spcAft>
-                <a:spcPts val="183"/>
-              </a:spcAft>
-            </a:pPr>
-            <a:r>
-              <a:rPr sz="1100" lang="zh-TW" dirty="0">
-                <a:solidFill>
-                  <a:srgbClr val="000000"/>
-                </a:solidFill>
-                <a:latin typeface="Arial Unicode MS"/>
-                <a:ea typeface="Arial Unicode MS"/>
-                <a:cs typeface="Arial Unicode MS"/>
-              </a:rPr>
-              <a:t>動圖上看得出來：IMU 那條曲線又窄又高，GPS 那條又寬又矮，曲線愈寬，就是愈不確定。最後出現的黃色那條，就是合起來的結果，落在一百一十九點八，而且</a:t>
-            </a:r>
-            <a:r>
-              <a:rPr sz="1100" b="1" lang="zh-TW" dirty="0">
-                <a:solidFill>
-                  <a:srgbClr val="000000"/>
-                </a:solidFill>
-                <a:latin typeface="Arial Unicode MS"/>
-                <a:ea typeface="Arial Unicode MS"/>
-                <a:cs typeface="Arial Unicode MS"/>
-              </a:rPr>
-              <a:t>比兩條都窄一點</a:t>
-            </a:r>
-            <a:r>
-              <a:rPr sz="1100" lang="zh-TW" dirty="0">
-                <a:solidFill>
-                  <a:srgbClr val="000000"/>
-                </a:solidFill>
-                <a:latin typeface="Arial Unicode MS"/>
-                <a:ea typeface="Arial Unicode MS"/>
-                <a:cs typeface="Arial Unicode MS"/>
-              </a:rPr>
-              <a:t>：兩個資訊合起來，比任何一個單獨的都更確定。
-</a:t>
-            </a:r>
-          </a:p>
-          <a:p>
-            <a:pPr algn="l">
-              <a:spcBef>
-                <a:spcPts val="0"/>
-              </a:spcBef>
-              <a:spcAft>
-                <a:spcPts val="183"/>
-              </a:spcAft>
-            </a:pPr>
-            <a:r>
-              <a:rPr sz="1100" lang="zh-TW" dirty="0">
-                <a:solidFill>
-                  <a:srgbClr val="000000"/>
-                </a:solidFill>
-                <a:latin typeface="Arial Unicode MS"/>
-                <a:ea typeface="Arial Unicode MS"/>
-                <a:cs typeface="Arial Unicode MS"/>
-              </a:rPr>
-              <a:t>就像你有兩支錶，一支很準、一支常常快慢。你會兩支都看，但比較聽準的那支。
-</a:t>
-            </a:r>
-          </a:p>
-          <a:p>
-            <a:pPr algn="l">
-              <a:spcBef>
-                <a:spcPts val="0"/>
-              </a:spcBef>
-              <a:spcAft>
-                <a:spcPts val="183"/>
-              </a:spcAft>
-            </a:pPr>
-            <a:r>
-              <a:rPr sz="1100" lang="zh-TW" dirty="0">
-                <a:solidFill>
-                  <a:srgbClr val="000000"/>
-                </a:solidFill>
-                <a:latin typeface="Arial Unicode MS"/>
-                <a:ea typeface="Arial Unicode MS"/>
-                <a:cs typeface="Arial Unicode MS"/>
-              </a:rPr>
-              <a:t>然後每一秒重複一次：先預測，再用量到的修正。
-</a:t>
-            </a:r>
-          </a:p>
-          <a:p>
-            <a:pPr algn="l">
-              <a:spcBef>
-                <a:spcPts val="0"/>
-              </a:spcBef>
-              <a:spcAft>
-                <a:spcPts val="183"/>
-              </a:spcAft>
-            </a:pPr>
-            <a:r>
-              <a:rPr sz="1100" b="1" lang="zh-TW" dirty="0">
-                <a:solidFill>
-                  <a:srgbClr val="000000"/>
-                </a:solidFill>
-                <a:latin typeface="Arial Unicode MS"/>
-                <a:ea typeface="Arial Unicode MS"/>
-                <a:cs typeface="Arial Unicode MS"/>
-              </a:rPr>
-              <a:t>進隧道會怎樣？</a:t>
-            </a:r>
-            <a:r>
-              <a:rPr sz="1100" lang="zh-TW" dirty="0">
-                <a:solidFill>
-                  <a:srgbClr val="000000"/>
-                </a:solidFill>
-                <a:latin typeface="Arial Unicode MS"/>
-                <a:ea typeface="Arial Unicode MS"/>
-                <a:cs typeface="Arial Unicode MS"/>
-              </a:rPr>
-              <a:t>動圖的第二段：GPS 沒了，只剩預測。每一秒都在推算，誤差一秒一秒累積，誤差圈愈來愈大，這就是上一節的 IMU 漂移。</a:t>
-            </a:r>
-            <a:r>
-              <a:rPr sz="1100" b="1" lang="zh-TW" dirty="0">
-                <a:solidFill>
-                  <a:srgbClr val="000000"/>
-                </a:solidFill>
-                <a:latin typeface="Arial Unicode MS"/>
-                <a:ea typeface="Arial Unicode MS"/>
-                <a:cs typeface="Arial Unicode MS"/>
-              </a:rPr>
-              <a:t>出了隧道</a:t>
-            </a:r>
-            <a:r>
-              <a:rPr sz="1100" lang="zh-TW" dirty="0">
-                <a:solidFill>
-                  <a:srgbClr val="000000"/>
-                </a:solidFill>
-                <a:latin typeface="Arial Unicode MS"/>
-                <a:ea typeface="Arial Unicode MS"/>
-                <a:cs typeface="Arial Unicode MS"/>
-              </a:rPr>
-              <a:t>，GPS 一回來，誤差圈一下就被拉回來。慢慢壞的配突然壞的，上一節說它們個性相反、補得起來，就是這個意思。
-</a:t>
-            </a:r>
-          </a:p>
-          <a:p>
-            <a:pPr algn="l">
-              <a:spcBef>
-                <a:spcPts val="0"/>
-              </a:spcBef>
-              <a:spcAft>
-                <a:spcPts val="183"/>
-              </a:spcAft>
-            </a:pPr>
-            <a:r>
-              <a:rPr sz="1100" lang="zh-TW" dirty="0">
-                <a:solidFill>
-                  <a:srgbClr val="000000"/>
-                </a:solidFill>
-                <a:latin typeface="Arial Unicode MS"/>
-                <a:ea typeface="Arial Unicode MS"/>
-                <a:cs typeface="Arial Unicode MS"/>
-              </a:rPr>
-              <a:t>nuScenes 的車也是這樣定位的：官網寫，它的定位用 IMU、GPS，再加上高精地圖一起算；車上那顆 IMU＋GPS 模組，規格寫的位置精度是 20 公釐。</a:t>
+              <a:rPr sz="1600" lang="zh-TW" dirty="0">
+                <a:solidFill>
+                  <a:srgbClr val="000000"/>
+                </a:solidFill>
+                <a:latin typeface="Arial Unicode MS"/>
+                <a:ea typeface="Arial Unicode MS"/>
+                <a:cs typeface="Arial Unicode MS"/>
+              </a:rPr>
+              <a:t>真的系統，三種混著用。而且最重要的一點：上一節說每一顆都要能說「我現在不可靠」。</a:t>
+            </a:r>
+            <a:r>
+              <a:rPr sz="1600" b="1" lang="zh-TW" dirty="0">
+                <a:solidFill>
+                  <a:srgbClr val="000000"/>
+                </a:solidFill>
+                <a:latin typeface="Arial Unicode MS"/>
+                <a:ea typeface="Arial Unicode MS"/>
+                <a:cs typeface="Arial Unicode MS"/>
+              </a:rPr>
+              <a:t>它一說，它的權重就降下來</a:t>
+            </a:r>
+            <a:r>
+              <a:rPr sz="1600" lang="zh-TW" dirty="0">
+                <a:solidFill>
+                  <a:srgbClr val="000000"/>
+                </a:solidFill>
+                <a:latin typeface="Arial Unicode MS"/>
+                <a:ea typeface="Arial Unicode MS"/>
+                <a:cs typeface="Arial Unicode MS"/>
+              </a:rPr>
+              <a:t>，別人就多扛一點。這就是為什麼「壞了會不會說」那麼重要。</a:t>
             </a:r>
           </a:p>
         </p:txBody>
@@ -6676,6 +6996,579 @@
                 <a:ea typeface="Arial" pitchFamily="34" charset="-122"/>
                 <a:cs typeface="Arial" pitchFamily="34" charset="-120"/>
               </a:rPr>
+              <a:t>Định vị · 比較準的，多相信一點</a:t>
+            </a:r>
+            <a:endParaRPr lang="en-US" sz="1250" dirty="0"/>
+          </a:p>
+        </p:txBody>
+      </p:sp>
+      <p:sp>
+        <p:nvSpPr>
+          <p:cNvPr id="3" name="Shape 1"/>
+          <p:cNvSpPr/>
+          <p:nvPr/>
+        </p:nvSpPr>
+        <p:spPr>
+          <a:xfrm>
+            <a:off x="502920" y="1101852"/>
+            <a:ext cx="3305556" cy="2514600"/>
+          </a:xfrm>
+          <a:prstGeom prst="roundRect">
+            <a:avLst>
+              <a:gd name="adj" fmla="val 4364"/>
+            </a:avLst>
+          </a:prstGeom>
+          <a:solidFill>
+            <a:srgbClr val="FFFFFF"/>
+          </a:solidFill>
+          <a:ln w="12700">
+            <a:solidFill>
+              <a:srgbClr val="DBE3EA"/>
+            </a:solidFill>
+            <a:prstDash val="solid"/>
+          </a:ln>
+        </p:spPr>
+      </p:sp>
+      <p:pic>
+        <p:nvPicPr>
+          <p:cNvPr id="4" name="Image 0" descr="/Users/tsengchenghsun/Class/carClass/Claude outputs/第七週(10-22)/src/img/w7_kalman.gif">    </p:cNvPr>
+          <p:cNvPicPr>
+            <a:picLocks noChangeAspect="1"/>
+          </p:cNvPicPr>
+          <p:nvPr/>
+        </p:nvPicPr>
+        <p:blipFill>
+          <a:blip r:embed="rId1"/>
+          <a:stretch>
+            <a:fillRect/>
+          </a:stretch>
+        </p:blipFill>
+        <p:spPr>
+          <a:xfrm>
+            <a:off x="576072" y="1214628"/>
+            <a:ext cx="3159252" cy="2106168"/>
+          </a:xfrm>
+          <a:prstGeom prst="rect">
+            <a:avLst/>
+          </a:prstGeom>
+        </p:spPr>
+      </p:pic>
+      <p:sp>
+        <p:nvSpPr>
+          <p:cNvPr id="5" name="Text 2"/>
+          <p:cNvSpPr txBox="1"/>
+          <p:nvPr/>
+        </p:nvSpPr>
+        <p:spPr>
+          <a:xfrm>
+            <a:off x="576072" y="3396996"/>
+            <a:ext cx="3159252" cy="182880"/>
+          </a:xfrm>
+          <a:prstGeom prst="rect">
+            <a:avLst/>
+          </a:prstGeom>
+          <a:noFill/>
+          <a:ln/>
+        </p:spPr>
+        <p:txBody>
+          <a:bodyPr wrap="square" lIns="0" tIns="0" rIns="0" bIns="0" rtlCol="0" anchor="ctr"/>
+          <a:lstStyle/>
+          <a:p>
+            <a:pPr algn="ctr" indent="0" marL="0">
+              <a:buNone/>
+            </a:pPr>
+            <a:r>
+              <a:rPr lang="en-US" sz="700" dirty="0">
+                <a:solidFill>
+                  <a:srgbClr val="5F7183"/>
+                </a:solidFill>
+                <a:latin typeface="Arial" pitchFamily="34" charset="0"/>
+                <a:ea typeface="Arial" pitchFamily="34" charset="-122"/>
+                <a:cs typeface="Arial" pitchFamily="34" charset="-120"/>
+              </a:rPr>
+              <a:t>動圖：課程自製（曲線寬度照誤差畫；隧道那段是示意）</a:t>
+            </a:r>
+            <a:endParaRPr lang="en-US" sz="700" dirty="0"/>
+          </a:p>
+        </p:txBody>
+      </p:sp>
+      <p:sp>
+        <p:nvSpPr>
+          <p:cNvPr id="6" name="Text 3"/>
+          <p:cNvSpPr txBox="1"/>
+          <p:nvPr/>
+        </p:nvSpPr>
+        <p:spPr>
+          <a:xfrm>
+            <a:off x="4119372" y="914400"/>
+            <a:ext cx="4521708" cy="2889504"/>
+          </a:xfrm>
+          <a:prstGeom prst="rect">
+            <a:avLst/>
+          </a:prstGeom>
+          <a:noFill/>
+          <a:ln/>
+        </p:spPr>
+        <p:txBody>
+          <a:bodyPr wrap="square" lIns="0" tIns="0" rIns="0" bIns="0" rtlCol="0" anchor="ctr"/>
+          <a:lstStyle/>
+          <a:p>
+            <a:pPr indent="0" marL="0">
+              <a:lnSpc>
+                <a:spcPct val="120000"/>
+              </a:lnSpc>
+              <a:buNone/>
+            </a:pPr>
+            <a:r>
+              <a:rPr lang="en-US" sz="2000" b="1" dirty="0">
+                <a:solidFill>
+                  <a:srgbClr val="0B1F3A"/>
+                </a:solidFill>
+                <a:latin typeface="Arial" pitchFamily="34" charset="0"/>
+                <a:ea typeface="Arial" pitchFamily="34" charset="-122"/>
+                <a:cs typeface="Arial" pitchFamily="34" charset="-120"/>
+              </a:rPr>
+              <a:t>Ghép để định vị: dự đoán một vị trí, đo được một vị trí — cái nào chuẩn hơn thì tin nhiều hơn</a:t>
+            </a:r>
+            <a:endParaRPr lang="en-US" sz="2000" dirty="0"/>
+          </a:p>
+          <a:p>
+            <a:pPr indent="0" marL="0">
+              <a:lnSpc>
+                <a:spcPct val="120000"/>
+              </a:lnSpc>
+              <a:buNone/>
+            </a:pPr>
+            <a:r>
+              <a:rPr lang="en-US" sz="1400" b="1" dirty="0">
+                <a:solidFill>
+                  <a:srgbClr val="007F72"/>
+                </a:solidFill>
+                <a:latin typeface="微軟正黑體" pitchFamily="34" charset="0"/>
+                <a:ea typeface="微軟正黑體" pitchFamily="34" charset="-122"/>
+                <a:cs typeface="微軟正黑體" pitchFamily="34" charset="-120"/>
+              </a:rPr>
+              <a:t>定位的融合：預測一個位置、量到一個位置——比較準的那一個，多相信一點</a:t>
+            </a:r>
+            <a:endParaRPr lang="en-US" sz="2000" dirty="0"/>
+          </a:p>
+          <a:p>
+            <a:pPr indent="0" marL="0">
+              <a:lnSpc>
+                <a:spcPct val="120000"/>
+              </a:lnSpc>
+              <a:spcBef>
+                <a:spcPts val="1440"/>
+              </a:spcBef>
+              <a:buNone/>
+            </a:pPr>
+            <a:r>
+              <a:rPr lang="en-US" sz="1250" dirty="0">
+                <a:solidFill>
+                  <a:srgbClr val="5F7183"/>
+                </a:solidFill>
+                <a:latin typeface="Arial" pitchFamily="34" charset="0"/>
+                <a:ea typeface="Arial" pitchFamily="34" charset="-122"/>
+                <a:cs typeface="Arial" pitchFamily="34" charset="-120"/>
+              </a:rPr>
+              <a:t>IMU + tốc độ bánh dự đoán: 120,0 m (±1 m). GPS đo: 118,0 m (±3 m). Sai số kém nhau 3 lần → tin nhau chênh 9 lần → kết quả 119,8 m.</a:t>
+            </a:r>
+            <a:endParaRPr lang="en-US" sz="2000" dirty="0"/>
+          </a:p>
+          <a:p>
+            <a:pPr indent="0" marL="0">
+              <a:lnSpc>
+                <a:spcPct val="120000"/>
+              </a:lnSpc>
+              <a:buNone/>
+            </a:pPr>
+            <a:r>
+              <a:rPr lang="en-US" sz="1150" dirty="0">
+                <a:solidFill>
+                  <a:srgbClr val="5F7183"/>
+                </a:solidFill>
+                <a:latin typeface="微軟正黑體" pitchFamily="34" charset="0"/>
+                <a:ea typeface="微軟正黑體" pitchFamily="34" charset="-122"/>
+                <a:cs typeface="微軟正黑體" pitchFamily="34" charset="-120"/>
+              </a:rPr>
+              <a:t>IMU＋輪速推算：120.0 公尺（±1）。GPS 量到：118.0 公尺（±3）。誤差差 3 倍 → 信任差 9 倍 → 結果 119.8 公尺。</a:t>
+            </a:r>
+            <a:endParaRPr lang="en-US" sz="2000" dirty="0"/>
+          </a:p>
+        </p:txBody>
+      </p:sp>
+      <p:sp>
+        <p:nvSpPr>
+          <p:cNvPr id="7" name="Shape 4"/>
+          <p:cNvSpPr/>
+          <p:nvPr/>
+        </p:nvSpPr>
+        <p:spPr>
+          <a:xfrm>
+            <a:off x="502920" y="3913632"/>
+            <a:ext cx="8138160" cy="621792"/>
+          </a:xfrm>
+          <a:prstGeom prst="roundRect">
+            <a:avLst>
+              <a:gd name="adj" fmla="val 13235"/>
+            </a:avLst>
+          </a:prstGeom>
+          <a:solidFill>
+            <a:srgbClr val="FFF6E3"/>
+          </a:solidFill>
+          <a:ln w="12700">
+            <a:solidFill>
+              <a:srgbClr val="FFB020"/>
+            </a:solidFill>
+            <a:prstDash val="solid"/>
+          </a:ln>
+        </p:spPr>
+      </p:sp>
+      <p:sp>
+        <p:nvSpPr>
+          <p:cNvPr id="8" name="Text 5"/>
+          <p:cNvSpPr txBox="1"/>
+          <p:nvPr/>
+        </p:nvSpPr>
+        <p:spPr>
+          <a:xfrm>
+            <a:off x="685800" y="3986784"/>
+            <a:ext cx="7772400" cy="493776"/>
+          </a:xfrm>
+          <a:prstGeom prst="rect">
+            <a:avLst/>
+          </a:prstGeom>
+          <a:noFill/>
+          <a:ln/>
+        </p:spPr>
+        <p:txBody>
+          <a:bodyPr wrap="square" lIns="0" tIns="0" rIns="0" bIns="0" rtlCol="0" anchor="t"/>
+          <a:lstStyle/>
+          <a:p>
+            <a:pPr indent="0" marL="0">
+              <a:lnSpc>
+                <a:spcPct val="116000"/>
+              </a:lnSpc>
+              <a:buNone/>
+            </a:pPr>
+            <a:r>
+              <a:rPr lang="en-US" sz="1250" b="1" dirty="0">
+                <a:solidFill>
+                  <a:srgbClr val="7A4E00"/>
+                </a:solidFill>
+                <a:latin typeface="Arial" pitchFamily="34" charset="0"/>
+                <a:ea typeface="Arial" pitchFamily="34" charset="-122"/>
+                <a:cs typeface="Arial" pitchFamily="34" charset="-120"/>
+              </a:rPr>
+              <a:t>Trong hầm chỉ còn dự đoán, vòng sai số lớn dần; ra khỏi hầm GPS quay lại, kéo về ngay.</a:t>
+            </a:r>
+            <a:endParaRPr lang="en-US" sz="1250" dirty="0"/>
+          </a:p>
+          <a:p>
+            <a:pPr indent="0" marL="0">
+              <a:lnSpc>
+                <a:spcPct val="116000"/>
+              </a:lnSpc>
+              <a:buNone/>
+            </a:pPr>
+            <a:r>
+              <a:rPr lang="en-US" sz="1150" dirty="0">
+                <a:solidFill>
+                  <a:srgbClr val="7A4E00"/>
+                </a:solidFill>
+                <a:latin typeface="微軟正黑體" pitchFamily="34" charset="0"/>
+                <a:ea typeface="微軟正黑體" pitchFamily="34" charset="-122"/>
+                <a:cs typeface="微軟正黑體" pitchFamily="34" charset="-120"/>
+              </a:rPr>
+              <a:t>隧道裡只剩預測，誤差圈愈來愈大；出了隧道 GPS 回來，一下就拉回來。</a:t>
+            </a:r>
+            <a:endParaRPr lang="en-US" sz="1250" dirty="0"/>
+          </a:p>
+        </p:txBody>
+      </p:sp>
+      <p:sp>
+        <p:nvSpPr>
+          <p:cNvPr id="9" name="Shape 6"/>
+          <p:cNvSpPr/>
+          <p:nvPr/>
+        </p:nvSpPr>
+        <p:spPr>
+          <a:xfrm>
+            <a:off x="4999780" y="365760"/>
+            <a:ext cx="3641300" cy="310896"/>
+          </a:xfrm>
+          <a:prstGeom prst="roundRect">
+            <a:avLst>
+              <a:gd name="adj" fmla="val 20588"/>
+            </a:avLst>
+          </a:prstGeom>
+          <a:solidFill>
+            <a:srgbClr val="EAF6F4"/>
+          </a:solidFill>
+          <a:ln w="9525">
+            <a:solidFill>
+              <a:srgbClr val="9FD6CE"/>
+            </a:solidFill>
+            <a:prstDash val="solid"/>
+          </a:ln>
+        </p:spPr>
+      </p:sp>
+      <p:sp>
+        <p:nvSpPr>
+          <p:cNvPr id="10" name="Text 7"/>
+          <p:cNvSpPr txBox="1"/>
+          <p:nvPr/>
+        </p:nvSpPr>
+        <p:spPr>
+          <a:xfrm>
+            <a:off x="5127796" y="384048"/>
+            <a:ext cx="3458420" cy="274320"/>
+          </a:xfrm>
+          <a:prstGeom prst="rect">
+            <a:avLst/>
+          </a:prstGeom>
+          <a:noFill/>
+          <a:ln/>
+        </p:spPr>
+        <p:txBody>
+          <a:bodyPr wrap="square" lIns="0" tIns="0" rIns="0" bIns="0" rtlCol="0" anchor="ctr"/>
+          <a:lstStyle/>
+          <a:p>
+            <a:pPr indent="0" marL="0">
+              <a:lnSpc>
+                <a:spcPct val="100000"/>
+              </a:lnSpc>
+              <a:buNone/>
+            </a:pPr>
+            <a:r>
+              <a:rPr lang="en-US" sz="950" b="1" dirty="0">
+                <a:solidFill>
+                  <a:srgbClr val="007F72"/>
+                </a:solidFill>
+                <a:latin typeface="Arial" pitchFamily="34" charset="0"/>
+                <a:ea typeface="Arial" pitchFamily="34" charset="-122"/>
+                <a:cs typeface="Arial" pitchFamily="34" charset="-120"/>
+              </a:rPr>
+              <a:t>Ví dụ · </a:t>
+            </a:r>
+            <a:pPr indent="0" marL="0">
+              <a:lnSpc>
+                <a:spcPct val="100000"/>
+              </a:lnSpc>
+              <a:buNone/>
+            </a:pPr>
+            <a:r>
+              <a:rPr lang="en-US" sz="950" dirty="0">
+                <a:solidFill>
+                  <a:srgbClr val="1A2733"/>
+                </a:solidFill>
+                <a:latin typeface="Arial" pitchFamily="34" charset="0"/>
+                <a:ea typeface="Arial" pitchFamily="34" charset="-122"/>
+                <a:cs typeface="Arial" pitchFamily="34" charset="-120"/>
+              </a:rPr>
+              <a:t>hai chiếc đồng hồ: tin cái chạy chuẩn hơn nhiều hơn</a:t>
+            </a:r>
+            <a:endParaRPr lang="en-US" sz="950" dirty="0"/>
+          </a:p>
+          <a:p>
+            <a:pPr indent="0" marL="0">
+              <a:lnSpc>
+                <a:spcPct val="100000"/>
+              </a:lnSpc>
+              <a:buNone/>
+            </a:pPr>
+            <a:r>
+              <a:rPr lang="en-US" sz="900" b="1" dirty="0">
+                <a:solidFill>
+                  <a:srgbClr val="007F72"/>
+                </a:solidFill>
+                <a:latin typeface="微軟正黑體" pitchFamily="34" charset="0"/>
+                <a:ea typeface="微軟正黑體" pitchFamily="34" charset="-122"/>
+                <a:cs typeface="微軟正黑體" pitchFamily="34" charset="-120"/>
+              </a:rPr>
+              <a:t>例子・</a:t>
+            </a:r>
+            <a:pPr indent="0" marL="0">
+              <a:lnSpc>
+                <a:spcPct val="100000"/>
+              </a:lnSpc>
+              <a:buNone/>
+            </a:pPr>
+            <a:r>
+              <a:rPr lang="en-US" sz="900" dirty="0">
+                <a:solidFill>
+                  <a:srgbClr val="5F7183"/>
+                </a:solidFill>
+                <a:latin typeface="微軟正黑體" pitchFamily="34" charset="0"/>
+                <a:ea typeface="微軟正黑體" pitchFamily="34" charset="-122"/>
+                <a:cs typeface="微軟正黑體" pitchFamily="34" charset="-120"/>
+              </a:rPr>
+              <a:t>兩支錶，比較準的那支多聽一點</a:t>
+            </a:r>
+            <a:endParaRPr lang="en-US" sz="950" dirty="0"/>
+          </a:p>
+        </p:txBody>
+      </p:sp>
+      <p:pic>
+        <p:nvPicPr>
+          <p:cNvPr id="12" name="Image 1" descr="/Users/tsengchenghsun/Class/carClass/Claude outputs/第七週(10-22)/src/logo.png">    </p:cNvPr>
+          <p:cNvPicPr>
+            <a:picLocks noChangeAspect="1"/>
+          </p:cNvPicPr>
+          <p:nvPr/>
+        </p:nvPicPr>
+        <p:blipFill>
+          <a:blip r:embed="rId2"/>
+          <a:stretch>
+            <a:fillRect/>
+          </a:stretch>
+        </p:blipFill>
+        <p:spPr>
+          <a:xfrm>
+            <a:off x="7882128" y="109728"/>
+            <a:ext cx="1097280" cy="242439"/>
+          </a:xfrm>
+          <a:prstGeom prst="rect">
+            <a:avLst/>
+          </a:prstGeom>
+        </p:spPr>
+      </p:pic>
+      <p:sp>
+        <p:nvSpPr>
+          <p:cNvPr id="13" name="Text 8"/>
+          <p:cNvSpPr txBox="1"/>
+          <p:nvPr/>
+        </p:nvSpPr>
+        <p:spPr>
+          <a:xfrm>
+            <a:off x="109728" y="128016"/>
+            <a:ext cx="822960" cy="256032"/>
+          </a:xfrm>
+          <a:prstGeom prst="rect">
+            <a:avLst/>
+          </a:prstGeom>
+          <a:noFill/>
+          <a:ln/>
+        </p:spPr>
+        <p:txBody>
+          <a:bodyPr wrap="square" lIns="0" tIns="0" rIns="0" bIns="0" rtlCol="0" anchor="ctr"/>
+          <a:lstStyle/>
+          <a:p>
+            <a:pPr indent="0" marL="0">
+              <a:buNone/>
+            </a:pPr>
+            <a:r>
+              <a:rPr lang="en-US" sz="900" dirty="0">
+                <a:solidFill>
+                  <a:srgbClr val="5F7183"/>
+                </a:solidFill>
+                <a:latin typeface="Arial" pitchFamily="34" charset="0"/>
+                <a:ea typeface="Arial" pitchFamily="34" charset="-122"/>
+                <a:cs typeface="Arial" pitchFamily="34" charset="-120"/>
+              </a:rPr>
+              <a:t>10 / 13</a:t>
+            </a:r>
+            <a:endParaRPr lang="en-US" sz="900" dirty="0"/>
+          </a:p>
+        </p:txBody>
+      </p:sp>
+      <p:sp>
+        <p:nvSpPr>
+          <p:cNvPr id="14" name="Text 9"/>
+          <p:cNvSpPr txBox="1"/>
+          <p:nvPr/>
+        </p:nvSpPr>
+        <p:spPr>
+          <a:xfrm>
+            <a:off x="960120" y="128016"/>
+            <a:ext cx="2011680" cy="256032"/>
+          </a:xfrm>
+          <a:prstGeom prst="rect">
+            <a:avLst/>
+          </a:prstGeom>
+          <a:noFill/>
+          <a:ln/>
+        </p:spPr>
+        <p:txBody>
+          <a:bodyPr wrap="square" lIns="0" tIns="0" rIns="0" bIns="0" rtlCol="0" anchor="ctr"/>
+          <a:lstStyle/>
+          <a:p>
+            <a:pPr indent="0" marL="0">
+              <a:buNone/>
+            </a:pPr>
+            <a:r>
+              <a:rPr lang="en-US" sz="900" dirty="0">
+                <a:solidFill>
+                  <a:srgbClr val="5F7183"/>
+                </a:solidFill>
+                <a:latin typeface="Arial" pitchFamily="34" charset="0"/>
+                <a:ea typeface="Arial" pitchFamily="34" charset="-122"/>
+                <a:cs typeface="Arial" pitchFamily="34" charset="-120"/>
+              </a:rPr>
+              <a:t>Tiết 2 · 第 2 節</a:t>
+            </a:r>
+            <a:endParaRPr lang="en-US" sz="900" dirty="0"/>
+          </a:p>
+        </p:txBody>
+      </p:sp>
+    </p:spTree>
+  </p:cSld>
+  <p:clrMapOvr>
+    <a:masterClrMapping/>
+  </p:clrMapOvr>
+</p:sld>
+</file>
+
+<file path=ppt/slides/slide11.xml><?xml version="1.0" encoding="utf-8"?>
+<p:sld xmlns:a="http://schemas.openxmlformats.org/drawingml/2006/main" xmlns:r="http://schemas.openxmlformats.org/officeDocument/2006/relationships" xmlns:p="http://schemas.openxmlformats.org/presentationml/2006/main">
+  <p:cSld name="Slide 11">
+    <p:spTree>
+      <p:nvGrpSpPr>
+        <p:cNvPr id="1" name=""/>
+        <p:cNvGrpSpPr/>
+        <p:nvPr/>
+      </p:nvGrpSpPr>
+      <p:grpSpPr>
+        <a:xfrm>
+          <a:off x="0" y="0"/>
+          <a:ext cx="1" cy="1"/>
+          <a:chOff x="0" y="0"/>
+          <a:chExt cx="0" cy="0"/>
+        </a:xfrm>
+      </p:grpSpPr>
+      <p:sp>
+        <p:nvSpPr>
+          <p:cNvPr id="2" name="Text 0"/>
+          <p:cNvSpPr txBox="1"/>
+          <p:nvPr/>
+        </p:nvSpPr>
+        <p:spPr>
+          <a:xfrm>
+            <a:off x="502920" y="420624"/>
+            <a:ext cx="8138160" cy="274320"/>
+          </a:xfrm>
+          <a:prstGeom prst="rect">
+            <a:avLst/>
+          </a:prstGeom>
+          <a:noFill/>
+          <a:ln/>
+        </p:spPr>
+        <p:txBody>
+          <a:bodyPr wrap="square" lIns="0" tIns="0" rIns="0" bIns="0" rtlCol="0" anchor="ctr"/>
+          <a:lstStyle/>
+          <a:p>
+            <a:pPr indent="0" marL="0">
+              <a:buNone/>
+            </a:pPr>
+            <a:r>
+              <a:rPr lang="en-US" sz="1250" b="1" dirty="0">
+                <a:solidFill>
+                  <a:srgbClr val="007F72"/>
+                </a:solidFill>
+                <a:latin typeface="Arial" pitchFamily="34" charset="0"/>
+                <a:ea typeface="Arial" pitchFamily="34" charset="-122"/>
+                <a:cs typeface="Arial" pitchFamily="34" charset="-120"/>
+              </a:rPr>
               <a:t>Khi ghép cũng không đủ · 壞到合不起來的時候</a:t>
             </a:r>
             <a:endParaRPr lang="en-US" sz="1250" dirty="0"/>
@@ -7146,7 +8039,7 @@
                 <a:ea typeface="Arial" pitchFamily="34" charset="-122"/>
                 <a:cs typeface="Arial" pitchFamily="34" charset="-120"/>
               </a:rPr>
-              <a:t>10 / 12</a:t>
+              <a:t>11 / 13</a:t>
             </a:r>
             <a:endParaRPr lang="en-US" sz="900" dirty="0"/>
           </a:p>
@@ -7199,9 +8092,9 @@
 </p:sld>
 </file>
 
-<file path=ppt/slides/slide11.xml><?xml version="1.0" encoding="utf-8"?>
+<file path=ppt/slides/slide12.xml><?xml version="1.0" encoding="utf-8"?>
 <p:sld xmlns:a="http://schemas.openxmlformats.org/drawingml/2006/main" xmlns:r="http://schemas.openxmlformats.org/officeDocument/2006/relationships" xmlns:p="http://schemas.openxmlformats.org/presentationml/2006/main">
-  <p:cSld name="Slide 11">
+  <p:cSld name="Slide 12">
     <p:spTree>
       <p:nvGrpSpPr>
         <p:cNvPr id="1" name=""/>
@@ -7280,7 +8173,7 @@
       </p:sp>
       <p:graphicFrame>
         <p:nvGraphicFramePr>
-          <p:cNvPr id="12" name="Table 0"/>
+          <p:cNvPr id="13" name="Table 0"/>
           <p:cNvGraphicFramePr>
             <a:graphicFrameLocks noGrp="1"/>
           </p:cNvGraphicFramePr>
@@ -7884,7 +8777,7 @@
                           <a:ea typeface="Arial" pitchFamily="34" charset="-122"/>
                           <a:cs typeface="Arial" pitchFamily="34" charset="-120"/>
                         </a:rPr>
-                        <a:t>Slide 7; tiết 3 nhiệm vụ 5</a:t>
+                        <a:t>Slide 8; tiết 3 nhiệm vụ 5</a:t>
                       </a:r>
                       <a:endParaRPr lang="en-US" sz="1130" dirty="0"/>
                     </a:p>
@@ -7901,7 +8794,7 @@
                           <a:ea typeface="微軟正黑體" pitchFamily="34" charset="-122"/>
                           <a:cs typeface="微軟正黑體" pitchFamily="34" charset="-120"/>
                         </a:rPr>
-                        <a:t>本節第七張；第三節任務五</a:t>
+                        <a:t>本節第八張；第三節任務五</a:t>
                       </a:r>
                       <a:endParaRPr lang="en-US" sz="1130" dirty="0"/>
                     </a:p>
@@ -8826,7 +9719,7 @@
                           <a:ea typeface="Arial" pitchFamily="34" charset="-122"/>
                           <a:cs typeface="Arial" pitchFamily="34" charset="-120"/>
                         </a:rPr>
-                        <a:t>Slide 9</a:t>
+                        <a:t>Slide 10</a:t>
                       </a:r>
                       <a:endParaRPr lang="en-US" sz="1130" dirty="0"/>
                     </a:p>
@@ -8843,7 +9736,7 @@
                           <a:ea typeface="微軟正黑體" pitchFamily="34" charset="-122"/>
                           <a:cs typeface="微軟正黑體" pitchFamily="34" charset="-120"/>
                         </a:rPr>
-                        <a:t>本節第九張</a:t>
+                        <a:t>本節第十張</a:t>
                       </a:r>
                       <a:endParaRPr lang="en-US" sz="1130" dirty="0"/>
                     </a:p>
@@ -9325,7 +10218,7 @@
                 <a:ea typeface="Arial" pitchFamily="34" charset="-122"/>
                 <a:cs typeface="Arial" pitchFamily="34" charset="-120"/>
               </a:rPr>
-              <a:t>11 / 12</a:t>
+              <a:t>12 / 13</a:t>
             </a:r>
             <a:endParaRPr lang="en-US" sz="850" dirty="0"/>
           </a:p>
@@ -9378,9 +10271,9 @@
 </p:sld>
 </file>
 
-<file path=ppt/slides/slide12.xml><?xml version="1.0" encoding="utf-8"?>
+<file path=ppt/slides/slide13.xml><?xml version="1.0" encoding="utf-8"?>
 <p:sld xmlns:a="http://schemas.openxmlformats.org/drawingml/2006/main" xmlns:r="http://schemas.openxmlformats.org/officeDocument/2006/relationships" xmlns:p="http://schemas.openxmlformats.org/presentationml/2006/main">
-  <p:cSld name="Slide 12">
+  <p:cSld name="Slide 13">
     <p:bg>
       <p:bgPr>
         <a:solidFill>
@@ -9829,7 +10722,7 @@
                 <a:ea typeface="Arial" pitchFamily="34" charset="-122"/>
                 <a:cs typeface="Arial" pitchFamily="34" charset="-120"/>
               </a:rPr>
-              <a:t>12 / 12</a:t>
+              <a:t>13 / 13</a:t>
             </a:r>
             <a:endParaRPr lang="en-US" sz="900" dirty="0"/>
           </a:p>
@@ -10402,7 +11295,7 @@
                 <a:ea typeface="Arial" pitchFamily="34" charset="-122"/>
                 <a:cs typeface="Arial" pitchFamily="34" charset="-120"/>
               </a:rPr>
-              <a:t>2 / 12</a:t>
+              <a:t>2 / 13</a:t>
             </a:r>
             <a:endParaRPr lang="en-US" sz="900" dirty="0"/>
           </a:p>
@@ -11089,7 +11982,7 @@
                 <a:ea typeface="Arial" pitchFamily="34" charset="-122"/>
                 <a:cs typeface="Arial" pitchFamily="34" charset="-120"/>
               </a:rPr>
-              <a:t>3 / 12</a:t>
+              <a:t>3 / 13</a:t>
             </a:r>
             <a:endParaRPr lang="en-US" sz="900" dirty="0"/>
           </a:p>
@@ -11754,7 +12647,7 @@
                 <a:ea typeface="Arial" pitchFamily="34" charset="-122"/>
                 <a:cs typeface="Arial" pitchFamily="34" charset="-120"/>
               </a:rPr>
-              <a:t>4 / 12</a:t>
+              <a:t>4 / 13</a:t>
             </a:r>
             <a:endParaRPr lang="en-US" sz="900" dirty="0"/>
           </a:p>
@@ -12542,7 +13435,7 @@
                 <a:ea typeface="Arial" pitchFamily="34" charset="-122"/>
                 <a:cs typeface="Arial" pitchFamily="34" charset="-120"/>
               </a:rPr>
-              <a:t>5 / 12</a:t>
+              <a:t>5 / 13</a:t>
             </a:r>
             <a:endParaRPr lang="en-US" sz="900" dirty="0"/>
           </a:p>
@@ -13642,7 +14535,7 @@
                 <a:ea typeface="Arial" pitchFamily="34" charset="-122"/>
                 <a:cs typeface="Arial" pitchFamily="34" charset="-120"/>
               </a:rPr>
-              <a:t>6 / 12</a:t>
+              <a:t>6 / 13</a:t>
             </a:r>
             <a:endParaRPr lang="en-US" sz="900" dirty="0"/>
           </a:p>
@@ -13698,6 +14591,2468 @@
 <file path=ppt/slides/slide7.xml><?xml version="1.0" encoding="utf-8"?>
 <p:sld xmlns:a="http://schemas.openxmlformats.org/drawingml/2006/main" xmlns:r="http://schemas.openxmlformats.org/officeDocument/2006/relationships" xmlns:p="http://schemas.openxmlformats.org/presentationml/2006/main">
   <p:cSld name="Slide 7">
+    <p:spTree>
+      <p:nvGrpSpPr>
+        <p:cNvPr id="1" name=""/>
+        <p:cNvGrpSpPr/>
+        <p:nvPr/>
+      </p:nvGrpSpPr>
+      <p:grpSpPr>
+        <a:xfrm>
+          <a:off x="472946" y="0"/>
+          <a:ext cx="1" cy="1"/>
+          <a:chOff x="0" y="0"/>
+          <a:chExt cx="0" cy="0"/>
+        </a:xfrm>
+      </p:grpSpPr>
+      <p:sp>
+        <p:nvSpPr>
+          <p:cNvPr id="2" name="Text 0"/>
+          <p:cNvSpPr txBox="1"/>
+          <p:nvPr/>
+        </p:nvSpPr>
+        <p:spPr>
+          <a:xfrm>
+            <a:off x="923842" y="262339"/>
+            <a:ext cx="7296316" cy="754226"/>
+          </a:xfrm>
+          <a:prstGeom prst="rect">
+            <a:avLst/>
+          </a:prstGeom>
+          <a:noFill/>
+          <a:ln/>
+        </p:spPr>
+        <p:txBody>
+          <a:bodyPr wrap="square" lIns="0" tIns="0" rIns="0" bIns="0" rtlCol="0" anchor="t"/>
+          <a:lstStyle/>
+          <a:p>
+            <a:pPr indent="0" marL="0">
+              <a:lnSpc>
+                <a:spcPct val="116000"/>
+              </a:lnSpc>
+              <a:buNone/>
+            </a:pPr>
+            <a:r>
+              <a:rPr lang="en-US" sz="1970" b="1" dirty="0">
+                <a:solidFill>
+                  <a:srgbClr val="0B1F3A"/>
+                </a:solidFill>
+                <a:latin typeface="Arial" pitchFamily="34" charset="0"/>
+                <a:ea typeface="Arial" pitchFamily="34" charset="-122"/>
+                <a:cs typeface="Arial" pitchFamily="34" charset="-120"/>
+              </a:rPr>
+              <a:t>So sánh ba cách ghép: sớm, giữa, muộn</a:t>
+            </a:r>
+            <a:endParaRPr lang="en-US" sz="1970" dirty="0"/>
+          </a:p>
+          <a:p>
+            <a:pPr indent="0" marL="0">
+              <a:lnSpc>
+                <a:spcPct val="116000"/>
+              </a:lnSpc>
+              <a:buNone/>
+            </a:pPr>
+            <a:r>
+              <a:rPr lang="en-US" sz="1210" dirty="0">
+                <a:solidFill>
+                  <a:srgbClr val="5F7183"/>
+                </a:solidFill>
+                <a:latin typeface="微軟正黑體" pitchFamily="34" charset="0"/>
+                <a:ea typeface="微軟正黑體" pitchFamily="34" charset="-122"/>
+                <a:cs typeface="微軟正黑體" pitchFamily="34" charset="-120"/>
+              </a:rPr>
+              <a:t>三種融合比一比：前期、中期、後期</a:t>
+            </a:r>
+            <a:endParaRPr lang="en-US" sz="1970" dirty="0"/>
+          </a:p>
+        </p:txBody>
+      </p:sp>
+      <p:graphicFrame>
+        <p:nvGraphicFramePr>
+          <p:cNvPr id="8" name="Table 0"/>
+          <p:cNvGraphicFramePr>
+            <a:graphicFrameLocks noGrp="1"/>
+          </p:cNvGraphicFramePr>
+          <p:nvPr>
+            <p:extLst>
+              <p:ext uri="{D42A27DB-BD31-4B8C-83A1-F6EECF244321}">
+                <p14:modId xmlns:p14="http://schemas.microsoft.com/office/powerpoint/2010/main" val="1579011935"/>
+              </p:ext>
+            </p:extLst>
+          </p:nvPr>
+        </p:nvGraphicFramePr>
+        <p:xfrm>
+          <a:off x="923842" y="1016565"/>
+          <a:ext cx="7296316" cy="819811"/>
+        </p:xfrm>
+        <a:graphic>
+          <a:graphicData uri="http://schemas.openxmlformats.org/drawingml/2006/table">
+            <a:tbl>
+              <a:tblPr/>
+              <a:tblGrid>
+                <a:gridCol w="1434669"/>
+                <a:gridCol w="1967546"/>
+                <a:gridCol w="1967546"/>
+                <a:gridCol w="1926555"/>
+              </a:tblGrid>
+              <a:tr h="344321">
+                <a:tc>
+                  <a:txBody>
+                    <a:bodyPr/>
+                    <a:lstStyle/>
+                    <a:p>
+                      <a:endParaRPr/>
+                    </a:p>
+                  </a:txBody>
+                  <a:tcPr marL="63500" marR="63500" marT="38100" marB="38100" anchor="ctr">
+                    <a:lnL w="6350" cap="flat" cmpd="sng" algn="ctr">
+                      <a:solidFill>
+                        <a:srgbClr val="DBE3EA"/>
+                      </a:solidFill>
+                      <a:prstDash val="solid"/>
+                      <a:round/>
+                      <a:headEnd type="none" w="med" len="med"/>
+                      <a:tailEnd type="none" w="med" len="med"/>
+                    </a:lnL>
+                    <a:lnR w="6350" cap="flat" cmpd="sng" algn="ctr">
+                      <a:solidFill>
+                        <a:srgbClr val="DBE3EA"/>
+                      </a:solidFill>
+                      <a:prstDash val="solid"/>
+                      <a:round/>
+                      <a:headEnd type="none" w="med" len="med"/>
+                      <a:tailEnd type="none" w="med" len="med"/>
+                    </a:lnR>
+                    <a:lnT w="6350" cap="flat" cmpd="sng" algn="ctr">
+                      <a:solidFill>
+                        <a:srgbClr val="DBE3EA"/>
+                      </a:solidFill>
+                      <a:prstDash val="solid"/>
+                      <a:round/>
+                      <a:headEnd type="none" w="med" len="med"/>
+                      <a:tailEnd type="none" w="med" len="med"/>
+                    </a:lnT>
+                    <a:lnB w="6350" cap="flat" cmpd="sng" algn="ctr">
+                      <a:solidFill>
+                        <a:srgbClr val="DBE3EA"/>
+                      </a:solidFill>
+                      <a:prstDash val="solid"/>
+                      <a:round/>
+                      <a:headEnd type="none" w="med" len="med"/>
+                      <a:tailEnd type="none" w="med" len="med"/>
+                    </a:lnB>
+                    <a:solidFill>
+                      <a:srgbClr val="0B1F3A"/>
+                    </a:solidFill>
+                  </a:tcPr>
+                </a:tc>
+                <a:tc>
+                  <a:txBody>
+                    <a:bodyPr/>
+                    <a:lstStyle/>
+                    <a:p>
+                      <a:pPr algn="l" indent="0" marL="0">
+                        <a:buNone/>
+                      </a:pPr>
+                      <a:r>
+                        <a:rPr lang="en-US" sz="900" b="1" dirty="0">
+                          <a:solidFill>
+                            <a:srgbClr val="FFFFFF"/>
+                          </a:solidFill>
+                          <a:latin typeface="Arial" pitchFamily="34" charset="0"/>
+                          <a:ea typeface="Arial" pitchFamily="34" charset="-122"/>
+                          <a:cs typeface="Arial" pitchFamily="34" charset="-120"/>
+                        </a:rPr>
+                        <a:t>Ghép sớm</a:t>
+                      </a:r>
+                      <a:endParaRPr lang="en-US" sz="1080" dirty="0"/>
+                    </a:p>
+                    <a:p>
+                      <a:pPr algn="l" indent="0" marL="0">
+                        <a:buNone/>
+                      </a:pPr>
+                      <a:r>
+                        <a:rPr lang="en-US" sz="760" dirty="0">
+                          <a:solidFill>
+                            <a:srgbClr val="CFE0EC"/>
+                          </a:solidFill>
+                          <a:latin typeface="微軟正黑體" pitchFamily="34" charset="0"/>
+                          <a:ea typeface="微軟正黑體" pitchFamily="34" charset="-122"/>
+                          <a:cs typeface="微軟正黑體" pitchFamily="34" charset="-120"/>
+                        </a:rPr>
+                        <a:t>前期融合</a:t>
+                      </a:r>
+                      <a:endParaRPr lang="en-US" sz="1080" dirty="0"/>
+                    </a:p>
+                  </a:txBody>
+                  <a:tcPr marL="63500" marR="63500" marT="38100" marB="38100" anchor="ctr">
+                    <a:lnL w="6350" cap="flat" cmpd="sng" algn="ctr">
+                      <a:solidFill>
+                        <a:srgbClr val="DBE3EA"/>
+                      </a:solidFill>
+                      <a:prstDash val="solid"/>
+                      <a:round/>
+                      <a:headEnd type="none" w="med" len="med"/>
+                      <a:tailEnd type="none" w="med" len="med"/>
+                    </a:lnL>
+                    <a:lnR w="6350" cap="flat" cmpd="sng" algn="ctr">
+                      <a:solidFill>
+                        <a:srgbClr val="DBE3EA"/>
+                      </a:solidFill>
+                      <a:prstDash val="solid"/>
+                      <a:round/>
+                      <a:headEnd type="none" w="med" len="med"/>
+                      <a:tailEnd type="none" w="med" len="med"/>
+                    </a:lnR>
+                    <a:lnT w="6350" cap="flat" cmpd="sng" algn="ctr">
+                      <a:solidFill>
+                        <a:srgbClr val="DBE3EA"/>
+                      </a:solidFill>
+                      <a:prstDash val="solid"/>
+                      <a:round/>
+                      <a:headEnd type="none" w="med" len="med"/>
+                      <a:tailEnd type="none" w="med" len="med"/>
+                    </a:lnT>
+                    <a:lnB w="6350" cap="flat" cmpd="sng" algn="ctr">
+                      <a:solidFill>
+                        <a:srgbClr val="DBE3EA"/>
+                      </a:solidFill>
+                      <a:prstDash val="solid"/>
+                      <a:round/>
+                      <a:headEnd type="none" w="med" len="med"/>
+                      <a:tailEnd type="none" w="med" len="med"/>
+                    </a:lnB>
+                    <a:solidFill>
+                      <a:srgbClr val="0B1F3A"/>
+                    </a:solidFill>
+                  </a:tcPr>
+                </a:tc>
+                <a:tc>
+                  <a:txBody>
+                    <a:bodyPr/>
+                    <a:lstStyle/>
+                    <a:p>
+                      <a:pPr algn="l" indent="0" marL="0">
+                        <a:buNone/>
+                      </a:pPr>
+                      <a:r>
+                        <a:rPr lang="en-US" sz="900" b="1" dirty="0">
+                          <a:solidFill>
+                            <a:srgbClr val="FFFFFF"/>
+                          </a:solidFill>
+                          <a:latin typeface="Arial" pitchFamily="34" charset="0"/>
+                          <a:ea typeface="Arial" pitchFamily="34" charset="-122"/>
+                          <a:cs typeface="Arial" pitchFamily="34" charset="-120"/>
+                        </a:rPr>
+                        <a:t>Ghép giữa</a:t>
+                      </a:r>
+                      <a:endParaRPr lang="en-US" sz="1080" dirty="0"/>
+                    </a:p>
+                    <a:p>
+                      <a:pPr algn="l" indent="0" marL="0">
+                        <a:buNone/>
+                      </a:pPr>
+                      <a:r>
+                        <a:rPr lang="en-US" sz="760" dirty="0">
+                          <a:solidFill>
+                            <a:srgbClr val="CFE0EC"/>
+                          </a:solidFill>
+                          <a:latin typeface="微軟正黑體" pitchFamily="34" charset="0"/>
+                          <a:ea typeface="微軟正黑體" pitchFamily="34" charset="-122"/>
+                          <a:cs typeface="微軟正黑體" pitchFamily="34" charset="-120"/>
+                        </a:rPr>
+                        <a:t>中期融合</a:t>
+                      </a:r>
+                      <a:endParaRPr lang="en-US" sz="1080" dirty="0"/>
+                    </a:p>
+                  </a:txBody>
+                  <a:tcPr marL="63500" marR="63500" marT="38100" marB="38100" anchor="ctr">
+                    <a:lnL w="6350" cap="flat" cmpd="sng" algn="ctr">
+                      <a:solidFill>
+                        <a:srgbClr val="DBE3EA"/>
+                      </a:solidFill>
+                      <a:prstDash val="solid"/>
+                      <a:round/>
+                      <a:headEnd type="none" w="med" len="med"/>
+                      <a:tailEnd type="none" w="med" len="med"/>
+                    </a:lnL>
+                    <a:lnR w="6350" cap="flat" cmpd="sng" algn="ctr">
+                      <a:solidFill>
+                        <a:srgbClr val="DBE3EA"/>
+                      </a:solidFill>
+                      <a:prstDash val="solid"/>
+                      <a:round/>
+                      <a:headEnd type="none" w="med" len="med"/>
+                      <a:tailEnd type="none" w="med" len="med"/>
+                    </a:lnR>
+                    <a:lnT w="6350" cap="flat" cmpd="sng" algn="ctr">
+                      <a:solidFill>
+                        <a:srgbClr val="DBE3EA"/>
+                      </a:solidFill>
+                      <a:prstDash val="solid"/>
+                      <a:round/>
+                      <a:headEnd type="none" w="med" len="med"/>
+                      <a:tailEnd type="none" w="med" len="med"/>
+                    </a:lnT>
+                    <a:lnB w="6350" cap="flat" cmpd="sng" algn="ctr">
+                      <a:solidFill>
+                        <a:srgbClr val="DBE3EA"/>
+                      </a:solidFill>
+                      <a:prstDash val="solid"/>
+                      <a:round/>
+                      <a:headEnd type="none" w="med" len="med"/>
+                      <a:tailEnd type="none" w="med" len="med"/>
+                    </a:lnB>
+                    <a:solidFill>
+                      <a:srgbClr val="0B1F3A"/>
+                    </a:solidFill>
+                  </a:tcPr>
+                </a:tc>
+                <a:tc>
+                  <a:txBody>
+                    <a:bodyPr/>
+                    <a:lstStyle/>
+                    <a:p>
+                      <a:pPr algn="l" indent="0" marL="0">
+                        <a:buNone/>
+                      </a:pPr>
+                      <a:r>
+                        <a:rPr lang="en-US" sz="900" b="1" dirty="0">
+                          <a:solidFill>
+                            <a:srgbClr val="FFFFFF"/>
+                          </a:solidFill>
+                          <a:latin typeface="Arial" pitchFamily="34" charset="0"/>
+                          <a:ea typeface="Arial" pitchFamily="34" charset="-122"/>
+                          <a:cs typeface="Arial" pitchFamily="34" charset="-120"/>
+                        </a:rPr>
+                        <a:t>Ghép muộn</a:t>
+                      </a:r>
+                      <a:endParaRPr lang="en-US" sz="1080" dirty="0"/>
+                    </a:p>
+                    <a:p>
+                      <a:pPr algn="l" indent="0" marL="0">
+                        <a:buNone/>
+                      </a:pPr>
+                      <a:r>
+                        <a:rPr lang="en-US" sz="760" dirty="0">
+                          <a:solidFill>
+                            <a:srgbClr val="CFE0EC"/>
+                          </a:solidFill>
+                          <a:latin typeface="微軟正黑體" pitchFamily="34" charset="0"/>
+                          <a:ea typeface="微軟正黑體" pitchFamily="34" charset="-122"/>
+                          <a:cs typeface="微軟正黑體" pitchFamily="34" charset="-120"/>
+                        </a:rPr>
+                        <a:t>後期融合</a:t>
+                      </a:r>
+                      <a:endParaRPr lang="en-US" sz="1080" dirty="0"/>
+                    </a:p>
+                  </a:txBody>
+                  <a:tcPr marL="63500" marR="63500" marT="38100" marB="38100" anchor="ctr">
+                    <a:lnL w="6350" cap="flat" cmpd="sng" algn="ctr">
+                      <a:solidFill>
+                        <a:srgbClr val="DBE3EA"/>
+                      </a:solidFill>
+                      <a:prstDash val="solid"/>
+                      <a:round/>
+                      <a:headEnd type="none" w="med" len="med"/>
+                      <a:tailEnd type="none" w="med" len="med"/>
+                    </a:lnL>
+                    <a:lnR w="6350" cap="flat" cmpd="sng" algn="ctr">
+                      <a:solidFill>
+                        <a:srgbClr val="DBE3EA"/>
+                      </a:solidFill>
+                      <a:prstDash val="solid"/>
+                      <a:round/>
+                      <a:headEnd type="none" w="med" len="med"/>
+                      <a:tailEnd type="none" w="med" len="med"/>
+                    </a:lnR>
+                    <a:lnT w="6350" cap="flat" cmpd="sng" algn="ctr">
+                      <a:solidFill>
+                        <a:srgbClr val="DBE3EA"/>
+                      </a:solidFill>
+                      <a:prstDash val="solid"/>
+                      <a:round/>
+                      <a:headEnd type="none" w="med" len="med"/>
+                      <a:tailEnd type="none" w="med" len="med"/>
+                    </a:lnT>
+                    <a:lnB w="6350" cap="flat" cmpd="sng" algn="ctr">
+                      <a:solidFill>
+                        <a:srgbClr val="DBE3EA"/>
+                      </a:solidFill>
+                      <a:prstDash val="solid"/>
+                      <a:round/>
+                      <a:headEnd type="none" w="med" len="med"/>
+                      <a:tailEnd type="none" w="med" len="med"/>
+                    </a:lnB>
+                    <a:solidFill>
+                      <a:srgbClr val="0B1F3A"/>
+                    </a:solidFill>
+                  </a:tcPr>
+                </a:tc>
+              </a:tr>
+              <a:tr h="344321">
+                <a:tc>
+                  <a:txBody>
+                    <a:bodyPr/>
+                    <a:lstStyle/>
+                    <a:p>
+                      <a:pPr algn="l" indent="0" marL="0">
+                        <a:buNone/>
+                      </a:pPr>
+                      <a:r>
+                        <a:rPr lang="en-US" sz="900" b="1" dirty="0">
+                          <a:solidFill>
+                            <a:srgbClr val="0B1F3A"/>
+                          </a:solidFill>
+                          <a:latin typeface="Arial" pitchFamily="34" charset="0"/>
+                          <a:ea typeface="Arial" pitchFamily="34" charset="-122"/>
+                          <a:cs typeface="Arial" pitchFamily="34" charset="-120"/>
+                        </a:rPr>
+                        <a:t>Ghép khi nào</a:t>
+                      </a:r>
+                      <a:endParaRPr lang="en-US" sz="1080" dirty="0"/>
+                    </a:p>
+                    <a:p>
+                      <a:pPr algn="l" indent="0" marL="0">
+                        <a:buNone/>
+                      </a:pPr>
+                      <a:r>
+                        <a:rPr lang="en-US" sz="760" dirty="0">
+                          <a:solidFill>
+                            <a:srgbClr val="5F7183"/>
+                          </a:solidFill>
+                          <a:latin typeface="微軟正黑體" pitchFamily="34" charset="0"/>
+                          <a:ea typeface="微軟正黑體" pitchFamily="34" charset="-122"/>
+                          <a:cs typeface="微軟正黑體" pitchFamily="34" charset="-120"/>
+                        </a:rPr>
+                        <a:t>什麼時候合</a:t>
+                      </a:r>
+                      <a:endParaRPr lang="en-US" sz="1080" dirty="0"/>
+                    </a:p>
+                  </a:txBody>
+                  <a:tcPr marL="63500" marR="63500" marT="38100" marB="38100" anchor="ctr">
+                    <a:lnL w="6350" cap="flat" cmpd="sng" algn="ctr">
+                      <a:solidFill>
+                        <a:srgbClr val="DBE3EA"/>
+                      </a:solidFill>
+                      <a:prstDash val="solid"/>
+                      <a:round/>
+                      <a:headEnd type="none" w="med" len="med"/>
+                      <a:tailEnd type="none" w="med" len="med"/>
+                    </a:lnL>
+                    <a:lnR w="6350" cap="flat" cmpd="sng" algn="ctr">
+                      <a:solidFill>
+                        <a:srgbClr val="DBE3EA"/>
+                      </a:solidFill>
+                      <a:prstDash val="solid"/>
+                      <a:round/>
+                      <a:headEnd type="none" w="med" len="med"/>
+                      <a:tailEnd type="none" w="med" len="med"/>
+                    </a:lnR>
+                    <a:lnT w="6350" cap="flat" cmpd="sng" algn="ctr">
+                      <a:solidFill>
+                        <a:srgbClr val="DBE3EA"/>
+                      </a:solidFill>
+                      <a:prstDash val="solid"/>
+                      <a:round/>
+                      <a:headEnd type="none" w="med" len="med"/>
+                      <a:tailEnd type="none" w="med" len="med"/>
+                    </a:lnT>
+                    <a:lnB w="6350" cap="flat" cmpd="sng" algn="ctr">
+                      <a:solidFill>
+                        <a:srgbClr val="DBE3EA"/>
+                      </a:solidFill>
+                      <a:prstDash val="solid"/>
+                      <a:round/>
+                      <a:headEnd type="none" w="med" len="med"/>
+                      <a:tailEnd type="none" w="med" len="med"/>
+                    </a:lnB>
+                  </a:tcPr>
+                </a:tc>
+                <a:tc>
+                  <a:txBody>
+                    <a:bodyPr/>
+                    <a:lstStyle/>
+                    <a:p>
+                      <a:pPr algn="l" indent="0" marL="0">
+                        <a:buNone/>
+                      </a:pPr>
+                      <a:r>
+                        <a:rPr lang="en-US" sz="900" dirty="0">
+                          <a:solidFill>
+                            <a:srgbClr val="1A2733"/>
+                          </a:solidFill>
+                          <a:latin typeface="Arial" pitchFamily="34" charset="0"/>
+                          <a:ea typeface="Arial" pitchFamily="34" charset="-122"/>
+                          <a:cs typeface="Arial" pitchFamily="34" charset="-120"/>
+                        </a:rPr>
+                        <a:t>Ngay dữ liệu gốc</a:t>
+                      </a:r>
+                      <a:endParaRPr lang="en-US" sz="1080" dirty="0"/>
+                    </a:p>
+                    <a:p>
+                      <a:pPr algn="l" indent="0" marL="0">
+                        <a:buNone/>
+                      </a:pPr>
+                      <a:r>
+                        <a:rPr lang="en-US" sz="760" dirty="0">
+                          <a:solidFill>
+                            <a:srgbClr val="5F7183"/>
+                          </a:solidFill>
+                          <a:latin typeface="微軟正黑體" pitchFamily="34" charset="0"/>
+                          <a:ea typeface="微軟正黑體" pitchFamily="34" charset="-122"/>
+                          <a:cs typeface="微軟正黑體" pitchFamily="34" charset="-120"/>
+                        </a:rPr>
+                        <a:t>原始資料就合</a:t>
+                      </a:r>
+                      <a:endParaRPr lang="en-US" sz="1080" dirty="0"/>
+                    </a:p>
+                  </a:txBody>
+                  <a:tcPr marL="63500" marR="63500" marT="38100" marB="38100" anchor="ctr">
+                    <a:lnL w="6350" cap="flat" cmpd="sng" algn="ctr">
+                      <a:solidFill>
+                        <a:srgbClr val="DBE3EA"/>
+                      </a:solidFill>
+                      <a:prstDash val="solid"/>
+                      <a:round/>
+                      <a:headEnd type="none" w="med" len="med"/>
+                      <a:tailEnd type="none" w="med" len="med"/>
+                    </a:lnL>
+                    <a:lnR w="6350" cap="flat" cmpd="sng" algn="ctr">
+                      <a:solidFill>
+                        <a:srgbClr val="DBE3EA"/>
+                      </a:solidFill>
+                      <a:prstDash val="solid"/>
+                      <a:round/>
+                      <a:headEnd type="none" w="med" len="med"/>
+                      <a:tailEnd type="none" w="med" len="med"/>
+                    </a:lnR>
+                    <a:lnT w="6350" cap="flat" cmpd="sng" algn="ctr">
+                      <a:solidFill>
+                        <a:srgbClr val="DBE3EA"/>
+                      </a:solidFill>
+                      <a:prstDash val="solid"/>
+                      <a:round/>
+                      <a:headEnd type="none" w="med" len="med"/>
+                      <a:tailEnd type="none" w="med" len="med"/>
+                    </a:lnT>
+                    <a:lnB w="6350" cap="flat" cmpd="sng" algn="ctr">
+                      <a:solidFill>
+                        <a:srgbClr val="DBE3EA"/>
+                      </a:solidFill>
+                      <a:prstDash val="solid"/>
+                      <a:round/>
+                      <a:headEnd type="none" w="med" len="med"/>
+                      <a:tailEnd type="none" w="med" len="med"/>
+                    </a:lnB>
+                  </a:tcPr>
+                </a:tc>
+                <a:tc>
+                  <a:txBody>
+                    <a:bodyPr/>
+                    <a:lstStyle/>
+                    <a:p>
+                      <a:pPr algn="l" indent="0" marL="0">
+                        <a:buNone/>
+                      </a:pPr>
+                      <a:r>
+                        <a:rPr lang="en-US" sz="900" dirty="0">
+                          <a:solidFill>
+                            <a:srgbClr val="1A2733"/>
+                          </a:solidFill>
+                          <a:latin typeface="Arial" pitchFamily="34" charset="0"/>
+                          <a:ea typeface="Arial" pitchFamily="34" charset="-122"/>
+                          <a:cs typeface="Arial" pitchFamily="34" charset="-120"/>
+                        </a:rPr>
+                        <a:t>Mỗi cái rút đặc trưng rồi ghép</a:t>
+                      </a:r>
+                      <a:endParaRPr lang="en-US" sz="1080" dirty="0"/>
+                    </a:p>
+                    <a:p>
+                      <a:pPr algn="l" indent="0" marL="0">
+                        <a:buNone/>
+                      </a:pPr>
+                      <a:r>
+                        <a:rPr lang="en-US" sz="760" dirty="0">
+                          <a:solidFill>
+                            <a:srgbClr val="5F7183"/>
+                          </a:solidFill>
+                          <a:latin typeface="微軟正黑體" pitchFamily="34" charset="0"/>
+                          <a:ea typeface="微軟正黑體" pitchFamily="34" charset="-122"/>
+                          <a:cs typeface="微軟正黑體" pitchFamily="34" charset="-120"/>
+                        </a:rPr>
+                        <a:t>各自抽出特徵再合</a:t>
+                      </a:r>
+                      <a:endParaRPr lang="en-US" sz="1080" dirty="0"/>
+                    </a:p>
+                  </a:txBody>
+                  <a:tcPr marL="63500" marR="63500" marT="38100" marB="38100" anchor="ctr">
+                    <a:lnL w="6350" cap="flat" cmpd="sng" algn="ctr">
+                      <a:solidFill>
+                        <a:srgbClr val="DBE3EA"/>
+                      </a:solidFill>
+                      <a:prstDash val="solid"/>
+                      <a:round/>
+                      <a:headEnd type="none" w="med" len="med"/>
+                      <a:tailEnd type="none" w="med" len="med"/>
+                    </a:lnL>
+                    <a:lnR w="6350" cap="flat" cmpd="sng" algn="ctr">
+                      <a:solidFill>
+                        <a:srgbClr val="DBE3EA"/>
+                      </a:solidFill>
+                      <a:prstDash val="solid"/>
+                      <a:round/>
+                      <a:headEnd type="none" w="med" len="med"/>
+                      <a:tailEnd type="none" w="med" len="med"/>
+                    </a:lnR>
+                    <a:lnT w="6350" cap="flat" cmpd="sng" algn="ctr">
+                      <a:solidFill>
+                        <a:srgbClr val="DBE3EA"/>
+                      </a:solidFill>
+                      <a:prstDash val="solid"/>
+                      <a:round/>
+                      <a:headEnd type="none" w="med" len="med"/>
+                      <a:tailEnd type="none" w="med" len="med"/>
+                    </a:lnT>
+                    <a:lnB w="6350" cap="flat" cmpd="sng" algn="ctr">
+                      <a:solidFill>
+                        <a:srgbClr val="DBE3EA"/>
+                      </a:solidFill>
+                      <a:prstDash val="solid"/>
+                      <a:round/>
+                      <a:headEnd type="none" w="med" len="med"/>
+                      <a:tailEnd type="none" w="med" len="med"/>
+                    </a:lnB>
+                  </a:tcPr>
+                </a:tc>
+                <a:tc>
+                  <a:txBody>
+                    <a:bodyPr/>
+                    <a:lstStyle/>
+                    <a:p>
+                      <a:pPr algn="l" indent="0" marL="0">
+                        <a:buNone/>
+                      </a:pPr>
+                      <a:r>
+                        <a:rPr lang="en-US" sz="900" dirty="0">
+                          <a:solidFill>
+                            <a:srgbClr val="1A2733"/>
+                          </a:solidFill>
+                          <a:latin typeface="Arial" pitchFamily="34" charset="0"/>
+                          <a:ea typeface="Arial" pitchFamily="34" charset="-122"/>
+                          <a:cs typeface="Arial" pitchFamily="34" charset="-120"/>
+                        </a:rPr>
+                        <a:t>Mỗi cái tự tìm vật rồi ghép</a:t>
+                      </a:r>
+                      <a:endParaRPr lang="en-US" sz="1080" dirty="0"/>
+                    </a:p>
+                    <a:p>
+                      <a:pPr algn="l" indent="0" marL="0">
+                        <a:buNone/>
+                      </a:pPr>
+                      <a:r>
+                        <a:rPr lang="en-US" sz="760" dirty="0">
+                          <a:solidFill>
+                            <a:srgbClr val="5F7183"/>
+                          </a:solidFill>
+                          <a:latin typeface="微軟正黑體" pitchFamily="34" charset="0"/>
+                          <a:ea typeface="微軟正黑體" pitchFamily="34" charset="-122"/>
+                          <a:cs typeface="微軟正黑體" pitchFamily="34" charset="-120"/>
+                        </a:rPr>
+                        <a:t>各自找出物體再合</a:t>
+                      </a:r>
+                      <a:endParaRPr lang="en-US" sz="1080" dirty="0"/>
+                    </a:p>
+                  </a:txBody>
+                  <a:tcPr marL="63500" marR="63500" marT="38100" marB="38100" anchor="ctr">
+                    <a:lnL w="6350" cap="flat" cmpd="sng" algn="ctr">
+                      <a:solidFill>
+                        <a:srgbClr val="DBE3EA"/>
+                      </a:solidFill>
+                      <a:prstDash val="solid"/>
+                      <a:round/>
+                      <a:headEnd type="none" w="med" len="med"/>
+                      <a:tailEnd type="none" w="med" len="med"/>
+                    </a:lnL>
+                    <a:lnR w="6350" cap="flat" cmpd="sng" algn="ctr">
+                      <a:solidFill>
+                        <a:srgbClr val="DBE3EA"/>
+                      </a:solidFill>
+                      <a:prstDash val="solid"/>
+                      <a:round/>
+                      <a:headEnd type="none" w="med" len="med"/>
+                      <a:tailEnd type="none" w="med" len="med"/>
+                    </a:lnR>
+                    <a:lnT w="6350" cap="flat" cmpd="sng" algn="ctr">
+                      <a:solidFill>
+                        <a:srgbClr val="DBE3EA"/>
+                      </a:solidFill>
+                      <a:prstDash val="solid"/>
+                      <a:round/>
+                      <a:headEnd type="none" w="med" len="med"/>
+                      <a:tailEnd type="none" w="med" len="med"/>
+                    </a:lnT>
+                    <a:lnB w="6350" cap="flat" cmpd="sng" algn="ctr">
+                      <a:solidFill>
+                        <a:srgbClr val="DBE3EA"/>
+                      </a:solidFill>
+                      <a:prstDash val="solid"/>
+                      <a:round/>
+                      <a:headEnd type="none" w="med" len="med"/>
+                      <a:tailEnd type="none" w="med" len="med"/>
+                    </a:lnB>
+                  </a:tcPr>
+                </a:tc>
+              </a:tr>
+              <a:tr h="344321">
+                <a:tc>
+                  <a:txBody>
+                    <a:bodyPr/>
+                    <a:lstStyle/>
+                    <a:p>
+                      <a:pPr algn="l" indent="0" marL="0">
+                        <a:buNone/>
+                      </a:pPr>
+                      <a:r>
+                        <a:rPr lang="en-US" sz="900" b="1" dirty="0">
+                          <a:solidFill>
+                            <a:srgbClr val="0B1F3A"/>
+                          </a:solidFill>
+                          <a:latin typeface="Arial" pitchFamily="34" charset="0"/>
+                          <a:ea typeface="Arial" pitchFamily="34" charset="-122"/>
+                          <a:cs typeface="Arial" pitchFamily="34" charset="-120"/>
+                        </a:rPr>
+                        <a:t>Ví dụ</a:t>
+                      </a:r>
+                      <a:endParaRPr lang="en-US" sz="1080" dirty="0"/>
+                    </a:p>
+                    <a:p>
+                      <a:pPr algn="l" indent="0" marL="0">
+                        <a:buNone/>
+                      </a:pPr>
+                      <a:r>
+                        <a:rPr lang="en-US" sz="760" dirty="0">
+                          <a:solidFill>
+                            <a:srgbClr val="5F7183"/>
+                          </a:solidFill>
+                          <a:latin typeface="微軟正黑體" pitchFamily="34" charset="0"/>
+                          <a:ea typeface="微軟正黑體" pitchFamily="34" charset="-122"/>
+                          <a:cs typeface="微軟正黑體" pitchFamily="34" charset="-120"/>
+                        </a:rPr>
+                        <a:t>例子</a:t>
+                      </a:r>
+                      <a:endParaRPr lang="en-US" sz="1080" dirty="0"/>
+                    </a:p>
+                  </a:txBody>
+                  <a:tcPr marL="63500" marR="63500" marT="38100" marB="38100" anchor="ctr">
+                    <a:lnL w="6350" cap="flat" cmpd="sng" algn="ctr">
+                      <a:solidFill>
+                        <a:srgbClr val="DBE3EA"/>
+                      </a:solidFill>
+                      <a:prstDash val="solid"/>
+                      <a:round/>
+                      <a:headEnd type="none" w="med" len="med"/>
+                      <a:tailEnd type="none" w="med" len="med"/>
+                    </a:lnL>
+                    <a:lnR w="6350" cap="flat" cmpd="sng" algn="ctr">
+                      <a:solidFill>
+                        <a:srgbClr val="DBE3EA"/>
+                      </a:solidFill>
+                      <a:prstDash val="solid"/>
+                      <a:round/>
+                      <a:headEnd type="none" w="med" len="med"/>
+                      <a:tailEnd type="none" w="med" len="med"/>
+                    </a:lnR>
+                    <a:lnT w="6350" cap="flat" cmpd="sng" algn="ctr">
+                      <a:solidFill>
+                        <a:srgbClr val="DBE3EA"/>
+                      </a:solidFill>
+                      <a:prstDash val="solid"/>
+                      <a:round/>
+                      <a:headEnd type="none" w="med" len="med"/>
+                      <a:tailEnd type="none" w="med" len="med"/>
+                    </a:lnT>
+                    <a:lnB w="6350" cap="flat" cmpd="sng" algn="ctr">
+                      <a:solidFill>
+                        <a:srgbClr val="DBE3EA"/>
+                      </a:solidFill>
+                      <a:prstDash val="solid"/>
+                      <a:round/>
+                      <a:headEnd type="none" w="med" len="med"/>
+                      <a:tailEnd type="none" w="med" len="med"/>
+                    </a:lnB>
+                  </a:tcPr>
+                </a:tc>
+                <a:tc>
+                  <a:txBody>
+                    <a:bodyPr/>
+                    <a:lstStyle/>
+                    <a:p>
+                      <a:pPr algn="l" indent="0" marL="0">
+                        <a:buNone/>
+                      </a:pPr>
+                      <a:r>
+                        <a:rPr lang="en-US" sz="900" dirty="0">
+                          <a:solidFill>
+                            <a:srgbClr val="1A2733"/>
+                          </a:solidFill>
+                          <a:latin typeface="Arial" pitchFamily="34" charset="0"/>
+                          <a:ea typeface="Arial" pitchFamily="34" charset="-122"/>
+                          <a:cs typeface="Arial" pitchFamily="34" charset="-120"/>
+                        </a:rPr>
+                        <a:t>Chiếu điểm lidar lên ảnh (slide 4)</a:t>
+                      </a:r>
+                      <a:endParaRPr lang="en-US" sz="1080" dirty="0"/>
+                    </a:p>
+                    <a:p>
+                      <a:pPr algn="l" indent="0" marL="0">
+                        <a:buNone/>
+                      </a:pPr>
+                      <a:r>
+                        <a:rPr lang="en-US" sz="760" dirty="0">
+                          <a:solidFill>
+                            <a:srgbClr val="5F7183"/>
+                          </a:solidFill>
+                          <a:latin typeface="微軟正黑體" pitchFamily="34" charset="0"/>
+                          <a:ea typeface="微軟正黑體" pitchFamily="34" charset="-122"/>
+                          <a:cs typeface="微軟正黑體" pitchFamily="34" charset="-120"/>
+                        </a:rPr>
+                        <a:t>光達點投到照片（第四張）</a:t>
+                      </a:r>
+                      <a:endParaRPr lang="en-US" sz="1080" dirty="0"/>
+                    </a:p>
+                  </a:txBody>
+                  <a:tcPr marL="63500" marR="63500" marT="38100" marB="38100" anchor="ctr">
+                    <a:lnL w="6350" cap="flat" cmpd="sng" algn="ctr">
+                      <a:solidFill>
+                        <a:srgbClr val="DBE3EA"/>
+                      </a:solidFill>
+                      <a:prstDash val="solid"/>
+                      <a:round/>
+                      <a:headEnd type="none" w="med" len="med"/>
+                      <a:tailEnd type="none" w="med" len="med"/>
+                    </a:lnL>
+                    <a:lnR w="6350" cap="flat" cmpd="sng" algn="ctr">
+                      <a:solidFill>
+                        <a:srgbClr val="DBE3EA"/>
+                      </a:solidFill>
+                      <a:prstDash val="solid"/>
+                      <a:round/>
+                      <a:headEnd type="none" w="med" len="med"/>
+                      <a:tailEnd type="none" w="med" len="med"/>
+                    </a:lnR>
+                    <a:lnT w="6350" cap="flat" cmpd="sng" algn="ctr">
+                      <a:solidFill>
+                        <a:srgbClr val="DBE3EA"/>
+                      </a:solidFill>
+                      <a:prstDash val="solid"/>
+                      <a:round/>
+                      <a:headEnd type="none" w="med" len="med"/>
+                      <a:tailEnd type="none" w="med" len="med"/>
+                    </a:lnT>
+                    <a:lnB w="6350" cap="flat" cmpd="sng" algn="ctr">
+                      <a:solidFill>
+                        <a:srgbClr val="DBE3EA"/>
+                      </a:solidFill>
+                      <a:prstDash val="solid"/>
+                      <a:round/>
+                      <a:headEnd type="none" w="med" len="med"/>
+                      <a:tailEnd type="none" w="med" len="med"/>
+                    </a:lnB>
+                  </a:tcPr>
+                </a:tc>
+                <a:tc>
+                  <a:txBody>
+                    <a:bodyPr/>
+                    <a:lstStyle/>
+                    <a:p>
+                      <a:pPr algn="l" indent="0" marL="0">
+                        <a:buNone/>
+                      </a:pPr>
+                      <a:r>
+                        <a:rPr lang="en-US" sz="900" dirty="0">
+                          <a:solidFill>
+                            <a:srgbClr val="1A2733"/>
+                          </a:solidFill>
+                          <a:latin typeface="Arial" pitchFamily="34" charset="0"/>
+                          <a:ea typeface="Arial" pitchFamily="34" charset="-122"/>
+                          <a:cs typeface="Arial" pitchFamily="34" charset="-120"/>
+                        </a:rPr>
+                        <a:t>Cùng vẽ thành bản đồ nhìn từ trên</a:t>
+                      </a:r>
+                      <a:endParaRPr lang="en-US" sz="1080" dirty="0"/>
+                    </a:p>
+                    <a:p>
+                      <a:pPr algn="l" indent="0" marL="0">
+                        <a:buNone/>
+                      </a:pPr>
+                      <a:r>
+                        <a:rPr lang="en-US" sz="760" dirty="0">
+                          <a:solidFill>
+                            <a:srgbClr val="5F7183"/>
+                          </a:solidFill>
+                          <a:latin typeface="微軟正黑體" pitchFamily="34" charset="0"/>
+                          <a:ea typeface="微軟正黑體" pitchFamily="34" charset="-122"/>
+                          <a:cs typeface="微軟正黑體" pitchFamily="34" charset="-120"/>
+                        </a:rPr>
+                        <a:t>大家先畫成同一張鳥瞰圖</a:t>
+                      </a:r>
+                      <a:endParaRPr lang="en-US" sz="1080" dirty="0"/>
+                    </a:p>
+                  </a:txBody>
+                  <a:tcPr marL="63500" marR="63500" marT="38100" marB="38100" anchor="ctr">
+                    <a:lnL w="6350" cap="flat" cmpd="sng" algn="ctr">
+                      <a:solidFill>
+                        <a:srgbClr val="DBE3EA"/>
+                      </a:solidFill>
+                      <a:prstDash val="solid"/>
+                      <a:round/>
+                      <a:headEnd type="none" w="med" len="med"/>
+                      <a:tailEnd type="none" w="med" len="med"/>
+                    </a:lnL>
+                    <a:lnR w="6350" cap="flat" cmpd="sng" algn="ctr">
+                      <a:solidFill>
+                        <a:srgbClr val="DBE3EA"/>
+                      </a:solidFill>
+                      <a:prstDash val="solid"/>
+                      <a:round/>
+                      <a:headEnd type="none" w="med" len="med"/>
+                      <a:tailEnd type="none" w="med" len="med"/>
+                    </a:lnR>
+                    <a:lnT w="6350" cap="flat" cmpd="sng" algn="ctr">
+                      <a:solidFill>
+                        <a:srgbClr val="DBE3EA"/>
+                      </a:solidFill>
+                      <a:prstDash val="solid"/>
+                      <a:round/>
+                      <a:headEnd type="none" w="med" len="med"/>
+                      <a:tailEnd type="none" w="med" len="med"/>
+                    </a:lnT>
+                    <a:lnB w="6350" cap="flat" cmpd="sng" algn="ctr">
+                      <a:solidFill>
+                        <a:srgbClr val="DBE3EA"/>
+                      </a:solidFill>
+                      <a:prstDash val="solid"/>
+                      <a:round/>
+                      <a:headEnd type="none" w="med" len="med"/>
+                      <a:tailEnd type="none" w="med" len="med"/>
+                    </a:lnB>
+                  </a:tcPr>
+                </a:tc>
+                <a:tc>
+                  <a:txBody>
+                    <a:bodyPr/>
+                    <a:lstStyle/>
+                    <a:p>
+                      <a:pPr algn="l" indent="0" marL="0">
+                        <a:buNone/>
+                      </a:pPr>
+                      <a:r>
+                        <a:rPr lang="en-US" sz="900" dirty="0">
+                          <a:solidFill>
+                            <a:srgbClr val="1A2733"/>
+                          </a:solidFill>
+                          <a:latin typeface="Arial" pitchFamily="34" charset="0"/>
+                          <a:ea typeface="Arial" pitchFamily="34" charset="-122"/>
+                          <a:cs typeface="Arial" pitchFamily="34" charset="-120"/>
+                        </a:rPr>
+                        <a:t>Hộp camera + mục tiêu radar (slide 8)</a:t>
+                      </a:r>
+                      <a:endParaRPr lang="en-US" sz="1080" dirty="0"/>
+                    </a:p>
+                    <a:p>
+                      <a:pPr algn="l" indent="0" marL="0">
+                        <a:buNone/>
+                      </a:pPr>
+                      <a:r>
+                        <a:rPr lang="en-US" sz="760" dirty="0">
+                          <a:solidFill>
+                            <a:srgbClr val="5F7183"/>
+                          </a:solidFill>
+                          <a:latin typeface="微軟正黑體" pitchFamily="34" charset="0"/>
+                          <a:ea typeface="微軟正黑體" pitchFamily="34" charset="-122"/>
+                          <a:cs typeface="微軟正黑體" pitchFamily="34" charset="-120"/>
+                        </a:rPr>
+                        <a:t>相機的框＋雷達的目標（第八張）</a:t>
+                      </a:r>
+                      <a:endParaRPr lang="en-US" sz="1080" dirty="0"/>
+                    </a:p>
+                  </a:txBody>
+                  <a:tcPr marL="63500" marR="63500" marT="38100" marB="38100" anchor="ctr">
+                    <a:lnL w="6350" cap="flat" cmpd="sng" algn="ctr">
+                      <a:solidFill>
+                        <a:srgbClr val="DBE3EA"/>
+                      </a:solidFill>
+                      <a:prstDash val="solid"/>
+                      <a:round/>
+                      <a:headEnd type="none" w="med" len="med"/>
+                      <a:tailEnd type="none" w="med" len="med"/>
+                    </a:lnL>
+                    <a:lnR w="6350" cap="flat" cmpd="sng" algn="ctr">
+                      <a:solidFill>
+                        <a:srgbClr val="DBE3EA"/>
+                      </a:solidFill>
+                      <a:prstDash val="solid"/>
+                      <a:round/>
+                      <a:headEnd type="none" w="med" len="med"/>
+                      <a:tailEnd type="none" w="med" len="med"/>
+                    </a:lnR>
+                    <a:lnT w="6350" cap="flat" cmpd="sng" algn="ctr">
+                      <a:solidFill>
+                        <a:srgbClr val="DBE3EA"/>
+                      </a:solidFill>
+                      <a:prstDash val="solid"/>
+                      <a:round/>
+                      <a:headEnd type="none" w="med" len="med"/>
+                      <a:tailEnd type="none" w="med" len="med"/>
+                    </a:lnT>
+                    <a:lnB w="6350" cap="flat" cmpd="sng" algn="ctr">
+                      <a:solidFill>
+                        <a:srgbClr val="DBE3EA"/>
+                      </a:solidFill>
+                      <a:prstDash val="solid"/>
+                      <a:round/>
+                      <a:headEnd type="none" w="med" len="med"/>
+                      <a:tailEnd type="none" w="med" len="med"/>
+                    </a:lnB>
+                  </a:tcPr>
+                </a:tc>
+              </a:tr>
+              <a:tr h="344321">
+                <a:tc>
+                  <a:txBody>
+                    <a:bodyPr/>
+                    <a:lstStyle/>
+                    <a:p>
+                      <a:pPr algn="l" indent="0" marL="0">
+                        <a:buNone/>
+                      </a:pPr>
+                      <a:r>
+                        <a:rPr lang="en-US" sz="900" b="1" dirty="0">
+                          <a:solidFill>
+                            <a:srgbClr val="0B1F3A"/>
+                          </a:solidFill>
+                          <a:latin typeface="Arial" pitchFamily="34" charset="0"/>
+                          <a:ea typeface="Arial" pitchFamily="34" charset="-122"/>
+                          <a:cs typeface="Arial" pitchFamily="34" charset="-120"/>
+                        </a:rPr>
+                        <a:t>Thông tin giữ lại</a:t>
+                      </a:r>
+                      <a:endParaRPr lang="en-US" sz="1080" dirty="0"/>
+                    </a:p>
+                    <a:p>
+                      <a:pPr algn="l" indent="0" marL="0">
+                        <a:buNone/>
+                      </a:pPr>
+                      <a:r>
+                        <a:rPr lang="en-US" sz="760" dirty="0">
+                          <a:solidFill>
+                            <a:srgbClr val="5F7183"/>
+                          </a:solidFill>
+                          <a:latin typeface="微軟正黑體" pitchFamily="34" charset="0"/>
+                          <a:ea typeface="微軟正黑體" pitchFamily="34" charset="-122"/>
+                          <a:cs typeface="微軟正黑體" pitchFamily="34" charset="-120"/>
+                        </a:rPr>
+                        <a:t>留下的資訊</a:t>
+                      </a:r>
+                      <a:endParaRPr lang="en-US" sz="1080" dirty="0"/>
+                    </a:p>
+                  </a:txBody>
+                  <a:tcPr marL="63500" marR="63500" marT="38100" marB="38100" anchor="ctr">
+                    <a:lnL w="6350" cap="flat" cmpd="sng" algn="ctr">
+                      <a:solidFill>
+                        <a:srgbClr val="DBE3EA"/>
+                      </a:solidFill>
+                      <a:prstDash val="solid"/>
+                      <a:round/>
+                      <a:headEnd type="none" w="med" len="med"/>
+                      <a:tailEnd type="none" w="med" len="med"/>
+                    </a:lnL>
+                    <a:lnR w="6350" cap="flat" cmpd="sng" algn="ctr">
+                      <a:solidFill>
+                        <a:srgbClr val="DBE3EA"/>
+                      </a:solidFill>
+                      <a:prstDash val="solid"/>
+                      <a:round/>
+                      <a:headEnd type="none" w="med" len="med"/>
+                      <a:tailEnd type="none" w="med" len="med"/>
+                    </a:lnR>
+                    <a:lnT w="6350" cap="flat" cmpd="sng" algn="ctr">
+                      <a:solidFill>
+                        <a:srgbClr val="DBE3EA"/>
+                      </a:solidFill>
+                      <a:prstDash val="solid"/>
+                      <a:round/>
+                      <a:headEnd type="none" w="med" len="med"/>
+                      <a:tailEnd type="none" w="med" len="med"/>
+                    </a:lnT>
+                    <a:lnB w="6350" cap="flat" cmpd="sng" algn="ctr">
+                      <a:solidFill>
+                        <a:srgbClr val="DBE3EA"/>
+                      </a:solidFill>
+                      <a:prstDash val="solid"/>
+                      <a:round/>
+                      <a:headEnd type="none" w="med" len="med"/>
+                      <a:tailEnd type="none" w="med" len="med"/>
+                    </a:lnB>
+                  </a:tcPr>
+                </a:tc>
+                <a:tc>
+                  <a:txBody>
+                    <a:bodyPr/>
+                    <a:lstStyle/>
+                    <a:p>
+                      <a:pPr algn="l" indent="0" marL="0">
+                        <a:buNone/>
+                      </a:pPr>
+                      <a:r>
+                        <a:rPr lang="en-US" sz="900" dirty="0">
+                          <a:solidFill>
+                            <a:srgbClr val="1A2733"/>
+                          </a:solidFill>
+                          <a:latin typeface="Arial" pitchFamily="34" charset="0"/>
+                          <a:ea typeface="Arial" pitchFamily="34" charset="-122"/>
+                          <a:cs typeface="Arial" pitchFamily="34" charset="-120"/>
+                        </a:rPr>
+                        <a:t>Nhiều nhất</a:t>
+                      </a:r>
+                      <a:endParaRPr lang="en-US" sz="1080" dirty="0"/>
+                    </a:p>
+                    <a:p>
+                      <a:pPr algn="l" indent="0" marL="0">
+                        <a:buNone/>
+                      </a:pPr>
+                      <a:r>
+                        <a:rPr lang="en-US" sz="760" dirty="0">
+                          <a:solidFill>
+                            <a:srgbClr val="5F7183"/>
+                          </a:solidFill>
+                          <a:latin typeface="微軟正黑體" pitchFamily="34" charset="0"/>
+                          <a:ea typeface="微軟正黑體" pitchFamily="34" charset="-122"/>
+                          <a:cs typeface="微軟正黑體" pitchFamily="34" charset="-120"/>
+                        </a:rPr>
+                        <a:t>最多</a:t>
+                      </a:r>
+                      <a:endParaRPr lang="en-US" sz="1080" dirty="0"/>
+                    </a:p>
+                  </a:txBody>
+                  <a:tcPr marL="63500" marR="63500" marT="38100" marB="38100" anchor="ctr">
+                    <a:lnL w="6350" cap="flat" cmpd="sng" algn="ctr">
+                      <a:solidFill>
+                        <a:srgbClr val="DBE3EA"/>
+                      </a:solidFill>
+                      <a:prstDash val="solid"/>
+                      <a:round/>
+                      <a:headEnd type="none" w="med" len="med"/>
+                      <a:tailEnd type="none" w="med" len="med"/>
+                    </a:lnL>
+                    <a:lnR w="6350" cap="flat" cmpd="sng" algn="ctr">
+                      <a:solidFill>
+                        <a:srgbClr val="DBE3EA"/>
+                      </a:solidFill>
+                      <a:prstDash val="solid"/>
+                      <a:round/>
+                      <a:headEnd type="none" w="med" len="med"/>
+                      <a:tailEnd type="none" w="med" len="med"/>
+                    </a:lnR>
+                    <a:lnT w="6350" cap="flat" cmpd="sng" algn="ctr">
+                      <a:solidFill>
+                        <a:srgbClr val="DBE3EA"/>
+                      </a:solidFill>
+                      <a:prstDash val="solid"/>
+                      <a:round/>
+                      <a:headEnd type="none" w="med" len="med"/>
+                      <a:tailEnd type="none" w="med" len="med"/>
+                    </a:lnT>
+                    <a:lnB w="6350" cap="flat" cmpd="sng" algn="ctr">
+                      <a:solidFill>
+                        <a:srgbClr val="DBE3EA"/>
+                      </a:solidFill>
+                      <a:prstDash val="solid"/>
+                      <a:round/>
+                      <a:headEnd type="none" w="med" len="med"/>
+                      <a:tailEnd type="none" w="med" len="med"/>
+                    </a:lnB>
+                  </a:tcPr>
+                </a:tc>
+                <a:tc>
+                  <a:txBody>
+                    <a:bodyPr/>
+                    <a:lstStyle/>
+                    <a:p>
+                      <a:pPr algn="l" indent="0" marL="0">
+                        <a:buNone/>
+                      </a:pPr>
+                      <a:r>
+                        <a:rPr lang="en-US" sz="900" dirty="0">
+                          <a:solidFill>
+                            <a:srgbClr val="1A2733"/>
+                          </a:solidFill>
+                          <a:latin typeface="Arial" pitchFamily="34" charset="0"/>
+                          <a:ea typeface="Arial" pitchFamily="34" charset="-122"/>
+                          <a:cs typeface="Arial" pitchFamily="34" charset="-120"/>
+                        </a:rPr>
+                        <a:t>Vừa</a:t>
+                      </a:r>
+                      <a:endParaRPr lang="en-US" sz="1080" dirty="0"/>
+                    </a:p>
+                    <a:p>
+                      <a:pPr algn="l" indent="0" marL="0">
+                        <a:buNone/>
+                      </a:pPr>
+                      <a:r>
+                        <a:rPr lang="en-US" sz="760" dirty="0">
+                          <a:solidFill>
+                            <a:srgbClr val="5F7183"/>
+                          </a:solidFill>
+                          <a:latin typeface="微軟正黑體" pitchFamily="34" charset="0"/>
+                          <a:ea typeface="微軟正黑體" pitchFamily="34" charset="-122"/>
+                          <a:cs typeface="微軟正黑體" pitchFamily="34" charset="-120"/>
+                        </a:rPr>
+                        <a:t>中等</a:t>
+                      </a:r>
+                      <a:endParaRPr lang="en-US" sz="1080" dirty="0"/>
+                    </a:p>
+                  </a:txBody>
+                  <a:tcPr marL="63500" marR="63500" marT="38100" marB="38100" anchor="ctr">
+                    <a:lnL w="6350" cap="flat" cmpd="sng" algn="ctr">
+                      <a:solidFill>
+                        <a:srgbClr val="DBE3EA"/>
+                      </a:solidFill>
+                      <a:prstDash val="solid"/>
+                      <a:round/>
+                      <a:headEnd type="none" w="med" len="med"/>
+                      <a:tailEnd type="none" w="med" len="med"/>
+                    </a:lnL>
+                    <a:lnR w="6350" cap="flat" cmpd="sng" algn="ctr">
+                      <a:solidFill>
+                        <a:srgbClr val="DBE3EA"/>
+                      </a:solidFill>
+                      <a:prstDash val="solid"/>
+                      <a:round/>
+                      <a:headEnd type="none" w="med" len="med"/>
+                      <a:tailEnd type="none" w="med" len="med"/>
+                    </a:lnR>
+                    <a:lnT w="6350" cap="flat" cmpd="sng" algn="ctr">
+                      <a:solidFill>
+                        <a:srgbClr val="DBE3EA"/>
+                      </a:solidFill>
+                      <a:prstDash val="solid"/>
+                      <a:round/>
+                      <a:headEnd type="none" w="med" len="med"/>
+                      <a:tailEnd type="none" w="med" len="med"/>
+                    </a:lnT>
+                    <a:lnB w="6350" cap="flat" cmpd="sng" algn="ctr">
+                      <a:solidFill>
+                        <a:srgbClr val="DBE3EA"/>
+                      </a:solidFill>
+                      <a:prstDash val="solid"/>
+                      <a:round/>
+                      <a:headEnd type="none" w="med" len="med"/>
+                      <a:tailEnd type="none" w="med" len="med"/>
+                    </a:lnB>
+                  </a:tcPr>
+                </a:tc>
+                <a:tc>
+                  <a:txBody>
+                    <a:bodyPr/>
+                    <a:lstStyle/>
+                    <a:p>
+                      <a:pPr algn="l" indent="0" marL="0">
+                        <a:buNone/>
+                      </a:pPr>
+                      <a:r>
+                        <a:rPr lang="en-US" sz="900" dirty="0">
+                          <a:solidFill>
+                            <a:srgbClr val="1A2733"/>
+                          </a:solidFill>
+                          <a:latin typeface="Arial" pitchFamily="34" charset="0"/>
+                          <a:ea typeface="Arial" pitchFamily="34" charset="-122"/>
+                          <a:cs typeface="Arial" pitchFamily="34" charset="-120"/>
+                        </a:rPr>
+                        <a:t>Ít nhất: cái đã bỏ không lấy lại được</a:t>
+                      </a:r>
+                      <a:endParaRPr lang="en-US" sz="1080" dirty="0"/>
+                    </a:p>
+                    <a:p>
+                      <a:pPr algn="l" indent="0" marL="0">
+                        <a:buNone/>
+                      </a:pPr>
+                      <a:r>
+                        <a:rPr lang="en-US" sz="760" dirty="0">
+                          <a:solidFill>
+                            <a:srgbClr val="5F7183"/>
+                          </a:solidFill>
+                          <a:latin typeface="微軟正黑體" pitchFamily="34" charset="0"/>
+                          <a:ea typeface="微軟正黑體" pitchFamily="34" charset="-122"/>
+                          <a:cs typeface="微軟正黑體" pitchFamily="34" charset="-120"/>
+                        </a:rPr>
+                        <a:t>最少：各自丟掉的拿不回來</a:t>
+                      </a:r>
+                      <a:endParaRPr lang="en-US" sz="1080" dirty="0"/>
+                    </a:p>
+                  </a:txBody>
+                  <a:tcPr marL="63500" marR="63500" marT="38100" marB="38100" anchor="ctr">
+                    <a:lnL w="6350" cap="flat" cmpd="sng" algn="ctr">
+                      <a:solidFill>
+                        <a:srgbClr val="DBE3EA"/>
+                      </a:solidFill>
+                      <a:prstDash val="solid"/>
+                      <a:round/>
+                      <a:headEnd type="none" w="med" len="med"/>
+                      <a:tailEnd type="none" w="med" len="med"/>
+                    </a:lnL>
+                    <a:lnR w="6350" cap="flat" cmpd="sng" algn="ctr">
+                      <a:solidFill>
+                        <a:srgbClr val="DBE3EA"/>
+                      </a:solidFill>
+                      <a:prstDash val="solid"/>
+                      <a:round/>
+                      <a:headEnd type="none" w="med" len="med"/>
+                      <a:tailEnd type="none" w="med" len="med"/>
+                    </a:lnR>
+                    <a:lnT w="6350" cap="flat" cmpd="sng" algn="ctr">
+                      <a:solidFill>
+                        <a:srgbClr val="DBE3EA"/>
+                      </a:solidFill>
+                      <a:prstDash val="solid"/>
+                      <a:round/>
+                      <a:headEnd type="none" w="med" len="med"/>
+                      <a:tailEnd type="none" w="med" len="med"/>
+                    </a:lnT>
+                    <a:lnB w="6350" cap="flat" cmpd="sng" algn="ctr">
+                      <a:solidFill>
+                        <a:srgbClr val="DBE3EA"/>
+                      </a:solidFill>
+                      <a:prstDash val="solid"/>
+                      <a:round/>
+                      <a:headEnd type="none" w="med" len="med"/>
+                      <a:tailEnd type="none" w="med" len="med"/>
+                    </a:lnB>
+                  </a:tcPr>
+                </a:tc>
+              </a:tr>
+              <a:tr h="344321">
+                <a:tc>
+                  <a:txBody>
+                    <a:bodyPr/>
+                    <a:lstStyle/>
+                    <a:p>
+                      <a:pPr algn="l" indent="0" marL="0">
+                        <a:buNone/>
+                      </a:pPr>
+                      <a:r>
+                        <a:rPr lang="en-US" sz="900" b="1" dirty="0">
+                          <a:solidFill>
+                            <a:srgbClr val="0B1F3A"/>
+                          </a:solidFill>
+                          <a:latin typeface="Arial" pitchFamily="34" charset="0"/>
+                          <a:ea typeface="Arial" pitchFamily="34" charset="-122"/>
+                          <a:cs typeface="Arial" pitchFamily="34" charset="-120"/>
+                        </a:rPr>
+                        <a:t>Căn chỉnh phải chuẩn</a:t>
+                      </a:r>
+                      <a:endParaRPr lang="en-US" sz="1080" dirty="0"/>
+                    </a:p>
+                    <a:p>
+                      <a:pPr algn="l" indent="0" marL="0">
+                        <a:buNone/>
+                      </a:pPr>
+                      <a:r>
+                        <a:rPr lang="en-US" sz="760" dirty="0">
+                          <a:solidFill>
+                            <a:srgbClr val="5F7183"/>
+                          </a:solidFill>
+                          <a:latin typeface="微軟正黑體" pitchFamily="34" charset="0"/>
+                          <a:ea typeface="微軟正黑體" pitchFamily="34" charset="-122"/>
+                          <a:cs typeface="微軟正黑體" pitchFamily="34" charset="-120"/>
+                        </a:rPr>
+                        <a:t>對齊要多準</a:t>
+                      </a:r>
+                      <a:endParaRPr lang="en-US" sz="1080" dirty="0"/>
+                    </a:p>
+                  </a:txBody>
+                  <a:tcPr marL="63500" marR="63500" marT="38100" marB="38100" anchor="ctr">
+                    <a:lnL w="6350" cap="flat" cmpd="sng" algn="ctr">
+                      <a:solidFill>
+                        <a:srgbClr val="DBE3EA"/>
+                      </a:solidFill>
+                      <a:prstDash val="solid"/>
+                      <a:round/>
+                      <a:headEnd type="none" w="med" len="med"/>
+                      <a:tailEnd type="none" w="med" len="med"/>
+                    </a:lnL>
+                    <a:lnR w="6350" cap="flat" cmpd="sng" algn="ctr">
+                      <a:solidFill>
+                        <a:srgbClr val="DBE3EA"/>
+                      </a:solidFill>
+                      <a:prstDash val="solid"/>
+                      <a:round/>
+                      <a:headEnd type="none" w="med" len="med"/>
+                      <a:tailEnd type="none" w="med" len="med"/>
+                    </a:lnR>
+                    <a:lnT w="6350" cap="flat" cmpd="sng" algn="ctr">
+                      <a:solidFill>
+                        <a:srgbClr val="DBE3EA"/>
+                      </a:solidFill>
+                      <a:prstDash val="solid"/>
+                      <a:round/>
+                      <a:headEnd type="none" w="med" len="med"/>
+                      <a:tailEnd type="none" w="med" len="med"/>
+                    </a:lnT>
+                    <a:lnB w="6350" cap="flat" cmpd="sng" algn="ctr">
+                      <a:solidFill>
+                        <a:srgbClr val="DBE3EA"/>
+                      </a:solidFill>
+                      <a:prstDash val="solid"/>
+                      <a:round/>
+                      <a:headEnd type="none" w="med" len="med"/>
+                      <a:tailEnd type="none" w="med" len="med"/>
+                    </a:lnB>
+                  </a:tcPr>
+                </a:tc>
+                <a:tc>
+                  <a:txBody>
+                    <a:bodyPr/>
+                    <a:lstStyle/>
+                    <a:p>
+                      <a:pPr algn="l" indent="0" marL="0">
+                        <a:buNone/>
+                      </a:pPr>
+                      <a:r>
+                        <a:rPr lang="en-US" sz="900" dirty="0">
+                          <a:solidFill>
+                            <a:srgbClr val="1A2733"/>
+                          </a:solidFill>
+                          <a:latin typeface="Arial" pitchFamily="34" charset="0"/>
+                          <a:ea typeface="Arial" pitchFamily="34" charset="-122"/>
+                          <a:cs typeface="Arial" pitchFamily="34" charset="-120"/>
+                        </a:rPr>
+                        <a:t>Rất chuẩn (lệch 4° là trượt)</a:t>
+                      </a:r>
+                      <a:endParaRPr lang="en-US" sz="1080" dirty="0"/>
+                    </a:p>
+                    <a:p>
+                      <a:pPr algn="l" indent="0" marL="0">
+                        <a:buNone/>
+                      </a:pPr>
+                      <a:r>
+                        <a:rPr lang="en-US" sz="760" dirty="0">
+                          <a:solidFill>
+                            <a:srgbClr val="5F7183"/>
+                          </a:solidFill>
+                          <a:latin typeface="微軟正黑體" pitchFamily="34" charset="0"/>
+                          <a:ea typeface="微軟正黑體" pitchFamily="34" charset="-122"/>
+                          <a:cs typeface="微軟正黑體" pitchFamily="34" charset="-120"/>
+                        </a:rPr>
+                        <a:t>最準（差 4 度就滑掉）</a:t>
+                      </a:r>
+                      <a:endParaRPr lang="en-US" sz="1080" dirty="0"/>
+                    </a:p>
+                  </a:txBody>
+                  <a:tcPr marL="63500" marR="63500" marT="38100" marB="38100" anchor="ctr">
+                    <a:lnL w="6350" cap="flat" cmpd="sng" algn="ctr">
+                      <a:solidFill>
+                        <a:srgbClr val="DBE3EA"/>
+                      </a:solidFill>
+                      <a:prstDash val="solid"/>
+                      <a:round/>
+                      <a:headEnd type="none" w="med" len="med"/>
+                      <a:tailEnd type="none" w="med" len="med"/>
+                    </a:lnL>
+                    <a:lnR w="6350" cap="flat" cmpd="sng" algn="ctr">
+                      <a:solidFill>
+                        <a:srgbClr val="DBE3EA"/>
+                      </a:solidFill>
+                      <a:prstDash val="solid"/>
+                      <a:round/>
+                      <a:headEnd type="none" w="med" len="med"/>
+                      <a:tailEnd type="none" w="med" len="med"/>
+                    </a:lnR>
+                    <a:lnT w="6350" cap="flat" cmpd="sng" algn="ctr">
+                      <a:solidFill>
+                        <a:srgbClr val="DBE3EA"/>
+                      </a:solidFill>
+                      <a:prstDash val="solid"/>
+                      <a:round/>
+                      <a:headEnd type="none" w="med" len="med"/>
+                      <a:tailEnd type="none" w="med" len="med"/>
+                    </a:lnT>
+                    <a:lnB w="6350" cap="flat" cmpd="sng" algn="ctr">
+                      <a:solidFill>
+                        <a:srgbClr val="DBE3EA"/>
+                      </a:solidFill>
+                      <a:prstDash val="solid"/>
+                      <a:round/>
+                      <a:headEnd type="none" w="med" len="med"/>
+                      <a:tailEnd type="none" w="med" len="med"/>
+                    </a:lnB>
+                  </a:tcPr>
+                </a:tc>
+                <a:tc>
+                  <a:txBody>
+                    <a:bodyPr/>
+                    <a:lstStyle/>
+                    <a:p>
+                      <a:pPr algn="l" indent="0" marL="0">
+                        <a:buNone/>
+                      </a:pPr>
+                      <a:r>
+                        <a:rPr lang="en-US" sz="900" dirty="0">
+                          <a:solidFill>
+                            <a:srgbClr val="1A2733"/>
+                          </a:solidFill>
+                          <a:latin typeface="Arial" pitchFamily="34" charset="0"/>
+                          <a:ea typeface="Arial" pitchFamily="34" charset="-122"/>
+                          <a:cs typeface="Arial" pitchFamily="34" charset="-120"/>
+                        </a:rPr>
+                        <a:t>Vừa</a:t>
+                      </a:r>
+                      <a:endParaRPr lang="en-US" sz="1080" dirty="0"/>
+                    </a:p>
+                    <a:p>
+                      <a:pPr algn="l" indent="0" marL="0">
+                        <a:buNone/>
+                      </a:pPr>
+                      <a:r>
+                        <a:rPr lang="en-US" sz="760" dirty="0">
+                          <a:solidFill>
+                            <a:srgbClr val="5F7183"/>
+                          </a:solidFill>
+                          <a:latin typeface="微軟正黑體" pitchFamily="34" charset="0"/>
+                          <a:ea typeface="微軟正黑體" pitchFamily="34" charset="-122"/>
+                          <a:cs typeface="微軟正黑體" pitchFamily="34" charset="-120"/>
+                        </a:rPr>
+                        <a:t>中等</a:t>
+                      </a:r>
+                      <a:endParaRPr lang="en-US" sz="1080" dirty="0"/>
+                    </a:p>
+                  </a:txBody>
+                  <a:tcPr marL="63500" marR="63500" marT="38100" marB="38100" anchor="ctr">
+                    <a:lnL w="6350" cap="flat" cmpd="sng" algn="ctr">
+                      <a:solidFill>
+                        <a:srgbClr val="DBE3EA"/>
+                      </a:solidFill>
+                      <a:prstDash val="solid"/>
+                      <a:round/>
+                      <a:headEnd type="none" w="med" len="med"/>
+                      <a:tailEnd type="none" w="med" len="med"/>
+                    </a:lnL>
+                    <a:lnR w="6350" cap="flat" cmpd="sng" algn="ctr">
+                      <a:solidFill>
+                        <a:srgbClr val="DBE3EA"/>
+                      </a:solidFill>
+                      <a:prstDash val="solid"/>
+                      <a:round/>
+                      <a:headEnd type="none" w="med" len="med"/>
+                      <a:tailEnd type="none" w="med" len="med"/>
+                    </a:lnR>
+                    <a:lnT w="6350" cap="flat" cmpd="sng" algn="ctr">
+                      <a:solidFill>
+                        <a:srgbClr val="DBE3EA"/>
+                      </a:solidFill>
+                      <a:prstDash val="solid"/>
+                      <a:round/>
+                      <a:headEnd type="none" w="med" len="med"/>
+                      <a:tailEnd type="none" w="med" len="med"/>
+                    </a:lnT>
+                    <a:lnB w="6350" cap="flat" cmpd="sng" algn="ctr">
+                      <a:solidFill>
+                        <a:srgbClr val="DBE3EA"/>
+                      </a:solidFill>
+                      <a:prstDash val="solid"/>
+                      <a:round/>
+                      <a:headEnd type="none" w="med" len="med"/>
+                      <a:tailEnd type="none" w="med" len="med"/>
+                    </a:lnB>
+                  </a:tcPr>
+                </a:tc>
+                <a:tc>
+                  <a:txBody>
+                    <a:bodyPr/>
+                    <a:lstStyle/>
+                    <a:p>
+                      <a:pPr algn="l" indent="0" marL="0">
+                        <a:buNone/>
+                      </a:pPr>
+                      <a:r>
+                        <a:rPr lang="en-US" sz="900" dirty="0">
+                          <a:solidFill>
+                            <a:srgbClr val="1A2733"/>
+                          </a:solidFill>
+                          <a:latin typeface="Arial" pitchFamily="34" charset="0"/>
+                          <a:ea typeface="Arial" pitchFamily="34" charset="-122"/>
+                          <a:cs typeface="Arial" pitchFamily="34" charset="-120"/>
+                        </a:rPr>
+                        <a:t>Dễ hơn: ghép đúng vật là được</a:t>
+                      </a:r>
+                      <a:endParaRPr lang="en-US" sz="1080" dirty="0"/>
+                    </a:p>
+                    <a:p>
+                      <a:pPr algn="l" indent="0" marL="0">
+                        <a:buNone/>
+                      </a:pPr>
+                      <a:r>
+                        <a:rPr lang="en-US" sz="760" dirty="0">
+                          <a:solidFill>
+                            <a:srgbClr val="5F7183"/>
+                          </a:solidFill>
+                          <a:latin typeface="微軟正黑體" pitchFamily="34" charset="0"/>
+                          <a:ea typeface="微軟正黑體" pitchFamily="34" charset="-122"/>
+                          <a:cs typeface="微軟正黑體" pitchFamily="34" charset="-120"/>
+                        </a:rPr>
+                        <a:t>較寬鬆：對到同一個物體就好</a:t>
+                      </a:r>
+                      <a:endParaRPr lang="en-US" sz="1080" dirty="0"/>
+                    </a:p>
+                  </a:txBody>
+                  <a:tcPr marL="63500" marR="63500" marT="38100" marB="38100" anchor="ctr">
+                    <a:lnL w="6350" cap="flat" cmpd="sng" algn="ctr">
+                      <a:solidFill>
+                        <a:srgbClr val="DBE3EA"/>
+                      </a:solidFill>
+                      <a:prstDash val="solid"/>
+                      <a:round/>
+                      <a:headEnd type="none" w="med" len="med"/>
+                      <a:tailEnd type="none" w="med" len="med"/>
+                    </a:lnL>
+                    <a:lnR w="6350" cap="flat" cmpd="sng" algn="ctr">
+                      <a:solidFill>
+                        <a:srgbClr val="DBE3EA"/>
+                      </a:solidFill>
+                      <a:prstDash val="solid"/>
+                      <a:round/>
+                      <a:headEnd type="none" w="med" len="med"/>
+                      <a:tailEnd type="none" w="med" len="med"/>
+                    </a:lnR>
+                    <a:lnT w="6350" cap="flat" cmpd="sng" algn="ctr">
+                      <a:solidFill>
+                        <a:srgbClr val="DBE3EA"/>
+                      </a:solidFill>
+                      <a:prstDash val="solid"/>
+                      <a:round/>
+                      <a:headEnd type="none" w="med" len="med"/>
+                      <a:tailEnd type="none" w="med" len="med"/>
+                    </a:lnT>
+                    <a:lnB w="6350" cap="flat" cmpd="sng" algn="ctr">
+                      <a:solidFill>
+                        <a:srgbClr val="DBE3EA"/>
+                      </a:solidFill>
+                      <a:prstDash val="solid"/>
+                      <a:round/>
+                      <a:headEnd type="none" w="med" len="med"/>
+                      <a:tailEnd type="none" w="med" len="med"/>
+                    </a:lnB>
+                  </a:tcPr>
+                </a:tc>
+              </a:tr>
+              <a:tr h="344321">
+                <a:tc>
+                  <a:txBody>
+                    <a:bodyPr/>
+                    <a:lstStyle/>
+                    <a:p>
+                      <a:pPr algn="l" indent="0" marL="0">
+                        <a:buNone/>
+                      </a:pPr>
+                      <a:r>
+                        <a:rPr lang="en-US" sz="900" b="1" dirty="0">
+                          <a:solidFill>
+                            <a:srgbClr val="0B1F3A"/>
+                          </a:solidFill>
+                          <a:latin typeface="Arial" pitchFamily="34" charset="0"/>
+                          <a:ea typeface="Arial" pitchFamily="34" charset="-122"/>
+                          <a:cs typeface="Arial" pitchFamily="34" charset="-120"/>
+                        </a:rPr>
+                        <a:t>Hỏng một cái</a:t>
+                      </a:r>
+                      <a:endParaRPr lang="en-US" sz="1080" dirty="0"/>
+                    </a:p>
+                    <a:p>
+                      <a:pPr algn="l" indent="0" marL="0">
+                        <a:buNone/>
+                      </a:pPr>
+                      <a:r>
+                        <a:rPr lang="en-US" sz="760" dirty="0">
+                          <a:solidFill>
+                            <a:srgbClr val="5F7183"/>
+                          </a:solidFill>
+                          <a:latin typeface="微軟正黑體" pitchFamily="34" charset="0"/>
+                          <a:ea typeface="微軟正黑體" pitchFamily="34" charset="-122"/>
+                          <a:cs typeface="微軟正黑體" pitchFamily="34" charset="-120"/>
+                        </a:rPr>
+                        <a:t>壞一顆的時候</a:t>
+                      </a:r>
+                      <a:endParaRPr lang="en-US" sz="1080" dirty="0"/>
+                    </a:p>
+                  </a:txBody>
+                  <a:tcPr marL="63500" marR="63500" marT="38100" marB="38100" anchor="ctr">
+                    <a:lnL w="6350" cap="flat" cmpd="sng" algn="ctr">
+                      <a:solidFill>
+                        <a:srgbClr val="DBE3EA"/>
+                      </a:solidFill>
+                      <a:prstDash val="solid"/>
+                      <a:round/>
+                      <a:headEnd type="none" w="med" len="med"/>
+                      <a:tailEnd type="none" w="med" len="med"/>
+                    </a:lnL>
+                    <a:lnR w="6350" cap="flat" cmpd="sng" algn="ctr">
+                      <a:solidFill>
+                        <a:srgbClr val="DBE3EA"/>
+                      </a:solidFill>
+                      <a:prstDash val="solid"/>
+                      <a:round/>
+                      <a:headEnd type="none" w="med" len="med"/>
+                      <a:tailEnd type="none" w="med" len="med"/>
+                    </a:lnR>
+                    <a:lnT w="6350" cap="flat" cmpd="sng" algn="ctr">
+                      <a:solidFill>
+                        <a:srgbClr val="DBE3EA"/>
+                      </a:solidFill>
+                      <a:prstDash val="solid"/>
+                      <a:round/>
+                      <a:headEnd type="none" w="med" len="med"/>
+                      <a:tailEnd type="none" w="med" len="med"/>
+                    </a:lnT>
+                    <a:lnB w="6350" cap="flat" cmpd="sng" algn="ctr">
+                      <a:solidFill>
+                        <a:srgbClr val="DBE3EA"/>
+                      </a:solidFill>
+                      <a:prstDash val="solid"/>
+                      <a:round/>
+                      <a:headEnd type="none" w="med" len="med"/>
+                      <a:tailEnd type="none" w="med" len="med"/>
+                    </a:lnB>
+                  </a:tcPr>
+                </a:tc>
+                <a:tc>
+                  <a:txBody>
+                    <a:bodyPr/>
+                    <a:lstStyle/>
+                    <a:p>
+                      <a:pPr algn="l" indent="0" marL="0">
+                        <a:buNone/>
+                      </a:pPr>
+                      <a:r>
+                        <a:rPr lang="en-US" sz="900" dirty="0">
+                          <a:solidFill>
+                            <a:srgbClr val="1A2733"/>
+                          </a:solidFill>
+                          <a:latin typeface="Arial" pitchFamily="34" charset="0"/>
+                          <a:ea typeface="Arial" pitchFamily="34" charset="-122"/>
+                          <a:cs typeface="Arial" pitchFamily="34" charset="-120"/>
+                        </a:rPr>
+                        <a:t>Ảnh hưởng nhiều nhất</a:t>
+                      </a:r>
+                      <a:endParaRPr lang="en-US" sz="1080" dirty="0"/>
+                    </a:p>
+                    <a:p>
+                      <a:pPr algn="l" indent="0" marL="0">
+                        <a:buNone/>
+                      </a:pPr>
+                      <a:r>
+                        <a:rPr lang="en-US" sz="760" dirty="0">
+                          <a:solidFill>
+                            <a:srgbClr val="5F7183"/>
+                          </a:solidFill>
+                          <a:latin typeface="微軟正黑體" pitchFamily="34" charset="0"/>
+                          <a:ea typeface="微軟正黑體" pitchFamily="34" charset="-122"/>
+                          <a:cs typeface="微軟正黑體" pitchFamily="34" charset="-120"/>
+                        </a:rPr>
+                        <a:t>影響最大</a:t>
+                      </a:r>
+                      <a:endParaRPr lang="en-US" sz="1080" dirty="0"/>
+                    </a:p>
+                  </a:txBody>
+                  <a:tcPr marL="63500" marR="63500" marT="38100" marB="38100" anchor="ctr">
+                    <a:lnL w="6350" cap="flat" cmpd="sng" algn="ctr">
+                      <a:solidFill>
+                        <a:srgbClr val="DBE3EA"/>
+                      </a:solidFill>
+                      <a:prstDash val="solid"/>
+                      <a:round/>
+                      <a:headEnd type="none" w="med" len="med"/>
+                      <a:tailEnd type="none" w="med" len="med"/>
+                    </a:lnL>
+                    <a:lnR w="6350" cap="flat" cmpd="sng" algn="ctr">
+                      <a:solidFill>
+                        <a:srgbClr val="DBE3EA"/>
+                      </a:solidFill>
+                      <a:prstDash val="solid"/>
+                      <a:round/>
+                      <a:headEnd type="none" w="med" len="med"/>
+                      <a:tailEnd type="none" w="med" len="med"/>
+                    </a:lnR>
+                    <a:lnT w="6350" cap="flat" cmpd="sng" algn="ctr">
+                      <a:solidFill>
+                        <a:srgbClr val="DBE3EA"/>
+                      </a:solidFill>
+                      <a:prstDash val="solid"/>
+                      <a:round/>
+                      <a:headEnd type="none" w="med" len="med"/>
+                      <a:tailEnd type="none" w="med" len="med"/>
+                    </a:lnT>
+                    <a:lnB w="6350" cap="flat" cmpd="sng" algn="ctr">
+                      <a:solidFill>
+                        <a:srgbClr val="DBE3EA"/>
+                      </a:solidFill>
+                      <a:prstDash val="solid"/>
+                      <a:round/>
+                      <a:headEnd type="none" w="med" len="med"/>
+                      <a:tailEnd type="none" w="med" len="med"/>
+                    </a:lnB>
+                  </a:tcPr>
+                </a:tc>
+                <a:tc>
+                  <a:txBody>
+                    <a:bodyPr/>
+                    <a:lstStyle/>
+                    <a:p>
+                      <a:pPr algn="l" indent="0" marL="0">
+                        <a:buNone/>
+                      </a:pPr>
+                      <a:r>
+                        <a:rPr lang="en-US" sz="900" dirty="0">
+                          <a:solidFill>
+                            <a:srgbClr val="1A2733"/>
+                          </a:solidFill>
+                          <a:latin typeface="Arial" pitchFamily="34" charset="0"/>
+                          <a:ea typeface="Arial" pitchFamily="34" charset="-122"/>
+                          <a:cs typeface="Arial" pitchFamily="34" charset="-120"/>
+                        </a:rPr>
+                        <a:t>Vừa</a:t>
+                      </a:r>
+                      <a:endParaRPr lang="en-US" sz="1080" dirty="0"/>
+                    </a:p>
+                    <a:p>
+                      <a:pPr algn="l" indent="0" marL="0">
+                        <a:buNone/>
+                      </a:pPr>
+                      <a:r>
+                        <a:rPr lang="en-US" sz="760" dirty="0">
+                          <a:solidFill>
+                            <a:srgbClr val="5F7183"/>
+                          </a:solidFill>
+                          <a:latin typeface="微軟正黑體" pitchFamily="34" charset="0"/>
+                          <a:ea typeface="微軟正黑體" pitchFamily="34" charset="-122"/>
+                          <a:cs typeface="微軟正黑體" pitchFamily="34" charset="-120"/>
+                        </a:rPr>
+                        <a:t>中等</a:t>
+                      </a:r>
+                      <a:endParaRPr lang="en-US" sz="1080" dirty="0"/>
+                    </a:p>
+                  </a:txBody>
+                  <a:tcPr marL="63500" marR="63500" marT="38100" marB="38100" anchor="ctr">
+                    <a:lnL w="6350" cap="flat" cmpd="sng" algn="ctr">
+                      <a:solidFill>
+                        <a:srgbClr val="DBE3EA"/>
+                      </a:solidFill>
+                      <a:prstDash val="solid"/>
+                      <a:round/>
+                      <a:headEnd type="none" w="med" len="med"/>
+                      <a:tailEnd type="none" w="med" len="med"/>
+                    </a:lnL>
+                    <a:lnR w="6350" cap="flat" cmpd="sng" algn="ctr">
+                      <a:solidFill>
+                        <a:srgbClr val="DBE3EA"/>
+                      </a:solidFill>
+                      <a:prstDash val="solid"/>
+                      <a:round/>
+                      <a:headEnd type="none" w="med" len="med"/>
+                      <a:tailEnd type="none" w="med" len="med"/>
+                    </a:lnR>
+                    <a:lnT w="6350" cap="flat" cmpd="sng" algn="ctr">
+                      <a:solidFill>
+                        <a:srgbClr val="DBE3EA"/>
+                      </a:solidFill>
+                      <a:prstDash val="solid"/>
+                      <a:round/>
+                      <a:headEnd type="none" w="med" len="med"/>
+                      <a:tailEnd type="none" w="med" len="med"/>
+                    </a:lnT>
+                    <a:lnB w="6350" cap="flat" cmpd="sng" algn="ctr">
+                      <a:solidFill>
+                        <a:srgbClr val="DBE3EA"/>
+                      </a:solidFill>
+                      <a:prstDash val="solid"/>
+                      <a:round/>
+                      <a:headEnd type="none" w="med" len="med"/>
+                      <a:tailEnd type="none" w="med" len="med"/>
+                    </a:lnB>
+                  </a:tcPr>
+                </a:tc>
+                <a:tc>
+                  <a:txBody>
+                    <a:bodyPr/>
+                    <a:lstStyle/>
+                    <a:p>
+                      <a:pPr algn="l" indent="0" marL="0">
+                        <a:buNone/>
+                      </a:pPr>
+                      <a:r>
+                        <a:rPr lang="en-US" sz="900" dirty="0">
+                          <a:solidFill>
+                            <a:srgbClr val="1A2733"/>
+                          </a:solidFill>
+                          <a:latin typeface="Arial" pitchFamily="34" charset="0"/>
+                          <a:ea typeface="Arial" pitchFamily="34" charset="-122"/>
+                          <a:cs typeface="Arial" pitchFamily="34" charset="-120"/>
+                        </a:rPr>
+                        <a:t>Dễ thay, danh sách kia vẫn còn</a:t>
+                      </a:r>
+                      <a:endParaRPr lang="en-US" sz="1080" dirty="0"/>
+                    </a:p>
+                    <a:p>
+                      <a:pPr algn="l" indent="0" marL="0">
+                        <a:buNone/>
+                      </a:pPr>
+                      <a:r>
+                        <a:rPr lang="en-US" sz="760" dirty="0">
+                          <a:solidFill>
+                            <a:srgbClr val="5F7183"/>
+                          </a:solidFill>
+                          <a:latin typeface="微軟正黑體" pitchFamily="34" charset="0"/>
+                          <a:ea typeface="微軟正黑體" pitchFamily="34" charset="-122"/>
+                          <a:cs typeface="微軟正黑體" pitchFamily="34" charset="-120"/>
+                        </a:rPr>
+                        <a:t>最好處理，另一份清單還在</a:t>
+                      </a:r>
+                      <a:endParaRPr lang="en-US" sz="1080" dirty="0"/>
+                    </a:p>
+                  </a:txBody>
+                  <a:tcPr marL="63500" marR="63500" marT="38100" marB="38100" anchor="ctr">
+                    <a:lnL w="6350" cap="flat" cmpd="sng" algn="ctr">
+                      <a:solidFill>
+                        <a:srgbClr val="DBE3EA"/>
+                      </a:solidFill>
+                      <a:prstDash val="solid"/>
+                      <a:round/>
+                      <a:headEnd type="none" w="med" len="med"/>
+                      <a:tailEnd type="none" w="med" len="med"/>
+                    </a:lnL>
+                    <a:lnR w="6350" cap="flat" cmpd="sng" algn="ctr">
+                      <a:solidFill>
+                        <a:srgbClr val="DBE3EA"/>
+                      </a:solidFill>
+                      <a:prstDash val="solid"/>
+                      <a:round/>
+                      <a:headEnd type="none" w="med" len="med"/>
+                      <a:tailEnd type="none" w="med" len="med"/>
+                    </a:lnR>
+                    <a:lnT w="6350" cap="flat" cmpd="sng" algn="ctr">
+                      <a:solidFill>
+                        <a:srgbClr val="DBE3EA"/>
+                      </a:solidFill>
+                      <a:prstDash val="solid"/>
+                      <a:round/>
+                      <a:headEnd type="none" w="med" len="med"/>
+                      <a:tailEnd type="none" w="med" len="med"/>
+                    </a:lnT>
+                    <a:lnB w="6350" cap="flat" cmpd="sng" algn="ctr">
+                      <a:solidFill>
+                        <a:srgbClr val="DBE3EA"/>
+                      </a:solidFill>
+                      <a:prstDash val="solid"/>
+                      <a:round/>
+                      <a:headEnd type="none" w="med" len="med"/>
+                      <a:tailEnd type="none" w="med" len="med"/>
+                    </a:lnB>
+                  </a:tcPr>
+                </a:tc>
+              </a:tr>
+              <a:tr h="344321">
+                <a:tc>
+                  <a:txBody>
+                    <a:bodyPr/>
+                    <a:lstStyle/>
+                    <a:p>
+                      <a:pPr algn="l" indent="0" marL="0">
+                        <a:buNone/>
+                      </a:pPr>
+                      <a:r>
+                        <a:rPr lang="en-US" sz="900" b="1" dirty="0">
+                          <a:solidFill>
+                            <a:srgbClr val="0B1F3A"/>
+                          </a:solidFill>
+                          <a:latin typeface="Arial" pitchFamily="34" charset="0"/>
+                          <a:ea typeface="Arial" pitchFamily="34" charset="-122"/>
+                          <a:cs typeface="Arial" pitchFamily="34" charset="-120"/>
+                        </a:rPr>
+                        <a:t>Lượng dữ liệu phải tính</a:t>
+                      </a:r>
+                      <a:endParaRPr lang="en-US" sz="1080" dirty="0"/>
+                    </a:p>
+                    <a:p>
+                      <a:pPr algn="l" indent="0" marL="0">
+                        <a:buNone/>
+                      </a:pPr>
+                      <a:r>
+                        <a:rPr lang="en-US" sz="760" dirty="0">
+                          <a:solidFill>
+                            <a:srgbClr val="5F7183"/>
+                          </a:solidFill>
+                          <a:latin typeface="微軟正黑體" pitchFamily="34" charset="0"/>
+                          <a:ea typeface="微軟正黑體" pitchFamily="34" charset="-122"/>
+                          <a:cs typeface="微軟正黑體" pitchFamily="34" charset="-120"/>
+                        </a:rPr>
+                        <a:t>要處理的資料量</a:t>
+                      </a:r>
+                      <a:endParaRPr lang="en-US" sz="1080" dirty="0"/>
+                    </a:p>
+                  </a:txBody>
+                  <a:tcPr marL="63500" marR="63500" marT="38100" marB="38100" anchor="ctr">
+                    <a:lnL w="6350" cap="flat" cmpd="sng" algn="ctr">
+                      <a:solidFill>
+                        <a:srgbClr val="DBE3EA"/>
+                      </a:solidFill>
+                      <a:prstDash val="solid"/>
+                      <a:round/>
+                      <a:headEnd type="none" w="med" len="med"/>
+                      <a:tailEnd type="none" w="med" len="med"/>
+                    </a:lnL>
+                    <a:lnR w="6350" cap="flat" cmpd="sng" algn="ctr">
+                      <a:solidFill>
+                        <a:srgbClr val="DBE3EA"/>
+                      </a:solidFill>
+                      <a:prstDash val="solid"/>
+                      <a:round/>
+                      <a:headEnd type="none" w="med" len="med"/>
+                      <a:tailEnd type="none" w="med" len="med"/>
+                    </a:lnR>
+                    <a:lnT w="6350" cap="flat" cmpd="sng" algn="ctr">
+                      <a:solidFill>
+                        <a:srgbClr val="DBE3EA"/>
+                      </a:solidFill>
+                      <a:prstDash val="solid"/>
+                      <a:round/>
+                      <a:headEnd type="none" w="med" len="med"/>
+                      <a:tailEnd type="none" w="med" len="med"/>
+                    </a:lnT>
+                    <a:lnB w="6350" cap="flat" cmpd="sng" algn="ctr">
+                      <a:solidFill>
+                        <a:srgbClr val="DBE3EA"/>
+                      </a:solidFill>
+                      <a:prstDash val="solid"/>
+                      <a:round/>
+                      <a:headEnd type="none" w="med" len="med"/>
+                      <a:tailEnd type="none" w="med" len="med"/>
+                    </a:lnB>
+                  </a:tcPr>
+                </a:tc>
+                <a:tc>
+                  <a:txBody>
+                    <a:bodyPr/>
+                    <a:lstStyle/>
+                    <a:p>
+                      <a:pPr algn="l" indent="0" marL="0">
+                        <a:buNone/>
+                      </a:pPr>
+                      <a:r>
+                        <a:rPr lang="en-US" sz="900" dirty="0">
+                          <a:solidFill>
+                            <a:srgbClr val="1A2733"/>
+                          </a:solidFill>
+                          <a:latin typeface="Arial" pitchFamily="34" charset="0"/>
+                          <a:ea typeface="Arial" pitchFamily="34" charset="-122"/>
+                          <a:cs typeface="Arial" pitchFamily="34" charset="-120"/>
+                        </a:rPr>
+                        <a:t>Lớn nhất</a:t>
+                      </a:r>
+                      <a:endParaRPr lang="en-US" sz="1080" dirty="0"/>
+                    </a:p>
+                    <a:p>
+                      <a:pPr algn="l" indent="0" marL="0">
+                        <a:buNone/>
+                      </a:pPr>
+                      <a:r>
+                        <a:rPr lang="en-US" sz="760" dirty="0">
+                          <a:solidFill>
+                            <a:srgbClr val="5F7183"/>
+                          </a:solidFill>
+                          <a:latin typeface="微軟正黑體" pitchFamily="34" charset="0"/>
+                          <a:ea typeface="微軟正黑體" pitchFamily="34" charset="-122"/>
+                          <a:cs typeface="微軟正黑體" pitchFamily="34" charset="-120"/>
+                        </a:rPr>
+                        <a:t>最大</a:t>
+                      </a:r>
+                      <a:endParaRPr lang="en-US" sz="1080" dirty="0"/>
+                    </a:p>
+                  </a:txBody>
+                  <a:tcPr marL="63500" marR="63500" marT="38100" marB="38100" anchor="ctr">
+                    <a:lnL w="6350" cap="flat" cmpd="sng" algn="ctr">
+                      <a:solidFill>
+                        <a:srgbClr val="DBE3EA"/>
+                      </a:solidFill>
+                      <a:prstDash val="solid"/>
+                      <a:round/>
+                      <a:headEnd type="none" w="med" len="med"/>
+                      <a:tailEnd type="none" w="med" len="med"/>
+                    </a:lnL>
+                    <a:lnR w="6350" cap="flat" cmpd="sng" algn="ctr">
+                      <a:solidFill>
+                        <a:srgbClr val="DBE3EA"/>
+                      </a:solidFill>
+                      <a:prstDash val="solid"/>
+                      <a:round/>
+                      <a:headEnd type="none" w="med" len="med"/>
+                      <a:tailEnd type="none" w="med" len="med"/>
+                    </a:lnR>
+                    <a:lnT w="6350" cap="flat" cmpd="sng" algn="ctr">
+                      <a:solidFill>
+                        <a:srgbClr val="DBE3EA"/>
+                      </a:solidFill>
+                      <a:prstDash val="solid"/>
+                      <a:round/>
+                      <a:headEnd type="none" w="med" len="med"/>
+                      <a:tailEnd type="none" w="med" len="med"/>
+                    </a:lnT>
+                    <a:lnB w="6350" cap="flat" cmpd="sng" algn="ctr">
+                      <a:solidFill>
+                        <a:srgbClr val="DBE3EA"/>
+                      </a:solidFill>
+                      <a:prstDash val="solid"/>
+                      <a:round/>
+                      <a:headEnd type="none" w="med" len="med"/>
+                      <a:tailEnd type="none" w="med" len="med"/>
+                    </a:lnB>
+                  </a:tcPr>
+                </a:tc>
+                <a:tc>
+                  <a:txBody>
+                    <a:bodyPr/>
+                    <a:lstStyle/>
+                    <a:p>
+                      <a:pPr algn="l" indent="0" marL="0">
+                        <a:buNone/>
+                      </a:pPr>
+                      <a:r>
+                        <a:rPr lang="en-US" sz="900" dirty="0">
+                          <a:solidFill>
+                            <a:srgbClr val="1A2733"/>
+                          </a:solidFill>
+                          <a:latin typeface="Arial" pitchFamily="34" charset="0"/>
+                          <a:ea typeface="Arial" pitchFamily="34" charset="-122"/>
+                          <a:cs typeface="Arial" pitchFamily="34" charset="-120"/>
+                        </a:rPr>
+                        <a:t>Vừa</a:t>
+                      </a:r>
+                      <a:endParaRPr lang="en-US" sz="1080" dirty="0"/>
+                    </a:p>
+                    <a:p>
+                      <a:pPr algn="l" indent="0" marL="0">
+                        <a:buNone/>
+                      </a:pPr>
+                      <a:r>
+                        <a:rPr lang="en-US" sz="760" dirty="0">
+                          <a:solidFill>
+                            <a:srgbClr val="5F7183"/>
+                          </a:solidFill>
+                          <a:latin typeface="微軟正黑體" pitchFamily="34" charset="0"/>
+                          <a:ea typeface="微軟正黑體" pitchFamily="34" charset="-122"/>
+                          <a:cs typeface="微軟正黑體" pitchFamily="34" charset="-120"/>
+                        </a:rPr>
+                        <a:t>中等</a:t>
+                      </a:r>
+                      <a:endParaRPr lang="en-US" sz="1080" dirty="0"/>
+                    </a:p>
+                  </a:txBody>
+                  <a:tcPr marL="63500" marR="63500" marT="38100" marB="38100" anchor="ctr">
+                    <a:lnL w="6350" cap="flat" cmpd="sng" algn="ctr">
+                      <a:solidFill>
+                        <a:srgbClr val="DBE3EA"/>
+                      </a:solidFill>
+                      <a:prstDash val="solid"/>
+                      <a:round/>
+                      <a:headEnd type="none" w="med" len="med"/>
+                      <a:tailEnd type="none" w="med" len="med"/>
+                    </a:lnL>
+                    <a:lnR w="6350" cap="flat" cmpd="sng" algn="ctr">
+                      <a:solidFill>
+                        <a:srgbClr val="DBE3EA"/>
+                      </a:solidFill>
+                      <a:prstDash val="solid"/>
+                      <a:round/>
+                      <a:headEnd type="none" w="med" len="med"/>
+                      <a:tailEnd type="none" w="med" len="med"/>
+                    </a:lnR>
+                    <a:lnT w="6350" cap="flat" cmpd="sng" algn="ctr">
+                      <a:solidFill>
+                        <a:srgbClr val="DBE3EA"/>
+                      </a:solidFill>
+                      <a:prstDash val="solid"/>
+                      <a:round/>
+                      <a:headEnd type="none" w="med" len="med"/>
+                      <a:tailEnd type="none" w="med" len="med"/>
+                    </a:lnT>
+                    <a:lnB w="6350" cap="flat" cmpd="sng" algn="ctr">
+                      <a:solidFill>
+                        <a:srgbClr val="DBE3EA"/>
+                      </a:solidFill>
+                      <a:prstDash val="solid"/>
+                      <a:round/>
+                      <a:headEnd type="none" w="med" len="med"/>
+                      <a:tailEnd type="none" w="med" len="med"/>
+                    </a:lnB>
+                  </a:tcPr>
+                </a:tc>
+                <a:tc>
+                  <a:txBody>
+                    <a:bodyPr/>
+                    <a:lstStyle/>
+                    <a:p>
+                      <a:pPr algn="l" indent="0" marL="0">
+                        <a:buNone/>
+                      </a:pPr>
+                      <a:r>
+                        <a:rPr lang="en-US" sz="900" dirty="0">
+                          <a:solidFill>
+                            <a:srgbClr val="1A2733"/>
+                          </a:solidFill>
+                          <a:latin typeface="Arial" pitchFamily="34" charset="0"/>
+                          <a:ea typeface="Arial" pitchFamily="34" charset="-122"/>
+                          <a:cs typeface="Arial" pitchFamily="34" charset="-120"/>
+                        </a:rPr>
+                        <a:t>Nhỏ nhất</a:t>
+                      </a:r>
+                      <a:endParaRPr lang="en-US" sz="1080" dirty="0"/>
+                    </a:p>
+                    <a:p>
+                      <a:pPr algn="l" indent="0" marL="0">
+                        <a:buNone/>
+                      </a:pPr>
+                      <a:r>
+                        <a:rPr lang="en-US" sz="760" dirty="0">
+                          <a:solidFill>
+                            <a:srgbClr val="5F7183"/>
+                          </a:solidFill>
+                          <a:latin typeface="微軟正黑體" pitchFamily="34" charset="0"/>
+                          <a:ea typeface="微軟正黑體" pitchFamily="34" charset="-122"/>
+                          <a:cs typeface="微軟正黑體" pitchFamily="34" charset="-120"/>
+                        </a:rPr>
+                        <a:t>最小</a:t>
+                      </a:r>
+                      <a:endParaRPr lang="en-US" sz="1080" dirty="0"/>
+                    </a:p>
+                  </a:txBody>
+                  <a:tcPr marL="63500" marR="63500" marT="38100" marB="38100" anchor="ctr">
+                    <a:lnL w="6350" cap="flat" cmpd="sng" algn="ctr">
+                      <a:solidFill>
+                        <a:srgbClr val="DBE3EA"/>
+                      </a:solidFill>
+                      <a:prstDash val="solid"/>
+                      <a:round/>
+                      <a:headEnd type="none" w="med" len="med"/>
+                      <a:tailEnd type="none" w="med" len="med"/>
+                    </a:lnL>
+                    <a:lnR w="6350" cap="flat" cmpd="sng" algn="ctr">
+                      <a:solidFill>
+                        <a:srgbClr val="DBE3EA"/>
+                      </a:solidFill>
+                      <a:prstDash val="solid"/>
+                      <a:round/>
+                      <a:headEnd type="none" w="med" len="med"/>
+                      <a:tailEnd type="none" w="med" len="med"/>
+                    </a:lnR>
+                    <a:lnT w="6350" cap="flat" cmpd="sng" algn="ctr">
+                      <a:solidFill>
+                        <a:srgbClr val="DBE3EA"/>
+                      </a:solidFill>
+                      <a:prstDash val="solid"/>
+                      <a:round/>
+                      <a:headEnd type="none" w="med" len="med"/>
+                      <a:tailEnd type="none" w="med" len="med"/>
+                    </a:lnT>
+                    <a:lnB w="6350" cap="flat" cmpd="sng" algn="ctr">
+                      <a:solidFill>
+                        <a:srgbClr val="DBE3EA"/>
+                      </a:solidFill>
+                      <a:prstDash val="solid"/>
+                      <a:round/>
+                      <a:headEnd type="none" w="med" len="med"/>
+                      <a:tailEnd type="none" w="med" len="med"/>
+                    </a:lnB>
+                  </a:tcPr>
+                </a:tc>
+              </a:tr>
+            </a:tbl>
+          </a:graphicData>
+        </a:graphic>
+      </p:graphicFrame>
+      <p:sp>
+        <p:nvSpPr>
+          <p:cNvPr id="4" name="Text 1"/>
+          <p:cNvSpPr txBox="1"/>
+          <p:nvPr/>
+        </p:nvSpPr>
+        <p:spPr>
+          <a:xfrm>
+            <a:off x="923842" y="4219245"/>
+            <a:ext cx="7296316" cy="409905"/>
+          </a:xfrm>
+          <a:prstGeom prst="rect">
+            <a:avLst/>
+          </a:prstGeom>
+          <a:noFill/>
+          <a:ln/>
+        </p:spPr>
+        <p:txBody>
+          <a:bodyPr wrap="square" lIns="0" tIns="0" rIns="0" bIns="0" rtlCol="0" anchor="t"/>
+          <a:lstStyle/>
+          <a:p>
+            <a:pPr indent="0" marL="0">
+              <a:lnSpc>
+                <a:spcPct val="116000"/>
+              </a:lnSpc>
+              <a:buNone/>
+            </a:pPr>
+            <a:r>
+              <a:rPr lang="en-US" sz="1080" b="1" dirty="0">
+                <a:solidFill>
+                  <a:srgbClr val="007F72"/>
+                </a:solidFill>
+                <a:latin typeface="Arial" pitchFamily="34" charset="0"/>
+                <a:ea typeface="Arial" pitchFamily="34" charset="-122"/>
+                <a:cs typeface="Arial" pitchFamily="34" charset="-120"/>
+              </a:rPr>
+              <a:t>Giữ càng nhiều thông tin thì càng phải căn chỉnh chuẩn: không có cách nào thắng ở mọi hàng.</a:t>
+            </a:r>
+            <a:endParaRPr lang="en-US" sz="1080" dirty="0"/>
+          </a:p>
+          <a:p>
+            <a:pPr indent="0" marL="0">
+              <a:lnSpc>
+                <a:spcPct val="116000"/>
+              </a:lnSpc>
+              <a:buNone/>
+            </a:pPr>
+            <a:r>
+              <a:rPr lang="en-US" sz="990" dirty="0">
+                <a:solidFill>
+                  <a:srgbClr val="007F72"/>
+                </a:solidFill>
+                <a:latin typeface="微軟正黑體" pitchFamily="34" charset="0"/>
+                <a:ea typeface="微軟正黑體" pitchFamily="34" charset="-122"/>
+                <a:cs typeface="微軟正黑體" pitchFamily="34" charset="-120"/>
+              </a:rPr>
+              <a:t>留下的資訊愈多，對齊就要愈準：沒有一種在每一列都贏。</a:t>
+            </a:r>
+            <a:endParaRPr lang="en-US" sz="1080" dirty="0"/>
+          </a:p>
+        </p:txBody>
+      </p:sp>
+      <p:pic>
+        <p:nvPicPr>
+          <p:cNvPr id="6" name="Image 0" descr="/Users/tsengchenghsun/Class/carClass/Claude outputs/第七週(10-22)/src/logo.png">    </p:cNvPr>
+          <p:cNvPicPr>
+            <a:picLocks noChangeAspect="1"/>
+          </p:cNvPicPr>
+          <p:nvPr/>
+        </p:nvPicPr>
+        <p:blipFill>
+          <a:blip r:embed="rId1"/>
+          <a:stretch>
+            <a:fillRect/>
+          </a:stretch>
+        </p:blipFill>
+        <p:spPr>
+          <a:xfrm>
+            <a:off x="7882128" y="109728"/>
+            <a:ext cx="1097280" cy="242439"/>
+          </a:xfrm>
+          <a:prstGeom prst="rect">
+            <a:avLst/>
+          </a:prstGeom>
+        </p:spPr>
+      </p:pic>
+      <p:sp>
+        <p:nvSpPr>
+          <p:cNvPr id="7" name="Text 2"/>
+          <p:cNvSpPr txBox="1"/>
+          <p:nvPr/>
+        </p:nvSpPr>
+        <p:spPr>
+          <a:xfrm>
+            <a:off x="571323" y="114774"/>
+            <a:ext cx="737830" cy="229547"/>
+          </a:xfrm>
+          <a:prstGeom prst="rect">
+            <a:avLst/>
+          </a:prstGeom>
+          <a:noFill/>
+          <a:ln/>
+        </p:spPr>
+        <p:txBody>
+          <a:bodyPr wrap="square" lIns="0" tIns="0" rIns="0" bIns="0" rtlCol="0" anchor="ctr"/>
+          <a:lstStyle/>
+          <a:p>
+            <a:pPr indent="0" marL="0">
+              <a:buNone/>
+            </a:pPr>
+            <a:r>
+              <a:rPr lang="en-US" sz="810" dirty="0">
+                <a:solidFill>
+                  <a:srgbClr val="5F7183"/>
+                </a:solidFill>
+                <a:latin typeface="Arial" pitchFamily="34" charset="0"/>
+                <a:ea typeface="Arial" pitchFamily="34" charset="-122"/>
+                <a:cs typeface="Arial" pitchFamily="34" charset="-120"/>
+              </a:rPr>
+              <a:t>7 / 13</a:t>
+            </a:r>
+            <a:endParaRPr lang="en-US" sz="810" dirty="0"/>
+          </a:p>
+        </p:txBody>
+      </p:sp>
+      <p:sp>
+        <p:nvSpPr>
+          <p:cNvPr id="8" name="Text 3"/>
+          <p:cNvSpPr txBox="1"/>
+          <p:nvPr/>
+        </p:nvSpPr>
+        <p:spPr>
+          <a:xfrm>
+            <a:off x="1333747" y="114774"/>
+            <a:ext cx="1803584" cy="229547"/>
+          </a:xfrm>
+          <a:prstGeom prst="rect">
+            <a:avLst/>
+          </a:prstGeom>
+          <a:noFill/>
+          <a:ln/>
+        </p:spPr>
+        <p:txBody>
+          <a:bodyPr wrap="square" lIns="0" tIns="0" rIns="0" bIns="0" rtlCol="0" anchor="ctr"/>
+          <a:lstStyle/>
+          <a:p>
+            <a:pPr indent="0" marL="0">
+              <a:buNone/>
+            </a:pPr>
+            <a:r>
+              <a:rPr lang="en-US" sz="810" dirty="0">
+                <a:solidFill>
+                  <a:srgbClr val="5F7183"/>
+                </a:solidFill>
+                <a:latin typeface="Arial" pitchFamily="34" charset="0"/>
+                <a:ea typeface="Arial" pitchFamily="34" charset="-122"/>
+                <a:cs typeface="Arial" pitchFamily="34" charset="-120"/>
+              </a:rPr>
+              <a:t>Tiết 2 · 第 2 節</a:t>
+            </a:r>
+            <a:endParaRPr lang="en-US" sz="810" dirty="0"/>
+          </a:p>
+        </p:txBody>
+      </p:sp>
+    </p:spTree>
+  </p:cSld>
+  <p:clrMapOvr>
+    <a:masterClrMapping/>
+  </p:clrMapOvr>
+</p:sld>
+</file>
+
+<file path=ppt/slides/slide8.xml><?xml version="1.0" encoding="utf-8"?>
+<p:sld xmlns:a="http://schemas.openxmlformats.org/drawingml/2006/main" xmlns:r="http://schemas.openxmlformats.org/officeDocument/2006/relationships" xmlns:p="http://schemas.openxmlformats.org/presentationml/2006/main">
+  <p:cSld name="Slide 8">
     <p:spTree>
       <p:nvGrpSpPr>
         <p:cNvPr id="1" name=""/>
@@ -14374,7 +17729,7 @@
                 <a:ea typeface="Arial" pitchFamily="34" charset="-122"/>
                 <a:cs typeface="Arial" pitchFamily="34" charset="-120"/>
               </a:rPr>
-              <a:t>7 / 12</a:t>
+              <a:t>8 / 13</a:t>
             </a:r>
             <a:endParaRPr lang="en-US" sz="900" dirty="0"/>
           </a:p>
@@ -14427,9 +17782,9 @@
 </p:sld>
 </file>
 
-<file path=ppt/slides/slide8.xml><?xml version="1.0" encoding="utf-8"?>
+<file path=ppt/slides/slide9.xml><?xml version="1.0" encoding="utf-8"?>
 <p:sld xmlns:a="http://schemas.openxmlformats.org/drawingml/2006/main" xmlns:r="http://schemas.openxmlformats.org/officeDocument/2006/relationships" xmlns:p="http://schemas.openxmlformats.org/presentationml/2006/main">
-  <p:cSld name="Slide 8">
+  <p:cSld name="Slide 9">
     <p:spTree>
       <p:nvGrpSpPr>
         <p:cNvPr id="1" name=""/>
@@ -14508,7 +17863,7 @@
       </p:sp>
       <p:graphicFrame>
         <p:nvGraphicFramePr>
-          <p:cNvPr id="9" name="Table 0"/>
+          <p:cNvPr id="10" name="Table 0"/>
           <p:cNvGraphicFramePr>
             <a:graphicFrameLocks noGrp="1"/>
           </p:cNvGraphicFramePr>
@@ -15925,7 +19280,7 @@
                 <a:ea typeface="Arial" pitchFamily="34" charset="-122"/>
                 <a:cs typeface="Arial" pitchFamily="34" charset="-120"/>
               </a:rPr>
-              <a:t>8 / 12</a:t>
+              <a:t>9 / 13</a:t>
             </a:r>
             <a:endParaRPr lang="en-US" sz="900" dirty="0"/>
           </a:p>
@@ -15934,579 +19289,6 @@
       <p:sp>
         <p:nvSpPr>
           <p:cNvPr id="8" name="Text 3"/>
-          <p:cNvSpPr txBox="1"/>
-          <p:nvPr/>
-        </p:nvSpPr>
-        <p:spPr>
-          <a:xfrm>
-            <a:off x="960120" y="128016"/>
-            <a:ext cx="2011680" cy="256032"/>
-          </a:xfrm>
-          <a:prstGeom prst="rect">
-            <a:avLst/>
-          </a:prstGeom>
-          <a:noFill/>
-          <a:ln/>
-        </p:spPr>
-        <p:txBody>
-          <a:bodyPr wrap="square" lIns="0" tIns="0" rIns="0" bIns="0" rtlCol="0" anchor="ctr"/>
-          <a:lstStyle/>
-          <a:p>
-            <a:pPr indent="0" marL="0">
-              <a:buNone/>
-            </a:pPr>
-            <a:r>
-              <a:rPr lang="en-US" sz="900" dirty="0">
-                <a:solidFill>
-                  <a:srgbClr val="5F7183"/>
-                </a:solidFill>
-                <a:latin typeface="Arial" pitchFamily="34" charset="0"/>
-                <a:ea typeface="Arial" pitchFamily="34" charset="-122"/>
-                <a:cs typeface="Arial" pitchFamily="34" charset="-120"/>
-              </a:rPr>
-              <a:t>Tiết 2 · 第 2 節</a:t>
-            </a:r>
-            <a:endParaRPr lang="en-US" sz="900" dirty="0"/>
-          </a:p>
-        </p:txBody>
-      </p:sp>
-    </p:spTree>
-  </p:cSld>
-  <p:clrMapOvr>
-    <a:masterClrMapping/>
-  </p:clrMapOvr>
-</p:sld>
-</file>
-
-<file path=ppt/slides/slide9.xml><?xml version="1.0" encoding="utf-8"?>
-<p:sld xmlns:a="http://schemas.openxmlformats.org/drawingml/2006/main" xmlns:r="http://schemas.openxmlformats.org/officeDocument/2006/relationships" xmlns:p="http://schemas.openxmlformats.org/presentationml/2006/main">
-  <p:cSld name="Slide 9">
-    <p:spTree>
-      <p:nvGrpSpPr>
-        <p:cNvPr id="1" name=""/>
-        <p:cNvGrpSpPr/>
-        <p:nvPr/>
-      </p:nvGrpSpPr>
-      <p:grpSpPr>
-        <a:xfrm>
-          <a:off x="0" y="0"/>
-          <a:ext cx="1" cy="1"/>
-          <a:chOff x="0" y="0"/>
-          <a:chExt cx="0" cy="0"/>
-        </a:xfrm>
-      </p:grpSpPr>
-      <p:sp>
-        <p:nvSpPr>
-          <p:cNvPr id="2" name="Text 0"/>
-          <p:cNvSpPr txBox="1"/>
-          <p:nvPr/>
-        </p:nvSpPr>
-        <p:spPr>
-          <a:xfrm>
-            <a:off x="502920" y="420624"/>
-            <a:ext cx="8138160" cy="274320"/>
-          </a:xfrm>
-          <a:prstGeom prst="rect">
-            <a:avLst/>
-          </a:prstGeom>
-          <a:noFill/>
-          <a:ln/>
-        </p:spPr>
-        <p:txBody>
-          <a:bodyPr wrap="square" lIns="0" tIns="0" rIns="0" bIns="0" rtlCol="0" anchor="ctr"/>
-          <a:lstStyle/>
-          <a:p>
-            <a:pPr indent="0" marL="0">
-              <a:buNone/>
-            </a:pPr>
-            <a:r>
-              <a:rPr lang="en-US" sz="1250" b="1" dirty="0">
-                <a:solidFill>
-                  <a:srgbClr val="007F72"/>
-                </a:solidFill>
-                <a:latin typeface="Arial" pitchFamily="34" charset="0"/>
-                <a:ea typeface="Arial" pitchFamily="34" charset="-122"/>
-                <a:cs typeface="Arial" pitchFamily="34" charset="-120"/>
-              </a:rPr>
-              <a:t>Định vị · 比較準的，多相信一點</a:t>
-            </a:r>
-            <a:endParaRPr lang="en-US" sz="1250" dirty="0"/>
-          </a:p>
-        </p:txBody>
-      </p:sp>
-      <p:sp>
-        <p:nvSpPr>
-          <p:cNvPr id="3" name="Shape 1"/>
-          <p:cNvSpPr/>
-          <p:nvPr/>
-        </p:nvSpPr>
-        <p:spPr>
-          <a:xfrm>
-            <a:off x="502920" y="1101852"/>
-            <a:ext cx="3305556" cy="2514600"/>
-          </a:xfrm>
-          <a:prstGeom prst="roundRect">
-            <a:avLst>
-              <a:gd name="adj" fmla="val 4364"/>
-            </a:avLst>
-          </a:prstGeom>
-          <a:solidFill>
-            <a:srgbClr val="FFFFFF"/>
-          </a:solidFill>
-          <a:ln w="12700">
-            <a:solidFill>
-              <a:srgbClr val="DBE3EA"/>
-            </a:solidFill>
-            <a:prstDash val="solid"/>
-          </a:ln>
-        </p:spPr>
-      </p:sp>
-      <p:pic>
-        <p:nvPicPr>
-          <p:cNvPr id="4" name="Image 0" descr="/Users/tsengchenghsun/Class/carClass/Claude outputs/第七週(10-22)/src/img/w7_kalman.gif">    </p:cNvPr>
-          <p:cNvPicPr>
-            <a:picLocks noChangeAspect="1"/>
-          </p:cNvPicPr>
-          <p:nvPr/>
-        </p:nvPicPr>
-        <p:blipFill>
-          <a:blip r:embed="rId1"/>
-          <a:stretch>
-            <a:fillRect/>
-          </a:stretch>
-        </p:blipFill>
-        <p:spPr>
-          <a:xfrm>
-            <a:off x="576072" y="1214628"/>
-            <a:ext cx="3159252" cy="2106168"/>
-          </a:xfrm>
-          <a:prstGeom prst="rect">
-            <a:avLst/>
-          </a:prstGeom>
-        </p:spPr>
-      </p:pic>
-      <p:sp>
-        <p:nvSpPr>
-          <p:cNvPr id="5" name="Text 2"/>
-          <p:cNvSpPr txBox="1"/>
-          <p:nvPr/>
-        </p:nvSpPr>
-        <p:spPr>
-          <a:xfrm>
-            <a:off x="576072" y="3396996"/>
-            <a:ext cx="3159252" cy="182880"/>
-          </a:xfrm>
-          <a:prstGeom prst="rect">
-            <a:avLst/>
-          </a:prstGeom>
-          <a:noFill/>
-          <a:ln/>
-        </p:spPr>
-        <p:txBody>
-          <a:bodyPr wrap="square" lIns="0" tIns="0" rIns="0" bIns="0" rtlCol="0" anchor="ctr"/>
-          <a:lstStyle/>
-          <a:p>
-            <a:pPr algn="ctr" indent="0" marL="0">
-              <a:buNone/>
-            </a:pPr>
-            <a:r>
-              <a:rPr lang="en-US" sz="700" dirty="0">
-                <a:solidFill>
-                  <a:srgbClr val="5F7183"/>
-                </a:solidFill>
-                <a:latin typeface="Arial" pitchFamily="34" charset="0"/>
-                <a:ea typeface="Arial" pitchFamily="34" charset="-122"/>
-                <a:cs typeface="Arial" pitchFamily="34" charset="-120"/>
-              </a:rPr>
-              <a:t>動圖：課程自製（曲線寬度照誤差畫；隧道那段是示意）</a:t>
-            </a:r>
-            <a:endParaRPr lang="en-US" sz="700" dirty="0"/>
-          </a:p>
-        </p:txBody>
-      </p:sp>
-      <p:sp>
-        <p:nvSpPr>
-          <p:cNvPr id="6" name="Text 3"/>
-          <p:cNvSpPr txBox="1"/>
-          <p:nvPr/>
-        </p:nvSpPr>
-        <p:spPr>
-          <a:xfrm>
-            <a:off x="4119372" y="914400"/>
-            <a:ext cx="4521708" cy="2889504"/>
-          </a:xfrm>
-          <a:prstGeom prst="rect">
-            <a:avLst/>
-          </a:prstGeom>
-          <a:noFill/>
-          <a:ln/>
-        </p:spPr>
-        <p:txBody>
-          <a:bodyPr wrap="square" lIns="0" tIns="0" rIns="0" bIns="0" rtlCol="0" anchor="ctr"/>
-          <a:lstStyle/>
-          <a:p>
-            <a:pPr indent="0" marL="0">
-              <a:lnSpc>
-                <a:spcPct val="120000"/>
-              </a:lnSpc>
-              <a:buNone/>
-            </a:pPr>
-            <a:r>
-              <a:rPr lang="en-US" sz="2000" b="1" dirty="0">
-                <a:solidFill>
-                  <a:srgbClr val="0B1F3A"/>
-                </a:solidFill>
-                <a:latin typeface="Arial" pitchFamily="34" charset="0"/>
-                <a:ea typeface="Arial" pitchFamily="34" charset="-122"/>
-                <a:cs typeface="Arial" pitchFamily="34" charset="-120"/>
-              </a:rPr>
-              <a:t>Ghép để định vị: dự đoán một vị trí, đo được một vị trí — cái nào chuẩn hơn thì tin nhiều hơn</a:t>
-            </a:r>
-            <a:endParaRPr lang="en-US" sz="2000" dirty="0"/>
-          </a:p>
-          <a:p>
-            <a:pPr indent="0" marL="0">
-              <a:lnSpc>
-                <a:spcPct val="120000"/>
-              </a:lnSpc>
-              <a:buNone/>
-            </a:pPr>
-            <a:r>
-              <a:rPr lang="en-US" sz="1400" b="1" dirty="0">
-                <a:solidFill>
-                  <a:srgbClr val="007F72"/>
-                </a:solidFill>
-                <a:latin typeface="微軟正黑體" pitchFamily="34" charset="0"/>
-                <a:ea typeface="微軟正黑體" pitchFamily="34" charset="-122"/>
-                <a:cs typeface="微軟正黑體" pitchFamily="34" charset="-120"/>
-              </a:rPr>
-              <a:t>定位的融合：預測一個位置、量到一個位置——比較準的那一個，多相信一點</a:t>
-            </a:r>
-            <a:endParaRPr lang="en-US" sz="2000" dirty="0"/>
-          </a:p>
-          <a:p>
-            <a:pPr indent="0" marL="0">
-              <a:lnSpc>
-                <a:spcPct val="120000"/>
-              </a:lnSpc>
-              <a:spcBef>
-                <a:spcPts val="1440"/>
-              </a:spcBef>
-              <a:buNone/>
-            </a:pPr>
-            <a:r>
-              <a:rPr lang="en-US" sz="1250" dirty="0">
-                <a:solidFill>
-                  <a:srgbClr val="5F7183"/>
-                </a:solidFill>
-                <a:latin typeface="Arial" pitchFamily="34" charset="0"/>
-                <a:ea typeface="Arial" pitchFamily="34" charset="-122"/>
-                <a:cs typeface="Arial" pitchFamily="34" charset="-120"/>
-              </a:rPr>
-              <a:t>IMU + tốc độ bánh dự đoán: 120,0 m (±1 m). GPS đo: 118,0 m (±3 m). Sai số kém nhau 3 lần → tin nhau chênh 9 lần → kết quả 119,8 m.</a:t>
-            </a:r>
-            <a:endParaRPr lang="en-US" sz="2000" dirty="0"/>
-          </a:p>
-          <a:p>
-            <a:pPr indent="0" marL="0">
-              <a:lnSpc>
-                <a:spcPct val="120000"/>
-              </a:lnSpc>
-              <a:buNone/>
-            </a:pPr>
-            <a:r>
-              <a:rPr lang="en-US" sz="1150" dirty="0">
-                <a:solidFill>
-                  <a:srgbClr val="5F7183"/>
-                </a:solidFill>
-                <a:latin typeface="微軟正黑體" pitchFamily="34" charset="0"/>
-                <a:ea typeface="微軟正黑體" pitchFamily="34" charset="-122"/>
-                <a:cs typeface="微軟正黑體" pitchFamily="34" charset="-120"/>
-              </a:rPr>
-              <a:t>IMU＋輪速推算：120.0 公尺（±1）。GPS 量到：118.0 公尺（±3）。誤差差 3 倍 → 信任差 9 倍 → 結果 119.8 公尺。</a:t>
-            </a:r>
-            <a:endParaRPr lang="en-US" sz="2000" dirty="0"/>
-          </a:p>
-        </p:txBody>
-      </p:sp>
-      <p:sp>
-        <p:nvSpPr>
-          <p:cNvPr id="7" name="Shape 4"/>
-          <p:cNvSpPr/>
-          <p:nvPr/>
-        </p:nvSpPr>
-        <p:spPr>
-          <a:xfrm>
-            <a:off x="502920" y="3913632"/>
-            <a:ext cx="8138160" cy="621792"/>
-          </a:xfrm>
-          <a:prstGeom prst="roundRect">
-            <a:avLst>
-              <a:gd name="adj" fmla="val 13235"/>
-            </a:avLst>
-          </a:prstGeom>
-          <a:solidFill>
-            <a:srgbClr val="FFF6E3"/>
-          </a:solidFill>
-          <a:ln w="12700">
-            <a:solidFill>
-              <a:srgbClr val="FFB020"/>
-            </a:solidFill>
-            <a:prstDash val="solid"/>
-          </a:ln>
-        </p:spPr>
-      </p:sp>
-      <p:sp>
-        <p:nvSpPr>
-          <p:cNvPr id="8" name="Text 5"/>
-          <p:cNvSpPr txBox="1"/>
-          <p:nvPr/>
-        </p:nvSpPr>
-        <p:spPr>
-          <a:xfrm>
-            <a:off x="685800" y="3986784"/>
-            <a:ext cx="7772400" cy="493776"/>
-          </a:xfrm>
-          <a:prstGeom prst="rect">
-            <a:avLst/>
-          </a:prstGeom>
-          <a:noFill/>
-          <a:ln/>
-        </p:spPr>
-        <p:txBody>
-          <a:bodyPr wrap="square" lIns="0" tIns="0" rIns="0" bIns="0" rtlCol="0" anchor="t"/>
-          <a:lstStyle/>
-          <a:p>
-            <a:pPr indent="0" marL="0">
-              <a:lnSpc>
-                <a:spcPct val="116000"/>
-              </a:lnSpc>
-              <a:buNone/>
-            </a:pPr>
-            <a:r>
-              <a:rPr lang="en-US" sz="1250" b="1" dirty="0">
-                <a:solidFill>
-                  <a:srgbClr val="7A4E00"/>
-                </a:solidFill>
-                <a:latin typeface="Arial" pitchFamily="34" charset="0"/>
-                <a:ea typeface="Arial" pitchFamily="34" charset="-122"/>
-                <a:cs typeface="Arial" pitchFamily="34" charset="-120"/>
-              </a:rPr>
-              <a:t>Trong hầm chỉ còn dự đoán, vòng sai số lớn dần; ra khỏi hầm GPS quay lại, kéo về ngay.</a:t>
-            </a:r>
-            <a:endParaRPr lang="en-US" sz="1250" dirty="0"/>
-          </a:p>
-          <a:p>
-            <a:pPr indent="0" marL="0">
-              <a:lnSpc>
-                <a:spcPct val="116000"/>
-              </a:lnSpc>
-              <a:buNone/>
-            </a:pPr>
-            <a:r>
-              <a:rPr lang="en-US" sz="1150" dirty="0">
-                <a:solidFill>
-                  <a:srgbClr val="7A4E00"/>
-                </a:solidFill>
-                <a:latin typeface="微軟正黑體" pitchFamily="34" charset="0"/>
-                <a:ea typeface="微軟正黑體" pitchFamily="34" charset="-122"/>
-                <a:cs typeface="微軟正黑體" pitchFamily="34" charset="-120"/>
-              </a:rPr>
-              <a:t>隧道裡只剩預測，誤差圈愈來愈大；出了隧道 GPS 回來，一下就拉回來。</a:t>
-            </a:r>
-            <a:endParaRPr lang="en-US" sz="1250" dirty="0"/>
-          </a:p>
-        </p:txBody>
-      </p:sp>
-      <p:sp>
-        <p:nvSpPr>
-          <p:cNvPr id="9" name="Shape 6"/>
-          <p:cNvSpPr/>
-          <p:nvPr/>
-        </p:nvSpPr>
-        <p:spPr>
-          <a:xfrm>
-            <a:off x="4999780" y="365760"/>
-            <a:ext cx="3641300" cy="310896"/>
-          </a:xfrm>
-          <a:prstGeom prst="roundRect">
-            <a:avLst>
-              <a:gd name="adj" fmla="val 20588"/>
-            </a:avLst>
-          </a:prstGeom>
-          <a:solidFill>
-            <a:srgbClr val="EAF6F4"/>
-          </a:solidFill>
-          <a:ln w="9525">
-            <a:solidFill>
-              <a:srgbClr val="9FD6CE"/>
-            </a:solidFill>
-            <a:prstDash val="solid"/>
-          </a:ln>
-        </p:spPr>
-      </p:sp>
-      <p:sp>
-        <p:nvSpPr>
-          <p:cNvPr id="10" name="Text 7"/>
-          <p:cNvSpPr txBox="1"/>
-          <p:nvPr/>
-        </p:nvSpPr>
-        <p:spPr>
-          <a:xfrm>
-            <a:off x="5127796" y="384048"/>
-            <a:ext cx="3458420" cy="274320"/>
-          </a:xfrm>
-          <a:prstGeom prst="rect">
-            <a:avLst/>
-          </a:prstGeom>
-          <a:noFill/>
-          <a:ln/>
-        </p:spPr>
-        <p:txBody>
-          <a:bodyPr wrap="square" lIns="0" tIns="0" rIns="0" bIns="0" rtlCol="0" anchor="ctr"/>
-          <a:lstStyle/>
-          <a:p>
-            <a:pPr indent="0" marL="0">
-              <a:lnSpc>
-                <a:spcPct val="100000"/>
-              </a:lnSpc>
-              <a:buNone/>
-            </a:pPr>
-            <a:r>
-              <a:rPr lang="en-US" sz="950" b="1" dirty="0">
-                <a:solidFill>
-                  <a:srgbClr val="007F72"/>
-                </a:solidFill>
-                <a:latin typeface="Arial" pitchFamily="34" charset="0"/>
-                <a:ea typeface="Arial" pitchFamily="34" charset="-122"/>
-                <a:cs typeface="Arial" pitchFamily="34" charset="-120"/>
-              </a:rPr>
-              <a:t>Ví dụ · </a:t>
-            </a:r>
-            <a:pPr indent="0" marL="0">
-              <a:lnSpc>
-                <a:spcPct val="100000"/>
-              </a:lnSpc>
-              <a:buNone/>
-            </a:pPr>
-            <a:r>
-              <a:rPr lang="en-US" sz="950" dirty="0">
-                <a:solidFill>
-                  <a:srgbClr val="1A2733"/>
-                </a:solidFill>
-                <a:latin typeface="Arial" pitchFamily="34" charset="0"/>
-                <a:ea typeface="Arial" pitchFamily="34" charset="-122"/>
-                <a:cs typeface="Arial" pitchFamily="34" charset="-120"/>
-              </a:rPr>
-              <a:t>hai chiếc đồng hồ: tin cái chạy chuẩn hơn nhiều hơn</a:t>
-            </a:r>
-            <a:endParaRPr lang="en-US" sz="950" dirty="0"/>
-          </a:p>
-          <a:p>
-            <a:pPr indent="0" marL="0">
-              <a:lnSpc>
-                <a:spcPct val="100000"/>
-              </a:lnSpc>
-              <a:buNone/>
-            </a:pPr>
-            <a:r>
-              <a:rPr lang="en-US" sz="900" b="1" dirty="0">
-                <a:solidFill>
-                  <a:srgbClr val="007F72"/>
-                </a:solidFill>
-                <a:latin typeface="微軟正黑體" pitchFamily="34" charset="0"/>
-                <a:ea typeface="微軟正黑體" pitchFamily="34" charset="-122"/>
-                <a:cs typeface="微軟正黑體" pitchFamily="34" charset="-120"/>
-              </a:rPr>
-              <a:t>例子・</a:t>
-            </a:r>
-            <a:pPr indent="0" marL="0">
-              <a:lnSpc>
-                <a:spcPct val="100000"/>
-              </a:lnSpc>
-              <a:buNone/>
-            </a:pPr>
-            <a:r>
-              <a:rPr lang="en-US" sz="900" dirty="0">
-                <a:solidFill>
-                  <a:srgbClr val="5F7183"/>
-                </a:solidFill>
-                <a:latin typeface="微軟正黑體" pitchFamily="34" charset="0"/>
-                <a:ea typeface="微軟正黑體" pitchFamily="34" charset="-122"/>
-                <a:cs typeface="微軟正黑體" pitchFamily="34" charset="-120"/>
-              </a:rPr>
-              <a:t>兩支錶，比較準的那支多聽一點</a:t>
-            </a:r>
-            <a:endParaRPr lang="en-US" sz="950" dirty="0"/>
-          </a:p>
-        </p:txBody>
-      </p:sp>
-      <p:pic>
-        <p:nvPicPr>
-          <p:cNvPr id="12" name="Image 1" descr="/Users/tsengchenghsun/Class/carClass/Claude outputs/第七週(10-22)/src/logo.png">    </p:cNvPr>
-          <p:cNvPicPr>
-            <a:picLocks noChangeAspect="1"/>
-          </p:cNvPicPr>
-          <p:nvPr/>
-        </p:nvPicPr>
-        <p:blipFill>
-          <a:blip r:embed="rId2"/>
-          <a:stretch>
-            <a:fillRect/>
-          </a:stretch>
-        </p:blipFill>
-        <p:spPr>
-          <a:xfrm>
-            <a:off x="7882128" y="109728"/>
-            <a:ext cx="1097280" cy="242439"/>
-          </a:xfrm>
-          <a:prstGeom prst="rect">
-            <a:avLst/>
-          </a:prstGeom>
-        </p:spPr>
-      </p:pic>
-      <p:sp>
-        <p:nvSpPr>
-          <p:cNvPr id="13" name="Text 8"/>
-          <p:cNvSpPr txBox="1"/>
-          <p:nvPr/>
-        </p:nvSpPr>
-        <p:spPr>
-          <a:xfrm>
-            <a:off x="109728" y="128016"/>
-            <a:ext cx="822960" cy="256032"/>
-          </a:xfrm>
-          <a:prstGeom prst="rect">
-            <a:avLst/>
-          </a:prstGeom>
-          <a:noFill/>
-          <a:ln/>
-        </p:spPr>
-        <p:txBody>
-          <a:bodyPr wrap="square" lIns="0" tIns="0" rIns="0" bIns="0" rtlCol="0" anchor="ctr"/>
-          <a:lstStyle/>
-          <a:p>
-            <a:pPr indent="0" marL="0">
-              <a:buNone/>
-            </a:pPr>
-            <a:r>
-              <a:rPr lang="en-US" sz="900" dirty="0">
-                <a:solidFill>
-                  <a:srgbClr val="5F7183"/>
-                </a:solidFill>
-                <a:latin typeface="Arial" pitchFamily="34" charset="0"/>
-                <a:ea typeface="Arial" pitchFamily="34" charset="-122"/>
-                <a:cs typeface="Arial" pitchFamily="34" charset="-120"/>
-              </a:rPr>
-              <a:t>9 / 12</a:t>
-            </a:r>
-            <a:endParaRPr lang="en-US" sz="900" dirty="0"/>
-          </a:p>
-        </p:txBody>
-      </p:sp>
-      <p:sp>
-        <p:nvSpPr>
-          <p:cNvPr id="14" name="Text 9"/>
           <p:cNvSpPr txBox="1"/>
           <p:nvPr/>
         </p:nvSpPr>

--- a/第七週(10-22)/第七週_第2節_簡報.pptx
+++ b/第七週(10-22)/第七週_第2節_簡報.pptx
@@ -1308,11 +1308,11 @@
                 <a:spcPts val="0"/>
               </a:spcBef>
               <a:spcAft>
-                <a:spcPts val="233"/>
+                <a:spcPts val="183"/>
               </a:spcAft>
             </a:pPr>
             <a:r>
-              <a:rPr sz="1400" b="1" lang="zh-TW" dirty="0">
+              <a:rPr sz="1100" b="1" lang="zh-TW" dirty="0">
                 <a:solidFill>
                   <a:srgbClr val="000000"/>
                 </a:solidFill>
@@ -1323,15 +1323,15 @@
               <a:t>這一張的目的：</a:t>
             </a:r>
             <a:r>
-              <a:rPr sz="1400" lang="zh-TW" dirty="0">
-                <a:solidFill>
-                  <a:srgbClr val="000000"/>
-                </a:solidFill>
-                <a:latin typeface="Arial Unicode MS"/>
-                <a:ea typeface="Arial Unicode MS"/>
-                <a:cs typeface="Arial Unicode MS"/>
-              </a:rPr>
-              <a:t>讓大家知道，壞到合起來也不夠時，車子要主動降級；L2 交還給人，L4 自己靠邊停。
+              <a:rPr sz="1100" lang="zh-TW" dirty="0">
+                <a:solidFill>
+                  <a:srgbClr val="000000"/>
+                </a:solidFill>
+                <a:latin typeface="Arial Unicode MS"/>
+                <a:ea typeface="Arial Unicode MS"/>
+                <a:cs typeface="Arial Unicode MS"/>
+              </a:rPr>
+              <a:t>讓大家知道，壞到合起來也不夠時，車子要主動降級；L2 馬上交還給人，L3 請人接手、沒人接就停下，L4 自己靠邊停。
 </a:t>
             </a:r>
           </a:p>
@@ -1341,11 +1341,11 @@
                 <a:spcPts val="0"/>
               </a:spcBef>
               <a:spcAft>
-                <a:spcPts val="233"/>
+                <a:spcPts val="183"/>
               </a:spcAft>
             </a:pPr>
             <a:r>
-              <a:rPr sz="1400" lang="zh-TW" dirty="0">
+              <a:rPr sz="1100" lang="zh-TW" dirty="0">
                 <a:solidFill>
                   <a:srgbClr val="000000"/>
                 </a:solidFill>
@@ -1363,11 +1363,11 @@
                 <a:spcPts val="0"/>
               </a:spcBef>
               <a:spcAft>
-                <a:spcPts val="233"/>
+                <a:spcPts val="183"/>
               </a:spcAft>
             </a:pPr>
             <a:r>
-              <a:rPr sz="1400" lang="zh-TW" dirty="0">
+              <a:rPr sz="1100" lang="zh-TW" dirty="0">
                 <a:solidFill>
                   <a:srgbClr val="000000"/>
                 </a:solidFill>
@@ -1378,7 +1378,7 @@
               <a:t>答案是</a:t>
             </a:r>
             <a:r>
-              <a:rPr sz="1400" b="1" lang="zh-TW" dirty="0">
+              <a:rPr sz="1100" b="1" lang="zh-TW" dirty="0">
                 <a:solidFill>
                   <a:srgbClr val="000000"/>
                 </a:solidFill>
@@ -1389,7 +1389,7 @@
               <a:t>降級</a:t>
             </a:r>
             <a:r>
-              <a:rPr sz="1400" lang="zh-TW" dirty="0">
+              <a:rPr sz="1100" lang="zh-TW" dirty="0">
                 <a:solidFill>
                   <a:srgbClr val="000000"/>
                 </a:solidFill>
@@ -1407,11 +1407,11 @@
                 <a:spcPts val="0"/>
               </a:spcBef>
               <a:spcAft>
-                <a:spcPts val="233"/>
+                <a:spcPts val="183"/>
               </a:spcAft>
             </a:pPr>
             <a:r>
-              <a:rPr sz="1400" lang="zh-TW" dirty="0">
+              <a:rPr sz="1100" lang="zh-TW" dirty="0">
                 <a:solidFill>
                   <a:srgbClr val="000000"/>
                 </a:solidFill>
@@ -1422,7 +1422,7 @@
               <a:t>看左邊的動圖，它會播三段。</a:t>
             </a:r>
             <a:r>
-              <a:rPr sz="1400" b="1" lang="zh-TW" dirty="0">
+              <a:rPr sz="1100" b="1" lang="zh-TW" dirty="0">
                 <a:solidFill>
                   <a:srgbClr val="000000"/>
                 </a:solidFill>
@@ -1433,7 +1433,7 @@
               <a:t>第一段，雨愈下愈大。</a:t>
             </a:r>
             <a:r>
-              <a:rPr sz="1400" lang="zh-TW" dirty="0">
+              <a:rPr sz="1100" lang="zh-TW" dirty="0">
                 <a:solidFill>
                   <a:srgbClr val="000000"/>
                 </a:solidFill>
@@ -1451,11 +1451,11 @@
                 <a:spcPts val="0"/>
               </a:spcBef>
               <a:spcAft>
-                <a:spcPts val="233"/>
+                <a:spcPts val="183"/>
               </a:spcAft>
             </a:pPr>
             <a:r>
-              <a:rPr sz="1400" lang="zh-TW" dirty="0">
+              <a:rPr sz="1100" lang="zh-TW" dirty="0">
                 <a:solidFill>
                   <a:srgbClr val="000000"/>
                 </a:solidFill>
@@ -1466,7 +1466,7 @@
               <a:t>怎麼退，跟第一週的 SAE 等級有關。</a:t>
             </a:r>
             <a:r>
-              <a:rPr sz="1400" b="1" lang="zh-TW" dirty="0">
+              <a:rPr sz="1100" b="1" lang="zh-TW" dirty="0">
                 <a:solidFill>
                   <a:srgbClr val="000000"/>
                 </a:solidFill>
@@ -1477,59 +1477,15 @@
               <a:t>L2</a:t>
             </a:r>
             <a:r>
-              <a:rPr sz="1400" lang="zh-TW" dirty="0">
-                <a:solidFill>
-                  <a:srgbClr val="000000"/>
-                </a:solidFill>
-                <a:latin typeface="Arial Unicode MS"/>
-                <a:ea typeface="Arial Unicode MS"/>
-                <a:cs typeface="Arial Unicode MS"/>
-              </a:rPr>
-              <a:t>，就是動圖的第二段：駕駛隨時要準備接手，所以車子會跳警告、發出聲音，請駕駛把方向盤拿回去。</a:t>
-            </a:r>
-            <a:r>
-              <a:rPr sz="1400" b="1" lang="zh-TW" dirty="0">
-                <a:solidFill>
-                  <a:srgbClr val="000000"/>
-                </a:solidFill>
-                <a:latin typeface="Arial Unicode MS"/>
-                <a:ea typeface="Arial Unicode MS"/>
-                <a:cs typeface="Arial Unicode MS"/>
-              </a:rPr>
-              <a:t>L4</a:t>
-            </a:r>
-            <a:r>
-              <a:rPr sz="1400" lang="zh-TW" dirty="0">
-                <a:solidFill>
-                  <a:srgbClr val="000000"/>
-                </a:solidFill>
-                <a:latin typeface="Arial Unicode MS"/>
-                <a:ea typeface="Arial Unicode MS"/>
-                <a:cs typeface="Arial Unicode MS"/>
-              </a:rPr>
-              <a:t>，就是第三段：車上可能沒有駕駛，它要自己把車子帶到一個</a:t>
-            </a:r>
-            <a:r>
-              <a:rPr sz="1400" b="1" lang="zh-TW" dirty="0">
-                <a:solidFill>
-                  <a:srgbClr val="000000"/>
-                </a:solidFill>
-                <a:latin typeface="Arial Unicode MS"/>
-                <a:ea typeface="Arial Unicode MS"/>
-                <a:cs typeface="Arial Unicode MS"/>
-              </a:rPr>
-              <a:t>最小風險狀態</a:t>
-            </a:r>
-            <a:r>
-              <a:rPr sz="1400" lang="zh-TW" dirty="0">
-                <a:solidFill>
-                  <a:srgbClr val="000000"/>
-                </a:solidFill>
-                <a:latin typeface="Arial Unicode MS"/>
-                <a:ea typeface="Arial Unicode MS"/>
-                <a:cs typeface="Arial Unicode MS"/>
-              </a:rPr>
-              <a:t>，最常見的就是減速、打雙黃燈、切到右邊的路肩停下來。台灣、越南都是靠右行駛，所以是靠右邊停。就像計程車司機遇到看不清楚的暴雨，會先靠邊停一下，等雨小一點再走。
+              <a:rPr sz="1100" lang="zh-TW" dirty="0">
+                <a:solidFill>
+                  <a:srgbClr val="000000"/>
+                </a:solidFill>
+                <a:latin typeface="Arial Unicode MS"/>
+                <a:ea typeface="Arial Unicode MS"/>
+                <a:cs typeface="Arial Unicode MS"/>
+              </a:rPr>
+              <a:t>，就是動圖的第二段：駕駛隨時要準備接手，所以車子會跳警告、發出聲音，請駕駛把方向盤拿回去。
 </a:t>
             </a:r>
           </a:p>
@@ -1539,85 +1495,151 @@
                 <a:spcPts val="0"/>
               </a:spcBef>
               <a:spcAft>
-                <a:spcPts val="233"/>
+                <a:spcPts val="183"/>
               </a:spcAft>
             </a:pPr>
             <a:r>
-              <a:rPr sz="1400" lang="zh-TW" dirty="0">
-                <a:solidFill>
-                  <a:srgbClr val="000000"/>
-                </a:solidFill>
-                <a:latin typeface="Arial Unicode MS"/>
-                <a:ea typeface="Arial Unicode MS"/>
-                <a:cs typeface="Arial Unicode MS"/>
-              </a:rPr>
-              <a:t>什麼時候該降級？回到第一週的 </a:t>
-            </a:r>
-            <a:r>
-              <a:rPr sz="1400" b="1" lang="zh-TW" dirty="0">
-                <a:solidFill>
-                  <a:srgbClr val="000000"/>
-                </a:solidFill>
-                <a:latin typeface="Arial Unicode MS"/>
-                <a:ea typeface="Arial Unicode MS"/>
-                <a:cs typeface="Arial Unicode MS"/>
-              </a:rPr>
-              <a:t>ODD</a:t>
-            </a:r>
-            <a:r>
-              <a:rPr sz="1400" lang="zh-TW" dirty="0">
-                <a:solidFill>
-                  <a:srgbClr val="000000"/>
-                </a:solidFill>
-                <a:latin typeface="Arial Unicode MS"/>
-                <a:ea typeface="Arial Unicode MS"/>
-                <a:cs typeface="Arial Unicode MS"/>
-              </a:rPr>
-              <a:t>，運行設計範圍，那六格：道路類型、速度域、交通狀況、天候與光照、地理範圍、人的角色。其中「</a:t>
-            </a:r>
-            <a:r>
-              <a:rPr sz="1400" b="1" lang="zh-TW" dirty="0">
-                <a:solidFill>
-                  <a:srgbClr val="000000"/>
-                </a:solidFill>
-                <a:latin typeface="Arial Unicode MS"/>
-                <a:ea typeface="Arial Unicode MS"/>
-                <a:cs typeface="Arial Unicode MS"/>
-              </a:rPr>
-              <a:t>天候與光照</a:t>
-            </a:r>
-            <a:r>
-              <a:rPr sz="1400" lang="zh-TW" dirty="0">
-                <a:solidFill>
-                  <a:srgbClr val="000000"/>
-                </a:solidFill>
-                <a:latin typeface="Arial Unicode MS"/>
-                <a:ea typeface="Arial Unicode MS"/>
-                <a:cs typeface="Arial Unicode MS"/>
-              </a:rPr>
-              <a:t>」那一格，其實就是上一節那張失效對照表：雨大到相機打叉、光達三角形，就是走出了 ODD。「</a:t>
-            </a:r>
-            <a:r>
-              <a:rPr sz="1400" b="1" lang="zh-TW" dirty="0">
-                <a:solidFill>
-                  <a:srgbClr val="000000"/>
-                </a:solidFill>
-                <a:latin typeface="Arial Unicode MS"/>
-                <a:ea typeface="Arial Unicode MS"/>
-                <a:cs typeface="Arial Unicode MS"/>
-              </a:rPr>
-              <a:t>地理範圍</a:t>
-            </a:r>
-            <a:r>
-              <a:rPr sz="1400" lang="zh-TW" dirty="0">
-                <a:solidFill>
-                  <a:srgbClr val="000000"/>
-                </a:solidFill>
-                <a:latin typeface="Arial Unicode MS"/>
-                <a:ea typeface="Arial Unicode MS"/>
-                <a:cs typeface="Arial Unicode MS"/>
-              </a:rPr>
-              <a:t>」那一格也一樣：開進一條地圖上沒有的路、開進收不到衛星的地方。
+              <a:rPr sz="1100" lang="zh-TW" dirty="0">
+                <a:solidFill>
+                  <a:srgbClr val="000000"/>
+                </a:solidFill>
+                <a:latin typeface="Arial Unicode MS"/>
+                <a:ea typeface="Arial Unicode MS"/>
+                <a:cs typeface="Arial Unicode MS"/>
+              </a:rPr>
+              <a:t>動圖裡沒有演的是 </a:t>
+            </a:r>
+            <a:r>
+              <a:rPr sz="1100" b="1" lang="zh-TW" dirty="0">
+                <a:solidFill>
+                  <a:srgbClr val="000000"/>
+                </a:solidFill>
+                <a:latin typeface="Arial Unicode MS"/>
+                <a:ea typeface="Arial Unicode MS"/>
+                <a:cs typeface="Arial Unicode MS"/>
+              </a:rPr>
+              <a:t>L3</a:t>
+            </a:r>
+            <a:r>
+              <a:rPr sz="1100" lang="zh-TW" dirty="0">
+                <a:solidFill>
+                  <a:srgbClr val="000000"/>
+                </a:solidFill>
+                <a:latin typeface="Arial Unicode MS"/>
+                <a:ea typeface="Arial Unicode MS"/>
+                <a:cs typeface="Arial Unicode MS"/>
+              </a:rPr>
+              <a:t>，它在中間。L3 在 ODD 裡面是系統在開，人可以不用盯著路，可是駕駛座上的人要隨時</a:t>
+            </a:r>
+            <a:r>
+              <a:rPr sz="1100" b="1" lang="zh-TW" dirty="0">
+                <a:solidFill>
+                  <a:srgbClr val="000000"/>
+                </a:solidFill>
+                <a:latin typeface="Arial Unicode MS"/>
+                <a:ea typeface="Arial Unicode MS"/>
+                <a:cs typeface="Arial Unicode MS"/>
+              </a:rPr>
+              <a:t>準備好被叫</a:t>
+            </a:r>
+            <a:r>
+              <a:rPr sz="1100" lang="zh-TW" dirty="0">
+                <a:solidFill>
+                  <a:srgbClr val="000000"/>
+                </a:solidFill>
+                <a:latin typeface="Arial Unicode MS"/>
+                <a:ea typeface="Arial Unicode MS"/>
+                <a:cs typeface="Arial Unicode MS"/>
+              </a:rPr>
+              <a:t>。系統發現快要走出 ODD，或自己出了問題，就發出「</a:t>
+            </a:r>
+            <a:r>
+              <a:rPr sz="1100" b="1" lang="zh-TW" dirty="0">
+                <a:solidFill>
+                  <a:srgbClr val="000000"/>
+                </a:solidFill>
+                <a:latin typeface="Arial Unicode MS"/>
+                <a:ea typeface="Arial Unicode MS"/>
+                <a:cs typeface="Arial Unicode MS"/>
+              </a:rPr>
+              <a:t>請接手</a:t>
+            </a:r>
+            <a:r>
+              <a:rPr sz="1100" lang="zh-TW" dirty="0">
+                <a:solidFill>
+                  <a:srgbClr val="000000"/>
+                </a:solidFill>
+                <a:latin typeface="Arial Unicode MS"/>
+                <a:ea typeface="Arial Unicode MS"/>
+                <a:cs typeface="Arial Unicode MS"/>
+              </a:rPr>
+              <a:t>」，而且在人接手之前，</a:t>
+            </a:r>
+            <a:r>
+              <a:rPr sz="1100" b="1" lang="zh-TW" dirty="0">
+                <a:solidFill>
+                  <a:srgbClr val="000000"/>
+                </a:solidFill>
+                <a:latin typeface="Arial Unicode MS"/>
+                <a:ea typeface="Arial Unicode MS"/>
+                <a:cs typeface="Arial Unicode MS"/>
+              </a:rPr>
+              <a:t>還會繼續開幾秒</a:t>
+            </a:r>
+            <a:r>
+              <a:rPr sz="1100" lang="zh-TW" dirty="0">
+                <a:solidFill>
+                  <a:srgbClr val="000000"/>
+                </a:solidFill>
+                <a:latin typeface="Arial Unicode MS"/>
+                <a:ea typeface="Arial Unicode MS"/>
+                <a:cs typeface="Arial Unicode MS"/>
+              </a:rPr>
+              <a:t>，這是它跟 L2 最大的差別。已經上市的 L3，像賓士的 Drive Pilot，原廠說明寫的是給駕駛</a:t>
+            </a:r>
+            <a:r>
+              <a:rPr sz="1100" b="1" lang="zh-TW" dirty="0">
+                <a:solidFill>
+                  <a:srgbClr val="000000"/>
+                </a:solidFill>
+                <a:latin typeface="Arial Unicode MS"/>
+                <a:ea typeface="Arial Unicode MS"/>
+                <a:cs typeface="Arial Unicode MS"/>
+              </a:rPr>
+              <a:t>十秒</a:t>
+            </a:r>
+            <a:r>
+              <a:rPr sz="1100" lang="zh-TW" dirty="0">
+                <a:solidFill>
+                  <a:srgbClr val="000000"/>
+                </a:solidFill>
+                <a:latin typeface="Arial Unicode MS"/>
+                <a:ea typeface="Arial Unicode MS"/>
+                <a:cs typeface="Arial Unicode MS"/>
+              </a:rPr>
+              <a:t>；十秒內沒反應，它就在</a:t>
+            </a:r>
+            <a:r>
+              <a:rPr sz="1100" b="1" lang="zh-TW" dirty="0">
+                <a:solidFill>
+                  <a:srgbClr val="000000"/>
+                </a:solidFill>
+                <a:latin typeface="Arial Unicode MS"/>
+                <a:ea typeface="Arial Unicode MS"/>
+                <a:cs typeface="Arial Unicode MS"/>
+              </a:rPr>
+              <a:t>自己的車道裡</a:t>
+            </a:r>
+            <a:r>
+              <a:rPr sz="1100" lang="zh-TW" dirty="0">
+                <a:solidFill>
+                  <a:srgbClr val="000000"/>
+                </a:solidFill>
+                <a:latin typeface="Arial Unicode MS"/>
+                <a:ea typeface="Arial Unicode MS"/>
+                <a:cs typeface="Arial Unicode MS"/>
+              </a:rPr>
+              <a:t>慢慢減速停下、打雙黃燈，停好以後解鎖車門、自動打緊急求救電話，因為駕駛沒反應，可能是身體出了狀況。注意它不一定開到路肩，是停在車道上，所以也有人批評：停在高速公路的車道上還是危險，只是比撞車好。L3 最難的地方就在這裡：一個在看手機的人，幾秒鐘內真的回得了神嗎？
 </a:t>
             </a:r>
           </a:p>
@@ -1627,11 +1649,154 @@
                 <a:spcPts val="0"/>
               </a:spcBef>
               <a:spcAft>
-                <a:spcPts val="233"/>
+                <a:spcPts val="183"/>
               </a:spcAft>
             </a:pPr>
             <a:r>
-              <a:rPr sz="1400" lang="zh-TW" dirty="0">
+              <a:rPr sz="1100" b="1" lang="zh-TW" dirty="0">
+                <a:solidFill>
+                  <a:srgbClr val="000000"/>
+                </a:solidFill>
+                <a:latin typeface="Arial Unicode MS"/>
+                <a:ea typeface="Arial Unicode MS"/>
+                <a:cs typeface="Arial Unicode MS"/>
+              </a:rPr>
+              <a:t>L4</a:t>
+            </a:r>
+            <a:r>
+              <a:rPr sz="1100" lang="zh-TW" dirty="0">
+                <a:solidFill>
+                  <a:srgbClr val="000000"/>
+                </a:solidFill>
+                <a:latin typeface="Arial Unicode MS"/>
+                <a:ea typeface="Arial Unicode MS"/>
+                <a:cs typeface="Arial Unicode MS"/>
+              </a:rPr>
+              <a:t>，就是第三段：車上可能沒有駕駛，它要自己把車子帶到一個</a:t>
+            </a:r>
+            <a:r>
+              <a:rPr sz="1100" b="1" lang="zh-TW" dirty="0">
+                <a:solidFill>
+                  <a:srgbClr val="000000"/>
+                </a:solidFill>
+                <a:latin typeface="Arial Unicode MS"/>
+                <a:ea typeface="Arial Unicode MS"/>
+                <a:cs typeface="Arial Unicode MS"/>
+              </a:rPr>
+              <a:t>最小風險狀態</a:t>
+            </a:r>
+            <a:r>
+              <a:rPr sz="1100" lang="zh-TW" dirty="0">
+                <a:solidFill>
+                  <a:srgbClr val="000000"/>
+                </a:solidFill>
+                <a:latin typeface="Arial Unicode MS"/>
+                <a:ea typeface="Arial Unicode MS"/>
+                <a:cs typeface="Arial Unicode MS"/>
+              </a:rPr>
+              <a:t>，最常見的就是減速、打雙黃燈、切到右邊的路肩停下來。台灣、越南都是靠右行駛，所以是靠右邊停。就像計程車司機遇到看不清楚的暴雨，會先靠邊停一下，等雨小一點再走。
+</a:t>
+            </a:r>
+          </a:p>
+          <a:p>
+            <a:pPr algn="l">
+              <a:spcBef>
+                <a:spcPts val="0"/>
+              </a:spcBef>
+              <a:spcAft>
+                <a:spcPts val="183"/>
+              </a:spcAft>
+            </a:pPr>
+            <a:r>
+              <a:rPr sz="1100" lang="zh-TW" dirty="0">
+                <a:solidFill>
+                  <a:srgbClr val="000000"/>
+                </a:solidFill>
+                <a:latin typeface="Arial Unicode MS"/>
+                <a:ea typeface="Arial Unicode MS"/>
+                <a:cs typeface="Arial Unicode MS"/>
+              </a:rPr>
+              <a:t>什麼時候該降級？回到第一週的 </a:t>
+            </a:r>
+            <a:r>
+              <a:rPr sz="1100" b="1" lang="zh-TW" dirty="0">
+                <a:solidFill>
+                  <a:srgbClr val="000000"/>
+                </a:solidFill>
+                <a:latin typeface="Arial Unicode MS"/>
+                <a:ea typeface="Arial Unicode MS"/>
+                <a:cs typeface="Arial Unicode MS"/>
+              </a:rPr>
+              <a:t>ODD</a:t>
+            </a:r>
+            <a:r>
+              <a:rPr sz="1100" lang="zh-TW" dirty="0">
+                <a:solidFill>
+                  <a:srgbClr val="000000"/>
+                </a:solidFill>
+                <a:latin typeface="Arial Unicode MS"/>
+                <a:ea typeface="Arial Unicode MS"/>
+                <a:cs typeface="Arial Unicode MS"/>
+              </a:rPr>
+              <a:t>，運行設計範圍，那六格：道路類型、速度域、交通狀況、天候與光照、地理範圍、人的角色。其中「</a:t>
+            </a:r>
+            <a:r>
+              <a:rPr sz="1100" b="1" lang="zh-TW" dirty="0">
+                <a:solidFill>
+                  <a:srgbClr val="000000"/>
+                </a:solidFill>
+                <a:latin typeface="Arial Unicode MS"/>
+                <a:ea typeface="Arial Unicode MS"/>
+                <a:cs typeface="Arial Unicode MS"/>
+              </a:rPr>
+              <a:t>天候與光照</a:t>
+            </a:r>
+            <a:r>
+              <a:rPr sz="1100" lang="zh-TW" dirty="0">
+                <a:solidFill>
+                  <a:srgbClr val="000000"/>
+                </a:solidFill>
+                <a:latin typeface="Arial Unicode MS"/>
+                <a:ea typeface="Arial Unicode MS"/>
+                <a:cs typeface="Arial Unicode MS"/>
+              </a:rPr>
+              <a:t>」那一格，其實就是上一節那張失效對照表：雨大到相機打叉、光達三角形，就是走出了 ODD。「</a:t>
+            </a:r>
+            <a:r>
+              <a:rPr sz="1100" b="1" lang="zh-TW" dirty="0">
+                <a:solidFill>
+                  <a:srgbClr val="000000"/>
+                </a:solidFill>
+                <a:latin typeface="Arial Unicode MS"/>
+                <a:ea typeface="Arial Unicode MS"/>
+                <a:cs typeface="Arial Unicode MS"/>
+              </a:rPr>
+              <a:t>地理範圍</a:t>
+            </a:r>
+            <a:r>
+              <a:rPr sz="1100" lang="zh-TW" dirty="0">
+                <a:solidFill>
+                  <a:srgbClr val="000000"/>
+                </a:solidFill>
+                <a:latin typeface="Arial Unicode MS"/>
+                <a:ea typeface="Arial Unicode MS"/>
+                <a:cs typeface="Arial Unicode MS"/>
+              </a:rPr>
+              <a:t>」那一格也一樣：開進一條地圖上沒有的路、開進收不到衛星的地方。
+</a:t>
+            </a:r>
+          </a:p>
+          <a:p>
+            <a:pPr algn="l">
+              <a:spcBef>
+                <a:spcPts val="0"/>
+              </a:spcBef>
+              <a:spcAft>
+                <a:spcPts val="183"/>
+              </a:spcAft>
+            </a:pPr>
+            <a:r>
+              <a:rPr sz="1100" lang="zh-TW" dirty="0">
                 <a:solidFill>
                   <a:srgbClr val="000000"/>
                 </a:solidFill>
@@ -7744,7 +7909,7 @@
                 <a:ea typeface="Arial" pitchFamily="34" charset="-122"/>
                 <a:cs typeface="Arial" pitchFamily="34" charset="-120"/>
               </a:rPr>
-              <a:t>L2: báo tài xế cầm lái. L4: tự vào «trạng thái rủi ro tối thiểu», ví dụ tấp vào lề. Ra khỏi ODD là phải hạ cấp.</a:t>
+              <a:t>L2: tài xế cầm lái ngay. L3: xin tài xế cầm lái, chờ vài giây; không ai cầm thì dừng trong làn. L4: tự tấp vào lề.</a:t>
             </a:r>
             <a:endParaRPr lang="en-US" sz="2000" dirty="0"/>
           </a:p>
@@ -7764,7 +7929,7 @@
                 <a:ea typeface="微軟正黑體" pitchFamily="34" charset="-122"/>
                 <a:cs typeface="微軟正黑體" pitchFamily="34" charset="-120"/>
               </a:rPr>
-              <a:t>L2：通知駕駛接手。L4：自己進入「最小風險狀態」，例如靠邊停。走出 ODD 就該降級。</a:t>
+              <a:t>L2：駕駛馬上接手。L3：請駕駛接手、等幾秒；沒人接就在車道內停下。L4：自己靠邊停。</a:t>
             </a:r>
             <a:endParaRPr lang="en-US" sz="2000" dirty="0"/>
           </a:p>

--- a/第七週(10-22)/第七週_第2節_簡報.pptx
+++ b/第七週(10-22)/第七週_第2節_簡報.pptx
@@ -2409,7 +2409,7 @@
                 <a:ea typeface="Arial Unicode MS"/>
                 <a:cs typeface="Arial Unicode MS"/>
               </a:rPr>
-              <a:t>標定</a:t>
+              <a:t>外參標定</a:t>
             </a:r>
             <a:r>
               <a:rPr sz="850" lang="zh-TW" dirty="0">
@@ -2420,7 +2420,7 @@
                 <a:ea typeface="Arial Unicode MS"/>
                 <a:cs typeface="Arial Unicode MS"/>
               </a:rPr>
-              <a:t>，量出來的六個數字叫外參。第四張那兩張圖看過：光達只要多轉四度，點就從那台廂型車上整片滑到旁邊的樹上。真的車不會差到四度，可是差一度，五十公尺外就差將近一公尺，快半個車道。
+              <a:t>，量出來的六個數字叫外參；鏡頭自己有多彎，是內參，第五週講過。第四張那兩張圖看過：光達只要多轉四度，點就從那台廂型車上整片滑到旁邊的樹上。真的車不會差到四度，可是差一度，五十公尺外就差將近一公尺，快半個車道。
 </a:t>
             </a:r>
           </a:p>
@@ -3838,11 +3838,11 @@
                 <a:spcPts val="0"/>
               </a:spcBef>
               <a:spcAft>
-                <a:spcPts val="150"/>
+                <a:spcPts val="133"/>
               </a:spcAft>
             </a:pPr>
             <a:r>
-              <a:rPr sz="900" b="1" lang="zh-TW" dirty="0">
+              <a:rPr sz="800" b="1" lang="zh-TW" dirty="0">
                 <a:solidFill>
                   <a:srgbClr val="000000"/>
                 </a:solidFill>
@@ -3853,7 +3853,7 @@
               <a:t>這一張的目的：</a:t>
             </a:r>
             <a:r>
-              <a:rPr sz="900" lang="zh-TW" dirty="0">
+              <a:rPr sz="800" lang="zh-TW" dirty="0">
                 <a:solidFill>
                   <a:srgbClr val="000000"/>
                 </a:solidFill>
@@ -3871,11 +3871,11 @@
                 <a:spcPts val="0"/>
               </a:spcBef>
               <a:spcAft>
-                <a:spcPts val="150"/>
+                <a:spcPts val="133"/>
               </a:spcAft>
             </a:pPr>
             <a:r>
-              <a:rPr sz="900" lang="zh-TW" dirty="0">
+              <a:rPr sz="800" lang="zh-TW" dirty="0">
                 <a:solidFill>
                   <a:srgbClr val="000000"/>
                 </a:solidFill>
@@ -3886,7 +3886,7 @@
               <a:t>要合起來，第一件事：</a:t>
             </a:r>
             <a:r>
-              <a:rPr sz="900" b="1" lang="zh-TW" dirty="0">
+              <a:rPr sz="800" b="1" lang="zh-TW" dirty="0">
                 <a:solidFill>
                   <a:srgbClr val="000000"/>
                 </a:solidFill>
@@ -3897,7 +3897,7 @@
               <a:t>大家要對齊同一個空間。</a:t>
             </a:r>
             <a:r>
-              <a:rPr sz="900" lang="zh-TW" dirty="0">
+              <a:rPr sz="800" lang="zh-TW" dirty="0">
                 <a:solidFill>
                   <a:srgbClr val="000000"/>
                 </a:solidFill>
@@ -3915,11 +3915,11 @@
                 <a:spcPts val="0"/>
               </a:spcBef>
               <a:spcAft>
-                <a:spcPts val="150"/>
+                <a:spcPts val="133"/>
               </a:spcAft>
             </a:pPr>
             <a:r>
-              <a:rPr sz="900" lang="zh-TW" dirty="0">
+              <a:rPr sz="800" lang="zh-TW" dirty="0">
                 <a:solidFill>
                   <a:srgbClr val="000000"/>
                 </a:solidFill>
@@ -3930,7 +3930,7 @@
               <a:t>先想一個教室裡的例子。三個同學坐在不同的位置、臉朝不同的方向。老師問：「垃圾桶在哪裡？」坐前排、面向黑板的同學說：「在我右前方兩公尺。」坐後排、面向窗戶的同學說：「在我正前方五公尺。」兩個人都沒說錯，可是你沒辦法把這兩句話直接畫在同一張教室平面圖上。你得先知道：</a:t>
             </a:r>
             <a:r>
-              <a:rPr sz="900" b="1" lang="zh-TW" dirty="0">
+              <a:rPr sz="800" b="1" lang="zh-TW" dirty="0">
                 <a:solidFill>
                   <a:srgbClr val="000000"/>
                 </a:solidFill>
@@ -3941,7 +3941,7 @@
               <a:t>每個人坐在哪一個座位、臉朝哪個方向。</a:t>
             </a:r>
             <a:r>
-              <a:rPr sz="900" lang="zh-TW" dirty="0">
+              <a:rPr sz="800" lang="zh-TW" dirty="0">
                 <a:solidFill>
                   <a:srgbClr val="000000"/>
                 </a:solidFill>
@@ -3959,11 +3959,11 @@
                 <a:spcPts val="0"/>
               </a:spcBef>
               <a:spcAft>
-                <a:spcPts val="150"/>
+                <a:spcPts val="133"/>
               </a:spcAft>
             </a:pPr>
             <a:r>
-              <a:rPr sz="900" lang="zh-TW" dirty="0">
+              <a:rPr sz="800" lang="zh-TW" dirty="0">
                 <a:solidFill>
                   <a:srgbClr val="000000"/>
                 </a:solidFill>
@@ -3974,7 +3974,7 @@
               <a:t>車上完全一樣。相機在擋風玻璃後面，光達在車頂，雷達在保險桿。每一顆回報的，都是「東西在</a:t>
             </a:r>
             <a:r>
-              <a:rPr sz="900" b="1" lang="zh-TW" dirty="0">
+              <a:rPr sz="800" b="1" lang="zh-TW" dirty="0">
                 <a:solidFill>
                   <a:srgbClr val="000000"/>
                 </a:solidFill>
@@ -3985,7 +3985,7 @@
               <a:t>我</a:t>
             </a:r>
             <a:r>
-              <a:rPr sz="900" lang="zh-TW" dirty="0">
+              <a:rPr sz="800" lang="zh-TW" dirty="0">
                 <a:solidFill>
                   <a:srgbClr val="000000"/>
                 </a:solidFill>
@@ -3996,7 +3996,7 @@
               <a:t>的哪個方向、離</a:t>
             </a:r>
             <a:r>
-              <a:rPr sz="900" b="1" lang="zh-TW" dirty="0">
+              <a:rPr sz="800" b="1" lang="zh-TW" dirty="0">
                 <a:solidFill>
                   <a:srgbClr val="000000"/>
                 </a:solidFill>
@@ -4007,7 +4007,7 @@
               <a:t>我</a:t>
             </a:r>
             <a:r>
-              <a:rPr sz="900" lang="zh-TW" dirty="0">
+              <a:rPr sz="800" lang="zh-TW" dirty="0">
                 <a:solidFill>
                   <a:srgbClr val="000000"/>
                 </a:solidFill>
@@ -4018,7 +4018,7 @@
               <a:t>多遠」。要合起來，得先知道每一顆</a:t>
             </a:r>
             <a:r>
-              <a:rPr sz="900" b="1" lang="zh-TW" dirty="0">
+              <a:rPr sz="800" b="1" lang="zh-TW" dirty="0">
                 <a:solidFill>
                   <a:srgbClr val="000000"/>
                 </a:solidFill>
@@ -4029,7 +4029,7 @@
               <a:t>裝在車上的哪裡、朝哪個方向</a:t>
             </a:r>
             <a:r>
-              <a:rPr sz="900" lang="zh-TW" dirty="0">
+              <a:rPr sz="800" lang="zh-TW" dirty="0">
                 <a:solidFill>
                   <a:srgbClr val="000000"/>
                 </a:solidFill>
@@ -4040,7 +4040,7 @@
               <a:t>。這組數字就叫</a:t>
             </a:r>
             <a:r>
-              <a:rPr sz="900" b="1" lang="zh-TW" dirty="0">
+              <a:rPr sz="800" b="1" lang="zh-TW" dirty="0">
                 <a:solidFill>
                   <a:srgbClr val="000000"/>
                 </a:solidFill>
@@ -4051,7 +4051,7 @@
               <a:t>外參</a:t>
             </a:r>
             <a:r>
-              <a:rPr sz="900" lang="zh-TW" dirty="0">
+              <a:rPr sz="800" lang="zh-TW" dirty="0">
                 <a:solidFill>
                   <a:srgbClr val="000000"/>
                 </a:solidFill>
@@ -4062,7 +4062,7 @@
               <a:t>，第五週講過：它是對</a:t>
             </a:r>
             <a:r>
-              <a:rPr sz="900" b="1" lang="zh-TW" dirty="0">
+              <a:rPr sz="800" b="1" lang="zh-TW" dirty="0">
                 <a:solidFill>
                   <a:srgbClr val="000000"/>
                 </a:solidFill>
@@ -4073,7 +4073,7 @@
               <a:t>車身</a:t>
             </a:r>
             <a:r>
-              <a:rPr sz="900" lang="zh-TW" dirty="0">
+              <a:rPr sz="800" lang="zh-TW" dirty="0">
                 <a:solidFill>
                   <a:srgbClr val="000000"/>
                 </a:solidFill>
@@ -4084,7 +4084,7 @@
               <a:t>量的，不是對另一顆感測器。量出這組數字的工作，叫</a:t>
             </a:r>
             <a:r>
-              <a:rPr sz="900" b="1" lang="zh-TW" dirty="0">
+              <a:rPr sz="800" b="1" lang="zh-TW" dirty="0">
                 <a:solidFill>
                   <a:srgbClr val="000000"/>
                 </a:solidFill>
@@ -4095,7 +4095,7 @@
               <a:t>外參標定</a:t>
             </a:r>
             <a:r>
-              <a:rPr sz="900" lang="zh-TW" dirty="0">
+              <a:rPr sz="800" lang="zh-TW" dirty="0">
                 <a:solidFill>
                   <a:srgbClr val="000000"/>
                 </a:solidFill>
@@ -4113,41 +4113,107 @@
                 <a:spcPts val="0"/>
               </a:spcBef>
               <a:spcAft>
-                <a:spcPts val="150"/>
+                <a:spcPts val="133"/>
               </a:spcAft>
             </a:pPr>
             <a:r>
-              <a:rPr sz="900" lang="zh-TW" dirty="0">
-                <a:solidFill>
-                  <a:srgbClr val="000000"/>
-                </a:solidFill>
-                <a:latin typeface="Arial Unicode MS"/>
-                <a:ea typeface="Arial Unicode MS"/>
-                <a:cs typeface="Arial Unicode MS"/>
-              </a:rPr>
-              <a:t>外參到底是什麼？就是每一顆六個數字。位置三個：往前多少、往左多少、離地多高。方向三個：左右轉了幾度、上下仰了幾度、有沒有歪向一邊。nuScenes 每一顆感測器都附了這六個數字，舉幾個真的：前方相機裝在後輪軸往前一點七公尺、離地一點五公尺；光達在後輪軸往前零點九公尺、離地一點八公尺；前雷達在最前面，往前三點四公尺、離地零點五公尺；左前角那顆雷達，往前二點四公尺、往左零點八公尺，而且它是</a:t>
-            </a:r>
-            <a:r>
-              <a:rPr sz="900" b="1" lang="zh-TW" dirty="0">
-                <a:solidFill>
-                  <a:srgbClr val="000000"/>
-                </a:solidFill>
-                <a:latin typeface="Arial Unicode MS"/>
-                <a:ea typeface="Arial Unicode MS"/>
-                <a:cs typeface="Arial Unicode MS"/>
-              </a:rPr>
-              <a:t>朝左邊</a:t>
-            </a:r>
-            <a:r>
-              <a:rPr sz="900" lang="zh-TW" dirty="0">
-                <a:solidFill>
-                  <a:srgbClr val="000000"/>
-                </a:solidFill>
-                <a:latin typeface="Arial Unicode MS"/>
-                <a:ea typeface="Arial Unicode MS"/>
-                <a:cs typeface="Arial Unicode MS"/>
-              </a:rPr>
-              <a:t>裝的。
+              <a:rPr sz="800" lang="zh-TW" dirty="0">
+                <a:solidFill>
+                  <a:srgbClr val="000000"/>
+                </a:solidFill>
+                <a:latin typeface="Arial Unicode MS"/>
+                <a:ea typeface="Arial Unicode MS"/>
+                <a:cs typeface="Arial Unicode MS"/>
+              </a:rPr>
+              <a:t>這裡要分清楚：</a:t>
+            </a:r>
+            <a:r>
+              <a:rPr sz="800" b="1" lang="zh-TW" dirty="0">
+                <a:solidFill>
+                  <a:srgbClr val="000000"/>
+                </a:solidFill>
+                <a:latin typeface="Arial Unicode MS"/>
+                <a:ea typeface="Arial Unicode MS"/>
+                <a:cs typeface="Arial Unicode MS"/>
+              </a:rPr>
+              <a:t>標定不只有外參。</a:t>
+            </a:r>
+            <a:r>
+              <a:rPr sz="800" lang="zh-TW" dirty="0">
+                <a:solidFill>
+                  <a:srgbClr val="000000"/>
+                </a:solidFill>
+                <a:latin typeface="Arial Unicode MS"/>
+                <a:ea typeface="Arial Unicode MS"/>
+                <a:cs typeface="Arial Unicode MS"/>
+              </a:rPr>
+              <a:t>第五週講過，標定分兩種，而且有先後。</a:t>
+            </a:r>
+            <a:r>
+              <a:rPr sz="800" b="1" lang="zh-TW" dirty="0">
+                <a:solidFill>
+                  <a:srgbClr val="000000"/>
+                </a:solidFill>
+                <a:latin typeface="Arial Unicode MS"/>
+                <a:ea typeface="Arial Unicode MS"/>
+                <a:cs typeface="Arial Unicode MS"/>
+              </a:rPr>
+              <a:t>內參</a:t>
+            </a:r>
+            <a:r>
+              <a:rPr sz="800" lang="zh-TW" dirty="0">
+                <a:solidFill>
+                  <a:srgbClr val="000000"/>
+                </a:solidFill>
+                <a:latin typeface="Arial Unicode MS"/>
+                <a:ea typeface="Arial Unicode MS"/>
+                <a:cs typeface="Arial Unicode MS"/>
+              </a:rPr>
+              <a:t>是感測器自己內部的事：相機的鏡頭有多彎、畫面正中心在哪一個像素；光達每一條雷射線真正往上或往下幾度。</a:t>
+            </a:r>
+            <a:r>
+              <a:rPr sz="800" b="1" lang="zh-TW" dirty="0">
+                <a:solidFill>
+                  <a:srgbClr val="000000"/>
+                </a:solidFill>
+                <a:latin typeface="Arial Unicode MS"/>
+                <a:ea typeface="Arial Unicode MS"/>
+                <a:cs typeface="Arial Unicode MS"/>
+              </a:rPr>
+              <a:t>外參</a:t>
+            </a:r>
+            <a:r>
+              <a:rPr sz="800" lang="zh-TW" dirty="0">
+                <a:solidFill>
+                  <a:srgbClr val="000000"/>
+                </a:solidFill>
+                <a:latin typeface="Arial Unicode MS"/>
+                <a:ea typeface="Arial Unicode MS"/>
+                <a:cs typeface="Arial Unicode MS"/>
+              </a:rPr>
+              <a:t>才是它裝在車上的哪裡、朝哪個方向。先標內參，再標外參。把光達點畫到照片上，兩個都要用：先用外參，把點從光達的位置換到相機的位置；再用內參，算出它落在照片的哪一個像素。今天這兩張圖示範的是</a:t>
+            </a:r>
+            <a:r>
+              <a:rPr sz="800" b="1" lang="zh-TW" dirty="0">
+                <a:solidFill>
+                  <a:srgbClr val="000000"/>
+                </a:solidFill>
+                <a:latin typeface="Arial Unicode MS"/>
+                <a:ea typeface="Arial Unicode MS"/>
+                <a:cs typeface="Arial Unicode MS"/>
+              </a:rPr>
+              <a:t>外參</a:t>
+            </a:r>
+            <a:r>
+              <a:rPr sz="800" lang="zh-TW" dirty="0">
+                <a:solidFill>
+                  <a:srgbClr val="000000"/>
+                </a:solidFill>
+                <a:latin typeface="Arial Unicode MS"/>
+                <a:ea typeface="Arial Unicode MS"/>
+                <a:cs typeface="Arial Unicode MS"/>
+              </a:rPr>
+              <a:t>出錯：鏡頭沒問題，是光達的方向多轉了四度。
 </a:t>
             </a:r>
           </a:p>
@@ -4157,41 +4223,41 @@
                 <a:spcPts val="0"/>
               </a:spcBef>
               <a:spcAft>
-                <a:spcPts val="150"/>
+                <a:spcPts val="133"/>
               </a:spcAft>
             </a:pPr>
             <a:r>
-              <a:rPr sz="900" lang="zh-TW" dirty="0">
-                <a:solidFill>
-                  <a:srgbClr val="000000"/>
-                </a:solidFill>
-                <a:latin typeface="Arial Unicode MS"/>
-                <a:ea typeface="Arial Unicode MS"/>
-                <a:cs typeface="Arial Unicode MS"/>
-              </a:rPr>
-              <a:t>方向特別要緊。nuScenes 這顆光達，它自己的「正前方」，其實是朝</a:t>
-            </a:r>
-            <a:r>
-              <a:rPr sz="900" b="1" lang="zh-TW" dirty="0">
-                <a:solidFill>
-                  <a:srgbClr val="000000"/>
-                </a:solidFill>
-                <a:latin typeface="Arial Unicode MS"/>
-                <a:ea typeface="Arial Unicode MS"/>
-                <a:cs typeface="Arial Unicode MS"/>
-              </a:rPr>
-              <a:t>車子的右邊</a:t>
-            </a:r>
-            <a:r>
-              <a:rPr sz="900" lang="zh-TW" dirty="0">
-                <a:solidFill>
-                  <a:srgbClr val="000000"/>
-                </a:solidFill>
-                <a:latin typeface="Arial Unicode MS"/>
-                <a:ea typeface="Arial Unicode MS"/>
-                <a:cs typeface="Arial Unicode MS"/>
-              </a:rPr>
-              <a:t>裝的，轉了九十度。如果不知道這件事，光達說「我的正前方十公尺有一台車」，電腦會以為車在前面，其實在右邊。左前角那顆雷達也一樣，它口中的「正前方」，是車子的左邊。
+              <a:rPr sz="800" lang="zh-TW" dirty="0">
+                <a:solidFill>
+                  <a:srgbClr val="000000"/>
+                </a:solidFill>
+                <a:latin typeface="Arial Unicode MS"/>
+                <a:ea typeface="Arial Unicode MS"/>
+                <a:cs typeface="Arial Unicode MS"/>
+              </a:rPr>
+              <a:t>外參到底是什麼？就是每一顆六個數字。位置三個：往前多少、往左多少、離地多高。方向三個：左右轉了幾度、上下仰了幾度、有沒有歪向一邊。nuScenes 每一顆感測器都附了這六個數字，舉幾個真的：前方相機裝在後輪軸往前一點七公尺、離地一點五公尺；光達在後輪軸往前零點九公尺、離地一點八公尺；前雷達在最前面，往前三點四公尺、離地零點五公尺；左前角那顆雷達，往前二點四公尺、往左零點八公尺，而且它是</a:t>
+            </a:r>
+            <a:r>
+              <a:rPr sz="800" b="1" lang="zh-TW" dirty="0">
+                <a:solidFill>
+                  <a:srgbClr val="000000"/>
+                </a:solidFill>
+                <a:latin typeface="Arial Unicode MS"/>
+                <a:ea typeface="Arial Unicode MS"/>
+                <a:cs typeface="Arial Unicode MS"/>
+              </a:rPr>
+              <a:t>朝左邊</a:t>
+            </a:r>
+            <a:r>
+              <a:rPr sz="800" lang="zh-TW" dirty="0">
+                <a:solidFill>
+                  <a:srgbClr val="000000"/>
+                </a:solidFill>
+                <a:latin typeface="Arial Unicode MS"/>
+                <a:ea typeface="Arial Unicode MS"/>
+                <a:cs typeface="Arial Unicode MS"/>
+              </a:rPr>
+              <a:t>裝的。
 </a:t>
             </a:r>
           </a:p>
@@ -4201,41 +4267,41 @@
                 <a:spcPts val="0"/>
               </a:spcBef>
               <a:spcAft>
-                <a:spcPts val="150"/>
+                <a:spcPts val="133"/>
               </a:spcAft>
             </a:pPr>
             <a:r>
-              <a:rPr sz="900" lang="zh-TW" dirty="0">
-                <a:solidFill>
-                  <a:srgbClr val="000000"/>
-                </a:solidFill>
-                <a:latin typeface="Arial Unicode MS"/>
-                <a:ea typeface="Arial Unicode MS"/>
-                <a:cs typeface="Arial Unicode MS"/>
-              </a:rPr>
-              <a:t>所以外參不是把幾顆感測器調成「看到一樣的畫面」，每一顆看到的本來就不一樣。外參比較像一本</a:t>
-            </a:r>
-            <a:r>
-              <a:rPr sz="900" b="1" lang="zh-TW" dirty="0">
-                <a:solidFill>
-                  <a:srgbClr val="000000"/>
-                </a:solidFill>
-                <a:latin typeface="Arial Unicode MS"/>
-                <a:ea typeface="Arial Unicode MS"/>
-                <a:cs typeface="Arial Unicode MS"/>
-              </a:rPr>
-              <a:t>換算表</a:t>
-            </a:r>
-            <a:r>
-              <a:rPr sz="900" lang="zh-TW" dirty="0">
-                <a:solidFill>
-                  <a:srgbClr val="000000"/>
-                </a:solidFill>
-                <a:latin typeface="Arial Unicode MS"/>
-                <a:ea typeface="Arial Unicode MS"/>
-                <a:cs typeface="Arial Unicode MS"/>
-              </a:rPr>
-              <a:t>：把每一顆用自己的位置講的話，翻成同一種說法，就是「在車子的哪裡」。大家都翻好了，光達的點才能疊到相機的照片上，落在同一台車身上。
+              <a:rPr sz="800" lang="zh-TW" dirty="0">
+                <a:solidFill>
+                  <a:srgbClr val="000000"/>
+                </a:solidFill>
+                <a:latin typeface="Arial Unicode MS"/>
+                <a:ea typeface="Arial Unicode MS"/>
+                <a:cs typeface="Arial Unicode MS"/>
+              </a:rPr>
+              <a:t>方向特別要緊。nuScenes 這顆光達，它自己的「正前方」，其實是朝</a:t>
+            </a:r>
+            <a:r>
+              <a:rPr sz="800" b="1" lang="zh-TW" dirty="0">
+                <a:solidFill>
+                  <a:srgbClr val="000000"/>
+                </a:solidFill>
+                <a:latin typeface="Arial Unicode MS"/>
+                <a:ea typeface="Arial Unicode MS"/>
+                <a:cs typeface="Arial Unicode MS"/>
+              </a:rPr>
+              <a:t>車子的右邊</a:t>
+            </a:r>
+            <a:r>
+              <a:rPr sz="800" lang="zh-TW" dirty="0">
+                <a:solidFill>
+                  <a:srgbClr val="000000"/>
+                </a:solidFill>
+                <a:latin typeface="Arial Unicode MS"/>
+                <a:ea typeface="Arial Unicode MS"/>
+                <a:cs typeface="Arial Unicode MS"/>
+              </a:rPr>
+              <a:t>裝的，轉了九十度。如果不知道這件事，光達說「我的正前方十公尺有一台車」，電腦會以為車在前面，其實在右邊。左前角那顆雷達也一樣，它口中的「正前方」，是車子的左邊。
 </a:t>
             </a:r>
           </a:p>
@@ -4245,19 +4311,41 @@
                 <a:spcPts val="0"/>
               </a:spcBef>
               <a:spcAft>
-                <a:spcPts val="150"/>
+                <a:spcPts val="133"/>
               </a:spcAft>
             </a:pPr>
             <a:r>
-              <a:rPr sz="900" lang="zh-TW" dirty="0">
-                <a:solidFill>
-                  <a:srgbClr val="000000"/>
-                </a:solidFill>
-                <a:latin typeface="Arial Unicode MS"/>
-                <a:ea typeface="Arial Unicode MS"/>
-                <a:cs typeface="Arial Unicode MS"/>
-              </a:rPr>
-              <a:t>看這兩張圖，是同一個瞬間，把光達點投到相機畫面上。顏色是距離：橘色近，藍色遠。
+              <a:rPr sz="800" lang="zh-TW" dirty="0">
+                <a:solidFill>
+                  <a:srgbClr val="000000"/>
+                </a:solidFill>
+                <a:latin typeface="Arial Unicode MS"/>
+                <a:ea typeface="Arial Unicode MS"/>
+                <a:cs typeface="Arial Unicode MS"/>
+              </a:rPr>
+              <a:t>所以外參不是把幾顆感測器調成「看到一樣的畫面」，每一顆看到的本來就不一樣。外參比較像一本</a:t>
+            </a:r>
+            <a:r>
+              <a:rPr sz="800" b="1" lang="zh-TW" dirty="0">
+                <a:solidFill>
+                  <a:srgbClr val="000000"/>
+                </a:solidFill>
+                <a:latin typeface="Arial Unicode MS"/>
+                <a:ea typeface="Arial Unicode MS"/>
+                <a:cs typeface="Arial Unicode MS"/>
+              </a:rPr>
+              <a:t>換算表</a:t>
+            </a:r>
+            <a:r>
+              <a:rPr sz="800" lang="zh-TW" dirty="0">
+                <a:solidFill>
+                  <a:srgbClr val="000000"/>
+                </a:solidFill>
+                <a:latin typeface="Arial Unicode MS"/>
+                <a:ea typeface="Arial Unicode MS"/>
+                <a:cs typeface="Arial Unicode MS"/>
+              </a:rPr>
+              <a:t>：把每一顆用自己的位置講的話，翻成同一種說法，就是「在車子的哪裡」。大家都翻好了，光達的點才能疊到相機的照片上，落在同一台車身上。
 </a:t>
             </a:r>
           </a:p>
@@ -4267,30 +4355,19 @@
                 <a:spcPts val="0"/>
               </a:spcBef>
               <a:spcAft>
-                <a:spcPts val="150"/>
+                <a:spcPts val="133"/>
               </a:spcAft>
             </a:pPr>
             <a:r>
-              <a:rPr sz="900" b="1" lang="zh-TW" dirty="0">
-                <a:solidFill>
-                  <a:srgbClr val="000000"/>
-                </a:solidFill>
-                <a:latin typeface="Arial Unicode MS"/>
-                <a:ea typeface="Arial Unicode MS"/>
-                <a:cs typeface="Arial Unicode MS"/>
-              </a:rPr>
-              <a:t>左邊，標定正確。</a:t>
-            </a:r>
-            <a:r>
-              <a:rPr sz="900" lang="zh-TW" dirty="0">
-                <a:solidFill>
-                  <a:srgbClr val="000000"/>
-                </a:solidFill>
-                <a:latin typeface="Arial Unicode MS"/>
-                <a:ea typeface="Arial Unicode MS"/>
-                <a:cs typeface="Arial Unicode MS"/>
-              </a:rPr>
-              <a:t>前面那台白色廂型車，身上是一排一排整齊的橘色點，大約十公尺；車子右邊的路上、遠處的樹，才是藍色。
+              <a:rPr sz="800" lang="zh-TW" dirty="0">
+                <a:solidFill>
+                  <a:srgbClr val="000000"/>
+                </a:solidFill>
+                <a:latin typeface="Arial Unicode MS"/>
+                <a:ea typeface="Arial Unicode MS"/>
+                <a:cs typeface="Arial Unicode MS"/>
+              </a:rPr>
+              <a:t>看這兩張圖，是同一個瞬間，把光達點投到相機畫面上。顏色是距離：橘色近，藍色遠。
 </a:t>
             </a:r>
           </a:p>
@@ -4300,30 +4377,30 @@
                 <a:spcPts val="0"/>
               </a:spcBef>
               <a:spcAft>
-                <a:spcPts val="150"/>
+                <a:spcPts val="133"/>
               </a:spcAft>
             </a:pPr>
             <a:r>
-              <a:rPr sz="900" b="1" lang="zh-TW" dirty="0">
-                <a:solidFill>
-                  <a:srgbClr val="000000"/>
-                </a:solidFill>
-                <a:latin typeface="Arial Unicode MS"/>
-                <a:ea typeface="Arial Unicode MS"/>
-                <a:cs typeface="Arial Unicode MS"/>
-              </a:rPr>
-              <a:t>右邊，同一格資料，我故意把光達多轉了四度。</a:t>
-            </a:r>
-            <a:r>
-              <a:rPr sz="900" lang="zh-TW" dirty="0">
-                <a:solidFill>
-                  <a:srgbClr val="000000"/>
-                </a:solidFill>
-                <a:latin typeface="Arial Unicode MS"/>
-                <a:ea typeface="Arial Unicode MS"/>
-                <a:cs typeface="Arial Unicode MS"/>
-              </a:rPr>
-              <a:t>請看廂型車的右半邊：後窗上出現了藍色的點，那是遠處的東西；車子左邊的樹和柱子上，反而出現橘色的近處點。光達的點整片滑到左邊去了，它以為車子在左邊一點的位置。
+              <a:rPr sz="800" b="1" lang="zh-TW" dirty="0">
+                <a:solidFill>
+                  <a:srgbClr val="000000"/>
+                </a:solidFill>
+                <a:latin typeface="Arial Unicode MS"/>
+                <a:ea typeface="Arial Unicode MS"/>
+                <a:cs typeface="Arial Unicode MS"/>
+              </a:rPr>
+              <a:t>左邊，標定正確。</a:t>
+            </a:r>
+            <a:r>
+              <a:rPr sz="800" lang="zh-TW" dirty="0">
+                <a:solidFill>
+                  <a:srgbClr val="000000"/>
+                </a:solidFill>
+                <a:latin typeface="Arial Unicode MS"/>
+                <a:ea typeface="Arial Unicode MS"/>
+                <a:cs typeface="Arial Unicode MS"/>
+              </a:rPr>
+              <a:t>前面那台白色廂型車，身上是一排一排整齊的橘色點，大約十公尺；車子右邊的路上、遠處的樹，才是藍色。
 </a:t>
             </a:r>
           </a:p>
@@ -4333,41 +4410,30 @@
                 <a:spcPts val="0"/>
               </a:spcBef>
               <a:spcAft>
-                <a:spcPts val="150"/>
+                <a:spcPts val="133"/>
               </a:spcAft>
             </a:pPr>
             <a:r>
-              <a:rPr sz="900" lang="zh-TW" dirty="0">
-                <a:solidFill>
-                  <a:srgbClr val="000000"/>
-                </a:solidFill>
-                <a:latin typeface="Arial Unicode MS"/>
-                <a:ea typeface="Arial Unicode MS"/>
-                <a:cs typeface="Arial Unicode MS"/>
-              </a:rPr>
-              <a:t>四度是我故意放大的。真的車上，標定可能只差零點幾度，可是第五週算過：</a:t>
-            </a:r>
-            <a:r>
-              <a:rPr sz="900" b="1" lang="zh-TW" dirty="0">
-                <a:solidFill>
-                  <a:srgbClr val="000000"/>
-                </a:solidFill>
-                <a:latin typeface="Arial Unicode MS"/>
-                <a:ea typeface="Arial Unicode MS"/>
-                <a:cs typeface="Arial Unicode MS"/>
-              </a:rPr>
-              <a:t>差一度，五十公尺外就差零點八七公尺</a:t>
-            </a:r>
-            <a:r>
-              <a:rPr sz="900" lang="zh-TW" dirty="0">
-                <a:solidFill>
-                  <a:srgbClr val="000000"/>
-                </a:solidFill>
-                <a:latin typeface="Arial Unicode MS"/>
-                <a:ea typeface="Arial Unicode MS"/>
-                <a:cs typeface="Arial Unicode MS"/>
-              </a:rPr>
-              <a:t>，快半個車道。
+              <a:rPr sz="800" b="1" lang="zh-TW" dirty="0">
+                <a:solidFill>
+                  <a:srgbClr val="000000"/>
+                </a:solidFill>
+                <a:latin typeface="Arial Unicode MS"/>
+                <a:ea typeface="Arial Unicode MS"/>
+                <a:cs typeface="Arial Unicode MS"/>
+              </a:rPr>
+              <a:t>右邊，同一格資料，我故意把光達多轉了四度。</a:t>
+            </a:r>
+            <a:r>
+              <a:rPr sz="800" lang="zh-TW" dirty="0">
+                <a:solidFill>
+                  <a:srgbClr val="000000"/>
+                </a:solidFill>
+                <a:latin typeface="Arial Unicode MS"/>
+                <a:ea typeface="Arial Unicode MS"/>
+                <a:cs typeface="Arial Unicode MS"/>
+              </a:rPr>
+              <a:t>請看廂型車的右半邊：後窗上出現了藍色的點，那是遠處的東西；車子左邊的樹和柱子上，反而出現橘色的近處點。光達的點整片滑到左邊去了，它以為車子在左邊一點的位置。
 </a:t>
             </a:r>
           </a:p>
@@ -4377,129 +4443,41 @@
                 <a:spcPts val="0"/>
               </a:spcBef>
               <a:spcAft>
-                <a:spcPts val="150"/>
+                <a:spcPts val="133"/>
               </a:spcAft>
             </a:pPr>
             <a:r>
-              <a:rPr sz="900" lang="zh-TW" dirty="0">
-                <a:solidFill>
-                  <a:srgbClr val="000000"/>
-                </a:solidFill>
-                <a:latin typeface="Arial Unicode MS"/>
-                <a:ea typeface="Arial Unicode MS"/>
-                <a:cs typeface="Arial Unicode MS"/>
-              </a:rPr>
-              <a:t>nuScenes 是怎麼標定的？它的論文寫了四步。</a:t>
-            </a:r>
-            <a:r>
-              <a:rPr sz="900" b="1" lang="zh-TW" dirty="0">
-                <a:solidFill>
-                  <a:srgbClr val="000000"/>
-                </a:solidFill>
-                <a:latin typeface="Arial Unicode MS"/>
-                <a:ea typeface="Arial Unicode MS"/>
-                <a:cs typeface="Arial Unicode MS"/>
-              </a:rPr>
-              <a:t>光達</a:t>
-            </a:r>
-            <a:r>
-              <a:rPr sz="900" lang="zh-TW" dirty="0">
-                <a:solidFill>
-                  <a:srgbClr val="000000"/>
-                </a:solidFill>
-                <a:latin typeface="Arial Unicode MS"/>
-                <a:ea typeface="Arial Unicode MS"/>
-                <a:cs typeface="Arial Unicode MS"/>
-              </a:rPr>
-              <a:t>：用雷射水平儀，直接量它離車子的原點，也就是後輪軸的正中間，有多遠。</a:t>
-            </a:r>
-            <a:r>
-              <a:rPr sz="900" b="1" lang="zh-TW" dirty="0">
-                <a:solidFill>
-                  <a:srgbClr val="000000"/>
-                </a:solidFill>
-                <a:latin typeface="Arial Unicode MS"/>
-                <a:ea typeface="Arial Unicode MS"/>
-                <a:cs typeface="Arial Unicode MS"/>
-              </a:rPr>
-              <a:t>相機</a:t>
-            </a:r>
-            <a:r>
-              <a:rPr sz="900" lang="zh-TW" dirty="0">
-                <a:solidFill>
-                  <a:srgbClr val="000000"/>
-                </a:solidFill>
-                <a:latin typeface="Arial Unicode MS"/>
-                <a:ea typeface="Arial Unicode MS"/>
-                <a:cs typeface="Arial Unicode MS"/>
-              </a:rPr>
-              <a:t>：在車前擺一個三面都有圖案的立方體校正靶，相機和光達同時看它，算出相機跟光達的相對位置，再接回車身。</a:t>
-            </a:r>
-            <a:r>
-              <a:rPr sz="900" b="1" lang="zh-TW" dirty="0">
-                <a:solidFill>
-                  <a:srgbClr val="000000"/>
-                </a:solidFill>
-                <a:latin typeface="Arial Unicode MS"/>
-                <a:ea typeface="Arial Unicode MS"/>
-                <a:cs typeface="Arial Unicode MS"/>
-              </a:rPr>
-              <a:t>雷達</a:t>
-            </a:r>
-            <a:r>
-              <a:rPr sz="900" lang="zh-TW" dirty="0">
-                <a:solidFill>
-                  <a:srgbClr val="000000"/>
-                </a:solidFill>
-                <a:latin typeface="Arial Unicode MS"/>
-                <a:ea typeface="Arial Unicode MS"/>
-                <a:cs typeface="Arial Unicode MS"/>
-              </a:rPr>
-              <a:t>：先水平裝好，再開車上路，用路邊靜止的東西，反推它左右裝歪了幾度。</a:t>
-            </a:r>
-            <a:r>
-              <a:rPr sz="900" b="1" lang="zh-TW" dirty="0">
-                <a:solidFill>
-                  <a:srgbClr val="000000"/>
-                </a:solidFill>
-                <a:latin typeface="Arial Unicode MS"/>
-                <a:ea typeface="Arial Unicode MS"/>
-                <a:cs typeface="Arial Unicode MS"/>
-              </a:rPr>
-              <a:t>相機的內參</a:t>
-            </a:r>
-            <a:r>
-              <a:rPr sz="900" lang="zh-TW" dirty="0">
-                <a:solidFill>
-                  <a:srgbClr val="000000"/>
-                </a:solidFill>
-                <a:latin typeface="Arial Unicode MS"/>
-                <a:ea typeface="Arial Unicode MS"/>
-                <a:cs typeface="Arial Unicode MS"/>
-              </a:rPr>
-              <a:t>：用一塊印了固定圖案的校正板，算出鏡頭的變形。而且收資料的半年裡，這些數字大約</a:t>
-            </a:r>
-            <a:r>
-              <a:rPr sz="900" b="1" lang="zh-TW" dirty="0">
-                <a:solidFill>
-                  <a:srgbClr val="000000"/>
-                </a:solidFill>
-                <a:latin typeface="Arial Unicode MS"/>
-                <a:ea typeface="Arial Unicode MS"/>
-                <a:cs typeface="Arial Unicode MS"/>
-              </a:rPr>
-              <a:t>每個星期更新兩次</a:t>
-            </a:r>
-            <a:r>
-              <a:rPr sz="900" lang="zh-TW" dirty="0">
-                <a:solidFill>
-                  <a:srgbClr val="000000"/>
-                </a:solidFill>
-                <a:latin typeface="Arial Unicode MS"/>
-                <a:ea typeface="Arial Unicode MS"/>
-                <a:cs typeface="Arial Unicode MS"/>
-              </a:rPr>
-              <a:t>：車子每天在路上震動，標定是會跑掉的。
+              <a:rPr sz="800" lang="zh-TW" dirty="0">
+                <a:solidFill>
+                  <a:srgbClr val="000000"/>
+                </a:solidFill>
+                <a:latin typeface="Arial Unicode MS"/>
+                <a:ea typeface="Arial Unicode MS"/>
+                <a:cs typeface="Arial Unicode MS"/>
+              </a:rPr>
+              <a:t>四度是我故意放大的。真的車上，標定可能只差零點幾度，可是第五週算過：</a:t>
+            </a:r>
+            <a:r>
+              <a:rPr sz="800" b="1" lang="zh-TW" dirty="0">
+                <a:solidFill>
+                  <a:srgbClr val="000000"/>
+                </a:solidFill>
+                <a:latin typeface="Arial Unicode MS"/>
+                <a:ea typeface="Arial Unicode MS"/>
+                <a:cs typeface="Arial Unicode MS"/>
+              </a:rPr>
+              <a:t>差一度，五十公尺外就差零點八七公尺</a:t>
+            </a:r>
+            <a:r>
+              <a:rPr sz="800" lang="zh-TW" dirty="0">
+                <a:solidFill>
+                  <a:srgbClr val="000000"/>
+                </a:solidFill>
+                <a:latin typeface="Arial Unicode MS"/>
+                <a:ea typeface="Arial Unicode MS"/>
+                <a:cs typeface="Arial Unicode MS"/>
+              </a:rPr>
+              <a:t>，快半個車道。
 </a:t>
             </a:r>
           </a:p>
@@ -4509,11 +4487,143 @@
                 <a:spcPts val="0"/>
               </a:spcBef>
               <a:spcAft>
-                <a:spcPts val="150"/>
+                <a:spcPts val="133"/>
               </a:spcAft>
             </a:pPr>
             <a:r>
-              <a:rPr sz="900" lang="zh-TW" dirty="0">
+              <a:rPr sz="800" lang="zh-TW" dirty="0">
+                <a:solidFill>
+                  <a:srgbClr val="000000"/>
+                </a:solidFill>
+                <a:latin typeface="Arial Unicode MS"/>
+                <a:ea typeface="Arial Unicode MS"/>
+                <a:cs typeface="Arial Unicode MS"/>
+              </a:rPr>
+              <a:t>nuScenes 是怎麼標定的？它的論文寫了四步。</a:t>
+            </a:r>
+            <a:r>
+              <a:rPr sz="800" b="1" lang="zh-TW" dirty="0">
+                <a:solidFill>
+                  <a:srgbClr val="000000"/>
+                </a:solidFill>
+                <a:latin typeface="Arial Unicode MS"/>
+                <a:ea typeface="Arial Unicode MS"/>
+                <a:cs typeface="Arial Unicode MS"/>
+              </a:rPr>
+              <a:t>光達</a:t>
+            </a:r>
+            <a:r>
+              <a:rPr sz="800" lang="zh-TW" dirty="0">
+                <a:solidFill>
+                  <a:srgbClr val="000000"/>
+                </a:solidFill>
+                <a:latin typeface="Arial Unicode MS"/>
+                <a:ea typeface="Arial Unicode MS"/>
+                <a:cs typeface="Arial Unicode MS"/>
+              </a:rPr>
+              <a:t>：用雷射水平儀，直接量它離車子的原點，也就是後輪軸的正中間，有多遠。</a:t>
+            </a:r>
+            <a:r>
+              <a:rPr sz="800" b="1" lang="zh-TW" dirty="0">
+                <a:solidFill>
+                  <a:srgbClr val="000000"/>
+                </a:solidFill>
+                <a:latin typeface="Arial Unicode MS"/>
+                <a:ea typeface="Arial Unicode MS"/>
+                <a:cs typeface="Arial Unicode MS"/>
+              </a:rPr>
+              <a:t>相機</a:t>
+            </a:r>
+            <a:r>
+              <a:rPr sz="800" lang="zh-TW" dirty="0">
+                <a:solidFill>
+                  <a:srgbClr val="000000"/>
+                </a:solidFill>
+                <a:latin typeface="Arial Unicode MS"/>
+                <a:ea typeface="Arial Unicode MS"/>
+                <a:cs typeface="Arial Unicode MS"/>
+              </a:rPr>
+              <a:t>：在車前擺一個三面都有圖案的立方體校正靶，相機和光達同時看它，算出相機跟光達的相對位置，再接回車身。</a:t>
+            </a:r>
+            <a:r>
+              <a:rPr sz="800" b="1" lang="zh-TW" dirty="0">
+                <a:solidFill>
+                  <a:srgbClr val="000000"/>
+                </a:solidFill>
+                <a:latin typeface="Arial Unicode MS"/>
+                <a:ea typeface="Arial Unicode MS"/>
+                <a:cs typeface="Arial Unicode MS"/>
+              </a:rPr>
+              <a:t>雷達</a:t>
+            </a:r>
+            <a:r>
+              <a:rPr sz="800" lang="zh-TW" dirty="0">
+                <a:solidFill>
+                  <a:srgbClr val="000000"/>
+                </a:solidFill>
+                <a:latin typeface="Arial Unicode MS"/>
+                <a:ea typeface="Arial Unicode MS"/>
+                <a:cs typeface="Arial Unicode MS"/>
+              </a:rPr>
+              <a:t>：先水平裝好，再開車上路，用路邊靜止的東西，反推它左右裝歪了幾度。</a:t>
+            </a:r>
+            <a:r>
+              <a:rPr sz="800" b="1" lang="zh-TW" dirty="0">
+                <a:solidFill>
+                  <a:srgbClr val="000000"/>
+                </a:solidFill>
+                <a:latin typeface="Arial Unicode MS"/>
+                <a:ea typeface="Arial Unicode MS"/>
+                <a:cs typeface="Arial Unicode MS"/>
+              </a:rPr>
+              <a:t>相機的內參</a:t>
+            </a:r>
+            <a:r>
+              <a:rPr sz="800" lang="zh-TW" dirty="0">
+                <a:solidFill>
+                  <a:srgbClr val="000000"/>
+                </a:solidFill>
+                <a:latin typeface="Arial Unicode MS"/>
+                <a:ea typeface="Arial Unicode MS"/>
+                <a:cs typeface="Arial Unicode MS"/>
+              </a:rPr>
+              <a:t>：用一塊印了固定圖案的校正板，算出鏡頭的變形。而且收資料的半年裡，這些數字大約</a:t>
+            </a:r>
+            <a:r>
+              <a:rPr sz="800" b="1" lang="zh-TW" dirty="0">
+                <a:solidFill>
+                  <a:srgbClr val="000000"/>
+                </a:solidFill>
+                <a:latin typeface="Arial Unicode MS"/>
+                <a:ea typeface="Arial Unicode MS"/>
+                <a:cs typeface="Arial Unicode MS"/>
+              </a:rPr>
+              <a:t>每個星期更新兩次</a:t>
+            </a:r>
+            <a:r>
+              <a:rPr sz="800" lang="zh-TW" dirty="0">
+                <a:solidFill>
+                  <a:srgbClr val="000000"/>
+                </a:solidFill>
+                <a:latin typeface="Arial Unicode MS"/>
+                <a:ea typeface="Arial Unicode MS"/>
+                <a:cs typeface="Arial Unicode MS"/>
+              </a:rPr>
+              <a:t>：車子每天在路上震動，標定是會跑掉的。
+</a:t>
+            </a:r>
+          </a:p>
+          <a:p>
+            <a:pPr algn="l">
+              <a:spcBef>
+                <a:spcPts val="0"/>
+              </a:spcBef>
+              <a:spcAft>
+                <a:spcPts val="133"/>
+              </a:spcAft>
+            </a:pPr>
+            <a:r>
+              <a:rPr sz="800" lang="zh-TW" dirty="0">
                 <a:solidFill>
                   <a:srgbClr val="000000"/>
                 </a:solidFill>
@@ -12250,7 +12360,7 @@
                 <a:ea typeface="Arial" pitchFamily="34" charset="-122"/>
                 <a:cs typeface="Arial" pitchFamily="34" charset="-120"/>
               </a:rPr>
-              <a:t>Điều kiện 1 · 先對齊空間：標定</a:t>
+              <a:t>Điều kiện 1 · 先對齊空間：標定（內參＋外參）</a:t>
             </a:r>
             <a:endParaRPr lang="en-US" sz="1300" dirty="0"/>
           </a:p>

--- a/第七週(10-22)/第七週_第2節_簡報.pptx
+++ b/第七週(10-22)/第七週_第2節_簡報.pptx
@@ -5455,11 +5455,11 @@
                 <a:spcPts val="0"/>
               </a:spcBef>
               <a:spcAft>
-                <a:spcPts val="233"/>
+                <a:spcPts val="167"/>
               </a:spcAft>
             </a:pPr>
             <a:r>
-              <a:rPr sz="1400" b="1" lang="zh-TW" dirty="0">
+              <a:rPr sz="1000" b="1" lang="zh-TW" dirty="0">
                 <a:solidFill>
                   <a:srgbClr val="000000"/>
                 </a:solidFill>
@@ -5470,7 +5470,7 @@
               <a:t>這一張的目的：</a:t>
             </a:r>
             <a:r>
-              <a:rPr sz="1400" lang="zh-TW" dirty="0">
+              <a:rPr sz="1000" lang="zh-TW" dirty="0">
                 <a:solidFill>
                   <a:srgbClr val="000000"/>
                 </a:solidFill>
@@ -5488,11 +5488,11 @@
                 <a:spcPts val="0"/>
               </a:spcBef>
               <a:spcAft>
-                <a:spcPts val="233"/>
+                <a:spcPts val="167"/>
               </a:spcAft>
             </a:pPr>
             <a:r>
-              <a:rPr sz="1400" lang="zh-TW" dirty="0">
+              <a:rPr sz="1000" lang="zh-TW" dirty="0">
                 <a:solidFill>
                   <a:srgbClr val="000000"/>
                 </a:solidFill>
@@ -5510,11 +5510,11 @@
                 <a:spcPts val="0"/>
               </a:spcBef>
               <a:spcAft>
-                <a:spcPts val="233"/>
+                <a:spcPts val="167"/>
               </a:spcAft>
             </a:pPr>
             <a:r>
-              <a:rPr sz="1400" b="1" lang="zh-TW" dirty="0">
+              <a:rPr sz="1000" b="1" lang="zh-TW" dirty="0">
                 <a:solidFill>
                   <a:srgbClr val="000000"/>
                 </a:solidFill>
@@ -5525,7 +5525,7 @@
               <a:t>前期融合</a:t>
             </a:r>
             <a:r>
-              <a:rPr sz="1400" lang="zh-TW" dirty="0">
+              <a:rPr sz="1000" lang="zh-TW" dirty="0">
                 <a:solidFill>
                   <a:srgbClr val="000000"/>
                 </a:solidFill>
@@ -5543,11 +5543,11 @@
                 <a:spcPts val="0"/>
               </a:spcBef>
               <a:spcAft>
-                <a:spcPts val="233"/>
+                <a:spcPts val="167"/>
               </a:spcAft>
             </a:pPr>
             <a:r>
-              <a:rPr sz="1400" b="1" lang="zh-TW" dirty="0">
+              <a:rPr sz="1000" b="1" lang="zh-TW" dirty="0">
                 <a:solidFill>
                   <a:srgbClr val="000000"/>
                 </a:solidFill>
@@ -5558,7 +5558,7 @@
               <a:t>中期融合</a:t>
             </a:r>
             <a:r>
-              <a:rPr sz="1400" lang="zh-TW" dirty="0">
+              <a:rPr sz="1000" lang="zh-TW" dirty="0">
                 <a:solidFill>
                   <a:srgbClr val="000000"/>
                 </a:solidFill>
@@ -5576,11 +5576,11 @@
                 <a:spcPts val="0"/>
               </a:spcBef>
               <a:spcAft>
-                <a:spcPts val="233"/>
+                <a:spcPts val="167"/>
               </a:spcAft>
             </a:pPr>
             <a:r>
-              <a:rPr sz="1400" b="1" lang="zh-TW" dirty="0">
+              <a:rPr sz="1000" b="1" lang="zh-TW" dirty="0">
                 <a:solidFill>
                   <a:srgbClr val="000000"/>
                 </a:solidFill>
@@ -5591,7 +5591,7 @@
               <a:t>後期融合</a:t>
             </a:r>
             <a:r>
-              <a:rPr sz="1400" lang="zh-TW" dirty="0">
+              <a:rPr sz="1000" lang="zh-TW" dirty="0">
                 <a:solidFill>
                   <a:srgbClr val="000000"/>
                 </a:solidFill>
@@ -5609,41 +5609,30 @@
                 <a:spcPts val="0"/>
               </a:spcBef>
               <a:spcAft>
-                <a:spcPts val="233"/>
+                <a:spcPts val="167"/>
               </a:spcAft>
             </a:pPr>
             <a:r>
-              <a:rPr sz="1400" lang="zh-TW" dirty="0">
-                <a:solidFill>
-                  <a:srgbClr val="000000"/>
-                </a:solidFill>
-                <a:latin typeface="Arial Unicode MS"/>
-                <a:ea typeface="Arial Unicode MS"/>
-                <a:cs typeface="Arial Unicode MS"/>
-              </a:rPr>
-              <a:t>再橫著讀兩列：「留下的資訊」和「對齊要多準」，剛好相反。</a:t>
-            </a:r>
-            <a:r>
-              <a:rPr sz="1400" b="1" lang="zh-TW" dirty="0">
-                <a:solidFill>
-                  <a:srgbClr val="000000"/>
-                </a:solidFill>
-                <a:latin typeface="Arial Unicode MS"/>
-                <a:ea typeface="Arial Unicode MS"/>
-                <a:cs typeface="Arial Unicode MS"/>
-              </a:rPr>
-              <a:t>留下的資訊愈多，對齊就要愈準。</a:t>
-            </a:r>
-            <a:r>
-              <a:rPr sz="1400" lang="zh-TW" dirty="0">
-                <a:solidFill>
-                  <a:srgbClr val="000000"/>
-                </a:solidFill>
-                <a:latin typeface="Arial Unicode MS"/>
-                <a:ea typeface="Arial Unicode MS"/>
-                <a:cs typeface="Arial Unicode MS"/>
-              </a:rPr>
-              <a:t>就像一個團隊做報告：前期是把每個人的原始資料丟進同一個資料夾一起看，最完整，可是格式要先統一；後期是每個人先寫好自己的結論再合成一份，最省事，可是每個人沒寫進結論的細節就看不到了。
+              <a:rPr sz="1000" b="1" lang="zh-TW" dirty="0">
+                <a:solidFill>
+                  <a:srgbClr val="000000"/>
+                </a:solidFill>
+                <a:latin typeface="Arial Unicode MS"/>
+                <a:ea typeface="Arial Unicode MS"/>
+                <a:cs typeface="Arial Unicode MS"/>
+              </a:rPr>
+              <a:t>為什麼「對齊要多準」差這麼多？</a:t>
+            </a:r>
+            <a:r>
+              <a:rPr sz="1000" lang="zh-TW" dirty="0">
+                <a:solidFill>
+                  <a:srgbClr val="000000"/>
+                </a:solidFill>
+                <a:latin typeface="Arial Unicode MS"/>
+                <a:ea typeface="Arial Unicode MS"/>
+                <a:cs typeface="Arial Unicode MS"/>
+              </a:rPr>
+              <a:t>看合的時候，要對準的東西有多大。
 </a:t>
             </a:r>
           </a:p>
@@ -5653,11 +5642,176 @@
                 <a:spcPts val="0"/>
               </a:spcBef>
               <a:spcAft>
-                <a:spcPts val="233"/>
+                <a:spcPts val="167"/>
               </a:spcAft>
             </a:pPr>
             <a:r>
-              <a:rPr sz="1400" lang="zh-TW" dirty="0">
+              <a:rPr sz="1000" b="1" lang="zh-TW" dirty="0">
+                <a:solidFill>
+                  <a:srgbClr val="000000"/>
+                </a:solidFill>
+                <a:latin typeface="Arial Unicode MS"/>
+                <a:ea typeface="Arial Unicode MS"/>
+                <a:cs typeface="Arial Unicode MS"/>
+              </a:rPr>
+              <a:t>前期融合，要對準的是一個點。</a:t>
+            </a:r>
+            <a:r>
+              <a:rPr sz="1000" lang="zh-TW" dirty="0">
+                <a:solidFill>
+                  <a:srgbClr val="000000"/>
+                </a:solidFill>
+                <a:latin typeface="Arial Unicode MS"/>
+                <a:ea typeface="Arial Unicode MS"/>
+                <a:cs typeface="Arial Unicode MS"/>
+              </a:rPr>
+              <a:t>光達的每一個點，都要落在照片上對的那個像素。一個行人大約七十公分寬，站在二十公尺外；角度只要差一度，點就偏三十五公分，差不多一半的點會打到他旁邊的背景上，照片上這個人的距離就錯了。第四張故意轉四度，整片點都滑掉。所以要最準。
+</a:t>
+            </a:r>
+          </a:p>
+          <a:p>
+            <a:pPr algn="l">
+              <a:spcBef>
+                <a:spcPts val="0"/>
+              </a:spcBef>
+              <a:spcAft>
+                <a:spcPts val="167"/>
+              </a:spcAft>
+            </a:pPr>
+            <a:r>
+              <a:rPr sz="1000" b="1" lang="zh-TW" dirty="0">
+                <a:solidFill>
+                  <a:srgbClr val="000000"/>
+                </a:solidFill>
+                <a:latin typeface="Arial Unicode MS"/>
+                <a:ea typeface="Arial Unicode MS"/>
+                <a:cs typeface="Arial Unicode MS"/>
+              </a:rPr>
+              <a:t>中期融合，要對準的是一格。</a:t>
+            </a:r>
+            <a:r>
+              <a:rPr sz="1000" lang="zh-TW" dirty="0">
+                <a:solidFill>
+                  <a:srgbClr val="000000"/>
+                </a:solidFill>
+                <a:latin typeface="Arial Unicode MS"/>
+                <a:ea typeface="Arial Unicode MS"/>
+                <a:cs typeface="Arial Unicode MS"/>
+              </a:rPr>
+              <a:t>大家先畫成同一張鳥瞰圖，圖切成一格一格，每一格代表地上的一小塊。偏一點點，東西還在同一格，或是隔壁那一格；而且這種做法是用大量資料訓練出來的，可以學會容忍一點偏差。所以中等。
+</a:t>
+            </a:r>
+          </a:p>
+          <a:p>
+            <a:pPr algn="l">
+              <a:spcBef>
+                <a:spcPts val="0"/>
+              </a:spcBef>
+              <a:spcAft>
+                <a:spcPts val="167"/>
+              </a:spcAft>
+            </a:pPr>
+            <a:r>
+              <a:rPr sz="1000" b="1" lang="zh-TW" dirty="0">
+                <a:solidFill>
+                  <a:srgbClr val="000000"/>
+                </a:solidFill>
+                <a:latin typeface="Arial Unicode MS"/>
+                <a:ea typeface="Arial Unicode MS"/>
+                <a:cs typeface="Arial Unicode MS"/>
+              </a:rPr>
+              <a:t>後期融合，要對準的是一整個物體。</a:t>
+            </a:r>
+            <a:r>
+              <a:rPr sz="1000" lang="zh-TW" dirty="0">
+                <a:solidFill>
+                  <a:srgbClr val="000000"/>
+                </a:solidFill>
+                <a:latin typeface="Arial Unicode MS"/>
+                <a:ea typeface="Arial Unicode MS"/>
+                <a:cs typeface="Arial Unicode MS"/>
+              </a:rPr>
+              <a:t>相機說「前面二十公尺有一台車」，雷達說「前面二十點三公尺有一個目標」，差了三十公分。可是一台車將近兩公尺寬、四公尺半長，三十公分還在車身上，一看就知道是同一台。只要偏差比兩個物體之間的距離小，就對得上。所以最寬鬆。
+</a:t>
+            </a:r>
+          </a:p>
+          <a:p>
+            <a:pPr algn="l">
+              <a:spcBef>
+                <a:spcPts val="0"/>
+              </a:spcBef>
+              <a:spcAft>
+                <a:spcPts val="167"/>
+              </a:spcAft>
+            </a:pPr>
+            <a:r>
+              <a:rPr sz="1000" lang="zh-TW" dirty="0">
+                <a:solidFill>
+                  <a:srgbClr val="000000"/>
+                </a:solidFill>
+                <a:latin typeface="Arial Unicode MS"/>
+                <a:ea typeface="Arial Unicode MS"/>
+                <a:cs typeface="Arial Unicode MS"/>
+              </a:rPr>
+              <a:t>寬鬆不是不用標定。偏差要是大到跟兩台車之間的距離差不多，雷達的目標就會配到隔壁那台車上，「時速三十」被安錯人，這就是第八張講的對應出錯。
+</a:t>
+            </a:r>
+          </a:p>
+          <a:p>
+            <a:pPr algn="l">
+              <a:spcBef>
+                <a:spcPts val="0"/>
+              </a:spcBef>
+              <a:spcAft>
+                <a:spcPts val="167"/>
+              </a:spcAft>
+            </a:pPr>
+            <a:r>
+              <a:rPr sz="1000" lang="zh-TW" dirty="0">
+                <a:solidFill>
+                  <a:srgbClr val="000000"/>
+                </a:solidFill>
+                <a:latin typeface="Arial Unicode MS"/>
+                <a:ea typeface="Arial Unicode MS"/>
+                <a:cs typeface="Arial Unicode MS"/>
+              </a:rPr>
+              <a:t>再橫著讀兩列：「留下的資訊」和「對齊要多準」，剛好相反。</a:t>
+            </a:r>
+            <a:r>
+              <a:rPr sz="1000" b="1" lang="zh-TW" dirty="0">
+                <a:solidFill>
+                  <a:srgbClr val="000000"/>
+                </a:solidFill>
+                <a:latin typeface="Arial Unicode MS"/>
+                <a:ea typeface="Arial Unicode MS"/>
+                <a:cs typeface="Arial Unicode MS"/>
+              </a:rPr>
+              <a:t>留下的資訊愈多，對齊就要愈準。</a:t>
+            </a:r>
+            <a:r>
+              <a:rPr sz="1000" lang="zh-TW" dirty="0">
+                <a:solidFill>
+                  <a:srgbClr val="000000"/>
+                </a:solidFill>
+                <a:latin typeface="Arial Unicode MS"/>
+                <a:ea typeface="Arial Unicode MS"/>
+                <a:cs typeface="Arial Unicode MS"/>
+              </a:rPr>
+              <a:t>就像一個團隊做報告：前期是把每個人的原始資料丟進同一個資料夾一起看，最完整，可是格式要先統一；後期是每個人先寫好自己的結論再合成一份，最省事，可是每個人沒寫進結論的細節就看不到了。
+</a:t>
+            </a:r>
+          </a:p>
+          <a:p>
+            <a:pPr algn="l">
+              <a:spcBef>
+                <a:spcPts val="0"/>
+              </a:spcBef>
+              <a:spcAft>
+                <a:spcPts val="167"/>
+              </a:spcAft>
+            </a:pPr>
+            <a:r>
+              <a:rPr sz="1000" lang="zh-TW" dirty="0">
                 <a:solidFill>
                   <a:srgbClr val="000000"/>
                 </a:solidFill>
@@ -14874,7 +15028,7 @@
       </p:nvGrpSpPr>
       <p:grpSpPr>
         <a:xfrm>
-          <a:off x="472946" y="0"/>
+          <a:off x="589052" y="0"/>
           <a:ext cx="1" cy="1"/>
           <a:chOff x="0" y="0"/>
           <a:chExt cx="0" cy="0"/>
@@ -14888,8 +15042,8 @@
         </p:nvSpPr>
         <p:spPr>
           <a:xfrm>
-            <a:off x="923842" y="262339"/>
-            <a:ext cx="7296316" cy="754226"/>
+            <a:off x="1027176" y="254909"/>
+            <a:ext cx="7089648" cy="732862"/>
           </a:xfrm>
           <a:prstGeom prst="rect">
             <a:avLst/>
@@ -14908,7 +15062,7 @@
               <a:buNone/>
             </a:pPr>
             <a:r>
-              <a:rPr lang="en-US" sz="1970" b="1" dirty="0">
+              <a:rPr lang="en-US" sz="1920" b="1" dirty="0">
                 <a:solidFill>
                   <a:srgbClr val="0B1F3A"/>
                 </a:solidFill>
@@ -14918,7 +15072,7 @@
               </a:rPr>
               <a:t>So sánh ba cách ghép: sớm, giữa, muộn</a:t>
             </a:r>
-            <a:endParaRPr lang="en-US" sz="1970" dirty="0"/>
+            <a:endParaRPr lang="en-US" sz="1920" dirty="0"/>
           </a:p>
           <a:p>
             <a:pPr indent="0" marL="0">
@@ -14928,7 +15082,7 @@
               <a:buNone/>
             </a:pPr>
             <a:r>
-              <a:rPr lang="en-US" sz="1210" dirty="0">
+              <a:rPr lang="en-US" sz="1180" dirty="0">
                 <a:solidFill>
                   <a:srgbClr val="5F7183"/>
                 </a:solidFill>
@@ -14938,7 +15092,7 @@
               </a:rPr>
               <a:t>三種融合比一比：前期、中期、後期</a:t>
             </a:r>
-            <a:endParaRPr lang="en-US" sz="1970" dirty="0"/>
+            <a:endParaRPr lang="en-US" sz="1920" dirty="0"/>
           </a:p>
         </p:txBody>
       </p:sp>
@@ -14957,20 +15111,20 @@
           </p:nvPr>
         </p:nvGraphicFramePr>
         <p:xfrm>
-          <a:off x="923842" y="1016565"/>
-          <a:ext cx="7296316" cy="819811"/>
+          <a:off x="1027176" y="987771"/>
+          <a:ext cx="7089648" cy="796590"/>
         </p:xfrm>
         <a:graphic>
           <a:graphicData uri="http://schemas.openxmlformats.org/drawingml/2006/table">
             <a:tbl>
               <a:tblPr/>
               <a:tblGrid>
-                <a:gridCol w="1434669"/>
-                <a:gridCol w="1967546"/>
-                <a:gridCol w="1967546"/>
-                <a:gridCol w="1926555"/>
+                <a:gridCol w="1394032"/>
+                <a:gridCol w="1911815"/>
+                <a:gridCol w="1911815"/>
+                <a:gridCol w="1871986"/>
               </a:tblGrid>
-              <a:tr h="344321">
+              <a:tr h="334568">
                 <a:tc>
                   <a:txBody>
                     <a:bodyPr/>
@@ -15030,7 +15184,7 @@
                         <a:buNone/>
                       </a:pPr>
                       <a:r>
-                        <a:rPr lang="en-US" sz="900" b="1" dirty="0">
+                        <a:rPr lang="en-US" sz="870" b="1" dirty="0">
                           <a:solidFill>
                             <a:srgbClr val="FFFFFF"/>
                           </a:solidFill>
@@ -15040,14 +15194,14 @@
                         </a:rPr>
                         <a:t>Ghép sớm</a:t>
                       </a:r>
-                      <a:endParaRPr lang="en-US" sz="1080" dirty="0"/>
+                      <a:endParaRPr lang="en-US" sz="1050" dirty="0"/>
                     </a:p>
                     <a:p>
                       <a:pPr algn="l" indent="0" marL="0">
                         <a:buNone/>
                       </a:pPr>
                       <a:r>
-                        <a:rPr lang="en-US" sz="760" dirty="0">
+                        <a:rPr lang="en-US" sz="740" dirty="0">
                           <a:solidFill>
                             <a:srgbClr val="CFE0EC"/>
                           </a:solidFill>
@@ -15057,7 +15211,7 @@
                         </a:rPr>
                         <a:t>前期融合</a:t>
                       </a:r>
-                      <a:endParaRPr lang="en-US" sz="1080" dirty="0"/>
+                      <a:endParaRPr lang="en-US" sz="1050" dirty="0"/>
                     </a:p>
                   </a:txBody>
                   <a:tcPr marL="63500" marR="63500" marT="38100" marB="38100" anchor="ctr">
@@ -15111,7 +15265,7 @@
                         <a:buNone/>
                       </a:pPr>
                       <a:r>
-                        <a:rPr lang="en-US" sz="900" b="1" dirty="0">
+                        <a:rPr lang="en-US" sz="870" b="1" dirty="0">
                           <a:solidFill>
                             <a:srgbClr val="FFFFFF"/>
                           </a:solidFill>
@@ -15121,14 +15275,14 @@
                         </a:rPr>
                         <a:t>Ghép giữa</a:t>
                       </a:r>
-                      <a:endParaRPr lang="en-US" sz="1080" dirty="0"/>
+                      <a:endParaRPr lang="en-US" sz="1050" dirty="0"/>
                     </a:p>
                     <a:p>
                       <a:pPr algn="l" indent="0" marL="0">
                         <a:buNone/>
                       </a:pPr>
                       <a:r>
-                        <a:rPr lang="en-US" sz="760" dirty="0">
+                        <a:rPr lang="en-US" sz="740" dirty="0">
                           <a:solidFill>
                             <a:srgbClr val="CFE0EC"/>
                           </a:solidFill>
@@ -15138,7 +15292,7 @@
                         </a:rPr>
                         <a:t>中期融合</a:t>
                       </a:r>
-                      <a:endParaRPr lang="en-US" sz="1080" dirty="0"/>
+                      <a:endParaRPr lang="en-US" sz="1050" dirty="0"/>
                     </a:p>
                   </a:txBody>
                   <a:tcPr marL="63500" marR="63500" marT="38100" marB="38100" anchor="ctr">
@@ -15192,7 +15346,7 @@
                         <a:buNone/>
                       </a:pPr>
                       <a:r>
-                        <a:rPr lang="en-US" sz="900" b="1" dirty="0">
+                        <a:rPr lang="en-US" sz="870" b="1" dirty="0">
                           <a:solidFill>
                             <a:srgbClr val="FFFFFF"/>
                           </a:solidFill>
@@ -15202,14 +15356,14 @@
                         </a:rPr>
                         <a:t>Ghép muộn</a:t>
                       </a:r>
-                      <a:endParaRPr lang="en-US" sz="1080" dirty="0"/>
+                      <a:endParaRPr lang="en-US" sz="1050" dirty="0"/>
                     </a:p>
                     <a:p>
                       <a:pPr algn="l" indent="0" marL="0">
                         <a:buNone/>
                       </a:pPr>
                       <a:r>
-                        <a:rPr lang="en-US" sz="760" dirty="0">
+                        <a:rPr lang="en-US" sz="740" dirty="0">
                           <a:solidFill>
                             <a:srgbClr val="CFE0EC"/>
                           </a:solidFill>
@@ -15219,7 +15373,7 @@
                         </a:rPr>
                         <a:t>後期融合</a:t>
                       </a:r>
-                      <a:endParaRPr lang="en-US" sz="1080" dirty="0"/>
+                      <a:endParaRPr lang="en-US" sz="1050" dirty="0"/>
                     </a:p>
                   </a:txBody>
                   <a:tcPr marL="63500" marR="63500" marT="38100" marB="38100" anchor="ctr">
@@ -15265,7 +15419,7 @@
                   </a:tcPr>
                 </a:tc>
               </a:tr>
-              <a:tr h="344321">
+              <a:tr h="334568">
                 <a:tc>
                   <a:txBody>
                     <a:bodyPr/>
@@ -15275,7 +15429,7 @@
                         <a:buNone/>
                       </a:pPr>
                       <a:r>
-                        <a:rPr lang="en-US" sz="900" b="1" dirty="0">
+                        <a:rPr lang="en-US" sz="870" b="1" dirty="0">
                           <a:solidFill>
                             <a:srgbClr val="0B1F3A"/>
                           </a:solidFill>
@@ -15285,14 +15439,14 @@
                         </a:rPr>
                         <a:t>Ghép khi nào</a:t>
                       </a:r>
-                      <a:endParaRPr lang="en-US" sz="1080" dirty="0"/>
+                      <a:endParaRPr lang="en-US" sz="1050" dirty="0"/>
                     </a:p>
                     <a:p>
                       <a:pPr algn="l" indent="0" marL="0">
                         <a:buNone/>
                       </a:pPr>
                       <a:r>
-                        <a:rPr lang="en-US" sz="760" dirty="0">
+                        <a:rPr lang="en-US" sz="740" dirty="0">
                           <a:solidFill>
                             <a:srgbClr val="5F7183"/>
                           </a:solidFill>
@@ -15302,7 +15456,7 @@
                         </a:rPr>
                         <a:t>什麼時候合</a:t>
                       </a:r>
-                      <a:endParaRPr lang="en-US" sz="1080" dirty="0"/>
+                      <a:endParaRPr lang="en-US" sz="1050" dirty="0"/>
                     </a:p>
                   </a:txBody>
                   <a:tcPr marL="63500" marR="63500" marT="38100" marB="38100" anchor="ctr">
@@ -15353,7 +15507,7 @@
                         <a:buNone/>
                       </a:pPr>
                       <a:r>
-                        <a:rPr lang="en-US" sz="900" dirty="0">
+                        <a:rPr lang="en-US" sz="870" dirty="0">
                           <a:solidFill>
                             <a:srgbClr val="1A2733"/>
                           </a:solidFill>
@@ -15363,14 +15517,14 @@
                         </a:rPr>
                         <a:t>Ngay dữ liệu gốc</a:t>
                       </a:r>
-                      <a:endParaRPr lang="en-US" sz="1080" dirty="0"/>
+                      <a:endParaRPr lang="en-US" sz="1050" dirty="0"/>
                     </a:p>
                     <a:p>
                       <a:pPr algn="l" indent="0" marL="0">
                         <a:buNone/>
                       </a:pPr>
                       <a:r>
-                        <a:rPr lang="en-US" sz="760" dirty="0">
+                        <a:rPr lang="en-US" sz="740" dirty="0">
                           <a:solidFill>
                             <a:srgbClr val="5F7183"/>
                           </a:solidFill>
@@ -15380,7 +15534,7 @@
                         </a:rPr>
                         <a:t>原始資料就合</a:t>
                       </a:r>
-                      <a:endParaRPr lang="en-US" sz="1080" dirty="0"/>
+                      <a:endParaRPr lang="en-US" sz="1050" dirty="0"/>
                     </a:p>
                   </a:txBody>
                   <a:tcPr marL="63500" marR="63500" marT="38100" marB="38100" anchor="ctr">
@@ -15431,7 +15585,7 @@
                         <a:buNone/>
                       </a:pPr>
                       <a:r>
-                        <a:rPr lang="en-US" sz="900" dirty="0">
+                        <a:rPr lang="en-US" sz="870" dirty="0">
                           <a:solidFill>
                             <a:srgbClr val="1A2733"/>
                           </a:solidFill>
@@ -15441,14 +15595,14 @@
                         </a:rPr>
                         <a:t>Mỗi cái rút đặc trưng rồi ghép</a:t>
                       </a:r>
-                      <a:endParaRPr lang="en-US" sz="1080" dirty="0"/>
+                      <a:endParaRPr lang="en-US" sz="1050" dirty="0"/>
                     </a:p>
                     <a:p>
                       <a:pPr algn="l" indent="0" marL="0">
                         <a:buNone/>
                       </a:pPr>
                       <a:r>
-                        <a:rPr lang="en-US" sz="760" dirty="0">
+                        <a:rPr lang="en-US" sz="740" dirty="0">
                           <a:solidFill>
                             <a:srgbClr val="5F7183"/>
                           </a:solidFill>
@@ -15458,7 +15612,7 @@
                         </a:rPr>
                         <a:t>各自抽出特徵再合</a:t>
                       </a:r>
-                      <a:endParaRPr lang="en-US" sz="1080" dirty="0"/>
+                      <a:endParaRPr lang="en-US" sz="1050" dirty="0"/>
                     </a:p>
                   </a:txBody>
                   <a:tcPr marL="63500" marR="63500" marT="38100" marB="38100" anchor="ctr">
@@ -15509,7 +15663,7 @@
                         <a:buNone/>
                       </a:pPr>
                       <a:r>
-                        <a:rPr lang="en-US" sz="900" dirty="0">
+                        <a:rPr lang="en-US" sz="870" dirty="0">
                           <a:solidFill>
                             <a:srgbClr val="1A2733"/>
                           </a:solidFill>
@@ -15519,14 +15673,14 @@
                         </a:rPr>
                         <a:t>Mỗi cái tự tìm vật rồi ghép</a:t>
                       </a:r>
-                      <a:endParaRPr lang="en-US" sz="1080" dirty="0"/>
+                      <a:endParaRPr lang="en-US" sz="1050" dirty="0"/>
                     </a:p>
                     <a:p>
                       <a:pPr algn="l" indent="0" marL="0">
                         <a:buNone/>
                       </a:pPr>
                       <a:r>
-                        <a:rPr lang="en-US" sz="760" dirty="0">
+                        <a:rPr lang="en-US" sz="740" dirty="0">
                           <a:solidFill>
                             <a:srgbClr val="5F7183"/>
                           </a:solidFill>
@@ -15536,7 +15690,7 @@
                         </a:rPr>
                         <a:t>各自找出物體再合</a:t>
                       </a:r>
-                      <a:endParaRPr lang="en-US" sz="1080" dirty="0"/>
+                      <a:endParaRPr lang="en-US" sz="1050" dirty="0"/>
                     </a:p>
                   </a:txBody>
                   <a:tcPr marL="63500" marR="63500" marT="38100" marB="38100" anchor="ctr">
@@ -15579,7 +15733,7 @@
                   </a:tcPr>
                 </a:tc>
               </a:tr>
-              <a:tr h="344321">
+              <a:tr h="334568">
                 <a:tc>
                   <a:txBody>
                     <a:bodyPr/>
@@ -15589,7 +15743,7 @@
                         <a:buNone/>
                       </a:pPr>
                       <a:r>
-                        <a:rPr lang="en-US" sz="900" b="1" dirty="0">
+                        <a:rPr lang="en-US" sz="870" b="1" dirty="0">
                           <a:solidFill>
                             <a:srgbClr val="0B1F3A"/>
                           </a:solidFill>
@@ -15599,14 +15753,14 @@
                         </a:rPr>
                         <a:t>Ví dụ</a:t>
                       </a:r>
-                      <a:endParaRPr lang="en-US" sz="1080" dirty="0"/>
+                      <a:endParaRPr lang="en-US" sz="1050" dirty="0"/>
                     </a:p>
                     <a:p>
                       <a:pPr algn="l" indent="0" marL="0">
                         <a:buNone/>
                       </a:pPr>
                       <a:r>
-                        <a:rPr lang="en-US" sz="760" dirty="0">
+                        <a:rPr lang="en-US" sz="740" dirty="0">
                           <a:solidFill>
                             <a:srgbClr val="5F7183"/>
                           </a:solidFill>
@@ -15616,7 +15770,7 @@
                         </a:rPr>
                         <a:t>例子</a:t>
                       </a:r>
-                      <a:endParaRPr lang="en-US" sz="1080" dirty="0"/>
+                      <a:endParaRPr lang="en-US" sz="1050" dirty="0"/>
                     </a:p>
                   </a:txBody>
                   <a:tcPr marL="63500" marR="63500" marT="38100" marB="38100" anchor="ctr">
@@ -15667,7 +15821,7 @@
                         <a:buNone/>
                       </a:pPr>
                       <a:r>
-                        <a:rPr lang="en-US" sz="900" dirty="0">
+                        <a:rPr lang="en-US" sz="870" dirty="0">
                           <a:solidFill>
                             <a:srgbClr val="1A2733"/>
                           </a:solidFill>
@@ -15677,14 +15831,14 @@
                         </a:rPr>
                         <a:t>Chiếu điểm lidar lên ảnh (slide 4)</a:t>
                       </a:r>
-                      <a:endParaRPr lang="en-US" sz="1080" dirty="0"/>
+                      <a:endParaRPr lang="en-US" sz="1050" dirty="0"/>
                     </a:p>
                     <a:p>
                       <a:pPr algn="l" indent="0" marL="0">
                         <a:buNone/>
                       </a:pPr>
                       <a:r>
-                        <a:rPr lang="en-US" sz="760" dirty="0">
+                        <a:rPr lang="en-US" sz="740" dirty="0">
                           <a:solidFill>
                             <a:srgbClr val="5F7183"/>
                           </a:solidFill>
@@ -15694,7 +15848,7 @@
                         </a:rPr>
                         <a:t>光達點投到照片（第四張）</a:t>
                       </a:r>
-                      <a:endParaRPr lang="en-US" sz="1080" dirty="0"/>
+                      <a:endParaRPr lang="en-US" sz="1050" dirty="0"/>
                     </a:p>
                   </a:txBody>
                   <a:tcPr marL="63500" marR="63500" marT="38100" marB="38100" anchor="ctr">
@@ -15745,7 +15899,7 @@
                         <a:buNone/>
                       </a:pPr>
                       <a:r>
-                        <a:rPr lang="en-US" sz="900" dirty="0">
+                        <a:rPr lang="en-US" sz="870" dirty="0">
                           <a:solidFill>
                             <a:srgbClr val="1A2733"/>
                           </a:solidFill>
@@ -15755,14 +15909,14 @@
                         </a:rPr>
                         <a:t>Cùng vẽ thành bản đồ nhìn từ trên</a:t>
                       </a:r>
-                      <a:endParaRPr lang="en-US" sz="1080" dirty="0"/>
+                      <a:endParaRPr lang="en-US" sz="1050" dirty="0"/>
                     </a:p>
                     <a:p>
                       <a:pPr algn="l" indent="0" marL="0">
                         <a:buNone/>
                       </a:pPr>
                       <a:r>
-                        <a:rPr lang="en-US" sz="760" dirty="0">
+                        <a:rPr lang="en-US" sz="740" dirty="0">
                           <a:solidFill>
                             <a:srgbClr val="5F7183"/>
                           </a:solidFill>
@@ -15772,7 +15926,7 @@
                         </a:rPr>
                         <a:t>大家先畫成同一張鳥瞰圖</a:t>
                       </a:r>
-                      <a:endParaRPr lang="en-US" sz="1080" dirty="0"/>
+                      <a:endParaRPr lang="en-US" sz="1050" dirty="0"/>
                     </a:p>
                   </a:txBody>
                   <a:tcPr marL="63500" marR="63500" marT="38100" marB="38100" anchor="ctr">
@@ -15823,7 +15977,7 @@
                         <a:buNone/>
                       </a:pPr>
                       <a:r>
-                        <a:rPr lang="en-US" sz="900" dirty="0">
+                        <a:rPr lang="en-US" sz="870" dirty="0">
                           <a:solidFill>
                             <a:srgbClr val="1A2733"/>
                           </a:solidFill>
@@ -15833,14 +15987,14 @@
                         </a:rPr>
                         <a:t>Hộp camera + mục tiêu radar (slide 8)</a:t>
                       </a:r>
-                      <a:endParaRPr lang="en-US" sz="1080" dirty="0"/>
+                      <a:endParaRPr lang="en-US" sz="1050" dirty="0"/>
                     </a:p>
                     <a:p>
                       <a:pPr algn="l" indent="0" marL="0">
                         <a:buNone/>
                       </a:pPr>
                       <a:r>
-                        <a:rPr lang="en-US" sz="760" dirty="0">
+                        <a:rPr lang="en-US" sz="740" dirty="0">
                           <a:solidFill>
                             <a:srgbClr val="5F7183"/>
                           </a:solidFill>
@@ -15850,7 +16004,7 @@
                         </a:rPr>
                         <a:t>相機的框＋雷達的目標（第八張）</a:t>
                       </a:r>
-                      <a:endParaRPr lang="en-US" sz="1080" dirty="0"/>
+                      <a:endParaRPr lang="en-US" sz="1050" dirty="0"/>
                     </a:p>
                   </a:txBody>
                   <a:tcPr marL="63500" marR="63500" marT="38100" marB="38100" anchor="ctr">
@@ -15893,7 +16047,7 @@
                   </a:tcPr>
                 </a:tc>
               </a:tr>
-              <a:tr h="344321">
+              <a:tr h="334568">
                 <a:tc>
                   <a:txBody>
                     <a:bodyPr/>
@@ -15903,7 +16057,7 @@
                         <a:buNone/>
                       </a:pPr>
                       <a:r>
-                        <a:rPr lang="en-US" sz="900" b="1" dirty="0">
+                        <a:rPr lang="en-US" sz="870" b="1" dirty="0">
                           <a:solidFill>
                             <a:srgbClr val="0B1F3A"/>
                           </a:solidFill>
@@ -15913,14 +16067,14 @@
                         </a:rPr>
                         <a:t>Thông tin giữ lại</a:t>
                       </a:r>
-                      <a:endParaRPr lang="en-US" sz="1080" dirty="0"/>
+                      <a:endParaRPr lang="en-US" sz="1050" dirty="0"/>
                     </a:p>
                     <a:p>
                       <a:pPr algn="l" indent="0" marL="0">
                         <a:buNone/>
                       </a:pPr>
                       <a:r>
-                        <a:rPr lang="en-US" sz="760" dirty="0">
+                        <a:rPr lang="en-US" sz="740" dirty="0">
                           <a:solidFill>
                             <a:srgbClr val="5F7183"/>
                           </a:solidFill>
@@ -15930,7 +16084,7 @@
                         </a:rPr>
                         <a:t>留下的資訊</a:t>
                       </a:r>
-                      <a:endParaRPr lang="en-US" sz="1080" dirty="0"/>
+                      <a:endParaRPr lang="en-US" sz="1050" dirty="0"/>
                     </a:p>
                   </a:txBody>
                   <a:tcPr marL="63500" marR="63500" marT="38100" marB="38100" anchor="ctr">
@@ -15981,7 +16135,7 @@
                         <a:buNone/>
                       </a:pPr>
                       <a:r>
-                        <a:rPr lang="en-US" sz="900" dirty="0">
+                        <a:rPr lang="en-US" sz="870" dirty="0">
                           <a:solidFill>
                             <a:srgbClr val="1A2733"/>
                           </a:solidFill>
@@ -15991,14 +16145,14 @@
                         </a:rPr>
                         <a:t>Nhiều nhất</a:t>
                       </a:r>
-                      <a:endParaRPr lang="en-US" sz="1080" dirty="0"/>
+                      <a:endParaRPr lang="en-US" sz="1050" dirty="0"/>
                     </a:p>
                     <a:p>
                       <a:pPr algn="l" indent="0" marL="0">
                         <a:buNone/>
                       </a:pPr>
                       <a:r>
-                        <a:rPr lang="en-US" sz="760" dirty="0">
+                        <a:rPr lang="en-US" sz="740" dirty="0">
                           <a:solidFill>
                             <a:srgbClr val="5F7183"/>
                           </a:solidFill>
@@ -16008,7 +16162,7 @@
                         </a:rPr>
                         <a:t>最多</a:t>
                       </a:r>
-                      <a:endParaRPr lang="en-US" sz="1080" dirty="0"/>
+                      <a:endParaRPr lang="en-US" sz="1050" dirty="0"/>
                     </a:p>
                   </a:txBody>
                   <a:tcPr marL="63500" marR="63500" marT="38100" marB="38100" anchor="ctr">
@@ -16059,7 +16213,7 @@
                         <a:buNone/>
                       </a:pPr>
                       <a:r>
-                        <a:rPr lang="en-US" sz="900" dirty="0">
+                        <a:rPr lang="en-US" sz="870" dirty="0">
                           <a:solidFill>
                             <a:srgbClr val="1A2733"/>
                           </a:solidFill>
@@ -16069,14 +16223,14 @@
                         </a:rPr>
                         <a:t>Vừa</a:t>
                       </a:r>
-                      <a:endParaRPr lang="en-US" sz="1080" dirty="0"/>
+                      <a:endParaRPr lang="en-US" sz="1050" dirty="0"/>
                     </a:p>
                     <a:p>
                       <a:pPr algn="l" indent="0" marL="0">
                         <a:buNone/>
                       </a:pPr>
                       <a:r>
-                        <a:rPr lang="en-US" sz="760" dirty="0">
+                        <a:rPr lang="en-US" sz="740" dirty="0">
                           <a:solidFill>
                             <a:srgbClr val="5F7183"/>
                           </a:solidFill>
@@ -16086,7 +16240,7 @@
                         </a:rPr>
                         <a:t>中等</a:t>
                       </a:r>
-                      <a:endParaRPr lang="en-US" sz="1080" dirty="0"/>
+                      <a:endParaRPr lang="en-US" sz="1050" dirty="0"/>
                     </a:p>
                   </a:txBody>
                   <a:tcPr marL="63500" marR="63500" marT="38100" marB="38100" anchor="ctr">
@@ -16137,7 +16291,7 @@
                         <a:buNone/>
                       </a:pPr>
                       <a:r>
-                        <a:rPr lang="en-US" sz="900" dirty="0">
+                        <a:rPr lang="en-US" sz="870" dirty="0">
                           <a:solidFill>
                             <a:srgbClr val="1A2733"/>
                           </a:solidFill>
@@ -16147,14 +16301,14 @@
                         </a:rPr>
                         <a:t>Ít nhất: cái đã bỏ không lấy lại được</a:t>
                       </a:r>
-                      <a:endParaRPr lang="en-US" sz="1080" dirty="0"/>
+                      <a:endParaRPr lang="en-US" sz="1050" dirty="0"/>
                     </a:p>
                     <a:p>
                       <a:pPr algn="l" indent="0" marL="0">
                         <a:buNone/>
                       </a:pPr>
                       <a:r>
-                        <a:rPr lang="en-US" sz="760" dirty="0">
+                        <a:rPr lang="en-US" sz="740" dirty="0">
                           <a:solidFill>
                             <a:srgbClr val="5F7183"/>
                           </a:solidFill>
@@ -16164,7 +16318,7 @@
                         </a:rPr>
                         <a:t>最少：各自丟掉的拿不回來</a:t>
                       </a:r>
-                      <a:endParaRPr lang="en-US" sz="1080" dirty="0"/>
+                      <a:endParaRPr lang="en-US" sz="1050" dirty="0"/>
                     </a:p>
                   </a:txBody>
                   <a:tcPr marL="63500" marR="63500" marT="38100" marB="38100" anchor="ctr">
@@ -16207,7 +16361,7 @@
                   </a:tcPr>
                 </a:tc>
               </a:tr>
-              <a:tr h="344321">
+              <a:tr h="334568">
                 <a:tc>
                   <a:txBody>
                     <a:bodyPr/>
@@ -16217,7 +16371,7 @@
                         <a:buNone/>
                       </a:pPr>
                       <a:r>
-                        <a:rPr lang="en-US" sz="900" b="1" dirty="0">
+                        <a:rPr lang="en-US" sz="870" b="1" dirty="0">
                           <a:solidFill>
                             <a:srgbClr val="0B1F3A"/>
                           </a:solidFill>
@@ -16227,14 +16381,14 @@
                         </a:rPr>
                         <a:t>Căn chỉnh phải chuẩn</a:t>
                       </a:r>
-                      <a:endParaRPr lang="en-US" sz="1080" dirty="0"/>
+                      <a:endParaRPr lang="en-US" sz="1050" dirty="0"/>
                     </a:p>
                     <a:p>
                       <a:pPr algn="l" indent="0" marL="0">
                         <a:buNone/>
                       </a:pPr>
                       <a:r>
-                        <a:rPr lang="en-US" sz="760" dirty="0">
+                        <a:rPr lang="en-US" sz="740" dirty="0">
                           <a:solidFill>
                             <a:srgbClr val="5F7183"/>
                           </a:solidFill>
@@ -16244,7 +16398,7 @@
                         </a:rPr>
                         <a:t>對齊要多準</a:t>
                       </a:r>
-                      <a:endParaRPr lang="en-US" sz="1080" dirty="0"/>
+                      <a:endParaRPr lang="en-US" sz="1050" dirty="0"/>
                     </a:p>
                   </a:txBody>
                   <a:tcPr marL="63500" marR="63500" marT="38100" marB="38100" anchor="ctr">
@@ -16295,7 +16449,7 @@
                         <a:buNone/>
                       </a:pPr>
                       <a:r>
-                        <a:rPr lang="en-US" sz="900" dirty="0">
+                        <a:rPr lang="en-US" sz="870" dirty="0">
                           <a:solidFill>
                             <a:srgbClr val="1A2733"/>
                           </a:solidFill>
@@ -16303,16 +16457,16 @@
                           <a:ea typeface="Arial" pitchFamily="34" charset="-122"/>
                           <a:cs typeface="Arial" pitchFamily="34" charset="-120"/>
                         </a:rPr>
-                        <a:t>Rất chuẩn (lệch 4° là trượt)</a:t>
+                        <a:t>Rất chuẩn: từng điểm đúng điểm ảnh</a:t>
                       </a:r>
-                      <a:endParaRPr lang="en-US" sz="1080" dirty="0"/>
+                      <a:endParaRPr lang="en-US" sz="1050" dirty="0"/>
                     </a:p>
                     <a:p>
                       <a:pPr algn="l" indent="0" marL="0">
                         <a:buNone/>
                       </a:pPr>
                       <a:r>
-                        <a:rPr lang="en-US" sz="760" dirty="0">
+                        <a:rPr lang="en-US" sz="740" dirty="0">
                           <a:solidFill>
                             <a:srgbClr val="5F7183"/>
                           </a:solidFill>
@@ -16320,9 +16474,9 @@
                           <a:ea typeface="微軟正黑體" pitchFamily="34" charset="-122"/>
                           <a:cs typeface="微軟正黑體" pitchFamily="34" charset="-120"/>
                         </a:rPr>
-                        <a:t>最準（差 4 度就滑掉）</a:t>
+                        <a:t>最準：每個點對到對的像素</a:t>
                       </a:r>
-                      <a:endParaRPr lang="en-US" sz="1080" dirty="0"/>
+                      <a:endParaRPr lang="en-US" sz="1050" dirty="0"/>
                     </a:p>
                   </a:txBody>
                   <a:tcPr marL="63500" marR="63500" marT="38100" marB="38100" anchor="ctr">
@@ -16373,7 +16527,7 @@
                         <a:buNone/>
                       </a:pPr>
                       <a:r>
-                        <a:rPr lang="en-US" sz="900" dirty="0">
+                        <a:rPr lang="en-US" sz="870" dirty="0">
                           <a:solidFill>
                             <a:srgbClr val="1A2733"/>
                           </a:solidFill>
@@ -16381,16 +16535,16 @@
                           <a:ea typeface="Arial" pitchFamily="34" charset="-122"/>
                           <a:cs typeface="Arial" pitchFamily="34" charset="-120"/>
                         </a:rPr>
-                        <a:t>Vừa</a:t>
+                        <a:t>Vừa: đúng cùng một ô</a:t>
                       </a:r>
-                      <a:endParaRPr lang="en-US" sz="1080" dirty="0"/>
+                      <a:endParaRPr lang="en-US" sz="1050" dirty="0"/>
                     </a:p>
                     <a:p>
                       <a:pPr algn="l" indent="0" marL="0">
                         <a:buNone/>
                       </a:pPr>
                       <a:r>
-                        <a:rPr lang="en-US" sz="760" dirty="0">
+                        <a:rPr lang="en-US" sz="740" dirty="0">
                           <a:solidFill>
                             <a:srgbClr val="5F7183"/>
                           </a:solidFill>
@@ -16398,9 +16552,9 @@
                           <a:ea typeface="微軟正黑體" pitchFamily="34" charset="-122"/>
                           <a:cs typeface="微軟正黑體" pitchFamily="34" charset="-120"/>
                         </a:rPr>
-                        <a:t>中等</a:t>
+                        <a:t>中等：對到同一格就好</a:t>
                       </a:r>
-                      <a:endParaRPr lang="en-US" sz="1080" dirty="0"/>
+                      <a:endParaRPr lang="en-US" sz="1050" dirty="0"/>
                     </a:p>
                   </a:txBody>
                   <a:tcPr marL="63500" marR="63500" marT="38100" marB="38100" anchor="ctr">
@@ -16451,7 +16605,7 @@
                         <a:buNone/>
                       </a:pPr>
                       <a:r>
-                        <a:rPr lang="en-US" sz="900" dirty="0">
+                        <a:rPr lang="en-US" sz="870" dirty="0">
                           <a:solidFill>
                             <a:srgbClr val="1A2733"/>
                           </a:solidFill>
@@ -16461,14 +16615,14 @@
                         </a:rPr>
                         <a:t>Dễ hơn: ghép đúng vật là được</a:t>
                       </a:r>
-                      <a:endParaRPr lang="en-US" sz="1080" dirty="0"/>
+                      <a:endParaRPr lang="en-US" sz="1050" dirty="0"/>
                     </a:p>
                     <a:p>
                       <a:pPr algn="l" indent="0" marL="0">
                         <a:buNone/>
                       </a:pPr>
                       <a:r>
-                        <a:rPr lang="en-US" sz="760" dirty="0">
+                        <a:rPr lang="en-US" sz="740" dirty="0">
                           <a:solidFill>
                             <a:srgbClr val="5F7183"/>
                           </a:solidFill>
@@ -16478,7 +16632,7 @@
                         </a:rPr>
                         <a:t>較寬鬆：對到同一個物體就好</a:t>
                       </a:r>
-                      <a:endParaRPr lang="en-US" sz="1080" dirty="0"/>
+                      <a:endParaRPr lang="en-US" sz="1050" dirty="0"/>
                     </a:p>
                   </a:txBody>
                   <a:tcPr marL="63500" marR="63500" marT="38100" marB="38100" anchor="ctr">
@@ -16521,7 +16675,7 @@
                   </a:tcPr>
                 </a:tc>
               </a:tr>
-              <a:tr h="344321">
+              <a:tr h="334568">
                 <a:tc>
                   <a:txBody>
                     <a:bodyPr/>
@@ -16531,7 +16685,7 @@
                         <a:buNone/>
                       </a:pPr>
                       <a:r>
-                        <a:rPr lang="en-US" sz="900" b="1" dirty="0">
+                        <a:rPr lang="en-US" sz="870" b="1" dirty="0">
                           <a:solidFill>
                             <a:srgbClr val="0B1F3A"/>
                           </a:solidFill>
@@ -16541,14 +16695,14 @@
                         </a:rPr>
                         <a:t>Hỏng một cái</a:t>
                       </a:r>
-                      <a:endParaRPr lang="en-US" sz="1080" dirty="0"/>
+                      <a:endParaRPr lang="en-US" sz="1050" dirty="0"/>
                     </a:p>
                     <a:p>
                       <a:pPr algn="l" indent="0" marL="0">
                         <a:buNone/>
                       </a:pPr>
                       <a:r>
-                        <a:rPr lang="en-US" sz="760" dirty="0">
+                        <a:rPr lang="en-US" sz="740" dirty="0">
                           <a:solidFill>
                             <a:srgbClr val="5F7183"/>
                           </a:solidFill>
@@ -16558,7 +16712,7 @@
                         </a:rPr>
                         <a:t>壞一顆的時候</a:t>
                       </a:r>
-                      <a:endParaRPr lang="en-US" sz="1080" dirty="0"/>
+                      <a:endParaRPr lang="en-US" sz="1050" dirty="0"/>
                     </a:p>
                   </a:txBody>
                   <a:tcPr marL="63500" marR="63500" marT="38100" marB="38100" anchor="ctr">
@@ -16609,7 +16763,7 @@
                         <a:buNone/>
                       </a:pPr>
                       <a:r>
-                        <a:rPr lang="en-US" sz="900" dirty="0">
+                        <a:rPr lang="en-US" sz="870" dirty="0">
                           <a:solidFill>
                             <a:srgbClr val="1A2733"/>
                           </a:solidFill>
@@ -16619,14 +16773,14 @@
                         </a:rPr>
                         <a:t>Ảnh hưởng nhiều nhất</a:t>
                       </a:r>
-                      <a:endParaRPr lang="en-US" sz="1080" dirty="0"/>
+                      <a:endParaRPr lang="en-US" sz="1050" dirty="0"/>
                     </a:p>
                     <a:p>
                       <a:pPr algn="l" indent="0" marL="0">
                         <a:buNone/>
                       </a:pPr>
                       <a:r>
-                        <a:rPr lang="en-US" sz="760" dirty="0">
+                        <a:rPr lang="en-US" sz="740" dirty="0">
                           <a:solidFill>
                             <a:srgbClr val="5F7183"/>
                           </a:solidFill>
@@ -16636,7 +16790,7 @@
                         </a:rPr>
                         <a:t>影響最大</a:t>
                       </a:r>
-                      <a:endParaRPr lang="en-US" sz="1080" dirty="0"/>
+                      <a:endParaRPr lang="en-US" sz="1050" dirty="0"/>
                     </a:p>
                   </a:txBody>
                   <a:tcPr marL="63500" marR="63500" marT="38100" marB="38100" anchor="ctr">
@@ -16687,7 +16841,7 @@
                         <a:buNone/>
                       </a:pPr>
                       <a:r>
-                        <a:rPr lang="en-US" sz="900" dirty="0">
+                        <a:rPr lang="en-US" sz="870" dirty="0">
                           <a:solidFill>
                             <a:srgbClr val="1A2733"/>
                           </a:solidFill>
@@ -16697,14 +16851,14 @@
                         </a:rPr>
                         <a:t>Vừa</a:t>
                       </a:r>
-                      <a:endParaRPr lang="en-US" sz="1080" dirty="0"/>
+                      <a:endParaRPr lang="en-US" sz="1050" dirty="0"/>
                     </a:p>
                     <a:p>
                       <a:pPr algn="l" indent="0" marL="0">
                         <a:buNone/>
                       </a:pPr>
                       <a:r>
-                        <a:rPr lang="en-US" sz="760" dirty="0">
+                        <a:rPr lang="en-US" sz="740" dirty="0">
                           <a:solidFill>
                             <a:srgbClr val="5F7183"/>
                           </a:solidFill>
@@ -16714,7 +16868,7 @@
                         </a:rPr>
                         <a:t>中等</a:t>
                       </a:r>
-                      <a:endParaRPr lang="en-US" sz="1080" dirty="0"/>
+                      <a:endParaRPr lang="en-US" sz="1050" dirty="0"/>
                     </a:p>
                   </a:txBody>
                   <a:tcPr marL="63500" marR="63500" marT="38100" marB="38100" anchor="ctr">
@@ -16765,7 +16919,7 @@
                         <a:buNone/>
                       </a:pPr>
                       <a:r>
-                        <a:rPr lang="en-US" sz="900" dirty="0">
+                        <a:rPr lang="en-US" sz="870" dirty="0">
                           <a:solidFill>
                             <a:srgbClr val="1A2733"/>
                           </a:solidFill>
@@ -16775,14 +16929,14 @@
                         </a:rPr>
                         <a:t>Dễ thay, danh sách kia vẫn còn</a:t>
                       </a:r>
-                      <a:endParaRPr lang="en-US" sz="1080" dirty="0"/>
+                      <a:endParaRPr lang="en-US" sz="1050" dirty="0"/>
                     </a:p>
                     <a:p>
                       <a:pPr algn="l" indent="0" marL="0">
                         <a:buNone/>
                       </a:pPr>
                       <a:r>
-                        <a:rPr lang="en-US" sz="760" dirty="0">
+                        <a:rPr lang="en-US" sz="740" dirty="0">
                           <a:solidFill>
                             <a:srgbClr val="5F7183"/>
                           </a:solidFill>
@@ -16792,7 +16946,7 @@
                         </a:rPr>
                         <a:t>最好處理，另一份清單還在</a:t>
                       </a:r>
-                      <a:endParaRPr lang="en-US" sz="1080" dirty="0"/>
+                      <a:endParaRPr lang="en-US" sz="1050" dirty="0"/>
                     </a:p>
                   </a:txBody>
                   <a:tcPr marL="63500" marR="63500" marT="38100" marB="38100" anchor="ctr">
@@ -16835,7 +16989,7 @@
                   </a:tcPr>
                 </a:tc>
               </a:tr>
-              <a:tr h="344321">
+              <a:tr h="334568">
                 <a:tc>
                   <a:txBody>
                     <a:bodyPr/>
@@ -16845,7 +16999,7 @@
                         <a:buNone/>
                       </a:pPr>
                       <a:r>
-                        <a:rPr lang="en-US" sz="900" b="1" dirty="0">
+                        <a:rPr lang="en-US" sz="870" b="1" dirty="0">
                           <a:solidFill>
                             <a:srgbClr val="0B1F3A"/>
                           </a:solidFill>
@@ -16855,14 +17009,14 @@
                         </a:rPr>
                         <a:t>Lượng dữ liệu phải tính</a:t>
                       </a:r>
-                      <a:endParaRPr lang="en-US" sz="1080" dirty="0"/>
+                      <a:endParaRPr lang="en-US" sz="1050" dirty="0"/>
                     </a:p>
                     <a:p>
                       <a:pPr algn="l" indent="0" marL="0">
                         <a:buNone/>
                       </a:pPr>
                       <a:r>
-                        <a:rPr lang="en-US" sz="760" dirty="0">
+                        <a:rPr lang="en-US" sz="740" dirty="0">
                           <a:solidFill>
                             <a:srgbClr val="5F7183"/>
                           </a:solidFill>
@@ -16872,7 +17026,7 @@
                         </a:rPr>
                         <a:t>要處理的資料量</a:t>
                       </a:r>
-                      <a:endParaRPr lang="en-US" sz="1080" dirty="0"/>
+                      <a:endParaRPr lang="en-US" sz="1050" dirty="0"/>
                     </a:p>
                   </a:txBody>
                   <a:tcPr marL="63500" marR="63500" marT="38100" marB="38100" anchor="ctr">
@@ -16923,7 +17077,7 @@
                         <a:buNone/>
                       </a:pPr>
                       <a:r>
-                        <a:rPr lang="en-US" sz="900" dirty="0">
+                        <a:rPr lang="en-US" sz="870" dirty="0">
                           <a:solidFill>
                             <a:srgbClr val="1A2733"/>
                           </a:solidFill>
@@ -16933,14 +17087,14 @@
                         </a:rPr>
                         <a:t>Lớn nhất</a:t>
                       </a:r>
-                      <a:endParaRPr lang="en-US" sz="1080" dirty="0"/>
+                      <a:endParaRPr lang="en-US" sz="1050" dirty="0"/>
                     </a:p>
                     <a:p>
                       <a:pPr algn="l" indent="0" marL="0">
                         <a:buNone/>
                       </a:pPr>
                       <a:r>
-                        <a:rPr lang="en-US" sz="760" dirty="0">
+                        <a:rPr lang="en-US" sz="740" dirty="0">
                           <a:solidFill>
                             <a:srgbClr val="5F7183"/>
                           </a:solidFill>
@@ -16950,7 +17104,7 @@
                         </a:rPr>
                         <a:t>最大</a:t>
                       </a:r>
-                      <a:endParaRPr lang="en-US" sz="1080" dirty="0"/>
+                      <a:endParaRPr lang="en-US" sz="1050" dirty="0"/>
                     </a:p>
                   </a:txBody>
                   <a:tcPr marL="63500" marR="63500" marT="38100" marB="38100" anchor="ctr">
@@ -17001,7 +17155,7 @@
                         <a:buNone/>
                       </a:pPr>
                       <a:r>
-                        <a:rPr lang="en-US" sz="900" dirty="0">
+                        <a:rPr lang="en-US" sz="870" dirty="0">
                           <a:solidFill>
                             <a:srgbClr val="1A2733"/>
                           </a:solidFill>
@@ -17011,14 +17165,14 @@
                         </a:rPr>
                         <a:t>Vừa</a:t>
                       </a:r>
-                      <a:endParaRPr lang="en-US" sz="1080" dirty="0"/>
+                      <a:endParaRPr lang="en-US" sz="1050" dirty="0"/>
                     </a:p>
                     <a:p>
                       <a:pPr algn="l" indent="0" marL="0">
                         <a:buNone/>
                       </a:pPr>
                       <a:r>
-                        <a:rPr lang="en-US" sz="760" dirty="0">
+                        <a:rPr lang="en-US" sz="740" dirty="0">
                           <a:solidFill>
                             <a:srgbClr val="5F7183"/>
                           </a:solidFill>
@@ -17028,7 +17182,7 @@
                         </a:rPr>
                         <a:t>中等</a:t>
                       </a:r>
-                      <a:endParaRPr lang="en-US" sz="1080" dirty="0"/>
+                      <a:endParaRPr lang="en-US" sz="1050" dirty="0"/>
                     </a:p>
                   </a:txBody>
                   <a:tcPr marL="63500" marR="63500" marT="38100" marB="38100" anchor="ctr">
@@ -17079,7 +17233,7 @@
                         <a:buNone/>
                       </a:pPr>
                       <a:r>
-                        <a:rPr lang="en-US" sz="900" dirty="0">
+                        <a:rPr lang="en-US" sz="870" dirty="0">
                           <a:solidFill>
                             <a:srgbClr val="1A2733"/>
                           </a:solidFill>
@@ -17089,14 +17243,14 @@
                         </a:rPr>
                         <a:t>Nhỏ nhất</a:t>
                       </a:r>
-                      <a:endParaRPr lang="en-US" sz="1080" dirty="0"/>
+                      <a:endParaRPr lang="en-US" sz="1050" dirty="0"/>
                     </a:p>
                     <a:p>
                       <a:pPr algn="l" indent="0" marL="0">
                         <a:buNone/>
                       </a:pPr>
                       <a:r>
-                        <a:rPr lang="en-US" sz="760" dirty="0">
+                        <a:rPr lang="en-US" sz="740" dirty="0">
                           <a:solidFill>
                             <a:srgbClr val="5F7183"/>
                           </a:solidFill>
@@ -17106,7 +17260,7 @@
                         </a:rPr>
                         <a:t>最小</a:t>
                       </a:r>
-                      <a:endParaRPr lang="en-US" sz="1080" dirty="0"/>
+                      <a:endParaRPr lang="en-US" sz="1050" dirty="0"/>
                     </a:p>
                   </a:txBody>
                   <a:tcPr marL="63500" marR="63500" marT="38100" marB="38100" anchor="ctr">
@@ -17161,8 +17315,8 @@
         </p:nvSpPr>
         <p:spPr>
           <a:xfrm>
-            <a:off x="923842" y="4219245"/>
-            <a:ext cx="7296316" cy="409905"/>
+            <a:off x="1027176" y="4230855"/>
+            <a:ext cx="7089648" cy="398295"/>
           </a:xfrm>
           <a:prstGeom prst="rect">
             <a:avLst/>
@@ -17181,7 +17335,7 @@
               <a:buNone/>
             </a:pPr>
             <a:r>
-              <a:rPr lang="en-US" sz="1080" b="1" dirty="0">
+              <a:rPr lang="en-US" sz="1050" b="1" dirty="0">
                 <a:solidFill>
                   <a:srgbClr val="007F72"/>
                 </a:solidFill>
@@ -17191,7 +17345,7 @@
               </a:rPr>
               <a:t>Giữ càng nhiều thông tin thì càng phải căn chỉnh chuẩn: không có cách nào thắng ở mọi hàng.</a:t>
             </a:r>
-            <a:endParaRPr lang="en-US" sz="1080" dirty="0"/>
+            <a:endParaRPr lang="en-US" sz="1050" dirty="0"/>
           </a:p>
           <a:p>
             <a:pPr indent="0" marL="0">
@@ -17201,7 +17355,7 @@
               <a:buNone/>
             </a:pPr>
             <a:r>
-              <a:rPr lang="en-US" sz="990" dirty="0">
+              <a:rPr lang="en-US" sz="960" dirty="0">
                 <a:solidFill>
                   <a:srgbClr val="007F72"/>
                 </a:solidFill>
@@ -17211,7 +17365,7 @@
               </a:rPr>
               <a:t>留下的資訊愈多，對齊就要愈準：沒有一種在每一列都贏。</a:t>
             </a:r>
-            <a:endParaRPr lang="en-US" sz="1080" dirty="0"/>
+            <a:endParaRPr lang="en-US" sz="1050" dirty="0"/>
           </a:p>
         </p:txBody>
       </p:sp>
@@ -17247,8 +17401,8 @@
         </p:nvSpPr>
         <p:spPr>
           <a:xfrm>
-            <a:off x="571323" y="114774"/>
-            <a:ext cx="737830" cy="229547"/>
+            <a:off x="684643" y="111523"/>
+            <a:ext cx="716931" cy="223045"/>
           </a:xfrm>
           <a:prstGeom prst="rect">
             <a:avLst/>
@@ -17264,7 +17418,7 @@
               <a:buNone/>
             </a:pPr>
             <a:r>
-              <a:rPr lang="en-US" sz="810" dirty="0">
+              <a:rPr lang="en-US" sz="780" dirty="0">
                 <a:solidFill>
                   <a:srgbClr val="5F7183"/>
                 </a:solidFill>
@@ -17274,7 +17428,7 @@
               </a:rPr>
               <a:t>7 / 13</a:t>
             </a:r>
-            <a:endParaRPr lang="en-US" sz="810" dirty="0"/>
+            <a:endParaRPr lang="en-US" sz="780" dirty="0"/>
           </a:p>
         </p:txBody>
       </p:sp>
@@ -17286,8 +17440,8 @@
         </p:nvSpPr>
         <p:spPr>
           <a:xfrm>
-            <a:off x="1333747" y="114774"/>
-            <a:ext cx="1803584" cy="229547"/>
+            <a:off x="1425471" y="111523"/>
+            <a:ext cx="1752497" cy="223045"/>
           </a:xfrm>
           <a:prstGeom prst="rect">
             <a:avLst/>
@@ -17303,7 +17457,7 @@
               <a:buNone/>
             </a:pPr>
             <a:r>
-              <a:rPr lang="en-US" sz="810" dirty="0">
+              <a:rPr lang="en-US" sz="780" dirty="0">
                 <a:solidFill>
                   <a:srgbClr val="5F7183"/>
                 </a:solidFill>
@@ -17313,7 +17467,7 @@
               </a:rPr>
               <a:t>Tiết 2 · 第 2 節</a:t>
             </a:r>
-            <a:endParaRPr lang="en-US" sz="810" dirty="0"/>
+            <a:endParaRPr lang="en-US" sz="780" dirty="0"/>
           </a:p>
         </p:txBody>
       </p:sp>

--- a/第七週(10-22)/第七週_第2節_簡報.pptx
+++ b/第七週(10-22)/第七週_第2節_簡報.pptx
@@ -5928,11 +5928,11 @@
                 <a:spcPts val="0"/>
               </a:spcBef>
               <a:spcAft>
-                <a:spcPts val="225"/>
+                <a:spcPts val="175"/>
               </a:spcAft>
             </a:pPr>
             <a:r>
-              <a:rPr sz="1350" b="1" lang="zh-TW" dirty="0">
+              <a:rPr sz="1050" b="1" lang="zh-TW" dirty="0">
                 <a:solidFill>
                   <a:srgbClr val="000000"/>
                 </a:solidFill>
@@ -5943,15 +5943,15 @@
               <a:t>這一張的目的：</a:t>
             </a:r>
             <a:r>
-              <a:rPr sz="1350" lang="zh-TW" dirty="0">
-                <a:solidFill>
-                  <a:srgbClr val="000000"/>
-                </a:solidFill>
-                <a:latin typeface="Arial Unicode MS"/>
-                <a:ea typeface="Arial Unicode MS"/>
-                <a:cs typeface="Arial Unicode MS"/>
-              </a:rPr>
-              <a:t>讓大家知道，後期融合最關鍵的一步是「對應」，把雷達的點對到相機的框上。
+              <a:rPr sz="1050" lang="zh-TW" dirty="0">
+                <a:solidFill>
+                  <a:srgbClr val="000000"/>
+                </a:solidFill>
+                <a:latin typeface="Arial Unicode MS"/>
+                <a:ea typeface="Arial Unicode MS"/>
+                <a:cs typeface="Arial Unicode MS"/>
+              </a:rPr>
+              <a:t>讓大家知道，每一種融合都要先弄清楚「哪些資料講的是同一個東西」，這叫對應；後期融合的對應要靠判斷、最容易出錯，所以這一張拿它來講。
 </a:t>
             </a:r>
           </a:p>
@@ -5961,41 +5961,41 @@
                 <a:spcPts val="0"/>
               </a:spcBef>
               <a:spcAft>
-                <a:spcPts val="225"/>
+                <a:spcPts val="175"/>
               </a:spcAft>
             </a:pPr>
             <a:r>
-              <a:rPr sz="1350" lang="zh-TW" dirty="0">
-                <a:solidFill>
-                  <a:srgbClr val="000000"/>
-                </a:solidFill>
-                <a:latin typeface="Arial Unicode MS"/>
-                <a:ea typeface="Arial Unicode MS"/>
-                <a:cs typeface="Arial Unicode MS"/>
-              </a:rPr>
-              <a:t>後期融合最關鍵的一步，叫</a:t>
-            </a:r>
-            <a:r>
-              <a:rPr sz="1350" b="1" lang="zh-TW" dirty="0">
-                <a:solidFill>
-                  <a:srgbClr val="000000"/>
-                </a:solidFill>
-                <a:latin typeface="Arial Unicode MS"/>
-                <a:ea typeface="Arial Unicode MS"/>
-                <a:cs typeface="Arial Unicode MS"/>
-              </a:rPr>
-              <a:t>對應</a:t>
-            </a:r>
-            <a:r>
-              <a:rPr sz="1350" lang="zh-TW" dirty="0">
-                <a:solidFill>
-                  <a:srgbClr val="000000"/>
-                </a:solidFill>
-                <a:latin typeface="Arial Unicode MS"/>
-                <a:ea typeface="Arial Unicode MS"/>
-                <a:cs typeface="Arial Unicode MS"/>
-              </a:rPr>
-              <a:t>：雷達的這個點，跟相機的哪一個框，是同一個東西？
+              <a:rPr sz="1050" lang="zh-TW" dirty="0">
+                <a:solidFill>
+                  <a:srgbClr val="000000"/>
+                </a:solidFill>
+                <a:latin typeface="Arial Unicode MS"/>
+                <a:ea typeface="Arial Unicode MS"/>
+                <a:cs typeface="Arial Unicode MS"/>
+              </a:rPr>
+              <a:t>先講清楚：</a:t>
+            </a:r>
+            <a:r>
+              <a:rPr sz="1050" b="1" lang="zh-TW" dirty="0">
+                <a:solidFill>
+                  <a:srgbClr val="000000"/>
+                </a:solidFill>
+                <a:latin typeface="Arial Unicode MS"/>
+                <a:ea typeface="Arial Unicode MS"/>
+                <a:cs typeface="Arial Unicode MS"/>
+              </a:rPr>
+              <a:t>每一種融合都要對應</a:t>
+            </a:r>
+            <a:r>
+              <a:rPr sz="1050" lang="zh-TW" dirty="0">
+                <a:solidFill>
+                  <a:srgbClr val="000000"/>
+                </a:solidFill>
+                <a:latin typeface="Arial Unicode MS"/>
+                <a:ea typeface="Arial Unicode MS"/>
+                <a:cs typeface="Arial Unicode MS"/>
+              </a:rPr>
+              <a:t>，只是對的東西不一樣。
 </a:t>
             </a:r>
           </a:p>
@@ -6005,19 +6005,74 @@
                 <a:spcPts val="0"/>
               </a:spcBef>
               <a:spcAft>
-                <a:spcPts val="225"/>
+                <a:spcPts val="175"/>
               </a:spcAft>
             </a:pPr>
             <a:r>
-              <a:rPr sz="1350" lang="zh-TW" dirty="0">
-                <a:solidFill>
-                  <a:srgbClr val="000000"/>
-                </a:solidFill>
-                <a:latin typeface="Arial Unicode MS"/>
-                <a:ea typeface="Arial Unicode MS"/>
-                <a:cs typeface="Arial Unicode MS"/>
-              </a:rPr>
-              <a:t>就像拿到一張班級照片和一份名單，要把名字對到臉上。對錯了，「時速三十」就被安到另一台車身上。
+              <a:rPr sz="1050" b="1" lang="zh-TW" dirty="0">
+                <a:solidFill>
+                  <a:srgbClr val="000000"/>
+                </a:solidFill>
+                <a:latin typeface="Arial Unicode MS"/>
+                <a:ea typeface="Arial Unicode MS"/>
+                <a:cs typeface="Arial Unicode MS"/>
+              </a:rPr>
+              <a:t>前期融合</a:t>
+            </a:r>
+            <a:r>
+              <a:rPr sz="1050" lang="zh-TW" dirty="0">
+                <a:solidFill>
+                  <a:srgbClr val="000000"/>
+                </a:solidFill>
+                <a:latin typeface="Arial Unicode MS"/>
+                <a:ea typeface="Arial Unicode MS"/>
+                <a:cs typeface="Arial Unicode MS"/>
+              </a:rPr>
+              <a:t>，對的是一個點對一個像素。外參、內參標好了，光達的點落在照片的哪一個像素，是用公式</a:t>
+            </a:r>
+            <a:r>
+              <a:rPr sz="1050" b="1" lang="zh-TW" dirty="0">
+                <a:solidFill>
+                  <a:srgbClr val="000000"/>
+                </a:solidFill>
+                <a:latin typeface="Arial Unicode MS"/>
+                <a:ea typeface="Arial Unicode MS"/>
+                <a:cs typeface="Arial Unicode MS"/>
+              </a:rPr>
+              <a:t>算出來的</a:t>
+            </a:r>
+            <a:r>
+              <a:rPr sz="1050" lang="zh-TW" dirty="0">
+                <a:solidFill>
+                  <a:srgbClr val="000000"/>
+                </a:solidFill>
+                <a:latin typeface="Arial Unicode MS"/>
+                <a:ea typeface="Arial Unicode MS"/>
+                <a:cs typeface="Arial Unicode MS"/>
+              </a:rPr>
+              <a:t>，不用猜。</a:t>
+            </a:r>
+            <a:r>
+              <a:rPr sz="1050" b="1" lang="zh-TW" dirty="0">
+                <a:solidFill>
+                  <a:srgbClr val="000000"/>
+                </a:solidFill>
+                <a:latin typeface="Arial Unicode MS"/>
+                <a:ea typeface="Arial Unicode MS"/>
+                <a:cs typeface="Arial Unicode MS"/>
+              </a:rPr>
+              <a:t>中期融合</a:t>
+            </a:r>
+            <a:r>
+              <a:rPr sz="1050" lang="zh-TW" dirty="0">
+                <a:solidFill>
+                  <a:srgbClr val="000000"/>
+                </a:solidFill>
+                <a:latin typeface="Arial Unicode MS"/>
+                <a:ea typeface="Arial Unicode MS"/>
+                <a:cs typeface="Arial Unicode MS"/>
+              </a:rPr>
+              <a:t>，對的是一格對一格。大家都畫到同一張鳥瞰圖上，同一格就是地上同一塊，也是算出來的，剩下的交給訓練好的網路。
 </a:t>
             </a:r>
           </a:p>
@@ -6027,63 +6082,52 @@
                 <a:spcPts val="0"/>
               </a:spcBef>
               <a:spcAft>
-                <a:spcPts val="225"/>
+                <a:spcPts val="175"/>
               </a:spcAft>
             </a:pPr>
             <a:r>
-              <a:rPr sz="1350" lang="zh-TW" dirty="0">
-                <a:solidFill>
-                  <a:srgbClr val="000000"/>
-                </a:solidFill>
-                <a:latin typeface="Arial Unicode MS"/>
-                <a:ea typeface="Arial Unicode MS"/>
-                <a:cs typeface="Arial Unicode MS"/>
-              </a:rPr>
-              <a:t>看左圖，波士頓的一條街。框是官方標註的物體，紅圈是雷達點。</a:t>
-            </a:r>
-            <a:r>
-              <a:rPr sz="1350" b="1" lang="zh-TW" dirty="0">
-                <a:solidFill>
-                  <a:srgbClr val="000000"/>
-                </a:solidFill>
-                <a:latin typeface="Arial Unicode MS"/>
-                <a:ea typeface="Arial Unicode MS"/>
-                <a:cs typeface="Arial Unicode MS"/>
-              </a:rPr>
-              <a:t>綠框</a:t>
-            </a:r>
-            <a:r>
-              <a:rPr sz="1350" lang="zh-TW" dirty="0">
-                <a:solidFill>
-                  <a:srgbClr val="000000"/>
-                </a:solidFill>
-                <a:latin typeface="Arial Unicode MS"/>
-                <a:ea typeface="Arial Unicode MS"/>
-                <a:cs typeface="Arial Unicode MS"/>
-              </a:rPr>
-              <a:t>，是框裡至少有一個雷達點的：路邊停的那幾台車，框裡都有紅圈。</a:t>
-            </a:r>
-            <a:r>
-              <a:rPr sz="1350" b="1" lang="zh-TW" dirty="0">
-                <a:solidFill>
-                  <a:srgbClr val="000000"/>
-                </a:solidFill>
-                <a:latin typeface="Arial Unicode MS"/>
-                <a:ea typeface="Arial Unicode MS"/>
-                <a:cs typeface="Arial Unicode MS"/>
-              </a:rPr>
-              <a:t>黃框</a:t>
-            </a:r>
-            <a:r>
-              <a:rPr sz="1350" lang="zh-TW" dirty="0">
-                <a:solidFill>
-                  <a:srgbClr val="000000"/>
-                </a:solidFill>
-                <a:latin typeface="Arial Unicode MS"/>
-                <a:ea typeface="Arial Unicode MS"/>
-                <a:cs typeface="Arial Unicode MS"/>
-              </a:rPr>
-              <a:t>，是一個雷達點都沒有的：四個行人，和好幾台遠處的車，大多在四十五公尺以外。這跟上一節那張統計表一樣：雷達抓得到近處的車，抓不太到人，車子一遠也開始漏。
+              <a:rPr sz="1050" b="1" lang="zh-TW" dirty="0">
+                <a:solidFill>
+                  <a:srgbClr val="000000"/>
+                </a:solidFill>
+                <a:latin typeface="Arial Unicode MS"/>
+                <a:ea typeface="Arial Unicode MS"/>
+                <a:cs typeface="Arial Unicode MS"/>
+              </a:rPr>
+              <a:t>後期融合</a:t>
+            </a:r>
+            <a:r>
+              <a:rPr sz="1050" lang="zh-TW" dirty="0">
+                <a:solidFill>
+                  <a:srgbClr val="000000"/>
+                </a:solidFill>
+                <a:latin typeface="Arial Unicode MS"/>
+                <a:ea typeface="Arial Unicode MS"/>
+                <a:cs typeface="Arial Unicode MS"/>
+              </a:rPr>
+              <a:t>不一樣。相機交出一張框的清單，雷達交出一張目標的清單，兩張清單上的東西誰配誰，沒有公式可以直接算，要</a:t>
+            </a:r>
+            <a:r>
+              <a:rPr sz="1050" b="1" lang="zh-TW" dirty="0">
+                <a:solidFill>
+                  <a:srgbClr val="000000"/>
+                </a:solidFill>
+                <a:latin typeface="Arial Unicode MS"/>
+                <a:ea typeface="Arial Unicode MS"/>
+                <a:cs typeface="Arial Unicode MS"/>
+              </a:rPr>
+              <a:t>判斷</a:t>
+            </a:r>
+            <a:r>
+              <a:rPr sz="1050" lang="zh-TW" dirty="0">
+                <a:solidFill>
+                  <a:srgbClr val="000000"/>
+                </a:solidFill>
+                <a:latin typeface="Arial Unicode MS"/>
+                <a:ea typeface="Arial Unicode MS"/>
+                <a:cs typeface="Arial Unicode MS"/>
+              </a:rPr>
+              <a:t>。兩台車靠得很近、雷達點剛好落在兩個框中間、路邊多出一排不屬於任何框的點，都要做決定。所以對應在後期融合最明顯，也最容易出錯。
 </a:t>
             </a:r>
           </a:p>
@@ -6093,41 +6137,41 @@
                 <a:spcPts val="0"/>
               </a:spcBef>
               <a:spcAft>
-                <a:spcPts val="225"/>
+                <a:spcPts val="175"/>
               </a:spcAft>
             </a:pPr>
             <a:r>
-              <a:rPr sz="1350" lang="zh-TW" dirty="0">
-                <a:solidFill>
-                  <a:srgbClr val="000000"/>
-                </a:solidFill>
-                <a:latin typeface="Arial Unicode MS"/>
-                <a:ea typeface="Arial Unicode MS"/>
-                <a:cs typeface="Arial Unicode MS"/>
-              </a:rPr>
-              <a:t>再看路的右邊，有一長排紅圈，排在人行道旁邊，沒有任何框。那多半是路邊的東西，可能是欄杆、樹、號誌桿。這些點不屬於任何一台標註的物體，對應的時候要</a:t>
-            </a:r>
-            <a:r>
-              <a:rPr sz="1350" b="1" lang="zh-TW" dirty="0">
-                <a:solidFill>
-                  <a:srgbClr val="000000"/>
-                </a:solidFill>
-                <a:latin typeface="Arial Unicode MS"/>
-                <a:ea typeface="Arial Unicode MS"/>
-                <a:cs typeface="Arial Unicode MS"/>
-              </a:rPr>
-              <a:t>正確地丟掉</a:t>
-            </a:r>
-            <a:r>
-              <a:rPr sz="1350" lang="zh-TW" dirty="0">
-                <a:solidFill>
-                  <a:srgbClr val="000000"/>
-                </a:solidFill>
-                <a:latin typeface="Arial Unicode MS"/>
-                <a:ea typeface="Arial Unicode MS"/>
-                <a:cs typeface="Arial Unicode MS"/>
-              </a:rPr>
-              <a:t>，不然就變成上一節講的幽靈煞車。
+              <a:rPr sz="1050" lang="zh-TW" dirty="0">
+                <a:solidFill>
+                  <a:srgbClr val="000000"/>
+                </a:solidFill>
+                <a:latin typeface="Arial Unicode MS"/>
+                <a:ea typeface="Arial Unicode MS"/>
+                <a:cs typeface="Arial Unicode MS"/>
+              </a:rPr>
+              <a:t>還有一種對應，每一種融合都逃不掉：</a:t>
+            </a:r>
+            <a:r>
+              <a:rPr sz="1050" b="1" lang="zh-TW" dirty="0">
+                <a:solidFill>
+                  <a:srgbClr val="000000"/>
+                </a:solidFill>
+                <a:latin typeface="Arial Unicode MS"/>
+                <a:ea typeface="Arial Unicode MS"/>
+                <a:cs typeface="Arial Unicode MS"/>
+              </a:rPr>
+              <a:t>前後兩格之間</a:t>
+            </a:r>
+            <a:r>
+              <a:rPr sz="1050" lang="zh-TW" dirty="0">
+                <a:solidFill>
+                  <a:srgbClr val="000000"/>
+                </a:solidFill>
+                <a:latin typeface="Arial Unicode MS"/>
+                <a:ea typeface="Arial Unicode MS"/>
+                <a:cs typeface="Arial Unicode MS"/>
+              </a:rPr>
+              <a:t>。這一格的這台車，是不是上一格那一台？這叫追蹤，第三節任務五的第 13 題會用到。
 </a:t>
             </a:r>
           </a:p>
@@ -6137,63 +6181,19 @@
                 <a:spcPts val="0"/>
               </a:spcBef>
               <a:spcAft>
-                <a:spcPts val="225"/>
+                <a:spcPts val="175"/>
               </a:spcAft>
             </a:pPr>
             <a:r>
-              <a:rPr sz="1350" lang="zh-TW" dirty="0">
-                <a:solidFill>
-                  <a:srgbClr val="000000"/>
-                </a:solidFill>
-                <a:latin typeface="Arial Unicode MS"/>
-                <a:ea typeface="Arial Unicode MS"/>
-                <a:cs typeface="Arial Unicode MS"/>
-              </a:rPr>
-              <a:t>怎麼對？最簡單的就是看</a:t>
-            </a:r>
-            <a:r>
-              <a:rPr sz="1350" b="1" lang="zh-TW" dirty="0">
-                <a:solidFill>
-                  <a:srgbClr val="000000"/>
-                </a:solidFill>
-                <a:latin typeface="Arial Unicode MS"/>
-                <a:ea typeface="Arial Unicode MS"/>
-                <a:cs typeface="Arial Unicode MS"/>
-              </a:rPr>
-              <a:t>位置</a:t>
-            </a:r>
-            <a:r>
-              <a:rPr sz="1350" lang="zh-TW" dirty="0">
-                <a:solidFill>
-                  <a:srgbClr val="000000"/>
-                </a:solidFill>
-                <a:latin typeface="Arial Unicode MS"/>
-                <a:ea typeface="Arial Unicode MS"/>
-                <a:cs typeface="Arial Unicode MS"/>
-              </a:rPr>
-              <a:t>：雷達點落在哪個框附近，就算它的。再加上</a:t>
-            </a:r>
-            <a:r>
-              <a:rPr sz="1350" b="1" lang="zh-TW" dirty="0">
-                <a:solidFill>
-                  <a:srgbClr val="000000"/>
-                </a:solidFill>
-                <a:latin typeface="Arial Unicode MS"/>
-                <a:ea typeface="Arial Unicode MS"/>
-                <a:cs typeface="Arial Unicode MS"/>
-              </a:rPr>
-              <a:t>速度</a:t>
-            </a:r>
-            <a:r>
-              <a:rPr sz="1350" lang="zh-TW" dirty="0">
-                <a:solidFill>
-                  <a:srgbClr val="000000"/>
-                </a:solidFill>
-                <a:latin typeface="Arial Unicode MS"/>
-                <a:ea typeface="Arial Unicode MS"/>
-                <a:cs typeface="Arial Unicode MS"/>
-              </a:rPr>
-              <a:t>：雷達量得到速度，一個靜止的點，不會是一台正在開的車。
+              <a:rPr sz="1050" lang="zh-TW" dirty="0">
+                <a:solidFill>
+                  <a:srgbClr val="000000"/>
+                </a:solidFill>
+                <a:latin typeface="Arial Unicode MS"/>
+                <a:ea typeface="Arial Unicode MS"/>
+                <a:cs typeface="Arial Unicode MS"/>
+              </a:rPr>
+              <a:t>回到後期融合：雷達的這個點，跟相機的哪一個框，是同一個東西？
 </a:t>
             </a:r>
           </a:p>
@@ -6203,11 +6203,209 @@
                 <a:spcPts val="0"/>
               </a:spcBef>
               <a:spcAft>
-                <a:spcPts val="225"/>
+                <a:spcPts val="175"/>
               </a:spcAft>
             </a:pPr>
             <a:r>
-              <a:rPr sz="1350" lang="zh-TW" dirty="0">
+              <a:rPr sz="1050" lang="zh-TW" dirty="0">
+                <a:solidFill>
+                  <a:srgbClr val="000000"/>
+                </a:solidFill>
+                <a:latin typeface="Arial Unicode MS"/>
+                <a:ea typeface="Arial Unicode MS"/>
+                <a:cs typeface="Arial Unicode MS"/>
+              </a:rPr>
+              <a:t>就像拿到一張班級照片和一份名單，要把名字對到臉上。對錯了，「時速三十」就被安到另一台車身上。
+</a:t>
+            </a:r>
+          </a:p>
+          <a:p>
+            <a:pPr algn="l">
+              <a:spcBef>
+                <a:spcPts val="0"/>
+              </a:spcBef>
+              <a:spcAft>
+                <a:spcPts val="175"/>
+              </a:spcAft>
+            </a:pPr>
+            <a:r>
+              <a:rPr sz="1050" lang="zh-TW" dirty="0">
+                <a:solidFill>
+                  <a:srgbClr val="000000"/>
+                </a:solidFill>
+                <a:latin typeface="Arial Unicode MS"/>
+                <a:ea typeface="Arial Unicode MS"/>
+                <a:cs typeface="Arial Unicode MS"/>
+              </a:rPr>
+              <a:t>看左圖，波士頓的一條街。框是官方標註的物體，紅圈是雷達點。</a:t>
+            </a:r>
+            <a:r>
+              <a:rPr sz="1050" b="1" lang="zh-TW" dirty="0">
+                <a:solidFill>
+                  <a:srgbClr val="000000"/>
+                </a:solidFill>
+                <a:latin typeface="Arial Unicode MS"/>
+                <a:ea typeface="Arial Unicode MS"/>
+                <a:cs typeface="Arial Unicode MS"/>
+              </a:rPr>
+              <a:t>綠框</a:t>
+            </a:r>
+            <a:r>
+              <a:rPr sz="1050" lang="zh-TW" dirty="0">
+                <a:solidFill>
+                  <a:srgbClr val="000000"/>
+                </a:solidFill>
+                <a:latin typeface="Arial Unicode MS"/>
+                <a:ea typeface="Arial Unicode MS"/>
+                <a:cs typeface="Arial Unicode MS"/>
+              </a:rPr>
+              <a:t>，是框裡至少有一個雷達點的：路邊停的那幾台車，框裡都有紅圈。</a:t>
+            </a:r>
+            <a:r>
+              <a:rPr sz="1050" b="1" lang="zh-TW" dirty="0">
+                <a:solidFill>
+                  <a:srgbClr val="000000"/>
+                </a:solidFill>
+                <a:latin typeface="Arial Unicode MS"/>
+                <a:ea typeface="Arial Unicode MS"/>
+                <a:cs typeface="Arial Unicode MS"/>
+              </a:rPr>
+              <a:t>黃框</a:t>
+            </a:r>
+            <a:r>
+              <a:rPr sz="1050" lang="zh-TW" dirty="0">
+                <a:solidFill>
+                  <a:srgbClr val="000000"/>
+                </a:solidFill>
+                <a:latin typeface="Arial Unicode MS"/>
+                <a:ea typeface="Arial Unicode MS"/>
+                <a:cs typeface="Arial Unicode MS"/>
+              </a:rPr>
+              <a:t>，是一個雷達點都沒有的：四個行人，和好幾台遠處的車，大多在四十五公尺以外。這跟上一節那張統計表一樣：雷達抓得到近處的車，抓不太到人，車子一遠也開始漏。
+</a:t>
+            </a:r>
+          </a:p>
+          <a:p>
+            <a:pPr algn="l">
+              <a:spcBef>
+                <a:spcPts val="0"/>
+              </a:spcBef>
+              <a:spcAft>
+                <a:spcPts val="175"/>
+              </a:spcAft>
+            </a:pPr>
+            <a:r>
+              <a:rPr sz="1050" lang="zh-TW" dirty="0">
+                <a:solidFill>
+                  <a:srgbClr val="000000"/>
+                </a:solidFill>
+                <a:latin typeface="Arial Unicode MS"/>
+                <a:ea typeface="Arial Unicode MS"/>
+                <a:cs typeface="Arial Unicode MS"/>
+              </a:rPr>
+              <a:t>再看路的右邊，有一長排紅圈，排在人行道旁邊，沒有任何框。那多半是路邊的東西，可能是欄杆、樹、號誌桿。這些點不屬於任何一台標註的物體，對應的時候要</a:t>
+            </a:r>
+            <a:r>
+              <a:rPr sz="1050" b="1" lang="zh-TW" dirty="0">
+                <a:solidFill>
+                  <a:srgbClr val="000000"/>
+                </a:solidFill>
+                <a:latin typeface="Arial Unicode MS"/>
+                <a:ea typeface="Arial Unicode MS"/>
+                <a:cs typeface="Arial Unicode MS"/>
+              </a:rPr>
+              <a:t>正確地丟掉</a:t>
+            </a:r>
+            <a:r>
+              <a:rPr sz="1050" lang="zh-TW" dirty="0">
+                <a:solidFill>
+                  <a:srgbClr val="000000"/>
+                </a:solidFill>
+                <a:latin typeface="Arial Unicode MS"/>
+                <a:ea typeface="Arial Unicode MS"/>
+                <a:cs typeface="Arial Unicode MS"/>
+              </a:rPr>
+              <a:t>，不然就變成上一節講的幽靈煞車。
+</a:t>
+            </a:r>
+          </a:p>
+          <a:p>
+            <a:pPr algn="l">
+              <a:spcBef>
+                <a:spcPts val="0"/>
+              </a:spcBef>
+              <a:spcAft>
+                <a:spcPts val="175"/>
+              </a:spcAft>
+            </a:pPr>
+            <a:r>
+              <a:rPr sz="1050" lang="zh-TW" dirty="0">
+                <a:solidFill>
+                  <a:srgbClr val="000000"/>
+                </a:solidFill>
+                <a:latin typeface="Arial Unicode MS"/>
+                <a:ea typeface="Arial Unicode MS"/>
+                <a:cs typeface="Arial Unicode MS"/>
+              </a:rPr>
+              <a:t>怎麼對？最簡單的就是看</a:t>
+            </a:r>
+            <a:r>
+              <a:rPr sz="1050" b="1" lang="zh-TW" dirty="0">
+                <a:solidFill>
+                  <a:srgbClr val="000000"/>
+                </a:solidFill>
+                <a:latin typeface="Arial Unicode MS"/>
+                <a:ea typeface="Arial Unicode MS"/>
+                <a:cs typeface="Arial Unicode MS"/>
+              </a:rPr>
+              <a:t>位置</a:t>
+            </a:r>
+            <a:r>
+              <a:rPr sz="1050" lang="zh-TW" dirty="0">
+                <a:solidFill>
+                  <a:srgbClr val="000000"/>
+                </a:solidFill>
+                <a:latin typeface="Arial Unicode MS"/>
+                <a:ea typeface="Arial Unicode MS"/>
+                <a:cs typeface="Arial Unicode MS"/>
+              </a:rPr>
+              <a:t>：雷達點落在哪個框附近，就算它的。再加上</a:t>
+            </a:r>
+            <a:r>
+              <a:rPr sz="1050" b="1" lang="zh-TW" dirty="0">
+                <a:solidFill>
+                  <a:srgbClr val="000000"/>
+                </a:solidFill>
+                <a:latin typeface="Arial Unicode MS"/>
+                <a:ea typeface="Arial Unicode MS"/>
+                <a:cs typeface="Arial Unicode MS"/>
+              </a:rPr>
+              <a:t>速度</a:t>
+            </a:r>
+            <a:r>
+              <a:rPr sz="1050" lang="zh-TW" dirty="0">
+                <a:solidFill>
+                  <a:srgbClr val="000000"/>
+                </a:solidFill>
+                <a:latin typeface="Arial Unicode MS"/>
+                <a:ea typeface="Arial Unicode MS"/>
+                <a:cs typeface="Arial Unicode MS"/>
+              </a:rPr>
+              <a:t>：雷達量得到速度，一個靜止的點，不會是一台正在開的車。
+</a:t>
+            </a:r>
+          </a:p>
+          <a:p>
+            <a:pPr algn="l">
+              <a:spcBef>
+                <a:spcPts val="0"/>
+              </a:spcBef>
+              <a:spcAft>
+                <a:spcPts val="175"/>
+              </a:spcAft>
+            </a:pPr>
+            <a:r>
+              <a:rPr sz="1050" lang="zh-TW" dirty="0">
                 <a:solidFill>
                   <a:srgbClr val="000000"/>
                 </a:solidFill>
@@ -6218,7 +6416,7 @@
               <a:t>看一支影片，NVIDIA 做自駕晶片的團隊。</a:t>
             </a:r>
             <a:r>
-              <a:rPr sz="1350" b="1" lang="zh-TW" dirty="0">
+              <a:rPr sz="1050" b="1" lang="zh-TW" dirty="0">
                 <a:solidFill>
                   <a:srgbClr val="000000"/>
                 </a:solidFill>
@@ -6229,7 +6427,7 @@
               <a:t>從 0:42 播到 1:30。</a:t>
             </a:r>
             <a:r>
-              <a:rPr sz="1350" lang="zh-TW" dirty="0">
+              <a:rPr sz="1050" lang="zh-TW" dirty="0">
                 <a:solidFill>
                   <a:srgbClr val="000000"/>
                 </a:solidFill>
@@ -6240,7 +6438,7 @@
               <a:t>英文，我邊播邊講。畫面是車子周圍幾台相機拼起來的；</a:t>
             </a:r>
             <a:r>
-              <a:rPr sz="1350" b="1" lang="zh-TW" dirty="0">
+              <a:rPr sz="1050" b="1" lang="zh-TW" dirty="0">
                 <a:solidFill>
                   <a:srgbClr val="000000"/>
                 </a:solidFill>
@@ -6251,7 +6449,7 @@
               <a:t>0:47 小白方塊是雷達追蹤到的目標，橘色的線是它走過的路</a:t>
             </a:r>
             <a:r>
-              <a:rPr sz="1350" lang="zh-TW" dirty="0">
+              <a:rPr sz="1050" lang="zh-TW" dirty="0">
                 <a:solidFill>
                   <a:srgbClr val="000000"/>
                 </a:solidFill>
@@ -6262,7 +6460,7 @@
               <a:t>。</a:t>
             </a:r>
             <a:r>
-              <a:rPr sz="1350" b="1" lang="zh-TW" dirty="0">
+              <a:rPr sz="1050" b="1" lang="zh-TW" dirty="0">
                 <a:solidFill>
                   <a:srgbClr val="000000"/>
                 </a:solidFill>
@@ -6273,7 +6471,7 @@
               <a:t>0:52</a:t>
             </a:r>
             <a:r>
-              <a:rPr sz="1350" lang="zh-TW" dirty="0">
+              <a:rPr sz="1050" lang="zh-TW" dirty="0">
                 <a:solidFill>
                   <a:srgbClr val="000000"/>
                 </a:solidFill>
@@ -6284,7 +6482,7 @@
               <a:t> 旁白說：相機框出來的物體，和雷達的目標對上之後，小方塊會變成綠色。</a:t>
             </a:r>
             <a:r>
-              <a:rPr sz="1350" b="1" lang="zh-TW" dirty="0">
+              <a:rPr sz="1050" b="1" lang="zh-TW" dirty="0">
                 <a:solidFill>
                   <a:srgbClr val="000000"/>
                 </a:solidFill>
@@ -6295,7 +6493,7 @@
               <a:t>0:58</a:t>
             </a:r>
             <a:r>
-              <a:rPr sz="1350" lang="zh-TW" dirty="0">
+              <a:rPr sz="1050" lang="zh-TW" dirty="0">
                 <a:solidFill>
                   <a:srgbClr val="000000"/>
                 </a:solidFill>
@@ -6306,7 +6504,7 @@
               <a:t> 旁白講了融合的好處：位置、速度、加速度，都變得更準、更可靠。</a:t>
             </a:r>
             <a:r>
-              <a:rPr sz="1350" b="1" lang="zh-TW" dirty="0">
+              <a:rPr sz="1050" b="1" lang="zh-TW" dirty="0">
                 <a:solidFill>
                   <a:srgbClr val="000000"/>
                 </a:solidFill>
@@ -6317,7 +6515,7 @@
               <a:t>1:10</a:t>
             </a:r>
             <a:r>
-              <a:rPr sz="1350" lang="zh-TW" dirty="0">
+              <a:rPr sz="1050" lang="zh-TW" dirty="0">
                 <a:solidFill>
                   <a:srgbClr val="000000"/>
                 </a:solidFill>

--- a/第七週(10-22)/第七週_第2節_簡報.pptx
+++ b/第七週(10-22)/第七週_第2節_簡報.pptx
@@ -5928,11 +5928,11 @@
                 <a:spcPts val="0"/>
               </a:spcBef>
               <a:spcAft>
-                <a:spcPts val="175"/>
+                <a:spcPts val="150"/>
               </a:spcAft>
             </a:pPr>
             <a:r>
-              <a:rPr sz="1050" b="1" lang="zh-TW" dirty="0">
+              <a:rPr sz="900" b="1" lang="zh-TW" dirty="0">
                 <a:solidFill>
                   <a:srgbClr val="000000"/>
                 </a:solidFill>
@@ -5943,7 +5943,7 @@
               <a:t>這一張的目的：</a:t>
             </a:r>
             <a:r>
-              <a:rPr sz="1050" lang="zh-TW" dirty="0">
+              <a:rPr sz="900" lang="zh-TW" dirty="0">
                 <a:solidFill>
                   <a:srgbClr val="000000"/>
                 </a:solidFill>
@@ -5961,11 +5961,11 @@
                 <a:spcPts val="0"/>
               </a:spcBef>
               <a:spcAft>
-                <a:spcPts val="175"/>
+                <a:spcPts val="150"/>
               </a:spcAft>
             </a:pPr>
             <a:r>
-              <a:rPr sz="1050" lang="zh-TW" dirty="0">
+              <a:rPr sz="900" lang="zh-TW" dirty="0">
                 <a:solidFill>
                   <a:srgbClr val="000000"/>
                 </a:solidFill>
@@ -5976,7 +5976,7 @@
               <a:t>先講清楚：</a:t>
             </a:r>
             <a:r>
-              <a:rPr sz="1050" b="1" lang="zh-TW" dirty="0">
+              <a:rPr sz="900" b="1" lang="zh-TW" dirty="0">
                 <a:solidFill>
                   <a:srgbClr val="000000"/>
                 </a:solidFill>
@@ -5987,7 +5987,7 @@
               <a:t>每一種融合都要對應</a:t>
             </a:r>
             <a:r>
-              <a:rPr sz="1050" lang="zh-TW" dirty="0">
+              <a:rPr sz="900" lang="zh-TW" dirty="0">
                 <a:solidFill>
                   <a:srgbClr val="000000"/>
                 </a:solidFill>
@@ -6005,11 +6005,11 @@
                 <a:spcPts val="0"/>
               </a:spcBef>
               <a:spcAft>
-                <a:spcPts val="175"/>
+                <a:spcPts val="150"/>
               </a:spcAft>
             </a:pPr>
             <a:r>
-              <a:rPr sz="1050" b="1" lang="zh-TW" dirty="0">
+              <a:rPr sz="900" b="1" lang="zh-TW" dirty="0">
                 <a:solidFill>
                   <a:srgbClr val="000000"/>
                 </a:solidFill>
@@ -6020,7 +6020,7 @@
               <a:t>前期融合</a:t>
             </a:r>
             <a:r>
-              <a:rPr sz="1050" lang="zh-TW" dirty="0">
+              <a:rPr sz="900" lang="zh-TW" dirty="0">
                 <a:solidFill>
                   <a:srgbClr val="000000"/>
                 </a:solidFill>
@@ -6031,7 +6031,7 @@
               <a:t>，對的是一個點對一個像素。外參、內參標好了，光達的點落在照片的哪一個像素，是用公式</a:t>
             </a:r>
             <a:r>
-              <a:rPr sz="1050" b="1" lang="zh-TW" dirty="0">
+              <a:rPr sz="900" b="1" lang="zh-TW" dirty="0">
                 <a:solidFill>
                   <a:srgbClr val="000000"/>
                 </a:solidFill>
@@ -6042,7 +6042,7 @@
               <a:t>算出來的</a:t>
             </a:r>
             <a:r>
-              <a:rPr sz="1050" lang="zh-TW" dirty="0">
+              <a:rPr sz="900" lang="zh-TW" dirty="0">
                 <a:solidFill>
                   <a:srgbClr val="000000"/>
                 </a:solidFill>
@@ -6053,7 +6053,7 @@
               <a:t>，不用猜。</a:t>
             </a:r>
             <a:r>
-              <a:rPr sz="1050" b="1" lang="zh-TW" dirty="0">
+              <a:rPr sz="900" b="1" lang="zh-TW" dirty="0">
                 <a:solidFill>
                   <a:srgbClr val="000000"/>
                 </a:solidFill>
@@ -6064,7 +6064,7 @@
               <a:t>中期融合</a:t>
             </a:r>
             <a:r>
-              <a:rPr sz="1050" lang="zh-TW" dirty="0">
+              <a:rPr sz="900" lang="zh-TW" dirty="0">
                 <a:solidFill>
                   <a:srgbClr val="000000"/>
                 </a:solidFill>
@@ -6082,11 +6082,11 @@
                 <a:spcPts val="0"/>
               </a:spcBef>
               <a:spcAft>
-                <a:spcPts val="175"/>
+                <a:spcPts val="150"/>
               </a:spcAft>
             </a:pPr>
             <a:r>
-              <a:rPr sz="1050" b="1" lang="zh-TW" dirty="0">
+              <a:rPr sz="900" b="1" lang="zh-TW" dirty="0">
                 <a:solidFill>
                   <a:srgbClr val="000000"/>
                 </a:solidFill>
@@ -6097,7 +6097,7 @@
               <a:t>後期融合</a:t>
             </a:r>
             <a:r>
-              <a:rPr sz="1050" lang="zh-TW" dirty="0">
+              <a:rPr sz="900" lang="zh-TW" dirty="0">
                 <a:solidFill>
                   <a:srgbClr val="000000"/>
                 </a:solidFill>
@@ -6108,7 +6108,7 @@
               <a:t>不一樣。相機交出一張框的清單，雷達交出一張目標的清單，兩張清單上的東西誰配誰，沒有公式可以直接算，要</a:t>
             </a:r>
             <a:r>
-              <a:rPr sz="1050" b="1" lang="zh-TW" dirty="0">
+              <a:rPr sz="900" b="1" lang="zh-TW" dirty="0">
                 <a:solidFill>
                   <a:srgbClr val="000000"/>
                 </a:solidFill>
@@ -6119,7 +6119,7 @@
               <a:t>判斷</a:t>
             </a:r>
             <a:r>
-              <a:rPr sz="1050" lang="zh-TW" dirty="0">
+              <a:rPr sz="900" lang="zh-TW" dirty="0">
                 <a:solidFill>
                   <a:srgbClr val="000000"/>
                 </a:solidFill>
@@ -6137,11 +6137,11 @@
                 <a:spcPts val="0"/>
               </a:spcBef>
               <a:spcAft>
-                <a:spcPts val="175"/>
+                <a:spcPts val="150"/>
               </a:spcAft>
             </a:pPr>
             <a:r>
-              <a:rPr sz="1050" lang="zh-TW" dirty="0">
+              <a:rPr sz="900" lang="zh-TW" dirty="0">
                 <a:solidFill>
                   <a:srgbClr val="000000"/>
                 </a:solidFill>
@@ -6152,7 +6152,7 @@
               <a:t>還有一種對應，每一種融合都逃不掉：</a:t>
             </a:r>
             <a:r>
-              <a:rPr sz="1050" b="1" lang="zh-TW" dirty="0">
+              <a:rPr sz="900" b="1" lang="zh-TW" dirty="0">
                 <a:solidFill>
                   <a:srgbClr val="000000"/>
                 </a:solidFill>
@@ -6163,7 +6163,7 @@
               <a:t>前後兩格之間</a:t>
             </a:r>
             <a:r>
-              <a:rPr sz="1050" lang="zh-TW" dirty="0">
+              <a:rPr sz="900" lang="zh-TW" dirty="0">
                 <a:solidFill>
                   <a:srgbClr val="000000"/>
                 </a:solidFill>
@@ -6181,19 +6181,63 @@
                 <a:spcPts val="0"/>
               </a:spcBef>
               <a:spcAft>
-                <a:spcPts val="175"/>
+                <a:spcPts val="150"/>
               </a:spcAft>
             </a:pPr>
             <a:r>
-              <a:rPr sz="1050" lang="zh-TW" dirty="0">
-                <a:solidFill>
-                  <a:srgbClr val="000000"/>
-                </a:solidFill>
-                <a:latin typeface="Arial Unicode MS"/>
-                <a:ea typeface="Arial Unicode MS"/>
-                <a:cs typeface="Arial Unicode MS"/>
-              </a:rPr>
-              <a:t>回到後期融合：雷達的這個點，跟相機的哪一個框，是同一個東西？
+              <a:rPr sz="900" lang="zh-TW" dirty="0">
+                <a:solidFill>
+                  <a:srgbClr val="000000"/>
+                </a:solidFill>
+                <a:latin typeface="Arial Unicode MS"/>
+                <a:ea typeface="Arial Unicode MS"/>
+                <a:cs typeface="Arial Unicode MS"/>
+              </a:rPr>
+              <a:t>回到後期融合：雷達清單上的這個</a:t>
+            </a:r>
+            <a:r>
+              <a:rPr sz="900" b="1" lang="zh-TW" dirty="0">
+                <a:solidFill>
+                  <a:srgbClr val="000000"/>
+                </a:solidFill>
+                <a:latin typeface="Arial Unicode MS"/>
+                <a:ea typeface="Arial Unicode MS"/>
+                <a:cs typeface="Arial Unicode MS"/>
+              </a:rPr>
+              <a:t>目標</a:t>
+            </a:r>
+            <a:r>
+              <a:rPr sz="900" lang="zh-TW" dirty="0">
+                <a:solidFill>
+                  <a:srgbClr val="000000"/>
+                </a:solidFill>
+                <a:latin typeface="Arial Unicode MS"/>
+                <a:ea typeface="Arial Unicode MS"/>
+                <a:cs typeface="Arial Unicode MS"/>
+              </a:rPr>
+              <a:t>，跟相機清單上的哪一個</a:t>
+            </a:r>
+            <a:r>
+              <a:rPr sz="900" b="1" lang="zh-TW" dirty="0">
+                <a:solidFill>
+                  <a:srgbClr val="000000"/>
+                </a:solidFill>
+                <a:latin typeface="Arial Unicode MS"/>
+                <a:ea typeface="Arial Unicode MS"/>
+                <a:cs typeface="Arial Unicode MS"/>
+              </a:rPr>
+              <a:t>框</a:t>
+            </a:r>
+            <a:r>
+              <a:rPr sz="900" lang="zh-TW" dirty="0">
+                <a:solidFill>
+                  <a:srgbClr val="000000"/>
+                </a:solidFill>
+                <a:latin typeface="Arial Unicode MS"/>
+                <a:ea typeface="Arial Unicode MS"/>
+                <a:cs typeface="Arial Unicode MS"/>
+              </a:rPr>
+              <a:t>，是同一個東西？兩邊都已經是物體了，所以是物體對物體。
 </a:t>
             </a:r>
           </a:p>
@@ -6203,11 +6247,11 @@
                 <a:spcPts val="0"/>
               </a:spcBef>
               <a:spcAft>
-                <a:spcPts val="175"/>
+                <a:spcPts val="150"/>
               </a:spcAft>
             </a:pPr>
             <a:r>
-              <a:rPr sz="1050" lang="zh-TW" dirty="0">
+              <a:rPr sz="900" lang="zh-TW" dirty="0">
                 <a:solidFill>
                   <a:srgbClr val="000000"/>
                 </a:solidFill>
@@ -6225,63 +6269,41 @@
                 <a:spcPts val="0"/>
               </a:spcBef>
               <a:spcAft>
-                <a:spcPts val="175"/>
+                <a:spcPts val="150"/>
               </a:spcAft>
             </a:pPr>
             <a:r>
-              <a:rPr sz="1050" lang="zh-TW" dirty="0">
-                <a:solidFill>
-                  <a:srgbClr val="000000"/>
-                </a:solidFill>
-                <a:latin typeface="Arial Unicode MS"/>
-                <a:ea typeface="Arial Unicode MS"/>
-                <a:cs typeface="Arial Unicode MS"/>
-              </a:rPr>
-              <a:t>看左圖，波士頓的一條街。框是官方標註的物體，紅圈是雷達點。</a:t>
-            </a:r>
-            <a:r>
-              <a:rPr sz="1050" b="1" lang="zh-TW" dirty="0">
-                <a:solidFill>
-                  <a:srgbClr val="000000"/>
-                </a:solidFill>
-                <a:latin typeface="Arial Unicode MS"/>
-                <a:ea typeface="Arial Unicode MS"/>
-                <a:cs typeface="Arial Unicode MS"/>
-              </a:rPr>
-              <a:t>綠框</a:t>
-            </a:r>
-            <a:r>
-              <a:rPr sz="1050" lang="zh-TW" dirty="0">
-                <a:solidFill>
-                  <a:srgbClr val="000000"/>
-                </a:solidFill>
-                <a:latin typeface="Arial Unicode MS"/>
-                <a:ea typeface="Arial Unicode MS"/>
-                <a:cs typeface="Arial Unicode MS"/>
-              </a:rPr>
-              <a:t>，是框裡至少有一個雷達點的：路邊停的那幾台車，框裡都有紅圈。</a:t>
-            </a:r>
-            <a:r>
-              <a:rPr sz="1050" b="1" lang="zh-TW" dirty="0">
-                <a:solidFill>
-                  <a:srgbClr val="000000"/>
-                </a:solidFill>
-                <a:latin typeface="Arial Unicode MS"/>
-                <a:ea typeface="Arial Unicode MS"/>
-                <a:cs typeface="Arial Unicode MS"/>
-              </a:rPr>
-              <a:t>黃框</a:t>
-            </a:r>
-            <a:r>
-              <a:rPr sz="1050" lang="zh-TW" dirty="0">
-                <a:solidFill>
-                  <a:srgbClr val="000000"/>
-                </a:solidFill>
-                <a:latin typeface="Arial Unicode MS"/>
-                <a:ea typeface="Arial Unicode MS"/>
-                <a:cs typeface="Arial Unicode MS"/>
-              </a:rPr>
-              <a:t>，是一個雷達點都沒有的：四個行人，和好幾台遠處的車，大多在四十五公尺以外。這跟上一節那張統計表一樣：雷達抓得到近處的車，抓不太到人，車子一遠也開始漏。
+              <a:rPr sz="900" lang="zh-TW" dirty="0">
+                <a:solidFill>
+                  <a:srgbClr val="000000"/>
+                </a:solidFill>
+                <a:latin typeface="Arial Unicode MS"/>
+                <a:ea typeface="Arial Unicode MS"/>
+                <a:cs typeface="Arial Unicode MS"/>
+              </a:rPr>
+              <a:t>先說明左圖簡化了什麼。真正的後期融合，雷達會先把打在同一台車上的幾個點，整理成</a:t>
+            </a:r>
+            <a:r>
+              <a:rPr sz="900" b="1" lang="zh-TW" dirty="0">
+                <a:solidFill>
+                  <a:srgbClr val="000000"/>
+                </a:solidFill>
+                <a:latin typeface="Arial Unicode MS"/>
+                <a:ea typeface="Arial Unicode MS"/>
+                <a:cs typeface="Arial Unicode MS"/>
+              </a:rPr>
+              <a:t>一個目標</a:t>
+            </a:r>
+            <a:r>
+              <a:rPr sz="900" lang="zh-TW" dirty="0">
+                <a:solidFill>
+                  <a:srgbClr val="000000"/>
+                </a:solidFill>
+                <a:latin typeface="Arial Unicode MS"/>
+                <a:ea typeface="Arial Unicode MS"/>
+                <a:cs typeface="Arial Unicode MS"/>
+              </a:rPr>
+              <a:t>，例如「二十公尺、時速三十」；相機也先自己找出框。最後才是目標對框。這張圖為了讓大家看到原料，直接畫雷達點，框也是人工標註的，不是相機自己找的。雷達點落在哪個框裡，是雷達把點整理成目標之前的原料；等一下影片裡的小白方塊，就是整理好的目標。
 </a:t>
             </a:r>
           </a:p>
@@ -6291,41 +6313,63 @@
                 <a:spcPts val="0"/>
               </a:spcBef>
               <a:spcAft>
-                <a:spcPts val="175"/>
+                <a:spcPts val="150"/>
               </a:spcAft>
             </a:pPr>
             <a:r>
-              <a:rPr sz="1050" lang="zh-TW" dirty="0">
-                <a:solidFill>
-                  <a:srgbClr val="000000"/>
-                </a:solidFill>
-                <a:latin typeface="Arial Unicode MS"/>
-                <a:ea typeface="Arial Unicode MS"/>
-                <a:cs typeface="Arial Unicode MS"/>
-              </a:rPr>
-              <a:t>再看路的右邊，有一長排紅圈，排在人行道旁邊，沒有任何框。那多半是路邊的東西，可能是欄杆、樹、號誌桿。這些點不屬於任何一台標註的物體，對應的時候要</a:t>
-            </a:r>
-            <a:r>
-              <a:rPr sz="1050" b="1" lang="zh-TW" dirty="0">
-                <a:solidFill>
-                  <a:srgbClr val="000000"/>
-                </a:solidFill>
-                <a:latin typeface="Arial Unicode MS"/>
-                <a:ea typeface="Arial Unicode MS"/>
-                <a:cs typeface="Arial Unicode MS"/>
-              </a:rPr>
-              <a:t>正確地丟掉</a:t>
-            </a:r>
-            <a:r>
-              <a:rPr sz="1050" lang="zh-TW" dirty="0">
-                <a:solidFill>
-                  <a:srgbClr val="000000"/>
-                </a:solidFill>
-                <a:latin typeface="Arial Unicode MS"/>
-                <a:ea typeface="Arial Unicode MS"/>
-                <a:cs typeface="Arial Unicode MS"/>
-              </a:rPr>
-              <a:t>，不然就變成上一節講的幽靈煞車。
+              <a:rPr sz="900" lang="zh-TW" dirty="0">
+                <a:solidFill>
+                  <a:srgbClr val="000000"/>
+                </a:solidFill>
+                <a:latin typeface="Arial Unicode MS"/>
+                <a:ea typeface="Arial Unicode MS"/>
+                <a:cs typeface="Arial Unicode MS"/>
+              </a:rPr>
+              <a:t>看左圖，波士頓的一條街。框是官方標註的物體，紅圈是雷達點。</a:t>
+            </a:r>
+            <a:r>
+              <a:rPr sz="900" b="1" lang="zh-TW" dirty="0">
+                <a:solidFill>
+                  <a:srgbClr val="000000"/>
+                </a:solidFill>
+                <a:latin typeface="Arial Unicode MS"/>
+                <a:ea typeface="Arial Unicode MS"/>
+                <a:cs typeface="Arial Unicode MS"/>
+              </a:rPr>
+              <a:t>綠框</a:t>
+            </a:r>
+            <a:r>
+              <a:rPr sz="900" lang="zh-TW" dirty="0">
+                <a:solidFill>
+                  <a:srgbClr val="000000"/>
+                </a:solidFill>
+                <a:latin typeface="Arial Unicode MS"/>
+                <a:ea typeface="Arial Unicode MS"/>
+                <a:cs typeface="Arial Unicode MS"/>
+              </a:rPr>
+              <a:t>，是框裡至少有一個雷達點的：路邊停的那幾台車，框裡都有紅圈。</a:t>
+            </a:r>
+            <a:r>
+              <a:rPr sz="900" b="1" lang="zh-TW" dirty="0">
+                <a:solidFill>
+                  <a:srgbClr val="000000"/>
+                </a:solidFill>
+                <a:latin typeface="Arial Unicode MS"/>
+                <a:ea typeface="Arial Unicode MS"/>
+                <a:cs typeface="Arial Unicode MS"/>
+              </a:rPr>
+              <a:t>黃框</a:t>
+            </a:r>
+            <a:r>
+              <a:rPr sz="900" lang="zh-TW" dirty="0">
+                <a:solidFill>
+                  <a:srgbClr val="000000"/>
+                </a:solidFill>
+                <a:latin typeface="Arial Unicode MS"/>
+                <a:ea typeface="Arial Unicode MS"/>
+                <a:cs typeface="Arial Unicode MS"/>
+              </a:rPr>
+              <a:t>，是一個雷達點都沒有的：四個行人，和好幾台遠處的車，大多在四十五公尺以外。這跟上一節那張統計表一樣：雷達抓得到近處的車，抓不太到人，車子一遠也開始漏。
 </a:t>
             </a:r>
           </a:p>
@@ -6335,63 +6379,41 @@
                 <a:spcPts val="0"/>
               </a:spcBef>
               <a:spcAft>
-                <a:spcPts val="175"/>
+                <a:spcPts val="150"/>
               </a:spcAft>
             </a:pPr>
             <a:r>
-              <a:rPr sz="1050" lang="zh-TW" dirty="0">
-                <a:solidFill>
-                  <a:srgbClr val="000000"/>
-                </a:solidFill>
-                <a:latin typeface="Arial Unicode MS"/>
-                <a:ea typeface="Arial Unicode MS"/>
-                <a:cs typeface="Arial Unicode MS"/>
-              </a:rPr>
-              <a:t>怎麼對？最簡單的就是看</a:t>
-            </a:r>
-            <a:r>
-              <a:rPr sz="1050" b="1" lang="zh-TW" dirty="0">
-                <a:solidFill>
-                  <a:srgbClr val="000000"/>
-                </a:solidFill>
-                <a:latin typeface="Arial Unicode MS"/>
-                <a:ea typeface="Arial Unicode MS"/>
-                <a:cs typeface="Arial Unicode MS"/>
-              </a:rPr>
-              <a:t>位置</a:t>
-            </a:r>
-            <a:r>
-              <a:rPr sz="1050" lang="zh-TW" dirty="0">
-                <a:solidFill>
-                  <a:srgbClr val="000000"/>
-                </a:solidFill>
-                <a:latin typeface="Arial Unicode MS"/>
-                <a:ea typeface="Arial Unicode MS"/>
-                <a:cs typeface="Arial Unicode MS"/>
-              </a:rPr>
-              <a:t>：雷達點落在哪個框附近，就算它的。再加上</a:t>
-            </a:r>
-            <a:r>
-              <a:rPr sz="1050" b="1" lang="zh-TW" dirty="0">
-                <a:solidFill>
-                  <a:srgbClr val="000000"/>
-                </a:solidFill>
-                <a:latin typeface="Arial Unicode MS"/>
-                <a:ea typeface="Arial Unicode MS"/>
-                <a:cs typeface="Arial Unicode MS"/>
-              </a:rPr>
-              <a:t>速度</a:t>
-            </a:r>
-            <a:r>
-              <a:rPr sz="1050" lang="zh-TW" dirty="0">
-                <a:solidFill>
-                  <a:srgbClr val="000000"/>
-                </a:solidFill>
-                <a:latin typeface="Arial Unicode MS"/>
-                <a:ea typeface="Arial Unicode MS"/>
-                <a:cs typeface="Arial Unicode MS"/>
-              </a:rPr>
-              <a:t>：雷達量得到速度，一個靜止的點，不會是一台正在開的車。
+              <a:rPr sz="900" lang="zh-TW" dirty="0">
+                <a:solidFill>
+                  <a:srgbClr val="000000"/>
+                </a:solidFill>
+                <a:latin typeface="Arial Unicode MS"/>
+                <a:ea typeface="Arial Unicode MS"/>
+                <a:cs typeface="Arial Unicode MS"/>
+              </a:rPr>
+              <a:t>再看路的右邊，有一長排紅圈，排在人行道旁邊，沒有任何框。那多半是路邊的東西，可能是欄杆、樹、號誌桿。這些點不屬於任何一台標註的物體，對應的時候要</a:t>
+            </a:r>
+            <a:r>
+              <a:rPr sz="900" b="1" lang="zh-TW" dirty="0">
+                <a:solidFill>
+                  <a:srgbClr val="000000"/>
+                </a:solidFill>
+                <a:latin typeface="Arial Unicode MS"/>
+                <a:ea typeface="Arial Unicode MS"/>
+                <a:cs typeface="Arial Unicode MS"/>
+              </a:rPr>
+              <a:t>正確地丟掉</a:t>
+            </a:r>
+            <a:r>
+              <a:rPr sz="900" lang="zh-TW" dirty="0">
+                <a:solidFill>
+                  <a:srgbClr val="000000"/>
+                </a:solidFill>
+                <a:latin typeface="Arial Unicode MS"/>
+                <a:ea typeface="Arial Unicode MS"/>
+                <a:cs typeface="Arial Unicode MS"/>
+              </a:rPr>
+              <a:t>，不然就變成上一節講的幽靈煞車。
 </a:t>
             </a:r>
           </a:p>
@@ -6401,11 +6423,77 @@
                 <a:spcPts val="0"/>
               </a:spcBef>
               <a:spcAft>
-                <a:spcPts val="175"/>
+                <a:spcPts val="150"/>
               </a:spcAft>
             </a:pPr>
             <a:r>
-              <a:rPr sz="1050" lang="zh-TW" dirty="0">
+              <a:rPr sz="900" lang="zh-TW" dirty="0">
+                <a:solidFill>
+                  <a:srgbClr val="000000"/>
+                </a:solidFill>
+                <a:latin typeface="Arial Unicode MS"/>
+                <a:ea typeface="Arial Unicode MS"/>
+                <a:cs typeface="Arial Unicode MS"/>
+              </a:rPr>
+              <a:t>怎麼對？最簡單的就是看</a:t>
+            </a:r>
+            <a:r>
+              <a:rPr sz="900" b="1" lang="zh-TW" dirty="0">
+                <a:solidFill>
+                  <a:srgbClr val="000000"/>
+                </a:solidFill>
+                <a:latin typeface="Arial Unicode MS"/>
+                <a:ea typeface="Arial Unicode MS"/>
+                <a:cs typeface="Arial Unicode MS"/>
+              </a:rPr>
+              <a:t>位置</a:t>
+            </a:r>
+            <a:r>
+              <a:rPr sz="900" lang="zh-TW" dirty="0">
+                <a:solidFill>
+                  <a:srgbClr val="000000"/>
+                </a:solidFill>
+                <a:latin typeface="Arial Unicode MS"/>
+                <a:ea typeface="Arial Unicode MS"/>
+                <a:cs typeface="Arial Unicode MS"/>
+              </a:rPr>
+              <a:t>：雷達的目標落在哪個框附近，就算它的。再加上</a:t>
+            </a:r>
+            <a:r>
+              <a:rPr sz="900" b="1" lang="zh-TW" dirty="0">
+                <a:solidFill>
+                  <a:srgbClr val="000000"/>
+                </a:solidFill>
+                <a:latin typeface="Arial Unicode MS"/>
+                <a:ea typeface="Arial Unicode MS"/>
+                <a:cs typeface="Arial Unicode MS"/>
+              </a:rPr>
+              <a:t>速度</a:t>
+            </a:r>
+            <a:r>
+              <a:rPr sz="900" lang="zh-TW" dirty="0">
+                <a:solidFill>
+                  <a:srgbClr val="000000"/>
+                </a:solidFill>
+                <a:latin typeface="Arial Unicode MS"/>
+                <a:ea typeface="Arial Unicode MS"/>
+                <a:cs typeface="Arial Unicode MS"/>
+              </a:rPr>
+              <a:t>：雷達量得到速度，一個靜止的目標，不會是一台正在開的車。
+</a:t>
+            </a:r>
+          </a:p>
+          <a:p>
+            <a:pPr algn="l">
+              <a:spcBef>
+                <a:spcPts val="0"/>
+              </a:spcBef>
+              <a:spcAft>
+                <a:spcPts val="150"/>
+              </a:spcAft>
+            </a:pPr>
+            <a:r>
+              <a:rPr sz="900" lang="zh-TW" dirty="0">
                 <a:solidFill>
                   <a:srgbClr val="000000"/>
                 </a:solidFill>
@@ -6416,7 +6504,7 @@
               <a:t>看一支影片，NVIDIA 做自駕晶片的團隊。</a:t>
             </a:r>
             <a:r>
-              <a:rPr sz="1050" b="1" lang="zh-TW" dirty="0">
+              <a:rPr sz="900" b="1" lang="zh-TW" dirty="0">
                 <a:solidFill>
                   <a:srgbClr val="000000"/>
                 </a:solidFill>
@@ -6427,7 +6515,7 @@
               <a:t>從 0:42 播到 1:30。</a:t>
             </a:r>
             <a:r>
-              <a:rPr sz="1050" lang="zh-TW" dirty="0">
+              <a:rPr sz="900" lang="zh-TW" dirty="0">
                 <a:solidFill>
                   <a:srgbClr val="000000"/>
                 </a:solidFill>
@@ -6438,7 +6526,7 @@
               <a:t>英文，我邊播邊講。畫面是車子周圍幾台相機拼起來的；</a:t>
             </a:r>
             <a:r>
-              <a:rPr sz="1050" b="1" lang="zh-TW" dirty="0">
+              <a:rPr sz="900" b="1" lang="zh-TW" dirty="0">
                 <a:solidFill>
                   <a:srgbClr val="000000"/>
                 </a:solidFill>
@@ -6449,7 +6537,7 @@
               <a:t>0:47 小白方塊是雷達追蹤到的目標，橘色的線是它走過的路</a:t>
             </a:r>
             <a:r>
-              <a:rPr sz="1050" lang="zh-TW" dirty="0">
+              <a:rPr sz="900" lang="zh-TW" dirty="0">
                 <a:solidFill>
                   <a:srgbClr val="000000"/>
                 </a:solidFill>
@@ -6460,7 +6548,7 @@
               <a:t>。</a:t>
             </a:r>
             <a:r>
-              <a:rPr sz="1050" b="1" lang="zh-TW" dirty="0">
+              <a:rPr sz="900" b="1" lang="zh-TW" dirty="0">
                 <a:solidFill>
                   <a:srgbClr val="000000"/>
                 </a:solidFill>
@@ -6471,7 +6559,7 @@
               <a:t>0:52</a:t>
             </a:r>
             <a:r>
-              <a:rPr sz="1050" lang="zh-TW" dirty="0">
+              <a:rPr sz="900" lang="zh-TW" dirty="0">
                 <a:solidFill>
                   <a:srgbClr val="000000"/>
                 </a:solidFill>
@@ -6482,7 +6570,7 @@
               <a:t> 旁白說：相機框出來的物體，和雷達的目標對上之後，小方塊會變成綠色。</a:t>
             </a:r>
             <a:r>
-              <a:rPr sz="1050" b="1" lang="zh-TW" dirty="0">
+              <a:rPr sz="900" b="1" lang="zh-TW" dirty="0">
                 <a:solidFill>
                   <a:srgbClr val="000000"/>
                 </a:solidFill>
@@ -6493,7 +6581,7 @@
               <a:t>0:58</a:t>
             </a:r>
             <a:r>
-              <a:rPr sz="1050" lang="zh-TW" dirty="0">
+              <a:rPr sz="900" lang="zh-TW" dirty="0">
                 <a:solidFill>
                   <a:srgbClr val="000000"/>
                 </a:solidFill>
@@ -6504,7 +6592,7 @@
               <a:t> 旁白講了融合的好處：位置、速度、加速度，都變得更準、更可靠。</a:t>
             </a:r>
             <a:r>
-              <a:rPr sz="1050" b="1" lang="zh-TW" dirty="0">
+              <a:rPr sz="900" b="1" lang="zh-TW" dirty="0">
                 <a:solidFill>
                   <a:srgbClr val="000000"/>
                 </a:solidFill>
@@ -6515,7 +6603,7 @@
               <a:t>1:10</a:t>
             </a:r>
             <a:r>
-              <a:rPr sz="1050" lang="zh-TW" dirty="0">
+              <a:rPr sz="900" lang="zh-TW" dirty="0">
                 <a:solidFill>
                   <a:srgbClr val="000000"/>
                 </a:solidFill>
@@ -17859,7 +17947,7 @@
                 <a:ea typeface="Arial" pitchFamily="34" charset="-122"/>
                 <a:cs typeface="Arial" pitchFamily="34" charset="-120"/>
               </a:rPr>
-              <a:t>Ghép đôi: điểm radar nào thuộc về hộp nào? Dựa vào vị trí và tốc độ</a:t>
+              <a:t>Mục tiêu radar đi với hộp camera nào? Xem vị trí và tốc độ</a:t>
             </a:r>
             <a:endParaRPr lang="en-US" sz="2300" dirty="0"/>
           </a:p>
@@ -17879,7 +17967,7 @@
                 <a:ea typeface="微軟正黑體" pitchFamily="34" charset="-122"/>
                 <a:cs typeface="微軟正黑體" pitchFamily="34" charset="-120"/>
               </a:rPr>
-              <a:t>對應：哪一個雷達點，屬於哪一個框？看位置，也看速度</a:t>
+              <a:t>對應：雷達的目標，配哪一個相機的框？看位置，也看速度</a:t>
             </a:r>
             <a:endParaRPr lang="en-US" sz="2300" dirty="0"/>
           </a:p>
